--- a/downloads/presentations/modules/gov-340.pptx
+++ b/downloads/presentations/modules/gov-340.pptx
@@ -614,7 +614,8 @@
             <a:r>
               <a:rPr lang="en-US" dirty="0"/>
               <a:t>Technical and Operational Deep Dive
-Evidence management requires ownership and retention rules. Governance bodies should define who stores each artifact, where it is stored, how long it is retained, who can access it, and how evidence is updated when tools change. Audit readiness depends on consistent records, not scattered files and informal emails.</a:t>
+Evidence management requires ownership and retention rules. Governance bodies should define who stores each artifact, where it is stored, how long it is retained, who can access it, and how evidence is updated when tools change. Audit readiness depends on consistent records, not scattered files and informal emails.
+Application guidance: Connect the concept to public health purpose, responsible use, required safeguards, documentation, and the next action a department should take.</a:t>
             </a:r>
             <a:endParaRPr lang="en-US" dirty="0"/>
           </a:p>
@@ -705,7 +706,8 @@
               <a:t>Risks, Failure Modes, and Guardrails
 Risks and failure modes include the following:
 Approvals without records of conditions or rationale.
-Validation results stored informally or not retained.</a:t>
+Validation results stored informally or not retained.
+Application guidance: Identify what could go wrong, who could be affected, what safeguards are needed, and what evidence should be reviewed before use expands.</a:t>
             </a:r>
             <a:endParaRPr lang="en-US" dirty="0"/>
           </a:p>
@@ -796,7 +798,8 @@
               <a:t>Risks, Failure Modes, and Guardrails
 Vendor documentation accepted without agency review or local evidence.
 Incidents that cannot be reconstructed because logs or decisions were not preserved.
-Public records or audit responses delayed because artifacts are scattered.</a:t>
+Public records or audit responses delayed because artifacts are scattered.
+Application guidance: Identify what could go wrong, who could be affected, what safeguards are needed, and what evidence should be reviewed before use expands.</a:t>
             </a:r>
             <a:endParaRPr lang="en-US" dirty="0"/>
           </a:p>
@@ -887,7 +890,8 @@
               <a:t>Risks, Failure Modes, and Guardrails
 Recommended guardrails include the following:
 Maintain an AI evidence inventory for each approved AI use.
-Use decision logs for approvals, deferrals, conditions, changes, and retirement.</a:t>
+Use decision logs for approvals, deferrals, conditions, changes, and retirement.
+Application guidance: Identify what could go wrong, who could be affected, what safeguards are needed, and what evidence should be reviewed before use expands.</a:t>
             </a:r>
             <a:endParaRPr lang="en-US" dirty="0"/>
           </a:p>
@@ -978,7 +982,8 @@
               <a:t>Risks, Failure Modes, and Guardrails
 Preserve validation, testing, monitoring, training, SOP, and incident records.
 Assign artifact ownership and retention expectations.
-Review evidence completeness during periodic governance review.</a:t>
+Review evidence completeness during periodic governance review.
+Application guidance: Identify what could go wrong, who could be affected, what safeguards are needed, and what evidence should be reviewed before use expands.</a:t>
             </a:r>
             <a:endParaRPr lang="en-US" dirty="0"/>
           </a:p>
@@ -1069,7 +1074,8 @@
               <a:t>Reflection Questions
 Where does this topic appear in your agency, program, or workflow?
 Which staff roles would need to understand or apply this concept before AI use is approved?
-What could go wrong if this topic is not addressed before implementation?</a:t>
+What could go wrong if this topic is not addressed before implementation?
+Application guidance: Connect the concept to public health purpose, responsible use, required safeguards, documentation, and the next action a department should take.</a:t>
             </a:r>
             <a:endParaRPr lang="en-US" dirty="0"/>
           </a:p>
@@ -1159,7 +1165,8 @@
               <a:rPr lang="en-US" dirty="0"/>
               <a:t>Reflection Questions
 What evidence would governance, leadership, or operations staff need before moving forward?
-Which policy, data, equity, privacy, security, or workflow questions remain unresolved?</a:t>
+Which policy, data, equity, privacy, security, or workflow questions remain unresolved?
+Application guidance: Connect the concept to public health purpose, responsible use, required safeguards, documentation, and the next action a department should take.</a:t>
             </a:r>
             <a:endParaRPr lang="en-US" dirty="0"/>
           </a:p>
@@ -1248,7 +1255,8 @@
             <a:r>
               <a:rPr lang="en-US" dirty="0"/>
               <a:t>Practical Exercise
-Create an AI audit readiness evidence inventory for one AI use case. Identify required artifacts from intake through retirement, the owner of each artifact, storage location, retention expectation, update trigger, and current status.</a:t>
+Create an AI audit readiness evidence inventory for one AI use case. Identify required artifacts from intake through retirement, the owner of each artifact, storage location, retention expectation, update trigger, and current status.
+Application guidance: Use the assignment to test whether you can explain the concept, apply it to a realistic public health situation, and identify what would need review before the work moves forward.</a:t>
             </a:r>
             <a:endParaRPr lang="en-US" dirty="0"/>
           </a:p>
@@ -1339,7 +1347,8 @@
               <a:t>Expected Artifact or Evidence
 AI evidence inventory
 Decision log template
-Artifact ownership and retention table</a:t>
+Artifact ownership and retention table
+Application guidance: Connect the concept to public health purpose, responsible use, required safeguards, documentation, and the next action a department should take.</a:t>
             </a:r>
             <a:endParaRPr lang="en-US" dirty="0"/>
           </a:p>
@@ -1429,7 +1438,8 @@
               <a:rPr lang="en-US" dirty="0"/>
               <a:t>Expected Artifact or Evidence
 Gap list for missing evidence
-Review schedule</a:t>
+Review schedule
+Application guidance: Connect the concept to public health purpose, responsible use, required safeguards, documentation, and the next action a department should take.</a:t>
             </a:r>
             <a:endParaRPr lang="en-US" dirty="0"/>
           </a:p>
@@ -1614,7 +1624,8 @@
 Decision log template
 Artifact ownership and retention table
 Gap list for missing evidence
-Review schedule</a:t>
+Review schedule
+Application guidance: Use the assignment to test whether you can explain the concept, apply it to a realistic public health situation, and identify what would need review before the work moves forward.</a:t>
             </a:r>
             <a:endParaRPr lang="en-US" dirty="0"/>
           </a:p>
@@ -1707,7 +1718,8 @@
 2. Which record should be preserved from AI governance review?
 3. What is validation evidence?
 4. Why is operational evidence important?
-5. What is strong completion evidence?</a:t>
+5. What is strong completion evidence?
+Application guidance: Use the assignment to test whether you can explain the concept, apply it to a realistic public health situation, and identify what would need review before the work moves forward.</a:t>
             </a:r>
             <a:endParaRPr lang="en-US" dirty="0"/>
           </a:p>
@@ -1800,7 +1812,8 @@
 NIST Generative AI Profile: https://www.nist.gov/publications/artificial-intelligence-risk-management-framework-generative-artificial-intelligence
 CDC Public Health Data Strategy and Data Modernization resources: https://www.cdc.gov/public-health-data-strategy/php/about/index.html
 OWASP guidance for LLM application security
-Agency policies for privacy, cybersecurity, records, procurement, accessibility, and public communications</a:t>
+Agency policies for privacy, cybersecurity, records, procurement, accessibility, and public communications
+Application guidance: Connect the concept to public health purpose, responsible use, required safeguards, documentation, and the next action a department should take.</a:t>
             </a:r>
             <a:endParaRPr lang="en-US" dirty="0"/>
           </a:p>
@@ -1889,7 +1902,8 @@
             <a:r>
               <a:rPr lang="en-US" dirty="0"/>
               <a:t>References and Resources
-Relevant public health program SOPs, data governance documentation, and implementation plans</a:t>
+Relevant public health program SOPs, data governance documentation, and implementation plans
+Application guidance: Connect the concept to public health purpose, responsible use, required safeguards, documentation, and the next action a department should take.</a:t>
             </a:r>
             <a:endParaRPr lang="en-US" dirty="0"/>
           </a:p>
@@ -2168,7 +2182,8 @@
 Identify the core records that support AI audit readiness.
 Distinguish between approval evidence, validation evidence, operational evidence, and incident evidence.
 Create an AI evidence inventory for an approved or proposed use case.
-Develop retention, ownership, and review expectations for AI governance artifacts.</a:t>
+Develop retention, ownership, and review expectations for AI governance artifacts.
+Application guidance: Use the assignment to test whether you can explain the concept, apply it to a realistic public health situation, and identify what would need review before the work moves forward.</a:t>
             </a:r>
             <a:endParaRPr lang="en-US" dirty="0"/>
           </a:p>
@@ -2259,7 +2274,8 @@
               <a:t>Module Overview
 AI audit readiness is the agency’s ability to show what AI systems are used, why they were approved, what data they rely on, how they were evaluated, who is accountable, what safeguards are in place, and how issues are monitored and corrected. Public health agencies may need this evidence for internal oversight, public records requests, legal review, grant reporting, procurement monitoring, incident response, or public accountability.
 This module teaches governance, compliance, program, and leadership staff how to manage evidence across the AI lifecycle. The emphasis is practical: if a concern arises six months after deployment, the agency should be able to reconstruct the decision pathway, validation evidence, user guidance, vendor commitments, incidents, and changes over time.
-Audit readiness does not mean creating paperwork for its own sake. It means preserving enough evidence to demonstrate responsible decision-making, support improvement, and protect public trust.</a:t>
+Audit readiness does not mean creating paperwork for its own sake. It means preserving enough evidence to demonstrate responsible decision-making, support improvement, and protect public trust.
+Application guidance: Connect the concept to public health purpose, responsible use, required safeguards, documentation, and the next action a department should take.</a:t>
             </a:r>
             <a:endParaRPr lang="en-US" dirty="0"/>
           </a:p>
@@ -2348,7 +2364,8 @@
             <a:r>
               <a:rPr lang="en-US" dirty="0"/>
               <a:t>Jurisdiction and Agency Policy Note
-This module provides national-level training guidance for public health agencies and partners. It is not legal advice and does not replace review by agency legal counsel, privacy officers, procurement officials, civil rights staff, records officers, or other authorized decision-makers. Requirements may vary by state, locality, territory, Tribe, agency, funding source, data-sharing agreement, emergency authority, and organizational policy. Learners should use this module to identify the issues that require review and should confirm applicable requirements before approving, procuring, deploying, or publicly communicating about AI-supported work.</a:t>
+This module provides national-level training guidance for public health agencies and partners. It is not legal advice and does not replace review by agency legal counsel, privacy officers, procurement officials, civil rights staff, records officers, or other authorized decision-makers. Requirements may vary by state, locality, territory, Tribe, agency, funding source, data-sharing agreement, emergency authority, and organizational policy. Learners should use this module to identify the issues that require review and should confirm applicable requirements before approving, procuring, deploying, or publicly communicating about AI-supported work.
+Application guidance: Translate this concept into clear decision rights, review steps, documentation expectations, and escalation paths before an AI-supported workflow is approved.</a:t>
             </a:r>
             <a:endParaRPr lang="en-US" dirty="0"/>
           </a:p>
@@ -2437,7 +2454,8 @@
             <a:r>
               <a:rPr lang="en-US" dirty="0"/>
               <a:t>Public Health Example
-A health department uses an AI tool to help classify public inquiries. Six months later, a concern is raised that the tool may be misclassifying language access requests. Audit-ready evidence would include the approved use case, validation plan, subgroup review, SOP, training records, user override logs, incident reports, vendor documentation, and monitoring results. This evidence allows the agency to investigate the concern and decide whether to modify, pause, or retire the workflow.</a:t>
+A health department uses an AI tool to help classify public inquiries. Six months later, a concern is raised that the tool may be misclassifying language access requests. Audit-ready evidence would include the approved use case, validation plan, subgroup review, SOP, training records, user override logs, incident reports, vendor documentation, and monitoring results. This evidence allows the agency to investigate the concern and decide whether to modify, pause, or retire the workflow.
+Application guidance: Connect the concept to public health purpose, responsible use, required safeguards, documentation, and the next action a department should take.</a:t>
             </a:r>
             <a:endParaRPr lang="en-US" dirty="0"/>
           </a:p>
@@ -2528,7 +2546,8 @@
               <a:t>Technical and Operational Deep Dive
 AI evidence begins at intake. The agency should preserve the use case description, risk triage, required reviewers, approval conditions, and rationale for the decision. If a use case is rejected or deferred, that decision should also be documented. These early records help explain why a tool exists and what limits were placed on its use.
 Validation evidence should show how the agency determined whether the AI-supported workflow was fit for purpose. This may include test datasets, evaluation rubrics, accuracy measures, subgroup performance, user acceptance testing, security review, privacy review, accessibility review, and pilot findings. Validation evidence should be understandable to decision-makers, not only technical staff.
-Operational evidence should show what happened after deployment. This may include monitoring dashboards, user override rates, error reports, support tickets, incident records, model or prompt changes, vendor updates, SOP revisions, training completion, and governance meeting minutes. Operational evidence is especially important because AI performance and workflow use can change over time.</a:t>
+Operational evidence should show what happened after deployment. This may include monitoring dashboards, user override rates, error reports, support tickets, incident records, model or prompt changes, vendor updates, SOP revisions, training completion, and governance meeting minutes. Operational evidence is especially important because AI performance and workflow use can change over time.
+Application guidance: Connect the concept to public health purpose, responsible use, required safeguards, documentation, and the next action a department should take.</a:t>
             </a:r>
             <a:endParaRPr lang="en-US" dirty="0"/>
           </a:p>
@@ -3299,8 +3318,8 @@
         </p:nvSpPr>
         <p:spPr>
           <a:xfrm>
-            <a:off x="9966960" y="6537960"/>
-            <a:ext cx="1645920" cy="201168"/>
+            <a:off x="9646920" y="6537960"/>
+            <a:ext cx="1965960" cy="201168"/>
           </a:xfrm>
           <a:prstGeom prst="rect">
             <a:avLst/>
@@ -3324,7 +3343,7 @@
                 <a:ea typeface="Aptos" pitchFamily="34" charset="-122"/>
                 <a:cs typeface="Aptos" pitchFamily="34" charset="-120"/>
               </a:rPr>
-              <a:t>Â© Paula Soper</a:t>
+              <a:t>Copyright Paula Soper</a:t>
             </a:r>
             <a:endParaRPr lang="en-US" sz="800" dirty="0"/>
           </a:p>
@@ -3419,7 +3438,7 @@
         <p:spPr>
           <a:xfrm>
             <a:off x="868680" y="1508760"/>
-            <a:ext cx="6537960" cy="4160520"/>
+            <a:ext cx="6309360" cy="4160520"/>
           </a:xfrm>
           <a:prstGeom prst="rect">
             <a:avLst/>
@@ -3484,12 +3503,12 @@
         </p:nvSpPr>
         <p:spPr>
           <a:xfrm>
-            <a:off x="7909560" y="1417320"/>
-            <a:ext cx="3154680" cy="1828800"/>
+            <a:off x="7635240" y="1325880"/>
+            <a:ext cx="3474720" cy="1325880"/>
           </a:xfrm>
           <a:prstGeom prst="roundRect">
             <a:avLst>
-              <a:gd name="adj" fmla="val 6000"/>
+              <a:gd name="adj" fmla="val 8276"/>
             </a:avLst>
           </a:prstGeom>
           <a:solidFill>
@@ -3511,8 +3530,8 @@
         </p:nvSpPr>
         <p:spPr>
           <a:xfrm>
-            <a:off x="8074152" y="1563624"/>
-            <a:ext cx="2825496" cy="256032"/>
+            <a:off x="7799832" y="1472184"/>
+            <a:ext cx="3145536" cy="256032"/>
           </a:xfrm>
           <a:prstGeom prst="rect">
             <a:avLst/>
@@ -3536,7 +3555,7 @@
                 <a:ea typeface="Aptos" pitchFamily="34" charset="-122"/>
                 <a:cs typeface="Aptos" pitchFamily="34" charset="-120"/>
               </a:rPr>
-              <a:t>Key idea</a:t>
+              <a:t>Core concept</a:t>
             </a:r>
             <a:endParaRPr lang="en-US" sz="1300" dirty="0"/>
           </a:p>
@@ -3550,8 +3569,8 @@
         </p:nvSpPr>
         <p:spPr>
           <a:xfrm>
-            <a:off x="8074152" y="1920240"/>
-            <a:ext cx="2825496" cy="1188720"/>
+            <a:off x="7799832" y="1828800"/>
+            <a:ext cx="3145536" cy="685800"/>
           </a:xfrm>
           <a:prstGeom prst="rect">
             <a:avLst/>
@@ -3591,12 +3610,153 @@
         </p:nvSpPr>
         <p:spPr>
           <a:xfrm>
-            <a:off x="7909560" y="3520440"/>
-            <a:ext cx="3154680" cy="1737360"/>
+            <a:off x="7635240" y="2788920"/>
+            <a:ext cx="3474720" cy="1536192"/>
           </a:xfrm>
           <a:prstGeom prst="roundRect">
             <a:avLst>
-              <a:gd name="adj" fmla="val 6316"/>
+              <a:gd name="adj" fmla="val 7143"/>
+            </a:avLst>
+          </a:prstGeom>
+          <a:solidFill>
+            <a:srgbClr val="FFFFFF">
+              <a:alpha val="88000"/>
+            </a:srgbClr>
+          </a:solidFill>
+          <a:ln w="12700">
+            <a:solidFill>
+              <a:srgbClr val="D6E8F2"/>
+            </a:solidFill>
+            <a:prstDash val="solid"/>
+          </a:ln>
+        </p:spPr>
+      </p:sp>
+      <p:sp>
+        <p:nvSpPr>
+          <p:cNvPr id="14" name="Shape 12"/>
+          <p:cNvSpPr/>
+          <p:nvPr/>
+        </p:nvSpPr>
+        <p:spPr>
+          <a:xfrm>
+            <a:off x="8074152" y="3291840"/>
+            <a:ext cx="2596896" cy="749808"/>
+          </a:xfrm>
+          <a:prstGeom prst="rect">
+            <a:avLst/>
+          </a:prstGeom>
+          <a:solidFill>
+            <a:srgbClr val="EAF6F8"/>
+          </a:solidFill>
+          <a:ln w="12700">
+            <a:solidFill>
+              <a:srgbClr val="8ABBD8"/>
+            </a:solidFill>
+            <a:prstDash val="solid"/>
+          </a:ln>
+        </p:spPr>
+      </p:sp>
+      <p:sp>
+        <p:nvSpPr>
+          <p:cNvPr id="15" name="Shape 13"/>
+          <p:cNvSpPr/>
+          <p:nvPr/>
+        </p:nvSpPr>
+        <p:spPr>
+          <a:xfrm>
+            <a:off x="8202168" y="3721608"/>
+            <a:ext cx="2340864" cy="0"/>
+          </a:xfrm>
+          <a:prstGeom prst="line">
+            <a:avLst/>
+          </a:prstGeom>
+          <a:noFill/>
+          <a:ln w="19050">
+            <a:solidFill>
+              <a:srgbClr val="0068B7"/>
+            </a:solidFill>
+            <a:prstDash val="solid"/>
+          </a:ln>
+        </p:spPr>
+      </p:sp>
+      <p:sp>
+        <p:nvSpPr>
+          <p:cNvPr id="16" name="Shape 14"/>
+          <p:cNvSpPr/>
+          <p:nvPr/>
+        </p:nvSpPr>
+        <p:spPr>
+          <a:xfrm>
+            <a:off x="9198864" y="4206240"/>
+            <a:ext cx="347472" cy="347472"/>
+          </a:xfrm>
+          <a:prstGeom prst="ellipse">
+            <a:avLst/>
+          </a:prstGeom>
+          <a:solidFill>
+            <a:srgbClr val="2F8A28"/>
+          </a:solidFill>
+          <a:ln w="12700">
+            <a:solidFill>
+              <a:srgbClr val="2F8A28"/>
+            </a:solidFill>
+            <a:prstDash val="solid"/>
+          </a:ln>
+        </p:spPr>
+      </p:sp>
+      <p:sp>
+        <p:nvSpPr>
+          <p:cNvPr id="17" name="Text 15"/>
+          <p:cNvSpPr/>
+          <p:nvPr/>
+        </p:nvSpPr>
+        <p:spPr>
+          <a:xfrm>
+            <a:off x="7909560" y="3977640"/>
+            <a:ext cx="2926080" cy="182880"/>
+          </a:xfrm>
+          <a:prstGeom prst="rect">
+            <a:avLst/>
+          </a:prstGeom>
+          <a:noFill/>
+          <a:ln/>
+        </p:spPr>
+        <p:txBody>
+          <a:bodyPr wrap="square" lIns="0" tIns="0" rIns="0" bIns="0" rtlCol="0" anchor="ctr"/>
+          <a:lstStyle/>
+          <a:p>
+            <a:pPr algn="ctr" indent="0" marL="0">
+              <a:buNone/>
+            </a:pPr>
+            <a:r>
+              <a:rPr lang="en-US" sz="1000" dirty="0">
+                <a:solidFill>
+                  <a:srgbClr val="003A63"/>
+                </a:solidFill>
+                <a:latin typeface="Aptos" pitchFamily="34" charset="0"/>
+                <a:ea typeface="Aptos" pitchFamily="34" charset="-122"/>
+                <a:cs typeface="Aptos" pitchFamily="34" charset="-120"/>
+              </a:rPr>
+              <a:t>Concept to action</a:t>
+            </a:r>
+            <a:endParaRPr lang="en-US" sz="1000" dirty="0"/>
+          </a:p>
+        </p:txBody>
+      </p:sp>
+      <p:sp>
+        <p:nvSpPr>
+          <p:cNvPr id="18" name="Shape 16"/>
+          <p:cNvSpPr/>
+          <p:nvPr/>
+        </p:nvSpPr>
+        <p:spPr>
+          <a:xfrm>
+            <a:off x="7635240" y="4498848"/>
+            <a:ext cx="3474720" cy="1143000"/>
+          </a:xfrm>
+          <a:prstGeom prst="roundRect">
+            <a:avLst>
+              <a:gd name="adj" fmla="val 9600"/>
             </a:avLst>
           </a:prstGeom>
           <a:solidFill>
@@ -3612,14 +3772,14 @@
       </p:sp>
       <p:sp>
         <p:nvSpPr>
-          <p:cNvPr id="14" name="Text 12"/>
-          <p:cNvSpPr/>
-          <p:nvPr/>
-        </p:nvSpPr>
-        <p:spPr>
-          <a:xfrm>
-            <a:off x="8074152" y="3666744"/>
-            <a:ext cx="2825496" cy="256032"/>
+          <p:cNvPr id="19" name="Text 17"/>
+          <p:cNvSpPr/>
+          <p:nvPr/>
+        </p:nvSpPr>
+        <p:spPr>
+          <a:xfrm>
+            <a:off x="7799832" y="4645152"/>
+            <a:ext cx="3145536" cy="256032"/>
           </a:xfrm>
           <a:prstGeom prst="rect">
             <a:avLst/>
@@ -3643,7 +3803,7 @@
                 <a:ea typeface="Aptos" pitchFamily="34" charset="-122"/>
                 <a:cs typeface="Aptos" pitchFamily="34" charset="-120"/>
               </a:rPr>
-              <a:t>Use this for</a:t>
+              <a:t>Apply it</a:t>
             </a:r>
             <a:endParaRPr lang="en-US" sz="1300" dirty="0"/>
           </a:p>
@@ -3651,14 +3811,14 @@
       </p:sp>
       <p:sp>
         <p:nvSpPr>
-          <p:cNvPr id="15" name="Text 13"/>
-          <p:cNvSpPr/>
-          <p:nvPr/>
-        </p:nvSpPr>
-        <p:spPr>
-          <a:xfrm>
-            <a:off x="8074152" y="4023360"/>
-            <a:ext cx="2825496" cy="1097280"/>
+          <p:cNvPr id="20" name="Text 18"/>
+          <p:cNvSpPr/>
+          <p:nvPr/>
+        </p:nvSpPr>
+        <p:spPr>
+          <a:xfrm>
+            <a:off x="7799832" y="5001768"/>
+            <a:ext cx="3145536" cy="502920"/>
           </a:xfrm>
           <a:prstGeom prst="rect">
             <a:avLst/>
@@ -3684,7 +3844,7 @@
                 <a:ea typeface="Aptos" pitchFamily="34" charset="-122"/>
                 <a:cs typeface="Aptos" pitchFamily="34" charset="-120"/>
               </a:rPr>
-              <a:t>Connect the concept to public health decisions, safeguards, documentation, or implementation work.</a:t>
+              <a:t>Connect the concept to public health purpose, responsible use, required safeguards, documentation, and the next action a department should take.</a:t>
             </a:r>
             <a:endParaRPr lang="en-US" sz="1550" dirty="0"/>
           </a:p>
@@ -3858,8 +4018,8 @@
         </p:nvSpPr>
         <p:spPr>
           <a:xfrm>
-            <a:off x="9966960" y="6537960"/>
-            <a:ext cx="1645920" cy="201168"/>
+            <a:off x="9646920" y="6537960"/>
+            <a:ext cx="1965960" cy="201168"/>
           </a:xfrm>
           <a:prstGeom prst="rect">
             <a:avLst/>
@@ -3883,7 +4043,7 @@
                 <a:ea typeface="Aptos" pitchFamily="34" charset="-122"/>
                 <a:cs typeface="Aptos" pitchFamily="34" charset="-120"/>
               </a:rPr>
-              <a:t>Â© Paula Soper</a:t>
+              <a:t>Copyright Paula Soper</a:t>
             </a:r>
             <a:endParaRPr lang="en-US" sz="800" dirty="0"/>
           </a:p>
@@ -3930,77 +4090,13 @@
       </p:sp>
       <p:sp>
         <p:nvSpPr>
-          <p:cNvPr id="8" name="Shape 6"/>
+          <p:cNvPr id="8" name="Text 6"/>
           <p:cNvSpPr/>
           <p:nvPr/>
         </p:nvSpPr>
         <p:spPr>
           <a:xfrm>
             <a:off x="640080" y="658368"/>
-            <a:ext cx="420624" cy="420624"/>
-          </a:xfrm>
-          <a:prstGeom prst="ellipse">
-            <a:avLst/>
-          </a:prstGeom>
-          <a:solidFill>
-            <a:srgbClr val="0068B7"/>
-          </a:solidFill>
-          <a:ln w="12700">
-            <a:solidFill>
-              <a:srgbClr val="0068B7"/>
-            </a:solidFill>
-            <a:prstDash val="solid"/>
-          </a:ln>
-        </p:spPr>
-      </p:sp>
-      <p:sp>
-        <p:nvSpPr>
-          <p:cNvPr id="9" name="Text 7"/>
-          <p:cNvSpPr/>
-          <p:nvPr/>
-        </p:nvSpPr>
-        <p:spPr>
-          <a:xfrm>
-            <a:off x="640080" y="731520"/>
-            <a:ext cx="420624" cy="164592"/>
-          </a:xfrm>
-          <a:prstGeom prst="rect">
-            <a:avLst/>
-          </a:prstGeom>
-          <a:noFill/>
-          <a:ln/>
-        </p:spPr>
-        <p:txBody>
-          <a:bodyPr wrap="square" lIns="0" tIns="0" rIns="0" bIns="0" rtlCol="0" anchor="ctr"/>
-          <a:lstStyle/>
-          <a:p>
-            <a:pPr algn="ctr" indent="0" marL="0">
-              <a:buNone/>
-            </a:pPr>
-            <a:r>
-              <a:rPr lang="en-US" sz="1100" b="1" dirty="0">
-                <a:solidFill>
-                  <a:srgbClr val="FFFFFF"/>
-                </a:solidFill>
-                <a:latin typeface="Aptos" pitchFamily="34" charset="0"/>
-                <a:ea typeface="Aptos" pitchFamily="34" charset="-122"/>
-                <a:cs typeface="Aptos" pitchFamily="34" charset="-120"/>
-              </a:rPr>
-              <a:t>6</a:t>
-            </a:r>
-            <a:endParaRPr lang="en-US" sz="1100" dirty="0"/>
-          </a:p>
-        </p:txBody>
-      </p:sp>
-      <p:sp>
-        <p:nvSpPr>
-          <p:cNvPr id="10" name="Text 8"/>
-          <p:cNvSpPr/>
-          <p:nvPr/>
-        </p:nvSpPr>
-        <p:spPr>
-          <a:xfrm>
-            <a:off x="640080" y="621792"/>
             <a:ext cx="10881360" cy="713232"/>
           </a:xfrm>
           <a:prstGeom prst="rect">
@@ -4035,14 +4131,14 @@
       </p:sp>
       <p:sp>
         <p:nvSpPr>
-          <p:cNvPr id="11" name="Text 9"/>
+          <p:cNvPr id="9" name="Text 7"/>
           <p:cNvSpPr/>
           <p:nvPr/>
         </p:nvSpPr>
         <p:spPr>
           <a:xfrm>
             <a:off x="868680" y="1508760"/>
-            <a:ext cx="6537960" cy="4160520"/>
+            <a:ext cx="6309360" cy="4160520"/>
           </a:xfrm>
           <a:prstGeom prst="rect">
             <a:avLst/>
@@ -4101,18 +4197,18 @@
       </p:sp>
       <p:sp>
         <p:nvSpPr>
-          <p:cNvPr id="12" name="Shape 10"/>
-          <p:cNvSpPr/>
-          <p:nvPr/>
-        </p:nvSpPr>
-        <p:spPr>
-          <a:xfrm>
-            <a:off x="7909560" y="1417320"/>
-            <a:ext cx="3154680" cy="1828800"/>
+          <p:cNvPr id="10" name="Shape 8"/>
+          <p:cNvSpPr/>
+          <p:nvPr/>
+        </p:nvSpPr>
+        <p:spPr>
+          <a:xfrm>
+            <a:off x="7635240" y="1325880"/>
+            <a:ext cx="3474720" cy="1325880"/>
           </a:xfrm>
           <a:prstGeom prst="roundRect">
             <a:avLst>
-              <a:gd name="adj" fmla="val 6000"/>
+              <a:gd name="adj" fmla="val 8276"/>
             </a:avLst>
           </a:prstGeom>
           <a:solidFill>
@@ -4128,14 +4224,14 @@
       </p:sp>
       <p:sp>
         <p:nvSpPr>
-          <p:cNvPr id="13" name="Text 11"/>
-          <p:cNvSpPr/>
-          <p:nvPr/>
-        </p:nvSpPr>
-        <p:spPr>
-          <a:xfrm>
-            <a:off x="8074152" y="1563624"/>
-            <a:ext cx="2825496" cy="256032"/>
+          <p:cNvPr id="11" name="Text 9"/>
+          <p:cNvSpPr/>
+          <p:nvPr/>
+        </p:nvSpPr>
+        <p:spPr>
+          <a:xfrm>
+            <a:off x="7799832" y="1472184"/>
+            <a:ext cx="3145536" cy="256032"/>
           </a:xfrm>
           <a:prstGeom prst="rect">
             <a:avLst/>
@@ -4159,7 +4255,7 @@
                 <a:ea typeface="Aptos" pitchFamily="34" charset="-122"/>
                 <a:cs typeface="Aptos" pitchFamily="34" charset="-120"/>
               </a:rPr>
-              <a:t>Key idea</a:t>
+              <a:t>Risk check</a:t>
             </a:r>
             <a:endParaRPr lang="en-US" sz="1300" dirty="0"/>
           </a:p>
@@ -4167,14 +4263,14 @@
       </p:sp>
       <p:sp>
         <p:nvSpPr>
-          <p:cNvPr id="14" name="Text 12"/>
-          <p:cNvSpPr/>
-          <p:nvPr/>
-        </p:nvSpPr>
-        <p:spPr>
-          <a:xfrm>
-            <a:off x="8074152" y="1920240"/>
-            <a:ext cx="2825496" cy="1188720"/>
+          <p:cNvPr id="12" name="Text 10"/>
+          <p:cNvSpPr/>
+          <p:nvPr/>
+        </p:nvSpPr>
+        <p:spPr>
+          <a:xfrm>
+            <a:off x="7799832" y="1828800"/>
+            <a:ext cx="3145536" cy="685800"/>
           </a:xfrm>
           <a:prstGeom prst="rect">
             <a:avLst/>
@@ -4208,18 +4304,171 @@
       </p:sp>
       <p:sp>
         <p:nvSpPr>
-          <p:cNvPr id="15" name="Shape 13"/>
-          <p:cNvSpPr/>
-          <p:nvPr/>
-        </p:nvSpPr>
-        <p:spPr>
-          <a:xfrm>
-            <a:off x="7909560" y="3520440"/>
-            <a:ext cx="3154680" cy="1737360"/>
+          <p:cNvPr id="13" name="Shape 11"/>
+          <p:cNvSpPr/>
+          <p:nvPr/>
+        </p:nvSpPr>
+        <p:spPr>
+          <a:xfrm>
+            <a:off x="7635240" y="2788920"/>
+            <a:ext cx="3474720" cy="1536192"/>
           </a:xfrm>
           <a:prstGeom prst="roundRect">
             <a:avLst>
-              <a:gd name="adj" fmla="val 6316"/>
+              <a:gd name="adj" fmla="val 7143"/>
+            </a:avLst>
+          </a:prstGeom>
+          <a:solidFill>
+            <a:srgbClr val="FFFFFF">
+              <a:alpha val="88000"/>
+            </a:srgbClr>
+          </a:solidFill>
+          <a:ln w="12700">
+            <a:solidFill>
+              <a:srgbClr val="D6E8F2"/>
+            </a:solidFill>
+            <a:prstDash val="solid"/>
+          </a:ln>
+        </p:spPr>
+      </p:sp>
+      <p:sp>
+        <p:nvSpPr>
+          <p:cNvPr id="14" name="Shape 12"/>
+          <p:cNvSpPr/>
+          <p:nvPr/>
+        </p:nvSpPr>
+        <p:spPr>
+          <a:xfrm>
+            <a:off x="8046720" y="3108960"/>
+            <a:ext cx="2651760" cy="896112"/>
+          </a:xfrm>
+          <a:prstGeom prst="arc">
+            <a:avLst/>
+          </a:prstGeom>
+          <a:noFill/>
+          <a:ln w="25400">
+            <a:solidFill>
+              <a:srgbClr val="0068B7"/>
+            </a:solidFill>
+            <a:prstDash val="solid"/>
+          </a:ln>
+        </p:spPr>
+      </p:sp>
+      <p:sp>
+        <p:nvSpPr>
+          <p:cNvPr id="15" name="Text 13"/>
+          <p:cNvSpPr/>
+          <p:nvPr/>
+        </p:nvSpPr>
+        <p:spPr>
+          <a:xfrm>
+            <a:off x="7909560" y="3099816"/>
+            <a:ext cx="2926080" cy="256032"/>
+          </a:xfrm>
+          <a:prstGeom prst="rect">
+            <a:avLst/>
+          </a:prstGeom>
+          <a:noFill/>
+          <a:ln/>
+        </p:spPr>
+        <p:txBody>
+          <a:bodyPr wrap="square" lIns="0" tIns="0" rIns="0" bIns="0" rtlCol="0" anchor="ctr"/>
+          <a:lstStyle/>
+          <a:p>
+            <a:pPr algn="ctr" indent="0" marL="0">
+              <a:buNone/>
+            </a:pPr>
+            <a:r>
+              <a:rPr lang="en-US" sz="1500" b="1" dirty="0">
+                <a:solidFill>
+                  <a:srgbClr val="003A63"/>
+                </a:solidFill>
+                <a:latin typeface="Aptos" pitchFamily="34" charset="0"/>
+                <a:ea typeface="Aptos" pitchFamily="34" charset="-122"/>
+                <a:cs typeface="Aptos" pitchFamily="34" charset="-120"/>
+              </a:rPr>
+              <a:t>Risk</a:t>
+            </a:r>
+            <a:endParaRPr lang="en-US" sz="1500" dirty="0"/>
+          </a:p>
+        </p:txBody>
+      </p:sp>
+      <p:sp>
+        <p:nvSpPr>
+          <p:cNvPr id="16" name="Shape 14"/>
+          <p:cNvSpPr/>
+          <p:nvPr/>
+        </p:nvSpPr>
+        <p:spPr>
+          <a:xfrm>
+            <a:off x="8366760" y="3639312"/>
+            <a:ext cx="2011680" cy="0"/>
+          </a:xfrm>
+          <a:prstGeom prst="line">
+            <a:avLst/>
+          </a:prstGeom>
+          <a:noFill/>
+          <a:ln w="63500">
+            <a:solidFill>
+              <a:srgbClr val="2F8A28"/>
+            </a:solidFill>
+            <a:prstDash val="solid"/>
+          </a:ln>
+        </p:spPr>
+      </p:sp>
+      <p:sp>
+        <p:nvSpPr>
+          <p:cNvPr id="17" name="Text 15"/>
+          <p:cNvSpPr/>
+          <p:nvPr/>
+        </p:nvSpPr>
+        <p:spPr>
+          <a:xfrm>
+            <a:off x="7909560" y="3849624"/>
+            <a:ext cx="2926080" cy="164592"/>
+          </a:xfrm>
+          <a:prstGeom prst="rect">
+            <a:avLst/>
+          </a:prstGeom>
+          <a:noFill/>
+          <a:ln/>
+        </p:spPr>
+        <p:txBody>
+          <a:bodyPr wrap="square" lIns="0" tIns="0" rIns="0" bIns="0" rtlCol="0" anchor="ctr"/>
+          <a:lstStyle/>
+          <a:p>
+            <a:pPr algn="ctr" indent="0" marL="0">
+              <a:buNone/>
+            </a:pPr>
+            <a:r>
+              <a:rPr lang="en-US" sz="900" dirty="0">
+                <a:solidFill>
+                  <a:srgbClr val="003A63"/>
+                </a:solidFill>
+                <a:latin typeface="Aptos" pitchFamily="34" charset="0"/>
+                <a:ea typeface="Aptos" pitchFamily="34" charset="-122"/>
+                <a:cs typeface="Aptos" pitchFamily="34" charset="-120"/>
+              </a:rPr>
+              <a:t>Human review</a:t>
+            </a:r>
+            <a:endParaRPr lang="en-US" sz="900" dirty="0"/>
+          </a:p>
+        </p:txBody>
+      </p:sp>
+      <p:sp>
+        <p:nvSpPr>
+          <p:cNvPr id="18" name="Shape 16"/>
+          <p:cNvSpPr/>
+          <p:nvPr/>
+        </p:nvSpPr>
+        <p:spPr>
+          <a:xfrm>
+            <a:off x="7635240" y="4498848"/>
+            <a:ext cx="3474720" cy="1143000"/>
+          </a:xfrm>
+          <a:prstGeom prst="roundRect">
+            <a:avLst>
+              <a:gd name="adj" fmla="val 9600"/>
             </a:avLst>
           </a:prstGeom>
           <a:solidFill>
@@ -4235,14 +4484,14 @@
       </p:sp>
       <p:sp>
         <p:nvSpPr>
-          <p:cNvPr id="16" name="Text 14"/>
-          <p:cNvSpPr/>
-          <p:nvPr/>
-        </p:nvSpPr>
-        <p:spPr>
-          <a:xfrm>
-            <a:off x="8074152" y="3666744"/>
-            <a:ext cx="2825496" cy="256032"/>
+          <p:cNvPr id="19" name="Text 17"/>
+          <p:cNvSpPr/>
+          <p:nvPr/>
+        </p:nvSpPr>
+        <p:spPr>
+          <a:xfrm>
+            <a:off x="7799832" y="4645152"/>
+            <a:ext cx="3145536" cy="256032"/>
           </a:xfrm>
           <a:prstGeom prst="rect">
             <a:avLst/>
@@ -4266,7 +4515,7 @@
                 <a:ea typeface="Aptos" pitchFamily="34" charset="-122"/>
                 <a:cs typeface="Aptos" pitchFamily="34" charset="-120"/>
               </a:rPr>
-              <a:t>Use this for</a:t>
+              <a:t>Safeguard to plan</a:t>
             </a:r>
             <a:endParaRPr lang="en-US" sz="1300" dirty="0"/>
           </a:p>
@@ -4274,14 +4523,14 @@
       </p:sp>
       <p:sp>
         <p:nvSpPr>
-          <p:cNvPr id="17" name="Text 15"/>
-          <p:cNvSpPr/>
-          <p:nvPr/>
-        </p:nvSpPr>
-        <p:spPr>
-          <a:xfrm>
-            <a:off x="8074152" y="4023360"/>
-            <a:ext cx="2825496" cy="1097280"/>
+          <p:cNvPr id="20" name="Text 18"/>
+          <p:cNvSpPr/>
+          <p:nvPr/>
+        </p:nvSpPr>
+        <p:spPr>
+          <a:xfrm>
+            <a:off x="7799832" y="5001768"/>
+            <a:ext cx="3145536" cy="502920"/>
           </a:xfrm>
           <a:prstGeom prst="rect">
             <a:avLst/>
@@ -4307,7 +4556,7 @@
                 <a:ea typeface="Aptos" pitchFamily="34" charset="-122"/>
                 <a:cs typeface="Aptos" pitchFamily="34" charset="-120"/>
               </a:rPr>
-              <a:t>Connect the concept to public health decisions, safeguards, documentation, or implementation work.</a:t>
+              <a:t>Identify what could go wrong, who could be affected, what safeguards are needed, and what evidence should be reviewed before use expands.</a:t>
             </a:r>
             <a:endParaRPr lang="en-US" sz="1550" dirty="0"/>
           </a:p>
@@ -4481,8 +4730,8 @@
         </p:nvSpPr>
         <p:spPr>
           <a:xfrm>
-            <a:off x="9966960" y="6537960"/>
-            <a:ext cx="1645920" cy="201168"/>
+            <a:off x="9646920" y="6537960"/>
+            <a:ext cx="1965960" cy="201168"/>
           </a:xfrm>
           <a:prstGeom prst="rect">
             <a:avLst/>
@@ -4506,7 +4755,7 @@
                 <a:ea typeface="Aptos" pitchFamily="34" charset="-122"/>
                 <a:cs typeface="Aptos" pitchFamily="34" charset="-120"/>
               </a:rPr>
-              <a:t>Â© Paula Soper</a:t>
+              <a:t>Copyright Paula Soper</a:t>
             </a:r>
             <a:endParaRPr lang="en-US" sz="800" dirty="0"/>
           </a:p>
@@ -4601,7 +4850,7 @@
         <p:spPr>
           <a:xfrm>
             <a:off x="868680" y="1508760"/>
-            <a:ext cx="6537960" cy="4160520"/>
+            <a:ext cx="6309360" cy="4160520"/>
           </a:xfrm>
           <a:prstGeom prst="rect">
             <a:avLst/>
@@ -4666,12 +4915,12 @@
         </p:nvSpPr>
         <p:spPr>
           <a:xfrm>
-            <a:off x="7909560" y="1417320"/>
-            <a:ext cx="3154680" cy="1828800"/>
+            <a:off x="7635240" y="1325880"/>
+            <a:ext cx="3474720" cy="1325880"/>
           </a:xfrm>
           <a:prstGeom prst="roundRect">
             <a:avLst>
-              <a:gd name="adj" fmla="val 6000"/>
+              <a:gd name="adj" fmla="val 8276"/>
             </a:avLst>
           </a:prstGeom>
           <a:solidFill>
@@ -4693,8 +4942,8 @@
         </p:nvSpPr>
         <p:spPr>
           <a:xfrm>
-            <a:off x="8074152" y="1563624"/>
-            <a:ext cx="2825496" cy="256032"/>
+            <a:off x="7799832" y="1472184"/>
+            <a:ext cx="3145536" cy="256032"/>
           </a:xfrm>
           <a:prstGeom prst="rect">
             <a:avLst/>
@@ -4718,7 +4967,7 @@
                 <a:ea typeface="Aptos" pitchFamily="34" charset="-122"/>
                 <a:cs typeface="Aptos" pitchFamily="34" charset="-120"/>
               </a:rPr>
-              <a:t>Key idea</a:t>
+              <a:t>Risk check</a:t>
             </a:r>
             <a:endParaRPr lang="en-US" sz="1300" dirty="0"/>
           </a:p>
@@ -4732,8 +4981,8 @@
         </p:nvSpPr>
         <p:spPr>
           <a:xfrm>
-            <a:off x="8074152" y="1920240"/>
-            <a:ext cx="2825496" cy="1188720"/>
+            <a:off x="7799832" y="1828800"/>
+            <a:ext cx="3145536" cy="685800"/>
           </a:xfrm>
           <a:prstGeom prst="rect">
             <a:avLst/>
@@ -4773,12 +5022,165 @@
         </p:nvSpPr>
         <p:spPr>
           <a:xfrm>
-            <a:off x="7909560" y="3520440"/>
-            <a:ext cx="3154680" cy="1737360"/>
+            <a:off x="7635240" y="2788920"/>
+            <a:ext cx="3474720" cy="1536192"/>
           </a:xfrm>
           <a:prstGeom prst="roundRect">
             <a:avLst>
-              <a:gd name="adj" fmla="val 6316"/>
+              <a:gd name="adj" fmla="val 7143"/>
+            </a:avLst>
+          </a:prstGeom>
+          <a:solidFill>
+            <a:srgbClr val="FFFFFF">
+              <a:alpha val="88000"/>
+            </a:srgbClr>
+          </a:solidFill>
+          <a:ln w="12700">
+            <a:solidFill>
+              <a:srgbClr val="D6E8F2"/>
+            </a:solidFill>
+            <a:prstDash val="solid"/>
+          </a:ln>
+        </p:spPr>
+      </p:sp>
+      <p:sp>
+        <p:nvSpPr>
+          <p:cNvPr id="14" name="Shape 12"/>
+          <p:cNvSpPr/>
+          <p:nvPr/>
+        </p:nvSpPr>
+        <p:spPr>
+          <a:xfrm>
+            <a:off x="8046720" y="3108960"/>
+            <a:ext cx="2651760" cy="896112"/>
+          </a:xfrm>
+          <a:prstGeom prst="arc">
+            <a:avLst/>
+          </a:prstGeom>
+          <a:noFill/>
+          <a:ln w="25400">
+            <a:solidFill>
+              <a:srgbClr val="0068B7"/>
+            </a:solidFill>
+            <a:prstDash val="solid"/>
+          </a:ln>
+        </p:spPr>
+      </p:sp>
+      <p:sp>
+        <p:nvSpPr>
+          <p:cNvPr id="15" name="Text 13"/>
+          <p:cNvSpPr/>
+          <p:nvPr/>
+        </p:nvSpPr>
+        <p:spPr>
+          <a:xfrm>
+            <a:off x="7909560" y="3099816"/>
+            <a:ext cx="2926080" cy="256032"/>
+          </a:xfrm>
+          <a:prstGeom prst="rect">
+            <a:avLst/>
+          </a:prstGeom>
+          <a:noFill/>
+          <a:ln/>
+        </p:spPr>
+        <p:txBody>
+          <a:bodyPr wrap="square" lIns="0" tIns="0" rIns="0" bIns="0" rtlCol="0" anchor="ctr"/>
+          <a:lstStyle/>
+          <a:p>
+            <a:pPr algn="ctr" indent="0" marL="0">
+              <a:buNone/>
+            </a:pPr>
+            <a:r>
+              <a:rPr lang="en-US" sz="1500" b="1" dirty="0">
+                <a:solidFill>
+                  <a:srgbClr val="003A63"/>
+                </a:solidFill>
+                <a:latin typeface="Aptos" pitchFamily="34" charset="0"/>
+                <a:ea typeface="Aptos" pitchFamily="34" charset="-122"/>
+                <a:cs typeface="Aptos" pitchFamily="34" charset="-120"/>
+              </a:rPr>
+              <a:t>Risk</a:t>
+            </a:r>
+            <a:endParaRPr lang="en-US" sz="1500" dirty="0"/>
+          </a:p>
+        </p:txBody>
+      </p:sp>
+      <p:sp>
+        <p:nvSpPr>
+          <p:cNvPr id="16" name="Shape 14"/>
+          <p:cNvSpPr/>
+          <p:nvPr/>
+        </p:nvSpPr>
+        <p:spPr>
+          <a:xfrm>
+            <a:off x="8366760" y="3639312"/>
+            <a:ext cx="2011680" cy="0"/>
+          </a:xfrm>
+          <a:prstGeom prst="line">
+            <a:avLst/>
+          </a:prstGeom>
+          <a:noFill/>
+          <a:ln w="63500">
+            <a:solidFill>
+              <a:srgbClr val="2F8A28"/>
+            </a:solidFill>
+            <a:prstDash val="solid"/>
+          </a:ln>
+        </p:spPr>
+      </p:sp>
+      <p:sp>
+        <p:nvSpPr>
+          <p:cNvPr id="17" name="Text 15"/>
+          <p:cNvSpPr/>
+          <p:nvPr/>
+        </p:nvSpPr>
+        <p:spPr>
+          <a:xfrm>
+            <a:off x="7909560" y="3849624"/>
+            <a:ext cx="2926080" cy="164592"/>
+          </a:xfrm>
+          <a:prstGeom prst="rect">
+            <a:avLst/>
+          </a:prstGeom>
+          <a:noFill/>
+          <a:ln/>
+        </p:spPr>
+        <p:txBody>
+          <a:bodyPr wrap="square" lIns="0" tIns="0" rIns="0" bIns="0" rtlCol="0" anchor="ctr"/>
+          <a:lstStyle/>
+          <a:p>
+            <a:pPr algn="ctr" indent="0" marL="0">
+              <a:buNone/>
+            </a:pPr>
+            <a:r>
+              <a:rPr lang="en-US" sz="900" dirty="0">
+                <a:solidFill>
+                  <a:srgbClr val="003A63"/>
+                </a:solidFill>
+                <a:latin typeface="Aptos" pitchFamily="34" charset="0"/>
+                <a:ea typeface="Aptos" pitchFamily="34" charset="-122"/>
+                <a:cs typeface="Aptos" pitchFamily="34" charset="-120"/>
+              </a:rPr>
+              <a:t>Human review</a:t>
+            </a:r>
+            <a:endParaRPr lang="en-US" sz="900" dirty="0"/>
+          </a:p>
+        </p:txBody>
+      </p:sp>
+      <p:sp>
+        <p:nvSpPr>
+          <p:cNvPr id="18" name="Shape 16"/>
+          <p:cNvSpPr/>
+          <p:nvPr/>
+        </p:nvSpPr>
+        <p:spPr>
+          <a:xfrm>
+            <a:off x="7635240" y="4498848"/>
+            <a:ext cx="3474720" cy="1143000"/>
+          </a:xfrm>
+          <a:prstGeom prst="roundRect">
+            <a:avLst>
+              <a:gd name="adj" fmla="val 9600"/>
             </a:avLst>
           </a:prstGeom>
           <a:solidFill>
@@ -4794,14 +5196,14 @@
       </p:sp>
       <p:sp>
         <p:nvSpPr>
-          <p:cNvPr id="14" name="Text 12"/>
-          <p:cNvSpPr/>
-          <p:nvPr/>
-        </p:nvSpPr>
-        <p:spPr>
-          <a:xfrm>
-            <a:off x="8074152" y="3666744"/>
-            <a:ext cx="2825496" cy="256032"/>
+          <p:cNvPr id="19" name="Text 17"/>
+          <p:cNvSpPr/>
+          <p:nvPr/>
+        </p:nvSpPr>
+        <p:spPr>
+          <a:xfrm>
+            <a:off x="7799832" y="4645152"/>
+            <a:ext cx="3145536" cy="256032"/>
           </a:xfrm>
           <a:prstGeom prst="rect">
             <a:avLst/>
@@ -4825,7 +5227,7 @@
                 <a:ea typeface="Aptos" pitchFamily="34" charset="-122"/>
                 <a:cs typeface="Aptos" pitchFamily="34" charset="-120"/>
               </a:rPr>
-              <a:t>Use this for</a:t>
+              <a:t>Safeguard to plan</a:t>
             </a:r>
             <a:endParaRPr lang="en-US" sz="1300" dirty="0"/>
           </a:p>
@@ -4833,14 +5235,14 @@
       </p:sp>
       <p:sp>
         <p:nvSpPr>
-          <p:cNvPr id="15" name="Text 13"/>
-          <p:cNvSpPr/>
-          <p:nvPr/>
-        </p:nvSpPr>
-        <p:spPr>
-          <a:xfrm>
-            <a:off x="8074152" y="4023360"/>
-            <a:ext cx="2825496" cy="1097280"/>
+          <p:cNvPr id="20" name="Text 18"/>
+          <p:cNvSpPr/>
+          <p:nvPr/>
+        </p:nvSpPr>
+        <p:spPr>
+          <a:xfrm>
+            <a:off x="7799832" y="5001768"/>
+            <a:ext cx="3145536" cy="502920"/>
           </a:xfrm>
           <a:prstGeom prst="rect">
             <a:avLst/>
@@ -4866,7 +5268,7 @@
                 <a:ea typeface="Aptos" pitchFamily="34" charset="-122"/>
                 <a:cs typeface="Aptos" pitchFamily="34" charset="-120"/>
               </a:rPr>
-              <a:t>Connect the concept to public health decisions, safeguards, documentation, or implementation work.</a:t>
+              <a:t>Identify what could go wrong, who could be affected, what safeguards are needed, and what evidence should be reviewed before use expands.</a:t>
             </a:r>
             <a:endParaRPr lang="en-US" sz="1550" dirty="0"/>
           </a:p>
@@ -5040,8 +5442,8 @@
         </p:nvSpPr>
         <p:spPr>
           <a:xfrm>
-            <a:off x="9966960" y="6537960"/>
-            <a:ext cx="1645920" cy="201168"/>
+            <a:off x="9646920" y="6537960"/>
+            <a:ext cx="1965960" cy="201168"/>
           </a:xfrm>
           <a:prstGeom prst="rect">
             <a:avLst/>
@@ -5065,7 +5467,7 @@
                 <a:ea typeface="Aptos" pitchFamily="34" charset="-122"/>
                 <a:cs typeface="Aptos" pitchFamily="34" charset="-120"/>
               </a:rPr>
-              <a:t>Â© Paula Soper</a:t>
+              <a:t>Copyright Paula Soper</a:t>
             </a:r>
             <a:endParaRPr lang="en-US" sz="800" dirty="0"/>
           </a:p>
@@ -5160,7 +5562,7 @@
         <p:spPr>
           <a:xfrm>
             <a:off x="868680" y="1508760"/>
-            <a:ext cx="6537960" cy="4160520"/>
+            <a:ext cx="6309360" cy="4160520"/>
           </a:xfrm>
           <a:prstGeom prst="rect">
             <a:avLst/>
@@ -5225,12 +5627,12 @@
         </p:nvSpPr>
         <p:spPr>
           <a:xfrm>
-            <a:off x="7909560" y="1417320"/>
-            <a:ext cx="3154680" cy="1828800"/>
+            <a:off x="7635240" y="1325880"/>
+            <a:ext cx="3474720" cy="1325880"/>
           </a:xfrm>
           <a:prstGeom prst="roundRect">
             <a:avLst>
-              <a:gd name="adj" fmla="val 6000"/>
+              <a:gd name="adj" fmla="val 8276"/>
             </a:avLst>
           </a:prstGeom>
           <a:solidFill>
@@ -5252,8 +5654,8 @@
         </p:nvSpPr>
         <p:spPr>
           <a:xfrm>
-            <a:off x="8074152" y="1563624"/>
-            <a:ext cx="2825496" cy="256032"/>
+            <a:off x="7799832" y="1472184"/>
+            <a:ext cx="3145536" cy="256032"/>
           </a:xfrm>
           <a:prstGeom prst="rect">
             <a:avLst/>
@@ -5277,7 +5679,7 @@
                 <a:ea typeface="Aptos" pitchFamily="34" charset="-122"/>
                 <a:cs typeface="Aptos" pitchFamily="34" charset="-120"/>
               </a:rPr>
-              <a:t>Key idea</a:t>
+              <a:t>Risk check</a:t>
             </a:r>
             <a:endParaRPr lang="en-US" sz="1300" dirty="0"/>
           </a:p>
@@ -5291,8 +5693,8 @@
         </p:nvSpPr>
         <p:spPr>
           <a:xfrm>
-            <a:off x="8074152" y="1920240"/>
-            <a:ext cx="2825496" cy="1188720"/>
+            <a:off x="7799832" y="1828800"/>
+            <a:ext cx="3145536" cy="685800"/>
           </a:xfrm>
           <a:prstGeom prst="rect">
             <a:avLst/>
@@ -5332,12 +5734,165 @@
         </p:nvSpPr>
         <p:spPr>
           <a:xfrm>
-            <a:off x="7909560" y="3520440"/>
-            <a:ext cx="3154680" cy="1737360"/>
+            <a:off x="7635240" y="2788920"/>
+            <a:ext cx="3474720" cy="1536192"/>
           </a:xfrm>
           <a:prstGeom prst="roundRect">
             <a:avLst>
-              <a:gd name="adj" fmla="val 6316"/>
+              <a:gd name="adj" fmla="val 7143"/>
+            </a:avLst>
+          </a:prstGeom>
+          <a:solidFill>
+            <a:srgbClr val="FFFFFF">
+              <a:alpha val="88000"/>
+            </a:srgbClr>
+          </a:solidFill>
+          <a:ln w="12700">
+            <a:solidFill>
+              <a:srgbClr val="D6E8F2"/>
+            </a:solidFill>
+            <a:prstDash val="solid"/>
+          </a:ln>
+        </p:spPr>
+      </p:sp>
+      <p:sp>
+        <p:nvSpPr>
+          <p:cNvPr id="14" name="Shape 12"/>
+          <p:cNvSpPr/>
+          <p:nvPr/>
+        </p:nvSpPr>
+        <p:spPr>
+          <a:xfrm>
+            <a:off x="8046720" y="3108960"/>
+            <a:ext cx="2651760" cy="896112"/>
+          </a:xfrm>
+          <a:prstGeom prst="arc">
+            <a:avLst/>
+          </a:prstGeom>
+          <a:noFill/>
+          <a:ln w="25400">
+            <a:solidFill>
+              <a:srgbClr val="0068B7"/>
+            </a:solidFill>
+            <a:prstDash val="solid"/>
+          </a:ln>
+        </p:spPr>
+      </p:sp>
+      <p:sp>
+        <p:nvSpPr>
+          <p:cNvPr id="15" name="Text 13"/>
+          <p:cNvSpPr/>
+          <p:nvPr/>
+        </p:nvSpPr>
+        <p:spPr>
+          <a:xfrm>
+            <a:off x="7909560" y="3099816"/>
+            <a:ext cx="2926080" cy="256032"/>
+          </a:xfrm>
+          <a:prstGeom prst="rect">
+            <a:avLst/>
+          </a:prstGeom>
+          <a:noFill/>
+          <a:ln/>
+        </p:spPr>
+        <p:txBody>
+          <a:bodyPr wrap="square" lIns="0" tIns="0" rIns="0" bIns="0" rtlCol="0" anchor="ctr"/>
+          <a:lstStyle/>
+          <a:p>
+            <a:pPr algn="ctr" indent="0" marL="0">
+              <a:buNone/>
+            </a:pPr>
+            <a:r>
+              <a:rPr lang="en-US" sz="1500" b="1" dirty="0">
+                <a:solidFill>
+                  <a:srgbClr val="003A63"/>
+                </a:solidFill>
+                <a:latin typeface="Aptos" pitchFamily="34" charset="0"/>
+                <a:ea typeface="Aptos" pitchFamily="34" charset="-122"/>
+                <a:cs typeface="Aptos" pitchFamily="34" charset="-120"/>
+              </a:rPr>
+              <a:t>Risk</a:t>
+            </a:r>
+            <a:endParaRPr lang="en-US" sz="1500" dirty="0"/>
+          </a:p>
+        </p:txBody>
+      </p:sp>
+      <p:sp>
+        <p:nvSpPr>
+          <p:cNvPr id="16" name="Shape 14"/>
+          <p:cNvSpPr/>
+          <p:nvPr/>
+        </p:nvSpPr>
+        <p:spPr>
+          <a:xfrm>
+            <a:off x="8366760" y="3639312"/>
+            <a:ext cx="2011680" cy="0"/>
+          </a:xfrm>
+          <a:prstGeom prst="line">
+            <a:avLst/>
+          </a:prstGeom>
+          <a:noFill/>
+          <a:ln w="63500">
+            <a:solidFill>
+              <a:srgbClr val="2F8A28"/>
+            </a:solidFill>
+            <a:prstDash val="solid"/>
+          </a:ln>
+        </p:spPr>
+      </p:sp>
+      <p:sp>
+        <p:nvSpPr>
+          <p:cNvPr id="17" name="Text 15"/>
+          <p:cNvSpPr/>
+          <p:nvPr/>
+        </p:nvSpPr>
+        <p:spPr>
+          <a:xfrm>
+            <a:off x="7909560" y="3849624"/>
+            <a:ext cx="2926080" cy="164592"/>
+          </a:xfrm>
+          <a:prstGeom prst="rect">
+            <a:avLst/>
+          </a:prstGeom>
+          <a:noFill/>
+          <a:ln/>
+        </p:spPr>
+        <p:txBody>
+          <a:bodyPr wrap="square" lIns="0" tIns="0" rIns="0" bIns="0" rtlCol="0" anchor="ctr"/>
+          <a:lstStyle/>
+          <a:p>
+            <a:pPr algn="ctr" indent="0" marL="0">
+              <a:buNone/>
+            </a:pPr>
+            <a:r>
+              <a:rPr lang="en-US" sz="900" dirty="0">
+                <a:solidFill>
+                  <a:srgbClr val="003A63"/>
+                </a:solidFill>
+                <a:latin typeface="Aptos" pitchFamily="34" charset="0"/>
+                <a:ea typeface="Aptos" pitchFamily="34" charset="-122"/>
+                <a:cs typeface="Aptos" pitchFamily="34" charset="-120"/>
+              </a:rPr>
+              <a:t>Human review</a:t>
+            </a:r>
+            <a:endParaRPr lang="en-US" sz="900" dirty="0"/>
+          </a:p>
+        </p:txBody>
+      </p:sp>
+      <p:sp>
+        <p:nvSpPr>
+          <p:cNvPr id="18" name="Shape 16"/>
+          <p:cNvSpPr/>
+          <p:nvPr/>
+        </p:nvSpPr>
+        <p:spPr>
+          <a:xfrm>
+            <a:off x="7635240" y="4498848"/>
+            <a:ext cx="3474720" cy="1143000"/>
+          </a:xfrm>
+          <a:prstGeom prst="roundRect">
+            <a:avLst>
+              <a:gd name="adj" fmla="val 9600"/>
             </a:avLst>
           </a:prstGeom>
           <a:solidFill>
@@ -5353,14 +5908,14 @@
       </p:sp>
       <p:sp>
         <p:nvSpPr>
-          <p:cNvPr id="14" name="Text 12"/>
-          <p:cNvSpPr/>
-          <p:nvPr/>
-        </p:nvSpPr>
-        <p:spPr>
-          <a:xfrm>
-            <a:off x="8074152" y="3666744"/>
-            <a:ext cx="2825496" cy="256032"/>
+          <p:cNvPr id="19" name="Text 17"/>
+          <p:cNvSpPr/>
+          <p:nvPr/>
+        </p:nvSpPr>
+        <p:spPr>
+          <a:xfrm>
+            <a:off x="7799832" y="4645152"/>
+            <a:ext cx="3145536" cy="256032"/>
           </a:xfrm>
           <a:prstGeom prst="rect">
             <a:avLst/>
@@ -5384,7 +5939,7 @@
                 <a:ea typeface="Aptos" pitchFamily="34" charset="-122"/>
                 <a:cs typeface="Aptos" pitchFamily="34" charset="-120"/>
               </a:rPr>
-              <a:t>Use this for</a:t>
+              <a:t>Safeguard to plan</a:t>
             </a:r>
             <a:endParaRPr lang="en-US" sz="1300" dirty="0"/>
           </a:p>
@@ -5392,14 +5947,14 @@
       </p:sp>
       <p:sp>
         <p:nvSpPr>
-          <p:cNvPr id="15" name="Text 13"/>
-          <p:cNvSpPr/>
-          <p:nvPr/>
-        </p:nvSpPr>
-        <p:spPr>
-          <a:xfrm>
-            <a:off x="8074152" y="4023360"/>
-            <a:ext cx="2825496" cy="1097280"/>
+          <p:cNvPr id="20" name="Text 18"/>
+          <p:cNvSpPr/>
+          <p:nvPr/>
+        </p:nvSpPr>
+        <p:spPr>
+          <a:xfrm>
+            <a:off x="7799832" y="5001768"/>
+            <a:ext cx="3145536" cy="502920"/>
           </a:xfrm>
           <a:prstGeom prst="rect">
             <a:avLst/>
@@ -5425,7 +5980,7 @@
                 <a:ea typeface="Aptos" pitchFamily="34" charset="-122"/>
                 <a:cs typeface="Aptos" pitchFamily="34" charset="-120"/>
               </a:rPr>
-              <a:t>Connect the concept to public health decisions, safeguards, documentation, or implementation work.</a:t>
+              <a:t>Identify what could go wrong, who could be affected, what safeguards are needed, and what evidence should be reviewed before use expands.</a:t>
             </a:r>
             <a:endParaRPr lang="en-US" sz="1550" dirty="0"/>
           </a:p>
@@ -5599,8 +6154,8 @@
         </p:nvSpPr>
         <p:spPr>
           <a:xfrm>
-            <a:off x="9966960" y="6537960"/>
-            <a:ext cx="1645920" cy="201168"/>
+            <a:off x="9646920" y="6537960"/>
+            <a:ext cx="1965960" cy="201168"/>
           </a:xfrm>
           <a:prstGeom prst="rect">
             <a:avLst/>
@@ -5624,7 +6179,7 @@
                 <a:ea typeface="Aptos" pitchFamily="34" charset="-122"/>
                 <a:cs typeface="Aptos" pitchFamily="34" charset="-120"/>
               </a:rPr>
-              <a:t>Â© Paula Soper</a:t>
+              <a:t>Copyright Paula Soper</a:t>
             </a:r>
             <a:endParaRPr lang="en-US" sz="800" dirty="0"/>
           </a:p>
@@ -5719,7 +6274,7 @@
         <p:spPr>
           <a:xfrm>
             <a:off x="868680" y="1508760"/>
-            <a:ext cx="6537960" cy="4160520"/>
+            <a:ext cx="6309360" cy="4160520"/>
           </a:xfrm>
           <a:prstGeom prst="rect">
             <a:avLst/>
@@ -5784,12 +6339,12 @@
         </p:nvSpPr>
         <p:spPr>
           <a:xfrm>
-            <a:off x="7909560" y="1417320"/>
-            <a:ext cx="3154680" cy="1828800"/>
+            <a:off x="7635240" y="1325880"/>
+            <a:ext cx="3474720" cy="1325880"/>
           </a:xfrm>
           <a:prstGeom prst="roundRect">
             <a:avLst>
-              <a:gd name="adj" fmla="val 6000"/>
+              <a:gd name="adj" fmla="val 8276"/>
             </a:avLst>
           </a:prstGeom>
           <a:solidFill>
@@ -5811,8 +6366,8 @@
         </p:nvSpPr>
         <p:spPr>
           <a:xfrm>
-            <a:off x="8074152" y="1563624"/>
-            <a:ext cx="2825496" cy="256032"/>
+            <a:off x="7799832" y="1472184"/>
+            <a:ext cx="3145536" cy="256032"/>
           </a:xfrm>
           <a:prstGeom prst="rect">
             <a:avLst/>
@@ -5836,7 +6391,7 @@
                 <a:ea typeface="Aptos" pitchFamily="34" charset="-122"/>
                 <a:cs typeface="Aptos" pitchFamily="34" charset="-120"/>
               </a:rPr>
-              <a:t>Key idea</a:t>
+              <a:t>Risk check</a:t>
             </a:r>
             <a:endParaRPr lang="en-US" sz="1300" dirty="0"/>
           </a:p>
@@ -5850,8 +6405,8 @@
         </p:nvSpPr>
         <p:spPr>
           <a:xfrm>
-            <a:off x="8074152" y="1920240"/>
-            <a:ext cx="2825496" cy="1188720"/>
+            <a:off x="7799832" y="1828800"/>
+            <a:ext cx="3145536" cy="685800"/>
           </a:xfrm>
           <a:prstGeom prst="rect">
             <a:avLst/>
@@ -5891,12 +6446,165 @@
         </p:nvSpPr>
         <p:spPr>
           <a:xfrm>
-            <a:off x="7909560" y="3520440"/>
-            <a:ext cx="3154680" cy="1737360"/>
+            <a:off x="7635240" y="2788920"/>
+            <a:ext cx="3474720" cy="1536192"/>
           </a:xfrm>
           <a:prstGeom prst="roundRect">
             <a:avLst>
-              <a:gd name="adj" fmla="val 6316"/>
+              <a:gd name="adj" fmla="val 7143"/>
+            </a:avLst>
+          </a:prstGeom>
+          <a:solidFill>
+            <a:srgbClr val="FFFFFF">
+              <a:alpha val="88000"/>
+            </a:srgbClr>
+          </a:solidFill>
+          <a:ln w="12700">
+            <a:solidFill>
+              <a:srgbClr val="D6E8F2"/>
+            </a:solidFill>
+            <a:prstDash val="solid"/>
+          </a:ln>
+        </p:spPr>
+      </p:sp>
+      <p:sp>
+        <p:nvSpPr>
+          <p:cNvPr id="14" name="Shape 12"/>
+          <p:cNvSpPr/>
+          <p:nvPr/>
+        </p:nvSpPr>
+        <p:spPr>
+          <a:xfrm>
+            <a:off x="8046720" y="3108960"/>
+            <a:ext cx="2651760" cy="896112"/>
+          </a:xfrm>
+          <a:prstGeom prst="arc">
+            <a:avLst/>
+          </a:prstGeom>
+          <a:noFill/>
+          <a:ln w="25400">
+            <a:solidFill>
+              <a:srgbClr val="0068B7"/>
+            </a:solidFill>
+            <a:prstDash val="solid"/>
+          </a:ln>
+        </p:spPr>
+      </p:sp>
+      <p:sp>
+        <p:nvSpPr>
+          <p:cNvPr id="15" name="Text 13"/>
+          <p:cNvSpPr/>
+          <p:nvPr/>
+        </p:nvSpPr>
+        <p:spPr>
+          <a:xfrm>
+            <a:off x="7909560" y="3099816"/>
+            <a:ext cx="2926080" cy="256032"/>
+          </a:xfrm>
+          <a:prstGeom prst="rect">
+            <a:avLst/>
+          </a:prstGeom>
+          <a:noFill/>
+          <a:ln/>
+        </p:spPr>
+        <p:txBody>
+          <a:bodyPr wrap="square" lIns="0" tIns="0" rIns="0" bIns="0" rtlCol="0" anchor="ctr"/>
+          <a:lstStyle/>
+          <a:p>
+            <a:pPr algn="ctr" indent="0" marL="0">
+              <a:buNone/>
+            </a:pPr>
+            <a:r>
+              <a:rPr lang="en-US" sz="1500" b="1" dirty="0">
+                <a:solidFill>
+                  <a:srgbClr val="003A63"/>
+                </a:solidFill>
+                <a:latin typeface="Aptos" pitchFamily="34" charset="0"/>
+                <a:ea typeface="Aptos" pitchFamily="34" charset="-122"/>
+                <a:cs typeface="Aptos" pitchFamily="34" charset="-120"/>
+              </a:rPr>
+              <a:t>Risk</a:t>
+            </a:r>
+            <a:endParaRPr lang="en-US" sz="1500" dirty="0"/>
+          </a:p>
+        </p:txBody>
+      </p:sp>
+      <p:sp>
+        <p:nvSpPr>
+          <p:cNvPr id="16" name="Shape 14"/>
+          <p:cNvSpPr/>
+          <p:nvPr/>
+        </p:nvSpPr>
+        <p:spPr>
+          <a:xfrm>
+            <a:off x="8366760" y="3639312"/>
+            <a:ext cx="2011680" cy="0"/>
+          </a:xfrm>
+          <a:prstGeom prst="line">
+            <a:avLst/>
+          </a:prstGeom>
+          <a:noFill/>
+          <a:ln w="63500">
+            <a:solidFill>
+              <a:srgbClr val="2F8A28"/>
+            </a:solidFill>
+            <a:prstDash val="solid"/>
+          </a:ln>
+        </p:spPr>
+      </p:sp>
+      <p:sp>
+        <p:nvSpPr>
+          <p:cNvPr id="17" name="Text 15"/>
+          <p:cNvSpPr/>
+          <p:nvPr/>
+        </p:nvSpPr>
+        <p:spPr>
+          <a:xfrm>
+            <a:off x="7909560" y="3849624"/>
+            <a:ext cx="2926080" cy="164592"/>
+          </a:xfrm>
+          <a:prstGeom prst="rect">
+            <a:avLst/>
+          </a:prstGeom>
+          <a:noFill/>
+          <a:ln/>
+        </p:spPr>
+        <p:txBody>
+          <a:bodyPr wrap="square" lIns="0" tIns="0" rIns="0" bIns="0" rtlCol="0" anchor="ctr"/>
+          <a:lstStyle/>
+          <a:p>
+            <a:pPr algn="ctr" indent="0" marL="0">
+              <a:buNone/>
+            </a:pPr>
+            <a:r>
+              <a:rPr lang="en-US" sz="900" dirty="0">
+                <a:solidFill>
+                  <a:srgbClr val="003A63"/>
+                </a:solidFill>
+                <a:latin typeface="Aptos" pitchFamily="34" charset="0"/>
+                <a:ea typeface="Aptos" pitchFamily="34" charset="-122"/>
+                <a:cs typeface="Aptos" pitchFamily="34" charset="-120"/>
+              </a:rPr>
+              <a:t>Human review</a:t>
+            </a:r>
+            <a:endParaRPr lang="en-US" sz="900" dirty="0"/>
+          </a:p>
+        </p:txBody>
+      </p:sp>
+      <p:sp>
+        <p:nvSpPr>
+          <p:cNvPr id="18" name="Shape 16"/>
+          <p:cNvSpPr/>
+          <p:nvPr/>
+        </p:nvSpPr>
+        <p:spPr>
+          <a:xfrm>
+            <a:off x="7635240" y="4498848"/>
+            <a:ext cx="3474720" cy="1143000"/>
+          </a:xfrm>
+          <a:prstGeom prst="roundRect">
+            <a:avLst>
+              <a:gd name="adj" fmla="val 9600"/>
             </a:avLst>
           </a:prstGeom>
           <a:solidFill>
@@ -5912,14 +6620,14 @@
       </p:sp>
       <p:sp>
         <p:nvSpPr>
-          <p:cNvPr id="14" name="Text 12"/>
-          <p:cNvSpPr/>
-          <p:nvPr/>
-        </p:nvSpPr>
-        <p:spPr>
-          <a:xfrm>
-            <a:off x="8074152" y="3666744"/>
-            <a:ext cx="2825496" cy="256032"/>
+          <p:cNvPr id="19" name="Text 17"/>
+          <p:cNvSpPr/>
+          <p:nvPr/>
+        </p:nvSpPr>
+        <p:spPr>
+          <a:xfrm>
+            <a:off x="7799832" y="4645152"/>
+            <a:ext cx="3145536" cy="256032"/>
           </a:xfrm>
           <a:prstGeom prst="rect">
             <a:avLst/>
@@ -5943,7 +6651,7 @@
                 <a:ea typeface="Aptos" pitchFamily="34" charset="-122"/>
                 <a:cs typeface="Aptos" pitchFamily="34" charset="-120"/>
               </a:rPr>
-              <a:t>Use this for</a:t>
+              <a:t>Safeguard to plan</a:t>
             </a:r>
             <a:endParaRPr lang="en-US" sz="1300" dirty="0"/>
           </a:p>
@@ -5951,14 +6659,14 @@
       </p:sp>
       <p:sp>
         <p:nvSpPr>
-          <p:cNvPr id="15" name="Text 13"/>
-          <p:cNvSpPr/>
-          <p:nvPr/>
-        </p:nvSpPr>
-        <p:spPr>
-          <a:xfrm>
-            <a:off x="8074152" y="4023360"/>
-            <a:ext cx="2825496" cy="1097280"/>
+          <p:cNvPr id="20" name="Text 18"/>
+          <p:cNvSpPr/>
+          <p:nvPr/>
+        </p:nvSpPr>
+        <p:spPr>
+          <a:xfrm>
+            <a:off x="7799832" y="5001768"/>
+            <a:ext cx="3145536" cy="502920"/>
           </a:xfrm>
           <a:prstGeom prst="rect">
             <a:avLst/>
@@ -5984,7 +6692,7 @@
                 <a:ea typeface="Aptos" pitchFamily="34" charset="-122"/>
                 <a:cs typeface="Aptos" pitchFamily="34" charset="-120"/>
               </a:rPr>
-              <a:t>Connect the concept to public health decisions, safeguards, documentation, or implementation work.</a:t>
+              <a:t>Identify what could go wrong, who could be affected, what safeguards are needed, and what evidence should be reviewed before use expands.</a:t>
             </a:r>
             <a:endParaRPr lang="en-US" sz="1550" dirty="0"/>
           </a:p>
@@ -6158,8 +6866,8 @@
         </p:nvSpPr>
         <p:spPr>
           <a:xfrm>
-            <a:off x="9966960" y="6537960"/>
-            <a:ext cx="1645920" cy="201168"/>
+            <a:off x="9646920" y="6537960"/>
+            <a:ext cx="1965960" cy="201168"/>
           </a:xfrm>
           <a:prstGeom prst="rect">
             <a:avLst/>
@@ -6183,7 +6891,7 @@
                 <a:ea typeface="Aptos" pitchFamily="34" charset="-122"/>
                 <a:cs typeface="Aptos" pitchFamily="34" charset="-120"/>
               </a:rPr>
-              <a:t>Â© Paula Soper</a:t>
+              <a:t>Copyright Paula Soper</a:t>
             </a:r>
             <a:endParaRPr lang="en-US" sz="800" dirty="0"/>
           </a:p>
@@ -6230,77 +6938,13 @@
       </p:sp>
       <p:sp>
         <p:nvSpPr>
-          <p:cNvPr id="8" name="Shape 6"/>
+          <p:cNvPr id="8" name="Text 6"/>
           <p:cNvSpPr/>
           <p:nvPr/>
         </p:nvSpPr>
         <p:spPr>
           <a:xfrm>
             <a:off x="640080" y="658368"/>
-            <a:ext cx="420624" cy="420624"/>
-          </a:xfrm>
-          <a:prstGeom prst="ellipse">
-            <a:avLst/>
-          </a:prstGeom>
-          <a:solidFill>
-            <a:srgbClr val="0068B7"/>
-          </a:solidFill>
-          <a:ln w="12700">
-            <a:solidFill>
-              <a:srgbClr val="0068B7"/>
-            </a:solidFill>
-            <a:prstDash val="solid"/>
-          </a:ln>
-        </p:spPr>
-      </p:sp>
-      <p:sp>
-        <p:nvSpPr>
-          <p:cNvPr id="9" name="Text 7"/>
-          <p:cNvSpPr/>
-          <p:nvPr/>
-        </p:nvSpPr>
-        <p:spPr>
-          <a:xfrm>
-            <a:off x="640080" y="731520"/>
-            <a:ext cx="420624" cy="164592"/>
-          </a:xfrm>
-          <a:prstGeom prst="rect">
-            <a:avLst/>
-          </a:prstGeom>
-          <a:noFill/>
-          <a:ln/>
-        </p:spPr>
-        <p:txBody>
-          <a:bodyPr wrap="square" lIns="0" tIns="0" rIns="0" bIns="0" rtlCol="0" anchor="ctr"/>
-          <a:lstStyle/>
-          <a:p>
-            <a:pPr algn="ctr" indent="0" marL="0">
-              <a:buNone/>
-            </a:pPr>
-            <a:r>
-              <a:rPr lang="en-US" sz="1100" b="1" dirty="0">
-                <a:solidFill>
-                  <a:srgbClr val="FFFFFF"/>
-                </a:solidFill>
-                <a:latin typeface="Aptos" pitchFamily="34" charset="0"/>
-                <a:ea typeface="Aptos" pitchFamily="34" charset="-122"/>
-                <a:cs typeface="Aptos" pitchFamily="34" charset="-120"/>
-              </a:rPr>
-              <a:t>7</a:t>
-            </a:r>
-            <a:endParaRPr lang="en-US" sz="1100" dirty="0"/>
-          </a:p>
-        </p:txBody>
-      </p:sp>
-      <p:sp>
-        <p:nvSpPr>
-          <p:cNvPr id="10" name="Text 8"/>
-          <p:cNvSpPr/>
-          <p:nvPr/>
-        </p:nvSpPr>
-        <p:spPr>
-          <a:xfrm>
-            <a:off x="640080" y="621792"/>
             <a:ext cx="10881360" cy="713232"/>
           </a:xfrm>
           <a:prstGeom prst="rect">
@@ -6335,14 +6979,14 @@
       </p:sp>
       <p:sp>
         <p:nvSpPr>
-          <p:cNvPr id="11" name="Text 9"/>
+          <p:cNvPr id="9" name="Text 7"/>
           <p:cNvSpPr/>
           <p:nvPr/>
         </p:nvSpPr>
         <p:spPr>
           <a:xfrm>
             <a:off x="868680" y="1508760"/>
-            <a:ext cx="6537960" cy="4160520"/>
+            <a:ext cx="6309360" cy="4160520"/>
           </a:xfrm>
           <a:prstGeom prst="rect">
             <a:avLst/>
@@ -6401,18 +7045,18 @@
       </p:sp>
       <p:sp>
         <p:nvSpPr>
-          <p:cNvPr id="12" name="Shape 10"/>
-          <p:cNvSpPr/>
-          <p:nvPr/>
-        </p:nvSpPr>
-        <p:spPr>
-          <a:xfrm>
-            <a:off x="7909560" y="1417320"/>
-            <a:ext cx="3154680" cy="1828800"/>
+          <p:cNvPr id="10" name="Shape 8"/>
+          <p:cNvSpPr/>
+          <p:nvPr/>
+        </p:nvSpPr>
+        <p:spPr>
+          <a:xfrm>
+            <a:off x="7635240" y="1325880"/>
+            <a:ext cx="3474720" cy="1325880"/>
           </a:xfrm>
           <a:prstGeom prst="roundRect">
             <a:avLst>
-              <a:gd name="adj" fmla="val 6000"/>
+              <a:gd name="adj" fmla="val 8276"/>
             </a:avLst>
           </a:prstGeom>
           <a:solidFill>
@@ -6428,14 +7072,14 @@
       </p:sp>
       <p:sp>
         <p:nvSpPr>
-          <p:cNvPr id="13" name="Text 11"/>
-          <p:cNvSpPr/>
-          <p:nvPr/>
-        </p:nvSpPr>
-        <p:spPr>
-          <a:xfrm>
-            <a:off x="8074152" y="1563624"/>
-            <a:ext cx="2825496" cy="256032"/>
+          <p:cNvPr id="11" name="Text 9"/>
+          <p:cNvSpPr/>
+          <p:nvPr/>
+        </p:nvSpPr>
+        <p:spPr>
+          <a:xfrm>
+            <a:off x="7799832" y="1472184"/>
+            <a:ext cx="3145536" cy="256032"/>
           </a:xfrm>
           <a:prstGeom prst="rect">
             <a:avLst/>
@@ -6459,7 +7103,7 @@
                 <a:ea typeface="Aptos" pitchFamily="34" charset="-122"/>
                 <a:cs typeface="Aptos" pitchFamily="34" charset="-120"/>
               </a:rPr>
-              <a:t>Key idea</a:t>
+              <a:t>Core concept</a:t>
             </a:r>
             <a:endParaRPr lang="en-US" sz="1300" dirty="0"/>
           </a:p>
@@ -6467,14 +7111,14 @@
       </p:sp>
       <p:sp>
         <p:nvSpPr>
-          <p:cNvPr id="14" name="Text 12"/>
-          <p:cNvSpPr/>
-          <p:nvPr/>
-        </p:nvSpPr>
-        <p:spPr>
-          <a:xfrm>
-            <a:off x="8074152" y="1920240"/>
-            <a:ext cx="2825496" cy="1188720"/>
+          <p:cNvPr id="12" name="Text 10"/>
+          <p:cNvSpPr/>
+          <p:nvPr/>
+        </p:nvSpPr>
+        <p:spPr>
+          <a:xfrm>
+            <a:off x="7799832" y="1828800"/>
+            <a:ext cx="3145536" cy="685800"/>
           </a:xfrm>
           <a:prstGeom prst="rect">
             <a:avLst/>
@@ -6508,18 +7152,159 @@
       </p:sp>
       <p:sp>
         <p:nvSpPr>
-          <p:cNvPr id="15" name="Shape 13"/>
-          <p:cNvSpPr/>
-          <p:nvPr/>
-        </p:nvSpPr>
-        <p:spPr>
-          <a:xfrm>
-            <a:off x="7909560" y="3520440"/>
-            <a:ext cx="3154680" cy="1737360"/>
+          <p:cNvPr id="13" name="Shape 11"/>
+          <p:cNvSpPr/>
+          <p:nvPr/>
+        </p:nvSpPr>
+        <p:spPr>
+          <a:xfrm>
+            <a:off x="7635240" y="2788920"/>
+            <a:ext cx="3474720" cy="1536192"/>
           </a:xfrm>
           <a:prstGeom prst="roundRect">
             <a:avLst>
-              <a:gd name="adj" fmla="val 6316"/>
+              <a:gd name="adj" fmla="val 7143"/>
+            </a:avLst>
+          </a:prstGeom>
+          <a:solidFill>
+            <a:srgbClr val="FFFFFF">
+              <a:alpha val="88000"/>
+            </a:srgbClr>
+          </a:solidFill>
+          <a:ln w="12700">
+            <a:solidFill>
+              <a:srgbClr val="D6E8F2"/>
+            </a:solidFill>
+            <a:prstDash val="solid"/>
+          </a:ln>
+        </p:spPr>
+      </p:sp>
+      <p:sp>
+        <p:nvSpPr>
+          <p:cNvPr id="14" name="Shape 12"/>
+          <p:cNvSpPr/>
+          <p:nvPr/>
+        </p:nvSpPr>
+        <p:spPr>
+          <a:xfrm>
+            <a:off x="8074152" y="3291840"/>
+            <a:ext cx="2596896" cy="749808"/>
+          </a:xfrm>
+          <a:prstGeom prst="rect">
+            <a:avLst/>
+          </a:prstGeom>
+          <a:solidFill>
+            <a:srgbClr val="EAF6F8"/>
+          </a:solidFill>
+          <a:ln w="12700">
+            <a:solidFill>
+              <a:srgbClr val="8ABBD8"/>
+            </a:solidFill>
+            <a:prstDash val="solid"/>
+          </a:ln>
+        </p:spPr>
+      </p:sp>
+      <p:sp>
+        <p:nvSpPr>
+          <p:cNvPr id="15" name="Shape 13"/>
+          <p:cNvSpPr/>
+          <p:nvPr/>
+        </p:nvSpPr>
+        <p:spPr>
+          <a:xfrm>
+            <a:off x="8202168" y="3721608"/>
+            <a:ext cx="2340864" cy="0"/>
+          </a:xfrm>
+          <a:prstGeom prst="line">
+            <a:avLst/>
+          </a:prstGeom>
+          <a:noFill/>
+          <a:ln w="19050">
+            <a:solidFill>
+              <a:srgbClr val="0068B7"/>
+            </a:solidFill>
+            <a:prstDash val="solid"/>
+          </a:ln>
+        </p:spPr>
+      </p:sp>
+      <p:sp>
+        <p:nvSpPr>
+          <p:cNvPr id="16" name="Shape 14"/>
+          <p:cNvSpPr/>
+          <p:nvPr/>
+        </p:nvSpPr>
+        <p:spPr>
+          <a:xfrm>
+            <a:off x="9198864" y="4206240"/>
+            <a:ext cx="347472" cy="347472"/>
+          </a:xfrm>
+          <a:prstGeom prst="ellipse">
+            <a:avLst/>
+          </a:prstGeom>
+          <a:solidFill>
+            <a:srgbClr val="2F8A28"/>
+          </a:solidFill>
+          <a:ln w="12700">
+            <a:solidFill>
+              <a:srgbClr val="2F8A28"/>
+            </a:solidFill>
+            <a:prstDash val="solid"/>
+          </a:ln>
+        </p:spPr>
+      </p:sp>
+      <p:sp>
+        <p:nvSpPr>
+          <p:cNvPr id="17" name="Text 15"/>
+          <p:cNvSpPr/>
+          <p:nvPr/>
+        </p:nvSpPr>
+        <p:spPr>
+          <a:xfrm>
+            <a:off x="7909560" y="3977640"/>
+            <a:ext cx="2926080" cy="182880"/>
+          </a:xfrm>
+          <a:prstGeom prst="rect">
+            <a:avLst/>
+          </a:prstGeom>
+          <a:noFill/>
+          <a:ln/>
+        </p:spPr>
+        <p:txBody>
+          <a:bodyPr wrap="square" lIns="0" tIns="0" rIns="0" bIns="0" rtlCol="0" anchor="ctr"/>
+          <a:lstStyle/>
+          <a:p>
+            <a:pPr algn="ctr" indent="0" marL="0">
+              <a:buNone/>
+            </a:pPr>
+            <a:r>
+              <a:rPr lang="en-US" sz="1000" dirty="0">
+                <a:solidFill>
+                  <a:srgbClr val="003A63"/>
+                </a:solidFill>
+                <a:latin typeface="Aptos" pitchFamily="34" charset="0"/>
+                <a:ea typeface="Aptos" pitchFamily="34" charset="-122"/>
+                <a:cs typeface="Aptos" pitchFamily="34" charset="-120"/>
+              </a:rPr>
+              <a:t>Concept to action</a:t>
+            </a:r>
+            <a:endParaRPr lang="en-US" sz="1000" dirty="0"/>
+          </a:p>
+        </p:txBody>
+      </p:sp>
+      <p:sp>
+        <p:nvSpPr>
+          <p:cNvPr id="18" name="Shape 16"/>
+          <p:cNvSpPr/>
+          <p:nvPr/>
+        </p:nvSpPr>
+        <p:spPr>
+          <a:xfrm>
+            <a:off x="7635240" y="4498848"/>
+            <a:ext cx="3474720" cy="1143000"/>
+          </a:xfrm>
+          <a:prstGeom prst="roundRect">
+            <a:avLst>
+              <a:gd name="adj" fmla="val 9600"/>
             </a:avLst>
           </a:prstGeom>
           <a:solidFill>
@@ -6535,14 +7320,14 @@
       </p:sp>
       <p:sp>
         <p:nvSpPr>
-          <p:cNvPr id="16" name="Text 14"/>
-          <p:cNvSpPr/>
-          <p:nvPr/>
-        </p:nvSpPr>
-        <p:spPr>
-          <a:xfrm>
-            <a:off x="8074152" y="3666744"/>
-            <a:ext cx="2825496" cy="256032"/>
+          <p:cNvPr id="19" name="Text 17"/>
+          <p:cNvSpPr/>
+          <p:nvPr/>
+        </p:nvSpPr>
+        <p:spPr>
+          <a:xfrm>
+            <a:off x="7799832" y="4645152"/>
+            <a:ext cx="3145536" cy="256032"/>
           </a:xfrm>
           <a:prstGeom prst="rect">
             <a:avLst/>
@@ -6566,7 +7351,7 @@
                 <a:ea typeface="Aptos" pitchFamily="34" charset="-122"/>
                 <a:cs typeface="Aptos" pitchFamily="34" charset="-120"/>
               </a:rPr>
-              <a:t>Use this for</a:t>
+              <a:t>Apply it</a:t>
             </a:r>
             <a:endParaRPr lang="en-US" sz="1300" dirty="0"/>
           </a:p>
@@ -6574,14 +7359,14 @@
       </p:sp>
       <p:sp>
         <p:nvSpPr>
-          <p:cNvPr id="17" name="Text 15"/>
-          <p:cNvSpPr/>
-          <p:nvPr/>
-        </p:nvSpPr>
-        <p:spPr>
-          <a:xfrm>
-            <a:off x="8074152" y="4023360"/>
-            <a:ext cx="2825496" cy="1097280"/>
+          <p:cNvPr id="20" name="Text 18"/>
+          <p:cNvSpPr/>
+          <p:nvPr/>
+        </p:nvSpPr>
+        <p:spPr>
+          <a:xfrm>
+            <a:off x="7799832" y="5001768"/>
+            <a:ext cx="3145536" cy="502920"/>
           </a:xfrm>
           <a:prstGeom prst="rect">
             <a:avLst/>
@@ -6607,7 +7392,7 @@
                 <a:ea typeface="Aptos" pitchFamily="34" charset="-122"/>
                 <a:cs typeface="Aptos" pitchFamily="34" charset="-120"/>
               </a:rPr>
-              <a:t>Connect the concept to public health decisions, safeguards, documentation, or implementation work.</a:t>
+              <a:t>Connect the concept to public health purpose, responsible use, required safeguards, documentation, and the next action a department should take.</a:t>
             </a:r>
             <a:endParaRPr lang="en-US" sz="1550" dirty="0"/>
           </a:p>
@@ -6781,8 +7566,8 @@
         </p:nvSpPr>
         <p:spPr>
           <a:xfrm>
-            <a:off x="9966960" y="6537960"/>
-            <a:ext cx="1645920" cy="201168"/>
+            <a:off x="9646920" y="6537960"/>
+            <a:ext cx="1965960" cy="201168"/>
           </a:xfrm>
           <a:prstGeom prst="rect">
             <a:avLst/>
@@ -6806,7 +7591,7 @@
                 <a:ea typeface="Aptos" pitchFamily="34" charset="-122"/>
                 <a:cs typeface="Aptos" pitchFamily="34" charset="-120"/>
               </a:rPr>
-              <a:t>Â© Paula Soper</a:t>
+              <a:t>Copyright Paula Soper</a:t>
             </a:r>
             <a:endParaRPr lang="en-US" sz="800" dirty="0"/>
           </a:p>
@@ -6901,7 +7686,7 @@
         <p:spPr>
           <a:xfrm>
             <a:off x="868680" y="1508760"/>
-            <a:ext cx="6537960" cy="4160520"/>
+            <a:ext cx="6309360" cy="4160520"/>
           </a:xfrm>
           <a:prstGeom prst="rect">
             <a:avLst/>
@@ -6952,12 +7737,12 @@
         </p:nvSpPr>
         <p:spPr>
           <a:xfrm>
-            <a:off x="7909560" y="1417320"/>
-            <a:ext cx="3154680" cy="1828800"/>
+            <a:off x="7635240" y="1325880"/>
+            <a:ext cx="3474720" cy="1325880"/>
           </a:xfrm>
           <a:prstGeom prst="roundRect">
             <a:avLst>
-              <a:gd name="adj" fmla="val 6000"/>
+              <a:gd name="adj" fmla="val 8276"/>
             </a:avLst>
           </a:prstGeom>
           <a:solidFill>
@@ -6979,8 +7764,8 @@
         </p:nvSpPr>
         <p:spPr>
           <a:xfrm>
-            <a:off x="8074152" y="1563624"/>
-            <a:ext cx="2825496" cy="256032"/>
+            <a:off x="7799832" y="1472184"/>
+            <a:ext cx="3145536" cy="256032"/>
           </a:xfrm>
           <a:prstGeom prst="rect">
             <a:avLst/>
@@ -7004,7 +7789,7 @@
                 <a:ea typeface="Aptos" pitchFamily="34" charset="-122"/>
                 <a:cs typeface="Aptos" pitchFamily="34" charset="-120"/>
               </a:rPr>
-              <a:t>Key idea</a:t>
+              <a:t>Core concept</a:t>
             </a:r>
             <a:endParaRPr lang="en-US" sz="1300" dirty="0"/>
           </a:p>
@@ -7018,8 +7803,8 @@
         </p:nvSpPr>
         <p:spPr>
           <a:xfrm>
-            <a:off x="8074152" y="1920240"/>
-            <a:ext cx="2825496" cy="1188720"/>
+            <a:off x="7799832" y="1828800"/>
+            <a:ext cx="3145536" cy="685800"/>
           </a:xfrm>
           <a:prstGeom prst="rect">
             <a:avLst/>
@@ -7059,12 +7844,153 @@
         </p:nvSpPr>
         <p:spPr>
           <a:xfrm>
-            <a:off x="7909560" y="3520440"/>
-            <a:ext cx="3154680" cy="1737360"/>
+            <a:off x="7635240" y="2788920"/>
+            <a:ext cx="3474720" cy="1536192"/>
           </a:xfrm>
           <a:prstGeom prst="roundRect">
             <a:avLst>
-              <a:gd name="adj" fmla="val 6316"/>
+              <a:gd name="adj" fmla="val 7143"/>
+            </a:avLst>
+          </a:prstGeom>
+          <a:solidFill>
+            <a:srgbClr val="FFFFFF">
+              <a:alpha val="88000"/>
+            </a:srgbClr>
+          </a:solidFill>
+          <a:ln w="12700">
+            <a:solidFill>
+              <a:srgbClr val="D6E8F2"/>
+            </a:solidFill>
+            <a:prstDash val="solid"/>
+          </a:ln>
+        </p:spPr>
+      </p:sp>
+      <p:sp>
+        <p:nvSpPr>
+          <p:cNvPr id="14" name="Shape 12"/>
+          <p:cNvSpPr/>
+          <p:nvPr/>
+        </p:nvSpPr>
+        <p:spPr>
+          <a:xfrm>
+            <a:off x="8074152" y="3291840"/>
+            <a:ext cx="2596896" cy="749808"/>
+          </a:xfrm>
+          <a:prstGeom prst="rect">
+            <a:avLst/>
+          </a:prstGeom>
+          <a:solidFill>
+            <a:srgbClr val="EAF6F8"/>
+          </a:solidFill>
+          <a:ln w="12700">
+            <a:solidFill>
+              <a:srgbClr val="8ABBD8"/>
+            </a:solidFill>
+            <a:prstDash val="solid"/>
+          </a:ln>
+        </p:spPr>
+      </p:sp>
+      <p:sp>
+        <p:nvSpPr>
+          <p:cNvPr id="15" name="Shape 13"/>
+          <p:cNvSpPr/>
+          <p:nvPr/>
+        </p:nvSpPr>
+        <p:spPr>
+          <a:xfrm>
+            <a:off x="8202168" y="3721608"/>
+            <a:ext cx="2340864" cy="0"/>
+          </a:xfrm>
+          <a:prstGeom prst="line">
+            <a:avLst/>
+          </a:prstGeom>
+          <a:noFill/>
+          <a:ln w="19050">
+            <a:solidFill>
+              <a:srgbClr val="0068B7"/>
+            </a:solidFill>
+            <a:prstDash val="solid"/>
+          </a:ln>
+        </p:spPr>
+      </p:sp>
+      <p:sp>
+        <p:nvSpPr>
+          <p:cNvPr id="16" name="Shape 14"/>
+          <p:cNvSpPr/>
+          <p:nvPr/>
+        </p:nvSpPr>
+        <p:spPr>
+          <a:xfrm>
+            <a:off x="9198864" y="4206240"/>
+            <a:ext cx="347472" cy="347472"/>
+          </a:xfrm>
+          <a:prstGeom prst="ellipse">
+            <a:avLst/>
+          </a:prstGeom>
+          <a:solidFill>
+            <a:srgbClr val="2F8A28"/>
+          </a:solidFill>
+          <a:ln w="12700">
+            <a:solidFill>
+              <a:srgbClr val="2F8A28"/>
+            </a:solidFill>
+            <a:prstDash val="solid"/>
+          </a:ln>
+        </p:spPr>
+      </p:sp>
+      <p:sp>
+        <p:nvSpPr>
+          <p:cNvPr id="17" name="Text 15"/>
+          <p:cNvSpPr/>
+          <p:nvPr/>
+        </p:nvSpPr>
+        <p:spPr>
+          <a:xfrm>
+            <a:off x="7909560" y="3977640"/>
+            <a:ext cx="2926080" cy="182880"/>
+          </a:xfrm>
+          <a:prstGeom prst="rect">
+            <a:avLst/>
+          </a:prstGeom>
+          <a:noFill/>
+          <a:ln/>
+        </p:spPr>
+        <p:txBody>
+          <a:bodyPr wrap="square" lIns="0" tIns="0" rIns="0" bIns="0" rtlCol="0" anchor="ctr"/>
+          <a:lstStyle/>
+          <a:p>
+            <a:pPr algn="ctr" indent="0" marL="0">
+              <a:buNone/>
+            </a:pPr>
+            <a:r>
+              <a:rPr lang="en-US" sz="1000" dirty="0">
+                <a:solidFill>
+                  <a:srgbClr val="003A63"/>
+                </a:solidFill>
+                <a:latin typeface="Aptos" pitchFamily="34" charset="0"/>
+                <a:ea typeface="Aptos" pitchFamily="34" charset="-122"/>
+                <a:cs typeface="Aptos" pitchFamily="34" charset="-120"/>
+              </a:rPr>
+              <a:t>Concept to action</a:t>
+            </a:r>
+            <a:endParaRPr lang="en-US" sz="1000" dirty="0"/>
+          </a:p>
+        </p:txBody>
+      </p:sp>
+      <p:sp>
+        <p:nvSpPr>
+          <p:cNvPr id="18" name="Shape 16"/>
+          <p:cNvSpPr/>
+          <p:nvPr/>
+        </p:nvSpPr>
+        <p:spPr>
+          <a:xfrm>
+            <a:off x="7635240" y="4498848"/>
+            <a:ext cx="3474720" cy="1143000"/>
+          </a:xfrm>
+          <a:prstGeom prst="roundRect">
+            <a:avLst>
+              <a:gd name="adj" fmla="val 9600"/>
             </a:avLst>
           </a:prstGeom>
           <a:solidFill>
@@ -7080,14 +8006,14 @@
       </p:sp>
       <p:sp>
         <p:nvSpPr>
-          <p:cNvPr id="14" name="Text 12"/>
-          <p:cNvSpPr/>
-          <p:nvPr/>
-        </p:nvSpPr>
-        <p:spPr>
-          <a:xfrm>
-            <a:off x="8074152" y="3666744"/>
-            <a:ext cx="2825496" cy="256032"/>
+          <p:cNvPr id="19" name="Text 17"/>
+          <p:cNvSpPr/>
+          <p:nvPr/>
+        </p:nvSpPr>
+        <p:spPr>
+          <a:xfrm>
+            <a:off x="7799832" y="4645152"/>
+            <a:ext cx="3145536" cy="256032"/>
           </a:xfrm>
           <a:prstGeom prst="rect">
             <a:avLst/>
@@ -7111,7 +8037,7 @@
                 <a:ea typeface="Aptos" pitchFamily="34" charset="-122"/>
                 <a:cs typeface="Aptos" pitchFamily="34" charset="-120"/>
               </a:rPr>
-              <a:t>Use this for</a:t>
+              <a:t>Apply it</a:t>
             </a:r>
             <a:endParaRPr lang="en-US" sz="1300" dirty="0"/>
           </a:p>
@@ -7119,14 +8045,14 @@
       </p:sp>
       <p:sp>
         <p:nvSpPr>
-          <p:cNvPr id="15" name="Text 13"/>
-          <p:cNvSpPr/>
-          <p:nvPr/>
-        </p:nvSpPr>
-        <p:spPr>
-          <a:xfrm>
-            <a:off x="8074152" y="4023360"/>
-            <a:ext cx="2825496" cy="1097280"/>
+          <p:cNvPr id="20" name="Text 18"/>
+          <p:cNvSpPr/>
+          <p:nvPr/>
+        </p:nvSpPr>
+        <p:spPr>
+          <a:xfrm>
+            <a:off x="7799832" y="5001768"/>
+            <a:ext cx="3145536" cy="502920"/>
           </a:xfrm>
           <a:prstGeom prst="rect">
             <a:avLst/>
@@ -7152,7 +8078,7 @@
                 <a:ea typeface="Aptos" pitchFamily="34" charset="-122"/>
                 <a:cs typeface="Aptos" pitchFamily="34" charset="-120"/>
               </a:rPr>
-              <a:t>Connect the concept to public health decisions, safeguards, documentation, or implementation work.</a:t>
+              <a:t>Connect the concept to public health purpose, responsible use, required safeguards, documentation, and the next action a department should take.</a:t>
             </a:r>
             <a:endParaRPr lang="en-US" sz="1550" dirty="0"/>
           </a:p>
@@ -7326,8 +8252,8 @@
         </p:nvSpPr>
         <p:spPr>
           <a:xfrm>
-            <a:off x="9966960" y="6537960"/>
-            <a:ext cx="1645920" cy="201168"/>
+            <a:off x="9646920" y="6537960"/>
+            <a:ext cx="1965960" cy="201168"/>
           </a:xfrm>
           <a:prstGeom prst="rect">
             <a:avLst/>
@@ -7351,7 +8277,7 @@
                 <a:ea typeface="Aptos" pitchFamily="34" charset="-122"/>
                 <a:cs typeface="Aptos" pitchFamily="34" charset="-120"/>
               </a:rPr>
-              <a:t>Â© Paula Soper</a:t>
+              <a:t>Copyright Paula Soper</a:t>
             </a:r>
             <a:endParaRPr lang="en-US" sz="800" dirty="0"/>
           </a:p>
@@ -7398,77 +8324,13 @@
       </p:sp>
       <p:sp>
         <p:nvSpPr>
-          <p:cNvPr id="8" name="Shape 6"/>
+          <p:cNvPr id="8" name="Text 6"/>
           <p:cNvSpPr/>
           <p:nvPr/>
         </p:nvSpPr>
         <p:spPr>
           <a:xfrm>
             <a:off x="640080" y="658368"/>
-            <a:ext cx="420624" cy="420624"/>
-          </a:xfrm>
-          <a:prstGeom prst="ellipse">
-            <a:avLst/>
-          </a:prstGeom>
-          <a:solidFill>
-            <a:srgbClr val="0068B7"/>
-          </a:solidFill>
-          <a:ln w="12700">
-            <a:solidFill>
-              <a:srgbClr val="0068B7"/>
-            </a:solidFill>
-            <a:prstDash val="solid"/>
-          </a:ln>
-        </p:spPr>
-      </p:sp>
-      <p:sp>
-        <p:nvSpPr>
-          <p:cNvPr id="9" name="Text 7"/>
-          <p:cNvSpPr/>
-          <p:nvPr/>
-        </p:nvSpPr>
-        <p:spPr>
-          <a:xfrm>
-            <a:off x="640080" y="731520"/>
-            <a:ext cx="420624" cy="164592"/>
-          </a:xfrm>
-          <a:prstGeom prst="rect">
-            <a:avLst/>
-          </a:prstGeom>
-          <a:noFill/>
-          <a:ln/>
-        </p:spPr>
-        <p:txBody>
-          <a:bodyPr wrap="square" lIns="0" tIns="0" rIns="0" bIns="0" rtlCol="0" anchor="ctr"/>
-          <a:lstStyle/>
-          <a:p>
-            <a:pPr algn="ctr" indent="0" marL="0">
-              <a:buNone/>
-            </a:pPr>
-            <a:r>
-              <a:rPr lang="en-US" sz="1100" b="1" dirty="0">
-                <a:solidFill>
-                  <a:srgbClr val="FFFFFF"/>
-                </a:solidFill>
-                <a:latin typeface="Aptos" pitchFamily="34" charset="0"/>
-                <a:ea typeface="Aptos" pitchFamily="34" charset="-122"/>
-                <a:cs typeface="Aptos" pitchFamily="34" charset="-120"/>
-              </a:rPr>
-              <a:t>8</a:t>
-            </a:r>
-            <a:endParaRPr lang="en-US" sz="1100" dirty="0"/>
-          </a:p>
-        </p:txBody>
-      </p:sp>
-      <p:sp>
-        <p:nvSpPr>
-          <p:cNvPr id="10" name="Text 8"/>
-          <p:cNvSpPr/>
-          <p:nvPr/>
-        </p:nvSpPr>
-        <p:spPr>
-          <a:xfrm>
-            <a:off x="640080" y="621792"/>
             <a:ext cx="10881360" cy="713232"/>
           </a:xfrm>
           <a:prstGeom prst="rect">
@@ -7503,14 +8365,14 @@
       </p:sp>
       <p:sp>
         <p:nvSpPr>
-          <p:cNvPr id="11" name="Text 9"/>
+          <p:cNvPr id="9" name="Text 7"/>
           <p:cNvSpPr/>
           <p:nvPr/>
         </p:nvSpPr>
         <p:spPr>
           <a:xfrm>
             <a:off x="868680" y="1508760"/>
-            <a:ext cx="6537960" cy="4160520"/>
+            <a:ext cx="6309360" cy="4160520"/>
           </a:xfrm>
           <a:prstGeom prst="rect">
             <a:avLst/>
@@ -7555,18 +8417,18 @@
       </p:sp>
       <p:sp>
         <p:nvSpPr>
-          <p:cNvPr id="12" name="Shape 10"/>
-          <p:cNvSpPr/>
-          <p:nvPr/>
-        </p:nvSpPr>
-        <p:spPr>
-          <a:xfrm>
-            <a:off x="7909560" y="1417320"/>
-            <a:ext cx="3154680" cy="1828800"/>
+          <p:cNvPr id="10" name="Shape 8"/>
+          <p:cNvSpPr/>
+          <p:nvPr/>
+        </p:nvSpPr>
+        <p:spPr>
+          <a:xfrm>
+            <a:off x="7635240" y="1325880"/>
+            <a:ext cx="3474720" cy="1325880"/>
           </a:xfrm>
           <a:prstGeom prst="roundRect">
             <a:avLst>
-              <a:gd name="adj" fmla="val 6000"/>
+              <a:gd name="adj" fmla="val 8276"/>
             </a:avLst>
           </a:prstGeom>
           <a:solidFill>
@@ -7582,14 +8444,14 @@
       </p:sp>
       <p:sp>
         <p:nvSpPr>
-          <p:cNvPr id="13" name="Text 11"/>
-          <p:cNvSpPr/>
-          <p:nvPr/>
-        </p:nvSpPr>
-        <p:spPr>
-          <a:xfrm>
-            <a:off x="8074152" y="1563624"/>
-            <a:ext cx="2825496" cy="256032"/>
+          <p:cNvPr id="11" name="Text 9"/>
+          <p:cNvSpPr/>
+          <p:nvPr/>
+        </p:nvSpPr>
+        <p:spPr>
+          <a:xfrm>
+            <a:off x="7799832" y="1472184"/>
+            <a:ext cx="3145536" cy="256032"/>
           </a:xfrm>
           <a:prstGeom prst="rect">
             <a:avLst/>
@@ -7613,7 +8475,7 @@
                 <a:ea typeface="Aptos" pitchFamily="34" charset="-122"/>
                 <a:cs typeface="Aptos" pitchFamily="34" charset="-120"/>
               </a:rPr>
-              <a:t>Key idea</a:t>
+              <a:t>Practice focus</a:t>
             </a:r>
             <a:endParaRPr lang="en-US" sz="1300" dirty="0"/>
           </a:p>
@@ -7621,14 +8483,14 @@
       </p:sp>
       <p:sp>
         <p:nvSpPr>
-          <p:cNvPr id="14" name="Text 12"/>
-          <p:cNvSpPr/>
-          <p:nvPr/>
-        </p:nvSpPr>
-        <p:spPr>
-          <a:xfrm>
-            <a:off x="8074152" y="1920240"/>
-            <a:ext cx="2825496" cy="1188720"/>
+          <p:cNvPr id="12" name="Text 10"/>
+          <p:cNvSpPr/>
+          <p:nvPr/>
+        </p:nvSpPr>
+        <p:spPr>
+          <a:xfrm>
+            <a:off x="7799832" y="1828800"/>
+            <a:ext cx="3145536" cy="685800"/>
           </a:xfrm>
           <a:prstGeom prst="rect">
             <a:avLst/>
@@ -7662,18 +8524,159 @@
       </p:sp>
       <p:sp>
         <p:nvSpPr>
-          <p:cNvPr id="15" name="Shape 13"/>
-          <p:cNvSpPr/>
-          <p:nvPr/>
-        </p:nvSpPr>
-        <p:spPr>
-          <a:xfrm>
-            <a:off x="7909560" y="3520440"/>
-            <a:ext cx="3154680" cy="1737360"/>
+          <p:cNvPr id="13" name="Shape 11"/>
+          <p:cNvSpPr/>
+          <p:nvPr/>
+        </p:nvSpPr>
+        <p:spPr>
+          <a:xfrm>
+            <a:off x="7635240" y="2788920"/>
+            <a:ext cx="3474720" cy="1536192"/>
           </a:xfrm>
           <a:prstGeom prst="roundRect">
             <a:avLst>
-              <a:gd name="adj" fmla="val 6316"/>
+              <a:gd name="adj" fmla="val 7143"/>
+            </a:avLst>
+          </a:prstGeom>
+          <a:solidFill>
+            <a:srgbClr val="FFFFFF">
+              <a:alpha val="88000"/>
+            </a:srgbClr>
+          </a:solidFill>
+          <a:ln w="12700">
+            <a:solidFill>
+              <a:srgbClr val="D6E8F2"/>
+            </a:solidFill>
+            <a:prstDash val="solid"/>
+          </a:ln>
+        </p:spPr>
+      </p:sp>
+      <p:sp>
+        <p:nvSpPr>
+          <p:cNvPr id="14" name="Shape 12"/>
+          <p:cNvSpPr/>
+          <p:nvPr/>
+        </p:nvSpPr>
+        <p:spPr>
+          <a:xfrm>
+            <a:off x="8074152" y="3291840"/>
+            <a:ext cx="2596896" cy="749808"/>
+          </a:xfrm>
+          <a:prstGeom prst="rect">
+            <a:avLst/>
+          </a:prstGeom>
+          <a:solidFill>
+            <a:srgbClr val="EAF6F8"/>
+          </a:solidFill>
+          <a:ln w="12700">
+            <a:solidFill>
+              <a:srgbClr val="8ABBD8"/>
+            </a:solidFill>
+            <a:prstDash val="solid"/>
+          </a:ln>
+        </p:spPr>
+      </p:sp>
+      <p:sp>
+        <p:nvSpPr>
+          <p:cNvPr id="15" name="Shape 13"/>
+          <p:cNvSpPr/>
+          <p:nvPr/>
+        </p:nvSpPr>
+        <p:spPr>
+          <a:xfrm>
+            <a:off x="8202168" y="3721608"/>
+            <a:ext cx="2340864" cy="0"/>
+          </a:xfrm>
+          <a:prstGeom prst="line">
+            <a:avLst/>
+          </a:prstGeom>
+          <a:noFill/>
+          <a:ln w="19050">
+            <a:solidFill>
+              <a:srgbClr val="0068B7"/>
+            </a:solidFill>
+            <a:prstDash val="solid"/>
+          </a:ln>
+        </p:spPr>
+      </p:sp>
+      <p:sp>
+        <p:nvSpPr>
+          <p:cNvPr id="16" name="Shape 14"/>
+          <p:cNvSpPr/>
+          <p:nvPr/>
+        </p:nvSpPr>
+        <p:spPr>
+          <a:xfrm>
+            <a:off x="9198864" y="4206240"/>
+            <a:ext cx="347472" cy="347472"/>
+          </a:xfrm>
+          <a:prstGeom prst="ellipse">
+            <a:avLst/>
+          </a:prstGeom>
+          <a:solidFill>
+            <a:srgbClr val="2F8A28"/>
+          </a:solidFill>
+          <a:ln w="12700">
+            <a:solidFill>
+              <a:srgbClr val="2F8A28"/>
+            </a:solidFill>
+            <a:prstDash val="solid"/>
+          </a:ln>
+        </p:spPr>
+      </p:sp>
+      <p:sp>
+        <p:nvSpPr>
+          <p:cNvPr id="17" name="Text 15"/>
+          <p:cNvSpPr/>
+          <p:nvPr/>
+        </p:nvSpPr>
+        <p:spPr>
+          <a:xfrm>
+            <a:off x="7909560" y="3977640"/>
+            <a:ext cx="2926080" cy="182880"/>
+          </a:xfrm>
+          <a:prstGeom prst="rect">
+            <a:avLst/>
+          </a:prstGeom>
+          <a:noFill/>
+          <a:ln/>
+        </p:spPr>
+        <p:txBody>
+          <a:bodyPr wrap="square" lIns="0" tIns="0" rIns="0" bIns="0" rtlCol="0" anchor="ctr"/>
+          <a:lstStyle/>
+          <a:p>
+            <a:pPr algn="ctr" indent="0" marL="0">
+              <a:buNone/>
+            </a:pPr>
+            <a:r>
+              <a:rPr lang="en-US" sz="1000" dirty="0">
+                <a:solidFill>
+                  <a:srgbClr val="003A63"/>
+                </a:solidFill>
+                <a:latin typeface="Aptos" pitchFamily="34" charset="0"/>
+                <a:ea typeface="Aptos" pitchFamily="34" charset="-122"/>
+                <a:cs typeface="Aptos" pitchFamily="34" charset="-120"/>
+              </a:rPr>
+              <a:t>Concept to action</a:t>
+            </a:r>
+            <a:endParaRPr lang="en-US" sz="1000" dirty="0"/>
+          </a:p>
+        </p:txBody>
+      </p:sp>
+      <p:sp>
+        <p:nvSpPr>
+          <p:cNvPr id="18" name="Shape 16"/>
+          <p:cNvSpPr/>
+          <p:nvPr/>
+        </p:nvSpPr>
+        <p:spPr>
+          <a:xfrm>
+            <a:off x="7635240" y="4498848"/>
+            <a:ext cx="3474720" cy="1143000"/>
+          </a:xfrm>
+          <a:prstGeom prst="roundRect">
+            <a:avLst>
+              <a:gd name="adj" fmla="val 9600"/>
             </a:avLst>
           </a:prstGeom>
           <a:solidFill>
@@ -7689,14 +8692,14 @@
       </p:sp>
       <p:sp>
         <p:nvSpPr>
-          <p:cNvPr id="16" name="Text 14"/>
-          <p:cNvSpPr/>
-          <p:nvPr/>
-        </p:nvSpPr>
-        <p:spPr>
-          <a:xfrm>
-            <a:off x="8074152" y="3666744"/>
-            <a:ext cx="2825496" cy="256032"/>
+          <p:cNvPr id="19" name="Text 17"/>
+          <p:cNvSpPr/>
+          <p:nvPr/>
+        </p:nvSpPr>
+        <p:spPr>
+          <a:xfrm>
+            <a:off x="7799832" y="4645152"/>
+            <a:ext cx="3145536" cy="256032"/>
           </a:xfrm>
           <a:prstGeom prst="rect">
             <a:avLst/>
@@ -7720,7 +8723,7 @@
                 <a:ea typeface="Aptos" pitchFamily="34" charset="-122"/>
                 <a:cs typeface="Aptos" pitchFamily="34" charset="-120"/>
               </a:rPr>
-              <a:t>Use this for</a:t>
+              <a:t>What to produce</a:t>
             </a:r>
             <a:endParaRPr lang="en-US" sz="1300" dirty="0"/>
           </a:p>
@@ -7728,14 +8731,14 @@
       </p:sp>
       <p:sp>
         <p:nvSpPr>
-          <p:cNvPr id="17" name="Text 15"/>
-          <p:cNvSpPr/>
-          <p:nvPr/>
-        </p:nvSpPr>
-        <p:spPr>
-          <a:xfrm>
-            <a:off x="8074152" y="4023360"/>
-            <a:ext cx="2825496" cy="1097280"/>
+          <p:cNvPr id="20" name="Text 18"/>
+          <p:cNvSpPr/>
+          <p:nvPr/>
+        </p:nvSpPr>
+        <p:spPr>
+          <a:xfrm>
+            <a:off x="7799832" y="5001768"/>
+            <a:ext cx="3145536" cy="502920"/>
           </a:xfrm>
           <a:prstGeom prst="rect">
             <a:avLst/>
@@ -7761,7 +8764,7 @@
                 <a:ea typeface="Aptos" pitchFamily="34" charset="-122"/>
                 <a:cs typeface="Aptos" pitchFamily="34" charset="-120"/>
               </a:rPr>
-              <a:t>Connect the concept to public health decisions, safeguards, documentation, or implementation work.</a:t>
+              <a:t>Use the assignment to test whether you can explain the concept, apply it to a realistic public health situation, and identify what would need review before the work moves forward.</a:t>
             </a:r>
             <a:endParaRPr lang="en-US" sz="1550" dirty="0"/>
           </a:p>
@@ -7935,8 +8938,8 @@
         </p:nvSpPr>
         <p:spPr>
           <a:xfrm>
-            <a:off x="9966960" y="6537960"/>
-            <a:ext cx="1645920" cy="201168"/>
+            <a:off x="9646920" y="6537960"/>
+            <a:ext cx="1965960" cy="201168"/>
           </a:xfrm>
           <a:prstGeom prst="rect">
             <a:avLst/>
@@ -7960,7 +8963,7 @@
                 <a:ea typeface="Aptos" pitchFamily="34" charset="-122"/>
                 <a:cs typeface="Aptos" pitchFamily="34" charset="-120"/>
               </a:rPr>
-              <a:t>Â© Paula Soper</a:t>
+              <a:t>Copyright Paula Soper</a:t>
             </a:r>
             <a:endParaRPr lang="en-US" sz="800" dirty="0"/>
           </a:p>
@@ -8007,77 +9010,13 @@
       </p:sp>
       <p:sp>
         <p:nvSpPr>
-          <p:cNvPr id="8" name="Shape 6"/>
+          <p:cNvPr id="8" name="Text 6"/>
           <p:cNvSpPr/>
           <p:nvPr/>
         </p:nvSpPr>
         <p:spPr>
           <a:xfrm>
             <a:off x="640080" y="658368"/>
-            <a:ext cx="420624" cy="420624"/>
-          </a:xfrm>
-          <a:prstGeom prst="ellipse">
-            <a:avLst/>
-          </a:prstGeom>
-          <a:solidFill>
-            <a:srgbClr val="0068B7"/>
-          </a:solidFill>
-          <a:ln w="12700">
-            <a:solidFill>
-              <a:srgbClr val="0068B7"/>
-            </a:solidFill>
-            <a:prstDash val="solid"/>
-          </a:ln>
-        </p:spPr>
-      </p:sp>
-      <p:sp>
-        <p:nvSpPr>
-          <p:cNvPr id="9" name="Text 7"/>
-          <p:cNvSpPr/>
-          <p:nvPr/>
-        </p:nvSpPr>
-        <p:spPr>
-          <a:xfrm>
-            <a:off x="640080" y="731520"/>
-            <a:ext cx="420624" cy="164592"/>
-          </a:xfrm>
-          <a:prstGeom prst="rect">
-            <a:avLst/>
-          </a:prstGeom>
-          <a:noFill/>
-          <a:ln/>
-        </p:spPr>
-        <p:txBody>
-          <a:bodyPr wrap="square" lIns="0" tIns="0" rIns="0" bIns="0" rtlCol="0" anchor="ctr"/>
-          <a:lstStyle/>
-          <a:p>
-            <a:pPr algn="ctr" indent="0" marL="0">
-              <a:buNone/>
-            </a:pPr>
-            <a:r>
-              <a:rPr lang="en-US" sz="1100" b="1" dirty="0">
-                <a:solidFill>
-                  <a:srgbClr val="FFFFFF"/>
-                </a:solidFill>
-                <a:latin typeface="Aptos" pitchFamily="34" charset="0"/>
-                <a:ea typeface="Aptos" pitchFamily="34" charset="-122"/>
-                <a:cs typeface="Aptos" pitchFamily="34" charset="-120"/>
-              </a:rPr>
-              <a:t>9</a:t>
-            </a:r>
-            <a:endParaRPr lang="en-US" sz="1100" dirty="0"/>
-          </a:p>
-        </p:txBody>
-      </p:sp>
-      <p:sp>
-        <p:nvSpPr>
-          <p:cNvPr id="10" name="Text 8"/>
-          <p:cNvSpPr/>
-          <p:nvPr/>
-        </p:nvSpPr>
-        <p:spPr>
-          <a:xfrm>
-            <a:off x="640080" y="621792"/>
             <a:ext cx="10881360" cy="713232"/>
           </a:xfrm>
           <a:prstGeom prst="rect">
@@ -8112,14 +9051,14 @@
       </p:sp>
       <p:sp>
         <p:nvSpPr>
-          <p:cNvPr id="11" name="Text 9"/>
+          <p:cNvPr id="9" name="Text 7"/>
           <p:cNvSpPr/>
           <p:nvPr/>
         </p:nvSpPr>
         <p:spPr>
           <a:xfrm>
             <a:off x="868680" y="1508760"/>
-            <a:ext cx="6537960" cy="4160520"/>
+            <a:ext cx="6309360" cy="4160520"/>
           </a:xfrm>
           <a:prstGeom prst="rect">
             <a:avLst/>
@@ -8178,18 +9117,18 @@
       </p:sp>
       <p:sp>
         <p:nvSpPr>
-          <p:cNvPr id="12" name="Shape 10"/>
-          <p:cNvSpPr/>
-          <p:nvPr/>
-        </p:nvSpPr>
-        <p:spPr>
-          <a:xfrm>
-            <a:off x="7909560" y="1417320"/>
-            <a:ext cx="3154680" cy="1828800"/>
+          <p:cNvPr id="10" name="Shape 8"/>
+          <p:cNvSpPr/>
+          <p:nvPr/>
+        </p:nvSpPr>
+        <p:spPr>
+          <a:xfrm>
+            <a:off x="7635240" y="1325880"/>
+            <a:ext cx="3474720" cy="1325880"/>
           </a:xfrm>
           <a:prstGeom prst="roundRect">
             <a:avLst>
-              <a:gd name="adj" fmla="val 6000"/>
+              <a:gd name="adj" fmla="val 8276"/>
             </a:avLst>
           </a:prstGeom>
           <a:solidFill>
@@ -8205,14 +9144,14 @@
       </p:sp>
       <p:sp>
         <p:nvSpPr>
-          <p:cNvPr id="13" name="Text 11"/>
-          <p:cNvSpPr/>
-          <p:nvPr/>
-        </p:nvSpPr>
-        <p:spPr>
-          <a:xfrm>
-            <a:off x="8074152" y="1563624"/>
-            <a:ext cx="2825496" cy="256032"/>
+          <p:cNvPr id="11" name="Text 9"/>
+          <p:cNvSpPr/>
+          <p:nvPr/>
+        </p:nvSpPr>
+        <p:spPr>
+          <a:xfrm>
+            <a:off x="7799832" y="1472184"/>
+            <a:ext cx="3145536" cy="256032"/>
           </a:xfrm>
           <a:prstGeom prst="rect">
             <a:avLst/>
@@ -8236,7 +9175,7 @@
                 <a:ea typeface="Aptos" pitchFamily="34" charset="-122"/>
                 <a:cs typeface="Aptos" pitchFamily="34" charset="-120"/>
               </a:rPr>
-              <a:t>Key idea</a:t>
+              <a:t>Core concept</a:t>
             </a:r>
             <a:endParaRPr lang="en-US" sz="1300" dirty="0"/>
           </a:p>
@@ -8244,14 +9183,14 @@
       </p:sp>
       <p:sp>
         <p:nvSpPr>
-          <p:cNvPr id="14" name="Text 12"/>
-          <p:cNvSpPr/>
-          <p:nvPr/>
-        </p:nvSpPr>
-        <p:spPr>
-          <a:xfrm>
-            <a:off x="8074152" y="1920240"/>
-            <a:ext cx="2825496" cy="1188720"/>
+          <p:cNvPr id="12" name="Text 10"/>
+          <p:cNvSpPr/>
+          <p:nvPr/>
+        </p:nvSpPr>
+        <p:spPr>
+          <a:xfrm>
+            <a:off x="7799832" y="1828800"/>
+            <a:ext cx="3145536" cy="685800"/>
           </a:xfrm>
           <a:prstGeom prst="rect">
             <a:avLst/>
@@ -8285,18 +9224,159 @@
       </p:sp>
       <p:sp>
         <p:nvSpPr>
-          <p:cNvPr id="15" name="Shape 13"/>
-          <p:cNvSpPr/>
-          <p:nvPr/>
-        </p:nvSpPr>
-        <p:spPr>
-          <a:xfrm>
-            <a:off x="7909560" y="3520440"/>
-            <a:ext cx="3154680" cy="1737360"/>
+          <p:cNvPr id="13" name="Shape 11"/>
+          <p:cNvSpPr/>
+          <p:nvPr/>
+        </p:nvSpPr>
+        <p:spPr>
+          <a:xfrm>
+            <a:off x="7635240" y="2788920"/>
+            <a:ext cx="3474720" cy="1536192"/>
           </a:xfrm>
           <a:prstGeom prst="roundRect">
             <a:avLst>
-              <a:gd name="adj" fmla="val 6316"/>
+              <a:gd name="adj" fmla="val 7143"/>
+            </a:avLst>
+          </a:prstGeom>
+          <a:solidFill>
+            <a:srgbClr val="FFFFFF">
+              <a:alpha val="88000"/>
+            </a:srgbClr>
+          </a:solidFill>
+          <a:ln w="12700">
+            <a:solidFill>
+              <a:srgbClr val="D6E8F2"/>
+            </a:solidFill>
+            <a:prstDash val="solid"/>
+          </a:ln>
+        </p:spPr>
+      </p:sp>
+      <p:sp>
+        <p:nvSpPr>
+          <p:cNvPr id="14" name="Shape 12"/>
+          <p:cNvSpPr/>
+          <p:nvPr/>
+        </p:nvSpPr>
+        <p:spPr>
+          <a:xfrm>
+            <a:off x="8074152" y="3291840"/>
+            <a:ext cx="2596896" cy="749808"/>
+          </a:xfrm>
+          <a:prstGeom prst="rect">
+            <a:avLst/>
+          </a:prstGeom>
+          <a:solidFill>
+            <a:srgbClr val="EAF6F8"/>
+          </a:solidFill>
+          <a:ln w="12700">
+            <a:solidFill>
+              <a:srgbClr val="8ABBD8"/>
+            </a:solidFill>
+            <a:prstDash val="solid"/>
+          </a:ln>
+        </p:spPr>
+      </p:sp>
+      <p:sp>
+        <p:nvSpPr>
+          <p:cNvPr id="15" name="Shape 13"/>
+          <p:cNvSpPr/>
+          <p:nvPr/>
+        </p:nvSpPr>
+        <p:spPr>
+          <a:xfrm>
+            <a:off x="8202168" y="3721608"/>
+            <a:ext cx="2340864" cy="0"/>
+          </a:xfrm>
+          <a:prstGeom prst="line">
+            <a:avLst/>
+          </a:prstGeom>
+          <a:noFill/>
+          <a:ln w="19050">
+            <a:solidFill>
+              <a:srgbClr val="0068B7"/>
+            </a:solidFill>
+            <a:prstDash val="solid"/>
+          </a:ln>
+        </p:spPr>
+      </p:sp>
+      <p:sp>
+        <p:nvSpPr>
+          <p:cNvPr id="16" name="Shape 14"/>
+          <p:cNvSpPr/>
+          <p:nvPr/>
+        </p:nvSpPr>
+        <p:spPr>
+          <a:xfrm>
+            <a:off x="9198864" y="4206240"/>
+            <a:ext cx="347472" cy="347472"/>
+          </a:xfrm>
+          <a:prstGeom prst="ellipse">
+            <a:avLst/>
+          </a:prstGeom>
+          <a:solidFill>
+            <a:srgbClr val="2F8A28"/>
+          </a:solidFill>
+          <a:ln w="12700">
+            <a:solidFill>
+              <a:srgbClr val="2F8A28"/>
+            </a:solidFill>
+            <a:prstDash val="solid"/>
+          </a:ln>
+        </p:spPr>
+      </p:sp>
+      <p:sp>
+        <p:nvSpPr>
+          <p:cNvPr id="17" name="Text 15"/>
+          <p:cNvSpPr/>
+          <p:nvPr/>
+        </p:nvSpPr>
+        <p:spPr>
+          <a:xfrm>
+            <a:off x="7909560" y="3977640"/>
+            <a:ext cx="2926080" cy="182880"/>
+          </a:xfrm>
+          <a:prstGeom prst="rect">
+            <a:avLst/>
+          </a:prstGeom>
+          <a:noFill/>
+          <a:ln/>
+        </p:spPr>
+        <p:txBody>
+          <a:bodyPr wrap="square" lIns="0" tIns="0" rIns="0" bIns="0" rtlCol="0" anchor="ctr"/>
+          <a:lstStyle/>
+          <a:p>
+            <a:pPr algn="ctr" indent="0" marL="0">
+              <a:buNone/>
+            </a:pPr>
+            <a:r>
+              <a:rPr lang="en-US" sz="1000" dirty="0">
+                <a:solidFill>
+                  <a:srgbClr val="003A63"/>
+                </a:solidFill>
+                <a:latin typeface="Aptos" pitchFamily="34" charset="0"/>
+                <a:ea typeface="Aptos" pitchFamily="34" charset="-122"/>
+                <a:cs typeface="Aptos" pitchFamily="34" charset="-120"/>
+              </a:rPr>
+              <a:t>Concept to action</a:t>
+            </a:r>
+            <a:endParaRPr lang="en-US" sz="1000" dirty="0"/>
+          </a:p>
+        </p:txBody>
+      </p:sp>
+      <p:sp>
+        <p:nvSpPr>
+          <p:cNvPr id="18" name="Shape 16"/>
+          <p:cNvSpPr/>
+          <p:nvPr/>
+        </p:nvSpPr>
+        <p:spPr>
+          <a:xfrm>
+            <a:off x="7635240" y="4498848"/>
+            <a:ext cx="3474720" cy="1143000"/>
+          </a:xfrm>
+          <a:prstGeom prst="roundRect">
+            <a:avLst>
+              <a:gd name="adj" fmla="val 9600"/>
             </a:avLst>
           </a:prstGeom>
           <a:solidFill>
@@ -8312,14 +9392,14 @@
       </p:sp>
       <p:sp>
         <p:nvSpPr>
-          <p:cNvPr id="16" name="Text 14"/>
-          <p:cNvSpPr/>
-          <p:nvPr/>
-        </p:nvSpPr>
-        <p:spPr>
-          <a:xfrm>
-            <a:off x="8074152" y="3666744"/>
-            <a:ext cx="2825496" cy="256032"/>
+          <p:cNvPr id="19" name="Text 17"/>
+          <p:cNvSpPr/>
+          <p:nvPr/>
+        </p:nvSpPr>
+        <p:spPr>
+          <a:xfrm>
+            <a:off x="7799832" y="4645152"/>
+            <a:ext cx="3145536" cy="256032"/>
           </a:xfrm>
           <a:prstGeom prst="rect">
             <a:avLst/>
@@ -8343,7 +9423,7 @@
                 <a:ea typeface="Aptos" pitchFamily="34" charset="-122"/>
                 <a:cs typeface="Aptos" pitchFamily="34" charset="-120"/>
               </a:rPr>
-              <a:t>Use this for</a:t>
+              <a:t>Apply it</a:t>
             </a:r>
             <a:endParaRPr lang="en-US" sz="1300" dirty="0"/>
           </a:p>
@@ -8351,14 +9431,14 @@
       </p:sp>
       <p:sp>
         <p:nvSpPr>
-          <p:cNvPr id="17" name="Text 15"/>
-          <p:cNvSpPr/>
-          <p:nvPr/>
-        </p:nvSpPr>
-        <p:spPr>
-          <a:xfrm>
-            <a:off x="8074152" y="4023360"/>
-            <a:ext cx="2825496" cy="1097280"/>
+          <p:cNvPr id="20" name="Text 18"/>
+          <p:cNvSpPr/>
+          <p:nvPr/>
+        </p:nvSpPr>
+        <p:spPr>
+          <a:xfrm>
+            <a:off x="7799832" y="5001768"/>
+            <a:ext cx="3145536" cy="502920"/>
           </a:xfrm>
           <a:prstGeom prst="rect">
             <a:avLst/>
@@ -8384,7 +9464,7 @@
                 <a:ea typeface="Aptos" pitchFamily="34" charset="-122"/>
                 <a:cs typeface="Aptos" pitchFamily="34" charset="-120"/>
               </a:rPr>
-              <a:t>Connect the concept to public health decisions, safeguards, documentation, or implementation work.</a:t>
+              <a:t>Connect the concept to public health purpose, responsible use, required safeguards, documentation, and the next action a department should take.</a:t>
             </a:r>
             <a:endParaRPr lang="en-US" sz="1550" dirty="0"/>
           </a:p>
@@ -8558,8 +9638,8 @@
         </p:nvSpPr>
         <p:spPr>
           <a:xfrm>
-            <a:off x="9966960" y="6537960"/>
-            <a:ext cx="1645920" cy="201168"/>
+            <a:off x="9646920" y="6537960"/>
+            <a:ext cx="1965960" cy="201168"/>
           </a:xfrm>
           <a:prstGeom prst="rect">
             <a:avLst/>
@@ -8583,7 +9663,7 @@
                 <a:ea typeface="Aptos" pitchFamily="34" charset="-122"/>
                 <a:cs typeface="Aptos" pitchFamily="34" charset="-120"/>
               </a:rPr>
-              <a:t>Â© Paula Soper</a:t>
+              <a:t>Copyright Paula Soper</a:t>
             </a:r>
             <a:endParaRPr lang="en-US" sz="800" dirty="0"/>
           </a:p>
@@ -8678,7 +9758,7 @@
         <p:spPr>
           <a:xfrm>
             <a:off x="868680" y="1508760"/>
-            <a:ext cx="6537960" cy="4160520"/>
+            <a:ext cx="6309360" cy="4160520"/>
           </a:xfrm>
           <a:prstGeom prst="rect">
             <a:avLst/>
@@ -8729,12 +9809,12 @@
         </p:nvSpPr>
         <p:spPr>
           <a:xfrm>
-            <a:off x="7909560" y="1417320"/>
-            <a:ext cx="3154680" cy="1828800"/>
+            <a:off x="7635240" y="1325880"/>
+            <a:ext cx="3474720" cy="1325880"/>
           </a:xfrm>
           <a:prstGeom prst="roundRect">
             <a:avLst>
-              <a:gd name="adj" fmla="val 6000"/>
+              <a:gd name="adj" fmla="val 8276"/>
             </a:avLst>
           </a:prstGeom>
           <a:solidFill>
@@ -8756,8 +9836,8 @@
         </p:nvSpPr>
         <p:spPr>
           <a:xfrm>
-            <a:off x="8074152" y="1563624"/>
-            <a:ext cx="2825496" cy="256032"/>
+            <a:off x="7799832" y="1472184"/>
+            <a:ext cx="3145536" cy="256032"/>
           </a:xfrm>
           <a:prstGeom prst="rect">
             <a:avLst/>
@@ -8781,7 +9861,7 @@
                 <a:ea typeface="Aptos" pitchFamily="34" charset="-122"/>
                 <a:cs typeface="Aptos" pitchFamily="34" charset="-120"/>
               </a:rPr>
-              <a:t>Key idea</a:t>
+              <a:t>Core concept</a:t>
             </a:r>
             <a:endParaRPr lang="en-US" sz="1300" dirty="0"/>
           </a:p>
@@ -8795,8 +9875,8 @@
         </p:nvSpPr>
         <p:spPr>
           <a:xfrm>
-            <a:off x="8074152" y="1920240"/>
-            <a:ext cx="2825496" cy="1188720"/>
+            <a:off x="7799832" y="1828800"/>
+            <a:ext cx="3145536" cy="685800"/>
           </a:xfrm>
           <a:prstGeom prst="rect">
             <a:avLst/>
@@ -8836,12 +9916,153 @@
         </p:nvSpPr>
         <p:spPr>
           <a:xfrm>
-            <a:off x="7909560" y="3520440"/>
-            <a:ext cx="3154680" cy="1737360"/>
+            <a:off x="7635240" y="2788920"/>
+            <a:ext cx="3474720" cy="1536192"/>
           </a:xfrm>
           <a:prstGeom prst="roundRect">
             <a:avLst>
-              <a:gd name="adj" fmla="val 6316"/>
+              <a:gd name="adj" fmla="val 7143"/>
+            </a:avLst>
+          </a:prstGeom>
+          <a:solidFill>
+            <a:srgbClr val="FFFFFF">
+              <a:alpha val="88000"/>
+            </a:srgbClr>
+          </a:solidFill>
+          <a:ln w="12700">
+            <a:solidFill>
+              <a:srgbClr val="D6E8F2"/>
+            </a:solidFill>
+            <a:prstDash val="solid"/>
+          </a:ln>
+        </p:spPr>
+      </p:sp>
+      <p:sp>
+        <p:nvSpPr>
+          <p:cNvPr id="14" name="Shape 12"/>
+          <p:cNvSpPr/>
+          <p:nvPr/>
+        </p:nvSpPr>
+        <p:spPr>
+          <a:xfrm>
+            <a:off x="8074152" y="3291840"/>
+            <a:ext cx="2596896" cy="749808"/>
+          </a:xfrm>
+          <a:prstGeom prst="rect">
+            <a:avLst/>
+          </a:prstGeom>
+          <a:solidFill>
+            <a:srgbClr val="EAF6F8"/>
+          </a:solidFill>
+          <a:ln w="12700">
+            <a:solidFill>
+              <a:srgbClr val="8ABBD8"/>
+            </a:solidFill>
+            <a:prstDash val="solid"/>
+          </a:ln>
+        </p:spPr>
+      </p:sp>
+      <p:sp>
+        <p:nvSpPr>
+          <p:cNvPr id="15" name="Shape 13"/>
+          <p:cNvSpPr/>
+          <p:nvPr/>
+        </p:nvSpPr>
+        <p:spPr>
+          <a:xfrm>
+            <a:off x="8202168" y="3721608"/>
+            <a:ext cx="2340864" cy="0"/>
+          </a:xfrm>
+          <a:prstGeom prst="line">
+            <a:avLst/>
+          </a:prstGeom>
+          <a:noFill/>
+          <a:ln w="19050">
+            <a:solidFill>
+              <a:srgbClr val="0068B7"/>
+            </a:solidFill>
+            <a:prstDash val="solid"/>
+          </a:ln>
+        </p:spPr>
+      </p:sp>
+      <p:sp>
+        <p:nvSpPr>
+          <p:cNvPr id="16" name="Shape 14"/>
+          <p:cNvSpPr/>
+          <p:nvPr/>
+        </p:nvSpPr>
+        <p:spPr>
+          <a:xfrm>
+            <a:off x="9198864" y="4206240"/>
+            <a:ext cx="347472" cy="347472"/>
+          </a:xfrm>
+          <a:prstGeom prst="ellipse">
+            <a:avLst/>
+          </a:prstGeom>
+          <a:solidFill>
+            <a:srgbClr val="2F8A28"/>
+          </a:solidFill>
+          <a:ln w="12700">
+            <a:solidFill>
+              <a:srgbClr val="2F8A28"/>
+            </a:solidFill>
+            <a:prstDash val="solid"/>
+          </a:ln>
+        </p:spPr>
+      </p:sp>
+      <p:sp>
+        <p:nvSpPr>
+          <p:cNvPr id="17" name="Text 15"/>
+          <p:cNvSpPr/>
+          <p:nvPr/>
+        </p:nvSpPr>
+        <p:spPr>
+          <a:xfrm>
+            <a:off x="7909560" y="3977640"/>
+            <a:ext cx="2926080" cy="182880"/>
+          </a:xfrm>
+          <a:prstGeom prst="rect">
+            <a:avLst/>
+          </a:prstGeom>
+          <a:noFill/>
+          <a:ln/>
+        </p:spPr>
+        <p:txBody>
+          <a:bodyPr wrap="square" lIns="0" tIns="0" rIns="0" bIns="0" rtlCol="0" anchor="ctr"/>
+          <a:lstStyle/>
+          <a:p>
+            <a:pPr algn="ctr" indent="0" marL="0">
+              <a:buNone/>
+            </a:pPr>
+            <a:r>
+              <a:rPr lang="en-US" sz="1000" dirty="0">
+                <a:solidFill>
+                  <a:srgbClr val="003A63"/>
+                </a:solidFill>
+                <a:latin typeface="Aptos" pitchFamily="34" charset="0"/>
+                <a:ea typeface="Aptos" pitchFamily="34" charset="-122"/>
+                <a:cs typeface="Aptos" pitchFamily="34" charset="-120"/>
+              </a:rPr>
+              <a:t>Concept to action</a:t>
+            </a:r>
+            <a:endParaRPr lang="en-US" sz="1000" dirty="0"/>
+          </a:p>
+        </p:txBody>
+      </p:sp>
+      <p:sp>
+        <p:nvSpPr>
+          <p:cNvPr id="18" name="Shape 16"/>
+          <p:cNvSpPr/>
+          <p:nvPr/>
+        </p:nvSpPr>
+        <p:spPr>
+          <a:xfrm>
+            <a:off x="7635240" y="4498848"/>
+            <a:ext cx="3474720" cy="1143000"/>
+          </a:xfrm>
+          <a:prstGeom prst="roundRect">
+            <a:avLst>
+              <a:gd name="adj" fmla="val 9600"/>
             </a:avLst>
           </a:prstGeom>
           <a:solidFill>
@@ -8857,14 +10078,14 @@
       </p:sp>
       <p:sp>
         <p:nvSpPr>
-          <p:cNvPr id="14" name="Text 12"/>
-          <p:cNvSpPr/>
-          <p:nvPr/>
-        </p:nvSpPr>
-        <p:spPr>
-          <a:xfrm>
-            <a:off x="8074152" y="3666744"/>
-            <a:ext cx="2825496" cy="256032"/>
+          <p:cNvPr id="19" name="Text 17"/>
+          <p:cNvSpPr/>
+          <p:nvPr/>
+        </p:nvSpPr>
+        <p:spPr>
+          <a:xfrm>
+            <a:off x="7799832" y="4645152"/>
+            <a:ext cx="3145536" cy="256032"/>
           </a:xfrm>
           <a:prstGeom prst="rect">
             <a:avLst/>
@@ -8888,7 +10109,7 @@
                 <a:ea typeface="Aptos" pitchFamily="34" charset="-122"/>
                 <a:cs typeface="Aptos" pitchFamily="34" charset="-120"/>
               </a:rPr>
-              <a:t>Use this for</a:t>
+              <a:t>Apply it</a:t>
             </a:r>
             <a:endParaRPr lang="en-US" sz="1300" dirty="0"/>
           </a:p>
@@ -8896,14 +10117,14 @@
       </p:sp>
       <p:sp>
         <p:nvSpPr>
-          <p:cNvPr id="15" name="Text 13"/>
-          <p:cNvSpPr/>
-          <p:nvPr/>
-        </p:nvSpPr>
-        <p:spPr>
-          <a:xfrm>
-            <a:off x="8074152" y="4023360"/>
-            <a:ext cx="2825496" cy="1097280"/>
+          <p:cNvPr id="20" name="Text 18"/>
+          <p:cNvSpPr/>
+          <p:nvPr/>
+        </p:nvSpPr>
+        <p:spPr>
+          <a:xfrm>
+            <a:off x="7799832" y="5001768"/>
+            <a:ext cx="3145536" cy="502920"/>
           </a:xfrm>
           <a:prstGeom prst="rect">
             <a:avLst/>
@@ -8929,7 +10150,7 @@
                 <a:ea typeface="Aptos" pitchFamily="34" charset="-122"/>
                 <a:cs typeface="Aptos" pitchFamily="34" charset="-120"/>
               </a:rPr>
-              <a:t>Connect the concept to public health decisions, safeguards, documentation, or implementation work.</a:t>
+              <a:t>Connect the concept to public health purpose, responsible use, required safeguards, documentation, and the next action a department should take.</a:t>
             </a:r>
             <a:endParaRPr lang="en-US" sz="1550" dirty="0"/>
           </a:p>
@@ -9103,8 +10324,8 @@
         </p:nvSpPr>
         <p:spPr>
           <a:xfrm>
-            <a:off x="9966960" y="6537960"/>
-            <a:ext cx="1645920" cy="201168"/>
+            <a:off x="9646920" y="6537960"/>
+            <a:ext cx="1965960" cy="201168"/>
           </a:xfrm>
           <a:prstGeom prst="rect">
             <a:avLst/>
@@ -9128,7 +10349,7 @@
                 <a:ea typeface="Aptos" pitchFamily="34" charset="-122"/>
                 <a:cs typeface="Aptos" pitchFamily="34" charset="-120"/>
               </a:rPr>
-              <a:t>Â© Paula Soper</a:t>
+              <a:t>Copyright Paula Soper</a:t>
             </a:r>
             <a:endParaRPr lang="en-US" sz="800" dirty="0"/>
           </a:p>
@@ -9491,46 +10712,7 @@
       </p:sp>
       <p:sp>
         <p:nvSpPr>
-          <p:cNvPr id="15" name="Text 13"/>
-          <p:cNvSpPr/>
-          <p:nvPr/>
-        </p:nvSpPr>
-        <p:spPr>
-          <a:xfrm>
-            <a:off x="8695944" y="3941064"/>
-            <a:ext cx="201168" cy="256032"/>
-          </a:xfrm>
-          <a:prstGeom prst="rect">
-            <a:avLst/>
-          </a:prstGeom>
-          <a:noFill/>
-          <a:ln/>
-        </p:spPr>
-        <p:txBody>
-          <a:bodyPr wrap="square" lIns="0" tIns="0" rIns="0" bIns="0" rtlCol="0" anchor="ctr"/>
-          <a:lstStyle/>
-          <a:p>
-            <a:pPr algn="ctr" indent="0" marL="0">
-              <a:buNone/>
-            </a:pPr>
-            <a:r>
-              <a:rPr lang="en-US" sz="1800" b="1" dirty="0">
-                <a:solidFill>
-                  <a:srgbClr val="0068B7"/>
-                </a:solidFill>
-                <a:latin typeface="Aptos" pitchFamily="34" charset="0"/>
-                <a:ea typeface="Aptos" pitchFamily="34" charset="-122"/>
-                <a:cs typeface="Aptos" pitchFamily="34" charset="-120"/>
-              </a:rPr>
-              <a:t>â†’</a:t>
-            </a:r>
-            <a:endParaRPr lang="en-US" sz="1800" dirty="0"/>
-          </a:p>
-        </p:txBody>
-      </p:sp>
-      <p:sp>
-        <p:nvSpPr>
-          <p:cNvPr id="16" name="Shape 14"/>
+          <p:cNvPr id="15" name="Shape 13"/>
           <p:cNvSpPr/>
           <p:nvPr/>
         </p:nvSpPr>
@@ -9557,7 +10739,7 @@
       </p:sp>
       <p:sp>
         <p:nvSpPr>
-          <p:cNvPr id="17" name="Text 15"/>
+          <p:cNvPr id="16" name="Text 14"/>
           <p:cNvSpPr/>
           <p:nvPr/>
         </p:nvSpPr>
@@ -9598,46 +10780,7 @@
       </p:sp>
       <p:sp>
         <p:nvSpPr>
-          <p:cNvPr id="18" name="Text 16"/>
-          <p:cNvSpPr/>
-          <p:nvPr/>
-        </p:nvSpPr>
-        <p:spPr>
-          <a:xfrm>
-            <a:off x="9985248" y="3941064"/>
-            <a:ext cx="201168" cy="256032"/>
-          </a:xfrm>
-          <a:prstGeom prst="rect">
-            <a:avLst/>
-          </a:prstGeom>
-          <a:noFill/>
-          <a:ln/>
-        </p:spPr>
-        <p:txBody>
-          <a:bodyPr wrap="square" lIns="0" tIns="0" rIns="0" bIns="0" rtlCol="0" anchor="ctr"/>
-          <a:lstStyle/>
-          <a:p>
-            <a:pPr algn="ctr" indent="0" marL="0">
-              <a:buNone/>
-            </a:pPr>
-            <a:r>
-              <a:rPr lang="en-US" sz="1800" b="1" dirty="0">
-                <a:solidFill>
-                  <a:srgbClr val="0068B7"/>
-                </a:solidFill>
-                <a:latin typeface="Aptos" pitchFamily="34" charset="0"/>
-                <a:ea typeface="Aptos" pitchFamily="34" charset="-122"/>
-                <a:cs typeface="Aptos" pitchFamily="34" charset="-120"/>
-              </a:rPr>
-              <a:t>â†’</a:t>
-            </a:r>
-            <a:endParaRPr lang="en-US" sz="1800" dirty="0"/>
-          </a:p>
-        </p:txBody>
-      </p:sp>
-      <p:sp>
-        <p:nvSpPr>
-          <p:cNvPr id="19" name="Shape 17"/>
+          <p:cNvPr id="17" name="Shape 15"/>
           <p:cNvSpPr/>
           <p:nvPr/>
         </p:nvSpPr>
@@ -9664,7 +10807,7 @@
       </p:sp>
       <p:sp>
         <p:nvSpPr>
-          <p:cNvPr id="20" name="Text 18"/>
+          <p:cNvPr id="18" name="Text 16"/>
           <p:cNvSpPr/>
           <p:nvPr/>
         </p:nvSpPr>
@@ -9871,8 +11014,8 @@
         </p:nvSpPr>
         <p:spPr>
           <a:xfrm>
-            <a:off x="9966960" y="6537960"/>
-            <a:ext cx="1645920" cy="201168"/>
+            <a:off x="9646920" y="6537960"/>
+            <a:ext cx="1965960" cy="201168"/>
           </a:xfrm>
           <a:prstGeom prst="rect">
             <a:avLst/>
@@ -9896,7 +11039,7 @@
                 <a:ea typeface="Aptos" pitchFamily="34" charset="-122"/>
                 <a:cs typeface="Aptos" pitchFamily="34" charset="-120"/>
               </a:rPr>
-              <a:t>Â© Paula Soper</a:t>
+              <a:t>Copyright Paula Soper</a:t>
             </a:r>
             <a:endParaRPr lang="en-US" sz="800" dirty="0"/>
           </a:p>
@@ -9943,77 +11086,13 @@
       </p:sp>
       <p:sp>
         <p:nvSpPr>
-          <p:cNvPr id="8" name="Shape 6"/>
+          <p:cNvPr id="8" name="Text 6"/>
           <p:cNvSpPr/>
           <p:nvPr/>
         </p:nvSpPr>
         <p:spPr>
           <a:xfrm>
             <a:off x="640080" y="658368"/>
-            <a:ext cx="420624" cy="420624"/>
-          </a:xfrm>
-          <a:prstGeom prst="ellipse">
-            <a:avLst/>
-          </a:prstGeom>
-          <a:solidFill>
-            <a:srgbClr val="0068B7"/>
-          </a:solidFill>
-          <a:ln w="12700">
-            <a:solidFill>
-              <a:srgbClr val="0068B7"/>
-            </a:solidFill>
-            <a:prstDash val="solid"/>
-          </a:ln>
-        </p:spPr>
-      </p:sp>
-      <p:sp>
-        <p:nvSpPr>
-          <p:cNvPr id="9" name="Text 7"/>
-          <p:cNvSpPr/>
-          <p:nvPr/>
-        </p:nvSpPr>
-        <p:spPr>
-          <a:xfrm>
-            <a:off x="640080" y="731520"/>
-            <a:ext cx="420624" cy="164592"/>
-          </a:xfrm>
-          <a:prstGeom prst="rect">
-            <a:avLst/>
-          </a:prstGeom>
-          <a:noFill/>
-          <a:ln/>
-        </p:spPr>
-        <p:txBody>
-          <a:bodyPr wrap="square" lIns="0" tIns="0" rIns="0" bIns="0" rtlCol="0" anchor="ctr"/>
-          <a:lstStyle/>
-          <a:p>
-            <a:pPr algn="ctr" indent="0" marL="0">
-              <a:buNone/>
-            </a:pPr>
-            <a:r>
-              <a:rPr lang="en-US" sz="1100" b="1" dirty="0">
-                <a:solidFill>
-                  <a:srgbClr val="FFFFFF"/>
-                </a:solidFill>
-                <a:latin typeface="Aptos" pitchFamily="34" charset="0"/>
-                <a:ea typeface="Aptos" pitchFamily="34" charset="-122"/>
-                <a:cs typeface="Aptos" pitchFamily="34" charset="-120"/>
-              </a:rPr>
-              <a:t>10</a:t>
-            </a:r>
-            <a:endParaRPr lang="en-US" sz="1100" dirty="0"/>
-          </a:p>
-        </p:txBody>
-      </p:sp>
-      <p:sp>
-        <p:nvSpPr>
-          <p:cNvPr id="10" name="Text 8"/>
-          <p:cNvSpPr/>
-          <p:nvPr/>
-        </p:nvSpPr>
-        <p:spPr>
-          <a:xfrm>
-            <a:off x="640080" y="621792"/>
             <a:ext cx="10881360" cy="713232"/>
           </a:xfrm>
           <a:prstGeom prst="rect">
@@ -10048,14 +11127,14 @@
       </p:sp>
       <p:sp>
         <p:nvSpPr>
-          <p:cNvPr id="11" name="Text 9"/>
+          <p:cNvPr id="9" name="Text 7"/>
           <p:cNvSpPr/>
           <p:nvPr/>
         </p:nvSpPr>
         <p:spPr>
           <a:xfrm>
             <a:off x="868680" y="1508760"/>
-            <a:ext cx="6537960" cy="4160520"/>
+            <a:ext cx="6309360" cy="4160520"/>
           </a:xfrm>
           <a:prstGeom prst="rect">
             <a:avLst/>
@@ -10114,18 +11193,18 @@
       </p:sp>
       <p:sp>
         <p:nvSpPr>
-          <p:cNvPr id="12" name="Shape 10"/>
-          <p:cNvSpPr/>
-          <p:nvPr/>
-        </p:nvSpPr>
-        <p:spPr>
-          <a:xfrm>
-            <a:off x="7909560" y="1417320"/>
-            <a:ext cx="3154680" cy="1828800"/>
+          <p:cNvPr id="10" name="Shape 8"/>
+          <p:cNvSpPr/>
+          <p:nvPr/>
+        </p:nvSpPr>
+        <p:spPr>
+          <a:xfrm>
+            <a:off x="7635240" y="1325880"/>
+            <a:ext cx="3474720" cy="1325880"/>
           </a:xfrm>
           <a:prstGeom prst="roundRect">
             <a:avLst>
-              <a:gd name="adj" fmla="val 6000"/>
+              <a:gd name="adj" fmla="val 8276"/>
             </a:avLst>
           </a:prstGeom>
           <a:solidFill>
@@ -10141,14 +11220,14 @@
       </p:sp>
       <p:sp>
         <p:nvSpPr>
-          <p:cNvPr id="13" name="Text 11"/>
-          <p:cNvSpPr/>
-          <p:nvPr/>
-        </p:nvSpPr>
-        <p:spPr>
-          <a:xfrm>
-            <a:off x="8074152" y="1563624"/>
-            <a:ext cx="2825496" cy="256032"/>
+          <p:cNvPr id="11" name="Text 9"/>
+          <p:cNvSpPr/>
+          <p:nvPr/>
+        </p:nvSpPr>
+        <p:spPr>
+          <a:xfrm>
+            <a:off x="7799832" y="1472184"/>
+            <a:ext cx="3145536" cy="256032"/>
           </a:xfrm>
           <a:prstGeom prst="rect">
             <a:avLst/>
@@ -10172,7 +11251,7 @@
                 <a:ea typeface="Aptos" pitchFamily="34" charset="-122"/>
                 <a:cs typeface="Aptos" pitchFamily="34" charset="-120"/>
               </a:rPr>
-              <a:t>Key idea</a:t>
+              <a:t>Practice focus</a:t>
             </a:r>
             <a:endParaRPr lang="en-US" sz="1300" dirty="0"/>
           </a:p>
@@ -10180,14 +11259,14 @@
       </p:sp>
       <p:sp>
         <p:nvSpPr>
-          <p:cNvPr id="14" name="Text 12"/>
-          <p:cNvSpPr/>
-          <p:nvPr/>
-        </p:nvSpPr>
-        <p:spPr>
-          <a:xfrm>
-            <a:off x="8074152" y="1920240"/>
-            <a:ext cx="2825496" cy="1188720"/>
+          <p:cNvPr id="12" name="Text 10"/>
+          <p:cNvSpPr/>
+          <p:nvPr/>
+        </p:nvSpPr>
+        <p:spPr>
+          <a:xfrm>
+            <a:off x="7799832" y="1828800"/>
+            <a:ext cx="3145536" cy="685800"/>
           </a:xfrm>
           <a:prstGeom prst="rect">
             <a:avLst/>
@@ -10221,18 +11300,159 @@
       </p:sp>
       <p:sp>
         <p:nvSpPr>
-          <p:cNvPr id="15" name="Shape 13"/>
-          <p:cNvSpPr/>
-          <p:nvPr/>
-        </p:nvSpPr>
-        <p:spPr>
-          <a:xfrm>
-            <a:off x="7909560" y="3520440"/>
-            <a:ext cx="3154680" cy="1737360"/>
+          <p:cNvPr id="13" name="Shape 11"/>
+          <p:cNvSpPr/>
+          <p:nvPr/>
+        </p:nvSpPr>
+        <p:spPr>
+          <a:xfrm>
+            <a:off x="7635240" y="2788920"/>
+            <a:ext cx="3474720" cy="1536192"/>
           </a:xfrm>
           <a:prstGeom prst="roundRect">
             <a:avLst>
-              <a:gd name="adj" fmla="val 6316"/>
+              <a:gd name="adj" fmla="val 7143"/>
+            </a:avLst>
+          </a:prstGeom>
+          <a:solidFill>
+            <a:srgbClr val="FFFFFF">
+              <a:alpha val="88000"/>
+            </a:srgbClr>
+          </a:solidFill>
+          <a:ln w="12700">
+            <a:solidFill>
+              <a:srgbClr val="D6E8F2"/>
+            </a:solidFill>
+            <a:prstDash val="solid"/>
+          </a:ln>
+        </p:spPr>
+      </p:sp>
+      <p:sp>
+        <p:nvSpPr>
+          <p:cNvPr id="14" name="Shape 12"/>
+          <p:cNvSpPr/>
+          <p:nvPr/>
+        </p:nvSpPr>
+        <p:spPr>
+          <a:xfrm>
+            <a:off x="8074152" y="3291840"/>
+            <a:ext cx="2596896" cy="749808"/>
+          </a:xfrm>
+          <a:prstGeom prst="rect">
+            <a:avLst/>
+          </a:prstGeom>
+          <a:solidFill>
+            <a:srgbClr val="EAF6F8"/>
+          </a:solidFill>
+          <a:ln w="12700">
+            <a:solidFill>
+              <a:srgbClr val="8ABBD8"/>
+            </a:solidFill>
+            <a:prstDash val="solid"/>
+          </a:ln>
+        </p:spPr>
+      </p:sp>
+      <p:sp>
+        <p:nvSpPr>
+          <p:cNvPr id="15" name="Shape 13"/>
+          <p:cNvSpPr/>
+          <p:nvPr/>
+        </p:nvSpPr>
+        <p:spPr>
+          <a:xfrm>
+            <a:off x="8202168" y="3721608"/>
+            <a:ext cx="2340864" cy="0"/>
+          </a:xfrm>
+          <a:prstGeom prst="line">
+            <a:avLst/>
+          </a:prstGeom>
+          <a:noFill/>
+          <a:ln w="19050">
+            <a:solidFill>
+              <a:srgbClr val="0068B7"/>
+            </a:solidFill>
+            <a:prstDash val="solid"/>
+          </a:ln>
+        </p:spPr>
+      </p:sp>
+      <p:sp>
+        <p:nvSpPr>
+          <p:cNvPr id="16" name="Shape 14"/>
+          <p:cNvSpPr/>
+          <p:nvPr/>
+        </p:nvSpPr>
+        <p:spPr>
+          <a:xfrm>
+            <a:off x="9198864" y="4206240"/>
+            <a:ext cx="347472" cy="347472"/>
+          </a:xfrm>
+          <a:prstGeom prst="ellipse">
+            <a:avLst/>
+          </a:prstGeom>
+          <a:solidFill>
+            <a:srgbClr val="2F8A28"/>
+          </a:solidFill>
+          <a:ln w="12700">
+            <a:solidFill>
+              <a:srgbClr val="2F8A28"/>
+            </a:solidFill>
+            <a:prstDash val="solid"/>
+          </a:ln>
+        </p:spPr>
+      </p:sp>
+      <p:sp>
+        <p:nvSpPr>
+          <p:cNvPr id="17" name="Text 15"/>
+          <p:cNvSpPr/>
+          <p:nvPr/>
+        </p:nvSpPr>
+        <p:spPr>
+          <a:xfrm>
+            <a:off x="7909560" y="3977640"/>
+            <a:ext cx="2926080" cy="182880"/>
+          </a:xfrm>
+          <a:prstGeom prst="rect">
+            <a:avLst/>
+          </a:prstGeom>
+          <a:noFill/>
+          <a:ln/>
+        </p:spPr>
+        <p:txBody>
+          <a:bodyPr wrap="square" lIns="0" tIns="0" rIns="0" bIns="0" rtlCol="0" anchor="ctr"/>
+          <a:lstStyle/>
+          <a:p>
+            <a:pPr algn="ctr" indent="0" marL="0">
+              <a:buNone/>
+            </a:pPr>
+            <a:r>
+              <a:rPr lang="en-US" sz="1000" dirty="0">
+                <a:solidFill>
+                  <a:srgbClr val="003A63"/>
+                </a:solidFill>
+                <a:latin typeface="Aptos" pitchFamily="34" charset="0"/>
+                <a:ea typeface="Aptos" pitchFamily="34" charset="-122"/>
+                <a:cs typeface="Aptos" pitchFamily="34" charset="-120"/>
+              </a:rPr>
+              <a:t>Concept to action</a:t>
+            </a:r>
+            <a:endParaRPr lang="en-US" sz="1000" dirty="0"/>
+          </a:p>
+        </p:txBody>
+      </p:sp>
+      <p:sp>
+        <p:nvSpPr>
+          <p:cNvPr id="18" name="Shape 16"/>
+          <p:cNvSpPr/>
+          <p:nvPr/>
+        </p:nvSpPr>
+        <p:spPr>
+          <a:xfrm>
+            <a:off x="7635240" y="4498848"/>
+            <a:ext cx="3474720" cy="1143000"/>
+          </a:xfrm>
+          <a:prstGeom prst="roundRect">
+            <a:avLst>
+              <a:gd name="adj" fmla="val 9600"/>
             </a:avLst>
           </a:prstGeom>
           <a:solidFill>
@@ -10248,14 +11468,14 @@
       </p:sp>
       <p:sp>
         <p:nvSpPr>
-          <p:cNvPr id="16" name="Text 14"/>
-          <p:cNvSpPr/>
-          <p:nvPr/>
-        </p:nvSpPr>
-        <p:spPr>
-          <a:xfrm>
-            <a:off x="8074152" y="3666744"/>
-            <a:ext cx="2825496" cy="256032"/>
+          <p:cNvPr id="19" name="Text 17"/>
+          <p:cNvSpPr/>
+          <p:nvPr/>
+        </p:nvSpPr>
+        <p:spPr>
+          <a:xfrm>
+            <a:off x="7799832" y="4645152"/>
+            <a:ext cx="3145536" cy="256032"/>
           </a:xfrm>
           <a:prstGeom prst="rect">
             <a:avLst/>
@@ -10279,7 +11499,7 @@
                 <a:ea typeface="Aptos" pitchFamily="34" charset="-122"/>
                 <a:cs typeface="Aptos" pitchFamily="34" charset="-120"/>
               </a:rPr>
-              <a:t>Use this for</a:t>
+              <a:t>What to produce</a:t>
             </a:r>
             <a:endParaRPr lang="en-US" sz="1300" dirty="0"/>
           </a:p>
@@ -10287,14 +11507,14 @@
       </p:sp>
       <p:sp>
         <p:nvSpPr>
-          <p:cNvPr id="17" name="Text 15"/>
-          <p:cNvSpPr/>
-          <p:nvPr/>
-        </p:nvSpPr>
-        <p:spPr>
-          <a:xfrm>
-            <a:off x="8074152" y="4023360"/>
-            <a:ext cx="2825496" cy="1097280"/>
+          <p:cNvPr id="20" name="Text 18"/>
+          <p:cNvSpPr/>
+          <p:nvPr/>
+        </p:nvSpPr>
+        <p:spPr>
+          <a:xfrm>
+            <a:off x="7799832" y="5001768"/>
+            <a:ext cx="3145536" cy="502920"/>
           </a:xfrm>
           <a:prstGeom prst="rect">
             <a:avLst/>
@@ -10320,7 +11540,7 @@
                 <a:ea typeface="Aptos" pitchFamily="34" charset="-122"/>
                 <a:cs typeface="Aptos" pitchFamily="34" charset="-120"/>
               </a:rPr>
-              <a:t>Connect the concept to public health decisions, safeguards, documentation, or implementation work.</a:t>
+              <a:t>Use the assignment to test whether you can explain the concept, apply it to a realistic public health situation, and identify what would need review before the work moves forward.</a:t>
             </a:r>
             <a:endParaRPr lang="en-US" sz="1550" dirty="0"/>
           </a:p>
@@ -10494,8 +11714,8 @@
         </p:nvSpPr>
         <p:spPr>
           <a:xfrm>
-            <a:off x="9966960" y="6537960"/>
-            <a:ext cx="1645920" cy="201168"/>
+            <a:off x="9646920" y="6537960"/>
+            <a:ext cx="1965960" cy="201168"/>
           </a:xfrm>
           <a:prstGeom prst="rect">
             <a:avLst/>
@@ -10519,7 +11739,7 @@
                 <a:ea typeface="Aptos" pitchFamily="34" charset="-122"/>
                 <a:cs typeface="Aptos" pitchFamily="34" charset="-120"/>
               </a:rPr>
-              <a:t>Â© Paula Soper</a:t>
+              <a:t>Copyright Paula Soper</a:t>
             </a:r>
             <a:endParaRPr lang="en-US" sz="800" dirty="0"/>
           </a:p>
@@ -10566,77 +11786,13 @@
       </p:sp>
       <p:sp>
         <p:nvSpPr>
-          <p:cNvPr id="8" name="Shape 6"/>
+          <p:cNvPr id="8" name="Text 6"/>
           <p:cNvSpPr/>
           <p:nvPr/>
         </p:nvSpPr>
         <p:spPr>
           <a:xfrm>
             <a:off x="640080" y="658368"/>
-            <a:ext cx="420624" cy="420624"/>
-          </a:xfrm>
-          <a:prstGeom prst="ellipse">
-            <a:avLst/>
-          </a:prstGeom>
-          <a:solidFill>
-            <a:srgbClr val="0068B7"/>
-          </a:solidFill>
-          <a:ln w="12700">
-            <a:solidFill>
-              <a:srgbClr val="0068B7"/>
-            </a:solidFill>
-            <a:prstDash val="solid"/>
-          </a:ln>
-        </p:spPr>
-      </p:sp>
-      <p:sp>
-        <p:nvSpPr>
-          <p:cNvPr id="9" name="Text 7"/>
-          <p:cNvSpPr/>
-          <p:nvPr/>
-        </p:nvSpPr>
-        <p:spPr>
-          <a:xfrm>
-            <a:off x="640080" y="731520"/>
-            <a:ext cx="420624" cy="164592"/>
-          </a:xfrm>
-          <a:prstGeom prst="rect">
-            <a:avLst/>
-          </a:prstGeom>
-          <a:noFill/>
-          <a:ln/>
-        </p:spPr>
-        <p:txBody>
-          <a:bodyPr wrap="square" lIns="0" tIns="0" rIns="0" bIns="0" rtlCol="0" anchor="ctr"/>
-          <a:lstStyle/>
-          <a:p>
-            <a:pPr algn="ctr" indent="0" marL="0">
-              <a:buNone/>
-            </a:pPr>
-            <a:r>
-              <a:rPr lang="en-US" sz="1100" b="1" dirty="0">
-                <a:solidFill>
-                  <a:srgbClr val="FFFFFF"/>
-                </a:solidFill>
-                <a:latin typeface="Aptos" pitchFamily="34" charset="0"/>
-                <a:ea typeface="Aptos" pitchFamily="34" charset="-122"/>
-                <a:cs typeface="Aptos" pitchFamily="34" charset="-120"/>
-              </a:rPr>
-              <a:t>11</a:t>
-            </a:r>
-            <a:endParaRPr lang="en-US" sz="1100" dirty="0"/>
-          </a:p>
-        </p:txBody>
-      </p:sp>
-      <p:sp>
-        <p:nvSpPr>
-          <p:cNvPr id="10" name="Text 8"/>
-          <p:cNvSpPr/>
-          <p:nvPr/>
-        </p:nvSpPr>
-        <p:spPr>
-          <a:xfrm>
-            <a:off x="640080" y="621792"/>
             <a:ext cx="10881360" cy="713232"/>
           </a:xfrm>
           <a:prstGeom prst="rect">
@@ -10671,14 +11827,14 @@
       </p:sp>
       <p:sp>
         <p:nvSpPr>
-          <p:cNvPr id="11" name="Text 9"/>
+          <p:cNvPr id="9" name="Text 7"/>
           <p:cNvSpPr/>
           <p:nvPr/>
         </p:nvSpPr>
         <p:spPr>
           <a:xfrm>
             <a:off x="868680" y="1508760"/>
-            <a:ext cx="6537960" cy="4160520"/>
+            <a:ext cx="6309360" cy="4160520"/>
           </a:xfrm>
           <a:prstGeom prst="rect">
             <a:avLst/>
@@ -10737,18 +11893,18 @@
       </p:sp>
       <p:sp>
         <p:nvSpPr>
-          <p:cNvPr id="12" name="Shape 10"/>
-          <p:cNvSpPr/>
-          <p:nvPr/>
-        </p:nvSpPr>
-        <p:spPr>
-          <a:xfrm>
-            <a:off x="7909560" y="1417320"/>
-            <a:ext cx="3154680" cy="1828800"/>
+          <p:cNvPr id="10" name="Shape 8"/>
+          <p:cNvSpPr/>
+          <p:nvPr/>
+        </p:nvSpPr>
+        <p:spPr>
+          <a:xfrm>
+            <a:off x="7635240" y="1325880"/>
+            <a:ext cx="3474720" cy="1325880"/>
           </a:xfrm>
           <a:prstGeom prst="roundRect">
             <a:avLst>
-              <a:gd name="adj" fmla="val 6000"/>
+              <a:gd name="adj" fmla="val 8276"/>
             </a:avLst>
           </a:prstGeom>
           <a:solidFill>
@@ -10764,14 +11920,14 @@
       </p:sp>
       <p:sp>
         <p:nvSpPr>
-          <p:cNvPr id="13" name="Text 11"/>
-          <p:cNvSpPr/>
-          <p:nvPr/>
-        </p:nvSpPr>
-        <p:spPr>
-          <a:xfrm>
-            <a:off x="8074152" y="1563624"/>
-            <a:ext cx="2825496" cy="256032"/>
+          <p:cNvPr id="11" name="Text 9"/>
+          <p:cNvSpPr/>
+          <p:nvPr/>
+        </p:nvSpPr>
+        <p:spPr>
+          <a:xfrm>
+            <a:off x="7799832" y="1472184"/>
+            <a:ext cx="3145536" cy="256032"/>
           </a:xfrm>
           <a:prstGeom prst="rect">
             <a:avLst/>
@@ -10795,7 +11951,7 @@
                 <a:ea typeface="Aptos" pitchFamily="34" charset="-122"/>
                 <a:cs typeface="Aptos" pitchFamily="34" charset="-120"/>
               </a:rPr>
-              <a:t>Key idea</a:t>
+              <a:t>Practice focus</a:t>
             </a:r>
             <a:endParaRPr lang="en-US" sz="1300" dirty="0"/>
           </a:p>
@@ -10803,14 +11959,14 @@
       </p:sp>
       <p:sp>
         <p:nvSpPr>
-          <p:cNvPr id="14" name="Text 12"/>
-          <p:cNvSpPr/>
-          <p:nvPr/>
-        </p:nvSpPr>
-        <p:spPr>
-          <a:xfrm>
-            <a:off x="8074152" y="1920240"/>
-            <a:ext cx="2825496" cy="1188720"/>
+          <p:cNvPr id="12" name="Text 10"/>
+          <p:cNvSpPr/>
+          <p:nvPr/>
+        </p:nvSpPr>
+        <p:spPr>
+          <a:xfrm>
+            <a:off x="7799832" y="1828800"/>
+            <a:ext cx="3145536" cy="685800"/>
           </a:xfrm>
           <a:prstGeom prst="rect">
             <a:avLst/>
@@ -10844,18 +12000,159 @@
       </p:sp>
       <p:sp>
         <p:nvSpPr>
-          <p:cNvPr id="15" name="Shape 13"/>
-          <p:cNvSpPr/>
-          <p:nvPr/>
-        </p:nvSpPr>
-        <p:spPr>
-          <a:xfrm>
-            <a:off x="7909560" y="3520440"/>
-            <a:ext cx="3154680" cy="1737360"/>
+          <p:cNvPr id="13" name="Shape 11"/>
+          <p:cNvSpPr/>
+          <p:nvPr/>
+        </p:nvSpPr>
+        <p:spPr>
+          <a:xfrm>
+            <a:off x="7635240" y="2788920"/>
+            <a:ext cx="3474720" cy="1536192"/>
           </a:xfrm>
           <a:prstGeom prst="roundRect">
             <a:avLst>
-              <a:gd name="adj" fmla="val 6316"/>
+              <a:gd name="adj" fmla="val 7143"/>
+            </a:avLst>
+          </a:prstGeom>
+          <a:solidFill>
+            <a:srgbClr val="FFFFFF">
+              <a:alpha val="88000"/>
+            </a:srgbClr>
+          </a:solidFill>
+          <a:ln w="12700">
+            <a:solidFill>
+              <a:srgbClr val="D6E8F2"/>
+            </a:solidFill>
+            <a:prstDash val="solid"/>
+          </a:ln>
+        </p:spPr>
+      </p:sp>
+      <p:sp>
+        <p:nvSpPr>
+          <p:cNvPr id="14" name="Shape 12"/>
+          <p:cNvSpPr/>
+          <p:nvPr/>
+        </p:nvSpPr>
+        <p:spPr>
+          <a:xfrm>
+            <a:off x="8074152" y="3291840"/>
+            <a:ext cx="2596896" cy="749808"/>
+          </a:xfrm>
+          <a:prstGeom prst="rect">
+            <a:avLst/>
+          </a:prstGeom>
+          <a:solidFill>
+            <a:srgbClr val="EAF6F8"/>
+          </a:solidFill>
+          <a:ln w="12700">
+            <a:solidFill>
+              <a:srgbClr val="8ABBD8"/>
+            </a:solidFill>
+            <a:prstDash val="solid"/>
+          </a:ln>
+        </p:spPr>
+      </p:sp>
+      <p:sp>
+        <p:nvSpPr>
+          <p:cNvPr id="15" name="Shape 13"/>
+          <p:cNvSpPr/>
+          <p:nvPr/>
+        </p:nvSpPr>
+        <p:spPr>
+          <a:xfrm>
+            <a:off x="8202168" y="3721608"/>
+            <a:ext cx="2340864" cy="0"/>
+          </a:xfrm>
+          <a:prstGeom prst="line">
+            <a:avLst/>
+          </a:prstGeom>
+          <a:noFill/>
+          <a:ln w="19050">
+            <a:solidFill>
+              <a:srgbClr val="0068B7"/>
+            </a:solidFill>
+            <a:prstDash val="solid"/>
+          </a:ln>
+        </p:spPr>
+      </p:sp>
+      <p:sp>
+        <p:nvSpPr>
+          <p:cNvPr id="16" name="Shape 14"/>
+          <p:cNvSpPr/>
+          <p:nvPr/>
+        </p:nvSpPr>
+        <p:spPr>
+          <a:xfrm>
+            <a:off x="9198864" y="4206240"/>
+            <a:ext cx="347472" cy="347472"/>
+          </a:xfrm>
+          <a:prstGeom prst="ellipse">
+            <a:avLst/>
+          </a:prstGeom>
+          <a:solidFill>
+            <a:srgbClr val="2F8A28"/>
+          </a:solidFill>
+          <a:ln w="12700">
+            <a:solidFill>
+              <a:srgbClr val="2F8A28"/>
+            </a:solidFill>
+            <a:prstDash val="solid"/>
+          </a:ln>
+        </p:spPr>
+      </p:sp>
+      <p:sp>
+        <p:nvSpPr>
+          <p:cNvPr id="17" name="Text 15"/>
+          <p:cNvSpPr/>
+          <p:nvPr/>
+        </p:nvSpPr>
+        <p:spPr>
+          <a:xfrm>
+            <a:off x="7909560" y="3977640"/>
+            <a:ext cx="2926080" cy="182880"/>
+          </a:xfrm>
+          <a:prstGeom prst="rect">
+            <a:avLst/>
+          </a:prstGeom>
+          <a:noFill/>
+          <a:ln/>
+        </p:spPr>
+        <p:txBody>
+          <a:bodyPr wrap="square" lIns="0" tIns="0" rIns="0" bIns="0" rtlCol="0" anchor="ctr"/>
+          <a:lstStyle/>
+          <a:p>
+            <a:pPr algn="ctr" indent="0" marL="0">
+              <a:buNone/>
+            </a:pPr>
+            <a:r>
+              <a:rPr lang="en-US" sz="1000" dirty="0">
+                <a:solidFill>
+                  <a:srgbClr val="003A63"/>
+                </a:solidFill>
+                <a:latin typeface="Aptos" pitchFamily="34" charset="0"/>
+                <a:ea typeface="Aptos" pitchFamily="34" charset="-122"/>
+                <a:cs typeface="Aptos" pitchFamily="34" charset="-120"/>
+              </a:rPr>
+              <a:t>Concept to action</a:t>
+            </a:r>
+            <a:endParaRPr lang="en-US" sz="1000" dirty="0"/>
+          </a:p>
+        </p:txBody>
+      </p:sp>
+      <p:sp>
+        <p:nvSpPr>
+          <p:cNvPr id="18" name="Shape 16"/>
+          <p:cNvSpPr/>
+          <p:nvPr/>
+        </p:nvSpPr>
+        <p:spPr>
+          <a:xfrm>
+            <a:off x="7635240" y="4498848"/>
+            <a:ext cx="3474720" cy="1143000"/>
+          </a:xfrm>
+          <a:prstGeom prst="roundRect">
+            <a:avLst>
+              <a:gd name="adj" fmla="val 9600"/>
             </a:avLst>
           </a:prstGeom>
           <a:solidFill>
@@ -10871,14 +12168,14 @@
       </p:sp>
       <p:sp>
         <p:nvSpPr>
-          <p:cNvPr id="16" name="Text 14"/>
-          <p:cNvSpPr/>
-          <p:nvPr/>
-        </p:nvSpPr>
-        <p:spPr>
-          <a:xfrm>
-            <a:off x="8074152" y="3666744"/>
-            <a:ext cx="2825496" cy="256032"/>
+          <p:cNvPr id="19" name="Text 17"/>
+          <p:cNvSpPr/>
+          <p:nvPr/>
+        </p:nvSpPr>
+        <p:spPr>
+          <a:xfrm>
+            <a:off x="7799832" y="4645152"/>
+            <a:ext cx="3145536" cy="256032"/>
           </a:xfrm>
           <a:prstGeom prst="rect">
             <a:avLst/>
@@ -10902,7 +12199,7 @@
                 <a:ea typeface="Aptos" pitchFamily="34" charset="-122"/>
                 <a:cs typeface="Aptos" pitchFamily="34" charset="-120"/>
               </a:rPr>
-              <a:t>Use this for</a:t>
+              <a:t>What to produce</a:t>
             </a:r>
             <a:endParaRPr lang="en-US" sz="1300" dirty="0"/>
           </a:p>
@@ -10910,14 +12207,14 @@
       </p:sp>
       <p:sp>
         <p:nvSpPr>
-          <p:cNvPr id="17" name="Text 15"/>
-          <p:cNvSpPr/>
-          <p:nvPr/>
-        </p:nvSpPr>
-        <p:spPr>
-          <a:xfrm>
-            <a:off x="8074152" y="4023360"/>
-            <a:ext cx="2825496" cy="1097280"/>
+          <p:cNvPr id="20" name="Text 18"/>
+          <p:cNvSpPr/>
+          <p:nvPr/>
+        </p:nvSpPr>
+        <p:spPr>
+          <a:xfrm>
+            <a:off x="7799832" y="5001768"/>
+            <a:ext cx="3145536" cy="502920"/>
           </a:xfrm>
           <a:prstGeom prst="rect">
             <a:avLst/>
@@ -10943,7 +12240,7 @@
                 <a:ea typeface="Aptos" pitchFamily="34" charset="-122"/>
                 <a:cs typeface="Aptos" pitchFamily="34" charset="-120"/>
               </a:rPr>
-              <a:t>Connect the concept to public health decisions, safeguards, documentation, or implementation work.</a:t>
+              <a:t>Use the assignment to test whether you can explain the concept, apply it to a realistic public health situation, and identify what would need review before the work moves forward.</a:t>
             </a:r>
             <a:endParaRPr lang="en-US" sz="1550" dirty="0"/>
           </a:p>
@@ -11117,8 +12414,8 @@
         </p:nvSpPr>
         <p:spPr>
           <a:xfrm>
-            <a:off x="9966960" y="6537960"/>
-            <a:ext cx="1645920" cy="201168"/>
+            <a:off x="9646920" y="6537960"/>
+            <a:ext cx="1965960" cy="201168"/>
           </a:xfrm>
           <a:prstGeom prst="rect">
             <a:avLst/>
@@ -11142,7 +12439,7 @@
                 <a:ea typeface="Aptos" pitchFamily="34" charset="-122"/>
                 <a:cs typeface="Aptos" pitchFamily="34" charset="-120"/>
               </a:rPr>
-              <a:t>Â© Paula Soper</a:t>
+              <a:t>Copyright Paula Soper</a:t>
             </a:r>
             <a:endParaRPr lang="en-US" sz="800" dirty="0"/>
           </a:p>
@@ -11189,77 +12486,13 @@
       </p:sp>
       <p:sp>
         <p:nvSpPr>
-          <p:cNvPr id="8" name="Shape 6"/>
+          <p:cNvPr id="8" name="Text 6"/>
           <p:cNvSpPr/>
           <p:nvPr/>
         </p:nvSpPr>
         <p:spPr>
           <a:xfrm>
             <a:off x="640080" y="658368"/>
-            <a:ext cx="420624" cy="420624"/>
-          </a:xfrm>
-          <a:prstGeom prst="ellipse">
-            <a:avLst/>
-          </a:prstGeom>
-          <a:solidFill>
-            <a:srgbClr val="0068B7"/>
-          </a:solidFill>
-          <a:ln w="12700">
-            <a:solidFill>
-              <a:srgbClr val="0068B7"/>
-            </a:solidFill>
-            <a:prstDash val="solid"/>
-          </a:ln>
-        </p:spPr>
-      </p:sp>
-      <p:sp>
-        <p:nvSpPr>
-          <p:cNvPr id="9" name="Text 7"/>
-          <p:cNvSpPr/>
-          <p:nvPr/>
-        </p:nvSpPr>
-        <p:spPr>
-          <a:xfrm>
-            <a:off x="640080" y="731520"/>
-            <a:ext cx="420624" cy="164592"/>
-          </a:xfrm>
-          <a:prstGeom prst="rect">
-            <a:avLst/>
-          </a:prstGeom>
-          <a:noFill/>
-          <a:ln/>
-        </p:spPr>
-        <p:txBody>
-          <a:bodyPr wrap="square" lIns="0" tIns="0" rIns="0" bIns="0" rtlCol="0" anchor="ctr"/>
-          <a:lstStyle/>
-          <a:p>
-            <a:pPr algn="ctr" indent="0" marL="0">
-              <a:buNone/>
-            </a:pPr>
-            <a:r>
-              <a:rPr lang="en-US" sz="1100" b="1" dirty="0">
-                <a:solidFill>
-                  <a:srgbClr val="FFFFFF"/>
-                </a:solidFill>
-                <a:latin typeface="Aptos" pitchFamily="34" charset="0"/>
-                <a:ea typeface="Aptos" pitchFamily="34" charset="-122"/>
-                <a:cs typeface="Aptos" pitchFamily="34" charset="-120"/>
-              </a:rPr>
-              <a:t>12</a:t>
-            </a:r>
-            <a:endParaRPr lang="en-US" sz="1100" dirty="0"/>
-          </a:p>
-        </p:txBody>
-      </p:sp>
-      <p:sp>
-        <p:nvSpPr>
-          <p:cNvPr id="10" name="Text 8"/>
-          <p:cNvSpPr/>
-          <p:nvPr/>
-        </p:nvSpPr>
-        <p:spPr>
-          <a:xfrm>
-            <a:off x="640080" y="621792"/>
             <a:ext cx="10881360" cy="713232"/>
           </a:xfrm>
           <a:prstGeom prst="rect">
@@ -11294,14 +12527,14 @@
       </p:sp>
       <p:sp>
         <p:nvSpPr>
-          <p:cNvPr id="11" name="Text 9"/>
+          <p:cNvPr id="9" name="Text 7"/>
           <p:cNvSpPr/>
           <p:nvPr/>
         </p:nvSpPr>
         <p:spPr>
           <a:xfrm>
             <a:off x="868680" y="1508760"/>
-            <a:ext cx="6537960" cy="4160520"/>
+            <a:ext cx="6309360" cy="4160520"/>
           </a:xfrm>
           <a:prstGeom prst="rect">
             <a:avLst/>
@@ -11360,18 +12593,18 @@
       </p:sp>
       <p:sp>
         <p:nvSpPr>
-          <p:cNvPr id="12" name="Shape 10"/>
-          <p:cNvSpPr/>
-          <p:nvPr/>
-        </p:nvSpPr>
-        <p:spPr>
-          <a:xfrm>
-            <a:off x="7909560" y="1417320"/>
-            <a:ext cx="3154680" cy="1828800"/>
+          <p:cNvPr id="10" name="Shape 8"/>
+          <p:cNvSpPr/>
+          <p:nvPr/>
+        </p:nvSpPr>
+        <p:spPr>
+          <a:xfrm>
+            <a:off x="7635240" y="1325880"/>
+            <a:ext cx="3474720" cy="1325880"/>
           </a:xfrm>
           <a:prstGeom prst="roundRect">
             <a:avLst>
-              <a:gd name="adj" fmla="val 6000"/>
+              <a:gd name="adj" fmla="val 8276"/>
             </a:avLst>
           </a:prstGeom>
           <a:solidFill>
@@ -11387,14 +12620,14 @@
       </p:sp>
       <p:sp>
         <p:nvSpPr>
-          <p:cNvPr id="13" name="Text 11"/>
-          <p:cNvSpPr/>
-          <p:nvPr/>
-        </p:nvSpPr>
-        <p:spPr>
-          <a:xfrm>
-            <a:off x="8074152" y="1563624"/>
-            <a:ext cx="2825496" cy="256032"/>
+          <p:cNvPr id="11" name="Text 9"/>
+          <p:cNvSpPr/>
+          <p:nvPr/>
+        </p:nvSpPr>
+        <p:spPr>
+          <a:xfrm>
+            <a:off x="7799832" y="1472184"/>
+            <a:ext cx="3145536" cy="256032"/>
           </a:xfrm>
           <a:prstGeom prst="rect">
             <a:avLst/>
@@ -11418,7 +12651,7 @@
                 <a:ea typeface="Aptos" pitchFamily="34" charset="-122"/>
                 <a:cs typeface="Aptos" pitchFamily="34" charset="-120"/>
               </a:rPr>
-              <a:t>Key idea</a:t>
+              <a:t>Core concept</a:t>
             </a:r>
             <a:endParaRPr lang="en-US" sz="1300" dirty="0"/>
           </a:p>
@@ -11426,14 +12659,14 @@
       </p:sp>
       <p:sp>
         <p:nvSpPr>
-          <p:cNvPr id="14" name="Text 12"/>
-          <p:cNvSpPr/>
-          <p:nvPr/>
-        </p:nvSpPr>
-        <p:spPr>
-          <a:xfrm>
-            <a:off x="8074152" y="1920240"/>
-            <a:ext cx="2825496" cy="1188720"/>
+          <p:cNvPr id="12" name="Text 10"/>
+          <p:cNvSpPr/>
+          <p:nvPr/>
+        </p:nvSpPr>
+        <p:spPr>
+          <a:xfrm>
+            <a:off x="7799832" y="1828800"/>
+            <a:ext cx="3145536" cy="685800"/>
           </a:xfrm>
           <a:prstGeom prst="rect">
             <a:avLst/>
@@ -11467,18 +12700,159 @@
       </p:sp>
       <p:sp>
         <p:nvSpPr>
-          <p:cNvPr id="15" name="Shape 13"/>
-          <p:cNvSpPr/>
-          <p:nvPr/>
-        </p:nvSpPr>
-        <p:spPr>
-          <a:xfrm>
-            <a:off x="7909560" y="3520440"/>
-            <a:ext cx="3154680" cy="1737360"/>
+          <p:cNvPr id="13" name="Shape 11"/>
+          <p:cNvSpPr/>
+          <p:nvPr/>
+        </p:nvSpPr>
+        <p:spPr>
+          <a:xfrm>
+            <a:off x="7635240" y="2788920"/>
+            <a:ext cx="3474720" cy="1536192"/>
           </a:xfrm>
           <a:prstGeom prst="roundRect">
             <a:avLst>
-              <a:gd name="adj" fmla="val 6316"/>
+              <a:gd name="adj" fmla="val 7143"/>
+            </a:avLst>
+          </a:prstGeom>
+          <a:solidFill>
+            <a:srgbClr val="FFFFFF">
+              <a:alpha val="88000"/>
+            </a:srgbClr>
+          </a:solidFill>
+          <a:ln w="12700">
+            <a:solidFill>
+              <a:srgbClr val="D6E8F2"/>
+            </a:solidFill>
+            <a:prstDash val="solid"/>
+          </a:ln>
+        </p:spPr>
+      </p:sp>
+      <p:sp>
+        <p:nvSpPr>
+          <p:cNvPr id="14" name="Shape 12"/>
+          <p:cNvSpPr/>
+          <p:nvPr/>
+        </p:nvSpPr>
+        <p:spPr>
+          <a:xfrm>
+            <a:off x="8074152" y="3291840"/>
+            <a:ext cx="2596896" cy="749808"/>
+          </a:xfrm>
+          <a:prstGeom prst="rect">
+            <a:avLst/>
+          </a:prstGeom>
+          <a:solidFill>
+            <a:srgbClr val="EAF6F8"/>
+          </a:solidFill>
+          <a:ln w="12700">
+            <a:solidFill>
+              <a:srgbClr val="8ABBD8"/>
+            </a:solidFill>
+            <a:prstDash val="solid"/>
+          </a:ln>
+        </p:spPr>
+      </p:sp>
+      <p:sp>
+        <p:nvSpPr>
+          <p:cNvPr id="15" name="Shape 13"/>
+          <p:cNvSpPr/>
+          <p:nvPr/>
+        </p:nvSpPr>
+        <p:spPr>
+          <a:xfrm>
+            <a:off x="8202168" y="3721608"/>
+            <a:ext cx="2340864" cy="0"/>
+          </a:xfrm>
+          <a:prstGeom prst="line">
+            <a:avLst/>
+          </a:prstGeom>
+          <a:noFill/>
+          <a:ln w="19050">
+            <a:solidFill>
+              <a:srgbClr val="0068B7"/>
+            </a:solidFill>
+            <a:prstDash val="solid"/>
+          </a:ln>
+        </p:spPr>
+      </p:sp>
+      <p:sp>
+        <p:nvSpPr>
+          <p:cNvPr id="16" name="Shape 14"/>
+          <p:cNvSpPr/>
+          <p:nvPr/>
+        </p:nvSpPr>
+        <p:spPr>
+          <a:xfrm>
+            <a:off x="9198864" y="4206240"/>
+            <a:ext cx="347472" cy="347472"/>
+          </a:xfrm>
+          <a:prstGeom prst="ellipse">
+            <a:avLst/>
+          </a:prstGeom>
+          <a:solidFill>
+            <a:srgbClr val="2F8A28"/>
+          </a:solidFill>
+          <a:ln w="12700">
+            <a:solidFill>
+              <a:srgbClr val="2F8A28"/>
+            </a:solidFill>
+            <a:prstDash val="solid"/>
+          </a:ln>
+        </p:spPr>
+      </p:sp>
+      <p:sp>
+        <p:nvSpPr>
+          <p:cNvPr id="17" name="Text 15"/>
+          <p:cNvSpPr/>
+          <p:nvPr/>
+        </p:nvSpPr>
+        <p:spPr>
+          <a:xfrm>
+            <a:off x="7909560" y="3977640"/>
+            <a:ext cx="2926080" cy="182880"/>
+          </a:xfrm>
+          <a:prstGeom prst="rect">
+            <a:avLst/>
+          </a:prstGeom>
+          <a:noFill/>
+          <a:ln/>
+        </p:spPr>
+        <p:txBody>
+          <a:bodyPr wrap="square" lIns="0" tIns="0" rIns="0" bIns="0" rtlCol="0" anchor="ctr"/>
+          <a:lstStyle/>
+          <a:p>
+            <a:pPr algn="ctr" indent="0" marL="0">
+              <a:buNone/>
+            </a:pPr>
+            <a:r>
+              <a:rPr lang="en-US" sz="1000" dirty="0">
+                <a:solidFill>
+                  <a:srgbClr val="003A63"/>
+                </a:solidFill>
+                <a:latin typeface="Aptos" pitchFamily="34" charset="0"/>
+                <a:ea typeface="Aptos" pitchFamily="34" charset="-122"/>
+                <a:cs typeface="Aptos" pitchFamily="34" charset="-120"/>
+              </a:rPr>
+              <a:t>Concept to action</a:t>
+            </a:r>
+            <a:endParaRPr lang="en-US" sz="1000" dirty="0"/>
+          </a:p>
+        </p:txBody>
+      </p:sp>
+      <p:sp>
+        <p:nvSpPr>
+          <p:cNvPr id="18" name="Shape 16"/>
+          <p:cNvSpPr/>
+          <p:nvPr/>
+        </p:nvSpPr>
+        <p:spPr>
+          <a:xfrm>
+            <a:off x="7635240" y="4498848"/>
+            <a:ext cx="3474720" cy="1143000"/>
+          </a:xfrm>
+          <a:prstGeom prst="roundRect">
+            <a:avLst>
+              <a:gd name="adj" fmla="val 9600"/>
             </a:avLst>
           </a:prstGeom>
           <a:solidFill>
@@ -11494,14 +12868,14 @@
       </p:sp>
       <p:sp>
         <p:nvSpPr>
-          <p:cNvPr id="16" name="Text 14"/>
-          <p:cNvSpPr/>
-          <p:nvPr/>
-        </p:nvSpPr>
-        <p:spPr>
-          <a:xfrm>
-            <a:off x="8074152" y="3666744"/>
-            <a:ext cx="2825496" cy="256032"/>
+          <p:cNvPr id="19" name="Text 17"/>
+          <p:cNvSpPr/>
+          <p:nvPr/>
+        </p:nvSpPr>
+        <p:spPr>
+          <a:xfrm>
+            <a:off x="7799832" y="4645152"/>
+            <a:ext cx="3145536" cy="256032"/>
           </a:xfrm>
           <a:prstGeom prst="rect">
             <a:avLst/>
@@ -11525,7 +12899,7 @@
                 <a:ea typeface="Aptos" pitchFamily="34" charset="-122"/>
                 <a:cs typeface="Aptos" pitchFamily="34" charset="-120"/>
               </a:rPr>
-              <a:t>Use this for</a:t>
+              <a:t>Apply it</a:t>
             </a:r>
             <a:endParaRPr lang="en-US" sz="1300" dirty="0"/>
           </a:p>
@@ -11533,14 +12907,14 @@
       </p:sp>
       <p:sp>
         <p:nvSpPr>
-          <p:cNvPr id="17" name="Text 15"/>
-          <p:cNvSpPr/>
-          <p:nvPr/>
-        </p:nvSpPr>
-        <p:spPr>
-          <a:xfrm>
-            <a:off x="8074152" y="4023360"/>
-            <a:ext cx="2825496" cy="1097280"/>
+          <p:cNvPr id="20" name="Text 18"/>
+          <p:cNvSpPr/>
+          <p:nvPr/>
+        </p:nvSpPr>
+        <p:spPr>
+          <a:xfrm>
+            <a:off x="7799832" y="5001768"/>
+            <a:ext cx="3145536" cy="502920"/>
           </a:xfrm>
           <a:prstGeom prst="rect">
             <a:avLst/>
@@ -11566,7 +12940,7 @@
                 <a:ea typeface="Aptos" pitchFamily="34" charset="-122"/>
                 <a:cs typeface="Aptos" pitchFamily="34" charset="-120"/>
               </a:rPr>
-              <a:t>Connect the concept to public health decisions, safeguards, documentation, or implementation work.</a:t>
+              <a:t>Connect the concept to public health purpose, responsible use, required safeguards, documentation, and the next action a department should take.</a:t>
             </a:r>
             <a:endParaRPr lang="en-US" sz="1550" dirty="0"/>
           </a:p>
@@ -11740,8 +13114,8 @@
         </p:nvSpPr>
         <p:spPr>
           <a:xfrm>
-            <a:off x="9966960" y="6537960"/>
-            <a:ext cx="1645920" cy="201168"/>
+            <a:off x="9646920" y="6537960"/>
+            <a:ext cx="1965960" cy="201168"/>
           </a:xfrm>
           <a:prstGeom prst="rect">
             <a:avLst/>
@@ -11765,7 +13139,7 @@
                 <a:ea typeface="Aptos" pitchFamily="34" charset="-122"/>
                 <a:cs typeface="Aptos" pitchFamily="34" charset="-120"/>
               </a:rPr>
-              <a:t>Â© Paula Soper</a:t>
+              <a:t>Copyright Paula Soper</a:t>
             </a:r>
             <a:endParaRPr lang="en-US" sz="800" dirty="0"/>
           </a:p>
@@ -11860,7 +13234,7 @@
         <p:spPr>
           <a:xfrm>
             <a:off x="868680" y="1508760"/>
-            <a:ext cx="6537960" cy="4160520"/>
+            <a:ext cx="6309360" cy="4160520"/>
           </a:xfrm>
           <a:prstGeom prst="rect">
             <a:avLst/>
@@ -11897,12 +13271,12 @@
         </p:nvSpPr>
         <p:spPr>
           <a:xfrm>
-            <a:off x="7909560" y="1417320"/>
-            <a:ext cx="3154680" cy="1828800"/>
+            <a:off x="7635240" y="1325880"/>
+            <a:ext cx="3474720" cy="1325880"/>
           </a:xfrm>
           <a:prstGeom prst="roundRect">
             <a:avLst>
-              <a:gd name="adj" fmla="val 6000"/>
+              <a:gd name="adj" fmla="val 8276"/>
             </a:avLst>
           </a:prstGeom>
           <a:solidFill>
@@ -11924,8 +13298,8 @@
         </p:nvSpPr>
         <p:spPr>
           <a:xfrm>
-            <a:off x="8074152" y="1563624"/>
-            <a:ext cx="2825496" cy="256032"/>
+            <a:off x="7799832" y="1472184"/>
+            <a:ext cx="3145536" cy="256032"/>
           </a:xfrm>
           <a:prstGeom prst="rect">
             <a:avLst/>
@@ -11949,7 +13323,7 @@
                 <a:ea typeface="Aptos" pitchFamily="34" charset="-122"/>
                 <a:cs typeface="Aptos" pitchFamily="34" charset="-120"/>
               </a:rPr>
-              <a:t>Key idea</a:t>
+              <a:t>Core concept</a:t>
             </a:r>
             <a:endParaRPr lang="en-US" sz="1300" dirty="0"/>
           </a:p>
@@ -11963,8 +13337,8 @@
         </p:nvSpPr>
         <p:spPr>
           <a:xfrm>
-            <a:off x="8074152" y="1920240"/>
-            <a:ext cx="2825496" cy="1188720"/>
+            <a:off x="7799832" y="1828800"/>
+            <a:ext cx="3145536" cy="685800"/>
           </a:xfrm>
           <a:prstGeom prst="rect">
             <a:avLst/>
@@ -12004,12 +13378,153 @@
         </p:nvSpPr>
         <p:spPr>
           <a:xfrm>
-            <a:off x="7909560" y="3520440"/>
-            <a:ext cx="3154680" cy="1737360"/>
+            <a:off x="7635240" y="2788920"/>
+            <a:ext cx="3474720" cy="1536192"/>
           </a:xfrm>
           <a:prstGeom prst="roundRect">
             <a:avLst>
-              <a:gd name="adj" fmla="val 6316"/>
+              <a:gd name="adj" fmla="val 7143"/>
+            </a:avLst>
+          </a:prstGeom>
+          <a:solidFill>
+            <a:srgbClr val="FFFFFF">
+              <a:alpha val="88000"/>
+            </a:srgbClr>
+          </a:solidFill>
+          <a:ln w="12700">
+            <a:solidFill>
+              <a:srgbClr val="D6E8F2"/>
+            </a:solidFill>
+            <a:prstDash val="solid"/>
+          </a:ln>
+        </p:spPr>
+      </p:sp>
+      <p:sp>
+        <p:nvSpPr>
+          <p:cNvPr id="14" name="Shape 12"/>
+          <p:cNvSpPr/>
+          <p:nvPr/>
+        </p:nvSpPr>
+        <p:spPr>
+          <a:xfrm>
+            <a:off x="8074152" y="3291840"/>
+            <a:ext cx="2596896" cy="749808"/>
+          </a:xfrm>
+          <a:prstGeom prst="rect">
+            <a:avLst/>
+          </a:prstGeom>
+          <a:solidFill>
+            <a:srgbClr val="EAF6F8"/>
+          </a:solidFill>
+          <a:ln w="12700">
+            <a:solidFill>
+              <a:srgbClr val="8ABBD8"/>
+            </a:solidFill>
+            <a:prstDash val="solid"/>
+          </a:ln>
+        </p:spPr>
+      </p:sp>
+      <p:sp>
+        <p:nvSpPr>
+          <p:cNvPr id="15" name="Shape 13"/>
+          <p:cNvSpPr/>
+          <p:nvPr/>
+        </p:nvSpPr>
+        <p:spPr>
+          <a:xfrm>
+            <a:off x="8202168" y="3721608"/>
+            <a:ext cx="2340864" cy="0"/>
+          </a:xfrm>
+          <a:prstGeom prst="line">
+            <a:avLst/>
+          </a:prstGeom>
+          <a:noFill/>
+          <a:ln w="19050">
+            <a:solidFill>
+              <a:srgbClr val="0068B7"/>
+            </a:solidFill>
+            <a:prstDash val="solid"/>
+          </a:ln>
+        </p:spPr>
+      </p:sp>
+      <p:sp>
+        <p:nvSpPr>
+          <p:cNvPr id="16" name="Shape 14"/>
+          <p:cNvSpPr/>
+          <p:nvPr/>
+        </p:nvSpPr>
+        <p:spPr>
+          <a:xfrm>
+            <a:off x="9198864" y="4206240"/>
+            <a:ext cx="347472" cy="347472"/>
+          </a:xfrm>
+          <a:prstGeom prst="ellipse">
+            <a:avLst/>
+          </a:prstGeom>
+          <a:solidFill>
+            <a:srgbClr val="2F8A28"/>
+          </a:solidFill>
+          <a:ln w="12700">
+            <a:solidFill>
+              <a:srgbClr val="2F8A28"/>
+            </a:solidFill>
+            <a:prstDash val="solid"/>
+          </a:ln>
+        </p:spPr>
+      </p:sp>
+      <p:sp>
+        <p:nvSpPr>
+          <p:cNvPr id="17" name="Text 15"/>
+          <p:cNvSpPr/>
+          <p:nvPr/>
+        </p:nvSpPr>
+        <p:spPr>
+          <a:xfrm>
+            <a:off x="7909560" y="3977640"/>
+            <a:ext cx="2926080" cy="182880"/>
+          </a:xfrm>
+          <a:prstGeom prst="rect">
+            <a:avLst/>
+          </a:prstGeom>
+          <a:noFill/>
+          <a:ln/>
+        </p:spPr>
+        <p:txBody>
+          <a:bodyPr wrap="square" lIns="0" tIns="0" rIns="0" bIns="0" rtlCol="0" anchor="ctr"/>
+          <a:lstStyle/>
+          <a:p>
+            <a:pPr algn="ctr" indent="0" marL="0">
+              <a:buNone/>
+            </a:pPr>
+            <a:r>
+              <a:rPr lang="en-US" sz="1000" dirty="0">
+                <a:solidFill>
+                  <a:srgbClr val="003A63"/>
+                </a:solidFill>
+                <a:latin typeface="Aptos" pitchFamily="34" charset="0"/>
+                <a:ea typeface="Aptos" pitchFamily="34" charset="-122"/>
+                <a:cs typeface="Aptos" pitchFamily="34" charset="-120"/>
+              </a:rPr>
+              <a:t>Concept to action</a:t>
+            </a:r>
+            <a:endParaRPr lang="en-US" sz="1000" dirty="0"/>
+          </a:p>
+        </p:txBody>
+      </p:sp>
+      <p:sp>
+        <p:nvSpPr>
+          <p:cNvPr id="18" name="Shape 16"/>
+          <p:cNvSpPr/>
+          <p:nvPr/>
+        </p:nvSpPr>
+        <p:spPr>
+          <a:xfrm>
+            <a:off x="7635240" y="4498848"/>
+            <a:ext cx="3474720" cy="1143000"/>
+          </a:xfrm>
+          <a:prstGeom prst="roundRect">
+            <a:avLst>
+              <a:gd name="adj" fmla="val 9600"/>
             </a:avLst>
           </a:prstGeom>
           <a:solidFill>
@@ -12025,14 +13540,14 @@
       </p:sp>
       <p:sp>
         <p:nvSpPr>
-          <p:cNvPr id="14" name="Text 12"/>
-          <p:cNvSpPr/>
-          <p:nvPr/>
-        </p:nvSpPr>
-        <p:spPr>
-          <a:xfrm>
-            <a:off x="8074152" y="3666744"/>
-            <a:ext cx="2825496" cy="256032"/>
+          <p:cNvPr id="19" name="Text 17"/>
+          <p:cNvSpPr/>
+          <p:nvPr/>
+        </p:nvSpPr>
+        <p:spPr>
+          <a:xfrm>
+            <a:off x="7799832" y="4645152"/>
+            <a:ext cx="3145536" cy="256032"/>
           </a:xfrm>
           <a:prstGeom prst="rect">
             <a:avLst/>
@@ -12056,7 +13571,7 @@
                 <a:ea typeface="Aptos" pitchFamily="34" charset="-122"/>
                 <a:cs typeface="Aptos" pitchFamily="34" charset="-120"/>
               </a:rPr>
-              <a:t>Use this for</a:t>
+              <a:t>Apply it</a:t>
             </a:r>
             <a:endParaRPr lang="en-US" sz="1300" dirty="0"/>
           </a:p>
@@ -12064,14 +13579,14 @@
       </p:sp>
       <p:sp>
         <p:nvSpPr>
-          <p:cNvPr id="15" name="Text 13"/>
-          <p:cNvSpPr/>
-          <p:nvPr/>
-        </p:nvSpPr>
-        <p:spPr>
-          <a:xfrm>
-            <a:off x="8074152" y="4023360"/>
-            <a:ext cx="2825496" cy="1097280"/>
+          <p:cNvPr id="20" name="Text 18"/>
+          <p:cNvSpPr/>
+          <p:nvPr/>
+        </p:nvSpPr>
+        <p:spPr>
+          <a:xfrm>
+            <a:off x="7799832" y="5001768"/>
+            <a:ext cx="3145536" cy="502920"/>
           </a:xfrm>
           <a:prstGeom prst="rect">
             <a:avLst/>
@@ -12097,7 +13612,7 @@
                 <a:ea typeface="Aptos" pitchFamily="34" charset="-122"/>
                 <a:cs typeface="Aptos" pitchFamily="34" charset="-120"/>
               </a:rPr>
-              <a:t>Connect the concept to public health decisions, safeguards, documentation, or implementation work.</a:t>
+              <a:t>Connect the concept to public health purpose, responsible use, required safeguards, documentation, and the next action a department should take.</a:t>
             </a:r>
             <a:endParaRPr lang="en-US" sz="1550" dirty="0"/>
           </a:p>
@@ -12271,8 +13786,8 @@
         </p:nvSpPr>
         <p:spPr>
           <a:xfrm>
-            <a:off x="9966960" y="6537960"/>
-            <a:ext cx="1645920" cy="201168"/>
+            <a:off x="9646920" y="6537960"/>
+            <a:ext cx="1965960" cy="201168"/>
           </a:xfrm>
           <a:prstGeom prst="rect">
             <a:avLst/>
@@ -12296,7 +13811,7 @@
                 <a:ea typeface="Aptos" pitchFamily="34" charset="-122"/>
                 <a:cs typeface="Aptos" pitchFamily="34" charset="-120"/>
               </a:rPr>
-              <a:t>Â© Paula Soper</a:t>
+              <a:t>Copyright Paula Soper</a:t>
             </a:r>
             <a:endParaRPr lang="en-US" sz="800" dirty="0"/>
           </a:p>
@@ -12639,46 +14154,7 @@
       </p:sp>
       <p:sp>
         <p:nvSpPr>
-          <p:cNvPr id="15" name="Text 13"/>
-          <p:cNvSpPr/>
-          <p:nvPr/>
-        </p:nvSpPr>
-        <p:spPr>
-          <a:xfrm>
-            <a:off x="8817864" y="4187952"/>
-            <a:ext cx="201168" cy="256032"/>
-          </a:xfrm>
-          <a:prstGeom prst="rect">
-            <a:avLst/>
-          </a:prstGeom>
-          <a:noFill/>
-          <a:ln/>
-        </p:spPr>
-        <p:txBody>
-          <a:bodyPr wrap="square" lIns="0" tIns="0" rIns="0" bIns="0" rtlCol="0" anchor="ctr"/>
-          <a:lstStyle/>
-          <a:p>
-            <a:pPr algn="ctr" indent="0" marL="0">
-              <a:buNone/>
-            </a:pPr>
-            <a:r>
-              <a:rPr lang="en-US" sz="1800" b="1" dirty="0">
-                <a:solidFill>
-                  <a:srgbClr val="0068B7"/>
-                </a:solidFill>
-                <a:latin typeface="Aptos" pitchFamily="34" charset="0"/>
-                <a:ea typeface="Aptos" pitchFamily="34" charset="-122"/>
-                <a:cs typeface="Aptos" pitchFamily="34" charset="-120"/>
-              </a:rPr>
-              <a:t>â†’</a:t>
-            </a:r>
-            <a:endParaRPr lang="en-US" sz="1800" dirty="0"/>
-          </a:p>
-        </p:txBody>
-      </p:sp>
-      <p:sp>
-        <p:nvSpPr>
-          <p:cNvPr id="16" name="Shape 14"/>
+          <p:cNvPr id="15" name="Shape 13"/>
           <p:cNvSpPr/>
           <p:nvPr/>
         </p:nvSpPr>
@@ -12705,7 +14181,7 @@
       </p:sp>
       <p:sp>
         <p:nvSpPr>
-          <p:cNvPr id="17" name="Text 15"/>
+          <p:cNvPr id="16" name="Text 14"/>
           <p:cNvSpPr/>
           <p:nvPr/>
         </p:nvSpPr>
@@ -12746,46 +14222,7 @@
       </p:sp>
       <p:sp>
         <p:nvSpPr>
-          <p:cNvPr id="18" name="Text 16"/>
-          <p:cNvSpPr/>
-          <p:nvPr/>
-        </p:nvSpPr>
-        <p:spPr>
-          <a:xfrm>
-            <a:off x="10046208" y="4187952"/>
-            <a:ext cx="201168" cy="256032"/>
-          </a:xfrm>
-          <a:prstGeom prst="rect">
-            <a:avLst/>
-          </a:prstGeom>
-          <a:noFill/>
-          <a:ln/>
-        </p:spPr>
-        <p:txBody>
-          <a:bodyPr wrap="square" lIns="0" tIns="0" rIns="0" bIns="0" rtlCol="0" anchor="ctr"/>
-          <a:lstStyle/>
-          <a:p>
-            <a:pPr algn="ctr" indent="0" marL="0">
-              <a:buNone/>
-            </a:pPr>
-            <a:r>
-              <a:rPr lang="en-US" sz="1800" b="1" dirty="0">
-                <a:solidFill>
-                  <a:srgbClr val="0068B7"/>
-                </a:solidFill>
-                <a:latin typeface="Aptos" pitchFamily="34" charset="0"/>
-                <a:ea typeface="Aptos" pitchFamily="34" charset="-122"/>
-                <a:cs typeface="Aptos" pitchFamily="34" charset="-120"/>
-              </a:rPr>
-              <a:t>â†’</a:t>
-            </a:r>
-            <a:endParaRPr lang="en-US" sz="1800" dirty="0"/>
-          </a:p>
-        </p:txBody>
-      </p:sp>
-      <p:sp>
-        <p:nvSpPr>
-          <p:cNvPr id="19" name="Shape 17"/>
+          <p:cNvPr id="17" name="Shape 15"/>
           <p:cNvSpPr/>
           <p:nvPr/>
         </p:nvSpPr>
@@ -12812,7 +14249,7 @@
       </p:sp>
       <p:sp>
         <p:nvSpPr>
-          <p:cNvPr id="20" name="Text 18"/>
+          <p:cNvPr id="18" name="Text 16"/>
           <p:cNvSpPr/>
           <p:nvPr/>
         </p:nvSpPr>
@@ -13019,8 +14456,8 @@
         </p:nvSpPr>
         <p:spPr>
           <a:xfrm>
-            <a:off x="9966960" y="6537960"/>
-            <a:ext cx="1645920" cy="201168"/>
+            <a:off x="9646920" y="6537960"/>
+            <a:ext cx="1965960" cy="201168"/>
           </a:xfrm>
           <a:prstGeom prst="rect">
             <a:avLst/>
@@ -13044,7 +14481,7 @@
                 <a:ea typeface="Aptos" pitchFamily="34" charset="-122"/>
                 <a:cs typeface="Aptos" pitchFamily="34" charset="-120"/>
               </a:rPr>
-              <a:t>Â© Paula Soper</a:t>
+              <a:t>Copyright Paula Soper</a:t>
             </a:r>
             <a:endParaRPr lang="en-US" sz="800" dirty="0"/>
           </a:p>
@@ -13387,46 +14824,7 @@
       </p:sp>
       <p:sp>
         <p:nvSpPr>
-          <p:cNvPr id="15" name="Text 13"/>
-          <p:cNvSpPr/>
-          <p:nvPr/>
-        </p:nvSpPr>
-        <p:spPr>
-          <a:xfrm>
-            <a:off x="8817864" y="4187952"/>
-            <a:ext cx="201168" cy="256032"/>
-          </a:xfrm>
-          <a:prstGeom prst="rect">
-            <a:avLst/>
-          </a:prstGeom>
-          <a:noFill/>
-          <a:ln/>
-        </p:spPr>
-        <p:txBody>
-          <a:bodyPr wrap="square" lIns="0" tIns="0" rIns="0" bIns="0" rtlCol="0" anchor="ctr"/>
-          <a:lstStyle/>
-          <a:p>
-            <a:pPr algn="ctr" indent="0" marL="0">
-              <a:buNone/>
-            </a:pPr>
-            <a:r>
-              <a:rPr lang="en-US" sz="1800" b="1" dirty="0">
-                <a:solidFill>
-                  <a:srgbClr val="0068B7"/>
-                </a:solidFill>
-                <a:latin typeface="Aptos" pitchFamily="34" charset="0"/>
-                <a:ea typeface="Aptos" pitchFamily="34" charset="-122"/>
-                <a:cs typeface="Aptos" pitchFamily="34" charset="-120"/>
-              </a:rPr>
-              <a:t>â†’</a:t>
-            </a:r>
-            <a:endParaRPr lang="en-US" sz="1800" dirty="0"/>
-          </a:p>
-        </p:txBody>
-      </p:sp>
-      <p:sp>
-        <p:nvSpPr>
-          <p:cNvPr id="16" name="Shape 14"/>
+          <p:cNvPr id="15" name="Shape 13"/>
           <p:cNvSpPr/>
           <p:nvPr/>
         </p:nvSpPr>
@@ -13453,7 +14851,7 @@
       </p:sp>
       <p:sp>
         <p:nvSpPr>
-          <p:cNvPr id="17" name="Text 15"/>
+          <p:cNvPr id="16" name="Text 14"/>
           <p:cNvSpPr/>
           <p:nvPr/>
         </p:nvSpPr>
@@ -13494,46 +14892,7 @@
       </p:sp>
       <p:sp>
         <p:nvSpPr>
-          <p:cNvPr id="18" name="Text 16"/>
-          <p:cNvSpPr/>
-          <p:nvPr/>
-        </p:nvSpPr>
-        <p:spPr>
-          <a:xfrm>
-            <a:off x="10046208" y="4187952"/>
-            <a:ext cx="201168" cy="256032"/>
-          </a:xfrm>
-          <a:prstGeom prst="rect">
-            <a:avLst/>
-          </a:prstGeom>
-          <a:noFill/>
-          <a:ln/>
-        </p:spPr>
-        <p:txBody>
-          <a:bodyPr wrap="square" lIns="0" tIns="0" rIns="0" bIns="0" rtlCol="0" anchor="ctr"/>
-          <a:lstStyle/>
-          <a:p>
-            <a:pPr algn="ctr" indent="0" marL="0">
-              <a:buNone/>
-            </a:pPr>
-            <a:r>
-              <a:rPr lang="en-US" sz="1800" b="1" dirty="0">
-                <a:solidFill>
-                  <a:srgbClr val="0068B7"/>
-                </a:solidFill>
-                <a:latin typeface="Aptos" pitchFamily="34" charset="0"/>
-                <a:ea typeface="Aptos" pitchFamily="34" charset="-122"/>
-                <a:cs typeface="Aptos" pitchFamily="34" charset="-120"/>
-              </a:rPr>
-              <a:t>â†’</a:t>
-            </a:r>
-            <a:endParaRPr lang="en-US" sz="1800" dirty="0"/>
-          </a:p>
-        </p:txBody>
-      </p:sp>
-      <p:sp>
-        <p:nvSpPr>
-          <p:cNvPr id="19" name="Shape 17"/>
+          <p:cNvPr id="17" name="Shape 15"/>
           <p:cNvSpPr/>
           <p:nvPr/>
         </p:nvSpPr>
@@ -13560,7 +14919,7 @@
       </p:sp>
       <p:sp>
         <p:nvSpPr>
-          <p:cNvPr id="20" name="Text 18"/>
+          <p:cNvPr id="18" name="Text 16"/>
           <p:cNvSpPr/>
           <p:nvPr/>
         </p:nvSpPr>
@@ -13767,8 +15126,8 @@
         </p:nvSpPr>
         <p:spPr>
           <a:xfrm>
-            <a:off x="9966960" y="6537960"/>
-            <a:ext cx="1645920" cy="201168"/>
+            <a:off x="9646920" y="6537960"/>
+            <a:ext cx="1965960" cy="201168"/>
           </a:xfrm>
           <a:prstGeom prst="rect">
             <a:avLst/>
@@ -13792,7 +15151,7 @@
                 <a:ea typeface="Aptos" pitchFamily="34" charset="-122"/>
                 <a:cs typeface="Aptos" pitchFamily="34" charset="-120"/>
               </a:rPr>
-              <a:t>Â© Paula Soper</a:t>
+              <a:t>Copyright Paula Soper</a:t>
             </a:r>
             <a:endParaRPr lang="en-US" sz="800" dirty="0"/>
           </a:p>
@@ -13839,77 +15198,13 @@
       </p:sp>
       <p:sp>
         <p:nvSpPr>
-          <p:cNvPr id="8" name="Shape 6"/>
+          <p:cNvPr id="8" name="Text 6"/>
           <p:cNvSpPr/>
           <p:nvPr/>
         </p:nvSpPr>
         <p:spPr>
           <a:xfrm>
             <a:off x="640080" y="658368"/>
-            <a:ext cx="420624" cy="420624"/>
-          </a:xfrm>
-          <a:prstGeom prst="ellipse">
-            <a:avLst/>
-          </a:prstGeom>
-          <a:solidFill>
-            <a:srgbClr val="0068B7"/>
-          </a:solidFill>
-          <a:ln w="12700">
-            <a:solidFill>
-              <a:srgbClr val="0068B7"/>
-            </a:solidFill>
-            <a:prstDash val="solid"/>
-          </a:ln>
-        </p:spPr>
-      </p:sp>
-      <p:sp>
-        <p:nvSpPr>
-          <p:cNvPr id="9" name="Text 7"/>
-          <p:cNvSpPr/>
-          <p:nvPr/>
-        </p:nvSpPr>
-        <p:spPr>
-          <a:xfrm>
-            <a:off x="640080" y="731520"/>
-            <a:ext cx="420624" cy="164592"/>
-          </a:xfrm>
-          <a:prstGeom prst="rect">
-            <a:avLst/>
-          </a:prstGeom>
-          <a:noFill/>
-          <a:ln/>
-        </p:spPr>
-        <p:txBody>
-          <a:bodyPr wrap="square" lIns="0" tIns="0" rIns="0" bIns="0" rtlCol="0" anchor="ctr"/>
-          <a:lstStyle/>
-          <a:p>
-            <a:pPr algn="ctr" indent="0" marL="0">
-              <a:buNone/>
-            </a:pPr>
-            <a:r>
-              <a:rPr lang="en-US" sz="1100" b="1" dirty="0">
-                <a:solidFill>
-                  <a:srgbClr val="FFFFFF"/>
-                </a:solidFill>
-                <a:latin typeface="Aptos" pitchFamily="34" charset="0"/>
-                <a:ea typeface="Aptos" pitchFamily="34" charset="-122"/>
-                <a:cs typeface="Aptos" pitchFamily="34" charset="-120"/>
-              </a:rPr>
-              <a:t>1</a:t>
-            </a:r>
-            <a:endParaRPr lang="en-US" sz="1100" dirty="0"/>
-          </a:p>
-        </p:txBody>
-      </p:sp>
-      <p:sp>
-        <p:nvSpPr>
-          <p:cNvPr id="10" name="Text 8"/>
-          <p:cNvSpPr/>
-          <p:nvPr/>
-        </p:nvSpPr>
-        <p:spPr>
-          <a:xfrm>
-            <a:off x="640080" y="621792"/>
             <a:ext cx="10881360" cy="713232"/>
           </a:xfrm>
           <a:prstGeom prst="rect">
@@ -13944,14 +15239,14 @@
       </p:sp>
       <p:sp>
         <p:nvSpPr>
-          <p:cNvPr id="11" name="Text 9"/>
+          <p:cNvPr id="9" name="Text 7"/>
           <p:cNvSpPr/>
           <p:nvPr/>
         </p:nvSpPr>
         <p:spPr>
           <a:xfrm>
             <a:off x="868680" y="1508760"/>
-            <a:ext cx="6537960" cy="4160520"/>
+            <a:ext cx="6309360" cy="4160520"/>
           </a:xfrm>
           <a:prstGeom prst="rect">
             <a:avLst/>
@@ -14010,18 +15305,18 @@
       </p:sp>
       <p:sp>
         <p:nvSpPr>
-          <p:cNvPr id="12" name="Shape 10"/>
-          <p:cNvSpPr/>
-          <p:nvPr/>
-        </p:nvSpPr>
-        <p:spPr>
-          <a:xfrm>
-            <a:off x="7909560" y="1417320"/>
-            <a:ext cx="3154680" cy="1828800"/>
+          <p:cNvPr id="10" name="Shape 8"/>
+          <p:cNvSpPr/>
+          <p:nvPr/>
+        </p:nvSpPr>
+        <p:spPr>
+          <a:xfrm>
+            <a:off x="7635240" y="1325880"/>
+            <a:ext cx="3474720" cy="1325880"/>
           </a:xfrm>
           <a:prstGeom prst="roundRect">
             <a:avLst>
-              <a:gd name="adj" fmla="val 6000"/>
+              <a:gd name="adj" fmla="val 8276"/>
             </a:avLst>
           </a:prstGeom>
           <a:solidFill>
@@ -14037,14 +15332,14 @@
       </p:sp>
       <p:sp>
         <p:nvSpPr>
-          <p:cNvPr id="13" name="Text 11"/>
-          <p:cNvSpPr/>
-          <p:nvPr/>
-        </p:nvSpPr>
-        <p:spPr>
-          <a:xfrm>
-            <a:off x="8074152" y="1563624"/>
-            <a:ext cx="2825496" cy="256032"/>
+          <p:cNvPr id="11" name="Text 9"/>
+          <p:cNvSpPr/>
+          <p:nvPr/>
+        </p:nvSpPr>
+        <p:spPr>
+          <a:xfrm>
+            <a:off x="7799832" y="1472184"/>
+            <a:ext cx="3145536" cy="256032"/>
           </a:xfrm>
           <a:prstGeom prst="rect">
             <a:avLst/>
@@ -14068,7 +15363,7 @@
                 <a:ea typeface="Aptos" pitchFamily="34" charset="-122"/>
                 <a:cs typeface="Aptos" pitchFamily="34" charset="-120"/>
               </a:rPr>
-              <a:t>Key idea</a:t>
+              <a:t>Practice focus</a:t>
             </a:r>
             <a:endParaRPr lang="en-US" sz="1300" dirty="0"/>
           </a:p>
@@ -14076,14 +15371,14 @@
       </p:sp>
       <p:sp>
         <p:nvSpPr>
-          <p:cNvPr id="14" name="Text 12"/>
-          <p:cNvSpPr/>
-          <p:nvPr/>
-        </p:nvSpPr>
-        <p:spPr>
-          <a:xfrm>
-            <a:off x="8074152" y="1920240"/>
-            <a:ext cx="2825496" cy="1188720"/>
+          <p:cNvPr id="12" name="Text 10"/>
+          <p:cNvSpPr/>
+          <p:nvPr/>
+        </p:nvSpPr>
+        <p:spPr>
+          <a:xfrm>
+            <a:off x="7799832" y="1828800"/>
+            <a:ext cx="3145536" cy="685800"/>
           </a:xfrm>
           <a:prstGeom prst="rect">
             <a:avLst/>
@@ -14117,18 +15412,159 @@
       </p:sp>
       <p:sp>
         <p:nvSpPr>
-          <p:cNvPr id="15" name="Shape 13"/>
-          <p:cNvSpPr/>
-          <p:nvPr/>
-        </p:nvSpPr>
-        <p:spPr>
-          <a:xfrm>
-            <a:off x="7909560" y="3520440"/>
-            <a:ext cx="3154680" cy="1737360"/>
+          <p:cNvPr id="13" name="Shape 11"/>
+          <p:cNvSpPr/>
+          <p:nvPr/>
+        </p:nvSpPr>
+        <p:spPr>
+          <a:xfrm>
+            <a:off x="7635240" y="2788920"/>
+            <a:ext cx="3474720" cy="1536192"/>
           </a:xfrm>
           <a:prstGeom prst="roundRect">
             <a:avLst>
-              <a:gd name="adj" fmla="val 6316"/>
+              <a:gd name="adj" fmla="val 7143"/>
+            </a:avLst>
+          </a:prstGeom>
+          <a:solidFill>
+            <a:srgbClr val="FFFFFF">
+              <a:alpha val="88000"/>
+            </a:srgbClr>
+          </a:solidFill>
+          <a:ln w="12700">
+            <a:solidFill>
+              <a:srgbClr val="D6E8F2"/>
+            </a:solidFill>
+            <a:prstDash val="solid"/>
+          </a:ln>
+        </p:spPr>
+      </p:sp>
+      <p:sp>
+        <p:nvSpPr>
+          <p:cNvPr id="14" name="Shape 12"/>
+          <p:cNvSpPr/>
+          <p:nvPr/>
+        </p:nvSpPr>
+        <p:spPr>
+          <a:xfrm>
+            <a:off x="8074152" y="3291840"/>
+            <a:ext cx="2596896" cy="749808"/>
+          </a:xfrm>
+          <a:prstGeom prst="rect">
+            <a:avLst/>
+          </a:prstGeom>
+          <a:solidFill>
+            <a:srgbClr val="EAF6F8"/>
+          </a:solidFill>
+          <a:ln w="12700">
+            <a:solidFill>
+              <a:srgbClr val="8ABBD8"/>
+            </a:solidFill>
+            <a:prstDash val="solid"/>
+          </a:ln>
+        </p:spPr>
+      </p:sp>
+      <p:sp>
+        <p:nvSpPr>
+          <p:cNvPr id="15" name="Shape 13"/>
+          <p:cNvSpPr/>
+          <p:nvPr/>
+        </p:nvSpPr>
+        <p:spPr>
+          <a:xfrm>
+            <a:off x="8202168" y="3721608"/>
+            <a:ext cx="2340864" cy="0"/>
+          </a:xfrm>
+          <a:prstGeom prst="line">
+            <a:avLst/>
+          </a:prstGeom>
+          <a:noFill/>
+          <a:ln w="19050">
+            <a:solidFill>
+              <a:srgbClr val="0068B7"/>
+            </a:solidFill>
+            <a:prstDash val="solid"/>
+          </a:ln>
+        </p:spPr>
+      </p:sp>
+      <p:sp>
+        <p:nvSpPr>
+          <p:cNvPr id="16" name="Shape 14"/>
+          <p:cNvSpPr/>
+          <p:nvPr/>
+        </p:nvSpPr>
+        <p:spPr>
+          <a:xfrm>
+            <a:off x="9198864" y="4206240"/>
+            <a:ext cx="347472" cy="347472"/>
+          </a:xfrm>
+          <a:prstGeom prst="ellipse">
+            <a:avLst/>
+          </a:prstGeom>
+          <a:solidFill>
+            <a:srgbClr val="2F8A28"/>
+          </a:solidFill>
+          <a:ln w="12700">
+            <a:solidFill>
+              <a:srgbClr val="2F8A28"/>
+            </a:solidFill>
+            <a:prstDash val="solid"/>
+          </a:ln>
+        </p:spPr>
+      </p:sp>
+      <p:sp>
+        <p:nvSpPr>
+          <p:cNvPr id="17" name="Text 15"/>
+          <p:cNvSpPr/>
+          <p:nvPr/>
+        </p:nvSpPr>
+        <p:spPr>
+          <a:xfrm>
+            <a:off x="7909560" y="3977640"/>
+            <a:ext cx="2926080" cy="182880"/>
+          </a:xfrm>
+          <a:prstGeom prst="rect">
+            <a:avLst/>
+          </a:prstGeom>
+          <a:noFill/>
+          <a:ln/>
+        </p:spPr>
+        <p:txBody>
+          <a:bodyPr wrap="square" lIns="0" tIns="0" rIns="0" bIns="0" rtlCol="0" anchor="ctr"/>
+          <a:lstStyle/>
+          <a:p>
+            <a:pPr algn="ctr" indent="0" marL="0">
+              <a:buNone/>
+            </a:pPr>
+            <a:r>
+              <a:rPr lang="en-US" sz="1000" dirty="0">
+                <a:solidFill>
+                  <a:srgbClr val="003A63"/>
+                </a:solidFill>
+                <a:latin typeface="Aptos" pitchFamily="34" charset="0"/>
+                <a:ea typeface="Aptos" pitchFamily="34" charset="-122"/>
+                <a:cs typeface="Aptos" pitchFamily="34" charset="-120"/>
+              </a:rPr>
+              <a:t>Concept to action</a:t>
+            </a:r>
+            <a:endParaRPr lang="en-US" sz="1000" dirty="0"/>
+          </a:p>
+        </p:txBody>
+      </p:sp>
+      <p:sp>
+        <p:nvSpPr>
+          <p:cNvPr id="18" name="Shape 16"/>
+          <p:cNvSpPr/>
+          <p:nvPr/>
+        </p:nvSpPr>
+        <p:spPr>
+          <a:xfrm>
+            <a:off x="7635240" y="4498848"/>
+            <a:ext cx="3474720" cy="1143000"/>
+          </a:xfrm>
+          <a:prstGeom prst="roundRect">
+            <a:avLst>
+              <a:gd name="adj" fmla="val 9600"/>
             </a:avLst>
           </a:prstGeom>
           <a:solidFill>
@@ -14144,14 +15580,14 @@
       </p:sp>
       <p:sp>
         <p:nvSpPr>
-          <p:cNvPr id="16" name="Text 14"/>
-          <p:cNvSpPr/>
-          <p:nvPr/>
-        </p:nvSpPr>
-        <p:spPr>
-          <a:xfrm>
-            <a:off x="8074152" y="3666744"/>
-            <a:ext cx="2825496" cy="256032"/>
+          <p:cNvPr id="19" name="Text 17"/>
+          <p:cNvSpPr/>
+          <p:nvPr/>
+        </p:nvSpPr>
+        <p:spPr>
+          <a:xfrm>
+            <a:off x="7799832" y="4645152"/>
+            <a:ext cx="3145536" cy="256032"/>
           </a:xfrm>
           <a:prstGeom prst="rect">
             <a:avLst/>
@@ -14175,7 +15611,7 @@
                 <a:ea typeface="Aptos" pitchFamily="34" charset="-122"/>
                 <a:cs typeface="Aptos" pitchFamily="34" charset="-120"/>
               </a:rPr>
-              <a:t>Use this for</a:t>
+              <a:t>What to produce</a:t>
             </a:r>
             <a:endParaRPr lang="en-US" sz="1300" dirty="0"/>
           </a:p>
@@ -14183,14 +15619,14 @@
       </p:sp>
       <p:sp>
         <p:nvSpPr>
-          <p:cNvPr id="17" name="Text 15"/>
-          <p:cNvSpPr/>
-          <p:nvPr/>
-        </p:nvSpPr>
-        <p:spPr>
-          <a:xfrm>
-            <a:off x="8074152" y="4023360"/>
-            <a:ext cx="2825496" cy="1097280"/>
+          <p:cNvPr id="20" name="Text 18"/>
+          <p:cNvSpPr/>
+          <p:nvPr/>
+        </p:nvSpPr>
+        <p:spPr>
+          <a:xfrm>
+            <a:off x="7799832" y="5001768"/>
+            <a:ext cx="3145536" cy="502920"/>
           </a:xfrm>
           <a:prstGeom prst="rect">
             <a:avLst/>
@@ -14216,7 +15652,7 @@
                 <a:ea typeface="Aptos" pitchFamily="34" charset="-122"/>
                 <a:cs typeface="Aptos" pitchFamily="34" charset="-120"/>
               </a:rPr>
-              <a:t>Connect the concept to public health decisions, safeguards, documentation, or implementation work.</a:t>
+              <a:t>Use the assignment to test whether you can explain the concept, apply it to a realistic public health situation, and identify what would need review before the work moves forward.</a:t>
             </a:r>
             <a:endParaRPr lang="en-US" sz="1550" dirty="0"/>
           </a:p>
@@ -14390,8 +15826,8 @@
         </p:nvSpPr>
         <p:spPr>
           <a:xfrm>
-            <a:off x="9966960" y="6537960"/>
-            <a:ext cx="1645920" cy="201168"/>
+            <a:off x="9646920" y="6537960"/>
+            <a:ext cx="1965960" cy="201168"/>
           </a:xfrm>
           <a:prstGeom prst="rect">
             <a:avLst/>
@@ -14415,7 +15851,7 @@
                 <a:ea typeface="Aptos" pitchFamily="34" charset="-122"/>
                 <a:cs typeface="Aptos" pitchFamily="34" charset="-120"/>
               </a:rPr>
-              <a:t>Â© Paula Soper</a:t>
+              <a:t>Copyright Paula Soper</a:t>
             </a:r>
             <a:endParaRPr lang="en-US" sz="800" dirty="0"/>
           </a:p>
@@ -14462,77 +15898,13 @@
       </p:sp>
       <p:sp>
         <p:nvSpPr>
-          <p:cNvPr id="8" name="Shape 6"/>
+          <p:cNvPr id="8" name="Text 6"/>
           <p:cNvSpPr/>
           <p:nvPr/>
         </p:nvSpPr>
         <p:spPr>
           <a:xfrm>
             <a:off x="640080" y="658368"/>
-            <a:ext cx="420624" cy="420624"/>
-          </a:xfrm>
-          <a:prstGeom prst="ellipse">
-            <a:avLst/>
-          </a:prstGeom>
-          <a:solidFill>
-            <a:srgbClr val="0068B7"/>
-          </a:solidFill>
-          <a:ln w="12700">
-            <a:solidFill>
-              <a:srgbClr val="0068B7"/>
-            </a:solidFill>
-            <a:prstDash val="solid"/>
-          </a:ln>
-        </p:spPr>
-      </p:sp>
-      <p:sp>
-        <p:nvSpPr>
-          <p:cNvPr id="9" name="Text 7"/>
-          <p:cNvSpPr/>
-          <p:nvPr/>
-        </p:nvSpPr>
-        <p:spPr>
-          <a:xfrm>
-            <a:off x="640080" y="731520"/>
-            <a:ext cx="420624" cy="164592"/>
-          </a:xfrm>
-          <a:prstGeom prst="rect">
-            <a:avLst/>
-          </a:prstGeom>
-          <a:noFill/>
-          <a:ln/>
-        </p:spPr>
-        <p:txBody>
-          <a:bodyPr wrap="square" lIns="0" tIns="0" rIns="0" bIns="0" rtlCol="0" anchor="ctr"/>
-          <a:lstStyle/>
-          <a:p>
-            <a:pPr algn="ctr" indent="0" marL="0">
-              <a:buNone/>
-            </a:pPr>
-            <a:r>
-              <a:rPr lang="en-US" sz="1100" b="1" dirty="0">
-                <a:solidFill>
-                  <a:srgbClr val="FFFFFF"/>
-                </a:solidFill>
-                <a:latin typeface="Aptos" pitchFamily="34" charset="0"/>
-                <a:ea typeface="Aptos" pitchFamily="34" charset="-122"/>
-                <a:cs typeface="Aptos" pitchFamily="34" charset="-120"/>
-              </a:rPr>
-              <a:t>2</a:t>
-            </a:r>
-            <a:endParaRPr lang="en-US" sz="1100" dirty="0"/>
-          </a:p>
-        </p:txBody>
-      </p:sp>
-      <p:sp>
-        <p:nvSpPr>
-          <p:cNvPr id="10" name="Text 8"/>
-          <p:cNvSpPr/>
-          <p:nvPr/>
-        </p:nvSpPr>
-        <p:spPr>
-          <a:xfrm>
-            <a:off x="640080" y="621792"/>
             <a:ext cx="10881360" cy="713232"/>
           </a:xfrm>
           <a:prstGeom prst="rect">
@@ -14567,14 +15939,14 @@
       </p:sp>
       <p:sp>
         <p:nvSpPr>
-          <p:cNvPr id="11" name="Text 9"/>
+          <p:cNvPr id="9" name="Text 7"/>
           <p:cNvSpPr/>
           <p:nvPr/>
         </p:nvSpPr>
         <p:spPr>
           <a:xfrm>
             <a:off x="868680" y="1508760"/>
-            <a:ext cx="6537960" cy="4160520"/>
+            <a:ext cx="6309360" cy="4160520"/>
           </a:xfrm>
           <a:prstGeom prst="rect">
             <a:avLst/>
@@ -14633,18 +16005,18 @@
       </p:sp>
       <p:sp>
         <p:nvSpPr>
-          <p:cNvPr id="12" name="Shape 10"/>
-          <p:cNvSpPr/>
-          <p:nvPr/>
-        </p:nvSpPr>
-        <p:spPr>
-          <a:xfrm>
-            <a:off x="7909560" y="1417320"/>
-            <a:ext cx="3154680" cy="1828800"/>
+          <p:cNvPr id="10" name="Shape 8"/>
+          <p:cNvSpPr/>
+          <p:nvPr/>
+        </p:nvSpPr>
+        <p:spPr>
+          <a:xfrm>
+            <a:off x="7635240" y="1325880"/>
+            <a:ext cx="3474720" cy="1325880"/>
           </a:xfrm>
           <a:prstGeom prst="roundRect">
             <a:avLst>
-              <a:gd name="adj" fmla="val 6000"/>
+              <a:gd name="adj" fmla="val 8276"/>
             </a:avLst>
           </a:prstGeom>
           <a:solidFill>
@@ -14660,14 +16032,14 @@
       </p:sp>
       <p:sp>
         <p:nvSpPr>
-          <p:cNvPr id="13" name="Text 11"/>
-          <p:cNvSpPr/>
-          <p:nvPr/>
-        </p:nvSpPr>
-        <p:spPr>
-          <a:xfrm>
-            <a:off x="8074152" y="1563624"/>
-            <a:ext cx="2825496" cy="256032"/>
+          <p:cNvPr id="11" name="Text 9"/>
+          <p:cNvSpPr/>
+          <p:nvPr/>
+        </p:nvSpPr>
+        <p:spPr>
+          <a:xfrm>
+            <a:off x="7799832" y="1472184"/>
+            <a:ext cx="3145536" cy="256032"/>
           </a:xfrm>
           <a:prstGeom prst="rect">
             <a:avLst/>
@@ -14691,7 +16063,7 @@
                 <a:ea typeface="Aptos" pitchFamily="34" charset="-122"/>
                 <a:cs typeface="Aptos" pitchFamily="34" charset="-120"/>
               </a:rPr>
-              <a:t>Key idea</a:t>
+              <a:t>Core concept</a:t>
             </a:r>
             <a:endParaRPr lang="en-US" sz="1300" dirty="0"/>
           </a:p>
@@ -14699,14 +16071,14 @@
       </p:sp>
       <p:sp>
         <p:nvSpPr>
-          <p:cNvPr id="14" name="Text 12"/>
-          <p:cNvSpPr/>
-          <p:nvPr/>
-        </p:nvSpPr>
-        <p:spPr>
-          <a:xfrm>
-            <a:off x="8074152" y="1920240"/>
-            <a:ext cx="2825496" cy="1188720"/>
+          <p:cNvPr id="12" name="Text 10"/>
+          <p:cNvSpPr/>
+          <p:nvPr/>
+        </p:nvSpPr>
+        <p:spPr>
+          <a:xfrm>
+            <a:off x="7799832" y="1828800"/>
+            <a:ext cx="3145536" cy="685800"/>
           </a:xfrm>
           <a:prstGeom prst="rect">
             <a:avLst/>
@@ -14740,18 +16112,159 @@
       </p:sp>
       <p:sp>
         <p:nvSpPr>
-          <p:cNvPr id="15" name="Shape 13"/>
-          <p:cNvSpPr/>
-          <p:nvPr/>
-        </p:nvSpPr>
-        <p:spPr>
-          <a:xfrm>
-            <a:off x="7909560" y="3520440"/>
-            <a:ext cx="3154680" cy="1737360"/>
+          <p:cNvPr id="13" name="Shape 11"/>
+          <p:cNvSpPr/>
+          <p:nvPr/>
+        </p:nvSpPr>
+        <p:spPr>
+          <a:xfrm>
+            <a:off x="7635240" y="2788920"/>
+            <a:ext cx="3474720" cy="1536192"/>
           </a:xfrm>
           <a:prstGeom prst="roundRect">
             <a:avLst>
-              <a:gd name="adj" fmla="val 6316"/>
+              <a:gd name="adj" fmla="val 7143"/>
+            </a:avLst>
+          </a:prstGeom>
+          <a:solidFill>
+            <a:srgbClr val="FFFFFF">
+              <a:alpha val="88000"/>
+            </a:srgbClr>
+          </a:solidFill>
+          <a:ln w="12700">
+            <a:solidFill>
+              <a:srgbClr val="D6E8F2"/>
+            </a:solidFill>
+            <a:prstDash val="solid"/>
+          </a:ln>
+        </p:spPr>
+      </p:sp>
+      <p:sp>
+        <p:nvSpPr>
+          <p:cNvPr id="14" name="Shape 12"/>
+          <p:cNvSpPr/>
+          <p:nvPr/>
+        </p:nvSpPr>
+        <p:spPr>
+          <a:xfrm>
+            <a:off x="8074152" y="3291840"/>
+            <a:ext cx="2596896" cy="749808"/>
+          </a:xfrm>
+          <a:prstGeom prst="rect">
+            <a:avLst/>
+          </a:prstGeom>
+          <a:solidFill>
+            <a:srgbClr val="EAF6F8"/>
+          </a:solidFill>
+          <a:ln w="12700">
+            <a:solidFill>
+              <a:srgbClr val="8ABBD8"/>
+            </a:solidFill>
+            <a:prstDash val="solid"/>
+          </a:ln>
+        </p:spPr>
+      </p:sp>
+      <p:sp>
+        <p:nvSpPr>
+          <p:cNvPr id="15" name="Shape 13"/>
+          <p:cNvSpPr/>
+          <p:nvPr/>
+        </p:nvSpPr>
+        <p:spPr>
+          <a:xfrm>
+            <a:off x="8202168" y="3721608"/>
+            <a:ext cx="2340864" cy="0"/>
+          </a:xfrm>
+          <a:prstGeom prst="line">
+            <a:avLst/>
+          </a:prstGeom>
+          <a:noFill/>
+          <a:ln w="19050">
+            <a:solidFill>
+              <a:srgbClr val="0068B7"/>
+            </a:solidFill>
+            <a:prstDash val="solid"/>
+          </a:ln>
+        </p:spPr>
+      </p:sp>
+      <p:sp>
+        <p:nvSpPr>
+          <p:cNvPr id="16" name="Shape 14"/>
+          <p:cNvSpPr/>
+          <p:nvPr/>
+        </p:nvSpPr>
+        <p:spPr>
+          <a:xfrm>
+            <a:off x="9198864" y="4206240"/>
+            <a:ext cx="347472" cy="347472"/>
+          </a:xfrm>
+          <a:prstGeom prst="ellipse">
+            <a:avLst/>
+          </a:prstGeom>
+          <a:solidFill>
+            <a:srgbClr val="2F8A28"/>
+          </a:solidFill>
+          <a:ln w="12700">
+            <a:solidFill>
+              <a:srgbClr val="2F8A28"/>
+            </a:solidFill>
+            <a:prstDash val="solid"/>
+          </a:ln>
+        </p:spPr>
+      </p:sp>
+      <p:sp>
+        <p:nvSpPr>
+          <p:cNvPr id="17" name="Text 15"/>
+          <p:cNvSpPr/>
+          <p:nvPr/>
+        </p:nvSpPr>
+        <p:spPr>
+          <a:xfrm>
+            <a:off x="7909560" y="3977640"/>
+            <a:ext cx="2926080" cy="182880"/>
+          </a:xfrm>
+          <a:prstGeom prst="rect">
+            <a:avLst/>
+          </a:prstGeom>
+          <a:noFill/>
+          <a:ln/>
+        </p:spPr>
+        <p:txBody>
+          <a:bodyPr wrap="square" lIns="0" tIns="0" rIns="0" bIns="0" rtlCol="0" anchor="ctr"/>
+          <a:lstStyle/>
+          <a:p>
+            <a:pPr algn="ctr" indent="0" marL="0">
+              <a:buNone/>
+            </a:pPr>
+            <a:r>
+              <a:rPr lang="en-US" sz="1000" dirty="0">
+                <a:solidFill>
+                  <a:srgbClr val="003A63"/>
+                </a:solidFill>
+                <a:latin typeface="Aptos" pitchFamily="34" charset="0"/>
+                <a:ea typeface="Aptos" pitchFamily="34" charset="-122"/>
+                <a:cs typeface="Aptos" pitchFamily="34" charset="-120"/>
+              </a:rPr>
+              <a:t>Concept to action</a:t>
+            </a:r>
+            <a:endParaRPr lang="en-US" sz="1000" dirty="0"/>
+          </a:p>
+        </p:txBody>
+      </p:sp>
+      <p:sp>
+        <p:nvSpPr>
+          <p:cNvPr id="18" name="Shape 16"/>
+          <p:cNvSpPr/>
+          <p:nvPr/>
+        </p:nvSpPr>
+        <p:spPr>
+          <a:xfrm>
+            <a:off x="7635240" y="4498848"/>
+            <a:ext cx="3474720" cy="1143000"/>
+          </a:xfrm>
+          <a:prstGeom prst="roundRect">
+            <a:avLst>
+              <a:gd name="adj" fmla="val 9600"/>
             </a:avLst>
           </a:prstGeom>
           <a:solidFill>
@@ -14767,14 +16280,14 @@
       </p:sp>
       <p:sp>
         <p:nvSpPr>
-          <p:cNvPr id="16" name="Text 14"/>
-          <p:cNvSpPr/>
-          <p:nvPr/>
-        </p:nvSpPr>
-        <p:spPr>
-          <a:xfrm>
-            <a:off x="8074152" y="3666744"/>
-            <a:ext cx="2825496" cy="256032"/>
+          <p:cNvPr id="19" name="Text 17"/>
+          <p:cNvSpPr/>
+          <p:nvPr/>
+        </p:nvSpPr>
+        <p:spPr>
+          <a:xfrm>
+            <a:off x="7799832" y="4645152"/>
+            <a:ext cx="3145536" cy="256032"/>
           </a:xfrm>
           <a:prstGeom prst="rect">
             <a:avLst/>
@@ -14798,7 +16311,7 @@
                 <a:ea typeface="Aptos" pitchFamily="34" charset="-122"/>
                 <a:cs typeface="Aptos" pitchFamily="34" charset="-120"/>
               </a:rPr>
-              <a:t>Use this for</a:t>
+              <a:t>Apply it</a:t>
             </a:r>
             <a:endParaRPr lang="en-US" sz="1300" dirty="0"/>
           </a:p>
@@ -14806,14 +16319,14 @@
       </p:sp>
       <p:sp>
         <p:nvSpPr>
-          <p:cNvPr id="17" name="Text 15"/>
-          <p:cNvSpPr/>
-          <p:nvPr/>
-        </p:nvSpPr>
-        <p:spPr>
-          <a:xfrm>
-            <a:off x="8074152" y="4023360"/>
-            <a:ext cx="2825496" cy="1097280"/>
+          <p:cNvPr id="20" name="Text 18"/>
+          <p:cNvSpPr/>
+          <p:nvPr/>
+        </p:nvSpPr>
+        <p:spPr>
+          <a:xfrm>
+            <a:off x="7799832" y="5001768"/>
+            <a:ext cx="3145536" cy="502920"/>
           </a:xfrm>
           <a:prstGeom prst="rect">
             <a:avLst/>
@@ -14839,7 +16352,7 @@
                 <a:ea typeface="Aptos" pitchFamily="34" charset="-122"/>
                 <a:cs typeface="Aptos" pitchFamily="34" charset="-120"/>
               </a:rPr>
-              <a:t>Connect the concept to public health decisions, safeguards, documentation, or implementation work.</a:t>
+              <a:t>Connect the concept to public health purpose, responsible use, required safeguards, documentation, and the next action a department should take.</a:t>
             </a:r>
             <a:endParaRPr lang="en-US" sz="1550" dirty="0"/>
           </a:p>
@@ -15013,8 +16526,8 @@
         </p:nvSpPr>
         <p:spPr>
           <a:xfrm>
-            <a:off x="9966960" y="6537960"/>
-            <a:ext cx="1645920" cy="201168"/>
+            <a:off x="9646920" y="6537960"/>
+            <a:ext cx="1965960" cy="201168"/>
           </a:xfrm>
           <a:prstGeom prst="rect">
             <a:avLst/>
@@ -15038,7 +16551,7 @@
                 <a:ea typeface="Aptos" pitchFamily="34" charset="-122"/>
                 <a:cs typeface="Aptos" pitchFamily="34" charset="-120"/>
               </a:rPr>
-              <a:t>Â© Paula Soper</a:t>
+              <a:t>Copyright Paula Soper</a:t>
             </a:r>
             <a:endParaRPr lang="en-US" sz="800" dirty="0"/>
           </a:p>
@@ -15085,14 +16598,257 @@
       </p:sp>
       <p:sp>
         <p:nvSpPr>
-          <p:cNvPr id="8" name="Shape 6"/>
+          <p:cNvPr id="8" name="Text 6"/>
           <p:cNvSpPr/>
           <p:nvPr/>
         </p:nvSpPr>
         <p:spPr>
           <a:xfrm>
             <a:off x="640080" y="658368"/>
-            <a:ext cx="420624" cy="420624"/>
+            <a:ext cx="10881360" cy="713232"/>
+          </a:xfrm>
+          <a:prstGeom prst="rect">
+            <a:avLst/>
+          </a:prstGeom>
+          <a:noFill/>
+          <a:ln/>
+        </p:spPr>
+        <p:txBody>
+          <a:bodyPr wrap="square" lIns="0" tIns="0" rIns="0" bIns="0" rtlCol="0" anchor="ctr">
+            <a:normAutofit/>
+          </a:bodyPr>
+          <a:lstStyle/>
+          <a:p>
+            <a:pPr indent="0" marL="0">
+              <a:buNone/>
+            </a:pPr>
+            <a:r>
+              <a:rPr lang="en-US" sz="3400" b="1" dirty="0">
+                <a:solidFill>
+                  <a:srgbClr val="003A63"/>
+                </a:solidFill>
+                <a:latin typeface="Aptos Display" pitchFamily="34" charset="0"/>
+                <a:ea typeface="Aptos Display" pitchFamily="34" charset="-122"/>
+                <a:cs typeface="Aptos Display" pitchFamily="34" charset="-120"/>
+              </a:rPr>
+              <a:t>Jurisdiction and Agency Policy Note</a:t>
+            </a:r>
+            <a:endParaRPr lang="en-US" sz="3400" dirty="0"/>
+          </a:p>
+        </p:txBody>
+      </p:sp>
+      <p:sp>
+        <p:nvSpPr>
+          <p:cNvPr id="9" name="Text 7"/>
+          <p:cNvSpPr/>
+          <p:nvPr/>
+        </p:nvSpPr>
+        <p:spPr>
+          <a:xfrm>
+            <a:off x="868680" y="1508760"/>
+            <a:ext cx="6309360" cy="4160520"/>
+          </a:xfrm>
+          <a:prstGeom prst="rect">
+            <a:avLst/>
+          </a:prstGeom>
+          <a:noFill/>
+          <a:ln/>
+        </p:spPr>
+        <p:txBody>
+          <a:bodyPr wrap="square" lIns="635" tIns="635" rIns="635" bIns="635" rtlCol="0" anchor="t">
+            <a:normAutofit/>
+          </a:bodyPr>
+          <a:lstStyle/>
+          <a:p>
+            <a:r>
+              <a:rPr lang="en-US" sz="2100" dirty="0">
+                <a:solidFill>
+                  <a:srgbClr val="17364A"/>
+                </a:solidFill>
+                <a:latin typeface="Aptos" pitchFamily="34" charset="0"/>
+                <a:ea typeface="Aptos" pitchFamily="34" charset="-122"/>
+                <a:cs typeface="Aptos" pitchFamily="34" charset="-120"/>
+              </a:rPr>
+              <a:t>This module provides national-level training guidance for public health agencies and partners.</a:t>
+            </a:r>
+            <a:endParaRPr lang="en-US" sz="2100" dirty="0"/>
+          </a:p>
+          <a:p>
+            <a:r>
+              <a:rPr lang="en-US" sz="2100" dirty="0">
+                <a:solidFill>
+                  <a:srgbClr val="17364A"/>
+                </a:solidFill>
+                <a:latin typeface="Aptos" pitchFamily="34" charset="0"/>
+                <a:ea typeface="Aptos" pitchFamily="34" charset="-122"/>
+                <a:cs typeface="Aptos" pitchFamily="34" charset="-120"/>
+              </a:rPr>
+              <a:t>It is not legal advice and does not replace review by agency legal counsel, privacy officers,.</a:t>
+            </a:r>
+            <a:endParaRPr lang="en-US" sz="2100" dirty="0"/>
+          </a:p>
+          <a:p>
+            <a:r>
+              <a:rPr lang="en-US" sz="2100" dirty="0">
+                <a:solidFill>
+                  <a:srgbClr val="17364A"/>
+                </a:solidFill>
+                <a:latin typeface="Aptos" pitchFamily="34" charset="0"/>
+                <a:ea typeface="Aptos" pitchFamily="34" charset="-122"/>
+                <a:cs typeface="Aptos" pitchFamily="34" charset="-120"/>
+              </a:rPr>
+              <a:t>Requirements may vary by state, locality, territory, Tribe, agency, funding source, data-sharing.</a:t>
+            </a:r>
+            <a:endParaRPr lang="en-US" sz="2100" dirty="0"/>
+          </a:p>
+        </p:txBody>
+      </p:sp>
+      <p:sp>
+        <p:nvSpPr>
+          <p:cNvPr id="10" name="Shape 8"/>
+          <p:cNvSpPr/>
+          <p:nvPr/>
+        </p:nvSpPr>
+        <p:spPr>
+          <a:xfrm>
+            <a:off x="7635240" y="1325880"/>
+            <a:ext cx="3474720" cy="1325880"/>
+          </a:xfrm>
+          <a:prstGeom prst="roundRect">
+            <a:avLst>
+              <a:gd name="adj" fmla="val 8276"/>
+            </a:avLst>
+          </a:prstGeom>
+          <a:solidFill>
+            <a:srgbClr val="EEF8ED"/>
+          </a:solidFill>
+          <a:ln w="12700">
+            <a:solidFill>
+              <a:srgbClr val="B9D7E6"/>
+            </a:solidFill>
+            <a:prstDash val="solid"/>
+          </a:ln>
+        </p:spPr>
+      </p:sp>
+      <p:sp>
+        <p:nvSpPr>
+          <p:cNvPr id="11" name="Text 9"/>
+          <p:cNvSpPr/>
+          <p:nvPr/>
+        </p:nvSpPr>
+        <p:spPr>
+          <a:xfrm>
+            <a:off x="7799832" y="1472184"/>
+            <a:ext cx="3145536" cy="256032"/>
+          </a:xfrm>
+          <a:prstGeom prst="rect">
+            <a:avLst/>
+          </a:prstGeom>
+          <a:noFill/>
+          <a:ln/>
+        </p:spPr>
+        <p:txBody>
+          <a:bodyPr wrap="square" lIns="0" tIns="0" rIns="0" bIns="0" rtlCol="0" anchor="ctr"/>
+          <a:lstStyle/>
+          <a:p>
+            <a:pPr indent="0" marL="0">
+              <a:buNone/>
+            </a:pPr>
+            <a:r>
+              <a:rPr lang="en-US" sz="1300" b="1" dirty="0">
+                <a:solidFill>
+                  <a:srgbClr val="0068B7"/>
+                </a:solidFill>
+                <a:latin typeface="Aptos" pitchFamily="34" charset="0"/>
+                <a:ea typeface="Aptos" pitchFamily="34" charset="-122"/>
+                <a:cs typeface="Aptos" pitchFamily="34" charset="-120"/>
+              </a:rPr>
+              <a:t>Governance lens</a:t>
+            </a:r>
+            <a:endParaRPr lang="en-US" sz="1300" dirty="0"/>
+          </a:p>
+        </p:txBody>
+      </p:sp>
+      <p:sp>
+        <p:nvSpPr>
+          <p:cNvPr id="12" name="Text 10"/>
+          <p:cNvSpPr/>
+          <p:nvPr/>
+        </p:nvSpPr>
+        <p:spPr>
+          <a:xfrm>
+            <a:off x="7799832" y="1828800"/>
+            <a:ext cx="3145536" cy="685800"/>
+          </a:xfrm>
+          <a:prstGeom prst="rect">
+            <a:avLst/>
+          </a:prstGeom>
+          <a:noFill/>
+          <a:ln/>
+        </p:spPr>
+        <p:txBody>
+          <a:bodyPr wrap="square" lIns="0" tIns="0" rIns="0" bIns="0" rtlCol="0" anchor="t">
+            <a:normAutofit/>
+          </a:bodyPr>
+          <a:lstStyle/>
+          <a:p>
+            <a:pPr indent="0" marL="0">
+              <a:buNone/>
+            </a:pPr>
+            <a:r>
+              <a:rPr lang="en-US" sz="1550" dirty="0">
+                <a:solidFill>
+                  <a:srgbClr val="17364A"/>
+                </a:solidFill>
+                <a:latin typeface="Aptos" pitchFamily="34" charset="0"/>
+                <a:ea typeface="Aptos" pitchFamily="34" charset="-122"/>
+                <a:cs typeface="Aptos" pitchFamily="34" charset="-120"/>
+              </a:rPr>
+              <a:t>This module provides national-level training guidance for public health agencies and partners.</a:t>
+            </a:r>
+            <a:endParaRPr lang="en-US" sz="1550" dirty="0"/>
+          </a:p>
+        </p:txBody>
+      </p:sp>
+      <p:sp>
+        <p:nvSpPr>
+          <p:cNvPr id="13" name="Shape 11"/>
+          <p:cNvSpPr/>
+          <p:nvPr/>
+        </p:nvSpPr>
+        <p:spPr>
+          <a:xfrm>
+            <a:off x="7635240" y="2788920"/>
+            <a:ext cx="3474720" cy="1536192"/>
+          </a:xfrm>
+          <a:prstGeom prst="roundRect">
+            <a:avLst>
+              <a:gd name="adj" fmla="val 7143"/>
+            </a:avLst>
+          </a:prstGeom>
+          <a:solidFill>
+            <a:srgbClr val="FFFFFF">
+              <a:alpha val="88000"/>
+            </a:srgbClr>
+          </a:solidFill>
+          <a:ln w="12700">
+            <a:solidFill>
+              <a:srgbClr val="D6E8F2"/>
+            </a:solidFill>
+            <a:prstDash val="solid"/>
+          </a:ln>
+        </p:spPr>
+      </p:sp>
+      <p:sp>
+        <p:nvSpPr>
+          <p:cNvPr id="14" name="Shape 12"/>
+          <p:cNvSpPr/>
+          <p:nvPr/>
+        </p:nvSpPr>
+        <p:spPr>
+          <a:xfrm>
+            <a:off x="7891272" y="3108960"/>
+            <a:ext cx="566928" cy="566928"/>
           </a:xfrm>
           <a:prstGeom prst="ellipse">
             <a:avLst/>
@@ -15110,172 +16866,24 @@
       </p:sp>
       <p:sp>
         <p:nvSpPr>
-          <p:cNvPr id="9" name="Text 7"/>
-          <p:cNvSpPr/>
-          <p:nvPr/>
-        </p:nvSpPr>
-        <p:spPr>
-          <a:xfrm>
-            <a:off x="640080" y="731520"/>
-            <a:ext cx="420624" cy="164592"/>
-          </a:xfrm>
-          <a:prstGeom prst="rect">
-            <a:avLst/>
-          </a:prstGeom>
-          <a:noFill/>
-          <a:ln/>
-        </p:spPr>
-        <p:txBody>
-          <a:bodyPr wrap="square" lIns="0" tIns="0" rIns="0" bIns="0" rtlCol="0" anchor="ctr"/>
-          <a:lstStyle/>
-          <a:p>
-            <a:pPr algn="ctr" indent="0" marL="0">
-              <a:buNone/>
-            </a:pPr>
-            <a:r>
-              <a:rPr lang="en-US" sz="1100" b="1" dirty="0">
-                <a:solidFill>
-                  <a:srgbClr val="FFFFFF"/>
-                </a:solidFill>
-                <a:latin typeface="Aptos" pitchFamily="34" charset="0"/>
-                <a:ea typeface="Aptos" pitchFamily="34" charset="-122"/>
-                <a:cs typeface="Aptos" pitchFamily="34" charset="-120"/>
-              </a:rPr>
-              <a:t>3</a:t>
-            </a:r>
-            <a:endParaRPr lang="en-US" sz="1100" dirty="0"/>
-          </a:p>
-        </p:txBody>
-      </p:sp>
-      <p:sp>
-        <p:nvSpPr>
-          <p:cNvPr id="10" name="Text 8"/>
-          <p:cNvSpPr/>
-          <p:nvPr/>
-        </p:nvSpPr>
-        <p:spPr>
-          <a:xfrm>
-            <a:off x="640080" y="621792"/>
-            <a:ext cx="10881360" cy="713232"/>
-          </a:xfrm>
-          <a:prstGeom prst="rect">
-            <a:avLst/>
-          </a:prstGeom>
-          <a:noFill/>
-          <a:ln/>
-        </p:spPr>
-        <p:txBody>
-          <a:bodyPr wrap="square" lIns="0" tIns="0" rIns="0" bIns="0" rtlCol="0" anchor="ctr">
-            <a:normAutofit/>
-          </a:bodyPr>
-          <a:lstStyle/>
-          <a:p>
-            <a:pPr indent="0" marL="0">
-              <a:buNone/>
-            </a:pPr>
-            <a:r>
-              <a:rPr lang="en-US" sz="3400" b="1" dirty="0">
-                <a:solidFill>
-                  <a:srgbClr val="003A63"/>
-                </a:solidFill>
-                <a:latin typeface="Aptos Display" pitchFamily="34" charset="0"/>
-                <a:ea typeface="Aptos Display" pitchFamily="34" charset="-122"/>
-                <a:cs typeface="Aptos Display" pitchFamily="34" charset="-120"/>
-              </a:rPr>
-              <a:t>Jurisdiction and Agency Policy Note</a:t>
-            </a:r>
-            <a:endParaRPr lang="en-US" sz="3400" dirty="0"/>
-          </a:p>
-        </p:txBody>
-      </p:sp>
-      <p:sp>
-        <p:nvSpPr>
-          <p:cNvPr id="11" name="Text 9"/>
-          <p:cNvSpPr/>
-          <p:nvPr/>
-        </p:nvSpPr>
-        <p:spPr>
-          <a:xfrm>
-            <a:off x="868680" y="1508760"/>
-            <a:ext cx="6537960" cy="4160520"/>
-          </a:xfrm>
-          <a:prstGeom prst="rect">
-            <a:avLst/>
-          </a:prstGeom>
-          <a:noFill/>
-          <a:ln/>
-        </p:spPr>
-        <p:txBody>
-          <a:bodyPr wrap="square" lIns="635" tIns="635" rIns="635" bIns="635" rtlCol="0" anchor="t">
-            <a:normAutofit/>
-          </a:bodyPr>
-          <a:lstStyle/>
-          <a:p>
-            <a:r>
-              <a:rPr lang="en-US" sz="2100" dirty="0">
-                <a:solidFill>
-                  <a:srgbClr val="17364A"/>
-                </a:solidFill>
-                <a:latin typeface="Aptos" pitchFamily="34" charset="0"/>
-                <a:ea typeface="Aptos" pitchFamily="34" charset="-122"/>
-                <a:cs typeface="Aptos" pitchFamily="34" charset="-120"/>
-              </a:rPr>
-              <a:t>This module provides national-level training guidance for public health agencies and partners.</a:t>
-            </a:r>
-            <a:endParaRPr lang="en-US" sz="2100" dirty="0"/>
-          </a:p>
-          <a:p>
-            <a:r>
-              <a:rPr lang="en-US" sz="2100" dirty="0">
-                <a:solidFill>
-                  <a:srgbClr val="17364A"/>
-                </a:solidFill>
-                <a:latin typeface="Aptos" pitchFamily="34" charset="0"/>
-                <a:ea typeface="Aptos" pitchFamily="34" charset="-122"/>
-                <a:cs typeface="Aptos" pitchFamily="34" charset="-120"/>
-              </a:rPr>
-              <a:t>It is not legal advice and does not replace review by agency legal counsel, privacy officers,.</a:t>
-            </a:r>
-            <a:endParaRPr lang="en-US" sz="2100" dirty="0"/>
-          </a:p>
-          <a:p>
-            <a:r>
-              <a:rPr lang="en-US" sz="2100" dirty="0">
-                <a:solidFill>
-                  <a:srgbClr val="17364A"/>
-                </a:solidFill>
-                <a:latin typeface="Aptos" pitchFamily="34" charset="0"/>
-                <a:ea typeface="Aptos" pitchFamily="34" charset="-122"/>
-                <a:cs typeface="Aptos" pitchFamily="34" charset="-120"/>
-              </a:rPr>
-              <a:t>Requirements may vary by state, locality, territory, Tribe, agency, funding source, data-sharing.</a:t>
-            </a:r>
-            <a:endParaRPr lang="en-US" sz="2100" dirty="0"/>
-          </a:p>
-        </p:txBody>
-      </p:sp>
-      <p:sp>
-        <p:nvSpPr>
-          <p:cNvPr id="12" name="Shape 10"/>
-          <p:cNvSpPr/>
-          <p:nvPr/>
-        </p:nvSpPr>
-        <p:spPr>
-          <a:xfrm>
-            <a:off x="7909560" y="1417320"/>
-            <a:ext cx="3154680" cy="1828800"/>
-          </a:xfrm>
-          <a:prstGeom prst="roundRect">
-            <a:avLst>
-              <a:gd name="adj" fmla="val 6000"/>
-            </a:avLst>
+          <p:cNvPr id="15" name="Shape 13"/>
+          <p:cNvSpPr/>
+          <p:nvPr/>
+        </p:nvSpPr>
+        <p:spPr>
+          <a:xfrm>
+            <a:off x="10287000" y="3108960"/>
+            <a:ext cx="566928" cy="566928"/>
+          </a:xfrm>
+          <a:prstGeom prst="ellipse">
+            <a:avLst/>
           </a:prstGeom>
           <a:solidFill>
-            <a:srgbClr val="EEF8ED"/>
+            <a:srgbClr val="2F8A28"/>
           </a:solidFill>
           <a:ln w="12700">
             <a:solidFill>
-              <a:srgbClr val="B9D7E6"/>
+              <a:srgbClr val="2F8A28"/>
             </a:solidFill>
             <a:prstDash val="solid"/>
           </a:ln>
@@ -15283,14 +16891,108 @@
       </p:sp>
       <p:sp>
         <p:nvSpPr>
-          <p:cNvPr id="13" name="Text 11"/>
-          <p:cNvSpPr/>
-          <p:nvPr/>
-        </p:nvSpPr>
-        <p:spPr>
-          <a:xfrm>
-            <a:off x="8074152" y="1563624"/>
-            <a:ext cx="2825496" cy="256032"/>
+          <p:cNvPr id="16" name="Shape 14"/>
+          <p:cNvSpPr/>
+          <p:nvPr/>
+        </p:nvSpPr>
+        <p:spPr>
+          <a:xfrm>
+            <a:off x="9089136" y="3456432"/>
+            <a:ext cx="566928" cy="566928"/>
+          </a:xfrm>
+          <a:prstGeom prst="ellipse">
+            <a:avLst/>
+          </a:prstGeom>
+          <a:solidFill>
+            <a:srgbClr val="6A4CA3"/>
+          </a:solidFill>
+          <a:ln w="12700">
+            <a:solidFill>
+              <a:srgbClr val="6A4CA3"/>
+            </a:solidFill>
+            <a:prstDash val="solid"/>
+          </a:ln>
+        </p:spPr>
+      </p:sp>
+      <p:sp>
+        <p:nvSpPr>
+          <p:cNvPr id="17" name="Shape 15"/>
+          <p:cNvSpPr/>
+          <p:nvPr/>
+        </p:nvSpPr>
+        <p:spPr>
+          <a:xfrm>
+            <a:off x="8385048" y="3419856"/>
+            <a:ext cx="1975104" cy="0"/>
+          </a:xfrm>
+          <a:prstGeom prst="line">
+            <a:avLst/>
+          </a:prstGeom>
+          <a:noFill/>
+          <a:ln w="25400">
+            <a:solidFill>
+              <a:srgbClr val="8ABBD8"/>
+            </a:solidFill>
+            <a:prstDash val="solid"/>
+          </a:ln>
+        </p:spPr>
+      </p:sp>
+      <p:sp>
+        <p:nvSpPr>
+          <p:cNvPr id="18" name="Shape 16"/>
+          <p:cNvSpPr/>
+          <p:nvPr/>
+        </p:nvSpPr>
+        <p:spPr>
+          <a:xfrm>
+            <a:off x="8202168" y="3630168"/>
+            <a:ext cx="1170432" cy="118872"/>
+          </a:xfrm>
+          <a:prstGeom prst="line">
+            <a:avLst/>
+          </a:prstGeom>
+          <a:noFill/>
+          <a:ln w="25400">
+            <a:solidFill>
+              <a:srgbClr val="8ABBD8"/>
+            </a:solidFill>
+            <a:prstDash val="solid"/>
+          </a:ln>
+        </p:spPr>
+      </p:sp>
+      <p:sp>
+        <p:nvSpPr>
+          <p:cNvPr id="19" name="Shape 17"/>
+          <p:cNvSpPr/>
+          <p:nvPr/>
+        </p:nvSpPr>
+        <p:spPr>
+          <a:xfrm>
+            <a:off x="10543032" y="3630168"/>
+            <a:ext cx="-1170432" cy="118872"/>
+          </a:xfrm>
+          <a:prstGeom prst="line">
+            <a:avLst/>
+          </a:prstGeom>
+          <a:noFill/>
+          <a:ln w="25400">
+            <a:solidFill>
+              <a:srgbClr val="8ABBD8"/>
+            </a:solidFill>
+            <a:prstDash val="solid"/>
+          </a:ln>
+        </p:spPr>
+      </p:sp>
+      <p:sp>
+        <p:nvSpPr>
+          <p:cNvPr id="20" name="Text 18"/>
+          <p:cNvSpPr/>
+          <p:nvPr/>
+        </p:nvSpPr>
+        <p:spPr>
+          <a:xfrm>
+            <a:off x="7863840" y="4069080"/>
+            <a:ext cx="3017520" cy="164592"/>
           </a:xfrm>
           <a:prstGeom prst="rect">
             <a:avLst/>
@@ -15302,79 +17004,38 @@
           <a:bodyPr wrap="square" lIns="0" tIns="0" rIns="0" bIns="0" rtlCol="0" anchor="ctr"/>
           <a:lstStyle/>
           <a:p>
-            <a:pPr indent="0" marL="0">
-              <a:buNone/>
-            </a:pPr>
-            <a:r>
-              <a:rPr lang="en-US" sz="1300" b="1" dirty="0">
-                <a:solidFill>
-                  <a:srgbClr val="0068B7"/>
-                </a:solidFill>
-                <a:latin typeface="Aptos" pitchFamily="34" charset="0"/>
-                <a:ea typeface="Aptos" pitchFamily="34" charset="-122"/>
-                <a:cs typeface="Aptos" pitchFamily="34" charset="-120"/>
-              </a:rPr>
-              <a:t>Key idea</a:t>
-            </a:r>
-            <a:endParaRPr lang="en-US" sz="1300" dirty="0"/>
-          </a:p>
-        </p:txBody>
-      </p:sp>
-      <p:sp>
-        <p:nvSpPr>
-          <p:cNvPr id="14" name="Text 12"/>
-          <p:cNvSpPr/>
-          <p:nvPr/>
-        </p:nvSpPr>
-        <p:spPr>
-          <a:xfrm>
-            <a:off x="8074152" y="1920240"/>
-            <a:ext cx="2825496" cy="1188720"/>
-          </a:xfrm>
-          <a:prstGeom prst="rect">
-            <a:avLst/>
-          </a:prstGeom>
-          <a:noFill/>
-          <a:ln/>
-        </p:spPr>
-        <p:txBody>
-          <a:bodyPr wrap="square" lIns="0" tIns="0" rIns="0" bIns="0" rtlCol="0" anchor="t">
-            <a:normAutofit/>
-          </a:bodyPr>
-          <a:lstStyle/>
-          <a:p>
-            <a:pPr indent="0" marL="0">
-              <a:buNone/>
-            </a:pPr>
-            <a:r>
-              <a:rPr lang="en-US" sz="1550" dirty="0">
-                <a:solidFill>
-                  <a:srgbClr val="17364A"/>
-                </a:solidFill>
-                <a:latin typeface="Aptos" pitchFamily="34" charset="0"/>
-                <a:ea typeface="Aptos" pitchFamily="34" charset="-122"/>
-                <a:cs typeface="Aptos" pitchFamily="34" charset="-120"/>
-              </a:rPr>
-              <a:t>This module provides national-level training guidance for public health agencies and partners.</a:t>
-            </a:r>
-            <a:endParaRPr lang="en-US" sz="1550" dirty="0"/>
-          </a:p>
-        </p:txBody>
-      </p:sp>
-      <p:sp>
-        <p:nvSpPr>
-          <p:cNvPr id="15" name="Shape 13"/>
-          <p:cNvSpPr/>
-          <p:nvPr/>
-        </p:nvSpPr>
-        <p:spPr>
-          <a:xfrm>
-            <a:off x="7909560" y="3520440"/>
-            <a:ext cx="3154680" cy="1737360"/>
+            <a:pPr algn="ctr" indent="0" marL="0">
+              <a:buNone/>
+            </a:pPr>
+            <a:r>
+              <a:rPr lang="en-US" sz="900" b="1" dirty="0">
+                <a:solidFill>
+                  <a:srgbClr val="003A63"/>
+                </a:solidFill>
+                <a:latin typeface="Aptos" pitchFamily="34" charset="0"/>
+                <a:ea typeface="Aptos" pitchFamily="34" charset="-122"/>
+                <a:cs typeface="Aptos" pitchFamily="34" charset="-120"/>
+              </a:rPr>
+              <a:t>Decision rights</a:t>
+            </a:r>
+            <a:endParaRPr lang="en-US" sz="900" dirty="0"/>
+          </a:p>
+        </p:txBody>
+      </p:sp>
+      <p:sp>
+        <p:nvSpPr>
+          <p:cNvPr id="21" name="Shape 19"/>
+          <p:cNvSpPr/>
+          <p:nvPr/>
+        </p:nvSpPr>
+        <p:spPr>
+          <a:xfrm>
+            <a:off x="7635240" y="4498848"/>
+            <a:ext cx="3474720" cy="1143000"/>
           </a:xfrm>
           <a:prstGeom prst="roundRect">
             <a:avLst>
-              <a:gd name="adj" fmla="val 6316"/>
+              <a:gd name="adj" fmla="val 9600"/>
             </a:avLst>
           </a:prstGeom>
           <a:solidFill>
@@ -15390,14 +17051,14 @@
       </p:sp>
       <p:sp>
         <p:nvSpPr>
-          <p:cNvPr id="16" name="Text 14"/>
-          <p:cNvSpPr/>
-          <p:nvPr/>
-        </p:nvSpPr>
-        <p:spPr>
-          <a:xfrm>
-            <a:off x="8074152" y="3666744"/>
-            <a:ext cx="2825496" cy="256032"/>
+          <p:cNvPr id="22" name="Text 20"/>
+          <p:cNvSpPr/>
+          <p:nvPr/>
+        </p:nvSpPr>
+        <p:spPr>
+          <a:xfrm>
+            <a:off x="7799832" y="4645152"/>
+            <a:ext cx="3145536" cy="256032"/>
           </a:xfrm>
           <a:prstGeom prst="rect">
             <a:avLst/>
@@ -15421,7 +17082,7 @@
                 <a:ea typeface="Aptos" pitchFamily="34" charset="-122"/>
                 <a:cs typeface="Aptos" pitchFamily="34" charset="-120"/>
               </a:rPr>
-              <a:t>Use this for</a:t>
+              <a:t>What to document</a:t>
             </a:r>
             <a:endParaRPr lang="en-US" sz="1300" dirty="0"/>
           </a:p>
@@ -15429,14 +17090,14 @@
       </p:sp>
       <p:sp>
         <p:nvSpPr>
-          <p:cNvPr id="17" name="Text 15"/>
-          <p:cNvSpPr/>
-          <p:nvPr/>
-        </p:nvSpPr>
-        <p:spPr>
-          <a:xfrm>
-            <a:off x="8074152" y="4023360"/>
-            <a:ext cx="2825496" cy="1097280"/>
+          <p:cNvPr id="23" name="Text 21"/>
+          <p:cNvSpPr/>
+          <p:nvPr/>
+        </p:nvSpPr>
+        <p:spPr>
+          <a:xfrm>
+            <a:off x="7799832" y="5001768"/>
+            <a:ext cx="3145536" cy="502920"/>
           </a:xfrm>
           <a:prstGeom prst="rect">
             <a:avLst/>
@@ -15462,7 +17123,7 @@
                 <a:ea typeface="Aptos" pitchFamily="34" charset="-122"/>
                 <a:cs typeface="Aptos" pitchFamily="34" charset="-120"/>
               </a:rPr>
-              <a:t>Connect the concept to public health decisions, safeguards, documentation, or implementation work.</a:t>
+              <a:t>Translate this concept into clear decision rights, review steps, documentation expectations, and escalation paths before an AI-supported workflow is approved.</a:t>
             </a:r>
             <a:endParaRPr lang="en-US" sz="1550" dirty="0"/>
           </a:p>
@@ -15636,8 +17297,8 @@
         </p:nvSpPr>
         <p:spPr>
           <a:xfrm>
-            <a:off x="9966960" y="6537960"/>
-            <a:ext cx="1645920" cy="201168"/>
+            <a:off x="9646920" y="6537960"/>
+            <a:ext cx="1965960" cy="201168"/>
           </a:xfrm>
           <a:prstGeom prst="rect">
             <a:avLst/>
@@ -15661,7 +17322,7 @@
                 <a:ea typeface="Aptos" pitchFamily="34" charset="-122"/>
                 <a:cs typeface="Aptos" pitchFamily="34" charset="-120"/>
               </a:rPr>
-              <a:t>Â© Paula Soper</a:t>
+              <a:t>Copyright Paula Soper</a:t>
             </a:r>
             <a:endParaRPr lang="en-US" sz="800" dirty="0"/>
           </a:p>
@@ -15708,77 +17369,13 @@
       </p:sp>
       <p:sp>
         <p:nvSpPr>
-          <p:cNvPr id="8" name="Shape 6"/>
+          <p:cNvPr id="8" name="Text 6"/>
           <p:cNvSpPr/>
           <p:nvPr/>
         </p:nvSpPr>
         <p:spPr>
           <a:xfrm>
             <a:off x="640080" y="658368"/>
-            <a:ext cx="420624" cy="420624"/>
-          </a:xfrm>
-          <a:prstGeom prst="ellipse">
-            <a:avLst/>
-          </a:prstGeom>
-          <a:solidFill>
-            <a:srgbClr val="0068B7"/>
-          </a:solidFill>
-          <a:ln w="12700">
-            <a:solidFill>
-              <a:srgbClr val="0068B7"/>
-            </a:solidFill>
-            <a:prstDash val="solid"/>
-          </a:ln>
-        </p:spPr>
-      </p:sp>
-      <p:sp>
-        <p:nvSpPr>
-          <p:cNvPr id="9" name="Text 7"/>
-          <p:cNvSpPr/>
-          <p:nvPr/>
-        </p:nvSpPr>
-        <p:spPr>
-          <a:xfrm>
-            <a:off x="640080" y="731520"/>
-            <a:ext cx="420624" cy="164592"/>
-          </a:xfrm>
-          <a:prstGeom prst="rect">
-            <a:avLst/>
-          </a:prstGeom>
-          <a:noFill/>
-          <a:ln/>
-        </p:spPr>
-        <p:txBody>
-          <a:bodyPr wrap="square" lIns="0" tIns="0" rIns="0" bIns="0" rtlCol="0" anchor="ctr"/>
-          <a:lstStyle/>
-          <a:p>
-            <a:pPr algn="ctr" indent="0" marL="0">
-              <a:buNone/>
-            </a:pPr>
-            <a:r>
-              <a:rPr lang="en-US" sz="1100" b="1" dirty="0">
-                <a:solidFill>
-                  <a:srgbClr val="FFFFFF"/>
-                </a:solidFill>
-                <a:latin typeface="Aptos" pitchFamily="34" charset="0"/>
-                <a:ea typeface="Aptos" pitchFamily="34" charset="-122"/>
-                <a:cs typeface="Aptos" pitchFamily="34" charset="-120"/>
-              </a:rPr>
-              <a:t>4</a:t>
-            </a:r>
-            <a:endParaRPr lang="en-US" sz="1100" dirty="0"/>
-          </a:p>
-        </p:txBody>
-      </p:sp>
-      <p:sp>
-        <p:nvSpPr>
-          <p:cNvPr id="10" name="Text 8"/>
-          <p:cNvSpPr/>
-          <p:nvPr/>
-        </p:nvSpPr>
-        <p:spPr>
-          <a:xfrm>
-            <a:off x="640080" y="621792"/>
             <a:ext cx="10881360" cy="713232"/>
           </a:xfrm>
           <a:prstGeom prst="rect">
@@ -15813,14 +17410,14 @@
       </p:sp>
       <p:sp>
         <p:nvSpPr>
-          <p:cNvPr id="11" name="Text 9"/>
+          <p:cNvPr id="9" name="Text 7"/>
           <p:cNvSpPr/>
           <p:nvPr/>
         </p:nvSpPr>
         <p:spPr>
           <a:xfrm>
             <a:off x="868680" y="1508760"/>
-            <a:ext cx="6537960" cy="4160520"/>
+            <a:ext cx="6309360" cy="4160520"/>
           </a:xfrm>
           <a:prstGeom prst="rect">
             <a:avLst/>
@@ -15879,18 +17476,18 @@
       </p:sp>
       <p:sp>
         <p:nvSpPr>
-          <p:cNvPr id="12" name="Shape 10"/>
-          <p:cNvSpPr/>
-          <p:nvPr/>
-        </p:nvSpPr>
-        <p:spPr>
-          <a:xfrm>
-            <a:off x="7909560" y="1417320"/>
-            <a:ext cx="3154680" cy="1828800"/>
+          <p:cNvPr id="10" name="Shape 8"/>
+          <p:cNvSpPr/>
+          <p:nvPr/>
+        </p:nvSpPr>
+        <p:spPr>
+          <a:xfrm>
+            <a:off x="7635240" y="1325880"/>
+            <a:ext cx="3474720" cy="1325880"/>
           </a:xfrm>
           <a:prstGeom prst="roundRect">
             <a:avLst>
-              <a:gd name="adj" fmla="val 6000"/>
+              <a:gd name="adj" fmla="val 8276"/>
             </a:avLst>
           </a:prstGeom>
           <a:solidFill>
@@ -15906,14 +17503,14 @@
       </p:sp>
       <p:sp>
         <p:nvSpPr>
-          <p:cNvPr id="13" name="Text 11"/>
-          <p:cNvSpPr/>
-          <p:nvPr/>
-        </p:nvSpPr>
-        <p:spPr>
-          <a:xfrm>
-            <a:off x="8074152" y="1563624"/>
-            <a:ext cx="2825496" cy="256032"/>
+          <p:cNvPr id="11" name="Text 9"/>
+          <p:cNvSpPr/>
+          <p:nvPr/>
+        </p:nvSpPr>
+        <p:spPr>
+          <a:xfrm>
+            <a:off x="7799832" y="1472184"/>
+            <a:ext cx="3145536" cy="256032"/>
           </a:xfrm>
           <a:prstGeom prst="rect">
             <a:avLst/>
@@ -15937,7 +17534,7 @@
                 <a:ea typeface="Aptos" pitchFamily="34" charset="-122"/>
                 <a:cs typeface="Aptos" pitchFamily="34" charset="-120"/>
               </a:rPr>
-              <a:t>Key idea</a:t>
+              <a:t>Core concept</a:t>
             </a:r>
             <a:endParaRPr lang="en-US" sz="1300" dirty="0"/>
           </a:p>
@@ -15945,14 +17542,14 @@
       </p:sp>
       <p:sp>
         <p:nvSpPr>
-          <p:cNvPr id="14" name="Text 12"/>
-          <p:cNvSpPr/>
-          <p:nvPr/>
-        </p:nvSpPr>
-        <p:spPr>
-          <a:xfrm>
-            <a:off x="8074152" y="1920240"/>
-            <a:ext cx="2825496" cy="1188720"/>
+          <p:cNvPr id="12" name="Text 10"/>
+          <p:cNvSpPr/>
+          <p:nvPr/>
+        </p:nvSpPr>
+        <p:spPr>
+          <a:xfrm>
+            <a:off x="7799832" y="1828800"/>
+            <a:ext cx="3145536" cy="685800"/>
           </a:xfrm>
           <a:prstGeom prst="rect">
             <a:avLst/>
@@ -15986,18 +17583,159 @@
       </p:sp>
       <p:sp>
         <p:nvSpPr>
-          <p:cNvPr id="15" name="Shape 13"/>
-          <p:cNvSpPr/>
-          <p:nvPr/>
-        </p:nvSpPr>
-        <p:spPr>
-          <a:xfrm>
-            <a:off x="7909560" y="3520440"/>
-            <a:ext cx="3154680" cy="1737360"/>
+          <p:cNvPr id="13" name="Shape 11"/>
+          <p:cNvSpPr/>
+          <p:nvPr/>
+        </p:nvSpPr>
+        <p:spPr>
+          <a:xfrm>
+            <a:off x="7635240" y="2788920"/>
+            <a:ext cx="3474720" cy="1536192"/>
           </a:xfrm>
           <a:prstGeom prst="roundRect">
             <a:avLst>
-              <a:gd name="adj" fmla="val 6316"/>
+              <a:gd name="adj" fmla="val 7143"/>
+            </a:avLst>
+          </a:prstGeom>
+          <a:solidFill>
+            <a:srgbClr val="FFFFFF">
+              <a:alpha val="88000"/>
+            </a:srgbClr>
+          </a:solidFill>
+          <a:ln w="12700">
+            <a:solidFill>
+              <a:srgbClr val="D6E8F2"/>
+            </a:solidFill>
+            <a:prstDash val="solid"/>
+          </a:ln>
+        </p:spPr>
+      </p:sp>
+      <p:sp>
+        <p:nvSpPr>
+          <p:cNvPr id="14" name="Shape 12"/>
+          <p:cNvSpPr/>
+          <p:nvPr/>
+        </p:nvSpPr>
+        <p:spPr>
+          <a:xfrm>
+            <a:off x="8074152" y="3291840"/>
+            <a:ext cx="2596896" cy="749808"/>
+          </a:xfrm>
+          <a:prstGeom prst="rect">
+            <a:avLst/>
+          </a:prstGeom>
+          <a:solidFill>
+            <a:srgbClr val="EAF6F8"/>
+          </a:solidFill>
+          <a:ln w="12700">
+            <a:solidFill>
+              <a:srgbClr val="8ABBD8"/>
+            </a:solidFill>
+            <a:prstDash val="solid"/>
+          </a:ln>
+        </p:spPr>
+      </p:sp>
+      <p:sp>
+        <p:nvSpPr>
+          <p:cNvPr id="15" name="Shape 13"/>
+          <p:cNvSpPr/>
+          <p:nvPr/>
+        </p:nvSpPr>
+        <p:spPr>
+          <a:xfrm>
+            <a:off x="8202168" y="3721608"/>
+            <a:ext cx="2340864" cy="0"/>
+          </a:xfrm>
+          <a:prstGeom prst="line">
+            <a:avLst/>
+          </a:prstGeom>
+          <a:noFill/>
+          <a:ln w="19050">
+            <a:solidFill>
+              <a:srgbClr val="0068B7"/>
+            </a:solidFill>
+            <a:prstDash val="solid"/>
+          </a:ln>
+        </p:spPr>
+      </p:sp>
+      <p:sp>
+        <p:nvSpPr>
+          <p:cNvPr id="16" name="Shape 14"/>
+          <p:cNvSpPr/>
+          <p:nvPr/>
+        </p:nvSpPr>
+        <p:spPr>
+          <a:xfrm>
+            <a:off x="9198864" y="4206240"/>
+            <a:ext cx="347472" cy="347472"/>
+          </a:xfrm>
+          <a:prstGeom prst="ellipse">
+            <a:avLst/>
+          </a:prstGeom>
+          <a:solidFill>
+            <a:srgbClr val="2F8A28"/>
+          </a:solidFill>
+          <a:ln w="12700">
+            <a:solidFill>
+              <a:srgbClr val="2F8A28"/>
+            </a:solidFill>
+            <a:prstDash val="solid"/>
+          </a:ln>
+        </p:spPr>
+      </p:sp>
+      <p:sp>
+        <p:nvSpPr>
+          <p:cNvPr id="17" name="Text 15"/>
+          <p:cNvSpPr/>
+          <p:nvPr/>
+        </p:nvSpPr>
+        <p:spPr>
+          <a:xfrm>
+            <a:off x="7909560" y="3977640"/>
+            <a:ext cx="2926080" cy="182880"/>
+          </a:xfrm>
+          <a:prstGeom prst="rect">
+            <a:avLst/>
+          </a:prstGeom>
+          <a:noFill/>
+          <a:ln/>
+        </p:spPr>
+        <p:txBody>
+          <a:bodyPr wrap="square" lIns="0" tIns="0" rIns="0" bIns="0" rtlCol="0" anchor="ctr"/>
+          <a:lstStyle/>
+          <a:p>
+            <a:pPr algn="ctr" indent="0" marL="0">
+              <a:buNone/>
+            </a:pPr>
+            <a:r>
+              <a:rPr lang="en-US" sz="1000" dirty="0">
+                <a:solidFill>
+                  <a:srgbClr val="003A63"/>
+                </a:solidFill>
+                <a:latin typeface="Aptos" pitchFamily="34" charset="0"/>
+                <a:ea typeface="Aptos" pitchFamily="34" charset="-122"/>
+                <a:cs typeface="Aptos" pitchFamily="34" charset="-120"/>
+              </a:rPr>
+              <a:t>Concept to action</a:t>
+            </a:r>
+            <a:endParaRPr lang="en-US" sz="1000" dirty="0"/>
+          </a:p>
+        </p:txBody>
+      </p:sp>
+      <p:sp>
+        <p:nvSpPr>
+          <p:cNvPr id="18" name="Shape 16"/>
+          <p:cNvSpPr/>
+          <p:nvPr/>
+        </p:nvSpPr>
+        <p:spPr>
+          <a:xfrm>
+            <a:off x="7635240" y="4498848"/>
+            <a:ext cx="3474720" cy="1143000"/>
+          </a:xfrm>
+          <a:prstGeom prst="roundRect">
+            <a:avLst>
+              <a:gd name="adj" fmla="val 9600"/>
             </a:avLst>
           </a:prstGeom>
           <a:solidFill>
@@ -16013,14 +17751,14 @@
       </p:sp>
       <p:sp>
         <p:nvSpPr>
-          <p:cNvPr id="16" name="Text 14"/>
-          <p:cNvSpPr/>
-          <p:nvPr/>
-        </p:nvSpPr>
-        <p:spPr>
-          <a:xfrm>
-            <a:off x="8074152" y="3666744"/>
-            <a:ext cx="2825496" cy="256032"/>
+          <p:cNvPr id="19" name="Text 17"/>
+          <p:cNvSpPr/>
+          <p:nvPr/>
+        </p:nvSpPr>
+        <p:spPr>
+          <a:xfrm>
+            <a:off x="7799832" y="4645152"/>
+            <a:ext cx="3145536" cy="256032"/>
           </a:xfrm>
           <a:prstGeom prst="rect">
             <a:avLst/>
@@ -16044,7 +17782,7 @@
                 <a:ea typeface="Aptos" pitchFamily="34" charset="-122"/>
                 <a:cs typeface="Aptos" pitchFamily="34" charset="-120"/>
               </a:rPr>
-              <a:t>Use this for</a:t>
+              <a:t>Apply it</a:t>
             </a:r>
             <a:endParaRPr lang="en-US" sz="1300" dirty="0"/>
           </a:p>
@@ -16052,14 +17790,14 @@
       </p:sp>
       <p:sp>
         <p:nvSpPr>
-          <p:cNvPr id="17" name="Text 15"/>
-          <p:cNvSpPr/>
-          <p:nvPr/>
-        </p:nvSpPr>
-        <p:spPr>
-          <a:xfrm>
-            <a:off x="8074152" y="4023360"/>
-            <a:ext cx="2825496" cy="1097280"/>
+          <p:cNvPr id="20" name="Text 18"/>
+          <p:cNvSpPr/>
+          <p:nvPr/>
+        </p:nvSpPr>
+        <p:spPr>
+          <a:xfrm>
+            <a:off x="7799832" y="5001768"/>
+            <a:ext cx="3145536" cy="502920"/>
           </a:xfrm>
           <a:prstGeom prst="rect">
             <a:avLst/>
@@ -16085,7 +17823,7 @@
                 <a:ea typeface="Aptos" pitchFamily="34" charset="-122"/>
                 <a:cs typeface="Aptos" pitchFamily="34" charset="-120"/>
               </a:rPr>
-              <a:t>Connect the concept to public health decisions, safeguards, documentation, or implementation work.</a:t>
+              <a:t>Connect the concept to public health purpose, responsible use, required safeguards, documentation, and the next action a department should take.</a:t>
             </a:r>
             <a:endParaRPr lang="en-US" sz="1550" dirty="0"/>
           </a:p>
@@ -16259,8 +17997,8 @@
         </p:nvSpPr>
         <p:spPr>
           <a:xfrm>
-            <a:off x="9966960" y="6537960"/>
-            <a:ext cx="1645920" cy="201168"/>
+            <a:off x="9646920" y="6537960"/>
+            <a:ext cx="1965960" cy="201168"/>
           </a:xfrm>
           <a:prstGeom prst="rect">
             <a:avLst/>
@@ -16284,7 +18022,7 @@
                 <a:ea typeface="Aptos" pitchFamily="34" charset="-122"/>
                 <a:cs typeface="Aptos" pitchFamily="34" charset="-120"/>
               </a:rPr>
-              <a:t>Â© Paula Soper</a:t>
+              <a:t>Copyright Paula Soper</a:t>
             </a:r>
             <a:endParaRPr lang="en-US" sz="800" dirty="0"/>
           </a:p>
@@ -16331,77 +18069,13 @@
       </p:sp>
       <p:sp>
         <p:nvSpPr>
-          <p:cNvPr id="8" name="Shape 6"/>
+          <p:cNvPr id="8" name="Text 6"/>
           <p:cNvSpPr/>
           <p:nvPr/>
         </p:nvSpPr>
         <p:spPr>
           <a:xfrm>
             <a:off x="640080" y="658368"/>
-            <a:ext cx="420624" cy="420624"/>
-          </a:xfrm>
-          <a:prstGeom prst="ellipse">
-            <a:avLst/>
-          </a:prstGeom>
-          <a:solidFill>
-            <a:srgbClr val="0068B7"/>
-          </a:solidFill>
-          <a:ln w="12700">
-            <a:solidFill>
-              <a:srgbClr val="0068B7"/>
-            </a:solidFill>
-            <a:prstDash val="solid"/>
-          </a:ln>
-        </p:spPr>
-      </p:sp>
-      <p:sp>
-        <p:nvSpPr>
-          <p:cNvPr id="9" name="Text 7"/>
-          <p:cNvSpPr/>
-          <p:nvPr/>
-        </p:nvSpPr>
-        <p:spPr>
-          <a:xfrm>
-            <a:off x="640080" y="731520"/>
-            <a:ext cx="420624" cy="164592"/>
-          </a:xfrm>
-          <a:prstGeom prst="rect">
-            <a:avLst/>
-          </a:prstGeom>
-          <a:noFill/>
-          <a:ln/>
-        </p:spPr>
-        <p:txBody>
-          <a:bodyPr wrap="square" lIns="0" tIns="0" rIns="0" bIns="0" rtlCol="0" anchor="ctr"/>
-          <a:lstStyle/>
-          <a:p>
-            <a:pPr algn="ctr" indent="0" marL="0">
-              <a:buNone/>
-            </a:pPr>
-            <a:r>
-              <a:rPr lang="en-US" sz="1100" b="1" dirty="0">
-                <a:solidFill>
-                  <a:srgbClr val="FFFFFF"/>
-                </a:solidFill>
-                <a:latin typeface="Aptos" pitchFamily="34" charset="0"/>
-                <a:ea typeface="Aptos" pitchFamily="34" charset="-122"/>
-                <a:cs typeface="Aptos" pitchFamily="34" charset="-120"/>
-              </a:rPr>
-              <a:t>5</a:t>
-            </a:r>
-            <a:endParaRPr lang="en-US" sz="1100" dirty="0"/>
-          </a:p>
-        </p:txBody>
-      </p:sp>
-      <p:sp>
-        <p:nvSpPr>
-          <p:cNvPr id="10" name="Text 8"/>
-          <p:cNvSpPr/>
-          <p:nvPr/>
-        </p:nvSpPr>
-        <p:spPr>
-          <a:xfrm>
-            <a:off x="640080" y="621792"/>
             <a:ext cx="10881360" cy="713232"/>
           </a:xfrm>
           <a:prstGeom prst="rect">
@@ -16436,14 +18110,14 @@
       </p:sp>
       <p:sp>
         <p:nvSpPr>
-          <p:cNvPr id="11" name="Text 9"/>
+          <p:cNvPr id="9" name="Text 7"/>
           <p:cNvSpPr/>
           <p:nvPr/>
         </p:nvSpPr>
         <p:spPr>
           <a:xfrm>
             <a:off x="868680" y="1508760"/>
-            <a:ext cx="6537960" cy="4160520"/>
+            <a:ext cx="6309360" cy="4160520"/>
           </a:xfrm>
           <a:prstGeom prst="rect">
             <a:avLst/>
@@ -16502,18 +18176,18 @@
       </p:sp>
       <p:sp>
         <p:nvSpPr>
-          <p:cNvPr id="12" name="Shape 10"/>
-          <p:cNvSpPr/>
-          <p:nvPr/>
-        </p:nvSpPr>
-        <p:spPr>
-          <a:xfrm>
-            <a:off x="7909560" y="1417320"/>
-            <a:ext cx="3154680" cy="1828800"/>
+          <p:cNvPr id="10" name="Shape 8"/>
+          <p:cNvSpPr/>
+          <p:nvPr/>
+        </p:nvSpPr>
+        <p:spPr>
+          <a:xfrm>
+            <a:off x="7635240" y="1325880"/>
+            <a:ext cx="3474720" cy="1325880"/>
           </a:xfrm>
           <a:prstGeom prst="roundRect">
             <a:avLst>
-              <a:gd name="adj" fmla="val 6000"/>
+              <a:gd name="adj" fmla="val 8276"/>
             </a:avLst>
           </a:prstGeom>
           <a:solidFill>
@@ -16529,14 +18203,14 @@
       </p:sp>
       <p:sp>
         <p:nvSpPr>
-          <p:cNvPr id="13" name="Text 11"/>
-          <p:cNvSpPr/>
-          <p:nvPr/>
-        </p:nvSpPr>
-        <p:spPr>
-          <a:xfrm>
-            <a:off x="8074152" y="1563624"/>
-            <a:ext cx="2825496" cy="256032"/>
+          <p:cNvPr id="11" name="Text 9"/>
+          <p:cNvSpPr/>
+          <p:nvPr/>
+        </p:nvSpPr>
+        <p:spPr>
+          <a:xfrm>
+            <a:off x="7799832" y="1472184"/>
+            <a:ext cx="3145536" cy="256032"/>
           </a:xfrm>
           <a:prstGeom prst="rect">
             <a:avLst/>
@@ -16560,7 +18234,7 @@
                 <a:ea typeface="Aptos" pitchFamily="34" charset="-122"/>
                 <a:cs typeface="Aptos" pitchFamily="34" charset="-120"/>
               </a:rPr>
-              <a:t>Key idea</a:t>
+              <a:t>Core concept</a:t>
             </a:r>
             <a:endParaRPr lang="en-US" sz="1300" dirty="0"/>
           </a:p>
@@ -16568,14 +18242,14 @@
       </p:sp>
       <p:sp>
         <p:nvSpPr>
-          <p:cNvPr id="14" name="Text 12"/>
-          <p:cNvSpPr/>
-          <p:nvPr/>
-        </p:nvSpPr>
-        <p:spPr>
-          <a:xfrm>
-            <a:off x="8074152" y="1920240"/>
-            <a:ext cx="2825496" cy="1188720"/>
+          <p:cNvPr id="12" name="Text 10"/>
+          <p:cNvSpPr/>
+          <p:nvPr/>
+        </p:nvSpPr>
+        <p:spPr>
+          <a:xfrm>
+            <a:off x="7799832" y="1828800"/>
+            <a:ext cx="3145536" cy="685800"/>
           </a:xfrm>
           <a:prstGeom prst="rect">
             <a:avLst/>
@@ -16609,18 +18283,159 @@
       </p:sp>
       <p:sp>
         <p:nvSpPr>
-          <p:cNvPr id="15" name="Shape 13"/>
-          <p:cNvSpPr/>
-          <p:nvPr/>
-        </p:nvSpPr>
-        <p:spPr>
-          <a:xfrm>
-            <a:off x="7909560" y="3520440"/>
-            <a:ext cx="3154680" cy="1737360"/>
+          <p:cNvPr id="13" name="Shape 11"/>
+          <p:cNvSpPr/>
+          <p:nvPr/>
+        </p:nvSpPr>
+        <p:spPr>
+          <a:xfrm>
+            <a:off x="7635240" y="2788920"/>
+            <a:ext cx="3474720" cy="1536192"/>
           </a:xfrm>
           <a:prstGeom prst="roundRect">
             <a:avLst>
-              <a:gd name="adj" fmla="val 6316"/>
+              <a:gd name="adj" fmla="val 7143"/>
+            </a:avLst>
+          </a:prstGeom>
+          <a:solidFill>
+            <a:srgbClr val="FFFFFF">
+              <a:alpha val="88000"/>
+            </a:srgbClr>
+          </a:solidFill>
+          <a:ln w="12700">
+            <a:solidFill>
+              <a:srgbClr val="D6E8F2"/>
+            </a:solidFill>
+            <a:prstDash val="solid"/>
+          </a:ln>
+        </p:spPr>
+      </p:sp>
+      <p:sp>
+        <p:nvSpPr>
+          <p:cNvPr id="14" name="Shape 12"/>
+          <p:cNvSpPr/>
+          <p:nvPr/>
+        </p:nvSpPr>
+        <p:spPr>
+          <a:xfrm>
+            <a:off x="8074152" y="3291840"/>
+            <a:ext cx="2596896" cy="749808"/>
+          </a:xfrm>
+          <a:prstGeom prst="rect">
+            <a:avLst/>
+          </a:prstGeom>
+          <a:solidFill>
+            <a:srgbClr val="EAF6F8"/>
+          </a:solidFill>
+          <a:ln w="12700">
+            <a:solidFill>
+              <a:srgbClr val="8ABBD8"/>
+            </a:solidFill>
+            <a:prstDash val="solid"/>
+          </a:ln>
+        </p:spPr>
+      </p:sp>
+      <p:sp>
+        <p:nvSpPr>
+          <p:cNvPr id="15" name="Shape 13"/>
+          <p:cNvSpPr/>
+          <p:nvPr/>
+        </p:nvSpPr>
+        <p:spPr>
+          <a:xfrm>
+            <a:off x="8202168" y="3721608"/>
+            <a:ext cx="2340864" cy="0"/>
+          </a:xfrm>
+          <a:prstGeom prst="line">
+            <a:avLst/>
+          </a:prstGeom>
+          <a:noFill/>
+          <a:ln w="19050">
+            <a:solidFill>
+              <a:srgbClr val="0068B7"/>
+            </a:solidFill>
+            <a:prstDash val="solid"/>
+          </a:ln>
+        </p:spPr>
+      </p:sp>
+      <p:sp>
+        <p:nvSpPr>
+          <p:cNvPr id="16" name="Shape 14"/>
+          <p:cNvSpPr/>
+          <p:nvPr/>
+        </p:nvSpPr>
+        <p:spPr>
+          <a:xfrm>
+            <a:off x="9198864" y="4206240"/>
+            <a:ext cx="347472" cy="347472"/>
+          </a:xfrm>
+          <a:prstGeom prst="ellipse">
+            <a:avLst/>
+          </a:prstGeom>
+          <a:solidFill>
+            <a:srgbClr val="2F8A28"/>
+          </a:solidFill>
+          <a:ln w="12700">
+            <a:solidFill>
+              <a:srgbClr val="2F8A28"/>
+            </a:solidFill>
+            <a:prstDash val="solid"/>
+          </a:ln>
+        </p:spPr>
+      </p:sp>
+      <p:sp>
+        <p:nvSpPr>
+          <p:cNvPr id="17" name="Text 15"/>
+          <p:cNvSpPr/>
+          <p:nvPr/>
+        </p:nvSpPr>
+        <p:spPr>
+          <a:xfrm>
+            <a:off x="7909560" y="3977640"/>
+            <a:ext cx="2926080" cy="182880"/>
+          </a:xfrm>
+          <a:prstGeom prst="rect">
+            <a:avLst/>
+          </a:prstGeom>
+          <a:noFill/>
+          <a:ln/>
+        </p:spPr>
+        <p:txBody>
+          <a:bodyPr wrap="square" lIns="0" tIns="0" rIns="0" bIns="0" rtlCol="0" anchor="ctr"/>
+          <a:lstStyle/>
+          <a:p>
+            <a:pPr algn="ctr" indent="0" marL="0">
+              <a:buNone/>
+            </a:pPr>
+            <a:r>
+              <a:rPr lang="en-US" sz="1000" dirty="0">
+                <a:solidFill>
+                  <a:srgbClr val="003A63"/>
+                </a:solidFill>
+                <a:latin typeface="Aptos" pitchFamily="34" charset="0"/>
+                <a:ea typeface="Aptos" pitchFamily="34" charset="-122"/>
+                <a:cs typeface="Aptos" pitchFamily="34" charset="-120"/>
+              </a:rPr>
+              <a:t>Concept to action</a:t>
+            </a:r>
+            <a:endParaRPr lang="en-US" sz="1000" dirty="0"/>
+          </a:p>
+        </p:txBody>
+      </p:sp>
+      <p:sp>
+        <p:nvSpPr>
+          <p:cNvPr id="18" name="Shape 16"/>
+          <p:cNvSpPr/>
+          <p:nvPr/>
+        </p:nvSpPr>
+        <p:spPr>
+          <a:xfrm>
+            <a:off x="7635240" y="4498848"/>
+            <a:ext cx="3474720" cy="1143000"/>
+          </a:xfrm>
+          <a:prstGeom prst="roundRect">
+            <a:avLst>
+              <a:gd name="adj" fmla="val 9600"/>
             </a:avLst>
           </a:prstGeom>
           <a:solidFill>
@@ -16636,14 +18451,14 @@
       </p:sp>
       <p:sp>
         <p:nvSpPr>
-          <p:cNvPr id="16" name="Text 14"/>
-          <p:cNvSpPr/>
-          <p:nvPr/>
-        </p:nvSpPr>
-        <p:spPr>
-          <a:xfrm>
-            <a:off x="8074152" y="3666744"/>
-            <a:ext cx="2825496" cy="256032"/>
+          <p:cNvPr id="19" name="Text 17"/>
+          <p:cNvSpPr/>
+          <p:nvPr/>
+        </p:nvSpPr>
+        <p:spPr>
+          <a:xfrm>
+            <a:off x="7799832" y="4645152"/>
+            <a:ext cx="3145536" cy="256032"/>
           </a:xfrm>
           <a:prstGeom prst="rect">
             <a:avLst/>
@@ -16667,7 +18482,7 @@
                 <a:ea typeface="Aptos" pitchFamily="34" charset="-122"/>
                 <a:cs typeface="Aptos" pitchFamily="34" charset="-120"/>
               </a:rPr>
-              <a:t>Use this for</a:t>
+              <a:t>Apply it</a:t>
             </a:r>
             <a:endParaRPr lang="en-US" sz="1300" dirty="0"/>
           </a:p>
@@ -16675,14 +18490,14 @@
       </p:sp>
       <p:sp>
         <p:nvSpPr>
-          <p:cNvPr id="17" name="Text 15"/>
-          <p:cNvSpPr/>
-          <p:nvPr/>
-        </p:nvSpPr>
-        <p:spPr>
-          <a:xfrm>
-            <a:off x="8074152" y="4023360"/>
-            <a:ext cx="2825496" cy="1097280"/>
+          <p:cNvPr id="20" name="Text 18"/>
+          <p:cNvSpPr/>
+          <p:nvPr/>
+        </p:nvSpPr>
+        <p:spPr>
+          <a:xfrm>
+            <a:off x="7799832" y="5001768"/>
+            <a:ext cx="3145536" cy="502920"/>
           </a:xfrm>
           <a:prstGeom prst="rect">
             <a:avLst/>
@@ -16708,7 +18523,7 @@
                 <a:ea typeface="Aptos" pitchFamily="34" charset="-122"/>
                 <a:cs typeface="Aptos" pitchFamily="34" charset="-120"/>
               </a:rPr>
-              <a:t>Connect the concept to public health decisions, safeguards, documentation, or implementation work.</a:t>
+              <a:t>Connect the concept to public health purpose, responsible use, required safeguards, documentation, and the next action a department should take.</a:t>
             </a:r>
             <a:endParaRPr lang="en-US" sz="1550" dirty="0"/>
           </a:p>

--- a/downloads/presentations/modules/gov-340.pptx
+++ b/downloads/presentations/modules/gov-340.pptx
@@ -3619,13 +3619,11 @@
             </a:avLst>
           </a:prstGeom>
           <a:solidFill>
-            <a:srgbClr val="FFFFFF">
-              <a:alpha val="88000"/>
-            </a:srgbClr>
+            <a:srgbClr val="FFFFFF"/>
           </a:solidFill>
           <a:ln w="12700">
             <a:solidFill>
-              <a:srgbClr val="D6E8F2"/>
+              <a:srgbClr val="B9D7E6"/>
             </a:solidFill>
             <a:prstDash val="solid"/>
           </a:ln>
@@ -3633,119 +3631,112 @@
       </p:sp>
       <p:sp>
         <p:nvSpPr>
-          <p:cNvPr id="14" name="Shape 12"/>
-          <p:cNvSpPr/>
-          <p:nvPr/>
-        </p:nvSpPr>
-        <p:spPr>
-          <a:xfrm>
-            <a:off x="8074152" y="3291840"/>
-            <a:ext cx="2596896" cy="749808"/>
-          </a:xfrm>
-          <a:prstGeom prst="rect">
-            <a:avLst/>
-          </a:prstGeom>
-          <a:solidFill>
-            <a:srgbClr val="EAF6F8"/>
-          </a:solidFill>
-          <a:ln w="12700">
-            <a:solidFill>
-              <a:srgbClr val="8ABBD8"/>
-            </a:solidFill>
-            <a:prstDash val="solid"/>
-          </a:ln>
-        </p:spPr>
-      </p:sp>
-      <p:sp>
-        <p:nvSpPr>
-          <p:cNvPr id="15" name="Shape 13"/>
-          <p:cNvSpPr/>
-          <p:nvPr/>
-        </p:nvSpPr>
-        <p:spPr>
-          <a:xfrm>
-            <a:off x="8202168" y="3721608"/>
-            <a:ext cx="2340864" cy="0"/>
-          </a:xfrm>
-          <a:prstGeom prst="line">
-            <a:avLst/>
-          </a:prstGeom>
-          <a:noFill/>
-          <a:ln w="19050">
-            <a:solidFill>
-              <a:srgbClr val="0068B7"/>
-            </a:solidFill>
-            <a:prstDash val="solid"/>
-          </a:ln>
-        </p:spPr>
+          <p:cNvPr id="14" name="Text 12"/>
+          <p:cNvSpPr/>
+          <p:nvPr/>
+        </p:nvSpPr>
+        <p:spPr>
+          <a:xfrm>
+            <a:off x="7799832" y="2935224"/>
+            <a:ext cx="3145536" cy="256032"/>
+          </a:xfrm>
+          <a:prstGeom prst="rect">
+            <a:avLst/>
+          </a:prstGeom>
+          <a:noFill/>
+          <a:ln/>
+        </p:spPr>
+        <p:txBody>
+          <a:bodyPr wrap="square" lIns="0" tIns="0" rIns="0" bIns="0" rtlCol="0" anchor="ctr"/>
+          <a:lstStyle/>
+          <a:p>
+            <a:pPr indent="0" marL="0">
+              <a:buNone/>
+            </a:pPr>
+            <a:r>
+              <a:rPr lang="en-US" sz="1300" b="1" dirty="0">
+                <a:solidFill>
+                  <a:srgbClr val="0068B7"/>
+                </a:solidFill>
+                <a:latin typeface="Aptos" pitchFamily="34" charset="0"/>
+                <a:ea typeface="Aptos" pitchFamily="34" charset="-122"/>
+                <a:cs typeface="Aptos" pitchFamily="34" charset="-120"/>
+              </a:rPr>
+              <a:t>Concept checkpoints</a:t>
+            </a:r>
+            <a:endParaRPr lang="en-US" sz="1300" dirty="0"/>
+          </a:p>
+        </p:txBody>
+      </p:sp>
+      <p:sp>
+        <p:nvSpPr>
+          <p:cNvPr id="15" name="Text 13"/>
+          <p:cNvSpPr/>
+          <p:nvPr/>
+        </p:nvSpPr>
+        <p:spPr>
+          <a:xfrm>
+            <a:off x="7818120" y="3300984"/>
+            <a:ext cx="3090672" cy="877824"/>
+          </a:xfrm>
+          <a:prstGeom prst="rect">
+            <a:avLst/>
+          </a:prstGeom>
+          <a:noFill/>
+          <a:ln/>
+        </p:spPr>
+        <p:txBody>
+          <a:bodyPr wrap="square" lIns="254" tIns="254" rIns="254" bIns="254" rtlCol="0" anchor="t">
+            <a:normAutofit/>
+          </a:bodyPr>
+          <a:lstStyle/>
+          <a:p>
+            <a:r>
+              <a:rPr lang="en-US" sz="1380" dirty="0">
+                <a:solidFill>
+                  <a:srgbClr val="17364A"/>
+                </a:solidFill>
+                <a:latin typeface="Aptos" pitchFamily="34" charset="0"/>
+                <a:ea typeface="Aptos" pitchFamily="34" charset="-122"/>
+                <a:cs typeface="Aptos" pitchFamily="34" charset="-120"/>
+              </a:rPr>
+              <a:t>Evidence management requires ownership and retention rules.</a:t>
+            </a:r>
+            <a:endParaRPr lang="en-US" sz="1380" dirty="0"/>
+          </a:p>
+          <a:p>
+            <a:r>
+              <a:rPr lang="en-US" sz="1380" dirty="0">
+                <a:solidFill>
+                  <a:srgbClr val="17364A"/>
+                </a:solidFill>
+                <a:latin typeface="Aptos" pitchFamily="34" charset="0"/>
+                <a:ea typeface="Aptos" pitchFamily="34" charset="-122"/>
+                <a:cs typeface="Aptos" pitchFamily="34" charset="-120"/>
+              </a:rPr>
+              <a:t>Governance bodies should define who stores each artifact, where it is stored, how long it.</a:t>
+            </a:r>
+            <a:endParaRPr lang="en-US" sz="1380" dirty="0"/>
+          </a:p>
+          <a:p>
+            <a:r>
+              <a:rPr lang="en-US" sz="1380" dirty="0">
+                <a:solidFill>
+                  <a:srgbClr val="17364A"/>
+                </a:solidFill>
+                <a:latin typeface="Aptos" pitchFamily="34" charset="0"/>
+                <a:ea typeface="Aptos" pitchFamily="34" charset="-122"/>
+                <a:cs typeface="Aptos" pitchFamily="34" charset="-120"/>
+              </a:rPr>
+              <a:t>Audit readiness depends on consistent records, not scattered files and informal emails.</a:t>
+            </a:r>
+            <a:endParaRPr lang="en-US" sz="1380" dirty="0"/>
+          </a:p>
+        </p:txBody>
       </p:sp>
       <p:sp>
         <p:nvSpPr>
           <p:cNvPr id="16" name="Shape 14"/>
-          <p:cNvSpPr/>
-          <p:nvPr/>
-        </p:nvSpPr>
-        <p:spPr>
-          <a:xfrm>
-            <a:off x="9198864" y="4206240"/>
-            <a:ext cx="347472" cy="347472"/>
-          </a:xfrm>
-          <a:prstGeom prst="ellipse">
-            <a:avLst/>
-          </a:prstGeom>
-          <a:solidFill>
-            <a:srgbClr val="2F8A28"/>
-          </a:solidFill>
-          <a:ln w="12700">
-            <a:solidFill>
-              <a:srgbClr val="2F8A28"/>
-            </a:solidFill>
-            <a:prstDash val="solid"/>
-          </a:ln>
-        </p:spPr>
-      </p:sp>
-      <p:sp>
-        <p:nvSpPr>
-          <p:cNvPr id="17" name="Text 15"/>
-          <p:cNvSpPr/>
-          <p:nvPr/>
-        </p:nvSpPr>
-        <p:spPr>
-          <a:xfrm>
-            <a:off x="7909560" y="3977640"/>
-            <a:ext cx="2926080" cy="182880"/>
-          </a:xfrm>
-          <a:prstGeom prst="rect">
-            <a:avLst/>
-          </a:prstGeom>
-          <a:noFill/>
-          <a:ln/>
-        </p:spPr>
-        <p:txBody>
-          <a:bodyPr wrap="square" lIns="0" tIns="0" rIns="0" bIns="0" rtlCol="0" anchor="ctr"/>
-          <a:lstStyle/>
-          <a:p>
-            <a:pPr algn="ctr" indent="0" marL="0">
-              <a:buNone/>
-            </a:pPr>
-            <a:r>
-              <a:rPr lang="en-US" sz="1000" dirty="0">
-                <a:solidFill>
-                  <a:srgbClr val="003A63"/>
-                </a:solidFill>
-                <a:latin typeface="Aptos" pitchFamily="34" charset="0"/>
-                <a:ea typeface="Aptos" pitchFamily="34" charset="-122"/>
-                <a:cs typeface="Aptos" pitchFamily="34" charset="-120"/>
-              </a:rPr>
-              <a:t>Concept to action</a:t>
-            </a:r>
-            <a:endParaRPr lang="en-US" sz="1000" dirty="0"/>
-          </a:p>
-        </p:txBody>
-      </p:sp>
-      <p:sp>
-        <p:nvSpPr>
-          <p:cNvPr id="18" name="Shape 16"/>
           <p:cNvSpPr/>
           <p:nvPr/>
         </p:nvSpPr>
@@ -3772,7 +3763,7 @@
       </p:sp>
       <p:sp>
         <p:nvSpPr>
-          <p:cNvPr id="19" name="Text 17"/>
+          <p:cNvPr id="17" name="Text 15"/>
           <p:cNvSpPr/>
           <p:nvPr/>
         </p:nvSpPr>
@@ -3811,7 +3802,7 @@
       </p:sp>
       <p:sp>
         <p:nvSpPr>
-          <p:cNvPr id="20" name="Text 18"/>
+          <p:cNvPr id="18" name="Text 16"/>
           <p:cNvSpPr/>
           <p:nvPr/>
         </p:nvSpPr>
@@ -4319,13 +4310,11 @@
             </a:avLst>
           </a:prstGeom>
           <a:solidFill>
-            <a:srgbClr val="FFFFFF">
-              <a:alpha val="88000"/>
-            </a:srgbClr>
+            <a:srgbClr val="FFFFFF"/>
           </a:solidFill>
           <a:ln w="12700">
             <a:solidFill>
-              <a:srgbClr val="D6E8F2"/>
+              <a:srgbClr val="B9D7E6"/>
             </a:solidFill>
             <a:prstDash val="solid"/>
           </a:ln>
@@ -4333,26 +4322,42 @@
       </p:sp>
       <p:sp>
         <p:nvSpPr>
-          <p:cNvPr id="14" name="Shape 12"/>
-          <p:cNvSpPr/>
-          <p:nvPr/>
-        </p:nvSpPr>
-        <p:spPr>
-          <a:xfrm>
-            <a:off x="8046720" y="3108960"/>
-            <a:ext cx="2651760" cy="896112"/>
-          </a:xfrm>
-          <a:prstGeom prst="arc">
-            <a:avLst/>
-          </a:prstGeom>
-          <a:noFill/>
-          <a:ln w="25400">
-            <a:solidFill>
-              <a:srgbClr val="0068B7"/>
-            </a:solidFill>
-            <a:prstDash val="solid"/>
-          </a:ln>
-        </p:spPr>
+          <p:cNvPr id="14" name="Text 12"/>
+          <p:cNvSpPr/>
+          <p:nvPr/>
+        </p:nvSpPr>
+        <p:spPr>
+          <a:xfrm>
+            <a:off x="7799832" y="2935224"/>
+            <a:ext cx="3145536" cy="256032"/>
+          </a:xfrm>
+          <a:prstGeom prst="rect">
+            <a:avLst/>
+          </a:prstGeom>
+          <a:noFill/>
+          <a:ln/>
+        </p:spPr>
+        <p:txBody>
+          <a:bodyPr wrap="square" lIns="0" tIns="0" rIns="0" bIns="0" rtlCol="0" anchor="ctr"/>
+          <a:lstStyle/>
+          <a:p>
+            <a:pPr indent="0" marL="0">
+              <a:buNone/>
+            </a:pPr>
+            <a:r>
+              <a:rPr lang="en-US" sz="1300" b="1" dirty="0">
+                <a:solidFill>
+                  <a:srgbClr val="0068B7"/>
+                </a:solidFill>
+                <a:latin typeface="Aptos" pitchFamily="34" charset="0"/>
+                <a:ea typeface="Aptos" pitchFamily="34" charset="-122"/>
+                <a:cs typeface="Aptos" pitchFamily="34" charset="-120"/>
+              </a:rPr>
+              <a:t>Concept checkpoints</a:t>
+            </a:r>
+            <a:endParaRPr lang="en-US" sz="1300" dirty="0"/>
+          </a:p>
+        </p:txBody>
       </p:sp>
       <p:sp>
         <p:nvSpPr>
@@ -4362,102 +4367,67 @@
         </p:nvSpPr>
         <p:spPr>
           <a:xfrm>
-            <a:off x="7909560" y="3099816"/>
-            <a:ext cx="2926080" cy="256032"/>
-          </a:xfrm>
-          <a:prstGeom prst="rect">
-            <a:avLst/>
-          </a:prstGeom>
-          <a:noFill/>
-          <a:ln/>
-        </p:spPr>
-        <p:txBody>
-          <a:bodyPr wrap="square" lIns="0" tIns="0" rIns="0" bIns="0" rtlCol="0" anchor="ctr"/>
-          <a:lstStyle/>
-          <a:p>
-            <a:pPr algn="ctr" indent="0" marL="0">
-              <a:buNone/>
-            </a:pPr>
-            <a:r>
-              <a:rPr lang="en-US" sz="1500" b="1" dirty="0">
-                <a:solidFill>
-                  <a:srgbClr val="003A63"/>
-                </a:solidFill>
-                <a:latin typeface="Aptos" pitchFamily="34" charset="0"/>
-                <a:ea typeface="Aptos" pitchFamily="34" charset="-122"/>
-                <a:cs typeface="Aptos" pitchFamily="34" charset="-120"/>
-              </a:rPr>
-              <a:t>Risk</a:t>
-            </a:r>
-            <a:endParaRPr lang="en-US" sz="1500" dirty="0"/>
+            <a:off x="7818120" y="3300984"/>
+            <a:ext cx="3090672" cy="877824"/>
+          </a:xfrm>
+          <a:prstGeom prst="rect">
+            <a:avLst/>
+          </a:prstGeom>
+          <a:noFill/>
+          <a:ln/>
+        </p:spPr>
+        <p:txBody>
+          <a:bodyPr wrap="square" lIns="254" tIns="254" rIns="254" bIns="254" rtlCol="0" anchor="t">
+            <a:normAutofit/>
+          </a:bodyPr>
+          <a:lstStyle/>
+          <a:p>
+            <a:r>
+              <a:rPr lang="en-US" sz="1380" dirty="0">
+                <a:solidFill>
+                  <a:srgbClr val="17364A"/>
+                </a:solidFill>
+                <a:latin typeface="Aptos" pitchFamily="34" charset="0"/>
+                <a:ea typeface="Aptos" pitchFamily="34" charset="-122"/>
+                <a:cs typeface="Aptos" pitchFamily="34" charset="-120"/>
+              </a:rPr>
+              <a:t>Risks and failure modes include the following:</a:t>
+            </a:r>
+            <a:endParaRPr lang="en-US" sz="1380" dirty="0"/>
+          </a:p>
+          <a:p>
+            <a:r>
+              <a:rPr lang="en-US" sz="1380" dirty="0">
+                <a:solidFill>
+                  <a:srgbClr val="17364A"/>
+                </a:solidFill>
+                <a:latin typeface="Aptos" pitchFamily="34" charset="0"/>
+                <a:ea typeface="Aptos" pitchFamily="34" charset="-122"/>
+                <a:cs typeface="Aptos" pitchFamily="34" charset="-120"/>
+              </a:rPr>
+              <a:t>Approvals without records of conditions or rationale.</a:t>
+            </a:r>
+            <a:endParaRPr lang="en-US" sz="1380" dirty="0"/>
+          </a:p>
+          <a:p>
+            <a:r>
+              <a:rPr lang="en-US" sz="1380" dirty="0">
+                <a:solidFill>
+                  <a:srgbClr val="17364A"/>
+                </a:solidFill>
+                <a:latin typeface="Aptos" pitchFamily="34" charset="0"/>
+                <a:ea typeface="Aptos" pitchFamily="34" charset="-122"/>
+                <a:cs typeface="Aptos" pitchFamily="34" charset="-120"/>
+              </a:rPr>
+              <a:t>Validation results stored informally or not retained.</a:t>
+            </a:r>
+            <a:endParaRPr lang="en-US" sz="1380" dirty="0"/>
           </a:p>
         </p:txBody>
       </p:sp>
       <p:sp>
         <p:nvSpPr>
           <p:cNvPr id="16" name="Shape 14"/>
-          <p:cNvSpPr/>
-          <p:nvPr/>
-        </p:nvSpPr>
-        <p:spPr>
-          <a:xfrm>
-            <a:off x="8366760" y="3639312"/>
-            <a:ext cx="2011680" cy="0"/>
-          </a:xfrm>
-          <a:prstGeom prst="line">
-            <a:avLst/>
-          </a:prstGeom>
-          <a:noFill/>
-          <a:ln w="63500">
-            <a:solidFill>
-              <a:srgbClr val="2F8A28"/>
-            </a:solidFill>
-            <a:prstDash val="solid"/>
-          </a:ln>
-        </p:spPr>
-      </p:sp>
-      <p:sp>
-        <p:nvSpPr>
-          <p:cNvPr id="17" name="Text 15"/>
-          <p:cNvSpPr/>
-          <p:nvPr/>
-        </p:nvSpPr>
-        <p:spPr>
-          <a:xfrm>
-            <a:off x="7909560" y="3849624"/>
-            <a:ext cx="2926080" cy="164592"/>
-          </a:xfrm>
-          <a:prstGeom prst="rect">
-            <a:avLst/>
-          </a:prstGeom>
-          <a:noFill/>
-          <a:ln/>
-        </p:spPr>
-        <p:txBody>
-          <a:bodyPr wrap="square" lIns="0" tIns="0" rIns="0" bIns="0" rtlCol="0" anchor="ctr"/>
-          <a:lstStyle/>
-          <a:p>
-            <a:pPr algn="ctr" indent="0" marL="0">
-              <a:buNone/>
-            </a:pPr>
-            <a:r>
-              <a:rPr lang="en-US" sz="900" dirty="0">
-                <a:solidFill>
-                  <a:srgbClr val="003A63"/>
-                </a:solidFill>
-                <a:latin typeface="Aptos" pitchFamily="34" charset="0"/>
-                <a:ea typeface="Aptos" pitchFamily="34" charset="-122"/>
-                <a:cs typeface="Aptos" pitchFamily="34" charset="-120"/>
-              </a:rPr>
-              <a:t>Human review</a:t>
-            </a:r>
-            <a:endParaRPr lang="en-US" sz="900" dirty="0"/>
-          </a:p>
-        </p:txBody>
-      </p:sp>
-      <p:sp>
-        <p:nvSpPr>
-          <p:cNvPr id="18" name="Shape 16"/>
           <p:cNvSpPr/>
           <p:nvPr/>
         </p:nvSpPr>
@@ -4484,7 +4454,7 @@
       </p:sp>
       <p:sp>
         <p:nvSpPr>
-          <p:cNvPr id="19" name="Text 17"/>
+          <p:cNvPr id="17" name="Text 15"/>
           <p:cNvSpPr/>
           <p:nvPr/>
         </p:nvSpPr>
@@ -4523,7 +4493,7 @@
       </p:sp>
       <p:sp>
         <p:nvSpPr>
-          <p:cNvPr id="20" name="Text 18"/>
+          <p:cNvPr id="18" name="Text 16"/>
           <p:cNvSpPr/>
           <p:nvPr/>
         </p:nvSpPr>
@@ -5031,13 +5001,11 @@
             </a:avLst>
           </a:prstGeom>
           <a:solidFill>
-            <a:srgbClr val="FFFFFF">
-              <a:alpha val="88000"/>
-            </a:srgbClr>
+            <a:srgbClr val="FFFFFF"/>
           </a:solidFill>
           <a:ln w="12700">
             <a:solidFill>
-              <a:srgbClr val="D6E8F2"/>
+              <a:srgbClr val="B9D7E6"/>
             </a:solidFill>
             <a:prstDash val="solid"/>
           </a:ln>
@@ -5045,26 +5013,42 @@
       </p:sp>
       <p:sp>
         <p:nvSpPr>
-          <p:cNvPr id="14" name="Shape 12"/>
-          <p:cNvSpPr/>
-          <p:nvPr/>
-        </p:nvSpPr>
-        <p:spPr>
-          <a:xfrm>
-            <a:off x="8046720" y="3108960"/>
-            <a:ext cx="2651760" cy="896112"/>
-          </a:xfrm>
-          <a:prstGeom prst="arc">
-            <a:avLst/>
-          </a:prstGeom>
-          <a:noFill/>
-          <a:ln w="25400">
-            <a:solidFill>
-              <a:srgbClr val="0068B7"/>
-            </a:solidFill>
-            <a:prstDash val="solid"/>
-          </a:ln>
-        </p:spPr>
+          <p:cNvPr id="14" name="Text 12"/>
+          <p:cNvSpPr/>
+          <p:nvPr/>
+        </p:nvSpPr>
+        <p:spPr>
+          <a:xfrm>
+            <a:off x="7799832" y="2935224"/>
+            <a:ext cx="3145536" cy="256032"/>
+          </a:xfrm>
+          <a:prstGeom prst="rect">
+            <a:avLst/>
+          </a:prstGeom>
+          <a:noFill/>
+          <a:ln/>
+        </p:spPr>
+        <p:txBody>
+          <a:bodyPr wrap="square" lIns="0" tIns="0" rIns="0" bIns="0" rtlCol="0" anchor="ctr"/>
+          <a:lstStyle/>
+          <a:p>
+            <a:pPr indent="0" marL="0">
+              <a:buNone/>
+            </a:pPr>
+            <a:r>
+              <a:rPr lang="en-US" sz="1300" b="1" dirty="0">
+                <a:solidFill>
+                  <a:srgbClr val="0068B7"/>
+                </a:solidFill>
+                <a:latin typeface="Aptos" pitchFamily="34" charset="0"/>
+                <a:ea typeface="Aptos" pitchFamily="34" charset="-122"/>
+                <a:cs typeface="Aptos" pitchFamily="34" charset="-120"/>
+              </a:rPr>
+              <a:t>Concept checkpoints</a:t>
+            </a:r>
+            <a:endParaRPr lang="en-US" sz="1300" dirty="0"/>
+          </a:p>
+        </p:txBody>
       </p:sp>
       <p:sp>
         <p:nvSpPr>
@@ -5074,102 +5058,67 @@
         </p:nvSpPr>
         <p:spPr>
           <a:xfrm>
-            <a:off x="7909560" y="3099816"/>
-            <a:ext cx="2926080" cy="256032"/>
-          </a:xfrm>
-          <a:prstGeom prst="rect">
-            <a:avLst/>
-          </a:prstGeom>
-          <a:noFill/>
-          <a:ln/>
-        </p:spPr>
-        <p:txBody>
-          <a:bodyPr wrap="square" lIns="0" tIns="0" rIns="0" bIns="0" rtlCol="0" anchor="ctr"/>
-          <a:lstStyle/>
-          <a:p>
-            <a:pPr algn="ctr" indent="0" marL="0">
-              <a:buNone/>
-            </a:pPr>
-            <a:r>
-              <a:rPr lang="en-US" sz="1500" b="1" dirty="0">
-                <a:solidFill>
-                  <a:srgbClr val="003A63"/>
-                </a:solidFill>
-                <a:latin typeface="Aptos" pitchFamily="34" charset="0"/>
-                <a:ea typeface="Aptos" pitchFamily="34" charset="-122"/>
-                <a:cs typeface="Aptos" pitchFamily="34" charset="-120"/>
-              </a:rPr>
-              <a:t>Risk</a:t>
-            </a:r>
-            <a:endParaRPr lang="en-US" sz="1500" dirty="0"/>
+            <a:off x="7818120" y="3300984"/>
+            <a:ext cx="3090672" cy="877824"/>
+          </a:xfrm>
+          <a:prstGeom prst="rect">
+            <a:avLst/>
+          </a:prstGeom>
+          <a:noFill/>
+          <a:ln/>
+        </p:spPr>
+        <p:txBody>
+          <a:bodyPr wrap="square" lIns="254" tIns="254" rIns="254" bIns="254" rtlCol="0" anchor="t">
+            <a:normAutofit/>
+          </a:bodyPr>
+          <a:lstStyle/>
+          <a:p>
+            <a:r>
+              <a:rPr lang="en-US" sz="1380" dirty="0">
+                <a:solidFill>
+                  <a:srgbClr val="17364A"/>
+                </a:solidFill>
+                <a:latin typeface="Aptos" pitchFamily="34" charset="0"/>
+                <a:ea typeface="Aptos" pitchFamily="34" charset="-122"/>
+                <a:cs typeface="Aptos" pitchFamily="34" charset="-120"/>
+              </a:rPr>
+              <a:t>Vendor documentation accepted without agency review or local evidence.</a:t>
+            </a:r>
+            <a:endParaRPr lang="en-US" sz="1380" dirty="0"/>
+          </a:p>
+          <a:p>
+            <a:r>
+              <a:rPr lang="en-US" sz="1380" dirty="0">
+                <a:solidFill>
+                  <a:srgbClr val="17364A"/>
+                </a:solidFill>
+                <a:latin typeface="Aptos" pitchFamily="34" charset="0"/>
+                <a:ea typeface="Aptos" pitchFamily="34" charset="-122"/>
+                <a:cs typeface="Aptos" pitchFamily="34" charset="-120"/>
+              </a:rPr>
+              <a:t>Incidents that cannot be reconstructed because logs or decisions were not preserved.</a:t>
+            </a:r>
+            <a:endParaRPr lang="en-US" sz="1380" dirty="0"/>
+          </a:p>
+          <a:p>
+            <a:r>
+              <a:rPr lang="en-US" sz="1380" dirty="0">
+                <a:solidFill>
+                  <a:srgbClr val="17364A"/>
+                </a:solidFill>
+                <a:latin typeface="Aptos" pitchFamily="34" charset="0"/>
+                <a:ea typeface="Aptos" pitchFamily="34" charset="-122"/>
+                <a:cs typeface="Aptos" pitchFamily="34" charset="-120"/>
+              </a:rPr>
+              <a:t>Public records or audit responses delayed because artifacts are scattered.</a:t>
+            </a:r>
+            <a:endParaRPr lang="en-US" sz="1380" dirty="0"/>
           </a:p>
         </p:txBody>
       </p:sp>
       <p:sp>
         <p:nvSpPr>
           <p:cNvPr id="16" name="Shape 14"/>
-          <p:cNvSpPr/>
-          <p:nvPr/>
-        </p:nvSpPr>
-        <p:spPr>
-          <a:xfrm>
-            <a:off x="8366760" y="3639312"/>
-            <a:ext cx="2011680" cy="0"/>
-          </a:xfrm>
-          <a:prstGeom prst="line">
-            <a:avLst/>
-          </a:prstGeom>
-          <a:noFill/>
-          <a:ln w="63500">
-            <a:solidFill>
-              <a:srgbClr val="2F8A28"/>
-            </a:solidFill>
-            <a:prstDash val="solid"/>
-          </a:ln>
-        </p:spPr>
-      </p:sp>
-      <p:sp>
-        <p:nvSpPr>
-          <p:cNvPr id="17" name="Text 15"/>
-          <p:cNvSpPr/>
-          <p:nvPr/>
-        </p:nvSpPr>
-        <p:spPr>
-          <a:xfrm>
-            <a:off x="7909560" y="3849624"/>
-            <a:ext cx="2926080" cy="164592"/>
-          </a:xfrm>
-          <a:prstGeom prst="rect">
-            <a:avLst/>
-          </a:prstGeom>
-          <a:noFill/>
-          <a:ln/>
-        </p:spPr>
-        <p:txBody>
-          <a:bodyPr wrap="square" lIns="0" tIns="0" rIns="0" bIns="0" rtlCol="0" anchor="ctr"/>
-          <a:lstStyle/>
-          <a:p>
-            <a:pPr algn="ctr" indent="0" marL="0">
-              <a:buNone/>
-            </a:pPr>
-            <a:r>
-              <a:rPr lang="en-US" sz="900" dirty="0">
-                <a:solidFill>
-                  <a:srgbClr val="003A63"/>
-                </a:solidFill>
-                <a:latin typeface="Aptos" pitchFamily="34" charset="0"/>
-                <a:ea typeface="Aptos" pitchFamily="34" charset="-122"/>
-                <a:cs typeface="Aptos" pitchFamily="34" charset="-120"/>
-              </a:rPr>
-              <a:t>Human review</a:t>
-            </a:r>
-            <a:endParaRPr lang="en-US" sz="900" dirty="0"/>
-          </a:p>
-        </p:txBody>
-      </p:sp>
-      <p:sp>
-        <p:nvSpPr>
-          <p:cNvPr id="18" name="Shape 16"/>
           <p:cNvSpPr/>
           <p:nvPr/>
         </p:nvSpPr>
@@ -5196,7 +5145,7 @@
       </p:sp>
       <p:sp>
         <p:nvSpPr>
-          <p:cNvPr id="19" name="Text 17"/>
+          <p:cNvPr id="17" name="Text 15"/>
           <p:cNvSpPr/>
           <p:nvPr/>
         </p:nvSpPr>
@@ -5235,7 +5184,7 @@
       </p:sp>
       <p:sp>
         <p:nvSpPr>
-          <p:cNvPr id="20" name="Text 18"/>
+          <p:cNvPr id="18" name="Text 16"/>
           <p:cNvSpPr/>
           <p:nvPr/>
         </p:nvSpPr>
@@ -5743,13 +5692,11 @@
             </a:avLst>
           </a:prstGeom>
           <a:solidFill>
-            <a:srgbClr val="FFFFFF">
-              <a:alpha val="88000"/>
-            </a:srgbClr>
+            <a:srgbClr val="FFFFFF"/>
           </a:solidFill>
           <a:ln w="12700">
             <a:solidFill>
-              <a:srgbClr val="D6E8F2"/>
+              <a:srgbClr val="B9D7E6"/>
             </a:solidFill>
             <a:prstDash val="solid"/>
           </a:ln>
@@ -5757,26 +5704,42 @@
       </p:sp>
       <p:sp>
         <p:nvSpPr>
-          <p:cNvPr id="14" name="Shape 12"/>
-          <p:cNvSpPr/>
-          <p:nvPr/>
-        </p:nvSpPr>
-        <p:spPr>
-          <a:xfrm>
-            <a:off x="8046720" y="3108960"/>
-            <a:ext cx="2651760" cy="896112"/>
-          </a:xfrm>
-          <a:prstGeom prst="arc">
-            <a:avLst/>
-          </a:prstGeom>
-          <a:noFill/>
-          <a:ln w="25400">
-            <a:solidFill>
-              <a:srgbClr val="0068B7"/>
-            </a:solidFill>
-            <a:prstDash val="solid"/>
-          </a:ln>
-        </p:spPr>
+          <p:cNvPr id="14" name="Text 12"/>
+          <p:cNvSpPr/>
+          <p:nvPr/>
+        </p:nvSpPr>
+        <p:spPr>
+          <a:xfrm>
+            <a:off x="7799832" y="2935224"/>
+            <a:ext cx="3145536" cy="256032"/>
+          </a:xfrm>
+          <a:prstGeom prst="rect">
+            <a:avLst/>
+          </a:prstGeom>
+          <a:noFill/>
+          <a:ln/>
+        </p:spPr>
+        <p:txBody>
+          <a:bodyPr wrap="square" lIns="0" tIns="0" rIns="0" bIns="0" rtlCol="0" anchor="ctr"/>
+          <a:lstStyle/>
+          <a:p>
+            <a:pPr indent="0" marL="0">
+              <a:buNone/>
+            </a:pPr>
+            <a:r>
+              <a:rPr lang="en-US" sz="1300" b="1" dirty="0">
+                <a:solidFill>
+                  <a:srgbClr val="0068B7"/>
+                </a:solidFill>
+                <a:latin typeface="Aptos" pitchFamily="34" charset="0"/>
+                <a:ea typeface="Aptos" pitchFamily="34" charset="-122"/>
+                <a:cs typeface="Aptos" pitchFamily="34" charset="-120"/>
+              </a:rPr>
+              <a:t>Concept checkpoints</a:t>
+            </a:r>
+            <a:endParaRPr lang="en-US" sz="1300" dirty="0"/>
+          </a:p>
+        </p:txBody>
       </p:sp>
       <p:sp>
         <p:nvSpPr>
@@ -5786,102 +5749,67 @@
         </p:nvSpPr>
         <p:spPr>
           <a:xfrm>
-            <a:off x="7909560" y="3099816"/>
-            <a:ext cx="2926080" cy="256032"/>
-          </a:xfrm>
-          <a:prstGeom prst="rect">
-            <a:avLst/>
-          </a:prstGeom>
-          <a:noFill/>
-          <a:ln/>
-        </p:spPr>
-        <p:txBody>
-          <a:bodyPr wrap="square" lIns="0" tIns="0" rIns="0" bIns="0" rtlCol="0" anchor="ctr"/>
-          <a:lstStyle/>
-          <a:p>
-            <a:pPr algn="ctr" indent="0" marL="0">
-              <a:buNone/>
-            </a:pPr>
-            <a:r>
-              <a:rPr lang="en-US" sz="1500" b="1" dirty="0">
-                <a:solidFill>
-                  <a:srgbClr val="003A63"/>
-                </a:solidFill>
-                <a:latin typeface="Aptos" pitchFamily="34" charset="0"/>
-                <a:ea typeface="Aptos" pitchFamily="34" charset="-122"/>
-                <a:cs typeface="Aptos" pitchFamily="34" charset="-120"/>
-              </a:rPr>
-              <a:t>Risk</a:t>
-            </a:r>
-            <a:endParaRPr lang="en-US" sz="1500" dirty="0"/>
+            <a:off x="7818120" y="3300984"/>
+            <a:ext cx="3090672" cy="877824"/>
+          </a:xfrm>
+          <a:prstGeom prst="rect">
+            <a:avLst/>
+          </a:prstGeom>
+          <a:noFill/>
+          <a:ln/>
+        </p:spPr>
+        <p:txBody>
+          <a:bodyPr wrap="square" lIns="254" tIns="254" rIns="254" bIns="254" rtlCol="0" anchor="t">
+            <a:normAutofit/>
+          </a:bodyPr>
+          <a:lstStyle/>
+          <a:p>
+            <a:r>
+              <a:rPr lang="en-US" sz="1380" dirty="0">
+                <a:solidFill>
+                  <a:srgbClr val="17364A"/>
+                </a:solidFill>
+                <a:latin typeface="Aptos" pitchFamily="34" charset="0"/>
+                <a:ea typeface="Aptos" pitchFamily="34" charset="-122"/>
+                <a:cs typeface="Aptos" pitchFamily="34" charset="-120"/>
+              </a:rPr>
+              <a:t>Recommended guardrails include the following:</a:t>
+            </a:r>
+            <a:endParaRPr lang="en-US" sz="1380" dirty="0"/>
+          </a:p>
+          <a:p>
+            <a:r>
+              <a:rPr lang="en-US" sz="1380" dirty="0">
+                <a:solidFill>
+                  <a:srgbClr val="17364A"/>
+                </a:solidFill>
+                <a:latin typeface="Aptos" pitchFamily="34" charset="0"/>
+                <a:ea typeface="Aptos" pitchFamily="34" charset="-122"/>
+                <a:cs typeface="Aptos" pitchFamily="34" charset="-120"/>
+              </a:rPr>
+              <a:t>Maintain an AI evidence inventory for each approved AI use.</a:t>
+            </a:r>
+            <a:endParaRPr lang="en-US" sz="1380" dirty="0"/>
+          </a:p>
+          <a:p>
+            <a:r>
+              <a:rPr lang="en-US" sz="1380" dirty="0">
+                <a:solidFill>
+                  <a:srgbClr val="17364A"/>
+                </a:solidFill>
+                <a:latin typeface="Aptos" pitchFamily="34" charset="0"/>
+                <a:ea typeface="Aptos" pitchFamily="34" charset="-122"/>
+                <a:cs typeface="Aptos" pitchFamily="34" charset="-120"/>
+              </a:rPr>
+              <a:t>Use decision logs for approvals, deferrals, conditions, changes, and retirement.</a:t>
+            </a:r>
+            <a:endParaRPr lang="en-US" sz="1380" dirty="0"/>
           </a:p>
         </p:txBody>
       </p:sp>
       <p:sp>
         <p:nvSpPr>
           <p:cNvPr id="16" name="Shape 14"/>
-          <p:cNvSpPr/>
-          <p:nvPr/>
-        </p:nvSpPr>
-        <p:spPr>
-          <a:xfrm>
-            <a:off x="8366760" y="3639312"/>
-            <a:ext cx="2011680" cy="0"/>
-          </a:xfrm>
-          <a:prstGeom prst="line">
-            <a:avLst/>
-          </a:prstGeom>
-          <a:noFill/>
-          <a:ln w="63500">
-            <a:solidFill>
-              <a:srgbClr val="2F8A28"/>
-            </a:solidFill>
-            <a:prstDash val="solid"/>
-          </a:ln>
-        </p:spPr>
-      </p:sp>
-      <p:sp>
-        <p:nvSpPr>
-          <p:cNvPr id="17" name="Text 15"/>
-          <p:cNvSpPr/>
-          <p:nvPr/>
-        </p:nvSpPr>
-        <p:spPr>
-          <a:xfrm>
-            <a:off x="7909560" y="3849624"/>
-            <a:ext cx="2926080" cy="164592"/>
-          </a:xfrm>
-          <a:prstGeom prst="rect">
-            <a:avLst/>
-          </a:prstGeom>
-          <a:noFill/>
-          <a:ln/>
-        </p:spPr>
-        <p:txBody>
-          <a:bodyPr wrap="square" lIns="0" tIns="0" rIns="0" bIns="0" rtlCol="0" anchor="ctr"/>
-          <a:lstStyle/>
-          <a:p>
-            <a:pPr algn="ctr" indent="0" marL="0">
-              <a:buNone/>
-            </a:pPr>
-            <a:r>
-              <a:rPr lang="en-US" sz="900" dirty="0">
-                <a:solidFill>
-                  <a:srgbClr val="003A63"/>
-                </a:solidFill>
-                <a:latin typeface="Aptos" pitchFamily="34" charset="0"/>
-                <a:ea typeface="Aptos" pitchFamily="34" charset="-122"/>
-                <a:cs typeface="Aptos" pitchFamily="34" charset="-120"/>
-              </a:rPr>
-              <a:t>Human review</a:t>
-            </a:r>
-            <a:endParaRPr lang="en-US" sz="900" dirty="0"/>
-          </a:p>
-        </p:txBody>
-      </p:sp>
-      <p:sp>
-        <p:nvSpPr>
-          <p:cNvPr id="18" name="Shape 16"/>
           <p:cNvSpPr/>
           <p:nvPr/>
         </p:nvSpPr>
@@ -5908,7 +5836,7 @@
       </p:sp>
       <p:sp>
         <p:nvSpPr>
-          <p:cNvPr id="19" name="Text 17"/>
+          <p:cNvPr id="17" name="Text 15"/>
           <p:cNvSpPr/>
           <p:nvPr/>
         </p:nvSpPr>
@@ -5947,7 +5875,7 @@
       </p:sp>
       <p:sp>
         <p:nvSpPr>
-          <p:cNvPr id="20" name="Text 18"/>
+          <p:cNvPr id="18" name="Text 16"/>
           <p:cNvSpPr/>
           <p:nvPr/>
         </p:nvSpPr>
@@ -6455,13 +6383,11 @@
             </a:avLst>
           </a:prstGeom>
           <a:solidFill>
-            <a:srgbClr val="FFFFFF">
-              <a:alpha val="88000"/>
-            </a:srgbClr>
+            <a:srgbClr val="FFFFFF"/>
           </a:solidFill>
           <a:ln w="12700">
             <a:solidFill>
-              <a:srgbClr val="D6E8F2"/>
+              <a:srgbClr val="B9D7E6"/>
             </a:solidFill>
             <a:prstDash val="solid"/>
           </a:ln>
@@ -6469,26 +6395,42 @@
       </p:sp>
       <p:sp>
         <p:nvSpPr>
-          <p:cNvPr id="14" name="Shape 12"/>
-          <p:cNvSpPr/>
-          <p:nvPr/>
-        </p:nvSpPr>
-        <p:spPr>
-          <a:xfrm>
-            <a:off x="8046720" y="3108960"/>
-            <a:ext cx="2651760" cy="896112"/>
-          </a:xfrm>
-          <a:prstGeom prst="arc">
-            <a:avLst/>
-          </a:prstGeom>
-          <a:noFill/>
-          <a:ln w="25400">
-            <a:solidFill>
-              <a:srgbClr val="0068B7"/>
-            </a:solidFill>
-            <a:prstDash val="solid"/>
-          </a:ln>
-        </p:spPr>
+          <p:cNvPr id="14" name="Text 12"/>
+          <p:cNvSpPr/>
+          <p:nvPr/>
+        </p:nvSpPr>
+        <p:spPr>
+          <a:xfrm>
+            <a:off x="7799832" y="2935224"/>
+            <a:ext cx="3145536" cy="256032"/>
+          </a:xfrm>
+          <a:prstGeom prst="rect">
+            <a:avLst/>
+          </a:prstGeom>
+          <a:noFill/>
+          <a:ln/>
+        </p:spPr>
+        <p:txBody>
+          <a:bodyPr wrap="square" lIns="0" tIns="0" rIns="0" bIns="0" rtlCol="0" anchor="ctr"/>
+          <a:lstStyle/>
+          <a:p>
+            <a:pPr indent="0" marL="0">
+              <a:buNone/>
+            </a:pPr>
+            <a:r>
+              <a:rPr lang="en-US" sz="1300" b="1" dirty="0">
+                <a:solidFill>
+                  <a:srgbClr val="0068B7"/>
+                </a:solidFill>
+                <a:latin typeface="Aptos" pitchFamily="34" charset="0"/>
+                <a:ea typeface="Aptos" pitchFamily="34" charset="-122"/>
+                <a:cs typeface="Aptos" pitchFamily="34" charset="-120"/>
+              </a:rPr>
+              <a:t>Concept checkpoints</a:t>
+            </a:r>
+            <a:endParaRPr lang="en-US" sz="1300" dirty="0"/>
+          </a:p>
+        </p:txBody>
       </p:sp>
       <p:sp>
         <p:nvSpPr>
@@ -6498,102 +6440,67 @@
         </p:nvSpPr>
         <p:spPr>
           <a:xfrm>
-            <a:off x="7909560" y="3099816"/>
-            <a:ext cx="2926080" cy="256032"/>
-          </a:xfrm>
-          <a:prstGeom prst="rect">
-            <a:avLst/>
-          </a:prstGeom>
-          <a:noFill/>
-          <a:ln/>
-        </p:spPr>
-        <p:txBody>
-          <a:bodyPr wrap="square" lIns="0" tIns="0" rIns="0" bIns="0" rtlCol="0" anchor="ctr"/>
-          <a:lstStyle/>
-          <a:p>
-            <a:pPr algn="ctr" indent="0" marL="0">
-              <a:buNone/>
-            </a:pPr>
-            <a:r>
-              <a:rPr lang="en-US" sz="1500" b="1" dirty="0">
-                <a:solidFill>
-                  <a:srgbClr val="003A63"/>
-                </a:solidFill>
-                <a:latin typeface="Aptos" pitchFamily="34" charset="0"/>
-                <a:ea typeface="Aptos" pitchFamily="34" charset="-122"/>
-                <a:cs typeface="Aptos" pitchFamily="34" charset="-120"/>
-              </a:rPr>
-              <a:t>Risk</a:t>
-            </a:r>
-            <a:endParaRPr lang="en-US" sz="1500" dirty="0"/>
+            <a:off x="7818120" y="3300984"/>
+            <a:ext cx="3090672" cy="877824"/>
+          </a:xfrm>
+          <a:prstGeom prst="rect">
+            <a:avLst/>
+          </a:prstGeom>
+          <a:noFill/>
+          <a:ln/>
+        </p:spPr>
+        <p:txBody>
+          <a:bodyPr wrap="square" lIns="254" tIns="254" rIns="254" bIns="254" rtlCol="0" anchor="t">
+            <a:normAutofit/>
+          </a:bodyPr>
+          <a:lstStyle/>
+          <a:p>
+            <a:r>
+              <a:rPr lang="en-US" sz="1380" dirty="0">
+                <a:solidFill>
+                  <a:srgbClr val="17364A"/>
+                </a:solidFill>
+                <a:latin typeface="Aptos" pitchFamily="34" charset="0"/>
+                <a:ea typeface="Aptos" pitchFamily="34" charset="-122"/>
+                <a:cs typeface="Aptos" pitchFamily="34" charset="-120"/>
+              </a:rPr>
+              <a:t>Preserve validation, testing, monitoring, training, SOP, and incident records.</a:t>
+            </a:r>
+            <a:endParaRPr lang="en-US" sz="1380" dirty="0"/>
+          </a:p>
+          <a:p>
+            <a:r>
+              <a:rPr lang="en-US" sz="1380" dirty="0">
+                <a:solidFill>
+                  <a:srgbClr val="17364A"/>
+                </a:solidFill>
+                <a:latin typeface="Aptos" pitchFamily="34" charset="0"/>
+                <a:ea typeface="Aptos" pitchFamily="34" charset="-122"/>
+                <a:cs typeface="Aptos" pitchFamily="34" charset="-120"/>
+              </a:rPr>
+              <a:t>Assign artifact ownership and retention expectations.</a:t>
+            </a:r>
+            <a:endParaRPr lang="en-US" sz="1380" dirty="0"/>
+          </a:p>
+          <a:p>
+            <a:r>
+              <a:rPr lang="en-US" sz="1380" dirty="0">
+                <a:solidFill>
+                  <a:srgbClr val="17364A"/>
+                </a:solidFill>
+                <a:latin typeface="Aptos" pitchFamily="34" charset="0"/>
+                <a:ea typeface="Aptos" pitchFamily="34" charset="-122"/>
+                <a:cs typeface="Aptos" pitchFamily="34" charset="-120"/>
+              </a:rPr>
+              <a:t>Review evidence completeness during periodic governance review.</a:t>
+            </a:r>
+            <a:endParaRPr lang="en-US" sz="1380" dirty="0"/>
           </a:p>
         </p:txBody>
       </p:sp>
       <p:sp>
         <p:nvSpPr>
           <p:cNvPr id="16" name="Shape 14"/>
-          <p:cNvSpPr/>
-          <p:nvPr/>
-        </p:nvSpPr>
-        <p:spPr>
-          <a:xfrm>
-            <a:off x="8366760" y="3639312"/>
-            <a:ext cx="2011680" cy="0"/>
-          </a:xfrm>
-          <a:prstGeom prst="line">
-            <a:avLst/>
-          </a:prstGeom>
-          <a:noFill/>
-          <a:ln w="63500">
-            <a:solidFill>
-              <a:srgbClr val="2F8A28"/>
-            </a:solidFill>
-            <a:prstDash val="solid"/>
-          </a:ln>
-        </p:spPr>
-      </p:sp>
-      <p:sp>
-        <p:nvSpPr>
-          <p:cNvPr id="17" name="Text 15"/>
-          <p:cNvSpPr/>
-          <p:nvPr/>
-        </p:nvSpPr>
-        <p:spPr>
-          <a:xfrm>
-            <a:off x="7909560" y="3849624"/>
-            <a:ext cx="2926080" cy="164592"/>
-          </a:xfrm>
-          <a:prstGeom prst="rect">
-            <a:avLst/>
-          </a:prstGeom>
-          <a:noFill/>
-          <a:ln/>
-        </p:spPr>
-        <p:txBody>
-          <a:bodyPr wrap="square" lIns="0" tIns="0" rIns="0" bIns="0" rtlCol="0" anchor="ctr"/>
-          <a:lstStyle/>
-          <a:p>
-            <a:pPr algn="ctr" indent="0" marL="0">
-              <a:buNone/>
-            </a:pPr>
-            <a:r>
-              <a:rPr lang="en-US" sz="900" dirty="0">
-                <a:solidFill>
-                  <a:srgbClr val="003A63"/>
-                </a:solidFill>
-                <a:latin typeface="Aptos" pitchFamily="34" charset="0"/>
-                <a:ea typeface="Aptos" pitchFamily="34" charset="-122"/>
-                <a:cs typeface="Aptos" pitchFamily="34" charset="-120"/>
-              </a:rPr>
-              <a:t>Human review</a:t>
-            </a:r>
-            <a:endParaRPr lang="en-US" sz="900" dirty="0"/>
-          </a:p>
-        </p:txBody>
-      </p:sp>
-      <p:sp>
-        <p:nvSpPr>
-          <p:cNvPr id="18" name="Shape 16"/>
           <p:cNvSpPr/>
           <p:nvPr/>
         </p:nvSpPr>
@@ -6620,7 +6527,7 @@
       </p:sp>
       <p:sp>
         <p:nvSpPr>
-          <p:cNvPr id="19" name="Text 17"/>
+          <p:cNvPr id="17" name="Text 15"/>
           <p:cNvSpPr/>
           <p:nvPr/>
         </p:nvSpPr>
@@ -6659,7 +6566,7 @@
       </p:sp>
       <p:sp>
         <p:nvSpPr>
-          <p:cNvPr id="20" name="Text 18"/>
+          <p:cNvPr id="18" name="Text 16"/>
           <p:cNvSpPr/>
           <p:nvPr/>
         </p:nvSpPr>
@@ -7167,13 +7074,11 @@
             </a:avLst>
           </a:prstGeom>
           <a:solidFill>
-            <a:srgbClr val="FFFFFF">
-              <a:alpha val="88000"/>
-            </a:srgbClr>
+            <a:srgbClr val="FFFFFF"/>
           </a:solidFill>
           <a:ln w="12700">
             <a:solidFill>
-              <a:srgbClr val="D6E8F2"/>
+              <a:srgbClr val="B9D7E6"/>
             </a:solidFill>
             <a:prstDash val="solid"/>
           </a:ln>
@@ -7181,119 +7086,112 @@
       </p:sp>
       <p:sp>
         <p:nvSpPr>
-          <p:cNvPr id="14" name="Shape 12"/>
-          <p:cNvSpPr/>
-          <p:nvPr/>
-        </p:nvSpPr>
-        <p:spPr>
-          <a:xfrm>
-            <a:off x="8074152" y="3291840"/>
-            <a:ext cx="2596896" cy="749808"/>
-          </a:xfrm>
-          <a:prstGeom prst="rect">
-            <a:avLst/>
-          </a:prstGeom>
-          <a:solidFill>
-            <a:srgbClr val="EAF6F8"/>
-          </a:solidFill>
-          <a:ln w="12700">
-            <a:solidFill>
-              <a:srgbClr val="8ABBD8"/>
-            </a:solidFill>
-            <a:prstDash val="solid"/>
-          </a:ln>
-        </p:spPr>
-      </p:sp>
-      <p:sp>
-        <p:nvSpPr>
-          <p:cNvPr id="15" name="Shape 13"/>
-          <p:cNvSpPr/>
-          <p:nvPr/>
-        </p:nvSpPr>
-        <p:spPr>
-          <a:xfrm>
-            <a:off x="8202168" y="3721608"/>
-            <a:ext cx="2340864" cy="0"/>
-          </a:xfrm>
-          <a:prstGeom prst="line">
-            <a:avLst/>
-          </a:prstGeom>
-          <a:noFill/>
-          <a:ln w="19050">
-            <a:solidFill>
-              <a:srgbClr val="0068B7"/>
-            </a:solidFill>
-            <a:prstDash val="solid"/>
-          </a:ln>
-        </p:spPr>
+          <p:cNvPr id="14" name="Text 12"/>
+          <p:cNvSpPr/>
+          <p:nvPr/>
+        </p:nvSpPr>
+        <p:spPr>
+          <a:xfrm>
+            <a:off x="7799832" y="2935224"/>
+            <a:ext cx="3145536" cy="256032"/>
+          </a:xfrm>
+          <a:prstGeom prst="rect">
+            <a:avLst/>
+          </a:prstGeom>
+          <a:noFill/>
+          <a:ln/>
+        </p:spPr>
+        <p:txBody>
+          <a:bodyPr wrap="square" lIns="0" tIns="0" rIns="0" bIns="0" rtlCol="0" anchor="ctr"/>
+          <a:lstStyle/>
+          <a:p>
+            <a:pPr indent="0" marL="0">
+              <a:buNone/>
+            </a:pPr>
+            <a:r>
+              <a:rPr lang="en-US" sz="1300" b="1" dirty="0">
+                <a:solidFill>
+                  <a:srgbClr val="0068B7"/>
+                </a:solidFill>
+                <a:latin typeface="Aptos" pitchFamily="34" charset="0"/>
+                <a:ea typeface="Aptos" pitchFamily="34" charset="-122"/>
+                <a:cs typeface="Aptos" pitchFamily="34" charset="-120"/>
+              </a:rPr>
+              <a:t>Concept checkpoints</a:t>
+            </a:r>
+            <a:endParaRPr lang="en-US" sz="1300" dirty="0"/>
+          </a:p>
+        </p:txBody>
+      </p:sp>
+      <p:sp>
+        <p:nvSpPr>
+          <p:cNvPr id="15" name="Text 13"/>
+          <p:cNvSpPr/>
+          <p:nvPr/>
+        </p:nvSpPr>
+        <p:spPr>
+          <a:xfrm>
+            <a:off x="7818120" y="3300984"/>
+            <a:ext cx="3090672" cy="877824"/>
+          </a:xfrm>
+          <a:prstGeom prst="rect">
+            <a:avLst/>
+          </a:prstGeom>
+          <a:noFill/>
+          <a:ln/>
+        </p:spPr>
+        <p:txBody>
+          <a:bodyPr wrap="square" lIns="254" tIns="254" rIns="254" bIns="254" rtlCol="0" anchor="t">
+            <a:normAutofit/>
+          </a:bodyPr>
+          <a:lstStyle/>
+          <a:p>
+            <a:r>
+              <a:rPr lang="en-US" sz="1380" dirty="0">
+                <a:solidFill>
+                  <a:srgbClr val="17364A"/>
+                </a:solidFill>
+                <a:latin typeface="Aptos" pitchFamily="34" charset="0"/>
+                <a:ea typeface="Aptos" pitchFamily="34" charset="-122"/>
+                <a:cs typeface="Aptos" pitchFamily="34" charset="-120"/>
+              </a:rPr>
+              <a:t>Where does this topic appear in your agency, program, or workflow?</a:t>
+            </a:r>
+            <a:endParaRPr lang="en-US" sz="1380" dirty="0"/>
+          </a:p>
+          <a:p>
+            <a:r>
+              <a:rPr lang="en-US" sz="1380" dirty="0">
+                <a:solidFill>
+                  <a:srgbClr val="17364A"/>
+                </a:solidFill>
+                <a:latin typeface="Aptos" pitchFamily="34" charset="0"/>
+                <a:ea typeface="Aptos" pitchFamily="34" charset="-122"/>
+                <a:cs typeface="Aptos" pitchFamily="34" charset="-120"/>
+              </a:rPr>
+              <a:t>Which staff roles would need to understand or apply this concept before AI use is approved?</a:t>
+            </a:r>
+            <a:endParaRPr lang="en-US" sz="1380" dirty="0"/>
+          </a:p>
+          <a:p>
+            <a:r>
+              <a:rPr lang="en-US" sz="1380" dirty="0">
+                <a:solidFill>
+                  <a:srgbClr val="17364A"/>
+                </a:solidFill>
+                <a:latin typeface="Aptos" pitchFamily="34" charset="0"/>
+                <a:ea typeface="Aptos" pitchFamily="34" charset="-122"/>
+                <a:cs typeface="Aptos" pitchFamily="34" charset="-120"/>
+              </a:rPr>
+              <a:t>What could go wrong if this topic is not addressed before implementation?</a:t>
+            </a:r>
+            <a:endParaRPr lang="en-US" sz="1380" dirty="0"/>
+          </a:p>
+        </p:txBody>
       </p:sp>
       <p:sp>
         <p:nvSpPr>
           <p:cNvPr id="16" name="Shape 14"/>
-          <p:cNvSpPr/>
-          <p:nvPr/>
-        </p:nvSpPr>
-        <p:spPr>
-          <a:xfrm>
-            <a:off x="9198864" y="4206240"/>
-            <a:ext cx="347472" cy="347472"/>
-          </a:xfrm>
-          <a:prstGeom prst="ellipse">
-            <a:avLst/>
-          </a:prstGeom>
-          <a:solidFill>
-            <a:srgbClr val="2F8A28"/>
-          </a:solidFill>
-          <a:ln w="12700">
-            <a:solidFill>
-              <a:srgbClr val="2F8A28"/>
-            </a:solidFill>
-            <a:prstDash val="solid"/>
-          </a:ln>
-        </p:spPr>
-      </p:sp>
-      <p:sp>
-        <p:nvSpPr>
-          <p:cNvPr id="17" name="Text 15"/>
-          <p:cNvSpPr/>
-          <p:nvPr/>
-        </p:nvSpPr>
-        <p:spPr>
-          <a:xfrm>
-            <a:off x="7909560" y="3977640"/>
-            <a:ext cx="2926080" cy="182880"/>
-          </a:xfrm>
-          <a:prstGeom prst="rect">
-            <a:avLst/>
-          </a:prstGeom>
-          <a:noFill/>
-          <a:ln/>
-        </p:spPr>
-        <p:txBody>
-          <a:bodyPr wrap="square" lIns="0" tIns="0" rIns="0" bIns="0" rtlCol="0" anchor="ctr"/>
-          <a:lstStyle/>
-          <a:p>
-            <a:pPr algn="ctr" indent="0" marL="0">
-              <a:buNone/>
-            </a:pPr>
-            <a:r>
-              <a:rPr lang="en-US" sz="1000" dirty="0">
-                <a:solidFill>
-                  <a:srgbClr val="003A63"/>
-                </a:solidFill>
-                <a:latin typeface="Aptos" pitchFamily="34" charset="0"/>
-                <a:ea typeface="Aptos" pitchFamily="34" charset="-122"/>
-                <a:cs typeface="Aptos" pitchFamily="34" charset="-120"/>
-              </a:rPr>
-              <a:t>Concept to action</a:t>
-            </a:r>
-            <a:endParaRPr lang="en-US" sz="1000" dirty="0"/>
-          </a:p>
-        </p:txBody>
-      </p:sp>
-      <p:sp>
-        <p:nvSpPr>
-          <p:cNvPr id="18" name="Shape 16"/>
           <p:cNvSpPr/>
           <p:nvPr/>
         </p:nvSpPr>
@@ -7320,7 +7218,7 @@
       </p:sp>
       <p:sp>
         <p:nvSpPr>
-          <p:cNvPr id="19" name="Text 17"/>
+          <p:cNvPr id="17" name="Text 15"/>
           <p:cNvSpPr/>
           <p:nvPr/>
         </p:nvSpPr>
@@ -7359,7 +7257,7 @@
       </p:sp>
       <p:sp>
         <p:nvSpPr>
-          <p:cNvPr id="20" name="Text 18"/>
+          <p:cNvPr id="18" name="Text 16"/>
           <p:cNvSpPr/>
           <p:nvPr/>
         </p:nvSpPr>
@@ -7853,13 +7751,11 @@
             </a:avLst>
           </a:prstGeom>
           <a:solidFill>
-            <a:srgbClr val="FFFFFF">
-              <a:alpha val="88000"/>
-            </a:srgbClr>
+            <a:srgbClr val="FFFFFF"/>
           </a:solidFill>
           <a:ln w="12700">
             <a:solidFill>
-              <a:srgbClr val="D6E8F2"/>
+              <a:srgbClr val="B9D7E6"/>
             </a:solidFill>
             <a:prstDash val="solid"/>
           </a:ln>
@@ -7867,119 +7763,98 @@
       </p:sp>
       <p:sp>
         <p:nvSpPr>
-          <p:cNvPr id="14" name="Shape 12"/>
-          <p:cNvSpPr/>
-          <p:nvPr/>
-        </p:nvSpPr>
-        <p:spPr>
-          <a:xfrm>
-            <a:off x="8074152" y="3291840"/>
-            <a:ext cx="2596896" cy="749808"/>
-          </a:xfrm>
-          <a:prstGeom prst="rect">
-            <a:avLst/>
-          </a:prstGeom>
-          <a:solidFill>
-            <a:srgbClr val="EAF6F8"/>
-          </a:solidFill>
-          <a:ln w="12700">
-            <a:solidFill>
-              <a:srgbClr val="8ABBD8"/>
-            </a:solidFill>
-            <a:prstDash val="solid"/>
-          </a:ln>
-        </p:spPr>
-      </p:sp>
-      <p:sp>
-        <p:nvSpPr>
-          <p:cNvPr id="15" name="Shape 13"/>
-          <p:cNvSpPr/>
-          <p:nvPr/>
-        </p:nvSpPr>
-        <p:spPr>
-          <a:xfrm>
-            <a:off x="8202168" y="3721608"/>
-            <a:ext cx="2340864" cy="0"/>
-          </a:xfrm>
-          <a:prstGeom prst="line">
-            <a:avLst/>
-          </a:prstGeom>
-          <a:noFill/>
-          <a:ln w="19050">
-            <a:solidFill>
-              <a:srgbClr val="0068B7"/>
-            </a:solidFill>
-            <a:prstDash val="solid"/>
-          </a:ln>
-        </p:spPr>
+          <p:cNvPr id="14" name="Text 12"/>
+          <p:cNvSpPr/>
+          <p:nvPr/>
+        </p:nvSpPr>
+        <p:spPr>
+          <a:xfrm>
+            <a:off x="7799832" y="2935224"/>
+            <a:ext cx="3145536" cy="256032"/>
+          </a:xfrm>
+          <a:prstGeom prst="rect">
+            <a:avLst/>
+          </a:prstGeom>
+          <a:noFill/>
+          <a:ln/>
+        </p:spPr>
+        <p:txBody>
+          <a:bodyPr wrap="square" lIns="0" tIns="0" rIns="0" bIns="0" rtlCol="0" anchor="ctr"/>
+          <a:lstStyle/>
+          <a:p>
+            <a:pPr indent="0" marL="0">
+              <a:buNone/>
+            </a:pPr>
+            <a:r>
+              <a:rPr lang="en-US" sz="1300" b="1" dirty="0">
+                <a:solidFill>
+                  <a:srgbClr val="0068B7"/>
+                </a:solidFill>
+                <a:latin typeface="Aptos" pitchFamily="34" charset="0"/>
+                <a:ea typeface="Aptos" pitchFamily="34" charset="-122"/>
+                <a:cs typeface="Aptos" pitchFamily="34" charset="-120"/>
+              </a:rPr>
+              <a:t>Concept checkpoints</a:t>
+            </a:r>
+            <a:endParaRPr lang="en-US" sz="1300" dirty="0"/>
+          </a:p>
+        </p:txBody>
+      </p:sp>
+      <p:sp>
+        <p:nvSpPr>
+          <p:cNvPr id="15" name="Text 13"/>
+          <p:cNvSpPr/>
+          <p:nvPr/>
+        </p:nvSpPr>
+        <p:spPr>
+          <a:xfrm>
+            <a:off x="7818120" y="3300984"/>
+            <a:ext cx="3090672" cy="877824"/>
+          </a:xfrm>
+          <a:prstGeom prst="rect">
+            <a:avLst/>
+          </a:prstGeom>
+          <a:noFill/>
+          <a:ln/>
+        </p:spPr>
+        <p:txBody>
+          <a:bodyPr wrap="square" lIns="254" tIns="254" rIns="254" bIns="254" rtlCol="0" anchor="t">
+            <a:normAutofit/>
+          </a:bodyPr>
+          <a:lstStyle/>
+          <a:p>
+            <a:r>
+              <a:rPr lang="en-US" sz="1380" dirty="0">
+                <a:solidFill>
+                  <a:srgbClr val="17364A"/>
+                </a:solidFill>
+                <a:latin typeface="Aptos" pitchFamily="34" charset="0"/>
+                <a:ea typeface="Aptos" pitchFamily="34" charset="-122"/>
+                <a:cs typeface="Aptos" pitchFamily="34" charset="-120"/>
+              </a:rPr>
+              <a:t>What evidence would governance, leadership, or operations staff need before moving forward?</a:t>
+            </a:r>
+            <a:endParaRPr lang="en-US" sz="1380" dirty="0"/>
+          </a:p>
+          <a:p>
+            <a:r>
+              <a:rPr lang="en-US" sz="1380" dirty="0">
+                <a:solidFill>
+                  <a:srgbClr val="17364A"/>
+                </a:solidFill>
+                <a:latin typeface="Aptos" pitchFamily="34" charset="0"/>
+                <a:ea typeface="Aptos" pitchFamily="34" charset="-122"/>
+                <a:cs typeface="Aptos" pitchFamily="34" charset="-120"/>
+              </a:rPr>
+              <a:t>Which policy, data, equity, privacy, security, or workflow questions remain unresolved?</a:t>
+            </a:r>
+            <a:endParaRPr lang="en-US" sz="1380" dirty="0"/>
+          </a:p>
+        </p:txBody>
       </p:sp>
       <p:sp>
         <p:nvSpPr>
           <p:cNvPr id="16" name="Shape 14"/>
-          <p:cNvSpPr/>
-          <p:nvPr/>
-        </p:nvSpPr>
-        <p:spPr>
-          <a:xfrm>
-            <a:off x="9198864" y="4206240"/>
-            <a:ext cx="347472" cy="347472"/>
-          </a:xfrm>
-          <a:prstGeom prst="ellipse">
-            <a:avLst/>
-          </a:prstGeom>
-          <a:solidFill>
-            <a:srgbClr val="2F8A28"/>
-          </a:solidFill>
-          <a:ln w="12700">
-            <a:solidFill>
-              <a:srgbClr val="2F8A28"/>
-            </a:solidFill>
-            <a:prstDash val="solid"/>
-          </a:ln>
-        </p:spPr>
-      </p:sp>
-      <p:sp>
-        <p:nvSpPr>
-          <p:cNvPr id="17" name="Text 15"/>
-          <p:cNvSpPr/>
-          <p:nvPr/>
-        </p:nvSpPr>
-        <p:spPr>
-          <a:xfrm>
-            <a:off x="7909560" y="3977640"/>
-            <a:ext cx="2926080" cy="182880"/>
-          </a:xfrm>
-          <a:prstGeom prst="rect">
-            <a:avLst/>
-          </a:prstGeom>
-          <a:noFill/>
-          <a:ln/>
-        </p:spPr>
-        <p:txBody>
-          <a:bodyPr wrap="square" lIns="0" tIns="0" rIns="0" bIns="0" rtlCol="0" anchor="ctr"/>
-          <a:lstStyle/>
-          <a:p>
-            <a:pPr algn="ctr" indent="0" marL="0">
-              <a:buNone/>
-            </a:pPr>
-            <a:r>
-              <a:rPr lang="en-US" sz="1000" dirty="0">
-                <a:solidFill>
-                  <a:srgbClr val="003A63"/>
-                </a:solidFill>
-                <a:latin typeface="Aptos" pitchFamily="34" charset="0"/>
-                <a:ea typeface="Aptos" pitchFamily="34" charset="-122"/>
-                <a:cs typeface="Aptos" pitchFamily="34" charset="-120"/>
-              </a:rPr>
-              <a:t>Concept to action</a:t>
-            </a:r>
-            <a:endParaRPr lang="en-US" sz="1000" dirty="0"/>
-          </a:p>
-        </p:txBody>
-      </p:sp>
-      <p:sp>
-        <p:nvSpPr>
-          <p:cNvPr id="18" name="Shape 16"/>
           <p:cNvSpPr/>
           <p:nvPr/>
         </p:nvSpPr>
@@ -8006,7 +7881,7 @@
       </p:sp>
       <p:sp>
         <p:nvSpPr>
-          <p:cNvPr id="19" name="Text 17"/>
+          <p:cNvPr id="17" name="Text 15"/>
           <p:cNvSpPr/>
           <p:nvPr/>
         </p:nvSpPr>
@@ -8045,7 +7920,7 @@
       </p:sp>
       <p:sp>
         <p:nvSpPr>
-          <p:cNvPr id="20" name="Text 18"/>
+          <p:cNvPr id="18" name="Text 16"/>
           <p:cNvSpPr/>
           <p:nvPr/>
         </p:nvSpPr>
@@ -8539,13 +8414,11 @@
             </a:avLst>
           </a:prstGeom>
           <a:solidFill>
-            <a:srgbClr val="FFFFFF">
-              <a:alpha val="88000"/>
-            </a:srgbClr>
+            <a:srgbClr val="FFFFFF"/>
           </a:solidFill>
           <a:ln w="12700">
             <a:solidFill>
-              <a:srgbClr val="D6E8F2"/>
+              <a:srgbClr val="B9D7E6"/>
             </a:solidFill>
             <a:prstDash val="solid"/>
           </a:ln>
@@ -8553,119 +8426,98 @@
       </p:sp>
       <p:sp>
         <p:nvSpPr>
-          <p:cNvPr id="14" name="Shape 12"/>
-          <p:cNvSpPr/>
-          <p:nvPr/>
-        </p:nvSpPr>
-        <p:spPr>
-          <a:xfrm>
-            <a:off x="8074152" y="3291840"/>
-            <a:ext cx="2596896" cy="749808"/>
-          </a:xfrm>
-          <a:prstGeom prst="rect">
-            <a:avLst/>
-          </a:prstGeom>
-          <a:solidFill>
-            <a:srgbClr val="EAF6F8"/>
-          </a:solidFill>
-          <a:ln w="12700">
-            <a:solidFill>
-              <a:srgbClr val="8ABBD8"/>
-            </a:solidFill>
-            <a:prstDash val="solid"/>
-          </a:ln>
-        </p:spPr>
-      </p:sp>
-      <p:sp>
-        <p:nvSpPr>
-          <p:cNvPr id="15" name="Shape 13"/>
-          <p:cNvSpPr/>
-          <p:nvPr/>
-        </p:nvSpPr>
-        <p:spPr>
-          <a:xfrm>
-            <a:off x="8202168" y="3721608"/>
-            <a:ext cx="2340864" cy="0"/>
-          </a:xfrm>
-          <a:prstGeom prst="line">
-            <a:avLst/>
-          </a:prstGeom>
-          <a:noFill/>
-          <a:ln w="19050">
-            <a:solidFill>
-              <a:srgbClr val="0068B7"/>
-            </a:solidFill>
-            <a:prstDash val="solid"/>
-          </a:ln>
-        </p:spPr>
+          <p:cNvPr id="14" name="Text 12"/>
+          <p:cNvSpPr/>
+          <p:nvPr/>
+        </p:nvSpPr>
+        <p:spPr>
+          <a:xfrm>
+            <a:off x="7799832" y="2935224"/>
+            <a:ext cx="3145536" cy="256032"/>
+          </a:xfrm>
+          <a:prstGeom prst="rect">
+            <a:avLst/>
+          </a:prstGeom>
+          <a:noFill/>
+          <a:ln/>
+        </p:spPr>
+        <p:txBody>
+          <a:bodyPr wrap="square" lIns="0" tIns="0" rIns="0" bIns="0" rtlCol="0" anchor="ctr"/>
+          <a:lstStyle/>
+          <a:p>
+            <a:pPr indent="0" marL="0">
+              <a:buNone/>
+            </a:pPr>
+            <a:r>
+              <a:rPr lang="en-US" sz="1300" b="1" dirty="0">
+                <a:solidFill>
+                  <a:srgbClr val="0068B7"/>
+                </a:solidFill>
+                <a:latin typeface="Aptos" pitchFamily="34" charset="0"/>
+                <a:ea typeface="Aptos" pitchFamily="34" charset="-122"/>
+                <a:cs typeface="Aptos" pitchFamily="34" charset="-120"/>
+              </a:rPr>
+              <a:t>Concept checkpoints</a:t>
+            </a:r>
+            <a:endParaRPr lang="en-US" sz="1300" dirty="0"/>
+          </a:p>
+        </p:txBody>
+      </p:sp>
+      <p:sp>
+        <p:nvSpPr>
+          <p:cNvPr id="15" name="Text 13"/>
+          <p:cNvSpPr/>
+          <p:nvPr/>
+        </p:nvSpPr>
+        <p:spPr>
+          <a:xfrm>
+            <a:off x="7818120" y="3300984"/>
+            <a:ext cx="3090672" cy="877824"/>
+          </a:xfrm>
+          <a:prstGeom prst="rect">
+            <a:avLst/>
+          </a:prstGeom>
+          <a:noFill/>
+          <a:ln/>
+        </p:spPr>
+        <p:txBody>
+          <a:bodyPr wrap="square" lIns="254" tIns="254" rIns="254" bIns="254" rtlCol="0" anchor="t">
+            <a:normAutofit/>
+          </a:bodyPr>
+          <a:lstStyle/>
+          <a:p>
+            <a:r>
+              <a:rPr lang="en-US" sz="1380" dirty="0">
+                <a:solidFill>
+                  <a:srgbClr val="17364A"/>
+                </a:solidFill>
+                <a:latin typeface="Aptos" pitchFamily="34" charset="0"/>
+                <a:ea typeface="Aptos" pitchFamily="34" charset="-122"/>
+                <a:cs typeface="Aptos" pitchFamily="34" charset="-120"/>
+              </a:rPr>
+              <a:t>Create an AI audit readiness evidence inventory for one AI use case.</a:t>
+            </a:r>
+            <a:endParaRPr lang="en-US" sz="1380" dirty="0"/>
+          </a:p>
+          <a:p>
+            <a:r>
+              <a:rPr lang="en-US" sz="1380" dirty="0">
+                <a:solidFill>
+                  <a:srgbClr val="17364A"/>
+                </a:solidFill>
+                <a:latin typeface="Aptos" pitchFamily="34" charset="0"/>
+                <a:ea typeface="Aptos" pitchFamily="34" charset="-122"/>
+                <a:cs typeface="Aptos" pitchFamily="34" charset="-120"/>
+              </a:rPr>
+              <a:t>Identify required artifacts from intake through retirement, the owner of each artifact,.</a:t>
+            </a:r>
+            <a:endParaRPr lang="en-US" sz="1380" dirty="0"/>
+          </a:p>
+        </p:txBody>
       </p:sp>
       <p:sp>
         <p:nvSpPr>
           <p:cNvPr id="16" name="Shape 14"/>
-          <p:cNvSpPr/>
-          <p:nvPr/>
-        </p:nvSpPr>
-        <p:spPr>
-          <a:xfrm>
-            <a:off x="9198864" y="4206240"/>
-            <a:ext cx="347472" cy="347472"/>
-          </a:xfrm>
-          <a:prstGeom prst="ellipse">
-            <a:avLst/>
-          </a:prstGeom>
-          <a:solidFill>
-            <a:srgbClr val="2F8A28"/>
-          </a:solidFill>
-          <a:ln w="12700">
-            <a:solidFill>
-              <a:srgbClr val="2F8A28"/>
-            </a:solidFill>
-            <a:prstDash val="solid"/>
-          </a:ln>
-        </p:spPr>
-      </p:sp>
-      <p:sp>
-        <p:nvSpPr>
-          <p:cNvPr id="17" name="Text 15"/>
-          <p:cNvSpPr/>
-          <p:nvPr/>
-        </p:nvSpPr>
-        <p:spPr>
-          <a:xfrm>
-            <a:off x="7909560" y="3977640"/>
-            <a:ext cx="2926080" cy="182880"/>
-          </a:xfrm>
-          <a:prstGeom prst="rect">
-            <a:avLst/>
-          </a:prstGeom>
-          <a:noFill/>
-          <a:ln/>
-        </p:spPr>
-        <p:txBody>
-          <a:bodyPr wrap="square" lIns="0" tIns="0" rIns="0" bIns="0" rtlCol="0" anchor="ctr"/>
-          <a:lstStyle/>
-          <a:p>
-            <a:pPr algn="ctr" indent="0" marL="0">
-              <a:buNone/>
-            </a:pPr>
-            <a:r>
-              <a:rPr lang="en-US" sz="1000" dirty="0">
-                <a:solidFill>
-                  <a:srgbClr val="003A63"/>
-                </a:solidFill>
-                <a:latin typeface="Aptos" pitchFamily="34" charset="0"/>
-                <a:ea typeface="Aptos" pitchFamily="34" charset="-122"/>
-                <a:cs typeface="Aptos" pitchFamily="34" charset="-120"/>
-              </a:rPr>
-              <a:t>Concept to action</a:t>
-            </a:r>
-            <a:endParaRPr lang="en-US" sz="1000" dirty="0"/>
-          </a:p>
-        </p:txBody>
-      </p:sp>
-      <p:sp>
-        <p:nvSpPr>
-          <p:cNvPr id="18" name="Shape 16"/>
           <p:cNvSpPr/>
           <p:nvPr/>
         </p:nvSpPr>
@@ -8692,7 +8544,7 @@
       </p:sp>
       <p:sp>
         <p:nvSpPr>
-          <p:cNvPr id="19" name="Text 17"/>
+          <p:cNvPr id="17" name="Text 15"/>
           <p:cNvSpPr/>
           <p:nvPr/>
         </p:nvSpPr>
@@ -8731,7 +8583,7 @@
       </p:sp>
       <p:sp>
         <p:nvSpPr>
-          <p:cNvPr id="20" name="Text 18"/>
+          <p:cNvPr id="18" name="Text 16"/>
           <p:cNvSpPr/>
           <p:nvPr/>
         </p:nvSpPr>
@@ -9239,13 +9091,11 @@
             </a:avLst>
           </a:prstGeom>
           <a:solidFill>
-            <a:srgbClr val="FFFFFF">
-              <a:alpha val="88000"/>
-            </a:srgbClr>
+            <a:srgbClr val="FFFFFF"/>
           </a:solidFill>
           <a:ln w="12700">
             <a:solidFill>
-              <a:srgbClr val="D6E8F2"/>
+              <a:srgbClr val="B9D7E6"/>
             </a:solidFill>
             <a:prstDash val="solid"/>
           </a:ln>
@@ -9253,119 +9103,112 @@
       </p:sp>
       <p:sp>
         <p:nvSpPr>
-          <p:cNvPr id="14" name="Shape 12"/>
-          <p:cNvSpPr/>
-          <p:nvPr/>
-        </p:nvSpPr>
-        <p:spPr>
-          <a:xfrm>
-            <a:off x="8074152" y="3291840"/>
-            <a:ext cx="2596896" cy="749808"/>
-          </a:xfrm>
-          <a:prstGeom prst="rect">
-            <a:avLst/>
-          </a:prstGeom>
-          <a:solidFill>
-            <a:srgbClr val="EAF6F8"/>
-          </a:solidFill>
-          <a:ln w="12700">
-            <a:solidFill>
-              <a:srgbClr val="8ABBD8"/>
-            </a:solidFill>
-            <a:prstDash val="solid"/>
-          </a:ln>
-        </p:spPr>
-      </p:sp>
-      <p:sp>
-        <p:nvSpPr>
-          <p:cNvPr id="15" name="Shape 13"/>
-          <p:cNvSpPr/>
-          <p:nvPr/>
-        </p:nvSpPr>
-        <p:spPr>
-          <a:xfrm>
-            <a:off x="8202168" y="3721608"/>
-            <a:ext cx="2340864" cy="0"/>
-          </a:xfrm>
-          <a:prstGeom prst="line">
-            <a:avLst/>
-          </a:prstGeom>
-          <a:noFill/>
-          <a:ln w="19050">
-            <a:solidFill>
-              <a:srgbClr val="0068B7"/>
-            </a:solidFill>
-            <a:prstDash val="solid"/>
-          </a:ln>
-        </p:spPr>
+          <p:cNvPr id="14" name="Text 12"/>
+          <p:cNvSpPr/>
+          <p:nvPr/>
+        </p:nvSpPr>
+        <p:spPr>
+          <a:xfrm>
+            <a:off x="7799832" y="2935224"/>
+            <a:ext cx="3145536" cy="256032"/>
+          </a:xfrm>
+          <a:prstGeom prst="rect">
+            <a:avLst/>
+          </a:prstGeom>
+          <a:noFill/>
+          <a:ln/>
+        </p:spPr>
+        <p:txBody>
+          <a:bodyPr wrap="square" lIns="0" tIns="0" rIns="0" bIns="0" rtlCol="0" anchor="ctr"/>
+          <a:lstStyle/>
+          <a:p>
+            <a:pPr indent="0" marL="0">
+              <a:buNone/>
+            </a:pPr>
+            <a:r>
+              <a:rPr lang="en-US" sz="1300" b="1" dirty="0">
+                <a:solidFill>
+                  <a:srgbClr val="0068B7"/>
+                </a:solidFill>
+                <a:latin typeface="Aptos" pitchFamily="34" charset="0"/>
+                <a:ea typeface="Aptos" pitchFamily="34" charset="-122"/>
+                <a:cs typeface="Aptos" pitchFamily="34" charset="-120"/>
+              </a:rPr>
+              <a:t>Concept checkpoints</a:t>
+            </a:r>
+            <a:endParaRPr lang="en-US" sz="1300" dirty="0"/>
+          </a:p>
+        </p:txBody>
+      </p:sp>
+      <p:sp>
+        <p:nvSpPr>
+          <p:cNvPr id="15" name="Text 13"/>
+          <p:cNvSpPr/>
+          <p:nvPr/>
+        </p:nvSpPr>
+        <p:spPr>
+          <a:xfrm>
+            <a:off x="7818120" y="3300984"/>
+            <a:ext cx="3090672" cy="877824"/>
+          </a:xfrm>
+          <a:prstGeom prst="rect">
+            <a:avLst/>
+          </a:prstGeom>
+          <a:noFill/>
+          <a:ln/>
+        </p:spPr>
+        <p:txBody>
+          <a:bodyPr wrap="square" lIns="254" tIns="254" rIns="254" bIns="254" rtlCol="0" anchor="t">
+            <a:normAutofit/>
+          </a:bodyPr>
+          <a:lstStyle/>
+          <a:p>
+            <a:r>
+              <a:rPr lang="en-US" sz="1380" dirty="0">
+                <a:solidFill>
+                  <a:srgbClr val="17364A"/>
+                </a:solidFill>
+                <a:latin typeface="Aptos" pitchFamily="34" charset="0"/>
+                <a:ea typeface="Aptos" pitchFamily="34" charset="-122"/>
+                <a:cs typeface="Aptos" pitchFamily="34" charset="-120"/>
+              </a:rPr>
+              <a:t>AI evidence inventory</a:t>
+            </a:r>
+            <a:endParaRPr lang="en-US" sz="1380" dirty="0"/>
+          </a:p>
+          <a:p>
+            <a:r>
+              <a:rPr lang="en-US" sz="1380" dirty="0">
+                <a:solidFill>
+                  <a:srgbClr val="17364A"/>
+                </a:solidFill>
+                <a:latin typeface="Aptos" pitchFamily="34" charset="0"/>
+                <a:ea typeface="Aptos" pitchFamily="34" charset="-122"/>
+                <a:cs typeface="Aptos" pitchFamily="34" charset="-120"/>
+              </a:rPr>
+              <a:t>Decision log template</a:t>
+            </a:r>
+            <a:endParaRPr lang="en-US" sz="1380" dirty="0"/>
+          </a:p>
+          <a:p>
+            <a:r>
+              <a:rPr lang="en-US" sz="1380" dirty="0">
+                <a:solidFill>
+                  <a:srgbClr val="17364A"/>
+                </a:solidFill>
+                <a:latin typeface="Aptos" pitchFamily="34" charset="0"/>
+                <a:ea typeface="Aptos" pitchFamily="34" charset="-122"/>
+                <a:cs typeface="Aptos" pitchFamily="34" charset="-120"/>
+              </a:rPr>
+              <a:t>Artifact ownership and retention table</a:t>
+            </a:r>
+            <a:endParaRPr lang="en-US" sz="1380" dirty="0"/>
+          </a:p>
+        </p:txBody>
       </p:sp>
       <p:sp>
         <p:nvSpPr>
           <p:cNvPr id="16" name="Shape 14"/>
-          <p:cNvSpPr/>
-          <p:nvPr/>
-        </p:nvSpPr>
-        <p:spPr>
-          <a:xfrm>
-            <a:off x="9198864" y="4206240"/>
-            <a:ext cx="347472" cy="347472"/>
-          </a:xfrm>
-          <a:prstGeom prst="ellipse">
-            <a:avLst/>
-          </a:prstGeom>
-          <a:solidFill>
-            <a:srgbClr val="2F8A28"/>
-          </a:solidFill>
-          <a:ln w="12700">
-            <a:solidFill>
-              <a:srgbClr val="2F8A28"/>
-            </a:solidFill>
-            <a:prstDash val="solid"/>
-          </a:ln>
-        </p:spPr>
-      </p:sp>
-      <p:sp>
-        <p:nvSpPr>
-          <p:cNvPr id="17" name="Text 15"/>
-          <p:cNvSpPr/>
-          <p:nvPr/>
-        </p:nvSpPr>
-        <p:spPr>
-          <a:xfrm>
-            <a:off x="7909560" y="3977640"/>
-            <a:ext cx="2926080" cy="182880"/>
-          </a:xfrm>
-          <a:prstGeom prst="rect">
-            <a:avLst/>
-          </a:prstGeom>
-          <a:noFill/>
-          <a:ln/>
-        </p:spPr>
-        <p:txBody>
-          <a:bodyPr wrap="square" lIns="0" tIns="0" rIns="0" bIns="0" rtlCol="0" anchor="ctr"/>
-          <a:lstStyle/>
-          <a:p>
-            <a:pPr algn="ctr" indent="0" marL="0">
-              <a:buNone/>
-            </a:pPr>
-            <a:r>
-              <a:rPr lang="en-US" sz="1000" dirty="0">
-                <a:solidFill>
-                  <a:srgbClr val="003A63"/>
-                </a:solidFill>
-                <a:latin typeface="Aptos" pitchFamily="34" charset="0"/>
-                <a:ea typeface="Aptos" pitchFamily="34" charset="-122"/>
-                <a:cs typeface="Aptos" pitchFamily="34" charset="-120"/>
-              </a:rPr>
-              <a:t>Concept to action</a:t>
-            </a:r>
-            <a:endParaRPr lang="en-US" sz="1000" dirty="0"/>
-          </a:p>
-        </p:txBody>
-      </p:sp>
-      <p:sp>
-        <p:nvSpPr>
-          <p:cNvPr id="18" name="Shape 16"/>
           <p:cNvSpPr/>
           <p:nvPr/>
         </p:nvSpPr>
@@ -9392,7 +9235,7 @@
       </p:sp>
       <p:sp>
         <p:nvSpPr>
-          <p:cNvPr id="19" name="Text 17"/>
+          <p:cNvPr id="17" name="Text 15"/>
           <p:cNvSpPr/>
           <p:nvPr/>
         </p:nvSpPr>
@@ -9431,7 +9274,7 @@
       </p:sp>
       <p:sp>
         <p:nvSpPr>
-          <p:cNvPr id="20" name="Text 18"/>
+          <p:cNvPr id="18" name="Text 16"/>
           <p:cNvSpPr/>
           <p:nvPr/>
         </p:nvSpPr>
@@ -9925,13 +9768,11 @@
             </a:avLst>
           </a:prstGeom>
           <a:solidFill>
-            <a:srgbClr val="FFFFFF">
-              <a:alpha val="88000"/>
-            </a:srgbClr>
+            <a:srgbClr val="FFFFFF"/>
           </a:solidFill>
           <a:ln w="12700">
             <a:solidFill>
-              <a:srgbClr val="D6E8F2"/>
+              <a:srgbClr val="B9D7E6"/>
             </a:solidFill>
             <a:prstDash val="solid"/>
           </a:ln>
@@ -9939,119 +9780,98 @@
       </p:sp>
       <p:sp>
         <p:nvSpPr>
-          <p:cNvPr id="14" name="Shape 12"/>
-          <p:cNvSpPr/>
-          <p:nvPr/>
-        </p:nvSpPr>
-        <p:spPr>
-          <a:xfrm>
-            <a:off x="8074152" y="3291840"/>
-            <a:ext cx="2596896" cy="749808"/>
-          </a:xfrm>
-          <a:prstGeom prst="rect">
-            <a:avLst/>
-          </a:prstGeom>
-          <a:solidFill>
-            <a:srgbClr val="EAF6F8"/>
-          </a:solidFill>
-          <a:ln w="12700">
-            <a:solidFill>
-              <a:srgbClr val="8ABBD8"/>
-            </a:solidFill>
-            <a:prstDash val="solid"/>
-          </a:ln>
-        </p:spPr>
-      </p:sp>
-      <p:sp>
-        <p:nvSpPr>
-          <p:cNvPr id="15" name="Shape 13"/>
-          <p:cNvSpPr/>
-          <p:nvPr/>
-        </p:nvSpPr>
-        <p:spPr>
-          <a:xfrm>
-            <a:off x="8202168" y="3721608"/>
-            <a:ext cx="2340864" cy="0"/>
-          </a:xfrm>
-          <a:prstGeom prst="line">
-            <a:avLst/>
-          </a:prstGeom>
-          <a:noFill/>
-          <a:ln w="19050">
-            <a:solidFill>
-              <a:srgbClr val="0068B7"/>
-            </a:solidFill>
-            <a:prstDash val="solid"/>
-          </a:ln>
-        </p:spPr>
+          <p:cNvPr id="14" name="Text 12"/>
+          <p:cNvSpPr/>
+          <p:nvPr/>
+        </p:nvSpPr>
+        <p:spPr>
+          <a:xfrm>
+            <a:off x="7799832" y="2935224"/>
+            <a:ext cx="3145536" cy="256032"/>
+          </a:xfrm>
+          <a:prstGeom prst="rect">
+            <a:avLst/>
+          </a:prstGeom>
+          <a:noFill/>
+          <a:ln/>
+        </p:spPr>
+        <p:txBody>
+          <a:bodyPr wrap="square" lIns="0" tIns="0" rIns="0" bIns="0" rtlCol="0" anchor="ctr"/>
+          <a:lstStyle/>
+          <a:p>
+            <a:pPr indent="0" marL="0">
+              <a:buNone/>
+            </a:pPr>
+            <a:r>
+              <a:rPr lang="en-US" sz="1300" b="1" dirty="0">
+                <a:solidFill>
+                  <a:srgbClr val="0068B7"/>
+                </a:solidFill>
+                <a:latin typeface="Aptos" pitchFamily="34" charset="0"/>
+                <a:ea typeface="Aptos" pitchFamily="34" charset="-122"/>
+                <a:cs typeface="Aptos" pitchFamily="34" charset="-120"/>
+              </a:rPr>
+              <a:t>Concept checkpoints</a:t>
+            </a:r>
+            <a:endParaRPr lang="en-US" sz="1300" dirty="0"/>
+          </a:p>
+        </p:txBody>
+      </p:sp>
+      <p:sp>
+        <p:nvSpPr>
+          <p:cNvPr id="15" name="Text 13"/>
+          <p:cNvSpPr/>
+          <p:nvPr/>
+        </p:nvSpPr>
+        <p:spPr>
+          <a:xfrm>
+            <a:off x="7818120" y="3300984"/>
+            <a:ext cx="3090672" cy="877824"/>
+          </a:xfrm>
+          <a:prstGeom prst="rect">
+            <a:avLst/>
+          </a:prstGeom>
+          <a:noFill/>
+          <a:ln/>
+        </p:spPr>
+        <p:txBody>
+          <a:bodyPr wrap="square" lIns="254" tIns="254" rIns="254" bIns="254" rtlCol="0" anchor="t">
+            <a:normAutofit/>
+          </a:bodyPr>
+          <a:lstStyle/>
+          <a:p>
+            <a:r>
+              <a:rPr lang="en-US" sz="1380" dirty="0">
+                <a:solidFill>
+                  <a:srgbClr val="17364A"/>
+                </a:solidFill>
+                <a:latin typeface="Aptos" pitchFamily="34" charset="0"/>
+                <a:ea typeface="Aptos" pitchFamily="34" charset="-122"/>
+                <a:cs typeface="Aptos" pitchFamily="34" charset="-120"/>
+              </a:rPr>
+              <a:t>Gap list for missing evidence</a:t>
+            </a:r>
+            <a:endParaRPr lang="en-US" sz="1380" dirty="0"/>
+          </a:p>
+          <a:p>
+            <a:r>
+              <a:rPr lang="en-US" sz="1380" dirty="0">
+                <a:solidFill>
+                  <a:srgbClr val="17364A"/>
+                </a:solidFill>
+                <a:latin typeface="Aptos" pitchFamily="34" charset="0"/>
+                <a:ea typeface="Aptos" pitchFamily="34" charset="-122"/>
+                <a:cs typeface="Aptos" pitchFamily="34" charset="-120"/>
+              </a:rPr>
+              <a:t>Review schedule</a:t>
+            </a:r>
+            <a:endParaRPr lang="en-US" sz="1380" dirty="0"/>
+          </a:p>
+        </p:txBody>
       </p:sp>
       <p:sp>
         <p:nvSpPr>
           <p:cNvPr id="16" name="Shape 14"/>
-          <p:cNvSpPr/>
-          <p:nvPr/>
-        </p:nvSpPr>
-        <p:spPr>
-          <a:xfrm>
-            <a:off x="9198864" y="4206240"/>
-            <a:ext cx="347472" cy="347472"/>
-          </a:xfrm>
-          <a:prstGeom prst="ellipse">
-            <a:avLst/>
-          </a:prstGeom>
-          <a:solidFill>
-            <a:srgbClr val="2F8A28"/>
-          </a:solidFill>
-          <a:ln w="12700">
-            <a:solidFill>
-              <a:srgbClr val="2F8A28"/>
-            </a:solidFill>
-            <a:prstDash val="solid"/>
-          </a:ln>
-        </p:spPr>
-      </p:sp>
-      <p:sp>
-        <p:nvSpPr>
-          <p:cNvPr id="17" name="Text 15"/>
-          <p:cNvSpPr/>
-          <p:nvPr/>
-        </p:nvSpPr>
-        <p:spPr>
-          <a:xfrm>
-            <a:off x="7909560" y="3977640"/>
-            <a:ext cx="2926080" cy="182880"/>
-          </a:xfrm>
-          <a:prstGeom prst="rect">
-            <a:avLst/>
-          </a:prstGeom>
-          <a:noFill/>
-          <a:ln/>
-        </p:spPr>
-        <p:txBody>
-          <a:bodyPr wrap="square" lIns="0" tIns="0" rIns="0" bIns="0" rtlCol="0" anchor="ctr"/>
-          <a:lstStyle/>
-          <a:p>
-            <a:pPr algn="ctr" indent="0" marL="0">
-              <a:buNone/>
-            </a:pPr>
-            <a:r>
-              <a:rPr lang="en-US" sz="1000" dirty="0">
-                <a:solidFill>
-                  <a:srgbClr val="003A63"/>
-                </a:solidFill>
-                <a:latin typeface="Aptos" pitchFamily="34" charset="0"/>
-                <a:ea typeface="Aptos" pitchFamily="34" charset="-122"/>
-                <a:cs typeface="Aptos" pitchFamily="34" charset="-120"/>
-              </a:rPr>
-              <a:t>Concept to action</a:t>
-            </a:r>
-            <a:endParaRPr lang="en-US" sz="1000" dirty="0"/>
-          </a:p>
-        </p:txBody>
-      </p:sp>
-      <p:sp>
-        <p:nvSpPr>
-          <p:cNvPr id="18" name="Shape 16"/>
           <p:cNvSpPr/>
           <p:nvPr/>
         </p:nvSpPr>
@@ -10078,7 +9898,7 @@
       </p:sp>
       <p:sp>
         <p:nvSpPr>
-          <p:cNvPr id="19" name="Text 17"/>
+          <p:cNvPr id="17" name="Text 15"/>
           <p:cNvSpPr/>
           <p:nvPr/>
         </p:nvSpPr>
@@ -10117,7 +9937,7 @@
       </p:sp>
       <p:sp>
         <p:nvSpPr>
-          <p:cNvPr id="20" name="Text 18"/>
+          <p:cNvPr id="18" name="Text 16"/>
           <p:cNvSpPr/>
           <p:nvPr/>
         </p:nvSpPr>
@@ -10650,20 +10470,20 @@
         </p:nvSpPr>
         <p:spPr>
           <a:xfrm>
-            <a:off x="7635240" y="3730752"/>
-            <a:ext cx="1033272" cy="749808"/>
+            <a:off x="7909560" y="3675888"/>
+            <a:ext cx="3154680" cy="1691640"/>
           </a:xfrm>
           <a:prstGeom prst="roundRect">
             <a:avLst>
-              <a:gd name="adj" fmla="val 14634"/>
+              <a:gd name="adj" fmla="val 6486"/>
             </a:avLst>
           </a:prstGeom>
           <a:solidFill>
-            <a:srgbClr val="0068B7"/>
+            <a:srgbClr val="FFFFFF"/>
           </a:solidFill>
           <a:ln w="12700">
             <a:solidFill>
-              <a:srgbClr val="0068B7"/>
+              <a:srgbClr val="B9D7E6"/>
             </a:solidFill>
             <a:prstDash val="solid"/>
           </a:ln>
@@ -10677,172 +10497,100 @@
         </p:nvSpPr>
         <p:spPr>
           <a:xfrm>
-            <a:off x="7708392" y="3922776"/>
-            <a:ext cx="886968" cy="310896"/>
-          </a:xfrm>
-          <a:prstGeom prst="rect">
-            <a:avLst/>
-          </a:prstGeom>
-          <a:noFill/>
-          <a:ln/>
-        </p:spPr>
-        <p:txBody>
-          <a:bodyPr wrap="square" lIns="0" tIns="0" rIns="0" bIns="0" rtlCol="0" anchor="ctr">
+            <a:off x="8074152" y="3822192"/>
+            <a:ext cx="2825496" cy="256032"/>
+          </a:xfrm>
+          <a:prstGeom prst="rect">
+            <a:avLst/>
+          </a:prstGeom>
+          <a:noFill/>
+          <a:ln/>
+        </p:spPr>
+        <p:txBody>
+          <a:bodyPr wrap="square" lIns="0" tIns="0" rIns="0" bIns="0" rtlCol="0" anchor="ctr"/>
+          <a:lstStyle/>
+          <a:p>
+            <a:pPr indent="0" marL="0">
+              <a:buNone/>
+            </a:pPr>
+            <a:r>
+              <a:rPr lang="en-US" sz="1300" b="1" dirty="0">
+                <a:solidFill>
+                  <a:srgbClr val="0068B7"/>
+                </a:solidFill>
+                <a:latin typeface="Aptos" pitchFamily="34" charset="0"/>
+                <a:ea typeface="Aptos" pitchFamily="34" charset="-122"/>
+                <a:cs typeface="Aptos" pitchFamily="34" charset="-120"/>
+              </a:rPr>
+              <a:t>Learning sequence</a:t>
+            </a:r>
+            <a:endParaRPr lang="en-US" sz="1300" dirty="0"/>
+          </a:p>
+        </p:txBody>
+      </p:sp>
+      <p:sp>
+        <p:nvSpPr>
+          <p:cNvPr id="15" name="Text 13"/>
+          <p:cNvSpPr/>
+          <p:nvPr/>
+        </p:nvSpPr>
+        <p:spPr>
+          <a:xfrm>
+            <a:off x="8092440" y="4187952"/>
+            <a:ext cx="2770632" cy="1033272"/>
+          </a:xfrm>
+          <a:prstGeom prst="rect">
+            <a:avLst/>
+          </a:prstGeom>
+          <a:noFill/>
+          <a:ln/>
+        </p:spPr>
+        <p:txBody>
+          <a:bodyPr wrap="square" lIns="254" tIns="254" rIns="254" bIns="254" rtlCol="0" anchor="t">
             <a:normAutofit/>
           </a:bodyPr>
           <a:lstStyle/>
           <a:p>
-            <a:pPr algn="ctr" indent="0" marL="0">
-              <a:buNone/>
-            </a:pPr>
-            <a:r>
-              <a:rPr lang="en-US" sz="1500" b="1" dirty="0">
-                <a:solidFill>
-                  <a:srgbClr val="FFFFFF"/>
-                </a:solidFill>
-                <a:latin typeface="Aptos" pitchFamily="34" charset="0"/>
-                <a:ea typeface="Aptos" pitchFamily="34" charset="-122"/>
-                <a:cs typeface="Aptos" pitchFamily="34" charset="-120"/>
-              </a:rPr>
-              <a:t>Learn</a:t>
-            </a:r>
-            <a:endParaRPr lang="en-US" sz="1500" dirty="0"/>
-          </a:p>
-        </p:txBody>
-      </p:sp>
-      <p:sp>
-        <p:nvSpPr>
-          <p:cNvPr id="15" name="Shape 13"/>
-          <p:cNvSpPr/>
-          <p:nvPr/>
-        </p:nvSpPr>
-        <p:spPr>
-          <a:xfrm>
-            <a:off x="8924544" y="3730752"/>
-            <a:ext cx="1033272" cy="749808"/>
-          </a:xfrm>
-          <a:prstGeom prst="roundRect">
-            <a:avLst>
-              <a:gd name="adj" fmla="val 14634"/>
-            </a:avLst>
-          </a:prstGeom>
-          <a:solidFill>
-            <a:srgbClr val="2F8A28"/>
-          </a:solidFill>
-          <a:ln w="12700">
-            <a:solidFill>
-              <a:srgbClr val="2F8A28"/>
-            </a:solidFill>
-            <a:prstDash val="solid"/>
-          </a:ln>
-        </p:spPr>
-      </p:sp>
-      <p:sp>
-        <p:nvSpPr>
-          <p:cNvPr id="16" name="Text 14"/>
-          <p:cNvSpPr/>
-          <p:nvPr/>
-        </p:nvSpPr>
-        <p:spPr>
-          <a:xfrm>
-            <a:off x="8997696" y="3922776"/>
-            <a:ext cx="886968" cy="310896"/>
-          </a:xfrm>
-          <a:prstGeom prst="rect">
-            <a:avLst/>
-          </a:prstGeom>
-          <a:noFill/>
-          <a:ln/>
-        </p:spPr>
-        <p:txBody>
-          <a:bodyPr wrap="square" lIns="0" tIns="0" rIns="0" bIns="0" rtlCol="0" anchor="ctr">
-            <a:normAutofit/>
-          </a:bodyPr>
-          <a:lstStyle/>
-          <a:p>
-            <a:pPr algn="ctr" indent="0" marL="0">
-              <a:buNone/>
-            </a:pPr>
-            <a:r>
-              <a:rPr lang="en-US" sz="1500" b="1" dirty="0">
-                <a:solidFill>
-                  <a:srgbClr val="FFFFFF"/>
-                </a:solidFill>
-                <a:latin typeface="Aptos" pitchFamily="34" charset="0"/>
-                <a:ea typeface="Aptos" pitchFamily="34" charset="-122"/>
-                <a:cs typeface="Aptos" pitchFamily="34" charset="-120"/>
-              </a:rPr>
-              <a:t>Apply</a:t>
-            </a:r>
-            <a:endParaRPr lang="en-US" sz="1500" dirty="0"/>
-          </a:p>
-        </p:txBody>
-      </p:sp>
-      <p:sp>
-        <p:nvSpPr>
-          <p:cNvPr id="17" name="Shape 15"/>
-          <p:cNvSpPr/>
-          <p:nvPr/>
-        </p:nvSpPr>
-        <p:spPr>
-          <a:xfrm>
-            <a:off x="10213848" y="3730752"/>
-            <a:ext cx="1033272" cy="749808"/>
-          </a:xfrm>
-          <a:prstGeom prst="roundRect">
-            <a:avLst>
-              <a:gd name="adj" fmla="val 14634"/>
-            </a:avLst>
-          </a:prstGeom>
-          <a:solidFill>
-            <a:srgbClr val="6A4CA3"/>
-          </a:solidFill>
-          <a:ln w="12700">
-            <a:solidFill>
-              <a:srgbClr val="6A4CA3"/>
-            </a:solidFill>
-            <a:prstDash val="solid"/>
-          </a:ln>
-        </p:spPr>
-      </p:sp>
-      <p:sp>
-        <p:nvSpPr>
-          <p:cNvPr id="18" name="Text 16"/>
-          <p:cNvSpPr/>
-          <p:nvPr/>
-        </p:nvSpPr>
-        <p:spPr>
-          <a:xfrm>
-            <a:off x="10287000" y="3922776"/>
-            <a:ext cx="886968" cy="310896"/>
-          </a:xfrm>
-          <a:prstGeom prst="rect">
-            <a:avLst/>
-          </a:prstGeom>
-          <a:noFill/>
-          <a:ln/>
-        </p:spPr>
-        <p:txBody>
-          <a:bodyPr wrap="square" lIns="0" tIns="0" rIns="0" bIns="0" rtlCol="0" anchor="ctr">
-            <a:normAutofit/>
-          </a:bodyPr>
-          <a:lstStyle/>
-          <a:p>
-            <a:pPr algn="ctr" indent="0" marL="0">
-              <a:buNone/>
-            </a:pPr>
-            <a:r>
-              <a:rPr lang="en-US" sz="1500" b="1" dirty="0">
-                <a:solidFill>
-                  <a:srgbClr val="FFFFFF"/>
-                </a:solidFill>
-                <a:latin typeface="Aptos" pitchFamily="34" charset="0"/>
-                <a:ea typeface="Aptos" pitchFamily="34" charset="-122"/>
-                <a:cs typeface="Aptos" pitchFamily="34" charset="-120"/>
-              </a:rPr>
-              <a:t>Document</a:t>
-            </a:r>
-            <a:endParaRPr lang="en-US" sz="1500" dirty="0"/>
+            <a:r>
+              <a:rPr lang="en-US" sz="1380" dirty="0">
+                <a:solidFill>
+                  <a:srgbClr val="17364A"/>
+                </a:solidFill>
+                <a:latin typeface="Aptos" pitchFamily="34" charset="0"/>
+                <a:ea typeface="Aptos" pitchFamily="34" charset="-122"/>
+                <a:cs typeface="Aptos" pitchFamily="34" charset="-120"/>
+              </a:rPr>
+              <a:t>Read the module for shared vocabulary and context.</a:t>
+            </a:r>
+            <a:endParaRPr lang="en-US" sz="1380" dirty="0"/>
+          </a:p>
+          <a:p>
+            <a:r>
+              <a:rPr lang="en-US" sz="1380" dirty="0">
+                <a:solidFill>
+                  <a:srgbClr val="17364A"/>
+                </a:solidFill>
+                <a:latin typeface="Aptos" pitchFamily="34" charset="0"/>
+                <a:ea typeface="Aptos" pitchFamily="34" charset="-122"/>
+                <a:cs typeface="Aptos" pitchFamily="34" charset="-120"/>
+              </a:rPr>
+              <a:t>Complete the practical exercise to apply the concept.</a:t>
+            </a:r>
+            <a:endParaRPr lang="en-US" sz="1380" dirty="0"/>
+          </a:p>
+          <a:p>
+            <a:r>
+              <a:rPr lang="en-US" sz="1380" dirty="0">
+                <a:solidFill>
+                  <a:srgbClr val="17364A"/>
+                </a:solidFill>
+                <a:latin typeface="Aptos" pitchFamily="34" charset="0"/>
+                <a:ea typeface="Aptos" pitchFamily="34" charset="-122"/>
+                <a:cs typeface="Aptos" pitchFamily="34" charset="-120"/>
+              </a:rPr>
+              <a:t>Use the notes and references for deeper review.</a:t>
+            </a:r>
+            <a:endParaRPr lang="en-US" sz="1380" dirty="0"/>
           </a:p>
         </p:txBody>
       </p:sp>
@@ -11315,13 +11063,11 @@
             </a:avLst>
           </a:prstGeom>
           <a:solidFill>
-            <a:srgbClr val="FFFFFF">
-              <a:alpha val="88000"/>
-            </a:srgbClr>
+            <a:srgbClr val="FFFFFF"/>
           </a:solidFill>
           <a:ln w="12700">
             <a:solidFill>
-              <a:srgbClr val="D6E8F2"/>
+              <a:srgbClr val="B9D7E6"/>
             </a:solidFill>
             <a:prstDash val="solid"/>
           </a:ln>
@@ -11329,119 +11075,98 @@
       </p:sp>
       <p:sp>
         <p:nvSpPr>
-          <p:cNvPr id="14" name="Shape 12"/>
-          <p:cNvSpPr/>
-          <p:nvPr/>
-        </p:nvSpPr>
-        <p:spPr>
-          <a:xfrm>
-            <a:off x="8074152" y="3291840"/>
-            <a:ext cx="2596896" cy="749808"/>
-          </a:xfrm>
-          <a:prstGeom prst="rect">
-            <a:avLst/>
-          </a:prstGeom>
-          <a:solidFill>
-            <a:srgbClr val="EAF6F8"/>
-          </a:solidFill>
-          <a:ln w="12700">
-            <a:solidFill>
-              <a:srgbClr val="8ABBD8"/>
-            </a:solidFill>
-            <a:prstDash val="solid"/>
-          </a:ln>
-        </p:spPr>
-      </p:sp>
-      <p:sp>
-        <p:nvSpPr>
-          <p:cNvPr id="15" name="Shape 13"/>
-          <p:cNvSpPr/>
-          <p:nvPr/>
-        </p:nvSpPr>
-        <p:spPr>
-          <a:xfrm>
-            <a:off x="8202168" y="3721608"/>
-            <a:ext cx="2340864" cy="0"/>
-          </a:xfrm>
-          <a:prstGeom prst="line">
-            <a:avLst/>
-          </a:prstGeom>
-          <a:noFill/>
-          <a:ln w="19050">
-            <a:solidFill>
-              <a:srgbClr val="0068B7"/>
-            </a:solidFill>
-            <a:prstDash val="solid"/>
-          </a:ln>
-        </p:spPr>
+          <p:cNvPr id="14" name="Text 12"/>
+          <p:cNvSpPr/>
+          <p:nvPr/>
+        </p:nvSpPr>
+        <p:spPr>
+          <a:xfrm>
+            <a:off x="7799832" y="2935224"/>
+            <a:ext cx="3145536" cy="256032"/>
+          </a:xfrm>
+          <a:prstGeom prst="rect">
+            <a:avLst/>
+          </a:prstGeom>
+          <a:noFill/>
+          <a:ln/>
+        </p:spPr>
+        <p:txBody>
+          <a:bodyPr wrap="square" lIns="0" tIns="0" rIns="0" bIns="0" rtlCol="0" anchor="ctr"/>
+          <a:lstStyle/>
+          <a:p>
+            <a:pPr indent="0" marL="0">
+              <a:buNone/>
+            </a:pPr>
+            <a:r>
+              <a:rPr lang="en-US" sz="1300" b="1" dirty="0">
+                <a:solidFill>
+                  <a:srgbClr val="0068B7"/>
+                </a:solidFill>
+                <a:latin typeface="Aptos" pitchFamily="34" charset="0"/>
+                <a:ea typeface="Aptos" pitchFamily="34" charset="-122"/>
+                <a:cs typeface="Aptos" pitchFamily="34" charset="-120"/>
+              </a:rPr>
+              <a:t>Concept checkpoints</a:t>
+            </a:r>
+            <a:endParaRPr lang="en-US" sz="1300" dirty="0"/>
+          </a:p>
+        </p:txBody>
+      </p:sp>
+      <p:sp>
+        <p:nvSpPr>
+          <p:cNvPr id="15" name="Text 13"/>
+          <p:cNvSpPr/>
+          <p:nvPr/>
+        </p:nvSpPr>
+        <p:spPr>
+          <a:xfrm>
+            <a:off x="7818120" y="3300984"/>
+            <a:ext cx="3090672" cy="877824"/>
+          </a:xfrm>
+          <a:prstGeom prst="rect">
+            <a:avLst/>
+          </a:prstGeom>
+          <a:noFill/>
+          <a:ln/>
+        </p:spPr>
+        <p:txBody>
+          <a:bodyPr wrap="square" lIns="254" tIns="254" rIns="254" bIns="254" rtlCol="0" anchor="t">
+            <a:normAutofit/>
+          </a:bodyPr>
+          <a:lstStyle/>
+          <a:p>
+            <a:r>
+              <a:rPr lang="en-US" sz="1380" dirty="0">
+                <a:solidFill>
+                  <a:srgbClr val="17364A"/>
+                </a:solidFill>
+                <a:latin typeface="Aptos" pitchFamily="34" charset="0"/>
+                <a:ea typeface="Aptos" pitchFamily="34" charset="-122"/>
+                <a:cs typeface="Aptos" pitchFamily="34" charset="-120"/>
+              </a:rPr>
+              <a:t>Gap list for missing evidence</a:t>
+            </a:r>
+            <a:endParaRPr lang="en-US" sz="1380" dirty="0"/>
+          </a:p>
+          <a:p>
+            <a:r>
+              <a:rPr lang="en-US" sz="1380" dirty="0">
+                <a:solidFill>
+                  <a:srgbClr val="17364A"/>
+                </a:solidFill>
+                <a:latin typeface="Aptos" pitchFamily="34" charset="0"/>
+                <a:ea typeface="Aptos" pitchFamily="34" charset="-122"/>
+                <a:cs typeface="Aptos" pitchFamily="34" charset="-120"/>
+              </a:rPr>
+              <a:t>Review schedule</a:t>
+            </a:r>
+            <a:endParaRPr lang="en-US" sz="1380" dirty="0"/>
+          </a:p>
+        </p:txBody>
       </p:sp>
       <p:sp>
         <p:nvSpPr>
           <p:cNvPr id="16" name="Shape 14"/>
-          <p:cNvSpPr/>
-          <p:nvPr/>
-        </p:nvSpPr>
-        <p:spPr>
-          <a:xfrm>
-            <a:off x="9198864" y="4206240"/>
-            <a:ext cx="347472" cy="347472"/>
-          </a:xfrm>
-          <a:prstGeom prst="ellipse">
-            <a:avLst/>
-          </a:prstGeom>
-          <a:solidFill>
-            <a:srgbClr val="2F8A28"/>
-          </a:solidFill>
-          <a:ln w="12700">
-            <a:solidFill>
-              <a:srgbClr val="2F8A28"/>
-            </a:solidFill>
-            <a:prstDash val="solid"/>
-          </a:ln>
-        </p:spPr>
-      </p:sp>
-      <p:sp>
-        <p:nvSpPr>
-          <p:cNvPr id="17" name="Text 15"/>
-          <p:cNvSpPr/>
-          <p:nvPr/>
-        </p:nvSpPr>
-        <p:spPr>
-          <a:xfrm>
-            <a:off x="7909560" y="3977640"/>
-            <a:ext cx="2926080" cy="182880"/>
-          </a:xfrm>
-          <a:prstGeom prst="rect">
-            <a:avLst/>
-          </a:prstGeom>
-          <a:noFill/>
-          <a:ln/>
-        </p:spPr>
-        <p:txBody>
-          <a:bodyPr wrap="square" lIns="0" tIns="0" rIns="0" bIns="0" rtlCol="0" anchor="ctr"/>
-          <a:lstStyle/>
-          <a:p>
-            <a:pPr algn="ctr" indent="0" marL="0">
-              <a:buNone/>
-            </a:pPr>
-            <a:r>
-              <a:rPr lang="en-US" sz="1000" dirty="0">
-                <a:solidFill>
-                  <a:srgbClr val="003A63"/>
-                </a:solidFill>
-                <a:latin typeface="Aptos" pitchFamily="34" charset="0"/>
-                <a:ea typeface="Aptos" pitchFamily="34" charset="-122"/>
-                <a:cs typeface="Aptos" pitchFamily="34" charset="-120"/>
-              </a:rPr>
-              <a:t>Concept to action</a:t>
-            </a:r>
-            <a:endParaRPr lang="en-US" sz="1000" dirty="0"/>
-          </a:p>
-        </p:txBody>
-      </p:sp>
-      <p:sp>
-        <p:nvSpPr>
-          <p:cNvPr id="18" name="Shape 16"/>
           <p:cNvSpPr/>
           <p:nvPr/>
         </p:nvSpPr>
@@ -11468,7 +11193,7 @@
       </p:sp>
       <p:sp>
         <p:nvSpPr>
-          <p:cNvPr id="19" name="Text 17"/>
+          <p:cNvPr id="17" name="Text 15"/>
           <p:cNvSpPr/>
           <p:nvPr/>
         </p:nvSpPr>
@@ -11507,7 +11232,7 @@
       </p:sp>
       <p:sp>
         <p:nvSpPr>
-          <p:cNvPr id="20" name="Text 18"/>
+          <p:cNvPr id="18" name="Text 16"/>
           <p:cNvSpPr/>
           <p:nvPr/>
         </p:nvSpPr>
@@ -12015,13 +11740,11 @@
             </a:avLst>
           </a:prstGeom>
           <a:solidFill>
-            <a:srgbClr val="FFFFFF">
-              <a:alpha val="88000"/>
-            </a:srgbClr>
+            <a:srgbClr val="FFFFFF"/>
           </a:solidFill>
           <a:ln w="12700">
             <a:solidFill>
-              <a:srgbClr val="D6E8F2"/>
+              <a:srgbClr val="B9D7E6"/>
             </a:solidFill>
             <a:prstDash val="solid"/>
           </a:ln>
@@ -12029,119 +11752,112 @@
       </p:sp>
       <p:sp>
         <p:nvSpPr>
-          <p:cNvPr id="14" name="Shape 12"/>
-          <p:cNvSpPr/>
-          <p:nvPr/>
-        </p:nvSpPr>
-        <p:spPr>
-          <a:xfrm>
-            <a:off x="8074152" y="3291840"/>
-            <a:ext cx="2596896" cy="749808"/>
-          </a:xfrm>
-          <a:prstGeom prst="rect">
-            <a:avLst/>
-          </a:prstGeom>
-          <a:solidFill>
-            <a:srgbClr val="EAF6F8"/>
-          </a:solidFill>
-          <a:ln w="12700">
-            <a:solidFill>
-              <a:srgbClr val="8ABBD8"/>
-            </a:solidFill>
-            <a:prstDash val="solid"/>
-          </a:ln>
-        </p:spPr>
-      </p:sp>
-      <p:sp>
-        <p:nvSpPr>
-          <p:cNvPr id="15" name="Shape 13"/>
-          <p:cNvSpPr/>
-          <p:nvPr/>
-        </p:nvSpPr>
-        <p:spPr>
-          <a:xfrm>
-            <a:off x="8202168" y="3721608"/>
-            <a:ext cx="2340864" cy="0"/>
-          </a:xfrm>
-          <a:prstGeom prst="line">
-            <a:avLst/>
-          </a:prstGeom>
-          <a:noFill/>
-          <a:ln w="19050">
-            <a:solidFill>
-              <a:srgbClr val="0068B7"/>
-            </a:solidFill>
-            <a:prstDash val="solid"/>
-          </a:ln>
-        </p:spPr>
+          <p:cNvPr id="14" name="Text 12"/>
+          <p:cNvSpPr/>
+          <p:nvPr/>
+        </p:nvSpPr>
+        <p:spPr>
+          <a:xfrm>
+            <a:off x="7799832" y="2935224"/>
+            <a:ext cx="3145536" cy="256032"/>
+          </a:xfrm>
+          <a:prstGeom prst="rect">
+            <a:avLst/>
+          </a:prstGeom>
+          <a:noFill/>
+          <a:ln/>
+        </p:spPr>
+        <p:txBody>
+          <a:bodyPr wrap="square" lIns="0" tIns="0" rIns="0" bIns="0" rtlCol="0" anchor="ctr"/>
+          <a:lstStyle/>
+          <a:p>
+            <a:pPr indent="0" marL="0">
+              <a:buNone/>
+            </a:pPr>
+            <a:r>
+              <a:rPr lang="en-US" sz="1300" b="1" dirty="0">
+                <a:solidFill>
+                  <a:srgbClr val="0068B7"/>
+                </a:solidFill>
+                <a:latin typeface="Aptos" pitchFamily="34" charset="0"/>
+                <a:ea typeface="Aptos" pitchFamily="34" charset="-122"/>
+                <a:cs typeface="Aptos" pitchFamily="34" charset="-120"/>
+              </a:rPr>
+              <a:t>Concept checkpoints</a:t>
+            </a:r>
+            <a:endParaRPr lang="en-US" sz="1300" dirty="0"/>
+          </a:p>
+        </p:txBody>
+      </p:sp>
+      <p:sp>
+        <p:nvSpPr>
+          <p:cNvPr id="15" name="Text 13"/>
+          <p:cNvSpPr/>
+          <p:nvPr/>
+        </p:nvSpPr>
+        <p:spPr>
+          <a:xfrm>
+            <a:off x="7818120" y="3300984"/>
+            <a:ext cx="3090672" cy="877824"/>
+          </a:xfrm>
+          <a:prstGeom prst="rect">
+            <a:avLst/>
+          </a:prstGeom>
+          <a:noFill/>
+          <a:ln/>
+        </p:spPr>
+        <p:txBody>
+          <a:bodyPr wrap="square" lIns="254" tIns="254" rIns="254" bIns="254" rtlCol="0" anchor="t">
+            <a:normAutofit/>
+          </a:bodyPr>
+          <a:lstStyle/>
+          <a:p>
+            <a:r>
+              <a:rPr lang="en-US" sz="1380" dirty="0">
+                <a:solidFill>
+                  <a:srgbClr val="17364A"/>
+                </a:solidFill>
+                <a:latin typeface="Aptos" pitchFamily="34" charset="0"/>
+                <a:ea typeface="Aptos" pitchFamily="34" charset="-122"/>
+                <a:cs typeface="Aptos" pitchFamily="34" charset="-120"/>
+              </a:rPr>
+              <a:t>1.</a:t>
+            </a:r>
+            <a:endParaRPr lang="en-US" sz="1380" dirty="0"/>
+          </a:p>
+          <a:p>
+            <a:r>
+              <a:rPr lang="en-US" sz="1380" dirty="0">
+                <a:solidFill>
+                  <a:srgbClr val="17364A"/>
+                </a:solidFill>
+                <a:latin typeface="Aptos" pitchFamily="34" charset="0"/>
+                <a:ea typeface="Aptos" pitchFamily="34" charset="-122"/>
+                <a:cs typeface="Aptos" pitchFamily="34" charset="-120"/>
+              </a:rPr>
+              <a:t>What is AI audit readiness?</a:t>
+            </a:r>
+            <a:endParaRPr lang="en-US" sz="1380" dirty="0"/>
+          </a:p>
+          <a:p>
+            <a:r>
+              <a:rPr lang="en-US" sz="1380" dirty="0">
+                <a:solidFill>
+                  <a:srgbClr val="17364A"/>
+                </a:solidFill>
+                <a:latin typeface="Aptos" pitchFamily="34" charset="0"/>
+                <a:ea typeface="Aptos" pitchFamily="34" charset="-122"/>
+                <a:cs typeface="Aptos" pitchFamily="34" charset="-120"/>
+              </a:rPr>
+              <a:t>2.</a:t>
+            </a:r>
+            <a:endParaRPr lang="en-US" sz="1380" dirty="0"/>
+          </a:p>
+        </p:txBody>
       </p:sp>
       <p:sp>
         <p:nvSpPr>
           <p:cNvPr id="16" name="Shape 14"/>
-          <p:cNvSpPr/>
-          <p:nvPr/>
-        </p:nvSpPr>
-        <p:spPr>
-          <a:xfrm>
-            <a:off x="9198864" y="4206240"/>
-            <a:ext cx="347472" cy="347472"/>
-          </a:xfrm>
-          <a:prstGeom prst="ellipse">
-            <a:avLst/>
-          </a:prstGeom>
-          <a:solidFill>
-            <a:srgbClr val="2F8A28"/>
-          </a:solidFill>
-          <a:ln w="12700">
-            <a:solidFill>
-              <a:srgbClr val="2F8A28"/>
-            </a:solidFill>
-            <a:prstDash val="solid"/>
-          </a:ln>
-        </p:spPr>
-      </p:sp>
-      <p:sp>
-        <p:nvSpPr>
-          <p:cNvPr id="17" name="Text 15"/>
-          <p:cNvSpPr/>
-          <p:nvPr/>
-        </p:nvSpPr>
-        <p:spPr>
-          <a:xfrm>
-            <a:off x="7909560" y="3977640"/>
-            <a:ext cx="2926080" cy="182880"/>
-          </a:xfrm>
-          <a:prstGeom prst="rect">
-            <a:avLst/>
-          </a:prstGeom>
-          <a:noFill/>
-          <a:ln/>
-        </p:spPr>
-        <p:txBody>
-          <a:bodyPr wrap="square" lIns="0" tIns="0" rIns="0" bIns="0" rtlCol="0" anchor="ctr"/>
-          <a:lstStyle/>
-          <a:p>
-            <a:pPr algn="ctr" indent="0" marL="0">
-              <a:buNone/>
-            </a:pPr>
-            <a:r>
-              <a:rPr lang="en-US" sz="1000" dirty="0">
-                <a:solidFill>
-                  <a:srgbClr val="003A63"/>
-                </a:solidFill>
-                <a:latin typeface="Aptos" pitchFamily="34" charset="0"/>
-                <a:ea typeface="Aptos" pitchFamily="34" charset="-122"/>
-                <a:cs typeface="Aptos" pitchFamily="34" charset="-120"/>
-              </a:rPr>
-              <a:t>Concept to action</a:t>
-            </a:r>
-            <a:endParaRPr lang="en-US" sz="1000" dirty="0"/>
-          </a:p>
-        </p:txBody>
-      </p:sp>
-      <p:sp>
-        <p:nvSpPr>
-          <p:cNvPr id="18" name="Shape 16"/>
           <p:cNvSpPr/>
           <p:nvPr/>
         </p:nvSpPr>
@@ -12168,7 +11884,7 @@
       </p:sp>
       <p:sp>
         <p:nvSpPr>
-          <p:cNvPr id="19" name="Text 17"/>
+          <p:cNvPr id="17" name="Text 15"/>
           <p:cNvSpPr/>
           <p:nvPr/>
         </p:nvSpPr>
@@ -12207,7 +11923,7 @@
       </p:sp>
       <p:sp>
         <p:nvSpPr>
-          <p:cNvPr id="20" name="Text 18"/>
+          <p:cNvPr id="18" name="Text 16"/>
           <p:cNvSpPr/>
           <p:nvPr/>
         </p:nvSpPr>
@@ -12715,13 +12431,11 @@
             </a:avLst>
           </a:prstGeom>
           <a:solidFill>
-            <a:srgbClr val="FFFFFF">
-              <a:alpha val="88000"/>
-            </a:srgbClr>
+            <a:srgbClr val="FFFFFF"/>
           </a:solidFill>
           <a:ln w="12700">
             <a:solidFill>
-              <a:srgbClr val="D6E8F2"/>
+              <a:srgbClr val="B9D7E6"/>
             </a:solidFill>
             <a:prstDash val="solid"/>
           </a:ln>
@@ -12729,119 +12443,112 @@
       </p:sp>
       <p:sp>
         <p:nvSpPr>
-          <p:cNvPr id="14" name="Shape 12"/>
-          <p:cNvSpPr/>
-          <p:nvPr/>
-        </p:nvSpPr>
-        <p:spPr>
-          <a:xfrm>
-            <a:off x="8074152" y="3291840"/>
-            <a:ext cx="2596896" cy="749808"/>
-          </a:xfrm>
-          <a:prstGeom prst="rect">
-            <a:avLst/>
-          </a:prstGeom>
-          <a:solidFill>
-            <a:srgbClr val="EAF6F8"/>
-          </a:solidFill>
-          <a:ln w="12700">
-            <a:solidFill>
-              <a:srgbClr val="8ABBD8"/>
-            </a:solidFill>
-            <a:prstDash val="solid"/>
-          </a:ln>
-        </p:spPr>
-      </p:sp>
-      <p:sp>
-        <p:nvSpPr>
-          <p:cNvPr id="15" name="Shape 13"/>
-          <p:cNvSpPr/>
-          <p:nvPr/>
-        </p:nvSpPr>
-        <p:spPr>
-          <a:xfrm>
-            <a:off x="8202168" y="3721608"/>
-            <a:ext cx="2340864" cy="0"/>
-          </a:xfrm>
-          <a:prstGeom prst="line">
-            <a:avLst/>
-          </a:prstGeom>
-          <a:noFill/>
-          <a:ln w="19050">
-            <a:solidFill>
-              <a:srgbClr val="0068B7"/>
-            </a:solidFill>
-            <a:prstDash val="solid"/>
-          </a:ln>
-        </p:spPr>
+          <p:cNvPr id="14" name="Text 12"/>
+          <p:cNvSpPr/>
+          <p:nvPr/>
+        </p:nvSpPr>
+        <p:spPr>
+          <a:xfrm>
+            <a:off x="7799832" y="2935224"/>
+            <a:ext cx="3145536" cy="256032"/>
+          </a:xfrm>
+          <a:prstGeom prst="rect">
+            <a:avLst/>
+          </a:prstGeom>
+          <a:noFill/>
+          <a:ln/>
+        </p:spPr>
+        <p:txBody>
+          <a:bodyPr wrap="square" lIns="0" tIns="0" rIns="0" bIns="0" rtlCol="0" anchor="ctr"/>
+          <a:lstStyle/>
+          <a:p>
+            <a:pPr indent="0" marL="0">
+              <a:buNone/>
+            </a:pPr>
+            <a:r>
+              <a:rPr lang="en-US" sz="1300" b="1" dirty="0">
+                <a:solidFill>
+                  <a:srgbClr val="0068B7"/>
+                </a:solidFill>
+                <a:latin typeface="Aptos" pitchFamily="34" charset="0"/>
+                <a:ea typeface="Aptos" pitchFamily="34" charset="-122"/>
+                <a:cs typeface="Aptos" pitchFamily="34" charset="-120"/>
+              </a:rPr>
+              <a:t>Concept checkpoints</a:t>
+            </a:r>
+            <a:endParaRPr lang="en-US" sz="1300" dirty="0"/>
+          </a:p>
+        </p:txBody>
+      </p:sp>
+      <p:sp>
+        <p:nvSpPr>
+          <p:cNvPr id="15" name="Text 13"/>
+          <p:cNvSpPr/>
+          <p:nvPr/>
+        </p:nvSpPr>
+        <p:spPr>
+          <a:xfrm>
+            <a:off x="7818120" y="3300984"/>
+            <a:ext cx="3090672" cy="877824"/>
+          </a:xfrm>
+          <a:prstGeom prst="rect">
+            <a:avLst/>
+          </a:prstGeom>
+          <a:noFill/>
+          <a:ln/>
+        </p:spPr>
+        <p:txBody>
+          <a:bodyPr wrap="square" lIns="254" tIns="254" rIns="254" bIns="254" rtlCol="0" anchor="t">
+            <a:normAutofit/>
+          </a:bodyPr>
+          <a:lstStyle/>
+          <a:p>
+            <a:r>
+              <a:rPr lang="en-US" sz="1380" dirty="0">
+                <a:solidFill>
+                  <a:srgbClr val="17364A"/>
+                </a:solidFill>
+                <a:latin typeface="Aptos" pitchFamily="34" charset="0"/>
+                <a:ea typeface="Aptos" pitchFamily="34" charset="-122"/>
+                <a:cs typeface="Aptos" pitchFamily="34" charset="-120"/>
+              </a:rPr>
+              <a:t>NIST Artificial Intelligence Risk Management Framework:.</a:t>
+            </a:r>
+            <a:endParaRPr lang="en-US" sz="1380" dirty="0"/>
+          </a:p>
+          <a:p>
+            <a:r>
+              <a:rPr lang="en-US" sz="1380" dirty="0">
+                <a:solidFill>
+                  <a:srgbClr val="17364A"/>
+                </a:solidFill>
+                <a:latin typeface="Aptos" pitchFamily="34" charset="0"/>
+                <a:ea typeface="Aptos" pitchFamily="34" charset="-122"/>
+                <a:cs typeface="Aptos" pitchFamily="34" charset="-120"/>
+              </a:rPr>
+              <a:t>OWASP guidance for LLM application security</a:t>
+            </a:r>
+            <a:endParaRPr lang="en-US" sz="1380" dirty="0"/>
+          </a:p>
+          <a:p>
+            <a:r>
+              <a:rPr lang="en-US" sz="1380" dirty="0">
+                <a:solidFill>
+                  <a:srgbClr val="17364A"/>
+                </a:solidFill>
+                <a:latin typeface="Aptos" pitchFamily="34" charset="0"/>
+                <a:ea typeface="Aptos" pitchFamily="34" charset="-122"/>
+                <a:cs typeface="Aptos" pitchFamily="34" charset="-120"/>
+              </a:rPr>
+              <a:t>Agency policies for privacy, cybersecurity, records, procurement, accessibility, and.</a:t>
+            </a:r>
+            <a:endParaRPr lang="en-US" sz="1380" dirty="0"/>
+          </a:p>
+        </p:txBody>
       </p:sp>
       <p:sp>
         <p:nvSpPr>
           <p:cNvPr id="16" name="Shape 14"/>
-          <p:cNvSpPr/>
-          <p:nvPr/>
-        </p:nvSpPr>
-        <p:spPr>
-          <a:xfrm>
-            <a:off x="9198864" y="4206240"/>
-            <a:ext cx="347472" cy="347472"/>
-          </a:xfrm>
-          <a:prstGeom prst="ellipse">
-            <a:avLst/>
-          </a:prstGeom>
-          <a:solidFill>
-            <a:srgbClr val="2F8A28"/>
-          </a:solidFill>
-          <a:ln w="12700">
-            <a:solidFill>
-              <a:srgbClr val="2F8A28"/>
-            </a:solidFill>
-            <a:prstDash val="solid"/>
-          </a:ln>
-        </p:spPr>
-      </p:sp>
-      <p:sp>
-        <p:nvSpPr>
-          <p:cNvPr id="17" name="Text 15"/>
-          <p:cNvSpPr/>
-          <p:nvPr/>
-        </p:nvSpPr>
-        <p:spPr>
-          <a:xfrm>
-            <a:off x="7909560" y="3977640"/>
-            <a:ext cx="2926080" cy="182880"/>
-          </a:xfrm>
-          <a:prstGeom prst="rect">
-            <a:avLst/>
-          </a:prstGeom>
-          <a:noFill/>
-          <a:ln/>
-        </p:spPr>
-        <p:txBody>
-          <a:bodyPr wrap="square" lIns="0" tIns="0" rIns="0" bIns="0" rtlCol="0" anchor="ctr"/>
-          <a:lstStyle/>
-          <a:p>
-            <a:pPr algn="ctr" indent="0" marL="0">
-              <a:buNone/>
-            </a:pPr>
-            <a:r>
-              <a:rPr lang="en-US" sz="1000" dirty="0">
-                <a:solidFill>
-                  <a:srgbClr val="003A63"/>
-                </a:solidFill>
-                <a:latin typeface="Aptos" pitchFamily="34" charset="0"/>
-                <a:ea typeface="Aptos" pitchFamily="34" charset="-122"/>
-                <a:cs typeface="Aptos" pitchFamily="34" charset="-120"/>
-              </a:rPr>
-              <a:t>Concept to action</a:t>
-            </a:r>
-            <a:endParaRPr lang="en-US" sz="1000" dirty="0"/>
-          </a:p>
-        </p:txBody>
-      </p:sp>
-      <p:sp>
-        <p:nvSpPr>
-          <p:cNvPr id="18" name="Shape 16"/>
           <p:cNvSpPr/>
           <p:nvPr/>
         </p:nvSpPr>
@@ -12868,7 +12575,7 @@
       </p:sp>
       <p:sp>
         <p:nvSpPr>
-          <p:cNvPr id="19" name="Text 17"/>
+          <p:cNvPr id="17" name="Text 15"/>
           <p:cNvSpPr/>
           <p:nvPr/>
         </p:nvSpPr>
@@ -12907,7 +12614,7 @@
       </p:sp>
       <p:sp>
         <p:nvSpPr>
-          <p:cNvPr id="20" name="Text 18"/>
+          <p:cNvPr id="18" name="Text 16"/>
           <p:cNvSpPr/>
           <p:nvPr/>
         </p:nvSpPr>
@@ -13387,13 +13094,11 @@
             </a:avLst>
           </a:prstGeom>
           <a:solidFill>
-            <a:srgbClr val="FFFFFF">
-              <a:alpha val="88000"/>
-            </a:srgbClr>
+            <a:srgbClr val="FFFFFF"/>
           </a:solidFill>
           <a:ln w="12700">
             <a:solidFill>
-              <a:srgbClr val="D6E8F2"/>
+              <a:srgbClr val="B9D7E6"/>
             </a:solidFill>
             <a:prstDash val="solid"/>
           </a:ln>
@@ -13401,119 +13106,84 @@
       </p:sp>
       <p:sp>
         <p:nvSpPr>
-          <p:cNvPr id="14" name="Shape 12"/>
-          <p:cNvSpPr/>
-          <p:nvPr/>
-        </p:nvSpPr>
-        <p:spPr>
-          <a:xfrm>
-            <a:off x="8074152" y="3291840"/>
-            <a:ext cx="2596896" cy="749808"/>
-          </a:xfrm>
-          <a:prstGeom prst="rect">
-            <a:avLst/>
-          </a:prstGeom>
-          <a:solidFill>
-            <a:srgbClr val="EAF6F8"/>
-          </a:solidFill>
-          <a:ln w="12700">
-            <a:solidFill>
-              <a:srgbClr val="8ABBD8"/>
-            </a:solidFill>
-            <a:prstDash val="solid"/>
-          </a:ln>
-        </p:spPr>
-      </p:sp>
-      <p:sp>
-        <p:nvSpPr>
-          <p:cNvPr id="15" name="Shape 13"/>
-          <p:cNvSpPr/>
-          <p:nvPr/>
-        </p:nvSpPr>
-        <p:spPr>
-          <a:xfrm>
-            <a:off x="8202168" y="3721608"/>
-            <a:ext cx="2340864" cy="0"/>
-          </a:xfrm>
-          <a:prstGeom prst="line">
-            <a:avLst/>
-          </a:prstGeom>
-          <a:noFill/>
-          <a:ln w="19050">
-            <a:solidFill>
-              <a:srgbClr val="0068B7"/>
-            </a:solidFill>
-            <a:prstDash val="solid"/>
-          </a:ln>
-        </p:spPr>
+          <p:cNvPr id="14" name="Text 12"/>
+          <p:cNvSpPr/>
+          <p:nvPr/>
+        </p:nvSpPr>
+        <p:spPr>
+          <a:xfrm>
+            <a:off x="7799832" y="2935224"/>
+            <a:ext cx="3145536" cy="256032"/>
+          </a:xfrm>
+          <a:prstGeom prst="rect">
+            <a:avLst/>
+          </a:prstGeom>
+          <a:noFill/>
+          <a:ln/>
+        </p:spPr>
+        <p:txBody>
+          <a:bodyPr wrap="square" lIns="0" tIns="0" rIns="0" bIns="0" rtlCol="0" anchor="ctr"/>
+          <a:lstStyle/>
+          <a:p>
+            <a:pPr indent="0" marL="0">
+              <a:buNone/>
+            </a:pPr>
+            <a:r>
+              <a:rPr lang="en-US" sz="1300" b="1" dirty="0">
+                <a:solidFill>
+                  <a:srgbClr val="0068B7"/>
+                </a:solidFill>
+                <a:latin typeface="Aptos" pitchFamily="34" charset="0"/>
+                <a:ea typeface="Aptos" pitchFamily="34" charset="-122"/>
+                <a:cs typeface="Aptos" pitchFamily="34" charset="-120"/>
+              </a:rPr>
+              <a:t>Concept checkpoints</a:t>
+            </a:r>
+            <a:endParaRPr lang="en-US" sz="1300" dirty="0"/>
+          </a:p>
+        </p:txBody>
+      </p:sp>
+      <p:sp>
+        <p:nvSpPr>
+          <p:cNvPr id="15" name="Text 13"/>
+          <p:cNvSpPr/>
+          <p:nvPr/>
+        </p:nvSpPr>
+        <p:spPr>
+          <a:xfrm>
+            <a:off x="7818120" y="3300984"/>
+            <a:ext cx="3090672" cy="877824"/>
+          </a:xfrm>
+          <a:prstGeom prst="rect">
+            <a:avLst/>
+          </a:prstGeom>
+          <a:noFill/>
+          <a:ln/>
+        </p:spPr>
+        <p:txBody>
+          <a:bodyPr wrap="square" lIns="254" tIns="254" rIns="254" bIns="254" rtlCol="0" anchor="t">
+            <a:normAutofit/>
+          </a:bodyPr>
+          <a:lstStyle/>
+          <a:p>
+            <a:r>
+              <a:rPr lang="en-US" sz="1380" dirty="0">
+                <a:solidFill>
+                  <a:srgbClr val="17364A"/>
+                </a:solidFill>
+                <a:latin typeface="Aptos" pitchFamily="34" charset="0"/>
+                <a:ea typeface="Aptos" pitchFamily="34" charset="-122"/>
+                <a:cs typeface="Aptos" pitchFamily="34" charset="-120"/>
+              </a:rPr>
+              <a:t>Relevant public health program SOPs, data governance documentation, and implementation plans</a:t>
+            </a:r>
+            <a:endParaRPr lang="en-US" sz="1380" dirty="0"/>
+          </a:p>
+        </p:txBody>
       </p:sp>
       <p:sp>
         <p:nvSpPr>
           <p:cNvPr id="16" name="Shape 14"/>
-          <p:cNvSpPr/>
-          <p:nvPr/>
-        </p:nvSpPr>
-        <p:spPr>
-          <a:xfrm>
-            <a:off x="9198864" y="4206240"/>
-            <a:ext cx="347472" cy="347472"/>
-          </a:xfrm>
-          <a:prstGeom prst="ellipse">
-            <a:avLst/>
-          </a:prstGeom>
-          <a:solidFill>
-            <a:srgbClr val="2F8A28"/>
-          </a:solidFill>
-          <a:ln w="12700">
-            <a:solidFill>
-              <a:srgbClr val="2F8A28"/>
-            </a:solidFill>
-            <a:prstDash val="solid"/>
-          </a:ln>
-        </p:spPr>
-      </p:sp>
-      <p:sp>
-        <p:nvSpPr>
-          <p:cNvPr id="17" name="Text 15"/>
-          <p:cNvSpPr/>
-          <p:nvPr/>
-        </p:nvSpPr>
-        <p:spPr>
-          <a:xfrm>
-            <a:off x="7909560" y="3977640"/>
-            <a:ext cx="2926080" cy="182880"/>
-          </a:xfrm>
-          <a:prstGeom prst="rect">
-            <a:avLst/>
-          </a:prstGeom>
-          <a:noFill/>
-          <a:ln/>
-        </p:spPr>
-        <p:txBody>
-          <a:bodyPr wrap="square" lIns="0" tIns="0" rIns="0" bIns="0" rtlCol="0" anchor="ctr"/>
-          <a:lstStyle/>
-          <a:p>
-            <a:pPr algn="ctr" indent="0" marL="0">
-              <a:buNone/>
-            </a:pPr>
-            <a:r>
-              <a:rPr lang="en-US" sz="1000" dirty="0">
-                <a:solidFill>
-                  <a:srgbClr val="003A63"/>
-                </a:solidFill>
-                <a:latin typeface="Aptos" pitchFamily="34" charset="0"/>
-                <a:ea typeface="Aptos" pitchFamily="34" charset="-122"/>
-                <a:cs typeface="Aptos" pitchFamily="34" charset="-120"/>
-              </a:rPr>
-              <a:t>Concept to action</a:t>
-            </a:r>
-            <a:endParaRPr lang="en-US" sz="1000" dirty="0"/>
-          </a:p>
-        </p:txBody>
-      </p:sp>
-      <p:sp>
-        <p:nvSpPr>
-          <p:cNvPr id="18" name="Shape 16"/>
           <p:cNvSpPr/>
           <p:nvPr/>
         </p:nvSpPr>
@@ -13540,7 +13210,7 @@
       </p:sp>
       <p:sp>
         <p:nvSpPr>
-          <p:cNvPr id="19" name="Text 17"/>
+          <p:cNvPr id="17" name="Text 15"/>
           <p:cNvSpPr/>
           <p:nvPr/>
         </p:nvSpPr>
@@ -13579,7 +13249,7 @@
       </p:sp>
       <p:sp>
         <p:nvSpPr>
-          <p:cNvPr id="20" name="Text 18"/>
+          <p:cNvPr id="18" name="Text 16"/>
           <p:cNvSpPr/>
           <p:nvPr/>
         </p:nvSpPr>
@@ -14092,20 +13762,20 @@
         </p:nvSpPr>
         <p:spPr>
           <a:xfrm>
-            <a:off x="7818120" y="3977640"/>
-            <a:ext cx="972312" cy="749808"/>
+            <a:off x="8046720" y="3794760"/>
+            <a:ext cx="3063240" cy="1600200"/>
           </a:xfrm>
           <a:prstGeom prst="roundRect">
             <a:avLst>
-              <a:gd name="adj" fmla="val 14634"/>
+              <a:gd name="adj" fmla="val 6857"/>
             </a:avLst>
           </a:prstGeom>
           <a:solidFill>
-            <a:srgbClr val="0068B7"/>
+            <a:srgbClr val="FFFFFF"/>
           </a:solidFill>
           <a:ln w="12700">
             <a:solidFill>
-              <a:srgbClr val="0068B7"/>
+              <a:srgbClr val="B9D7E6"/>
             </a:solidFill>
             <a:prstDash val="solid"/>
           </a:ln>
@@ -14119,172 +13789,100 @@
         </p:nvSpPr>
         <p:spPr>
           <a:xfrm>
-            <a:off x="7891272" y="4169664"/>
-            <a:ext cx="826008" cy="310896"/>
-          </a:xfrm>
-          <a:prstGeom prst="rect">
-            <a:avLst/>
-          </a:prstGeom>
-          <a:noFill/>
-          <a:ln/>
-        </p:spPr>
-        <p:txBody>
-          <a:bodyPr wrap="square" lIns="0" tIns="0" rIns="0" bIns="0" rtlCol="0" anchor="ctr">
+            <a:off x="8211312" y="3941064"/>
+            <a:ext cx="2734056" cy="256032"/>
+          </a:xfrm>
+          <a:prstGeom prst="rect">
+            <a:avLst/>
+          </a:prstGeom>
+          <a:noFill/>
+          <a:ln/>
+        </p:spPr>
+        <p:txBody>
+          <a:bodyPr wrap="square" lIns="0" tIns="0" rIns="0" bIns="0" rtlCol="0" anchor="ctr"/>
+          <a:lstStyle/>
+          <a:p>
+            <a:pPr indent="0" marL="0">
+              <a:buNone/>
+            </a:pPr>
+            <a:r>
+              <a:rPr lang="en-US" sz="1300" b="1" dirty="0">
+                <a:solidFill>
+                  <a:srgbClr val="0068B7"/>
+                </a:solidFill>
+                <a:latin typeface="Aptos" pitchFamily="34" charset="0"/>
+                <a:ea typeface="Aptos" pitchFamily="34" charset="-122"/>
+                <a:cs typeface="Aptos" pitchFamily="34" charset="-120"/>
+              </a:rPr>
+              <a:t>Use the play links to</a:t>
+            </a:r>
+            <a:endParaRPr lang="en-US" sz="1300" dirty="0"/>
+          </a:p>
+        </p:txBody>
+      </p:sp>
+      <p:sp>
+        <p:nvSpPr>
+          <p:cNvPr id="15" name="Text 13"/>
+          <p:cNvSpPr/>
+          <p:nvPr/>
+        </p:nvSpPr>
+        <p:spPr>
+          <a:xfrm>
+            <a:off x="8229600" y="4306824"/>
+            <a:ext cx="2679192" cy="941832"/>
+          </a:xfrm>
+          <a:prstGeom prst="rect">
+            <a:avLst/>
+          </a:prstGeom>
+          <a:noFill/>
+          <a:ln/>
+        </p:spPr>
+        <p:txBody>
+          <a:bodyPr wrap="square" lIns="254" tIns="254" rIns="254" bIns="254" rtlCol="0" anchor="t">
             <a:normAutofit/>
           </a:bodyPr>
           <a:lstStyle/>
           <a:p>
-            <a:pPr algn="ctr" indent="0" marL="0">
-              <a:buNone/>
-            </a:pPr>
-            <a:r>
-              <a:rPr lang="en-US" sz="1500" b="1" dirty="0">
-                <a:solidFill>
-                  <a:srgbClr val="FFFFFF"/>
-                </a:solidFill>
-                <a:latin typeface="Aptos" pitchFamily="34" charset="0"/>
-                <a:ea typeface="Aptos" pitchFamily="34" charset="-122"/>
-                <a:cs typeface="Aptos" pitchFamily="34" charset="-120"/>
-              </a:rPr>
-              <a:t>Lesson</a:t>
-            </a:r>
-            <a:endParaRPr lang="en-US" sz="1500" dirty="0"/>
-          </a:p>
-        </p:txBody>
-      </p:sp>
-      <p:sp>
-        <p:nvSpPr>
-          <p:cNvPr id="15" name="Shape 13"/>
-          <p:cNvSpPr/>
-          <p:nvPr/>
-        </p:nvSpPr>
-        <p:spPr>
-          <a:xfrm>
-            <a:off x="9046464" y="3977640"/>
-            <a:ext cx="972312" cy="749808"/>
-          </a:xfrm>
-          <a:prstGeom prst="roundRect">
-            <a:avLst>
-              <a:gd name="adj" fmla="val 14634"/>
-            </a:avLst>
-          </a:prstGeom>
-          <a:solidFill>
-            <a:srgbClr val="2F8A28"/>
-          </a:solidFill>
-          <a:ln w="12700">
-            <a:solidFill>
-              <a:srgbClr val="2F8A28"/>
-            </a:solidFill>
-            <a:prstDash val="solid"/>
-          </a:ln>
-        </p:spPr>
-      </p:sp>
-      <p:sp>
-        <p:nvSpPr>
-          <p:cNvPr id="16" name="Text 14"/>
-          <p:cNvSpPr/>
-          <p:nvPr/>
-        </p:nvSpPr>
-        <p:spPr>
-          <a:xfrm>
-            <a:off x="9119616" y="4169664"/>
-            <a:ext cx="826008" cy="310896"/>
-          </a:xfrm>
-          <a:prstGeom prst="rect">
-            <a:avLst/>
-          </a:prstGeom>
-          <a:noFill/>
-          <a:ln/>
-        </p:spPr>
-        <p:txBody>
-          <a:bodyPr wrap="square" lIns="0" tIns="0" rIns="0" bIns="0" rtlCol="0" anchor="ctr">
-            <a:normAutofit/>
-          </a:bodyPr>
-          <a:lstStyle/>
-          <a:p>
-            <a:pPr algn="ctr" indent="0" marL="0">
-              <a:buNone/>
-            </a:pPr>
-            <a:r>
-              <a:rPr lang="en-US" sz="1500" b="1" dirty="0">
-                <a:solidFill>
-                  <a:srgbClr val="FFFFFF"/>
-                </a:solidFill>
-                <a:latin typeface="Aptos" pitchFamily="34" charset="0"/>
-                <a:ea typeface="Aptos" pitchFamily="34" charset="-122"/>
-                <a:cs typeface="Aptos" pitchFamily="34" charset="-120"/>
-              </a:rPr>
-              <a:t>Plays</a:t>
-            </a:r>
-            <a:endParaRPr lang="en-US" sz="1500" dirty="0"/>
-          </a:p>
-        </p:txBody>
-      </p:sp>
-      <p:sp>
-        <p:nvSpPr>
-          <p:cNvPr id="17" name="Shape 15"/>
-          <p:cNvSpPr/>
-          <p:nvPr/>
-        </p:nvSpPr>
-        <p:spPr>
-          <a:xfrm>
-            <a:off x="10274808" y="3977640"/>
-            <a:ext cx="972312" cy="749808"/>
-          </a:xfrm>
-          <a:prstGeom prst="roundRect">
-            <a:avLst>
-              <a:gd name="adj" fmla="val 14634"/>
-            </a:avLst>
-          </a:prstGeom>
-          <a:solidFill>
-            <a:srgbClr val="6A4CA3"/>
-          </a:solidFill>
-          <a:ln w="12700">
-            <a:solidFill>
-              <a:srgbClr val="6A4CA3"/>
-            </a:solidFill>
-            <a:prstDash val="solid"/>
-          </a:ln>
-        </p:spPr>
-      </p:sp>
-      <p:sp>
-        <p:nvSpPr>
-          <p:cNvPr id="18" name="Text 16"/>
-          <p:cNvSpPr/>
-          <p:nvPr/>
-        </p:nvSpPr>
-        <p:spPr>
-          <a:xfrm>
-            <a:off x="10347960" y="4169664"/>
-            <a:ext cx="826008" cy="310896"/>
-          </a:xfrm>
-          <a:prstGeom prst="rect">
-            <a:avLst/>
-          </a:prstGeom>
-          <a:noFill/>
-          <a:ln/>
-        </p:spPr>
-        <p:txBody>
-          <a:bodyPr wrap="square" lIns="0" tIns="0" rIns="0" bIns="0" rtlCol="0" anchor="ctr">
-            <a:normAutofit/>
-          </a:bodyPr>
-          <a:lstStyle/>
-          <a:p>
-            <a:pPr algn="ctr" indent="0" marL="0">
-              <a:buNone/>
-            </a:pPr>
-            <a:r>
-              <a:rPr lang="en-US" sz="1500" b="1" dirty="0">
-                <a:solidFill>
-                  <a:srgbClr val="FFFFFF"/>
-                </a:solidFill>
-                <a:latin typeface="Aptos" pitchFamily="34" charset="0"/>
-                <a:ea typeface="Aptos" pitchFamily="34" charset="-122"/>
-                <a:cs typeface="Aptos" pitchFamily="34" charset="-120"/>
-              </a:rPr>
-              <a:t>Action</a:t>
-            </a:r>
-            <a:endParaRPr lang="en-US" sz="1500" dirty="0"/>
+            <a:r>
+              <a:rPr lang="en-US" sz="1380" dirty="0">
+                <a:solidFill>
+                  <a:srgbClr val="17364A"/>
+                </a:solidFill>
+                <a:latin typeface="Aptos" pitchFamily="34" charset="0"/>
+                <a:ea typeface="Aptos" pitchFamily="34" charset="-122"/>
+                <a:cs typeface="Aptos" pitchFamily="34" charset="-120"/>
+              </a:rPr>
+              <a:t>Locate the decision point in the playbook sequence.</a:t>
+            </a:r>
+            <a:endParaRPr lang="en-US" sz="1380" dirty="0"/>
+          </a:p>
+          <a:p>
+            <a:r>
+              <a:rPr lang="en-US" sz="1380" dirty="0">
+                <a:solidFill>
+                  <a:srgbClr val="17364A"/>
+                </a:solidFill>
+                <a:latin typeface="Aptos" pitchFamily="34" charset="0"/>
+                <a:ea typeface="Aptos" pitchFamily="34" charset="-122"/>
+                <a:cs typeface="Aptos" pitchFamily="34" charset="-120"/>
+              </a:rPr>
+              <a:t>Identify who should participate in the work.</a:t>
+            </a:r>
+            <a:endParaRPr lang="en-US" sz="1380" dirty="0"/>
+          </a:p>
+          <a:p>
+            <a:r>
+              <a:rPr lang="en-US" sz="1380" dirty="0">
+                <a:solidFill>
+                  <a:srgbClr val="17364A"/>
+                </a:solidFill>
+                <a:latin typeface="Aptos" pitchFamily="34" charset="0"/>
+                <a:ea typeface="Aptos" pitchFamily="34" charset="-122"/>
+                <a:cs typeface="Aptos" pitchFamily="34" charset="-120"/>
+              </a:rPr>
+              <a:t>Document the review, approval, or implementation step.</a:t>
+            </a:r>
+            <a:endParaRPr lang="en-US" sz="1380" dirty="0"/>
           </a:p>
         </p:txBody>
       </p:sp>
@@ -14762,20 +14360,20 @@
         </p:nvSpPr>
         <p:spPr>
           <a:xfrm>
-            <a:off x="7818120" y="3977640"/>
-            <a:ext cx="972312" cy="749808"/>
+            <a:off x="8046720" y="3794760"/>
+            <a:ext cx="3063240" cy="1600200"/>
           </a:xfrm>
           <a:prstGeom prst="roundRect">
             <a:avLst>
-              <a:gd name="adj" fmla="val 14634"/>
+              <a:gd name="adj" fmla="val 6857"/>
             </a:avLst>
           </a:prstGeom>
           <a:solidFill>
-            <a:srgbClr val="0068B7"/>
+            <a:srgbClr val="FFFFFF"/>
           </a:solidFill>
           <a:ln w="12700">
             <a:solidFill>
-              <a:srgbClr val="0068B7"/>
+              <a:srgbClr val="B9D7E6"/>
             </a:solidFill>
             <a:prstDash val="solid"/>
           </a:ln>
@@ -14789,172 +14387,100 @@
         </p:nvSpPr>
         <p:spPr>
           <a:xfrm>
-            <a:off x="7891272" y="4169664"/>
-            <a:ext cx="826008" cy="310896"/>
-          </a:xfrm>
-          <a:prstGeom prst="rect">
-            <a:avLst/>
-          </a:prstGeom>
-          <a:noFill/>
-          <a:ln/>
-        </p:spPr>
-        <p:txBody>
-          <a:bodyPr wrap="square" lIns="0" tIns="0" rIns="0" bIns="0" rtlCol="0" anchor="ctr">
+            <a:off x="8211312" y="3941064"/>
+            <a:ext cx="2734056" cy="256032"/>
+          </a:xfrm>
+          <a:prstGeom prst="rect">
+            <a:avLst/>
+          </a:prstGeom>
+          <a:noFill/>
+          <a:ln/>
+        </p:spPr>
+        <p:txBody>
+          <a:bodyPr wrap="square" lIns="0" tIns="0" rIns="0" bIns="0" rtlCol="0" anchor="ctr"/>
+          <a:lstStyle/>
+          <a:p>
+            <a:pPr indent="0" marL="0">
+              <a:buNone/>
+            </a:pPr>
+            <a:r>
+              <a:rPr lang="en-US" sz="1300" b="1" dirty="0">
+                <a:solidFill>
+                  <a:srgbClr val="0068B7"/>
+                </a:solidFill>
+                <a:latin typeface="Aptos" pitchFamily="34" charset="0"/>
+                <a:ea typeface="Aptos" pitchFamily="34" charset="-122"/>
+                <a:cs typeface="Aptos" pitchFamily="34" charset="-120"/>
+              </a:rPr>
+              <a:t>Tool selection cues</a:t>
+            </a:r>
+            <a:endParaRPr lang="en-US" sz="1300" dirty="0"/>
+          </a:p>
+        </p:txBody>
+      </p:sp>
+      <p:sp>
+        <p:nvSpPr>
+          <p:cNvPr id="15" name="Text 13"/>
+          <p:cNvSpPr/>
+          <p:nvPr/>
+        </p:nvSpPr>
+        <p:spPr>
+          <a:xfrm>
+            <a:off x="8229600" y="4306824"/>
+            <a:ext cx="2679192" cy="941832"/>
+          </a:xfrm>
+          <a:prstGeom prst="rect">
+            <a:avLst/>
+          </a:prstGeom>
+          <a:noFill/>
+          <a:ln/>
+        </p:spPr>
+        <p:txBody>
+          <a:bodyPr wrap="square" lIns="254" tIns="254" rIns="254" bIns="254" rtlCol="0" anchor="t">
             <a:normAutofit/>
           </a:bodyPr>
           <a:lstStyle/>
           <a:p>
-            <a:pPr algn="ctr" indent="0" marL="0">
-              <a:buNone/>
-            </a:pPr>
-            <a:r>
-              <a:rPr lang="en-US" sz="1500" b="1" dirty="0">
-                <a:solidFill>
-                  <a:srgbClr val="FFFFFF"/>
-                </a:solidFill>
-                <a:latin typeface="Aptos" pitchFamily="34" charset="0"/>
-                <a:ea typeface="Aptos" pitchFamily="34" charset="-122"/>
-                <a:cs typeface="Aptos" pitchFamily="34" charset="-120"/>
-              </a:rPr>
-              <a:t>Concept</a:t>
-            </a:r>
-            <a:endParaRPr lang="en-US" sz="1500" dirty="0"/>
-          </a:p>
-        </p:txBody>
-      </p:sp>
-      <p:sp>
-        <p:nvSpPr>
-          <p:cNvPr id="15" name="Shape 13"/>
-          <p:cNvSpPr/>
-          <p:nvPr/>
-        </p:nvSpPr>
-        <p:spPr>
-          <a:xfrm>
-            <a:off x="9046464" y="3977640"/>
-            <a:ext cx="972312" cy="749808"/>
-          </a:xfrm>
-          <a:prstGeom prst="roundRect">
-            <a:avLst>
-              <a:gd name="adj" fmla="val 14634"/>
-            </a:avLst>
-          </a:prstGeom>
-          <a:solidFill>
-            <a:srgbClr val="2F8A28"/>
-          </a:solidFill>
-          <a:ln w="12700">
-            <a:solidFill>
-              <a:srgbClr val="2F8A28"/>
-            </a:solidFill>
-            <a:prstDash val="solid"/>
-          </a:ln>
-        </p:spPr>
-      </p:sp>
-      <p:sp>
-        <p:nvSpPr>
-          <p:cNvPr id="16" name="Text 14"/>
-          <p:cNvSpPr/>
-          <p:nvPr/>
-        </p:nvSpPr>
-        <p:spPr>
-          <a:xfrm>
-            <a:off x="9119616" y="4169664"/>
-            <a:ext cx="826008" cy="310896"/>
-          </a:xfrm>
-          <a:prstGeom prst="rect">
-            <a:avLst/>
-          </a:prstGeom>
-          <a:noFill/>
-          <a:ln/>
-        </p:spPr>
-        <p:txBody>
-          <a:bodyPr wrap="square" lIns="0" tIns="0" rIns="0" bIns="0" rtlCol="0" anchor="ctr">
-            <a:normAutofit/>
-          </a:bodyPr>
-          <a:lstStyle/>
-          <a:p>
-            <a:pPr algn="ctr" indent="0" marL="0">
-              <a:buNone/>
-            </a:pPr>
-            <a:r>
-              <a:rPr lang="en-US" sz="1500" b="1" dirty="0">
-                <a:solidFill>
-                  <a:srgbClr val="FFFFFF"/>
-                </a:solidFill>
-                <a:latin typeface="Aptos" pitchFamily="34" charset="0"/>
-                <a:ea typeface="Aptos" pitchFamily="34" charset="-122"/>
-                <a:cs typeface="Aptos" pitchFamily="34" charset="-120"/>
-              </a:rPr>
-              <a:t>Tool</a:t>
-            </a:r>
-            <a:endParaRPr lang="en-US" sz="1500" dirty="0"/>
-          </a:p>
-        </p:txBody>
-      </p:sp>
-      <p:sp>
-        <p:nvSpPr>
-          <p:cNvPr id="17" name="Shape 15"/>
-          <p:cNvSpPr/>
-          <p:nvPr/>
-        </p:nvSpPr>
-        <p:spPr>
-          <a:xfrm>
-            <a:off x="10274808" y="3977640"/>
-            <a:ext cx="972312" cy="749808"/>
-          </a:xfrm>
-          <a:prstGeom prst="roundRect">
-            <a:avLst>
-              <a:gd name="adj" fmla="val 14634"/>
-            </a:avLst>
-          </a:prstGeom>
-          <a:solidFill>
-            <a:srgbClr val="D69A2D"/>
-          </a:solidFill>
-          <a:ln w="12700">
-            <a:solidFill>
-              <a:srgbClr val="D69A2D"/>
-            </a:solidFill>
-            <a:prstDash val="solid"/>
-          </a:ln>
-        </p:spPr>
-      </p:sp>
-      <p:sp>
-        <p:nvSpPr>
-          <p:cNvPr id="18" name="Text 16"/>
-          <p:cNvSpPr/>
-          <p:nvPr/>
-        </p:nvSpPr>
-        <p:spPr>
-          <a:xfrm>
-            <a:off x="10347960" y="4169664"/>
-            <a:ext cx="826008" cy="310896"/>
-          </a:xfrm>
-          <a:prstGeom prst="rect">
-            <a:avLst/>
-          </a:prstGeom>
-          <a:noFill/>
-          <a:ln/>
-        </p:spPr>
-        <p:txBody>
-          <a:bodyPr wrap="square" lIns="0" tIns="0" rIns="0" bIns="0" rtlCol="0" anchor="ctr">
-            <a:normAutofit/>
-          </a:bodyPr>
-          <a:lstStyle/>
-          <a:p>
-            <a:pPr algn="ctr" indent="0" marL="0">
-              <a:buNone/>
-            </a:pPr>
-            <a:r>
-              <a:rPr lang="en-US" sz="1500" b="1" dirty="0">
-                <a:solidFill>
-                  <a:srgbClr val="FFFFFF"/>
-                </a:solidFill>
-                <a:latin typeface="Aptos" pitchFamily="34" charset="0"/>
-                <a:ea typeface="Aptos" pitchFamily="34" charset="-122"/>
-                <a:cs typeface="Aptos" pitchFamily="34" charset="-120"/>
-              </a:rPr>
-              <a:t>Artifact</a:t>
-            </a:r>
-            <a:endParaRPr lang="en-US" sz="1500" dirty="0"/>
+            <a:r>
+              <a:rPr lang="en-US" sz="1380" dirty="0">
+                <a:solidFill>
+                  <a:srgbClr val="17364A"/>
+                </a:solidFill>
+                <a:latin typeface="Aptos" pitchFamily="34" charset="0"/>
+                <a:ea typeface="Aptos" pitchFamily="34" charset="-122"/>
+                <a:cs typeface="Aptos" pitchFamily="34" charset="-120"/>
+              </a:rPr>
+              <a:t>Use a tool when no comparable local process exists.</a:t>
+            </a:r>
+            <a:endParaRPr lang="en-US" sz="1380" dirty="0"/>
+          </a:p>
+          <a:p>
+            <a:r>
+              <a:rPr lang="en-US" sz="1380" dirty="0">
+                <a:solidFill>
+                  <a:srgbClr val="17364A"/>
+                </a:solidFill>
+                <a:latin typeface="Aptos" pitchFamily="34" charset="0"/>
+                <a:ea typeface="Aptos" pitchFamily="34" charset="-122"/>
+                <a:cs typeface="Aptos" pitchFamily="34" charset="-120"/>
+              </a:rPr>
+              <a:t>Adapt existing department templates when they already fit the purpose.</a:t>
+            </a:r>
+            <a:endParaRPr lang="en-US" sz="1380" dirty="0"/>
+          </a:p>
+          <a:p>
+            <a:r>
+              <a:rPr lang="en-US" sz="1380" dirty="0">
+                <a:solidFill>
+                  <a:srgbClr val="17364A"/>
+                </a:solidFill>
+                <a:latin typeface="Aptos" pitchFamily="34" charset="0"/>
+                <a:ea typeface="Aptos" pitchFamily="34" charset="-122"/>
+                <a:cs typeface="Aptos" pitchFamily="34" charset="-120"/>
+              </a:rPr>
+              <a:t>Save the completed artifact as evidence of the decision.</a:t>
+            </a:r>
+            <a:endParaRPr lang="en-US" sz="1380" dirty="0"/>
           </a:p>
         </p:txBody>
       </p:sp>
@@ -15427,13 +14953,11 @@
             </a:avLst>
           </a:prstGeom>
           <a:solidFill>
-            <a:srgbClr val="FFFFFF">
-              <a:alpha val="88000"/>
-            </a:srgbClr>
+            <a:srgbClr val="FFFFFF"/>
           </a:solidFill>
           <a:ln w="12700">
             <a:solidFill>
-              <a:srgbClr val="D6E8F2"/>
+              <a:srgbClr val="B9D7E6"/>
             </a:solidFill>
             <a:prstDash val="solid"/>
           </a:ln>
@@ -15441,119 +14965,98 @@
       </p:sp>
       <p:sp>
         <p:nvSpPr>
-          <p:cNvPr id="14" name="Shape 12"/>
-          <p:cNvSpPr/>
-          <p:nvPr/>
-        </p:nvSpPr>
-        <p:spPr>
-          <a:xfrm>
-            <a:off x="8074152" y="3291840"/>
-            <a:ext cx="2596896" cy="749808"/>
-          </a:xfrm>
-          <a:prstGeom prst="rect">
-            <a:avLst/>
-          </a:prstGeom>
-          <a:solidFill>
-            <a:srgbClr val="EAF6F8"/>
-          </a:solidFill>
-          <a:ln w="12700">
-            <a:solidFill>
-              <a:srgbClr val="8ABBD8"/>
-            </a:solidFill>
-            <a:prstDash val="solid"/>
-          </a:ln>
-        </p:spPr>
-      </p:sp>
-      <p:sp>
-        <p:nvSpPr>
-          <p:cNvPr id="15" name="Shape 13"/>
-          <p:cNvSpPr/>
-          <p:nvPr/>
-        </p:nvSpPr>
-        <p:spPr>
-          <a:xfrm>
-            <a:off x="8202168" y="3721608"/>
-            <a:ext cx="2340864" cy="0"/>
-          </a:xfrm>
-          <a:prstGeom prst="line">
-            <a:avLst/>
-          </a:prstGeom>
-          <a:noFill/>
-          <a:ln w="19050">
-            <a:solidFill>
-              <a:srgbClr val="0068B7"/>
-            </a:solidFill>
-            <a:prstDash val="solid"/>
-          </a:ln>
-        </p:spPr>
+          <p:cNvPr id="14" name="Text 12"/>
+          <p:cNvSpPr/>
+          <p:nvPr/>
+        </p:nvSpPr>
+        <p:spPr>
+          <a:xfrm>
+            <a:off x="7799832" y="2935224"/>
+            <a:ext cx="3145536" cy="256032"/>
+          </a:xfrm>
+          <a:prstGeom prst="rect">
+            <a:avLst/>
+          </a:prstGeom>
+          <a:noFill/>
+          <a:ln/>
+        </p:spPr>
+        <p:txBody>
+          <a:bodyPr wrap="square" lIns="0" tIns="0" rIns="0" bIns="0" rtlCol="0" anchor="ctr"/>
+          <a:lstStyle/>
+          <a:p>
+            <a:pPr indent="0" marL="0">
+              <a:buNone/>
+            </a:pPr>
+            <a:r>
+              <a:rPr lang="en-US" sz="1300" b="1" dirty="0">
+                <a:solidFill>
+                  <a:srgbClr val="0068B7"/>
+                </a:solidFill>
+                <a:latin typeface="Aptos" pitchFamily="34" charset="0"/>
+                <a:ea typeface="Aptos" pitchFamily="34" charset="-122"/>
+                <a:cs typeface="Aptos" pitchFamily="34" charset="-120"/>
+              </a:rPr>
+              <a:t>Concept checkpoints</a:t>
+            </a:r>
+            <a:endParaRPr lang="en-US" sz="1300" dirty="0"/>
+          </a:p>
+        </p:txBody>
+      </p:sp>
+      <p:sp>
+        <p:nvSpPr>
+          <p:cNvPr id="15" name="Text 13"/>
+          <p:cNvSpPr/>
+          <p:nvPr/>
+        </p:nvSpPr>
+        <p:spPr>
+          <a:xfrm>
+            <a:off x="7818120" y="3300984"/>
+            <a:ext cx="3090672" cy="877824"/>
+          </a:xfrm>
+          <a:prstGeom prst="rect">
+            <a:avLst/>
+          </a:prstGeom>
+          <a:noFill/>
+          <a:ln/>
+        </p:spPr>
+        <p:txBody>
+          <a:bodyPr wrap="square" lIns="254" tIns="254" rIns="254" bIns="254" rtlCol="0" anchor="t">
+            <a:normAutofit/>
+          </a:bodyPr>
+          <a:lstStyle/>
+          <a:p>
+            <a:r>
+              <a:rPr lang="en-US" sz="1380" dirty="0">
+                <a:solidFill>
+                  <a:srgbClr val="17364A"/>
+                </a:solidFill>
+                <a:latin typeface="Aptos" pitchFamily="34" charset="0"/>
+                <a:ea typeface="Aptos" pitchFamily="34" charset="-122"/>
+                <a:cs typeface="Aptos" pitchFamily="34" charset="-120"/>
+              </a:rPr>
+              <a:t>Create an AI evidence inventory for an approved or proposed use case.</a:t>
+            </a:r>
+            <a:endParaRPr lang="en-US" sz="1380" dirty="0"/>
+          </a:p>
+          <a:p>
+            <a:r>
+              <a:rPr lang="en-US" sz="1380" dirty="0">
+                <a:solidFill>
+                  <a:srgbClr val="17364A"/>
+                </a:solidFill>
+                <a:latin typeface="Aptos" pitchFamily="34" charset="0"/>
+                <a:ea typeface="Aptos" pitchFamily="34" charset="-122"/>
+                <a:cs typeface="Aptos" pitchFamily="34" charset="-120"/>
+              </a:rPr>
+              <a:t>Develop retention, ownership, and review expectations for AI governance artifacts.</a:t>
+            </a:r>
+            <a:endParaRPr lang="en-US" sz="1380" dirty="0"/>
+          </a:p>
+        </p:txBody>
       </p:sp>
       <p:sp>
         <p:nvSpPr>
           <p:cNvPr id="16" name="Shape 14"/>
-          <p:cNvSpPr/>
-          <p:nvPr/>
-        </p:nvSpPr>
-        <p:spPr>
-          <a:xfrm>
-            <a:off x="9198864" y="4206240"/>
-            <a:ext cx="347472" cy="347472"/>
-          </a:xfrm>
-          <a:prstGeom prst="ellipse">
-            <a:avLst/>
-          </a:prstGeom>
-          <a:solidFill>
-            <a:srgbClr val="2F8A28"/>
-          </a:solidFill>
-          <a:ln w="12700">
-            <a:solidFill>
-              <a:srgbClr val="2F8A28"/>
-            </a:solidFill>
-            <a:prstDash val="solid"/>
-          </a:ln>
-        </p:spPr>
-      </p:sp>
-      <p:sp>
-        <p:nvSpPr>
-          <p:cNvPr id="17" name="Text 15"/>
-          <p:cNvSpPr/>
-          <p:nvPr/>
-        </p:nvSpPr>
-        <p:spPr>
-          <a:xfrm>
-            <a:off x="7909560" y="3977640"/>
-            <a:ext cx="2926080" cy="182880"/>
-          </a:xfrm>
-          <a:prstGeom prst="rect">
-            <a:avLst/>
-          </a:prstGeom>
-          <a:noFill/>
-          <a:ln/>
-        </p:spPr>
-        <p:txBody>
-          <a:bodyPr wrap="square" lIns="0" tIns="0" rIns="0" bIns="0" rtlCol="0" anchor="ctr"/>
-          <a:lstStyle/>
-          <a:p>
-            <a:pPr algn="ctr" indent="0" marL="0">
-              <a:buNone/>
-            </a:pPr>
-            <a:r>
-              <a:rPr lang="en-US" sz="1000" dirty="0">
-                <a:solidFill>
-                  <a:srgbClr val="003A63"/>
-                </a:solidFill>
-                <a:latin typeface="Aptos" pitchFamily="34" charset="0"/>
-                <a:ea typeface="Aptos" pitchFamily="34" charset="-122"/>
-                <a:cs typeface="Aptos" pitchFamily="34" charset="-120"/>
-              </a:rPr>
-              <a:t>Concept to action</a:t>
-            </a:r>
-            <a:endParaRPr lang="en-US" sz="1000" dirty="0"/>
-          </a:p>
-        </p:txBody>
-      </p:sp>
-      <p:sp>
-        <p:nvSpPr>
-          <p:cNvPr id="18" name="Shape 16"/>
           <p:cNvSpPr/>
           <p:nvPr/>
         </p:nvSpPr>
@@ -15580,7 +15083,7 @@
       </p:sp>
       <p:sp>
         <p:nvSpPr>
-          <p:cNvPr id="19" name="Text 17"/>
+          <p:cNvPr id="17" name="Text 15"/>
           <p:cNvSpPr/>
           <p:nvPr/>
         </p:nvSpPr>
@@ -15619,7 +15122,7 @@
       </p:sp>
       <p:sp>
         <p:nvSpPr>
-          <p:cNvPr id="20" name="Text 18"/>
+          <p:cNvPr id="18" name="Text 16"/>
           <p:cNvSpPr/>
           <p:nvPr/>
         </p:nvSpPr>
@@ -16127,13 +15630,11 @@
             </a:avLst>
           </a:prstGeom>
           <a:solidFill>
-            <a:srgbClr val="FFFFFF">
-              <a:alpha val="88000"/>
-            </a:srgbClr>
+            <a:srgbClr val="FFFFFF"/>
           </a:solidFill>
           <a:ln w="12700">
             <a:solidFill>
-              <a:srgbClr val="D6E8F2"/>
+              <a:srgbClr val="B9D7E6"/>
             </a:solidFill>
             <a:prstDash val="solid"/>
           </a:ln>
@@ -16141,119 +15642,112 @@
       </p:sp>
       <p:sp>
         <p:nvSpPr>
-          <p:cNvPr id="14" name="Shape 12"/>
-          <p:cNvSpPr/>
-          <p:nvPr/>
-        </p:nvSpPr>
-        <p:spPr>
-          <a:xfrm>
-            <a:off x="8074152" y="3291840"/>
-            <a:ext cx="2596896" cy="749808"/>
-          </a:xfrm>
-          <a:prstGeom prst="rect">
-            <a:avLst/>
-          </a:prstGeom>
-          <a:solidFill>
-            <a:srgbClr val="EAF6F8"/>
-          </a:solidFill>
-          <a:ln w="12700">
-            <a:solidFill>
-              <a:srgbClr val="8ABBD8"/>
-            </a:solidFill>
-            <a:prstDash val="solid"/>
-          </a:ln>
-        </p:spPr>
-      </p:sp>
-      <p:sp>
-        <p:nvSpPr>
-          <p:cNvPr id="15" name="Shape 13"/>
-          <p:cNvSpPr/>
-          <p:nvPr/>
-        </p:nvSpPr>
-        <p:spPr>
-          <a:xfrm>
-            <a:off x="8202168" y="3721608"/>
-            <a:ext cx="2340864" cy="0"/>
-          </a:xfrm>
-          <a:prstGeom prst="line">
-            <a:avLst/>
-          </a:prstGeom>
-          <a:noFill/>
-          <a:ln w="19050">
-            <a:solidFill>
-              <a:srgbClr val="0068B7"/>
-            </a:solidFill>
-            <a:prstDash val="solid"/>
-          </a:ln>
-        </p:spPr>
+          <p:cNvPr id="14" name="Text 12"/>
+          <p:cNvSpPr/>
+          <p:nvPr/>
+        </p:nvSpPr>
+        <p:spPr>
+          <a:xfrm>
+            <a:off x="7799832" y="2935224"/>
+            <a:ext cx="3145536" cy="256032"/>
+          </a:xfrm>
+          <a:prstGeom prst="rect">
+            <a:avLst/>
+          </a:prstGeom>
+          <a:noFill/>
+          <a:ln/>
+        </p:spPr>
+        <p:txBody>
+          <a:bodyPr wrap="square" lIns="0" tIns="0" rIns="0" bIns="0" rtlCol="0" anchor="ctr"/>
+          <a:lstStyle/>
+          <a:p>
+            <a:pPr indent="0" marL="0">
+              <a:buNone/>
+            </a:pPr>
+            <a:r>
+              <a:rPr lang="en-US" sz="1300" b="1" dirty="0">
+                <a:solidFill>
+                  <a:srgbClr val="0068B7"/>
+                </a:solidFill>
+                <a:latin typeface="Aptos" pitchFamily="34" charset="0"/>
+                <a:ea typeface="Aptos" pitchFamily="34" charset="-122"/>
+                <a:cs typeface="Aptos" pitchFamily="34" charset="-120"/>
+              </a:rPr>
+              <a:t>Concept checkpoints</a:t>
+            </a:r>
+            <a:endParaRPr lang="en-US" sz="1300" dirty="0"/>
+          </a:p>
+        </p:txBody>
+      </p:sp>
+      <p:sp>
+        <p:nvSpPr>
+          <p:cNvPr id="15" name="Text 13"/>
+          <p:cNvSpPr/>
+          <p:nvPr/>
+        </p:nvSpPr>
+        <p:spPr>
+          <a:xfrm>
+            <a:off x="7818120" y="3300984"/>
+            <a:ext cx="3090672" cy="877824"/>
+          </a:xfrm>
+          <a:prstGeom prst="rect">
+            <a:avLst/>
+          </a:prstGeom>
+          <a:noFill/>
+          <a:ln/>
+        </p:spPr>
+        <p:txBody>
+          <a:bodyPr wrap="square" lIns="254" tIns="254" rIns="254" bIns="254" rtlCol="0" anchor="t">
+            <a:normAutofit/>
+          </a:bodyPr>
+          <a:lstStyle/>
+          <a:p>
+            <a:r>
+              <a:rPr lang="en-US" sz="1380" dirty="0">
+                <a:solidFill>
+                  <a:srgbClr val="17364A"/>
+                </a:solidFill>
+                <a:latin typeface="Aptos" pitchFamily="34" charset="0"/>
+                <a:ea typeface="Aptos" pitchFamily="34" charset="-122"/>
+                <a:cs typeface="Aptos" pitchFamily="34" charset="-120"/>
+              </a:rPr>
+              <a:t>AI audit readiness is the agency’s ability to show what AI systems are used, why they were.</a:t>
+            </a:r>
+            <a:endParaRPr lang="en-US" sz="1380" dirty="0"/>
+          </a:p>
+          <a:p>
+            <a:r>
+              <a:rPr lang="en-US" sz="1380" dirty="0">
+                <a:solidFill>
+                  <a:srgbClr val="17364A"/>
+                </a:solidFill>
+                <a:latin typeface="Aptos" pitchFamily="34" charset="0"/>
+                <a:ea typeface="Aptos" pitchFamily="34" charset="-122"/>
+                <a:cs typeface="Aptos" pitchFamily="34" charset="-120"/>
+              </a:rPr>
+              <a:t>Public health agencies may need this evidence for internal oversight, public records.</a:t>
+            </a:r>
+            <a:endParaRPr lang="en-US" sz="1380" dirty="0"/>
+          </a:p>
+          <a:p>
+            <a:r>
+              <a:rPr lang="en-US" sz="1380" dirty="0">
+                <a:solidFill>
+                  <a:srgbClr val="17364A"/>
+                </a:solidFill>
+                <a:latin typeface="Aptos" pitchFamily="34" charset="0"/>
+                <a:ea typeface="Aptos" pitchFamily="34" charset="-122"/>
+                <a:cs typeface="Aptos" pitchFamily="34" charset="-120"/>
+              </a:rPr>
+              <a:t>This module teaches governance, compliance, program, and leadership staff how to manage.</a:t>
+            </a:r>
+            <a:endParaRPr lang="en-US" sz="1380" dirty="0"/>
+          </a:p>
+        </p:txBody>
       </p:sp>
       <p:sp>
         <p:nvSpPr>
           <p:cNvPr id="16" name="Shape 14"/>
-          <p:cNvSpPr/>
-          <p:nvPr/>
-        </p:nvSpPr>
-        <p:spPr>
-          <a:xfrm>
-            <a:off x="9198864" y="4206240"/>
-            <a:ext cx="347472" cy="347472"/>
-          </a:xfrm>
-          <a:prstGeom prst="ellipse">
-            <a:avLst/>
-          </a:prstGeom>
-          <a:solidFill>
-            <a:srgbClr val="2F8A28"/>
-          </a:solidFill>
-          <a:ln w="12700">
-            <a:solidFill>
-              <a:srgbClr val="2F8A28"/>
-            </a:solidFill>
-            <a:prstDash val="solid"/>
-          </a:ln>
-        </p:spPr>
-      </p:sp>
-      <p:sp>
-        <p:nvSpPr>
-          <p:cNvPr id="17" name="Text 15"/>
-          <p:cNvSpPr/>
-          <p:nvPr/>
-        </p:nvSpPr>
-        <p:spPr>
-          <a:xfrm>
-            <a:off x="7909560" y="3977640"/>
-            <a:ext cx="2926080" cy="182880"/>
-          </a:xfrm>
-          <a:prstGeom prst="rect">
-            <a:avLst/>
-          </a:prstGeom>
-          <a:noFill/>
-          <a:ln/>
-        </p:spPr>
-        <p:txBody>
-          <a:bodyPr wrap="square" lIns="0" tIns="0" rIns="0" bIns="0" rtlCol="0" anchor="ctr"/>
-          <a:lstStyle/>
-          <a:p>
-            <a:pPr algn="ctr" indent="0" marL="0">
-              <a:buNone/>
-            </a:pPr>
-            <a:r>
-              <a:rPr lang="en-US" sz="1000" dirty="0">
-                <a:solidFill>
-                  <a:srgbClr val="003A63"/>
-                </a:solidFill>
-                <a:latin typeface="Aptos" pitchFamily="34" charset="0"/>
-                <a:ea typeface="Aptos" pitchFamily="34" charset="-122"/>
-                <a:cs typeface="Aptos" pitchFamily="34" charset="-120"/>
-              </a:rPr>
-              <a:t>Concept to action</a:t>
-            </a:r>
-            <a:endParaRPr lang="en-US" sz="1000" dirty="0"/>
-          </a:p>
-        </p:txBody>
-      </p:sp>
-      <p:sp>
-        <p:nvSpPr>
-          <p:cNvPr id="18" name="Shape 16"/>
           <p:cNvSpPr/>
           <p:nvPr/>
         </p:nvSpPr>
@@ -16280,7 +15774,7 @@
       </p:sp>
       <p:sp>
         <p:nvSpPr>
-          <p:cNvPr id="19" name="Text 17"/>
+          <p:cNvPr id="17" name="Text 15"/>
           <p:cNvSpPr/>
           <p:nvPr/>
         </p:nvSpPr>
@@ -16319,7 +15813,7 @@
       </p:sp>
       <p:sp>
         <p:nvSpPr>
-          <p:cNvPr id="20" name="Text 18"/>
+          <p:cNvPr id="18" name="Text 16"/>
           <p:cNvSpPr/>
           <p:nvPr/>
         </p:nvSpPr>
@@ -16827,13 +16321,11 @@
             </a:avLst>
           </a:prstGeom>
           <a:solidFill>
-            <a:srgbClr val="FFFFFF">
-              <a:alpha val="88000"/>
-            </a:srgbClr>
+            <a:srgbClr val="FFFFFF"/>
           </a:solidFill>
           <a:ln w="12700">
             <a:solidFill>
-              <a:srgbClr val="D6E8F2"/>
+              <a:srgbClr val="B9D7E6"/>
             </a:solidFill>
             <a:prstDash val="solid"/>
           </a:ln>
@@ -16841,190 +16333,112 @@
       </p:sp>
       <p:sp>
         <p:nvSpPr>
-          <p:cNvPr id="14" name="Shape 12"/>
-          <p:cNvSpPr/>
-          <p:nvPr/>
-        </p:nvSpPr>
-        <p:spPr>
-          <a:xfrm>
-            <a:off x="7891272" y="3108960"/>
-            <a:ext cx="566928" cy="566928"/>
-          </a:xfrm>
-          <a:prstGeom prst="ellipse">
-            <a:avLst/>
-          </a:prstGeom>
-          <a:solidFill>
-            <a:srgbClr val="0068B7"/>
-          </a:solidFill>
-          <a:ln w="12700">
-            <a:solidFill>
-              <a:srgbClr val="0068B7"/>
-            </a:solidFill>
-            <a:prstDash val="solid"/>
-          </a:ln>
-        </p:spPr>
-      </p:sp>
-      <p:sp>
-        <p:nvSpPr>
-          <p:cNvPr id="15" name="Shape 13"/>
-          <p:cNvSpPr/>
-          <p:nvPr/>
-        </p:nvSpPr>
-        <p:spPr>
-          <a:xfrm>
-            <a:off x="10287000" y="3108960"/>
-            <a:ext cx="566928" cy="566928"/>
-          </a:xfrm>
-          <a:prstGeom prst="ellipse">
-            <a:avLst/>
-          </a:prstGeom>
-          <a:solidFill>
-            <a:srgbClr val="2F8A28"/>
-          </a:solidFill>
-          <a:ln w="12700">
-            <a:solidFill>
-              <a:srgbClr val="2F8A28"/>
-            </a:solidFill>
-            <a:prstDash val="solid"/>
-          </a:ln>
-        </p:spPr>
+          <p:cNvPr id="14" name="Text 12"/>
+          <p:cNvSpPr/>
+          <p:nvPr/>
+        </p:nvSpPr>
+        <p:spPr>
+          <a:xfrm>
+            <a:off x="7799832" y="2935224"/>
+            <a:ext cx="3145536" cy="256032"/>
+          </a:xfrm>
+          <a:prstGeom prst="rect">
+            <a:avLst/>
+          </a:prstGeom>
+          <a:noFill/>
+          <a:ln/>
+        </p:spPr>
+        <p:txBody>
+          <a:bodyPr wrap="square" lIns="0" tIns="0" rIns="0" bIns="0" rtlCol="0" anchor="ctr"/>
+          <a:lstStyle/>
+          <a:p>
+            <a:pPr indent="0" marL="0">
+              <a:buNone/>
+            </a:pPr>
+            <a:r>
+              <a:rPr lang="en-US" sz="1300" b="1" dirty="0">
+                <a:solidFill>
+                  <a:srgbClr val="0068B7"/>
+                </a:solidFill>
+                <a:latin typeface="Aptos" pitchFamily="34" charset="0"/>
+                <a:ea typeface="Aptos" pitchFamily="34" charset="-122"/>
+                <a:cs typeface="Aptos" pitchFamily="34" charset="-120"/>
+              </a:rPr>
+              <a:t>Concept checkpoints</a:t>
+            </a:r>
+            <a:endParaRPr lang="en-US" sz="1300" dirty="0"/>
+          </a:p>
+        </p:txBody>
+      </p:sp>
+      <p:sp>
+        <p:nvSpPr>
+          <p:cNvPr id="15" name="Text 13"/>
+          <p:cNvSpPr/>
+          <p:nvPr/>
+        </p:nvSpPr>
+        <p:spPr>
+          <a:xfrm>
+            <a:off x="7818120" y="3300984"/>
+            <a:ext cx="3090672" cy="877824"/>
+          </a:xfrm>
+          <a:prstGeom prst="rect">
+            <a:avLst/>
+          </a:prstGeom>
+          <a:noFill/>
+          <a:ln/>
+        </p:spPr>
+        <p:txBody>
+          <a:bodyPr wrap="square" lIns="254" tIns="254" rIns="254" bIns="254" rtlCol="0" anchor="t">
+            <a:normAutofit/>
+          </a:bodyPr>
+          <a:lstStyle/>
+          <a:p>
+            <a:r>
+              <a:rPr lang="en-US" sz="1380" dirty="0">
+                <a:solidFill>
+                  <a:srgbClr val="17364A"/>
+                </a:solidFill>
+                <a:latin typeface="Aptos" pitchFamily="34" charset="0"/>
+                <a:ea typeface="Aptos" pitchFamily="34" charset="-122"/>
+                <a:cs typeface="Aptos" pitchFamily="34" charset="-120"/>
+              </a:rPr>
+              <a:t>It is not legal advice and does not replace review by agency legal counsel, privacy.</a:t>
+            </a:r>
+            <a:endParaRPr lang="en-US" sz="1380" dirty="0"/>
+          </a:p>
+          <a:p>
+            <a:r>
+              <a:rPr lang="en-US" sz="1380" dirty="0">
+                <a:solidFill>
+                  <a:srgbClr val="17364A"/>
+                </a:solidFill>
+                <a:latin typeface="Aptos" pitchFamily="34" charset="0"/>
+                <a:ea typeface="Aptos" pitchFamily="34" charset="-122"/>
+                <a:cs typeface="Aptos" pitchFamily="34" charset="-120"/>
+              </a:rPr>
+              <a:t>Requirements may vary by state, locality, territory, Tribe, agency, funding source,.</a:t>
+            </a:r>
+            <a:endParaRPr lang="en-US" sz="1380" dirty="0"/>
+          </a:p>
+          <a:p>
+            <a:r>
+              <a:rPr lang="en-US" sz="1380" dirty="0">
+                <a:solidFill>
+                  <a:srgbClr val="17364A"/>
+                </a:solidFill>
+                <a:latin typeface="Aptos" pitchFamily="34" charset="0"/>
+                <a:ea typeface="Aptos" pitchFamily="34" charset="-122"/>
+                <a:cs typeface="Aptos" pitchFamily="34" charset="-120"/>
+              </a:rPr>
+              <a:t>Learners should use this module to identify the issues that require review and should.</a:t>
+            </a:r>
+            <a:endParaRPr lang="en-US" sz="1380" dirty="0"/>
+          </a:p>
+        </p:txBody>
       </p:sp>
       <p:sp>
         <p:nvSpPr>
           <p:cNvPr id="16" name="Shape 14"/>
-          <p:cNvSpPr/>
-          <p:nvPr/>
-        </p:nvSpPr>
-        <p:spPr>
-          <a:xfrm>
-            <a:off x="9089136" y="3456432"/>
-            <a:ext cx="566928" cy="566928"/>
-          </a:xfrm>
-          <a:prstGeom prst="ellipse">
-            <a:avLst/>
-          </a:prstGeom>
-          <a:solidFill>
-            <a:srgbClr val="6A4CA3"/>
-          </a:solidFill>
-          <a:ln w="12700">
-            <a:solidFill>
-              <a:srgbClr val="6A4CA3"/>
-            </a:solidFill>
-            <a:prstDash val="solid"/>
-          </a:ln>
-        </p:spPr>
-      </p:sp>
-      <p:sp>
-        <p:nvSpPr>
-          <p:cNvPr id="17" name="Shape 15"/>
-          <p:cNvSpPr/>
-          <p:nvPr/>
-        </p:nvSpPr>
-        <p:spPr>
-          <a:xfrm>
-            <a:off x="8385048" y="3419856"/>
-            <a:ext cx="1975104" cy="0"/>
-          </a:xfrm>
-          <a:prstGeom prst="line">
-            <a:avLst/>
-          </a:prstGeom>
-          <a:noFill/>
-          <a:ln w="25400">
-            <a:solidFill>
-              <a:srgbClr val="8ABBD8"/>
-            </a:solidFill>
-            <a:prstDash val="solid"/>
-          </a:ln>
-        </p:spPr>
-      </p:sp>
-      <p:sp>
-        <p:nvSpPr>
-          <p:cNvPr id="18" name="Shape 16"/>
-          <p:cNvSpPr/>
-          <p:nvPr/>
-        </p:nvSpPr>
-        <p:spPr>
-          <a:xfrm>
-            <a:off x="8202168" y="3630168"/>
-            <a:ext cx="1170432" cy="118872"/>
-          </a:xfrm>
-          <a:prstGeom prst="line">
-            <a:avLst/>
-          </a:prstGeom>
-          <a:noFill/>
-          <a:ln w="25400">
-            <a:solidFill>
-              <a:srgbClr val="8ABBD8"/>
-            </a:solidFill>
-            <a:prstDash val="solid"/>
-          </a:ln>
-        </p:spPr>
-      </p:sp>
-      <p:sp>
-        <p:nvSpPr>
-          <p:cNvPr id="19" name="Shape 17"/>
-          <p:cNvSpPr/>
-          <p:nvPr/>
-        </p:nvSpPr>
-        <p:spPr>
-          <a:xfrm>
-            <a:off x="10543032" y="3630168"/>
-            <a:ext cx="-1170432" cy="118872"/>
-          </a:xfrm>
-          <a:prstGeom prst="line">
-            <a:avLst/>
-          </a:prstGeom>
-          <a:noFill/>
-          <a:ln w="25400">
-            <a:solidFill>
-              <a:srgbClr val="8ABBD8"/>
-            </a:solidFill>
-            <a:prstDash val="solid"/>
-          </a:ln>
-        </p:spPr>
-      </p:sp>
-      <p:sp>
-        <p:nvSpPr>
-          <p:cNvPr id="20" name="Text 18"/>
-          <p:cNvSpPr/>
-          <p:nvPr/>
-        </p:nvSpPr>
-        <p:spPr>
-          <a:xfrm>
-            <a:off x="7863840" y="4069080"/>
-            <a:ext cx="3017520" cy="164592"/>
-          </a:xfrm>
-          <a:prstGeom prst="rect">
-            <a:avLst/>
-          </a:prstGeom>
-          <a:noFill/>
-          <a:ln/>
-        </p:spPr>
-        <p:txBody>
-          <a:bodyPr wrap="square" lIns="0" tIns="0" rIns="0" bIns="0" rtlCol="0" anchor="ctr"/>
-          <a:lstStyle/>
-          <a:p>
-            <a:pPr algn="ctr" indent="0" marL="0">
-              <a:buNone/>
-            </a:pPr>
-            <a:r>
-              <a:rPr lang="en-US" sz="900" b="1" dirty="0">
-                <a:solidFill>
-                  <a:srgbClr val="003A63"/>
-                </a:solidFill>
-                <a:latin typeface="Aptos" pitchFamily="34" charset="0"/>
-                <a:ea typeface="Aptos" pitchFamily="34" charset="-122"/>
-                <a:cs typeface="Aptos" pitchFamily="34" charset="-120"/>
-              </a:rPr>
-              <a:t>Decision rights</a:t>
-            </a:r>
-            <a:endParaRPr lang="en-US" sz="900" dirty="0"/>
-          </a:p>
-        </p:txBody>
-      </p:sp>
-      <p:sp>
-        <p:nvSpPr>
-          <p:cNvPr id="21" name="Shape 19"/>
           <p:cNvSpPr/>
           <p:nvPr/>
         </p:nvSpPr>
@@ -17051,7 +16465,7 @@
       </p:sp>
       <p:sp>
         <p:nvSpPr>
-          <p:cNvPr id="22" name="Text 20"/>
+          <p:cNvPr id="17" name="Text 15"/>
           <p:cNvSpPr/>
           <p:nvPr/>
         </p:nvSpPr>
@@ -17090,7 +16504,7 @@
       </p:sp>
       <p:sp>
         <p:nvSpPr>
-          <p:cNvPr id="23" name="Text 21"/>
+          <p:cNvPr id="18" name="Text 16"/>
           <p:cNvSpPr/>
           <p:nvPr/>
         </p:nvSpPr>
@@ -17598,13 +17012,11 @@
             </a:avLst>
           </a:prstGeom>
           <a:solidFill>
-            <a:srgbClr val="FFFFFF">
-              <a:alpha val="88000"/>
-            </a:srgbClr>
+            <a:srgbClr val="FFFFFF"/>
           </a:solidFill>
           <a:ln w="12700">
             <a:solidFill>
-              <a:srgbClr val="D6E8F2"/>
+              <a:srgbClr val="B9D7E6"/>
             </a:solidFill>
             <a:prstDash val="solid"/>
           </a:ln>
@@ -17612,119 +17024,98 @@
       </p:sp>
       <p:sp>
         <p:nvSpPr>
-          <p:cNvPr id="14" name="Shape 12"/>
-          <p:cNvSpPr/>
-          <p:nvPr/>
-        </p:nvSpPr>
-        <p:spPr>
-          <a:xfrm>
-            <a:off x="8074152" y="3291840"/>
-            <a:ext cx="2596896" cy="749808"/>
-          </a:xfrm>
-          <a:prstGeom prst="rect">
-            <a:avLst/>
-          </a:prstGeom>
-          <a:solidFill>
-            <a:srgbClr val="EAF6F8"/>
-          </a:solidFill>
-          <a:ln w="12700">
-            <a:solidFill>
-              <a:srgbClr val="8ABBD8"/>
-            </a:solidFill>
-            <a:prstDash val="solid"/>
-          </a:ln>
-        </p:spPr>
-      </p:sp>
-      <p:sp>
-        <p:nvSpPr>
-          <p:cNvPr id="15" name="Shape 13"/>
-          <p:cNvSpPr/>
-          <p:nvPr/>
-        </p:nvSpPr>
-        <p:spPr>
-          <a:xfrm>
-            <a:off x="8202168" y="3721608"/>
-            <a:ext cx="2340864" cy="0"/>
-          </a:xfrm>
-          <a:prstGeom prst="line">
-            <a:avLst/>
-          </a:prstGeom>
-          <a:noFill/>
-          <a:ln w="19050">
-            <a:solidFill>
-              <a:srgbClr val="0068B7"/>
-            </a:solidFill>
-            <a:prstDash val="solid"/>
-          </a:ln>
-        </p:spPr>
+          <p:cNvPr id="14" name="Text 12"/>
+          <p:cNvSpPr/>
+          <p:nvPr/>
+        </p:nvSpPr>
+        <p:spPr>
+          <a:xfrm>
+            <a:off x="7799832" y="2935224"/>
+            <a:ext cx="3145536" cy="256032"/>
+          </a:xfrm>
+          <a:prstGeom prst="rect">
+            <a:avLst/>
+          </a:prstGeom>
+          <a:noFill/>
+          <a:ln/>
+        </p:spPr>
+        <p:txBody>
+          <a:bodyPr wrap="square" lIns="0" tIns="0" rIns="0" bIns="0" rtlCol="0" anchor="ctr"/>
+          <a:lstStyle/>
+          <a:p>
+            <a:pPr indent="0" marL="0">
+              <a:buNone/>
+            </a:pPr>
+            <a:r>
+              <a:rPr lang="en-US" sz="1300" b="1" dirty="0">
+                <a:solidFill>
+                  <a:srgbClr val="0068B7"/>
+                </a:solidFill>
+                <a:latin typeface="Aptos" pitchFamily="34" charset="0"/>
+                <a:ea typeface="Aptos" pitchFamily="34" charset="-122"/>
+                <a:cs typeface="Aptos" pitchFamily="34" charset="-120"/>
+              </a:rPr>
+              <a:t>Concept checkpoints</a:t>
+            </a:r>
+            <a:endParaRPr lang="en-US" sz="1300" dirty="0"/>
+          </a:p>
+        </p:txBody>
+      </p:sp>
+      <p:sp>
+        <p:nvSpPr>
+          <p:cNvPr id="15" name="Text 13"/>
+          <p:cNvSpPr/>
+          <p:nvPr/>
+        </p:nvSpPr>
+        <p:spPr>
+          <a:xfrm>
+            <a:off x="7818120" y="3300984"/>
+            <a:ext cx="3090672" cy="877824"/>
+          </a:xfrm>
+          <a:prstGeom prst="rect">
+            <a:avLst/>
+          </a:prstGeom>
+          <a:noFill/>
+          <a:ln/>
+        </p:spPr>
+        <p:txBody>
+          <a:bodyPr wrap="square" lIns="254" tIns="254" rIns="254" bIns="254" rtlCol="0" anchor="t">
+            <a:normAutofit/>
+          </a:bodyPr>
+          <a:lstStyle/>
+          <a:p>
+            <a:r>
+              <a:rPr lang="en-US" sz="1380" dirty="0">
+                <a:solidFill>
+                  <a:srgbClr val="17364A"/>
+                </a:solidFill>
+                <a:latin typeface="Aptos" pitchFamily="34" charset="0"/>
+                <a:ea typeface="Aptos" pitchFamily="34" charset="-122"/>
+                <a:cs typeface="Aptos" pitchFamily="34" charset="-120"/>
+              </a:rPr>
+              <a:t>Audit-ready evidence would include the approved use case, validation plan, subgroup.</a:t>
+            </a:r>
+            <a:endParaRPr lang="en-US" sz="1380" dirty="0"/>
+          </a:p>
+          <a:p>
+            <a:r>
+              <a:rPr lang="en-US" sz="1380" dirty="0">
+                <a:solidFill>
+                  <a:srgbClr val="17364A"/>
+                </a:solidFill>
+                <a:latin typeface="Aptos" pitchFamily="34" charset="0"/>
+                <a:ea typeface="Aptos" pitchFamily="34" charset="-122"/>
+                <a:cs typeface="Aptos" pitchFamily="34" charset="-120"/>
+              </a:rPr>
+              <a:t>This evidence allows the agency to investigate the concern and decide whether to modify,.</a:t>
+            </a:r>
+            <a:endParaRPr lang="en-US" sz="1380" dirty="0"/>
+          </a:p>
+        </p:txBody>
       </p:sp>
       <p:sp>
         <p:nvSpPr>
           <p:cNvPr id="16" name="Shape 14"/>
-          <p:cNvSpPr/>
-          <p:nvPr/>
-        </p:nvSpPr>
-        <p:spPr>
-          <a:xfrm>
-            <a:off x="9198864" y="4206240"/>
-            <a:ext cx="347472" cy="347472"/>
-          </a:xfrm>
-          <a:prstGeom prst="ellipse">
-            <a:avLst/>
-          </a:prstGeom>
-          <a:solidFill>
-            <a:srgbClr val="2F8A28"/>
-          </a:solidFill>
-          <a:ln w="12700">
-            <a:solidFill>
-              <a:srgbClr val="2F8A28"/>
-            </a:solidFill>
-            <a:prstDash val="solid"/>
-          </a:ln>
-        </p:spPr>
-      </p:sp>
-      <p:sp>
-        <p:nvSpPr>
-          <p:cNvPr id="17" name="Text 15"/>
-          <p:cNvSpPr/>
-          <p:nvPr/>
-        </p:nvSpPr>
-        <p:spPr>
-          <a:xfrm>
-            <a:off x="7909560" y="3977640"/>
-            <a:ext cx="2926080" cy="182880"/>
-          </a:xfrm>
-          <a:prstGeom prst="rect">
-            <a:avLst/>
-          </a:prstGeom>
-          <a:noFill/>
-          <a:ln/>
-        </p:spPr>
-        <p:txBody>
-          <a:bodyPr wrap="square" lIns="0" tIns="0" rIns="0" bIns="0" rtlCol="0" anchor="ctr"/>
-          <a:lstStyle/>
-          <a:p>
-            <a:pPr algn="ctr" indent="0" marL="0">
-              <a:buNone/>
-            </a:pPr>
-            <a:r>
-              <a:rPr lang="en-US" sz="1000" dirty="0">
-                <a:solidFill>
-                  <a:srgbClr val="003A63"/>
-                </a:solidFill>
-                <a:latin typeface="Aptos" pitchFamily="34" charset="0"/>
-                <a:ea typeface="Aptos" pitchFamily="34" charset="-122"/>
-                <a:cs typeface="Aptos" pitchFamily="34" charset="-120"/>
-              </a:rPr>
-              <a:t>Concept to action</a:t>
-            </a:r>
-            <a:endParaRPr lang="en-US" sz="1000" dirty="0"/>
-          </a:p>
-        </p:txBody>
-      </p:sp>
-      <p:sp>
-        <p:nvSpPr>
-          <p:cNvPr id="18" name="Shape 16"/>
           <p:cNvSpPr/>
           <p:nvPr/>
         </p:nvSpPr>
@@ -17751,7 +17142,7 @@
       </p:sp>
       <p:sp>
         <p:nvSpPr>
-          <p:cNvPr id="19" name="Text 17"/>
+          <p:cNvPr id="17" name="Text 15"/>
           <p:cNvSpPr/>
           <p:nvPr/>
         </p:nvSpPr>
@@ -17790,7 +17181,7 @@
       </p:sp>
       <p:sp>
         <p:nvSpPr>
-          <p:cNvPr id="20" name="Text 18"/>
+          <p:cNvPr id="18" name="Text 16"/>
           <p:cNvSpPr/>
           <p:nvPr/>
         </p:nvSpPr>
@@ -18298,13 +17689,11 @@
             </a:avLst>
           </a:prstGeom>
           <a:solidFill>
-            <a:srgbClr val="FFFFFF">
-              <a:alpha val="88000"/>
-            </a:srgbClr>
+            <a:srgbClr val="FFFFFF"/>
           </a:solidFill>
           <a:ln w="12700">
             <a:solidFill>
-              <a:srgbClr val="D6E8F2"/>
+              <a:srgbClr val="B9D7E6"/>
             </a:solidFill>
             <a:prstDash val="solid"/>
           </a:ln>
@@ -18312,119 +17701,112 @@
       </p:sp>
       <p:sp>
         <p:nvSpPr>
-          <p:cNvPr id="14" name="Shape 12"/>
-          <p:cNvSpPr/>
-          <p:nvPr/>
-        </p:nvSpPr>
-        <p:spPr>
-          <a:xfrm>
-            <a:off x="8074152" y="3291840"/>
-            <a:ext cx="2596896" cy="749808"/>
-          </a:xfrm>
-          <a:prstGeom prst="rect">
-            <a:avLst/>
-          </a:prstGeom>
-          <a:solidFill>
-            <a:srgbClr val="EAF6F8"/>
-          </a:solidFill>
-          <a:ln w="12700">
-            <a:solidFill>
-              <a:srgbClr val="8ABBD8"/>
-            </a:solidFill>
-            <a:prstDash val="solid"/>
-          </a:ln>
-        </p:spPr>
-      </p:sp>
-      <p:sp>
-        <p:nvSpPr>
-          <p:cNvPr id="15" name="Shape 13"/>
-          <p:cNvSpPr/>
-          <p:nvPr/>
-        </p:nvSpPr>
-        <p:spPr>
-          <a:xfrm>
-            <a:off x="8202168" y="3721608"/>
-            <a:ext cx="2340864" cy="0"/>
-          </a:xfrm>
-          <a:prstGeom prst="line">
-            <a:avLst/>
-          </a:prstGeom>
-          <a:noFill/>
-          <a:ln w="19050">
-            <a:solidFill>
-              <a:srgbClr val="0068B7"/>
-            </a:solidFill>
-            <a:prstDash val="solid"/>
-          </a:ln>
-        </p:spPr>
+          <p:cNvPr id="14" name="Text 12"/>
+          <p:cNvSpPr/>
+          <p:nvPr/>
+        </p:nvSpPr>
+        <p:spPr>
+          <a:xfrm>
+            <a:off x="7799832" y="2935224"/>
+            <a:ext cx="3145536" cy="256032"/>
+          </a:xfrm>
+          <a:prstGeom prst="rect">
+            <a:avLst/>
+          </a:prstGeom>
+          <a:noFill/>
+          <a:ln/>
+        </p:spPr>
+        <p:txBody>
+          <a:bodyPr wrap="square" lIns="0" tIns="0" rIns="0" bIns="0" rtlCol="0" anchor="ctr"/>
+          <a:lstStyle/>
+          <a:p>
+            <a:pPr indent="0" marL="0">
+              <a:buNone/>
+            </a:pPr>
+            <a:r>
+              <a:rPr lang="en-US" sz="1300" b="1" dirty="0">
+                <a:solidFill>
+                  <a:srgbClr val="0068B7"/>
+                </a:solidFill>
+                <a:latin typeface="Aptos" pitchFamily="34" charset="0"/>
+                <a:ea typeface="Aptos" pitchFamily="34" charset="-122"/>
+                <a:cs typeface="Aptos" pitchFamily="34" charset="-120"/>
+              </a:rPr>
+              <a:t>Concept checkpoints</a:t>
+            </a:r>
+            <a:endParaRPr lang="en-US" sz="1300" dirty="0"/>
+          </a:p>
+        </p:txBody>
+      </p:sp>
+      <p:sp>
+        <p:nvSpPr>
+          <p:cNvPr id="15" name="Text 13"/>
+          <p:cNvSpPr/>
+          <p:nvPr/>
+        </p:nvSpPr>
+        <p:spPr>
+          <a:xfrm>
+            <a:off x="7818120" y="3300984"/>
+            <a:ext cx="3090672" cy="877824"/>
+          </a:xfrm>
+          <a:prstGeom prst="rect">
+            <a:avLst/>
+          </a:prstGeom>
+          <a:noFill/>
+          <a:ln/>
+        </p:spPr>
+        <p:txBody>
+          <a:bodyPr wrap="square" lIns="254" tIns="254" rIns="254" bIns="254" rtlCol="0" anchor="t">
+            <a:normAutofit/>
+          </a:bodyPr>
+          <a:lstStyle/>
+          <a:p>
+            <a:r>
+              <a:rPr lang="en-US" sz="1380" dirty="0">
+                <a:solidFill>
+                  <a:srgbClr val="17364A"/>
+                </a:solidFill>
+                <a:latin typeface="Aptos" pitchFamily="34" charset="0"/>
+                <a:ea typeface="Aptos" pitchFamily="34" charset="-122"/>
+                <a:cs typeface="Aptos" pitchFamily="34" charset="-120"/>
+              </a:rPr>
+              <a:t>The agency should preserve the use case description, risk triage, required reviewers,.</a:t>
+            </a:r>
+            <a:endParaRPr lang="en-US" sz="1380" dirty="0"/>
+          </a:p>
+          <a:p>
+            <a:r>
+              <a:rPr lang="en-US" sz="1380" dirty="0">
+                <a:solidFill>
+                  <a:srgbClr val="17364A"/>
+                </a:solidFill>
+                <a:latin typeface="Aptos" pitchFamily="34" charset="0"/>
+                <a:ea typeface="Aptos" pitchFamily="34" charset="-122"/>
+                <a:cs typeface="Aptos" pitchFamily="34" charset="-120"/>
+              </a:rPr>
+              <a:t>These early records help explain why a tool exists and what limits were placed on its use.</a:t>
+            </a:r>
+            <a:endParaRPr lang="en-US" sz="1380" dirty="0"/>
+          </a:p>
+          <a:p>
+            <a:r>
+              <a:rPr lang="en-US" sz="1380" dirty="0">
+                <a:solidFill>
+                  <a:srgbClr val="17364A"/>
+                </a:solidFill>
+                <a:latin typeface="Aptos" pitchFamily="34" charset="0"/>
+                <a:ea typeface="Aptos" pitchFamily="34" charset="-122"/>
+                <a:cs typeface="Aptos" pitchFamily="34" charset="-120"/>
+              </a:rPr>
+              <a:t>Validation evidence should show how the agency determined whether the AI-supported.</a:t>
+            </a:r>
+            <a:endParaRPr lang="en-US" sz="1380" dirty="0"/>
+          </a:p>
+        </p:txBody>
       </p:sp>
       <p:sp>
         <p:nvSpPr>
           <p:cNvPr id="16" name="Shape 14"/>
-          <p:cNvSpPr/>
-          <p:nvPr/>
-        </p:nvSpPr>
-        <p:spPr>
-          <a:xfrm>
-            <a:off x="9198864" y="4206240"/>
-            <a:ext cx="347472" cy="347472"/>
-          </a:xfrm>
-          <a:prstGeom prst="ellipse">
-            <a:avLst/>
-          </a:prstGeom>
-          <a:solidFill>
-            <a:srgbClr val="2F8A28"/>
-          </a:solidFill>
-          <a:ln w="12700">
-            <a:solidFill>
-              <a:srgbClr val="2F8A28"/>
-            </a:solidFill>
-            <a:prstDash val="solid"/>
-          </a:ln>
-        </p:spPr>
-      </p:sp>
-      <p:sp>
-        <p:nvSpPr>
-          <p:cNvPr id="17" name="Text 15"/>
-          <p:cNvSpPr/>
-          <p:nvPr/>
-        </p:nvSpPr>
-        <p:spPr>
-          <a:xfrm>
-            <a:off x="7909560" y="3977640"/>
-            <a:ext cx="2926080" cy="182880"/>
-          </a:xfrm>
-          <a:prstGeom prst="rect">
-            <a:avLst/>
-          </a:prstGeom>
-          <a:noFill/>
-          <a:ln/>
-        </p:spPr>
-        <p:txBody>
-          <a:bodyPr wrap="square" lIns="0" tIns="0" rIns="0" bIns="0" rtlCol="0" anchor="ctr"/>
-          <a:lstStyle/>
-          <a:p>
-            <a:pPr algn="ctr" indent="0" marL="0">
-              <a:buNone/>
-            </a:pPr>
-            <a:r>
-              <a:rPr lang="en-US" sz="1000" dirty="0">
-                <a:solidFill>
-                  <a:srgbClr val="003A63"/>
-                </a:solidFill>
-                <a:latin typeface="Aptos" pitchFamily="34" charset="0"/>
-                <a:ea typeface="Aptos" pitchFamily="34" charset="-122"/>
-                <a:cs typeface="Aptos" pitchFamily="34" charset="-120"/>
-              </a:rPr>
-              <a:t>Concept to action</a:t>
-            </a:r>
-            <a:endParaRPr lang="en-US" sz="1000" dirty="0"/>
-          </a:p>
-        </p:txBody>
-      </p:sp>
-      <p:sp>
-        <p:nvSpPr>
-          <p:cNvPr id="18" name="Shape 16"/>
           <p:cNvSpPr/>
           <p:nvPr/>
         </p:nvSpPr>
@@ -18451,7 +17833,7 @@
       </p:sp>
       <p:sp>
         <p:nvSpPr>
-          <p:cNvPr id="19" name="Text 17"/>
+          <p:cNvPr id="17" name="Text 15"/>
           <p:cNvSpPr/>
           <p:nvPr/>
         </p:nvSpPr>
@@ -18490,7 +17872,7 @@
       </p:sp>
       <p:sp>
         <p:nvSpPr>
-          <p:cNvPr id="20" name="Text 18"/>
+          <p:cNvPr id="18" name="Text 16"/>
           <p:cNvSpPr/>
           <p:nvPr/>
         </p:nvSpPr>

--- a/downloads/presentations/modules/gov-340.pptx
+++ b/downloads/presentations/modules/gov-340.pptx
@@ -3447,49 +3447,58 @@
           <a:ln/>
         </p:spPr>
         <p:txBody>
-          <a:bodyPr wrap="square" lIns="635" tIns="635" rIns="635" bIns="635" rtlCol="0" anchor="t">
+          <a:bodyPr wrap="square" lIns="1016" tIns="1016" rIns="1016" bIns="1016" rtlCol="0" anchor="t">
             <a:normAutofit/>
           </a:bodyPr>
           <a:lstStyle/>
           <a:p>
+            <a:pPr indent="0" marL="0">
+              <a:buNone/>
+            </a:pPr>
             <a:r>
               <a:rPr lang="en-US" sz="2100" dirty="0">
                 <a:solidFill>
-                  <a:srgbClr val="17364A"/>
-                </a:solidFill>
-                <a:latin typeface="Aptos" pitchFamily="34" charset="0"/>
-                <a:ea typeface="Aptos" pitchFamily="34" charset="-122"/>
-                <a:cs typeface="Aptos" pitchFamily="34" charset="-120"/>
-              </a:rPr>
-              <a:t>Evidence management requires ownership and retention rules.</a:t>
+                  <a:srgbClr val="003A63"/>
+                </a:solidFill>
+                <a:latin typeface="Aptos" pitchFamily="34" charset="0"/>
+                <a:ea typeface="Aptos" pitchFamily="34" charset="-122"/>
+                <a:cs typeface="Aptos" pitchFamily="34" charset="-120"/>
+              </a:rPr>
+              <a:t>• Evidence management requires ownership and retention rules.</a:t>
             </a:r>
             <a:endParaRPr lang="en-US" sz="2100" dirty="0"/>
           </a:p>
           <a:p>
+            <a:pPr indent="0" marL="0">
+              <a:buNone/>
+            </a:pPr>
             <a:r>
               <a:rPr lang="en-US" sz="2100" dirty="0">
                 <a:solidFill>
-                  <a:srgbClr val="17364A"/>
-                </a:solidFill>
-                <a:latin typeface="Aptos" pitchFamily="34" charset="0"/>
-                <a:ea typeface="Aptos" pitchFamily="34" charset="-122"/>
-                <a:cs typeface="Aptos" pitchFamily="34" charset="-120"/>
-              </a:rPr>
-              <a:t>Governance bodies should define who stores each artifact, where it is stored, how long it is retained,.</a:t>
+                  <a:srgbClr val="003A63"/>
+                </a:solidFill>
+                <a:latin typeface="Aptos" pitchFamily="34" charset="0"/>
+                <a:ea typeface="Aptos" pitchFamily="34" charset="-122"/>
+                <a:cs typeface="Aptos" pitchFamily="34" charset="-120"/>
+              </a:rPr>
+              <a:t>• Governance bodies should define who stores each artifact, where it is stored, how long it is.</a:t>
             </a:r>
             <a:endParaRPr lang="en-US" sz="2100" dirty="0"/>
           </a:p>
           <a:p>
+            <a:pPr indent="0" marL="0">
+              <a:buNone/>
+            </a:pPr>
             <a:r>
               <a:rPr lang="en-US" sz="2100" dirty="0">
                 <a:solidFill>
-                  <a:srgbClr val="17364A"/>
-                </a:solidFill>
-                <a:latin typeface="Aptos" pitchFamily="34" charset="0"/>
-                <a:ea typeface="Aptos" pitchFamily="34" charset="-122"/>
-                <a:cs typeface="Aptos" pitchFamily="34" charset="-120"/>
-              </a:rPr>
-              <a:t>Audit readiness depends on consistent records, not scattered files and informal emails.</a:t>
+                  <a:srgbClr val="003A63"/>
+                </a:solidFill>
+                <a:latin typeface="Aptos" pitchFamily="34" charset="0"/>
+                <a:ea typeface="Aptos" pitchFamily="34" charset="-122"/>
+                <a:cs typeface="Aptos" pitchFamily="34" charset="-120"/>
+              </a:rPr>
+              <a:t>• Audit readiness depends on consistent records, not scattered files and informal emails.</a:t>
             </a:r>
             <a:endParaRPr lang="en-US" sz="2100" dirty="0"/>
           </a:p>
@@ -3569,17 +3578,17 @@
         </p:nvSpPr>
         <p:spPr>
           <a:xfrm>
-            <a:off x="7799832" y="1828800"/>
-            <a:ext cx="3145536" cy="685800"/>
-          </a:xfrm>
-          <a:prstGeom prst="rect">
-            <a:avLst/>
-          </a:prstGeom>
-          <a:noFill/>
-          <a:ln/>
-        </p:spPr>
-        <p:txBody>
-          <a:bodyPr wrap="square" lIns="0" tIns="0" rIns="0" bIns="0" rtlCol="0" anchor="t">
+            <a:off x="7799832" y="1801368"/>
+            <a:ext cx="3145536" cy="758952"/>
+          </a:xfrm>
+          <a:prstGeom prst="rect">
+            <a:avLst/>
+          </a:prstGeom>
+          <a:noFill/>
+          <a:ln/>
+        </p:spPr>
+        <p:txBody>
+          <a:bodyPr wrap="square" lIns="254" tIns="254" rIns="254" bIns="254" rtlCol="0" anchor="t">
             <a:normAutofit/>
           </a:bodyPr>
           <a:lstStyle/>
@@ -3588,7 +3597,7 @@
               <a:buNone/>
             </a:pPr>
             <a:r>
-              <a:rPr lang="en-US" sz="1550" dirty="0">
+              <a:rPr lang="en-US" sz="1320" dirty="0">
                 <a:solidFill>
                   <a:srgbClr val="17364A"/>
                 </a:solidFill>
@@ -3598,7 +3607,7 @@
               </a:rPr>
               <a:t>Evidence management requires ownership and retention rules.</a:t>
             </a:r>
-            <a:endParaRPr lang="en-US" sz="1550" dirty="0"/>
+            <a:endParaRPr lang="en-US" sz="1320" dirty="0"/>
           </a:p>
         </p:txBody>
       </p:sp>
@@ -3686,13 +3695,16 @@
           <a:ln/>
         </p:spPr>
         <p:txBody>
-          <a:bodyPr wrap="square" lIns="254" tIns="254" rIns="254" bIns="254" rtlCol="0" anchor="t">
+          <a:bodyPr wrap="square" lIns="508" tIns="508" rIns="508" bIns="508" rtlCol="0" anchor="t">
             <a:normAutofit/>
           </a:bodyPr>
           <a:lstStyle/>
           <a:p>
-            <a:r>
-              <a:rPr lang="en-US" sz="1380" dirty="0">
+            <a:pPr indent="0" marL="0">
+              <a:buNone/>
+            </a:pPr>
+            <a:r>
+              <a:rPr lang="en-US" sz="1220" dirty="0">
                 <a:solidFill>
                   <a:srgbClr val="17364A"/>
                 </a:solidFill>
@@ -3702,11 +3714,14 @@
               </a:rPr>
               <a:t>Evidence management requires ownership and retention rules.</a:t>
             </a:r>
-            <a:endParaRPr lang="en-US" sz="1380" dirty="0"/>
-          </a:p>
-          <a:p>
-            <a:r>
-              <a:rPr lang="en-US" sz="1380" dirty="0">
+            <a:endParaRPr lang="en-US" sz="1220" dirty="0"/>
+          </a:p>
+          <a:p>
+            <a:pPr indent="0" marL="0">
+              <a:buNone/>
+            </a:pPr>
+            <a:r>
+              <a:rPr lang="en-US" sz="1220" dirty="0">
                 <a:solidFill>
                   <a:srgbClr val="17364A"/>
                 </a:solidFill>
@@ -3714,13 +3729,16 @@
                 <a:ea typeface="Aptos" pitchFamily="34" charset="-122"/>
                 <a:cs typeface="Aptos" pitchFamily="34" charset="-120"/>
               </a:rPr>
-              <a:t>Governance bodies should define who stores each artifact, where it is stored, how long it.</a:t>
-            </a:r>
-            <a:endParaRPr lang="en-US" sz="1380" dirty="0"/>
-          </a:p>
-          <a:p>
-            <a:r>
-              <a:rPr lang="en-US" sz="1380" dirty="0">
+              <a:t>Governance bodies should define who stores each artifact, where it.</a:t>
+            </a:r>
+            <a:endParaRPr lang="en-US" sz="1220" dirty="0"/>
+          </a:p>
+          <a:p>
+            <a:pPr indent="0" marL="0">
+              <a:buNone/>
+            </a:pPr>
+            <a:r>
+              <a:rPr lang="en-US" sz="1220" dirty="0">
                 <a:solidFill>
                   <a:srgbClr val="17364A"/>
                 </a:solidFill>
@@ -3728,9 +3746,9 @@
                 <a:ea typeface="Aptos" pitchFamily="34" charset="-122"/>
                 <a:cs typeface="Aptos" pitchFamily="34" charset="-120"/>
               </a:rPr>
-              <a:t>Audit readiness depends on consistent records, not scattered files and informal emails.</a:t>
-            </a:r>
-            <a:endParaRPr lang="en-US" sz="1380" dirty="0"/>
+              <a:t>Audit readiness depends on consistent records, not scattered files.</a:t>
+            </a:r>
+            <a:endParaRPr lang="en-US" sz="1220" dirty="0"/>
           </a:p>
         </p:txBody>
       </p:sp>
@@ -3808,17 +3826,17 @@
         </p:nvSpPr>
         <p:spPr>
           <a:xfrm>
-            <a:off x="7799832" y="5001768"/>
-            <a:ext cx="3145536" cy="502920"/>
-          </a:xfrm>
-          <a:prstGeom prst="rect">
-            <a:avLst/>
-          </a:prstGeom>
-          <a:noFill/>
-          <a:ln/>
-        </p:spPr>
-        <p:txBody>
-          <a:bodyPr wrap="square" lIns="0" tIns="0" rIns="0" bIns="0" rtlCol="0" anchor="t">
+            <a:off x="7799832" y="4974336"/>
+            <a:ext cx="3145536" cy="576072"/>
+          </a:xfrm>
+          <a:prstGeom prst="rect">
+            <a:avLst/>
+          </a:prstGeom>
+          <a:noFill/>
+          <a:ln/>
+        </p:spPr>
+        <p:txBody>
+          <a:bodyPr wrap="square" lIns="254" tIns="254" rIns="254" bIns="254" rtlCol="0" anchor="t">
             <a:normAutofit/>
           </a:bodyPr>
           <a:lstStyle/>
@@ -3827,7 +3845,7 @@
               <a:buNone/>
             </a:pPr>
             <a:r>
-              <a:rPr lang="en-US" sz="1550" dirty="0">
+              <a:rPr lang="en-US" sz="1320" dirty="0">
                 <a:solidFill>
                   <a:srgbClr val="17364A"/>
                 </a:solidFill>
@@ -3835,9 +3853,9 @@
                 <a:ea typeface="Aptos" pitchFamily="34" charset="-122"/>
                 <a:cs typeface="Aptos" pitchFamily="34" charset="-120"/>
               </a:rPr>
-              <a:t>Connect the concept to public health purpose, responsible use, required safeguards, documentation, and the next action a department should take.</a:t>
-            </a:r>
-            <a:endParaRPr lang="en-US" sz="1550" dirty="0"/>
+              <a:t>Connect the concept to public health purpose, responsible use, required safeguards, documentation, and the next action a.</a:t>
+            </a:r>
+            <a:endParaRPr lang="en-US" sz="1320" dirty="0"/>
           </a:p>
         </p:txBody>
       </p:sp>
@@ -4138,49 +4156,58 @@
           <a:ln/>
         </p:spPr>
         <p:txBody>
-          <a:bodyPr wrap="square" lIns="635" tIns="635" rIns="635" bIns="635" rtlCol="0" anchor="t">
+          <a:bodyPr wrap="square" lIns="1016" tIns="1016" rIns="1016" bIns="1016" rtlCol="0" anchor="t">
             <a:normAutofit/>
           </a:bodyPr>
           <a:lstStyle/>
           <a:p>
+            <a:pPr indent="0" marL="0">
+              <a:buNone/>
+            </a:pPr>
             <a:r>
               <a:rPr lang="en-US" sz="2100" dirty="0">
                 <a:solidFill>
-                  <a:srgbClr val="17364A"/>
-                </a:solidFill>
-                <a:latin typeface="Aptos" pitchFamily="34" charset="0"/>
-                <a:ea typeface="Aptos" pitchFamily="34" charset="-122"/>
-                <a:cs typeface="Aptos" pitchFamily="34" charset="-120"/>
-              </a:rPr>
-              <a:t>Risks and failure modes include the following:</a:t>
+                  <a:srgbClr val="003A63"/>
+                </a:solidFill>
+                <a:latin typeface="Aptos" pitchFamily="34" charset="0"/>
+                <a:ea typeface="Aptos" pitchFamily="34" charset="-122"/>
+                <a:cs typeface="Aptos" pitchFamily="34" charset="-120"/>
+              </a:rPr>
+              <a:t>• Risks and failure modes include the following:</a:t>
             </a:r>
             <a:endParaRPr lang="en-US" sz="2100" dirty="0"/>
           </a:p>
           <a:p>
+            <a:pPr indent="0" marL="0">
+              <a:buNone/>
+            </a:pPr>
             <a:r>
               <a:rPr lang="en-US" sz="2100" dirty="0">
                 <a:solidFill>
-                  <a:srgbClr val="17364A"/>
-                </a:solidFill>
-                <a:latin typeface="Aptos" pitchFamily="34" charset="0"/>
-                <a:ea typeface="Aptos" pitchFamily="34" charset="-122"/>
-                <a:cs typeface="Aptos" pitchFamily="34" charset="-120"/>
-              </a:rPr>
-              <a:t>Approvals without records of conditions or rationale.</a:t>
+                  <a:srgbClr val="003A63"/>
+                </a:solidFill>
+                <a:latin typeface="Aptos" pitchFamily="34" charset="0"/>
+                <a:ea typeface="Aptos" pitchFamily="34" charset="-122"/>
+                <a:cs typeface="Aptos" pitchFamily="34" charset="-120"/>
+              </a:rPr>
+              <a:t>• Approvals without records of conditions or rationale.</a:t>
             </a:r>
             <a:endParaRPr lang="en-US" sz="2100" dirty="0"/>
           </a:p>
           <a:p>
+            <a:pPr indent="0" marL="0">
+              <a:buNone/>
+            </a:pPr>
             <a:r>
               <a:rPr lang="en-US" sz="2100" dirty="0">
                 <a:solidFill>
-                  <a:srgbClr val="17364A"/>
-                </a:solidFill>
-                <a:latin typeface="Aptos" pitchFamily="34" charset="0"/>
-                <a:ea typeface="Aptos" pitchFamily="34" charset="-122"/>
-                <a:cs typeface="Aptos" pitchFamily="34" charset="-120"/>
-              </a:rPr>
-              <a:t>Validation results stored informally or not retained.</a:t>
+                  <a:srgbClr val="003A63"/>
+                </a:solidFill>
+                <a:latin typeface="Aptos" pitchFamily="34" charset="0"/>
+                <a:ea typeface="Aptos" pitchFamily="34" charset="-122"/>
+                <a:cs typeface="Aptos" pitchFamily="34" charset="-120"/>
+              </a:rPr>
+              <a:t>• Validation results stored informally or not retained.</a:t>
             </a:r>
             <a:endParaRPr lang="en-US" sz="2100" dirty="0"/>
           </a:p>
@@ -4260,17 +4287,17 @@
         </p:nvSpPr>
         <p:spPr>
           <a:xfrm>
-            <a:off x="7799832" y="1828800"/>
-            <a:ext cx="3145536" cy="685800"/>
-          </a:xfrm>
-          <a:prstGeom prst="rect">
-            <a:avLst/>
-          </a:prstGeom>
-          <a:noFill/>
-          <a:ln/>
-        </p:spPr>
-        <p:txBody>
-          <a:bodyPr wrap="square" lIns="0" tIns="0" rIns="0" bIns="0" rtlCol="0" anchor="t">
+            <a:off x="7799832" y="1801368"/>
+            <a:ext cx="3145536" cy="758952"/>
+          </a:xfrm>
+          <a:prstGeom prst="rect">
+            <a:avLst/>
+          </a:prstGeom>
+          <a:noFill/>
+          <a:ln/>
+        </p:spPr>
+        <p:txBody>
+          <a:bodyPr wrap="square" lIns="254" tIns="254" rIns="254" bIns="254" rtlCol="0" anchor="t">
             <a:normAutofit/>
           </a:bodyPr>
           <a:lstStyle/>
@@ -4279,7 +4306,7 @@
               <a:buNone/>
             </a:pPr>
             <a:r>
-              <a:rPr lang="en-US" sz="1550" dirty="0">
+              <a:rPr lang="en-US" sz="1320" dirty="0">
                 <a:solidFill>
                   <a:srgbClr val="17364A"/>
                 </a:solidFill>
@@ -4289,7 +4316,7 @@
               </a:rPr>
               <a:t>Risks and failure modes include the following:</a:t>
             </a:r>
-            <a:endParaRPr lang="en-US" sz="1550" dirty="0"/>
+            <a:endParaRPr lang="en-US" sz="1320" dirty="0"/>
           </a:p>
         </p:txBody>
       </p:sp>
@@ -4377,13 +4404,16 @@
           <a:ln/>
         </p:spPr>
         <p:txBody>
-          <a:bodyPr wrap="square" lIns="254" tIns="254" rIns="254" bIns="254" rtlCol="0" anchor="t">
+          <a:bodyPr wrap="square" lIns="508" tIns="508" rIns="508" bIns="508" rtlCol="0" anchor="t">
             <a:normAutofit/>
           </a:bodyPr>
           <a:lstStyle/>
           <a:p>
-            <a:r>
-              <a:rPr lang="en-US" sz="1380" dirty="0">
+            <a:pPr indent="0" marL="0">
+              <a:buNone/>
+            </a:pPr>
+            <a:r>
+              <a:rPr lang="en-US" sz="1220" dirty="0">
                 <a:solidFill>
                   <a:srgbClr val="17364A"/>
                 </a:solidFill>
@@ -4393,11 +4423,14 @@
               </a:rPr>
               <a:t>Risks and failure modes include the following:</a:t>
             </a:r>
-            <a:endParaRPr lang="en-US" sz="1380" dirty="0"/>
-          </a:p>
-          <a:p>
-            <a:r>
-              <a:rPr lang="en-US" sz="1380" dirty="0">
+            <a:endParaRPr lang="en-US" sz="1220" dirty="0"/>
+          </a:p>
+          <a:p>
+            <a:pPr indent="0" marL="0">
+              <a:buNone/>
+            </a:pPr>
+            <a:r>
+              <a:rPr lang="en-US" sz="1220" dirty="0">
                 <a:solidFill>
                   <a:srgbClr val="17364A"/>
                 </a:solidFill>
@@ -4407,11 +4440,14 @@
               </a:rPr>
               <a:t>Approvals without records of conditions or rationale.</a:t>
             </a:r>
-            <a:endParaRPr lang="en-US" sz="1380" dirty="0"/>
-          </a:p>
-          <a:p>
-            <a:r>
-              <a:rPr lang="en-US" sz="1380" dirty="0">
+            <a:endParaRPr lang="en-US" sz="1220" dirty="0"/>
+          </a:p>
+          <a:p>
+            <a:pPr indent="0" marL="0">
+              <a:buNone/>
+            </a:pPr>
+            <a:r>
+              <a:rPr lang="en-US" sz="1220" dirty="0">
                 <a:solidFill>
                   <a:srgbClr val="17364A"/>
                 </a:solidFill>
@@ -4421,7 +4457,7 @@
               </a:rPr>
               <a:t>Validation results stored informally or not retained.</a:t>
             </a:r>
-            <a:endParaRPr lang="en-US" sz="1380" dirty="0"/>
+            <a:endParaRPr lang="en-US" sz="1220" dirty="0"/>
           </a:p>
         </p:txBody>
       </p:sp>
@@ -4499,17 +4535,17 @@
         </p:nvSpPr>
         <p:spPr>
           <a:xfrm>
-            <a:off x="7799832" y="5001768"/>
-            <a:ext cx="3145536" cy="502920"/>
-          </a:xfrm>
-          <a:prstGeom prst="rect">
-            <a:avLst/>
-          </a:prstGeom>
-          <a:noFill/>
-          <a:ln/>
-        </p:spPr>
-        <p:txBody>
-          <a:bodyPr wrap="square" lIns="0" tIns="0" rIns="0" bIns="0" rtlCol="0" anchor="t">
+            <a:off x="7799832" y="4974336"/>
+            <a:ext cx="3145536" cy="576072"/>
+          </a:xfrm>
+          <a:prstGeom prst="rect">
+            <a:avLst/>
+          </a:prstGeom>
+          <a:noFill/>
+          <a:ln/>
+        </p:spPr>
+        <p:txBody>
+          <a:bodyPr wrap="square" lIns="254" tIns="254" rIns="254" bIns="254" rtlCol="0" anchor="t">
             <a:normAutofit/>
           </a:bodyPr>
           <a:lstStyle/>
@@ -4518,7 +4554,7 @@
               <a:buNone/>
             </a:pPr>
             <a:r>
-              <a:rPr lang="en-US" sz="1550" dirty="0">
+              <a:rPr lang="en-US" sz="1320" dirty="0">
                 <a:solidFill>
                   <a:srgbClr val="17364A"/>
                 </a:solidFill>
@@ -4526,9 +4562,9 @@
                 <a:ea typeface="Aptos" pitchFamily="34" charset="-122"/>
                 <a:cs typeface="Aptos" pitchFamily="34" charset="-120"/>
               </a:rPr>
-              <a:t>Identify what could go wrong, who could be affected, what safeguards are needed, and what evidence should be reviewed before use expands.</a:t>
-            </a:r>
-            <a:endParaRPr lang="en-US" sz="1550" dirty="0"/>
+              <a:t>Identify what could go wrong, who could be affected, what safeguards are needed, and what evidence should be reviewed.</a:t>
+            </a:r>
+            <a:endParaRPr lang="en-US" sz="1320" dirty="0"/>
           </a:p>
         </p:txBody>
       </p:sp>
@@ -4829,49 +4865,58 @@
           <a:ln/>
         </p:spPr>
         <p:txBody>
-          <a:bodyPr wrap="square" lIns="635" tIns="635" rIns="635" bIns="635" rtlCol="0" anchor="t">
+          <a:bodyPr wrap="square" lIns="1016" tIns="1016" rIns="1016" bIns="1016" rtlCol="0" anchor="t">
             <a:normAutofit/>
           </a:bodyPr>
           <a:lstStyle/>
           <a:p>
+            <a:pPr indent="0" marL="0">
+              <a:buNone/>
+            </a:pPr>
             <a:r>
               <a:rPr lang="en-US" sz="2100" dirty="0">
                 <a:solidFill>
-                  <a:srgbClr val="17364A"/>
-                </a:solidFill>
-                <a:latin typeface="Aptos" pitchFamily="34" charset="0"/>
-                <a:ea typeface="Aptos" pitchFamily="34" charset="-122"/>
-                <a:cs typeface="Aptos" pitchFamily="34" charset="-120"/>
-              </a:rPr>
-              <a:t>Vendor documentation accepted without agency review or local evidence.</a:t>
+                  <a:srgbClr val="003A63"/>
+                </a:solidFill>
+                <a:latin typeface="Aptos" pitchFamily="34" charset="0"/>
+                <a:ea typeface="Aptos" pitchFamily="34" charset="-122"/>
+                <a:cs typeface="Aptos" pitchFamily="34" charset="-120"/>
+              </a:rPr>
+              <a:t>• Vendor documentation accepted without agency review or local evidence.</a:t>
             </a:r>
             <a:endParaRPr lang="en-US" sz="2100" dirty="0"/>
           </a:p>
           <a:p>
+            <a:pPr indent="0" marL="0">
+              <a:buNone/>
+            </a:pPr>
             <a:r>
               <a:rPr lang="en-US" sz="2100" dirty="0">
                 <a:solidFill>
-                  <a:srgbClr val="17364A"/>
-                </a:solidFill>
-                <a:latin typeface="Aptos" pitchFamily="34" charset="0"/>
-                <a:ea typeface="Aptos" pitchFamily="34" charset="-122"/>
-                <a:cs typeface="Aptos" pitchFamily="34" charset="-120"/>
-              </a:rPr>
-              <a:t>Incidents that cannot be reconstructed because logs or decisions were not preserved.</a:t>
+                  <a:srgbClr val="003A63"/>
+                </a:solidFill>
+                <a:latin typeface="Aptos" pitchFamily="34" charset="0"/>
+                <a:ea typeface="Aptos" pitchFamily="34" charset="-122"/>
+                <a:cs typeface="Aptos" pitchFamily="34" charset="-120"/>
+              </a:rPr>
+              <a:t>• Incidents that cannot be reconstructed because logs or decisions were not preserved.</a:t>
             </a:r>
             <a:endParaRPr lang="en-US" sz="2100" dirty="0"/>
           </a:p>
           <a:p>
+            <a:pPr indent="0" marL="0">
+              <a:buNone/>
+            </a:pPr>
             <a:r>
               <a:rPr lang="en-US" sz="2100" dirty="0">
                 <a:solidFill>
-                  <a:srgbClr val="17364A"/>
-                </a:solidFill>
-                <a:latin typeface="Aptos" pitchFamily="34" charset="0"/>
-                <a:ea typeface="Aptos" pitchFamily="34" charset="-122"/>
-                <a:cs typeface="Aptos" pitchFamily="34" charset="-120"/>
-              </a:rPr>
-              <a:t>Public records or audit responses delayed because artifacts are scattered.</a:t>
+                  <a:srgbClr val="003A63"/>
+                </a:solidFill>
+                <a:latin typeface="Aptos" pitchFamily="34" charset="0"/>
+                <a:ea typeface="Aptos" pitchFamily="34" charset="-122"/>
+                <a:cs typeface="Aptos" pitchFamily="34" charset="-120"/>
+              </a:rPr>
+              <a:t>• Public records or audit responses delayed because artifacts are scattered.</a:t>
             </a:r>
             <a:endParaRPr lang="en-US" sz="2100" dirty="0"/>
           </a:p>
@@ -4951,17 +4996,17 @@
         </p:nvSpPr>
         <p:spPr>
           <a:xfrm>
-            <a:off x="7799832" y="1828800"/>
-            <a:ext cx="3145536" cy="685800"/>
-          </a:xfrm>
-          <a:prstGeom prst="rect">
-            <a:avLst/>
-          </a:prstGeom>
-          <a:noFill/>
-          <a:ln/>
-        </p:spPr>
-        <p:txBody>
-          <a:bodyPr wrap="square" lIns="0" tIns="0" rIns="0" bIns="0" rtlCol="0" anchor="t">
+            <a:off x="7799832" y="1801368"/>
+            <a:ext cx="3145536" cy="758952"/>
+          </a:xfrm>
+          <a:prstGeom prst="rect">
+            <a:avLst/>
+          </a:prstGeom>
+          <a:noFill/>
+          <a:ln/>
+        </p:spPr>
+        <p:txBody>
+          <a:bodyPr wrap="square" lIns="254" tIns="254" rIns="254" bIns="254" rtlCol="0" anchor="t">
             <a:normAutofit/>
           </a:bodyPr>
           <a:lstStyle/>
@@ -4970,7 +5015,7 @@
               <a:buNone/>
             </a:pPr>
             <a:r>
-              <a:rPr lang="en-US" sz="1550" dirty="0">
+              <a:rPr lang="en-US" sz="1320" dirty="0">
                 <a:solidFill>
                   <a:srgbClr val="17364A"/>
                 </a:solidFill>
@@ -4980,7 +5025,7 @@
               </a:rPr>
               <a:t>Vendor documentation accepted without agency review or local evidence.</a:t>
             </a:r>
-            <a:endParaRPr lang="en-US" sz="1550" dirty="0"/>
+            <a:endParaRPr lang="en-US" sz="1320" dirty="0"/>
           </a:p>
         </p:txBody>
       </p:sp>
@@ -5068,13 +5113,16 @@
           <a:ln/>
         </p:spPr>
         <p:txBody>
-          <a:bodyPr wrap="square" lIns="254" tIns="254" rIns="254" bIns="254" rtlCol="0" anchor="t">
+          <a:bodyPr wrap="square" lIns="508" tIns="508" rIns="508" bIns="508" rtlCol="0" anchor="t">
             <a:normAutofit/>
           </a:bodyPr>
           <a:lstStyle/>
           <a:p>
-            <a:r>
-              <a:rPr lang="en-US" sz="1380" dirty="0">
+            <a:pPr indent="0" marL="0">
+              <a:buNone/>
+            </a:pPr>
+            <a:r>
+              <a:rPr lang="en-US" sz="1220" dirty="0">
                 <a:solidFill>
                   <a:srgbClr val="17364A"/>
                 </a:solidFill>
@@ -5082,13 +5130,16 @@
                 <a:ea typeface="Aptos" pitchFamily="34" charset="-122"/>
                 <a:cs typeface="Aptos" pitchFamily="34" charset="-120"/>
               </a:rPr>
-              <a:t>Vendor documentation accepted without agency review or local evidence.</a:t>
-            </a:r>
-            <a:endParaRPr lang="en-US" sz="1380" dirty="0"/>
-          </a:p>
-          <a:p>
-            <a:r>
-              <a:rPr lang="en-US" sz="1380" dirty="0">
+              <a:t>Vendor documentation accepted without agency review or local.</a:t>
+            </a:r>
+            <a:endParaRPr lang="en-US" sz="1220" dirty="0"/>
+          </a:p>
+          <a:p>
+            <a:pPr indent="0" marL="0">
+              <a:buNone/>
+            </a:pPr>
+            <a:r>
+              <a:rPr lang="en-US" sz="1220" dirty="0">
                 <a:solidFill>
                   <a:srgbClr val="17364A"/>
                 </a:solidFill>
@@ -5096,13 +5147,16 @@
                 <a:ea typeface="Aptos" pitchFamily="34" charset="-122"/>
                 <a:cs typeface="Aptos" pitchFamily="34" charset="-120"/>
               </a:rPr>
-              <a:t>Incidents that cannot be reconstructed because logs or decisions were not preserved.</a:t>
-            </a:r>
-            <a:endParaRPr lang="en-US" sz="1380" dirty="0"/>
-          </a:p>
-          <a:p>
-            <a:r>
-              <a:rPr lang="en-US" sz="1380" dirty="0">
+              <a:t>Incidents that cannot be reconstructed because logs or decisions.</a:t>
+            </a:r>
+            <a:endParaRPr lang="en-US" sz="1220" dirty="0"/>
+          </a:p>
+          <a:p>
+            <a:pPr indent="0" marL="0">
+              <a:buNone/>
+            </a:pPr>
+            <a:r>
+              <a:rPr lang="en-US" sz="1220" dirty="0">
                 <a:solidFill>
                   <a:srgbClr val="17364A"/>
                 </a:solidFill>
@@ -5110,9 +5164,9 @@
                 <a:ea typeface="Aptos" pitchFamily="34" charset="-122"/>
                 <a:cs typeface="Aptos" pitchFamily="34" charset="-120"/>
               </a:rPr>
-              <a:t>Public records or audit responses delayed because artifacts are scattered.</a:t>
-            </a:r>
-            <a:endParaRPr lang="en-US" sz="1380" dirty="0"/>
+              <a:t>Public records or audit responses delayed because artifacts are.</a:t>
+            </a:r>
+            <a:endParaRPr lang="en-US" sz="1220" dirty="0"/>
           </a:p>
         </p:txBody>
       </p:sp>
@@ -5190,17 +5244,17 @@
         </p:nvSpPr>
         <p:spPr>
           <a:xfrm>
-            <a:off x="7799832" y="5001768"/>
-            <a:ext cx="3145536" cy="502920"/>
-          </a:xfrm>
-          <a:prstGeom prst="rect">
-            <a:avLst/>
-          </a:prstGeom>
-          <a:noFill/>
-          <a:ln/>
-        </p:spPr>
-        <p:txBody>
-          <a:bodyPr wrap="square" lIns="0" tIns="0" rIns="0" bIns="0" rtlCol="0" anchor="t">
+            <a:off x="7799832" y="4974336"/>
+            <a:ext cx="3145536" cy="576072"/>
+          </a:xfrm>
+          <a:prstGeom prst="rect">
+            <a:avLst/>
+          </a:prstGeom>
+          <a:noFill/>
+          <a:ln/>
+        </p:spPr>
+        <p:txBody>
+          <a:bodyPr wrap="square" lIns="254" tIns="254" rIns="254" bIns="254" rtlCol="0" anchor="t">
             <a:normAutofit/>
           </a:bodyPr>
           <a:lstStyle/>
@@ -5209,7 +5263,7 @@
               <a:buNone/>
             </a:pPr>
             <a:r>
-              <a:rPr lang="en-US" sz="1550" dirty="0">
+              <a:rPr lang="en-US" sz="1320" dirty="0">
                 <a:solidFill>
                   <a:srgbClr val="17364A"/>
                 </a:solidFill>
@@ -5217,9 +5271,9 @@
                 <a:ea typeface="Aptos" pitchFamily="34" charset="-122"/>
                 <a:cs typeface="Aptos" pitchFamily="34" charset="-120"/>
               </a:rPr>
-              <a:t>Identify what could go wrong, who could be affected, what safeguards are needed, and what evidence should be reviewed before use expands.</a:t>
-            </a:r>
-            <a:endParaRPr lang="en-US" sz="1550" dirty="0"/>
+              <a:t>Identify what could go wrong, who could be affected, what safeguards are needed, and what evidence should be reviewed.</a:t>
+            </a:r>
+            <a:endParaRPr lang="en-US" sz="1320" dirty="0"/>
           </a:p>
         </p:txBody>
       </p:sp>
@@ -5520,49 +5574,58 @@
           <a:ln/>
         </p:spPr>
         <p:txBody>
-          <a:bodyPr wrap="square" lIns="635" tIns="635" rIns="635" bIns="635" rtlCol="0" anchor="t">
+          <a:bodyPr wrap="square" lIns="1016" tIns="1016" rIns="1016" bIns="1016" rtlCol="0" anchor="t">
             <a:normAutofit/>
           </a:bodyPr>
           <a:lstStyle/>
           <a:p>
+            <a:pPr indent="0" marL="0">
+              <a:buNone/>
+            </a:pPr>
             <a:r>
               <a:rPr lang="en-US" sz="2100" dirty="0">
                 <a:solidFill>
-                  <a:srgbClr val="17364A"/>
-                </a:solidFill>
-                <a:latin typeface="Aptos" pitchFamily="34" charset="0"/>
-                <a:ea typeface="Aptos" pitchFamily="34" charset="-122"/>
-                <a:cs typeface="Aptos" pitchFamily="34" charset="-120"/>
-              </a:rPr>
-              <a:t>Recommended guardrails include the following:</a:t>
+                  <a:srgbClr val="003A63"/>
+                </a:solidFill>
+                <a:latin typeface="Aptos" pitchFamily="34" charset="0"/>
+                <a:ea typeface="Aptos" pitchFamily="34" charset="-122"/>
+                <a:cs typeface="Aptos" pitchFamily="34" charset="-120"/>
+              </a:rPr>
+              <a:t>• Recommended guardrails include the following:</a:t>
             </a:r>
             <a:endParaRPr lang="en-US" sz="2100" dirty="0"/>
           </a:p>
           <a:p>
+            <a:pPr indent="0" marL="0">
+              <a:buNone/>
+            </a:pPr>
             <a:r>
               <a:rPr lang="en-US" sz="2100" dirty="0">
                 <a:solidFill>
-                  <a:srgbClr val="17364A"/>
-                </a:solidFill>
-                <a:latin typeface="Aptos" pitchFamily="34" charset="0"/>
-                <a:ea typeface="Aptos" pitchFamily="34" charset="-122"/>
-                <a:cs typeface="Aptos" pitchFamily="34" charset="-120"/>
-              </a:rPr>
-              <a:t>Maintain an AI evidence inventory for each approved AI use.</a:t>
+                  <a:srgbClr val="003A63"/>
+                </a:solidFill>
+                <a:latin typeface="Aptos" pitchFamily="34" charset="0"/>
+                <a:ea typeface="Aptos" pitchFamily="34" charset="-122"/>
+                <a:cs typeface="Aptos" pitchFamily="34" charset="-120"/>
+              </a:rPr>
+              <a:t>• Maintain an AI evidence inventory for each approved AI use.</a:t>
             </a:r>
             <a:endParaRPr lang="en-US" sz="2100" dirty="0"/>
           </a:p>
           <a:p>
+            <a:pPr indent="0" marL="0">
+              <a:buNone/>
+            </a:pPr>
             <a:r>
               <a:rPr lang="en-US" sz="2100" dirty="0">
                 <a:solidFill>
-                  <a:srgbClr val="17364A"/>
-                </a:solidFill>
-                <a:latin typeface="Aptos" pitchFamily="34" charset="0"/>
-                <a:ea typeface="Aptos" pitchFamily="34" charset="-122"/>
-                <a:cs typeface="Aptos" pitchFamily="34" charset="-120"/>
-              </a:rPr>
-              <a:t>Use decision logs for approvals, deferrals, conditions, changes, and retirement.</a:t>
+                  <a:srgbClr val="003A63"/>
+                </a:solidFill>
+                <a:latin typeface="Aptos" pitchFamily="34" charset="0"/>
+                <a:ea typeface="Aptos" pitchFamily="34" charset="-122"/>
+                <a:cs typeface="Aptos" pitchFamily="34" charset="-120"/>
+              </a:rPr>
+              <a:t>• Use decision logs for approvals, deferrals, conditions, changes, and retirement.</a:t>
             </a:r>
             <a:endParaRPr lang="en-US" sz="2100" dirty="0"/>
           </a:p>
@@ -5642,17 +5705,17 @@
         </p:nvSpPr>
         <p:spPr>
           <a:xfrm>
-            <a:off x="7799832" y="1828800"/>
-            <a:ext cx="3145536" cy="685800"/>
-          </a:xfrm>
-          <a:prstGeom prst="rect">
-            <a:avLst/>
-          </a:prstGeom>
-          <a:noFill/>
-          <a:ln/>
-        </p:spPr>
-        <p:txBody>
-          <a:bodyPr wrap="square" lIns="0" tIns="0" rIns="0" bIns="0" rtlCol="0" anchor="t">
+            <a:off x="7799832" y="1801368"/>
+            <a:ext cx="3145536" cy="758952"/>
+          </a:xfrm>
+          <a:prstGeom prst="rect">
+            <a:avLst/>
+          </a:prstGeom>
+          <a:noFill/>
+          <a:ln/>
+        </p:spPr>
+        <p:txBody>
+          <a:bodyPr wrap="square" lIns="254" tIns="254" rIns="254" bIns="254" rtlCol="0" anchor="t">
             <a:normAutofit/>
           </a:bodyPr>
           <a:lstStyle/>
@@ -5661,7 +5724,7 @@
               <a:buNone/>
             </a:pPr>
             <a:r>
-              <a:rPr lang="en-US" sz="1550" dirty="0">
+              <a:rPr lang="en-US" sz="1320" dirty="0">
                 <a:solidFill>
                   <a:srgbClr val="17364A"/>
                 </a:solidFill>
@@ -5671,7 +5734,7 @@
               </a:rPr>
               <a:t>Recommended guardrails include the following:</a:t>
             </a:r>
-            <a:endParaRPr lang="en-US" sz="1550" dirty="0"/>
+            <a:endParaRPr lang="en-US" sz="1320" dirty="0"/>
           </a:p>
         </p:txBody>
       </p:sp>
@@ -5759,13 +5822,16 @@
           <a:ln/>
         </p:spPr>
         <p:txBody>
-          <a:bodyPr wrap="square" lIns="254" tIns="254" rIns="254" bIns="254" rtlCol="0" anchor="t">
+          <a:bodyPr wrap="square" lIns="508" tIns="508" rIns="508" bIns="508" rtlCol="0" anchor="t">
             <a:normAutofit/>
           </a:bodyPr>
           <a:lstStyle/>
           <a:p>
-            <a:r>
-              <a:rPr lang="en-US" sz="1380" dirty="0">
+            <a:pPr indent="0" marL="0">
+              <a:buNone/>
+            </a:pPr>
+            <a:r>
+              <a:rPr lang="en-US" sz="1220" dirty="0">
                 <a:solidFill>
                   <a:srgbClr val="17364A"/>
                 </a:solidFill>
@@ -5775,11 +5841,14 @@
               </a:rPr>
               <a:t>Recommended guardrails include the following:</a:t>
             </a:r>
-            <a:endParaRPr lang="en-US" sz="1380" dirty="0"/>
-          </a:p>
-          <a:p>
-            <a:r>
-              <a:rPr lang="en-US" sz="1380" dirty="0">
+            <a:endParaRPr lang="en-US" sz="1220" dirty="0"/>
+          </a:p>
+          <a:p>
+            <a:pPr indent="0" marL="0">
+              <a:buNone/>
+            </a:pPr>
+            <a:r>
+              <a:rPr lang="en-US" sz="1220" dirty="0">
                 <a:solidFill>
                   <a:srgbClr val="17364A"/>
                 </a:solidFill>
@@ -5789,11 +5858,14 @@
               </a:rPr>
               <a:t>Maintain an AI evidence inventory for each approved AI use.</a:t>
             </a:r>
-            <a:endParaRPr lang="en-US" sz="1380" dirty="0"/>
-          </a:p>
-          <a:p>
-            <a:r>
-              <a:rPr lang="en-US" sz="1380" dirty="0">
+            <a:endParaRPr lang="en-US" sz="1220" dirty="0"/>
+          </a:p>
+          <a:p>
+            <a:pPr indent="0" marL="0">
+              <a:buNone/>
+            </a:pPr>
+            <a:r>
+              <a:rPr lang="en-US" sz="1220" dirty="0">
                 <a:solidFill>
                   <a:srgbClr val="17364A"/>
                 </a:solidFill>
@@ -5801,9 +5873,9 @@
                 <a:ea typeface="Aptos" pitchFamily="34" charset="-122"/>
                 <a:cs typeface="Aptos" pitchFamily="34" charset="-120"/>
               </a:rPr>
-              <a:t>Use decision logs for approvals, deferrals, conditions, changes, and retirement.</a:t>
-            </a:r>
-            <a:endParaRPr lang="en-US" sz="1380" dirty="0"/>
+              <a:t>Use decision logs for approvals, deferrals, conditions, changes,.</a:t>
+            </a:r>
+            <a:endParaRPr lang="en-US" sz="1220" dirty="0"/>
           </a:p>
         </p:txBody>
       </p:sp>
@@ -5881,17 +5953,17 @@
         </p:nvSpPr>
         <p:spPr>
           <a:xfrm>
-            <a:off x="7799832" y="5001768"/>
-            <a:ext cx="3145536" cy="502920"/>
-          </a:xfrm>
-          <a:prstGeom prst="rect">
-            <a:avLst/>
-          </a:prstGeom>
-          <a:noFill/>
-          <a:ln/>
-        </p:spPr>
-        <p:txBody>
-          <a:bodyPr wrap="square" lIns="0" tIns="0" rIns="0" bIns="0" rtlCol="0" anchor="t">
+            <a:off x="7799832" y="4974336"/>
+            <a:ext cx="3145536" cy="576072"/>
+          </a:xfrm>
+          <a:prstGeom prst="rect">
+            <a:avLst/>
+          </a:prstGeom>
+          <a:noFill/>
+          <a:ln/>
+        </p:spPr>
+        <p:txBody>
+          <a:bodyPr wrap="square" lIns="254" tIns="254" rIns="254" bIns="254" rtlCol="0" anchor="t">
             <a:normAutofit/>
           </a:bodyPr>
           <a:lstStyle/>
@@ -5900,7 +5972,7 @@
               <a:buNone/>
             </a:pPr>
             <a:r>
-              <a:rPr lang="en-US" sz="1550" dirty="0">
+              <a:rPr lang="en-US" sz="1320" dirty="0">
                 <a:solidFill>
                   <a:srgbClr val="17364A"/>
                 </a:solidFill>
@@ -5908,9 +5980,9 @@
                 <a:ea typeface="Aptos" pitchFamily="34" charset="-122"/>
                 <a:cs typeface="Aptos" pitchFamily="34" charset="-120"/>
               </a:rPr>
-              <a:t>Identify what could go wrong, who could be affected, what safeguards are needed, and what evidence should be reviewed before use expands.</a:t>
-            </a:r>
-            <a:endParaRPr lang="en-US" sz="1550" dirty="0"/>
+              <a:t>Identify what could go wrong, who could be affected, what safeguards are needed, and what evidence should be reviewed.</a:t>
+            </a:r>
+            <a:endParaRPr lang="en-US" sz="1320" dirty="0"/>
           </a:p>
         </p:txBody>
       </p:sp>
@@ -6211,49 +6283,58 @@
           <a:ln/>
         </p:spPr>
         <p:txBody>
-          <a:bodyPr wrap="square" lIns="635" tIns="635" rIns="635" bIns="635" rtlCol="0" anchor="t">
+          <a:bodyPr wrap="square" lIns="1016" tIns="1016" rIns="1016" bIns="1016" rtlCol="0" anchor="t">
             <a:normAutofit/>
           </a:bodyPr>
           <a:lstStyle/>
           <a:p>
+            <a:pPr indent="0" marL="0">
+              <a:buNone/>
+            </a:pPr>
             <a:r>
               <a:rPr lang="en-US" sz="2100" dirty="0">
                 <a:solidFill>
-                  <a:srgbClr val="17364A"/>
-                </a:solidFill>
-                <a:latin typeface="Aptos" pitchFamily="34" charset="0"/>
-                <a:ea typeface="Aptos" pitchFamily="34" charset="-122"/>
-                <a:cs typeface="Aptos" pitchFamily="34" charset="-120"/>
-              </a:rPr>
-              <a:t>Preserve validation, testing, monitoring, training, SOP, and incident records.</a:t>
+                  <a:srgbClr val="003A63"/>
+                </a:solidFill>
+                <a:latin typeface="Aptos" pitchFamily="34" charset="0"/>
+                <a:ea typeface="Aptos" pitchFamily="34" charset="-122"/>
+                <a:cs typeface="Aptos" pitchFamily="34" charset="-120"/>
+              </a:rPr>
+              <a:t>• Preserve validation, testing, monitoring, training, SOP, and incident records.</a:t>
             </a:r>
             <a:endParaRPr lang="en-US" sz="2100" dirty="0"/>
           </a:p>
           <a:p>
+            <a:pPr indent="0" marL="0">
+              <a:buNone/>
+            </a:pPr>
             <a:r>
               <a:rPr lang="en-US" sz="2100" dirty="0">
                 <a:solidFill>
-                  <a:srgbClr val="17364A"/>
-                </a:solidFill>
-                <a:latin typeface="Aptos" pitchFamily="34" charset="0"/>
-                <a:ea typeface="Aptos" pitchFamily="34" charset="-122"/>
-                <a:cs typeface="Aptos" pitchFamily="34" charset="-120"/>
-              </a:rPr>
-              <a:t>Assign artifact ownership and retention expectations.</a:t>
+                  <a:srgbClr val="003A63"/>
+                </a:solidFill>
+                <a:latin typeface="Aptos" pitchFamily="34" charset="0"/>
+                <a:ea typeface="Aptos" pitchFamily="34" charset="-122"/>
+                <a:cs typeface="Aptos" pitchFamily="34" charset="-120"/>
+              </a:rPr>
+              <a:t>• Assign artifact ownership and retention expectations.</a:t>
             </a:r>
             <a:endParaRPr lang="en-US" sz="2100" dirty="0"/>
           </a:p>
           <a:p>
+            <a:pPr indent="0" marL="0">
+              <a:buNone/>
+            </a:pPr>
             <a:r>
               <a:rPr lang="en-US" sz="2100" dirty="0">
                 <a:solidFill>
-                  <a:srgbClr val="17364A"/>
-                </a:solidFill>
-                <a:latin typeface="Aptos" pitchFamily="34" charset="0"/>
-                <a:ea typeface="Aptos" pitchFamily="34" charset="-122"/>
-                <a:cs typeface="Aptos" pitchFamily="34" charset="-120"/>
-              </a:rPr>
-              <a:t>Review evidence completeness during periodic governance review.</a:t>
+                  <a:srgbClr val="003A63"/>
+                </a:solidFill>
+                <a:latin typeface="Aptos" pitchFamily="34" charset="0"/>
+                <a:ea typeface="Aptos" pitchFamily="34" charset="-122"/>
+                <a:cs typeface="Aptos" pitchFamily="34" charset="-120"/>
+              </a:rPr>
+              <a:t>• Review evidence completeness during periodic governance review.</a:t>
             </a:r>
             <a:endParaRPr lang="en-US" sz="2100" dirty="0"/>
           </a:p>
@@ -6333,17 +6414,17 @@
         </p:nvSpPr>
         <p:spPr>
           <a:xfrm>
-            <a:off x="7799832" y="1828800"/>
-            <a:ext cx="3145536" cy="685800"/>
-          </a:xfrm>
-          <a:prstGeom prst="rect">
-            <a:avLst/>
-          </a:prstGeom>
-          <a:noFill/>
-          <a:ln/>
-        </p:spPr>
-        <p:txBody>
-          <a:bodyPr wrap="square" lIns="0" tIns="0" rIns="0" bIns="0" rtlCol="0" anchor="t">
+            <a:off x="7799832" y="1801368"/>
+            <a:ext cx="3145536" cy="758952"/>
+          </a:xfrm>
+          <a:prstGeom prst="rect">
+            <a:avLst/>
+          </a:prstGeom>
+          <a:noFill/>
+          <a:ln/>
+        </p:spPr>
+        <p:txBody>
+          <a:bodyPr wrap="square" lIns="254" tIns="254" rIns="254" bIns="254" rtlCol="0" anchor="t">
             <a:normAutofit/>
           </a:bodyPr>
           <a:lstStyle/>
@@ -6352,7 +6433,7 @@
               <a:buNone/>
             </a:pPr>
             <a:r>
-              <a:rPr lang="en-US" sz="1550" dirty="0">
+              <a:rPr lang="en-US" sz="1320" dirty="0">
                 <a:solidFill>
                   <a:srgbClr val="17364A"/>
                 </a:solidFill>
@@ -6362,7 +6443,7 @@
               </a:rPr>
               <a:t>Preserve validation, testing, monitoring, training, SOP, and incident records.</a:t>
             </a:r>
-            <a:endParaRPr lang="en-US" sz="1550" dirty="0"/>
+            <a:endParaRPr lang="en-US" sz="1320" dirty="0"/>
           </a:p>
         </p:txBody>
       </p:sp>
@@ -6450,13 +6531,16 @@
           <a:ln/>
         </p:spPr>
         <p:txBody>
-          <a:bodyPr wrap="square" lIns="254" tIns="254" rIns="254" bIns="254" rtlCol="0" anchor="t">
+          <a:bodyPr wrap="square" lIns="508" tIns="508" rIns="508" bIns="508" rtlCol="0" anchor="t">
             <a:normAutofit/>
           </a:bodyPr>
           <a:lstStyle/>
           <a:p>
-            <a:r>
-              <a:rPr lang="en-US" sz="1380" dirty="0">
+            <a:pPr indent="0" marL="0">
+              <a:buNone/>
+            </a:pPr>
+            <a:r>
+              <a:rPr lang="en-US" sz="1220" dirty="0">
                 <a:solidFill>
                   <a:srgbClr val="17364A"/>
                 </a:solidFill>
@@ -6464,13 +6548,16 @@
                 <a:ea typeface="Aptos" pitchFamily="34" charset="-122"/>
                 <a:cs typeface="Aptos" pitchFamily="34" charset="-120"/>
               </a:rPr>
-              <a:t>Preserve validation, testing, monitoring, training, SOP, and incident records.</a:t>
-            </a:r>
-            <a:endParaRPr lang="en-US" sz="1380" dirty="0"/>
-          </a:p>
-          <a:p>
-            <a:r>
-              <a:rPr lang="en-US" sz="1380" dirty="0">
+              <a:t>Preserve validation, testing, monitoring, training, SOP, and.</a:t>
+            </a:r>
+            <a:endParaRPr lang="en-US" sz="1220" dirty="0"/>
+          </a:p>
+          <a:p>
+            <a:pPr indent="0" marL="0">
+              <a:buNone/>
+            </a:pPr>
+            <a:r>
+              <a:rPr lang="en-US" sz="1220" dirty="0">
                 <a:solidFill>
                   <a:srgbClr val="17364A"/>
                 </a:solidFill>
@@ -6480,11 +6567,14 @@
               </a:rPr>
               <a:t>Assign artifact ownership and retention expectations.</a:t>
             </a:r>
-            <a:endParaRPr lang="en-US" sz="1380" dirty="0"/>
-          </a:p>
-          <a:p>
-            <a:r>
-              <a:rPr lang="en-US" sz="1380" dirty="0">
+            <a:endParaRPr lang="en-US" sz="1220" dirty="0"/>
+          </a:p>
+          <a:p>
+            <a:pPr indent="0" marL="0">
+              <a:buNone/>
+            </a:pPr>
+            <a:r>
+              <a:rPr lang="en-US" sz="1220" dirty="0">
                 <a:solidFill>
                   <a:srgbClr val="17364A"/>
                 </a:solidFill>
@@ -6494,7 +6584,7 @@
               </a:rPr>
               <a:t>Review evidence completeness during periodic governance review.</a:t>
             </a:r>
-            <a:endParaRPr lang="en-US" sz="1380" dirty="0"/>
+            <a:endParaRPr lang="en-US" sz="1220" dirty="0"/>
           </a:p>
         </p:txBody>
       </p:sp>
@@ -6572,17 +6662,17 @@
         </p:nvSpPr>
         <p:spPr>
           <a:xfrm>
-            <a:off x="7799832" y="5001768"/>
-            <a:ext cx="3145536" cy="502920"/>
-          </a:xfrm>
-          <a:prstGeom prst="rect">
-            <a:avLst/>
-          </a:prstGeom>
-          <a:noFill/>
-          <a:ln/>
-        </p:spPr>
-        <p:txBody>
-          <a:bodyPr wrap="square" lIns="0" tIns="0" rIns="0" bIns="0" rtlCol="0" anchor="t">
+            <a:off x="7799832" y="4974336"/>
+            <a:ext cx="3145536" cy="576072"/>
+          </a:xfrm>
+          <a:prstGeom prst="rect">
+            <a:avLst/>
+          </a:prstGeom>
+          <a:noFill/>
+          <a:ln/>
+        </p:spPr>
+        <p:txBody>
+          <a:bodyPr wrap="square" lIns="254" tIns="254" rIns="254" bIns="254" rtlCol="0" anchor="t">
             <a:normAutofit/>
           </a:bodyPr>
           <a:lstStyle/>
@@ -6591,7 +6681,7 @@
               <a:buNone/>
             </a:pPr>
             <a:r>
-              <a:rPr lang="en-US" sz="1550" dirty="0">
+              <a:rPr lang="en-US" sz="1320" dirty="0">
                 <a:solidFill>
                   <a:srgbClr val="17364A"/>
                 </a:solidFill>
@@ -6599,9 +6689,9 @@
                 <a:ea typeface="Aptos" pitchFamily="34" charset="-122"/>
                 <a:cs typeface="Aptos" pitchFamily="34" charset="-120"/>
               </a:rPr>
-              <a:t>Identify what could go wrong, who could be affected, what safeguards are needed, and what evidence should be reviewed before use expands.</a:t>
-            </a:r>
-            <a:endParaRPr lang="en-US" sz="1550" dirty="0"/>
+              <a:t>Identify what could go wrong, who could be affected, what safeguards are needed, and what evidence should be reviewed.</a:t>
+            </a:r>
+            <a:endParaRPr lang="en-US" sz="1320" dirty="0"/>
           </a:p>
         </p:txBody>
       </p:sp>
@@ -6902,49 +6992,58 @@
           <a:ln/>
         </p:spPr>
         <p:txBody>
-          <a:bodyPr wrap="square" lIns="635" tIns="635" rIns="635" bIns="635" rtlCol="0" anchor="t">
+          <a:bodyPr wrap="square" lIns="1016" tIns="1016" rIns="1016" bIns="1016" rtlCol="0" anchor="t">
             <a:normAutofit/>
           </a:bodyPr>
           <a:lstStyle/>
           <a:p>
+            <a:pPr indent="0" marL="0">
+              <a:buNone/>
+            </a:pPr>
             <a:r>
               <a:rPr lang="en-US" sz="2100" dirty="0">
                 <a:solidFill>
-                  <a:srgbClr val="17364A"/>
-                </a:solidFill>
-                <a:latin typeface="Aptos" pitchFamily="34" charset="0"/>
-                <a:ea typeface="Aptos" pitchFamily="34" charset="-122"/>
-                <a:cs typeface="Aptos" pitchFamily="34" charset="-120"/>
-              </a:rPr>
-              <a:t>Where does this topic appear in your agency, program, or workflow?</a:t>
+                  <a:srgbClr val="003A63"/>
+                </a:solidFill>
+                <a:latin typeface="Aptos" pitchFamily="34" charset="0"/>
+                <a:ea typeface="Aptos" pitchFamily="34" charset="-122"/>
+                <a:cs typeface="Aptos" pitchFamily="34" charset="-120"/>
+              </a:rPr>
+              <a:t>• Where does this topic appear in your agency, program, or workflow?</a:t>
             </a:r>
             <a:endParaRPr lang="en-US" sz="2100" dirty="0"/>
           </a:p>
           <a:p>
+            <a:pPr indent="0" marL="0">
+              <a:buNone/>
+            </a:pPr>
             <a:r>
               <a:rPr lang="en-US" sz="2100" dirty="0">
                 <a:solidFill>
-                  <a:srgbClr val="17364A"/>
-                </a:solidFill>
-                <a:latin typeface="Aptos" pitchFamily="34" charset="0"/>
-                <a:ea typeface="Aptos" pitchFamily="34" charset="-122"/>
-                <a:cs typeface="Aptos" pitchFamily="34" charset="-120"/>
-              </a:rPr>
-              <a:t>Which staff roles would need to understand or apply this concept before AI use is approved?</a:t>
+                  <a:srgbClr val="003A63"/>
+                </a:solidFill>
+                <a:latin typeface="Aptos" pitchFamily="34" charset="0"/>
+                <a:ea typeface="Aptos" pitchFamily="34" charset="-122"/>
+                <a:cs typeface="Aptos" pitchFamily="34" charset="-120"/>
+              </a:rPr>
+              <a:t>• Which staff roles would need to understand or apply this concept before AI use is approved?</a:t>
             </a:r>
             <a:endParaRPr lang="en-US" sz="2100" dirty="0"/>
           </a:p>
           <a:p>
+            <a:pPr indent="0" marL="0">
+              <a:buNone/>
+            </a:pPr>
             <a:r>
               <a:rPr lang="en-US" sz="2100" dirty="0">
                 <a:solidFill>
-                  <a:srgbClr val="17364A"/>
-                </a:solidFill>
-                <a:latin typeface="Aptos" pitchFamily="34" charset="0"/>
-                <a:ea typeface="Aptos" pitchFamily="34" charset="-122"/>
-                <a:cs typeface="Aptos" pitchFamily="34" charset="-120"/>
-              </a:rPr>
-              <a:t>What could go wrong if this topic is not addressed before implementation?</a:t>
+                  <a:srgbClr val="003A63"/>
+                </a:solidFill>
+                <a:latin typeface="Aptos" pitchFamily="34" charset="0"/>
+                <a:ea typeface="Aptos" pitchFamily="34" charset="-122"/>
+                <a:cs typeface="Aptos" pitchFamily="34" charset="-120"/>
+              </a:rPr>
+              <a:t>• What could go wrong if this topic is not addressed before implementation?</a:t>
             </a:r>
             <a:endParaRPr lang="en-US" sz="2100" dirty="0"/>
           </a:p>
@@ -7024,17 +7123,17 @@
         </p:nvSpPr>
         <p:spPr>
           <a:xfrm>
-            <a:off x="7799832" y="1828800"/>
-            <a:ext cx="3145536" cy="685800"/>
-          </a:xfrm>
-          <a:prstGeom prst="rect">
-            <a:avLst/>
-          </a:prstGeom>
-          <a:noFill/>
-          <a:ln/>
-        </p:spPr>
-        <p:txBody>
-          <a:bodyPr wrap="square" lIns="0" tIns="0" rIns="0" bIns="0" rtlCol="0" anchor="t">
+            <a:off x="7799832" y="1801368"/>
+            <a:ext cx="3145536" cy="758952"/>
+          </a:xfrm>
+          <a:prstGeom prst="rect">
+            <a:avLst/>
+          </a:prstGeom>
+          <a:noFill/>
+          <a:ln/>
+        </p:spPr>
+        <p:txBody>
+          <a:bodyPr wrap="square" lIns="254" tIns="254" rIns="254" bIns="254" rtlCol="0" anchor="t">
             <a:normAutofit/>
           </a:bodyPr>
           <a:lstStyle/>
@@ -7043,7 +7142,7 @@
               <a:buNone/>
             </a:pPr>
             <a:r>
-              <a:rPr lang="en-US" sz="1550" dirty="0">
+              <a:rPr lang="en-US" sz="1320" dirty="0">
                 <a:solidFill>
                   <a:srgbClr val="17364A"/>
                 </a:solidFill>
@@ -7053,7 +7152,7 @@
               </a:rPr>
               <a:t>Where does this topic appear in your agency, program, or workflow?</a:t>
             </a:r>
-            <a:endParaRPr lang="en-US" sz="1550" dirty="0"/>
+            <a:endParaRPr lang="en-US" sz="1320" dirty="0"/>
           </a:p>
         </p:txBody>
       </p:sp>
@@ -7141,13 +7240,16 @@
           <a:ln/>
         </p:spPr>
         <p:txBody>
-          <a:bodyPr wrap="square" lIns="254" tIns="254" rIns="254" bIns="254" rtlCol="0" anchor="t">
+          <a:bodyPr wrap="square" lIns="508" tIns="508" rIns="508" bIns="508" rtlCol="0" anchor="t">
             <a:normAutofit/>
           </a:bodyPr>
           <a:lstStyle/>
           <a:p>
-            <a:r>
-              <a:rPr lang="en-US" sz="1380" dirty="0">
+            <a:pPr indent="0" marL="0">
+              <a:buNone/>
+            </a:pPr>
+            <a:r>
+              <a:rPr lang="en-US" sz="1220" dirty="0">
                 <a:solidFill>
                   <a:srgbClr val="17364A"/>
                 </a:solidFill>
@@ -7157,11 +7259,14 @@
               </a:rPr>
               <a:t>Where does this topic appear in your agency, program, or workflow?</a:t>
             </a:r>
-            <a:endParaRPr lang="en-US" sz="1380" dirty="0"/>
-          </a:p>
-          <a:p>
-            <a:r>
-              <a:rPr lang="en-US" sz="1380" dirty="0">
+            <a:endParaRPr lang="en-US" sz="1220" dirty="0"/>
+          </a:p>
+          <a:p>
+            <a:pPr indent="0" marL="0">
+              <a:buNone/>
+            </a:pPr>
+            <a:r>
+              <a:rPr lang="en-US" sz="1220" dirty="0">
                 <a:solidFill>
                   <a:srgbClr val="17364A"/>
                 </a:solidFill>
@@ -7169,13 +7274,16 @@
                 <a:ea typeface="Aptos" pitchFamily="34" charset="-122"/>
                 <a:cs typeface="Aptos" pitchFamily="34" charset="-120"/>
               </a:rPr>
-              <a:t>Which staff roles would need to understand or apply this concept before AI use is approved?</a:t>
-            </a:r>
-            <a:endParaRPr lang="en-US" sz="1380" dirty="0"/>
-          </a:p>
-          <a:p>
-            <a:r>
-              <a:rPr lang="en-US" sz="1380" dirty="0">
+              <a:t>Which staff roles would need to understand or apply this concept.</a:t>
+            </a:r>
+            <a:endParaRPr lang="en-US" sz="1220" dirty="0"/>
+          </a:p>
+          <a:p>
+            <a:pPr indent="0" marL="0">
+              <a:buNone/>
+            </a:pPr>
+            <a:r>
+              <a:rPr lang="en-US" sz="1220" dirty="0">
                 <a:solidFill>
                   <a:srgbClr val="17364A"/>
                 </a:solidFill>
@@ -7183,9 +7291,9 @@
                 <a:ea typeface="Aptos" pitchFamily="34" charset="-122"/>
                 <a:cs typeface="Aptos" pitchFamily="34" charset="-120"/>
               </a:rPr>
-              <a:t>What could go wrong if this topic is not addressed before implementation?</a:t>
-            </a:r>
-            <a:endParaRPr lang="en-US" sz="1380" dirty="0"/>
+              <a:t>What could go wrong if this topic is not addressed before.</a:t>
+            </a:r>
+            <a:endParaRPr lang="en-US" sz="1220" dirty="0"/>
           </a:p>
         </p:txBody>
       </p:sp>
@@ -7263,17 +7371,17 @@
         </p:nvSpPr>
         <p:spPr>
           <a:xfrm>
-            <a:off x="7799832" y="5001768"/>
-            <a:ext cx="3145536" cy="502920"/>
-          </a:xfrm>
-          <a:prstGeom prst="rect">
-            <a:avLst/>
-          </a:prstGeom>
-          <a:noFill/>
-          <a:ln/>
-        </p:spPr>
-        <p:txBody>
-          <a:bodyPr wrap="square" lIns="0" tIns="0" rIns="0" bIns="0" rtlCol="0" anchor="t">
+            <a:off x="7799832" y="4974336"/>
+            <a:ext cx="3145536" cy="576072"/>
+          </a:xfrm>
+          <a:prstGeom prst="rect">
+            <a:avLst/>
+          </a:prstGeom>
+          <a:noFill/>
+          <a:ln/>
+        </p:spPr>
+        <p:txBody>
+          <a:bodyPr wrap="square" lIns="254" tIns="254" rIns="254" bIns="254" rtlCol="0" anchor="t">
             <a:normAutofit/>
           </a:bodyPr>
           <a:lstStyle/>
@@ -7282,7 +7390,7 @@
               <a:buNone/>
             </a:pPr>
             <a:r>
-              <a:rPr lang="en-US" sz="1550" dirty="0">
+              <a:rPr lang="en-US" sz="1320" dirty="0">
                 <a:solidFill>
                   <a:srgbClr val="17364A"/>
                 </a:solidFill>
@@ -7290,9 +7398,9 @@
                 <a:ea typeface="Aptos" pitchFamily="34" charset="-122"/>
                 <a:cs typeface="Aptos" pitchFamily="34" charset="-120"/>
               </a:rPr>
-              <a:t>Connect the concept to public health purpose, responsible use, required safeguards, documentation, and the next action a department should take.</a:t>
-            </a:r>
-            <a:endParaRPr lang="en-US" sz="1550" dirty="0"/>
+              <a:t>Connect the concept to public health purpose, responsible use, required safeguards, documentation, and the next action a.</a:t>
+            </a:r>
+            <a:endParaRPr lang="en-US" sz="1320" dirty="0"/>
           </a:p>
         </p:txBody>
       </p:sp>
@@ -7593,35 +7701,41 @@
           <a:ln/>
         </p:spPr>
         <p:txBody>
-          <a:bodyPr wrap="square" lIns="635" tIns="635" rIns="635" bIns="635" rtlCol="0" anchor="t">
+          <a:bodyPr wrap="square" lIns="1016" tIns="1016" rIns="1016" bIns="1016" rtlCol="0" anchor="t">
             <a:normAutofit/>
           </a:bodyPr>
           <a:lstStyle/>
           <a:p>
+            <a:pPr indent="0" marL="0">
+              <a:buNone/>
+            </a:pPr>
             <a:r>
               <a:rPr lang="en-US" sz="2100" dirty="0">
                 <a:solidFill>
-                  <a:srgbClr val="17364A"/>
-                </a:solidFill>
-                <a:latin typeface="Aptos" pitchFamily="34" charset="0"/>
-                <a:ea typeface="Aptos" pitchFamily="34" charset="-122"/>
-                <a:cs typeface="Aptos" pitchFamily="34" charset="-120"/>
-              </a:rPr>
-              <a:t>What evidence would governance, leadership, or operations staff need before moving forward?</a:t>
+                  <a:srgbClr val="003A63"/>
+                </a:solidFill>
+                <a:latin typeface="Aptos" pitchFamily="34" charset="0"/>
+                <a:ea typeface="Aptos" pitchFamily="34" charset="-122"/>
+                <a:cs typeface="Aptos" pitchFamily="34" charset="-120"/>
+              </a:rPr>
+              <a:t>• What evidence would governance, leadership, or operations staff need before moving forward?</a:t>
             </a:r>
             <a:endParaRPr lang="en-US" sz="2100" dirty="0"/>
           </a:p>
           <a:p>
+            <a:pPr indent="0" marL="0">
+              <a:buNone/>
+            </a:pPr>
             <a:r>
               <a:rPr lang="en-US" sz="2100" dirty="0">
                 <a:solidFill>
-                  <a:srgbClr val="17364A"/>
-                </a:solidFill>
-                <a:latin typeface="Aptos" pitchFamily="34" charset="0"/>
-                <a:ea typeface="Aptos" pitchFamily="34" charset="-122"/>
-                <a:cs typeface="Aptos" pitchFamily="34" charset="-120"/>
-              </a:rPr>
-              <a:t>Which policy, data, equity, privacy, security, or workflow questions remain unresolved?</a:t>
+                  <a:srgbClr val="003A63"/>
+                </a:solidFill>
+                <a:latin typeface="Aptos" pitchFamily="34" charset="0"/>
+                <a:ea typeface="Aptos" pitchFamily="34" charset="-122"/>
+                <a:cs typeface="Aptos" pitchFamily="34" charset="-120"/>
+              </a:rPr>
+              <a:t>• Which policy, data, equity, privacy, security, or workflow questions remain unresolved?</a:t>
             </a:r>
             <a:endParaRPr lang="en-US" sz="2100" dirty="0"/>
           </a:p>
@@ -7701,17 +7815,17 @@
         </p:nvSpPr>
         <p:spPr>
           <a:xfrm>
-            <a:off x="7799832" y="1828800"/>
-            <a:ext cx="3145536" cy="685800"/>
-          </a:xfrm>
-          <a:prstGeom prst="rect">
-            <a:avLst/>
-          </a:prstGeom>
-          <a:noFill/>
-          <a:ln/>
-        </p:spPr>
-        <p:txBody>
-          <a:bodyPr wrap="square" lIns="0" tIns="0" rIns="0" bIns="0" rtlCol="0" anchor="t">
+            <a:off x="7799832" y="1801368"/>
+            <a:ext cx="3145536" cy="758952"/>
+          </a:xfrm>
+          <a:prstGeom prst="rect">
+            <a:avLst/>
+          </a:prstGeom>
+          <a:noFill/>
+          <a:ln/>
+        </p:spPr>
+        <p:txBody>
+          <a:bodyPr wrap="square" lIns="254" tIns="254" rIns="254" bIns="254" rtlCol="0" anchor="t">
             <a:normAutofit/>
           </a:bodyPr>
           <a:lstStyle/>
@@ -7720,7 +7834,7 @@
               <a:buNone/>
             </a:pPr>
             <a:r>
-              <a:rPr lang="en-US" sz="1550" dirty="0">
+              <a:rPr lang="en-US" sz="1320" dirty="0">
                 <a:solidFill>
                   <a:srgbClr val="17364A"/>
                 </a:solidFill>
@@ -7730,7 +7844,7 @@
               </a:rPr>
               <a:t>What evidence would governance, leadership, or operations staff need before moving forward?</a:t>
             </a:r>
-            <a:endParaRPr lang="en-US" sz="1550" dirty="0"/>
+            <a:endParaRPr lang="en-US" sz="1320" dirty="0"/>
           </a:p>
         </p:txBody>
       </p:sp>
@@ -7818,13 +7932,16 @@
           <a:ln/>
         </p:spPr>
         <p:txBody>
-          <a:bodyPr wrap="square" lIns="254" tIns="254" rIns="254" bIns="254" rtlCol="0" anchor="t">
+          <a:bodyPr wrap="square" lIns="508" tIns="508" rIns="508" bIns="508" rtlCol="0" anchor="t">
             <a:normAutofit/>
           </a:bodyPr>
           <a:lstStyle/>
           <a:p>
-            <a:r>
-              <a:rPr lang="en-US" sz="1380" dirty="0">
+            <a:pPr indent="0" marL="0">
+              <a:buNone/>
+            </a:pPr>
+            <a:r>
+              <a:rPr lang="en-US" sz="1220" dirty="0">
                 <a:solidFill>
                   <a:srgbClr val="17364A"/>
                 </a:solidFill>
@@ -7832,13 +7949,16 @@
                 <a:ea typeface="Aptos" pitchFamily="34" charset="-122"/>
                 <a:cs typeface="Aptos" pitchFamily="34" charset="-120"/>
               </a:rPr>
-              <a:t>What evidence would governance, leadership, or operations staff need before moving forward?</a:t>
-            </a:r>
-            <a:endParaRPr lang="en-US" sz="1380" dirty="0"/>
-          </a:p>
-          <a:p>
-            <a:r>
-              <a:rPr lang="en-US" sz="1380" dirty="0">
+              <a:t>What evidence would governance, leadership, or operations staff.</a:t>
+            </a:r>
+            <a:endParaRPr lang="en-US" sz="1220" dirty="0"/>
+          </a:p>
+          <a:p>
+            <a:pPr indent="0" marL="0">
+              <a:buNone/>
+            </a:pPr>
+            <a:r>
+              <a:rPr lang="en-US" sz="1220" dirty="0">
                 <a:solidFill>
                   <a:srgbClr val="17364A"/>
                 </a:solidFill>
@@ -7846,9 +7966,9 @@
                 <a:ea typeface="Aptos" pitchFamily="34" charset="-122"/>
                 <a:cs typeface="Aptos" pitchFamily="34" charset="-120"/>
               </a:rPr>
-              <a:t>Which policy, data, equity, privacy, security, or workflow questions remain unresolved?</a:t>
-            </a:r>
-            <a:endParaRPr lang="en-US" sz="1380" dirty="0"/>
+              <a:t>Which policy, data, equity, privacy, security, or workflow.</a:t>
+            </a:r>
+            <a:endParaRPr lang="en-US" sz="1220" dirty="0"/>
           </a:p>
         </p:txBody>
       </p:sp>
@@ -7926,17 +8046,17 @@
         </p:nvSpPr>
         <p:spPr>
           <a:xfrm>
-            <a:off x="7799832" y="5001768"/>
-            <a:ext cx="3145536" cy="502920"/>
-          </a:xfrm>
-          <a:prstGeom prst="rect">
-            <a:avLst/>
-          </a:prstGeom>
-          <a:noFill/>
-          <a:ln/>
-        </p:spPr>
-        <p:txBody>
-          <a:bodyPr wrap="square" lIns="0" tIns="0" rIns="0" bIns="0" rtlCol="0" anchor="t">
+            <a:off x="7799832" y="4974336"/>
+            <a:ext cx="3145536" cy="576072"/>
+          </a:xfrm>
+          <a:prstGeom prst="rect">
+            <a:avLst/>
+          </a:prstGeom>
+          <a:noFill/>
+          <a:ln/>
+        </p:spPr>
+        <p:txBody>
+          <a:bodyPr wrap="square" lIns="254" tIns="254" rIns="254" bIns="254" rtlCol="0" anchor="t">
             <a:normAutofit/>
           </a:bodyPr>
           <a:lstStyle/>
@@ -7945,7 +8065,7 @@
               <a:buNone/>
             </a:pPr>
             <a:r>
-              <a:rPr lang="en-US" sz="1550" dirty="0">
+              <a:rPr lang="en-US" sz="1320" dirty="0">
                 <a:solidFill>
                   <a:srgbClr val="17364A"/>
                 </a:solidFill>
@@ -7953,9 +8073,9 @@
                 <a:ea typeface="Aptos" pitchFamily="34" charset="-122"/>
                 <a:cs typeface="Aptos" pitchFamily="34" charset="-120"/>
               </a:rPr>
-              <a:t>Connect the concept to public health purpose, responsible use, required safeguards, documentation, and the next action a department should take.</a:t>
-            </a:r>
-            <a:endParaRPr lang="en-US" sz="1550" dirty="0"/>
+              <a:t>Connect the concept to public health purpose, responsible use, required safeguards, documentation, and the next action a.</a:t>
+            </a:r>
+            <a:endParaRPr lang="en-US" sz="1320" dirty="0"/>
           </a:p>
         </p:txBody>
       </p:sp>
@@ -8256,35 +8376,41 @@
           <a:ln/>
         </p:spPr>
         <p:txBody>
-          <a:bodyPr wrap="square" lIns="635" tIns="635" rIns="635" bIns="635" rtlCol="0" anchor="t">
+          <a:bodyPr wrap="square" lIns="1016" tIns="1016" rIns="1016" bIns="1016" rtlCol="0" anchor="t">
             <a:normAutofit/>
           </a:bodyPr>
           <a:lstStyle/>
           <a:p>
+            <a:pPr indent="0" marL="0">
+              <a:buNone/>
+            </a:pPr>
             <a:r>
               <a:rPr lang="en-US" sz="2100" dirty="0">
                 <a:solidFill>
-                  <a:srgbClr val="17364A"/>
-                </a:solidFill>
-                <a:latin typeface="Aptos" pitchFamily="34" charset="0"/>
-                <a:ea typeface="Aptos" pitchFamily="34" charset="-122"/>
-                <a:cs typeface="Aptos" pitchFamily="34" charset="-120"/>
-              </a:rPr>
-              <a:t>Create an AI audit readiness evidence inventory for one AI use case.</a:t>
+                  <a:srgbClr val="003A63"/>
+                </a:solidFill>
+                <a:latin typeface="Aptos" pitchFamily="34" charset="0"/>
+                <a:ea typeface="Aptos" pitchFamily="34" charset="-122"/>
+                <a:cs typeface="Aptos" pitchFamily="34" charset="-120"/>
+              </a:rPr>
+              <a:t>• Create an AI audit readiness evidence inventory for one AI use case.</a:t>
             </a:r>
             <a:endParaRPr lang="en-US" sz="2100" dirty="0"/>
           </a:p>
           <a:p>
+            <a:pPr indent="0" marL="0">
+              <a:buNone/>
+            </a:pPr>
             <a:r>
               <a:rPr lang="en-US" sz="2100" dirty="0">
                 <a:solidFill>
-                  <a:srgbClr val="17364A"/>
-                </a:solidFill>
-                <a:latin typeface="Aptos" pitchFamily="34" charset="0"/>
-                <a:ea typeface="Aptos" pitchFamily="34" charset="-122"/>
-                <a:cs typeface="Aptos" pitchFamily="34" charset="-120"/>
-              </a:rPr>
-              <a:t>Identify required artifacts from intake through retirement, the owner of each artifact, storage.</a:t>
+                  <a:srgbClr val="003A63"/>
+                </a:solidFill>
+                <a:latin typeface="Aptos" pitchFamily="34" charset="0"/>
+                <a:ea typeface="Aptos" pitchFamily="34" charset="-122"/>
+                <a:cs typeface="Aptos" pitchFamily="34" charset="-120"/>
+              </a:rPr>
+              <a:t>• Identify required artifacts from intake through retirement, the owner of each artifact, storage.</a:t>
             </a:r>
             <a:endParaRPr lang="en-US" sz="2100" dirty="0"/>
           </a:p>
@@ -8364,17 +8490,17 @@
         </p:nvSpPr>
         <p:spPr>
           <a:xfrm>
-            <a:off x="7799832" y="1828800"/>
-            <a:ext cx="3145536" cy="685800"/>
-          </a:xfrm>
-          <a:prstGeom prst="rect">
-            <a:avLst/>
-          </a:prstGeom>
-          <a:noFill/>
-          <a:ln/>
-        </p:spPr>
-        <p:txBody>
-          <a:bodyPr wrap="square" lIns="0" tIns="0" rIns="0" bIns="0" rtlCol="0" anchor="t">
+            <a:off x="7799832" y="1801368"/>
+            <a:ext cx="3145536" cy="758952"/>
+          </a:xfrm>
+          <a:prstGeom prst="rect">
+            <a:avLst/>
+          </a:prstGeom>
+          <a:noFill/>
+          <a:ln/>
+        </p:spPr>
+        <p:txBody>
+          <a:bodyPr wrap="square" lIns="254" tIns="254" rIns="254" bIns="254" rtlCol="0" anchor="t">
             <a:normAutofit/>
           </a:bodyPr>
           <a:lstStyle/>
@@ -8383,7 +8509,7 @@
               <a:buNone/>
             </a:pPr>
             <a:r>
-              <a:rPr lang="en-US" sz="1550" dirty="0">
+              <a:rPr lang="en-US" sz="1320" dirty="0">
                 <a:solidFill>
                   <a:srgbClr val="17364A"/>
                 </a:solidFill>
@@ -8393,7 +8519,7 @@
               </a:rPr>
               <a:t>Create an AI audit readiness evidence inventory for one AI use case.</a:t>
             </a:r>
-            <a:endParaRPr lang="en-US" sz="1550" dirty="0"/>
+            <a:endParaRPr lang="en-US" sz="1320" dirty="0"/>
           </a:p>
         </p:txBody>
       </p:sp>
@@ -8481,13 +8607,16 @@
           <a:ln/>
         </p:spPr>
         <p:txBody>
-          <a:bodyPr wrap="square" lIns="254" tIns="254" rIns="254" bIns="254" rtlCol="0" anchor="t">
+          <a:bodyPr wrap="square" lIns="508" tIns="508" rIns="508" bIns="508" rtlCol="0" anchor="t">
             <a:normAutofit/>
           </a:bodyPr>
           <a:lstStyle/>
           <a:p>
-            <a:r>
-              <a:rPr lang="en-US" sz="1380" dirty="0">
+            <a:pPr indent="0" marL="0">
+              <a:buNone/>
+            </a:pPr>
+            <a:r>
+              <a:rPr lang="en-US" sz="1220" dirty="0">
                 <a:solidFill>
                   <a:srgbClr val="17364A"/>
                 </a:solidFill>
@@ -8497,11 +8626,14 @@
               </a:rPr>
               <a:t>Create an AI audit readiness evidence inventory for one AI use case.</a:t>
             </a:r>
-            <a:endParaRPr lang="en-US" sz="1380" dirty="0"/>
-          </a:p>
-          <a:p>
-            <a:r>
-              <a:rPr lang="en-US" sz="1380" dirty="0">
+            <a:endParaRPr lang="en-US" sz="1220" dirty="0"/>
+          </a:p>
+          <a:p>
+            <a:pPr indent="0" marL="0">
+              <a:buNone/>
+            </a:pPr>
+            <a:r>
+              <a:rPr lang="en-US" sz="1220" dirty="0">
                 <a:solidFill>
                   <a:srgbClr val="17364A"/>
                 </a:solidFill>
@@ -8509,9 +8641,9 @@
                 <a:ea typeface="Aptos" pitchFamily="34" charset="-122"/>
                 <a:cs typeface="Aptos" pitchFamily="34" charset="-120"/>
               </a:rPr>
-              <a:t>Identify required artifacts from intake through retirement, the owner of each artifact,.</a:t>
-            </a:r>
-            <a:endParaRPr lang="en-US" sz="1380" dirty="0"/>
+              <a:t>Identify required artifacts from intake through retirement, the.</a:t>
+            </a:r>
+            <a:endParaRPr lang="en-US" sz="1220" dirty="0"/>
           </a:p>
         </p:txBody>
       </p:sp>
@@ -8589,17 +8721,17 @@
         </p:nvSpPr>
         <p:spPr>
           <a:xfrm>
-            <a:off x="7799832" y="5001768"/>
-            <a:ext cx="3145536" cy="502920"/>
-          </a:xfrm>
-          <a:prstGeom prst="rect">
-            <a:avLst/>
-          </a:prstGeom>
-          <a:noFill/>
-          <a:ln/>
-        </p:spPr>
-        <p:txBody>
-          <a:bodyPr wrap="square" lIns="0" tIns="0" rIns="0" bIns="0" rtlCol="0" anchor="t">
+            <a:off x="7799832" y="4974336"/>
+            <a:ext cx="3145536" cy="576072"/>
+          </a:xfrm>
+          <a:prstGeom prst="rect">
+            <a:avLst/>
+          </a:prstGeom>
+          <a:noFill/>
+          <a:ln/>
+        </p:spPr>
+        <p:txBody>
+          <a:bodyPr wrap="square" lIns="254" tIns="254" rIns="254" bIns="254" rtlCol="0" anchor="t">
             <a:normAutofit/>
           </a:bodyPr>
           <a:lstStyle/>
@@ -8608,7 +8740,7 @@
               <a:buNone/>
             </a:pPr>
             <a:r>
-              <a:rPr lang="en-US" sz="1550" dirty="0">
+              <a:rPr lang="en-US" sz="1320" dirty="0">
                 <a:solidFill>
                   <a:srgbClr val="17364A"/>
                 </a:solidFill>
@@ -8616,9 +8748,9 @@
                 <a:ea typeface="Aptos" pitchFamily="34" charset="-122"/>
                 <a:cs typeface="Aptos" pitchFamily="34" charset="-120"/>
               </a:rPr>
-              <a:t>Use the assignment to test whether you can explain the concept, apply it to a realistic public health situation, and identify what would need review before the work moves forward.</a:t>
-            </a:r>
-            <a:endParaRPr lang="en-US" sz="1550" dirty="0"/>
+              <a:t>Use the assignment to test whether you can explain the concept, apply it to a realistic public health situation, and.</a:t>
+            </a:r>
+            <a:endParaRPr lang="en-US" sz="1320" dirty="0"/>
           </a:p>
         </p:txBody>
       </p:sp>
@@ -8919,49 +9051,58 @@
           <a:ln/>
         </p:spPr>
         <p:txBody>
-          <a:bodyPr wrap="square" lIns="635" tIns="635" rIns="635" bIns="635" rtlCol="0" anchor="t">
+          <a:bodyPr wrap="square" lIns="1016" tIns="1016" rIns="1016" bIns="1016" rtlCol="0" anchor="t">
             <a:normAutofit/>
           </a:bodyPr>
           <a:lstStyle/>
           <a:p>
+            <a:pPr indent="0" marL="0">
+              <a:buNone/>
+            </a:pPr>
             <a:r>
               <a:rPr lang="en-US" sz="2100" dirty="0">
                 <a:solidFill>
-                  <a:srgbClr val="17364A"/>
-                </a:solidFill>
-                <a:latin typeface="Aptos" pitchFamily="34" charset="0"/>
-                <a:ea typeface="Aptos" pitchFamily="34" charset="-122"/>
-                <a:cs typeface="Aptos" pitchFamily="34" charset="-120"/>
-              </a:rPr>
-              <a:t>AI evidence inventory</a:t>
+                  <a:srgbClr val="003A63"/>
+                </a:solidFill>
+                <a:latin typeface="Aptos" pitchFamily="34" charset="0"/>
+                <a:ea typeface="Aptos" pitchFamily="34" charset="-122"/>
+                <a:cs typeface="Aptos" pitchFamily="34" charset="-120"/>
+              </a:rPr>
+              <a:t>• AI evidence inventory</a:t>
             </a:r>
             <a:endParaRPr lang="en-US" sz="2100" dirty="0"/>
           </a:p>
           <a:p>
+            <a:pPr indent="0" marL="0">
+              <a:buNone/>
+            </a:pPr>
             <a:r>
               <a:rPr lang="en-US" sz="2100" dirty="0">
                 <a:solidFill>
-                  <a:srgbClr val="17364A"/>
-                </a:solidFill>
-                <a:latin typeface="Aptos" pitchFamily="34" charset="0"/>
-                <a:ea typeface="Aptos" pitchFamily="34" charset="-122"/>
-                <a:cs typeface="Aptos" pitchFamily="34" charset="-120"/>
-              </a:rPr>
-              <a:t>Decision log template</a:t>
+                  <a:srgbClr val="003A63"/>
+                </a:solidFill>
+                <a:latin typeface="Aptos" pitchFamily="34" charset="0"/>
+                <a:ea typeface="Aptos" pitchFamily="34" charset="-122"/>
+                <a:cs typeface="Aptos" pitchFamily="34" charset="-120"/>
+              </a:rPr>
+              <a:t>• Decision log template</a:t>
             </a:r>
             <a:endParaRPr lang="en-US" sz="2100" dirty="0"/>
           </a:p>
           <a:p>
+            <a:pPr indent="0" marL="0">
+              <a:buNone/>
+            </a:pPr>
             <a:r>
               <a:rPr lang="en-US" sz="2100" dirty="0">
                 <a:solidFill>
-                  <a:srgbClr val="17364A"/>
-                </a:solidFill>
-                <a:latin typeface="Aptos" pitchFamily="34" charset="0"/>
-                <a:ea typeface="Aptos" pitchFamily="34" charset="-122"/>
-                <a:cs typeface="Aptos" pitchFamily="34" charset="-120"/>
-              </a:rPr>
-              <a:t>Artifact ownership and retention table</a:t>
+                  <a:srgbClr val="003A63"/>
+                </a:solidFill>
+                <a:latin typeface="Aptos" pitchFamily="34" charset="0"/>
+                <a:ea typeface="Aptos" pitchFamily="34" charset="-122"/>
+                <a:cs typeface="Aptos" pitchFamily="34" charset="-120"/>
+              </a:rPr>
+              <a:t>• Artifact ownership and retention table</a:t>
             </a:r>
             <a:endParaRPr lang="en-US" sz="2100" dirty="0"/>
           </a:p>
@@ -9041,17 +9182,17 @@
         </p:nvSpPr>
         <p:spPr>
           <a:xfrm>
-            <a:off x="7799832" y="1828800"/>
-            <a:ext cx="3145536" cy="685800"/>
-          </a:xfrm>
-          <a:prstGeom prst="rect">
-            <a:avLst/>
-          </a:prstGeom>
-          <a:noFill/>
-          <a:ln/>
-        </p:spPr>
-        <p:txBody>
-          <a:bodyPr wrap="square" lIns="0" tIns="0" rIns="0" bIns="0" rtlCol="0" anchor="t">
+            <a:off x="7799832" y="1801368"/>
+            <a:ext cx="3145536" cy="758952"/>
+          </a:xfrm>
+          <a:prstGeom prst="rect">
+            <a:avLst/>
+          </a:prstGeom>
+          <a:noFill/>
+          <a:ln/>
+        </p:spPr>
+        <p:txBody>
+          <a:bodyPr wrap="square" lIns="254" tIns="254" rIns="254" bIns="254" rtlCol="0" anchor="t">
             <a:normAutofit/>
           </a:bodyPr>
           <a:lstStyle/>
@@ -9060,7 +9201,7 @@
               <a:buNone/>
             </a:pPr>
             <a:r>
-              <a:rPr lang="en-US" sz="1550" dirty="0">
+              <a:rPr lang="en-US" sz="1320" dirty="0">
                 <a:solidFill>
                   <a:srgbClr val="17364A"/>
                 </a:solidFill>
@@ -9070,7 +9211,7 @@
               </a:rPr>
               <a:t>AI evidence inventory</a:t>
             </a:r>
-            <a:endParaRPr lang="en-US" sz="1550" dirty="0"/>
+            <a:endParaRPr lang="en-US" sz="1320" dirty="0"/>
           </a:p>
         </p:txBody>
       </p:sp>
@@ -9158,13 +9299,16 @@
           <a:ln/>
         </p:spPr>
         <p:txBody>
-          <a:bodyPr wrap="square" lIns="254" tIns="254" rIns="254" bIns="254" rtlCol="0" anchor="t">
+          <a:bodyPr wrap="square" lIns="508" tIns="508" rIns="508" bIns="508" rtlCol="0" anchor="t">
             <a:normAutofit/>
           </a:bodyPr>
           <a:lstStyle/>
           <a:p>
-            <a:r>
-              <a:rPr lang="en-US" sz="1380" dirty="0">
+            <a:pPr indent="0" marL="0">
+              <a:buNone/>
+            </a:pPr>
+            <a:r>
+              <a:rPr lang="en-US" sz="1220" dirty="0">
                 <a:solidFill>
                   <a:srgbClr val="17364A"/>
                 </a:solidFill>
@@ -9174,11 +9318,14 @@
               </a:rPr>
               <a:t>AI evidence inventory</a:t>
             </a:r>
-            <a:endParaRPr lang="en-US" sz="1380" dirty="0"/>
-          </a:p>
-          <a:p>
-            <a:r>
-              <a:rPr lang="en-US" sz="1380" dirty="0">
+            <a:endParaRPr lang="en-US" sz="1220" dirty="0"/>
+          </a:p>
+          <a:p>
+            <a:pPr indent="0" marL="0">
+              <a:buNone/>
+            </a:pPr>
+            <a:r>
+              <a:rPr lang="en-US" sz="1220" dirty="0">
                 <a:solidFill>
                   <a:srgbClr val="17364A"/>
                 </a:solidFill>
@@ -9188,11 +9335,14 @@
               </a:rPr>
               <a:t>Decision log template</a:t>
             </a:r>
-            <a:endParaRPr lang="en-US" sz="1380" dirty="0"/>
-          </a:p>
-          <a:p>
-            <a:r>
-              <a:rPr lang="en-US" sz="1380" dirty="0">
+            <a:endParaRPr lang="en-US" sz="1220" dirty="0"/>
+          </a:p>
+          <a:p>
+            <a:pPr indent="0" marL="0">
+              <a:buNone/>
+            </a:pPr>
+            <a:r>
+              <a:rPr lang="en-US" sz="1220" dirty="0">
                 <a:solidFill>
                   <a:srgbClr val="17364A"/>
                 </a:solidFill>
@@ -9202,7 +9352,7 @@
               </a:rPr>
               <a:t>Artifact ownership and retention table</a:t>
             </a:r>
-            <a:endParaRPr lang="en-US" sz="1380" dirty="0"/>
+            <a:endParaRPr lang="en-US" sz="1220" dirty="0"/>
           </a:p>
         </p:txBody>
       </p:sp>
@@ -9280,17 +9430,17 @@
         </p:nvSpPr>
         <p:spPr>
           <a:xfrm>
-            <a:off x="7799832" y="5001768"/>
-            <a:ext cx="3145536" cy="502920"/>
-          </a:xfrm>
-          <a:prstGeom prst="rect">
-            <a:avLst/>
-          </a:prstGeom>
-          <a:noFill/>
-          <a:ln/>
-        </p:spPr>
-        <p:txBody>
-          <a:bodyPr wrap="square" lIns="0" tIns="0" rIns="0" bIns="0" rtlCol="0" anchor="t">
+            <a:off x="7799832" y="4974336"/>
+            <a:ext cx="3145536" cy="576072"/>
+          </a:xfrm>
+          <a:prstGeom prst="rect">
+            <a:avLst/>
+          </a:prstGeom>
+          <a:noFill/>
+          <a:ln/>
+        </p:spPr>
+        <p:txBody>
+          <a:bodyPr wrap="square" lIns="254" tIns="254" rIns="254" bIns="254" rtlCol="0" anchor="t">
             <a:normAutofit/>
           </a:bodyPr>
           <a:lstStyle/>
@@ -9299,7 +9449,7 @@
               <a:buNone/>
             </a:pPr>
             <a:r>
-              <a:rPr lang="en-US" sz="1550" dirty="0">
+              <a:rPr lang="en-US" sz="1320" dirty="0">
                 <a:solidFill>
                   <a:srgbClr val="17364A"/>
                 </a:solidFill>
@@ -9307,9 +9457,9 @@
                 <a:ea typeface="Aptos" pitchFamily="34" charset="-122"/>
                 <a:cs typeface="Aptos" pitchFamily="34" charset="-120"/>
               </a:rPr>
-              <a:t>Connect the concept to public health purpose, responsible use, required safeguards, documentation, and the next action a department should take.</a:t>
-            </a:r>
-            <a:endParaRPr lang="en-US" sz="1550" dirty="0"/>
+              <a:t>Connect the concept to public health purpose, responsible use, required safeguards, documentation, and the next action a.</a:t>
+            </a:r>
+            <a:endParaRPr lang="en-US" sz="1320" dirty="0"/>
           </a:p>
         </p:txBody>
       </p:sp>
@@ -9610,35 +9760,41 @@
           <a:ln/>
         </p:spPr>
         <p:txBody>
-          <a:bodyPr wrap="square" lIns="635" tIns="635" rIns="635" bIns="635" rtlCol="0" anchor="t">
+          <a:bodyPr wrap="square" lIns="1016" tIns="1016" rIns="1016" bIns="1016" rtlCol="0" anchor="t">
             <a:normAutofit/>
           </a:bodyPr>
           <a:lstStyle/>
           <a:p>
+            <a:pPr indent="0" marL="0">
+              <a:buNone/>
+            </a:pPr>
             <a:r>
               <a:rPr lang="en-US" sz="2100" dirty="0">
                 <a:solidFill>
-                  <a:srgbClr val="17364A"/>
-                </a:solidFill>
-                <a:latin typeface="Aptos" pitchFamily="34" charset="0"/>
-                <a:ea typeface="Aptos" pitchFamily="34" charset="-122"/>
-                <a:cs typeface="Aptos" pitchFamily="34" charset="-120"/>
-              </a:rPr>
-              <a:t>Gap list for missing evidence</a:t>
+                  <a:srgbClr val="003A63"/>
+                </a:solidFill>
+                <a:latin typeface="Aptos" pitchFamily="34" charset="0"/>
+                <a:ea typeface="Aptos" pitchFamily="34" charset="-122"/>
+                <a:cs typeface="Aptos" pitchFamily="34" charset="-120"/>
+              </a:rPr>
+              <a:t>• Gap list for missing evidence</a:t>
             </a:r>
             <a:endParaRPr lang="en-US" sz="2100" dirty="0"/>
           </a:p>
           <a:p>
+            <a:pPr indent="0" marL="0">
+              <a:buNone/>
+            </a:pPr>
             <a:r>
               <a:rPr lang="en-US" sz="2100" dirty="0">
                 <a:solidFill>
-                  <a:srgbClr val="17364A"/>
-                </a:solidFill>
-                <a:latin typeface="Aptos" pitchFamily="34" charset="0"/>
-                <a:ea typeface="Aptos" pitchFamily="34" charset="-122"/>
-                <a:cs typeface="Aptos" pitchFamily="34" charset="-120"/>
-              </a:rPr>
-              <a:t>Review schedule</a:t>
+                  <a:srgbClr val="003A63"/>
+                </a:solidFill>
+                <a:latin typeface="Aptos" pitchFamily="34" charset="0"/>
+                <a:ea typeface="Aptos" pitchFamily="34" charset="-122"/>
+                <a:cs typeface="Aptos" pitchFamily="34" charset="-120"/>
+              </a:rPr>
+              <a:t>• Review schedule</a:t>
             </a:r>
             <a:endParaRPr lang="en-US" sz="2100" dirty="0"/>
           </a:p>
@@ -9718,17 +9874,17 @@
         </p:nvSpPr>
         <p:spPr>
           <a:xfrm>
-            <a:off x="7799832" y="1828800"/>
-            <a:ext cx="3145536" cy="685800"/>
-          </a:xfrm>
-          <a:prstGeom prst="rect">
-            <a:avLst/>
-          </a:prstGeom>
-          <a:noFill/>
-          <a:ln/>
-        </p:spPr>
-        <p:txBody>
-          <a:bodyPr wrap="square" lIns="0" tIns="0" rIns="0" bIns="0" rtlCol="0" anchor="t">
+            <a:off x="7799832" y="1801368"/>
+            <a:ext cx="3145536" cy="758952"/>
+          </a:xfrm>
+          <a:prstGeom prst="rect">
+            <a:avLst/>
+          </a:prstGeom>
+          <a:noFill/>
+          <a:ln/>
+        </p:spPr>
+        <p:txBody>
+          <a:bodyPr wrap="square" lIns="254" tIns="254" rIns="254" bIns="254" rtlCol="0" anchor="t">
             <a:normAutofit/>
           </a:bodyPr>
           <a:lstStyle/>
@@ -9737,7 +9893,7 @@
               <a:buNone/>
             </a:pPr>
             <a:r>
-              <a:rPr lang="en-US" sz="1550" dirty="0">
+              <a:rPr lang="en-US" sz="1320" dirty="0">
                 <a:solidFill>
                   <a:srgbClr val="17364A"/>
                 </a:solidFill>
@@ -9747,7 +9903,7 @@
               </a:rPr>
               <a:t>Gap list for missing evidence</a:t>
             </a:r>
-            <a:endParaRPr lang="en-US" sz="1550" dirty="0"/>
+            <a:endParaRPr lang="en-US" sz="1320" dirty="0"/>
           </a:p>
         </p:txBody>
       </p:sp>
@@ -9835,13 +9991,16 @@
           <a:ln/>
         </p:spPr>
         <p:txBody>
-          <a:bodyPr wrap="square" lIns="254" tIns="254" rIns="254" bIns="254" rtlCol="0" anchor="t">
+          <a:bodyPr wrap="square" lIns="508" tIns="508" rIns="508" bIns="508" rtlCol="0" anchor="t">
             <a:normAutofit/>
           </a:bodyPr>
           <a:lstStyle/>
           <a:p>
-            <a:r>
-              <a:rPr lang="en-US" sz="1380" dirty="0">
+            <a:pPr indent="0" marL="0">
+              <a:buNone/>
+            </a:pPr>
+            <a:r>
+              <a:rPr lang="en-US" sz="1220" dirty="0">
                 <a:solidFill>
                   <a:srgbClr val="17364A"/>
                 </a:solidFill>
@@ -9851,11 +10010,14 @@
               </a:rPr>
               <a:t>Gap list for missing evidence</a:t>
             </a:r>
-            <a:endParaRPr lang="en-US" sz="1380" dirty="0"/>
-          </a:p>
-          <a:p>
-            <a:r>
-              <a:rPr lang="en-US" sz="1380" dirty="0">
+            <a:endParaRPr lang="en-US" sz="1220" dirty="0"/>
+          </a:p>
+          <a:p>
+            <a:pPr indent="0" marL="0">
+              <a:buNone/>
+            </a:pPr>
+            <a:r>
+              <a:rPr lang="en-US" sz="1220" dirty="0">
                 <a:solidFill>
                   <a:srgbClr val="17364A"/>
                 </a:solidFill>
@@ -9865,7 +10027,7 @@
               </a:rPr>
               <a:t>Review schedule</a:t>
             </a:r>
-            <a:endParaRPr lang="en-US" sz="1380" dirty="0"/>
+            <a:endParaRPr lang="en-US" sz="1220" dirty="0"/>
           </a:p>
         </p:txBody>
       </p:sp>
@@ -9943,17 +10105,17 @@
         </p:nvSpPr>
         <p:spPr>
           <a:xfrm>
-            <a:off x="7799832" y="5001768"/>
-            <a:ext cx="3145536" cy="502920"/>
-          </a:xfrm>
-          <a:prstGeom prst="rect">
-            <a:avLst/>
-          </a:prstGeom>
-          <a:noFill/>
-          <a:ln/>
-        </p:spPr>
-        <p:txBody>
-          <a:bodyPr wrap="square" lIns="0" tIns="0" rIns="0" bIns="0" rtlCol="0" anchor="t">
+            <a:off x="7799832" y="4974336"/>
+            <a:ext cx="3145536" cy="576072"/>
+          </a:xfrm>
+          <a:prstGeom prst="rect">
+            <a:avLst/>
+          </a:prstGeom>
+          <a:noFill/>
+          <a:ln/>
+        </p:spPr>
+        <p:txBody>
+          <a:bodyPr wrap="square" lIns="254" tIns="254" rIns="254" bIns="254" rtlCol="0" anchor="t">
             <a:normAutofit/>
           </a:bodyPr>
           <a:lstStyle/>
@@ -9962,7 +10124,7 @@
               <a:buNone/>
             </a:pPr>
             <a:r>
-              <a:rPr lang="en-US" sz="1550" dirty="0">
+              <a:rPr lang="en-US" sz="1320" dirty="0">
                 <a:solidFill>
                   <a:srgbClr val="17364A"/>
                 </a:solidFill>
@@ -9970,9 +10132,9 @@
                 <a:ea typeface="Aptos" pitchFamily="34" charset="-122"/>
                 <a:cs typeface="Aptos" pitchFamily="34" charset="-120"/>
               </a:rPr>
-              <a:t>Connect the concept to public health purpose, responsible use, required safeguards, documentation, and the next action a department should take.</a:t>
-            </a:r>
-            <a:endParaRPr lang="en-US" sz="1550" dirty="0"/>
+              <a:t>Connect the concept to public health purpose, responsible use, required safeguards, documentation, and the next action a.</a:t>
+            </a:r>
+            <a:endParaRPr lang="en-US" sz="1320" dirty="0"/>
           </a:p>
         </p:txBody>
       </p:sp>
@@ -10273,49 +10435,58 @@
           <a:ln/>
         </p:spPr>
         <p:txBody>
-          <a:bodyPr wrap="square" lIns="635" tIns="635" rIns="635" bIns="635" rtlCol="0" anchor="t">
+          <a:bodyPr wrap="square" lIns="1016" tIns="1016" rIns="1016" bIns="1016" rtlCol="0" anchor="t">
             <a:normAutofit/>
           </a:bodyPr>
           <a:lstStyle/>
           <a:p>
+            <a:pPr indent="0" marL="0">
+              <a:buNone/>
+            </a:pPr>
             <a:r>
               <a:rPr lang="en-US" sz="2100" dirty="0">
                 <a:solidFill>
-                  <a:srgbClr val="17364A"/>
-                </a:solidFill>
-                <a:latin typeface="Aptos" pitchFamily="34" charset="0"/>
-                <a:ea typeface="Aptos" pitchFamily="34" charset="-122"/>
-                <a:cs typeface="Aptos" pitchFamily="34" charset="-120"/>
-              </a:rPr>
-              <a:t>AI audit readiness is the agency’s ability to show what AI systems are used, why they were approved, what data.</a:t>
+                  <a:srgbClr val="003A63"/>
+                </a:solidFill>
+                <a:latin typeface="Aptos" pitchFamily="34" charset="0"/>
+                <a:ea typeface="Aptos" pitchFamily="34" charset="-122"/>
+                <a:cs typeface="Aptos" pitchFamily="34" charset="-120"/>
+              </a:rPr>
+              <a:t>• AI audit readiness is the agency’s ability to show what AI systems are used, why they were.</a:t>
             </a:r>
             <a:endParaRPr lang="en-US" sz="2100" dirty="0"/>
           </a:p>
           <a:p>
+            <a:pPr indent="0" marL="0">
+              <a:buNone/>
+            </a:pPr>
             <a:r>
               <a:rPr lang="en-US" sz="2100" dirty="0">
                 <a:solidFill>
-                  <a:srgbClr val="17364A"/>
-                </a:solidFill>
-                <a:latin typeface="Aptos" pitchFamily="34" charset="0"/>
-                <a:ea typeface="Aptos" pitchFamily="34" charset="-122"/>
-                <a:cs typeface="Aptos" pitchFamily="34" charset="-120"/>
-              </a:rPr>
-              <a:t>Public health agencies may need this evidence for internal oversight, public records requests, legal review,.</a:t>
+                  <a:srgbClr val="003A63"/>
+                </a:solidFill>
+                <a:latin typeface="Aptos" pitchFamily="34" charset="0"/>
+                <a:ea typeface="Aptos" pitchFamily="34" charset="-122"/>
+                <a:cs typeface="Aptos" pitchFamily="34" charset="-120"/>
+              </a:rPr>
+              <a:t>• Public health agencies may need this evidence for internal oversight, public records requests,.</a:t>
             </a:r>
             <a:endParaRPr lang="en-US" sz="2100" dirty="0"/>
           </a:p>
           <a:p>
+            <a:pPr indent="0" marL="0">
+              <a:buNone/>
+            </a:pPr>
             <a:r>
               <a:rPr lang="en-US" sz="2100" dirty="0">
                 <a:solidFill>
-                  <a:srgbClr val="17364A"/>
-                </a:solidFill>
-                <a:latin typeface="Aptos" pitchFamily="34" charset="0"/>
-                <a:ea typeface="Aptos" pitchFamily="34" charset="-122"/>
-                <a:cs typeface="Aptos" pitchFamily="34" charset="-120"/>
-              </a:rPr>
-              <a:t>This module teaches governance, compliance, program, and leadership staff how to manage evidence across the AI.</a:t>
+                  <a:srgbClr val="003A63"/>
+                </a:solidFill>
+                <a:latin typeface="Aptos" pitchFamily="34" charset="0"/>
+                <a:ea typeface="Aptos" pitchFamily="34" charset="-122"/>
+                <a:cs typeface="Aptos" pitchFamily="34" charset="-120"/>
+              </a:rPr>
+              <a:t>• This module teaches governance, compliance, program, and leadership staff how to manage.</a:t>
             </a:r>
             <a:endParaRPr lang="en-US" sz="2100" dirty="0"/>
           </a:p>
@@ -10395,17 +10566,17 @@
         </p:nvSpPr>
         <p:spPr>
           <a:xfrm>
-            <a:off x="8074152" y="1920240"/>
-            <a:ext cx="2825496" cy="1280160"/>
-          </a:xfrm>
-          <a:prstGeom prst="rect">
-            <a:avLst/>
-          </a:prstGeom>
-          <a:noFill/>
-          <a:ln/>
-        </p:spPr>
-        <p:txBody>
-          <a:bodyPr wrap="square" lIns="0" tIns="0" rIns="0" bIns="0" rtlCol="0" anchor="t">
+            <a:off x="8074152" y="1892808"/>
+            <a:ext cx="2825496" cy="1353312"/>
+          </a:xfrm>
+          <a:prstGeom prst="rect">
+            <a:avLst/>
+          </a:prstGeom>
+          <a:noFill/>
+          <a:ln/>
+        </p:spPr>
+        <p:txBody>
+          <a:bodyPr wrap="square" lIns="254" tIns="254" rIns="254" bIns="254" rtlCol="0" anchor="t">
             <a:normAutofit/>
           </a:bodyPr>
           <a:lstStyle/>
@@ -10414,7 +10585,7 @@
               <a:buNone/>
             </a:pPr>
             <a:r>
-              <a:rPr lang="en-US" sz="1550" dirty="0">
+              <a:rPr lang="en-US" sz="1320" dirty="0">
                 <a:solidFill>
                   <a:srgbClr val="17364A"/>
                 </a:solidFill>
@@ -10422,43 +10593,9 @@
                 <a:ea typeface="Aptos" pitchFamily="34" charset="-122"/>
                 <a:cs typeface="Aptos" pitchFamily="34" charset="-120"/>
               </a:rPr>
-              <a:t>Level: intermediate/practitioner</a:t>
-            </a:r>
-            <a:endParaRPr lang="en-US" sz="1550" dirty="0"/>
-          </a:p>
-          <a:p>
-            <a:pPr indent="0" marL="0">
-              <a:buNone/>
-            </a:pPr>
-            <a:r>
-              <a:rPr lang="en-US" sz="1550" dirty="0">
-                <a:solidFill>
-                  <a:srgbClr val="17364A"/>
-                </a:solidFill>
-                <a:latin typeface="Aptos" pitchFamily="34" charset="0"/>
-                <a:ea typeface="Aptos" pitchFamily="34" charset="-122"/>
-                <a:cs typeface="Aptos" pitchFamily="34" charset="-120"/>
-              </a:rPr>
-              <a:t>Primary track: Governance and Security Track</a:t>
-            </a:r>
-            <a:endParaRPr lang="en-US" sz="1550" dirty="0"/>
-          </a:p>
-          <a:p>
-            <a:pPr indent="0" marL="0">
-              <a:buNone/>
-            </a:pPr>
-            <a:r>
-              <a:rPr lang="en-US" sz="1550" dirty="0">
-                <a:solidFill>
-                  <a:srgbClr val="17364A"/>
-                </a:solidFill>
-                <a:latin typeface="Aptos" pitchFamily="34" charset="0"/>
-                <a:ea typeface="Aptos" pitchFamily="34" charset="-122"/>
-                <a:cs typeface="Aptos" pitchFamily="34" charset="-120"/>
-              </a:rPr>
-              <a:t>Appears in tracks: governance-and-security, policy, program-management, public-health-executive-leadership</a:t>
-            </a:r>
-            <a:endParaRPr lang="en-US" sz="1550" dirty="0"/>
+              <a:t>Level: intermediate/practitioner Primary track: Governance and Security Track Appears in tracks:.</a:t>
+            </a:r>
+            <a:endParaRPr lang="en-US" sz="1320" dirty="0"/>
           </a:p>
         </p:txBody>
       </p:sp>
@@ -10546,13 +10683,16 @@
           <a:ln/>
         </p:spPr>
         <p:txBody>
-          <a:bodyPr wrap="square" lIns="254" tIns="254" rIns="254" bIns="254" rtlCol="0" anchor="t">
+          <a:bodyPr wrap="square" lIns="508" tIns="508" rIns="508" bIns="508" rtlCol="0" anchor="t">
             <a:normAutofit/>
           </a:bodyPr>
           <a:lstStyle/>
           <a:p>
-            <a:r>
-              <a:rPr lang="en-US" sz="1380" dirty="0">
+            <a:pPr indent="0" marL="0">
+              <a:buNone/>
+            </a:pPr>
+            <a:r>
+              <a:rPr lang="en-US" sz="1220" dirty="0">
                 <a:solidFill>
                   <a:srgbClr val="17364A"/>
                 </a:solidFill>
@@ -10562,11 +10702,14 @@
               </a:rPr>
               <a:t>Read the module for shared vocabulary and context.</a:t>
             </a:r>
-            <a:endParaRPr lang="en-US" sz="1380" dirty="0"/>
-          </a:p>
-          <a:p>
-            <a:r>
-              <a:rPr lang="en-US" sz="1380" dirty="0">
+            <a:endParaRPr lang="en-US" sz="1220" dirty="0"/>
+          </a:p>
+          <a:p>
+            <a:pPr indent="0" marL="0">
+              <a:buNone/>
+            </a:pPr>
+            <a:r>
+              <a:rPr lang="en-US" sz="1220" dirty="0">
                 <a:solidFill>
                   <a:srgbClr val="17364A"/>
                 </a:solidFill>
@@ -10576,11 +10719,14 @@
               </a:rPr>
               <a:t>Complete the practical exercise to apply the concept.</a:t>
             </a:r>
-            <a:endParaRPr lang="en-US" sz="1380" dirty="0"/>
-          </a:p>
-          <a:p>
-            <a:r>
-              <a:rPr lang="en-US" sz="1380" dirty="0">
+            <a:endParaRPr lang="en-US" sz="1220" dirty="0"/>
+          </a:p>
+          <a:p>
+            <a:pPr indent="0" marL="0">
+              <a:buNone/>
+            </a:pPr>
+            <a:r>
+              <a:rPr lang="en-US" sz="1220" dirty="0">
                 <a:solidFill>
                   <a:srgbClr val="17364A"/>
                 </a:solidFill>
@@ -10590,7 +10736,7 @@
               </a:rPr>
               <a:t>Use the notes and references for deeper review.</a:t>
             </a:r>
-            <a:endParaRPr lang="en-US" sz="1380" dirty="0"/>
+            <a:endParaRPr lang="en-US" sz="1220" dirty="0"/>
           </a:p>
         </p:txBody>
       </p:sp>
@@ -10891,49 +11037,58 @@
           <a:ln/>
         </p:spPr>
         <p:txBody>
-          <a:bodyPr wrap="square" lIns="635" tIns="635" rIns="635" bIns="635" rtlCol="0" anchor="t">
+          <a:bodyPr wrap="square" lIns="1016" tIns="1016" rIns="1016" bIns="1016" rtlCol="0" anchor="t">
             <a:normAutofit/>
           </a:bodyPr>
           <a:lstStyle/>
           <a:p>
+            <a:pPr indent="0" marL="0">
+              <a:buNone/>
+            </a:pPr>
             <a:r>
               <a:rPr lang="en-US" sz="2100" dirty="0">
                 <a:solidFill>
-                  <a:srgbClr val="17364A"/>
-                </a:solidFill>
-                <a:latin typeface="Aptos" pitchFamily="34" charset="0"/>
-                <a:ea typeface="Aptos" pitchFamily="34" charset="-122"/>
-                <a:cs typeface="Aptos" pitchFamily="34" charset="-120"/>
-              </a:rPr>
-              <a:t>AI evidence inventory</a:t>
+                  <a:srgbClr val="003A63"/>
+                </a:solidFill>
+                <a:latin typeface="Aptos" pitchFamily="34" charset="0"/>
+                <a:ea typeface="Aptos" pitchFamily="34" charset="-122"/>
+                <a:cs typeface="Aptos" pitchFamily="34" charset="-120"/>
+              </a:rPr>
+              <a:t>• AI evidence inventory</a:t>
             </a:r>
             <a:endParaRPr lang="en-US" sz="2100" dirty="0"/>
           </a:p>
           <a:p>
+            <a:pPr indent="0" marL="0">
+              <a:buNone/>
+            </a:pPr>
             <a:r>
               <a:rPr lang="en-US" sz="2100" dirty="0">
                 <a:solidFill>
-                  <a:srgbClr val="17364A"/>
-                </a:solidFill>
-                <a:latin typeface="Aptos" pitchFamily="34" charset="0"/>
-                <a:ea typeface="Aptos" pitchFamily="34" charset="-122"/>
-                <a:cs typeface="Aptos" pitchFamily="34" charset="-120"/>
-              </a:rPr>
-              <a:t>Decision log template</a:t>
+                  <a:srgbClr val="003A63"/>
+                </a:solidFill>
+                <a:latin typeface="Aptos" pitchFamily="34" charset="0"/>
+                <a:ea typeface="Aptos" pitchFamily="34" charset="-122"/>
+                <a:cs typeface="Aptos" pitchFamily="34" charset="-120"/>
+              </a:rPr>
+              <a:t>• Decision log template</a:t>
             </a:r>
             <a:endParaRPr lang="en-US" sz="2100" dirty="0"/>
           </a:p>
           <a:p>
+            <a:pPr indent="0" marL="0">
+              <a:buNone/>
+            </a:pPr>
             <a:r>
               <a:rPr lang="en-US" sz="2100" dirty="0">
                 <a:solidFill>
-                  <a:srgbClr val="17364A"/>
-                </a:solidFill>
-                <a:latin typeface="Aptos" pitchFamily="34" charset="0"/>
-                <a:ea typeface="Aptos" pitchFamily="34" charset="-122"/>
-                <a:cs typeface="Aptos" pitchFamily="34" charset="-120"/>
-              </a:rPr>
-              <a:t>Artifact ownership and retention table</a:t>
+                  <a:srgbClr val="003A63"/>
+                </a:solidFill>
+                <a:latin typeface="Aptos" pitchFamily="34" charset="0"/>
+                <a:ea typeface="Aptos" pitchFamily="34" charset="-122"/>
+                <a:cs typeface="Aptos" pitchFamily="34" charset="-120"/>
+              </a:rPr>
+              <a:t>• Artifact ownership and retention table</a:t>
             </a:r>
             <a:endParaRPr lang="en-US" sz="2100" dirty="0"/>
           </a:p>
@@ -11013,17 +11168,17 @@
         </p:nvSpPr>
         <p:spPr>
           <a:xfrm>
-            <a:off x="7799832" y="1828800"/>
-            <a:ext cx="3145536" cy="685800"/>
-          </a:xfrm>
-          <a:prstGeom prst="rect">
-            <a:avLst/>
-          </a:prstGeom>
-          <a:noFill/>
-          <a:ln/>
-        </p:spPr>
-        <p:txBody>
-          <a:bodyPr wrap="square" lIns="0" tIns="0" rIns="0" bIns="0" rtlCol="0" anchor="t">
+            <a:off x="7799832" y="1801368"/>
+            <a:ext cx="3145536" cy="758952"/>
+          </a:xfrm>
+          <a:prstGeom prst="rect">
+            <a:avLst/>
+          </a:prstGeom>
+          <a:noFill/>
+          <a:ln/>
+        </p:spPr>
+        <p:txBody>
+          <a:bodyPr wrap="square" lIns="254" tIns="254" rIns="254" bIns="254" rtlCol="0" anchor="t">
             <a:normAutofit/>
           </a:bodyPr>
           <a:lstStyle/>
@@ -11032,7 +11187,7 @@
               <a:buNone/>
             </a:pPr>
             <a:r>
-              <a:rPr lang="en-US" sz="1550" dirty="0">
+              <a:rPr lang="en-US" sz="1320" dirty="0">
                 <a:solidFill>
                   <a:srgbClr val="17364A"/>
                 </a:solidFill>
@@ -11042,7 +11197,7 @@
               </a:rPr>
               <a:t>AI evidence inventory</a:t>
             </a:r>
-            <a:endParaRPr lang="en-US" sz="1550" dirty="0"/>
+            <a:endParaRPr lang="en-US" sz="1320" dirty="0"/>
           </a:p>
         </p:txBody>
       </p:sp>
@@ -11130,13 +11285,16 @@
           <a:ln/>
         </p:spPr>
         <p:txBody>
-          <a:bodyPr wrap="square" lIns="254" tIns="254" rIns="254" bIns="254" rtlCol="0" anchor="t">
+          <a:bodyPr wrap="square" lIns="508" tIns="508" rIns="508" bIns="508" rtlCol="0" anchor="t">
             <a:normAutofit/>
           </a:bodyPr>
           <a:lstStyle/>
           <a:p>
-            <a:r>
-              <a:rPr lang="en-US" sz="1380" dirty="0">
+            <a:pPr indent="0" marL="0">
+              <a:buNone/>
+            </a:pPr>
+            <a:r>
+              <a:rPr lang="en-US" sz="1220" dirty="0">
                 <a:solidFill>
                   <a:srgbClr val="17364A"/>
                 </a:solidFill>
@@ -11146,11 +11304,14 @@
               </a:rPr>
               <a:t>Gap list for missing evidence</a:t>
             </a:r>
-            <a:endParaRPr lang="en-US" sz="1380" dirty="0"/>
-          </a:p>
-          <a:p>
-            <a:r>
-              <a:rPr lang="en-US" sz="1380" dirty="0">
+            <a:endParaRPr lang="en-US" sz="1220" dirty="0"/>
+          </a:p>
+          <a:p>
+            <a:pPr indent="0" marL="0">
+              <a:buNone/>
+            </a:pPr>
+            <a:r>
+              <a:rPr lang="en-US" sz="1220" dirty="0">
                 <a:solidFill>
                   <a:srgbClr val="17364A"/>
                 </a:solidFill>
@@ -11160,7 +11321,7 @@
               </a:rPr>
               <a:t>Review schedule</a:t>
             </a:r>
-            <a:endParaRPr lang="en-US" sz="1380" dirty="0"/>
+            <a:endParaRPr lang="en-US" sz="1220" dirty="0"/>
           </a:p>
         </p:txBody>
       </p:sp>
@@ -11238,17 +11399,17 @@
         </p:nvSpPr>
         <p:spPr>
           <a:xfrm>
-            <a:off x="7799832" y="5001768"/>
-            <a:ext cx="3145536" cy="502920"/>
-          </a:xfrm>
-          <a:prstGeom prst="rect">
-            <a:avLst/>
-          </a:prstGeom>
-          <a:noFill/>
-          <a:ln/>
-        </p:spPr>
-        <p:txBody>
-          <a:bodyPr wrap="square" lIns="0" tIns="0" rIns="0" bIns="0" rtlCol="0" anchor="t">
+            <a:off x="7799832" y="4974336"/>
+            <a:ext cx="3145536" cy="576072"/>
+          </a:xfrm>
+          <a:prstGeom prst="rect">
+            <a:avLst/>
+          </a:prstGeom>
+          <a:noFill/>
+          <a:ln/>
+        </p:spPr>
+        <p:txBody>
+          <a:bodyPr wrap="square" lIns="254" tIns="254" rIns="254" bIns="254" rtlCol="0" anchor="t">
             <a:normAutofit/>
           </a:bodyPr>
           <a:lstStyle/>
@@ -11257,7 +11418,7 @@
               <a:buNone/>
             </a:pPr>
             <a:r>
-              <a:rPr lang="en-US" sz="1550" dirty="0">
+              <a:rPr lang="en-US" sz="1320" dirty="0">
                 <a:solidFill>
                   <a:srgbClr val="17364A"/>
                 </a:solidFill>
@@ -11265,9 +11426,9 @@
                 <a:ea typeface="Aptos" pitchFamily="34" charset="-122"/>
                 <a:cs typeface="Aptos" pitchFamily="34" charset="-120"/>
               </a:rPr>
-              <a:t>Use the assignment to test whether you can explain the concept, apply it to a realistic public health situation, and identify what would need review before the work moves forward.</a:t>
-            </a:r>
-            <a:endParaRPr lang="en-US" sz="1550" dirty="0"/>
+              <a:t>Use the assignment to test whether you can explain the concept, apply it to a realistic public health situation, and.</a:t>
+            </a:r>
+            <a:endParaRPr lang="en-US" sz="1320" dirty="0"/>
           </a:p>
         </p:txBody>
       </p:sp>
@@ -11568,49 +11729,58 @@
           <a:ln/>
         </p:spPr>
         <p:txBody>
-          <a:bodyPr wrap="square" lIns="635" tIns="635" rIns="635" bIns="635" rtlCol="0" anchor="t">
+          <a:bodyPr wrap="square" lIns="1016" tIns="1016" rIns="1016" bIns="1016" rtlCol="0" anchor="t">
             <a:normAutofit/>
           </a:bodyPr>
           <a:lstStyle/>
           <a:p>
+            <a:pPr indent="0" marL="0">
+              <a:buNone/>
+            </a:pPr>
             <a:r>
               <a:rPr lang="en-US" sz="2100" dirty="0">
                 <a:solidFill>
-                  <a:srgbClr val="17364A"/>
-                </a:solidFill>
-                <a:latin typeface="Aptos" pitchFamily="34" charset="0"/>
-                <a:ea typeface="Aptos" pitchFamily="34" charset="-122"/>
-                <a:cs typeface="Aptos" pitchFamily="34" charset="-120"/>
-              </a:rPr>
-              <a:t>1. What is AI audit readiness?</a:t>
+                  <a:srgbClr val="003A63"/>
+                </a:solidFill>
+                <a:latin typeface="Aptos" pitchFamily="34" charset="0"/>
+                <a:ea typeface="Aptos" pitchFamily="34" charset="-122"/>
+                <a:cs typeface="Aptos" pitchFamily="34" charset="-120"/>
+              </a:rPr>
+              <a:t>• 1. What is AI audit readiness?</a:t>
             </a:r>
             <a:endParaRPr lang="en-US" sz="2100" dirty="0"/>
           </a:p>
           <a:p>
+            <a:pPr indent="0" marL="0">
+              <a:buNone/>
+            </a:pPr>
             <a:r>
               <a:rPr lang="en-US" sz="2100" dirty="0">
                 <a:solidFill>
-                  <a:srgbClr val="17364A"/>
-                </a:solidFill>
-                <a:latin typeface="Aptos" pitchFamily="34" charset="0"/>
-                <a:ea typeface="Aptos" pitchFamily="34" charset="-122"/>
-                <a:cs typeface="Aptos" pitchFamily="34" charset="-120"/>
-              </a:rPr>
-              <a:t>2. Which record should be preserved from AI governance review?</a:t>
+                  <a:srgbClr val="003A63"/>
+                </a:solidFill>
+                <a:latin typeface="Aptos" pitchFamily="34" charset="0"/>
+                <a:ea typeface="Aptos" pitchFamily="34" charset="-122"/>
+                <a:cs typeface="Aptos" pitchFamily="34" charset="-120"/>
+              </a:rPr>
+              <a:t>• 2. Which record should be preserved from AI governance review?</a:t>
             </a:r>
             <a:endParaRPr lang="en-US" sz="2100" dirty="0"/>
           </a:p>
           <a:p>
+            <a:pPr indent="0" marL="0">
+              <a:buNone/>
+            </a:pPr>
             <a:r>
               <a:rPr lang="en-US" sz="2100" dirty="0">
                 <a:solidFill>
-                  <a:srgbClr val="17364A"/>
-                </a:solidFill>
-                <a:latin typeface="Aptos" pitchFamily="34" charset="0"/>
-                <a:ea typeface="Aptos" pitchFamily="34" charset="-122"/>
-                <a:cs typeface="Aptos" pitchFamily="34" charset="-120"/>
-              </a:rPr>
-              <a:t>3. What is validation evidence?</a:t>
+                  <a:srgbClr val="003A63"/>
+                </a:solidFill>
+                <a:latin typeface="Aptos" pitchFamily="34" charset="0"/>
+                <a:ea typeface="Aptos" pitchFamily="34" charset="-122"/>
+                <a:cs typeface="Aptos" pitchFamily="34" charset="-120"/>
+              </a:rPr>
+              <a:t>• 3. What is validation evidence?</a:t>
             </a:r>
             <a:endParaRPr lang="en-US" sz="2100" dirty="0"/>
           </a:p>
@@ -11690,17 +11860,17 @@
         </p:nvSpPr>
         <p:spPr>
           <a:xfrm>
-            <a:off x="7799832" y="1828800"/>
-            <a:ext cx="3145536" cy="685800"/>
-          </a:xfrm>
-          <a:prstGeom prst="rect">
-            <a:avLst/>
-          </a:prstGeom>
-          <a:noFill/>
-          <a:ln/>
-        </p:spPr>
-        <p:txBody>
-          <a:bodyPr wrap="square" lIns="0" tIns="0" rIns="0" bIns="0" rtlCol="0" anchor="t">
+            <a:off x="7799832" y="1801368"/>
+            <a:ext cx="3145536" cy="758952"/>
+          </a:xfrm>
+          <a:prstGeom prst="rect">
+            <a:avLst/>
+          </a:prstGeom>
+          <a:noFill/>
+          <a:ln/>
+        </p:spPr>
+        <p:txBody>
+          <a:bodyPr wrap="square" lIns="254" tIns="254" rIns="254" bIns="254" rtlCol="0" anchor="t">
             <a:normAutofit/>
           </a:bodyPr>
           <a:lstStyle/>
@@ -11709,7 +11879,7 @@
               <a:buNone/>
             </a:pPr>
             <a:r>
-              <a:rPr lang="en-US" sz="1550" dirty="0">
+              <a:rPr lang="en-US" sz="1320" dirty="0">
                 <a:solidFill>
                   <a:srgbClr val="17364A"/>
                 </a:solidFill>
@@ -11719,7 +11889,7 @@
               </a:rPr>
               <a:t>1. What is AI audit readiness?</a:t>
             </a:r>
-            <a:endParaRPr lang="en-US" sz="1550" dirty="0"/>
+            <a:endParaRPr lang="en-US" sz="1320" dirty="0"/>
           </a:p>
         </p:txBody>
       </p:sp>
@@ -11807,13 +11977,16 @@
           <a:ln/>
         </p:spPr>
         <p:txBody>
-          <a:bodyPr wrap="square" lIns="254" tIns="254" rIns="254" bIns="254" rtlCol="0" anchor="t">
+          <a:bodyPr wrap="square" lIns="508" tIns="508" rIns="508" bIns="508" rtlCol="0" anchor="t">
             <a:normAutofit/>
           </a:bodyPr>
           <a:lstStyle/>
           <a:p>
-            <a:r>
-              <a:rPr lang="en-US" sz="1380" dirty="0">
+            <a:pPr indent="0" marL="0">
+              <a:buNone/>
+            </a:pPr>
+            <a:r>
+              <a:rPr lang="en-US" sz="1220" dirty="0">
                 <a:solidFill>
                   <a:srgbClr val="17364A"/>
                 </a:solidFill>
@@ -11823,11 +11996,14 @@
               </a:rPr>
               <a:t>1.</a:t>
             </a:r>
-            <a:endParaRPr lang="en-US" sz="1380" dirty="0"/>
-          </a:p>
-          <a:p>
-            <a:r>
-              <a:rPr lang="en-US" sz="1380" dirty="0">
+            <a:endParaRPr lang="en-US" sz="1220" dirty="0"/>
+          </a:p>
+          <a:p>
+            <a:pPr indent="0" marL="0">
+              <a:buNone/>
+            </a:pPr>
+            <a:r>
+              <a:rPr lang="en-US" sz="1220" dirty="0">
                 <a:solidFill>
                   <a:srgbClr val="17364A"/>
                 </a:solidFill>
@@ -11837,11 +12013,14 @@
               </a:rPr>
               <a:t>What is AI audit readiness?</a:t>
             </a:r>
-            <a:endParaRPr lang="en-US" sz="1380" dirty="0"/>
-          </a:p>
-          <a:p>
-            <a:r>
-              <a:rPr lang="en-US" sz="1380" dirty="0">
+            <a:endParaRPr lang="en-US" sz="1220" dirty="0"/>
+          </a:p>
+          <a:p>
+            <a:pPr indent="0" marL="0">
+              <a:buNone/>
+            </a:pPr>
+            <a:r>
+              <a:rPr lang="en-US" sz="1220" dirty="0">
                 <a:solidFill>
                   <a:srgbClr val="17364A"/>
                 </a:solidFill>
@@ -11851,7 +12030,7 @@
               </a:rPr>
               <a:t>2.</a:t>
             </a:r>
-            <a:endParaRPr lang="en-US" sz="1380" dirty="0"/>
+            <a:endParaRPr lang="en-US" sz="1220" dirty="0"/>
           </a:p>
         </p:txBody>
       </p:sp>
@@ -11929,17 +12108,17 @@
         </p:nvSpPr>
         <p:spPr>
           <a:xfrm>
-            <a:off x="7799832" y="5001768"/>
-            <a:ext cx="3145536" cy="502920"/>
-          </a:xfrm>
-          <a:prstGeom prst="rect">
-            <a:avLst/>
-          </a:prstGeom>
-          <a:noFill/>
-          <a:ln/>
-        </p:spPr>
-        <p:txBody>
-          <a:bodyPr wrap="square" lIns="0" tIns="0" rIns="0" bIns="0" rtlCol="0" anchor="t">
+            <a:off x="7799832" y="4974336"/>
+            <a:ext cx="3145536" cy="576072"/>
+          </a:xfrm>
+          <a:prstGeom prst="rect">
+            <a:avLst/>
+          </a:prstGeom>
+          <a:noFill/>
+          <a:ln/>
+        </p:spPr>
+        <p:txBody>
+          <a:bodyPr wrap="square" lIns="254" tIns="254" rIns="254" bIns="254" rtlCol="0" anchor="t">
             <a:normAutofit/>
           </a:bodyPr>
           <a:lstStyle/>
@@ -11948,7 +12127,7 @@
               <a:buNone/>
             </a:pPr>
             <a:r>
-              <a:rPr lang="en-US" sz="1550" dirty="0">
+              <a:rPr lang="en-US" sz="1320" dirty="0">
                 <a:solidFill>
                   <a:srgbClr val="17364A"/>
                 </a:solidFill>
@@ -11956,9 +12135,9 @@
                 <a:ea typeface="Aptos" pitchFamily="34" charset="-122"/>
                 <a:cs typeface="Aptos" pitchFamily="34" charset="-120"/>
               </a:rPr>
-              <a:t>Use the assignment to test whether you can explain the concept, apply it to a realistic public health situation, and identify what would need review before the work moves forward.</a:t>
-            </a:r>
-            <a:endParaRPr lang="en-US" sz="1550" dirty="0"/>
+              <a:t>Use the assignment to test whether you can explain the concept, apply it to a realistic public health situation, and.</a:t>
+            </a:r>
+            <a:endParaRPr lang="en-US" sz="1320" dirty="0"/>
           </a:p>
         </p:txBody>
       </p:sp>
@@ -12259,49 +12438,58 @@
           <a:ln/>
         </p:spPr>
         <p:txBody>
-          <a:bodyPr wrap="square" lIns="635" tIns="635" rIns="635" bIns="635" rtlCol="0" anchor="t">
+          <a:bodyPr wrap="square" lIns="1016" tIns="1016" rIns="1016" bIns="1016" rtlCol="0" anchor="t">
             <a:normAutofit/>
           </a:bodyPr>
           <a:lstStyle/>
           <a:p>
+            <a:pPr indent="0" marL="0">
+              <a:buNone/>
+            </a:pPr>
             <a:r>
               <a:rPr lang="en-US" sz="2100" dirty="0">
                 <a:solidFill>
-                  <a:srgbClr val="17364A"/>
-                </a:solidFill>
-                <a:latin typeface="Aptos" pitchFamily="34" charset="0"/>
-                <a:ea typeface="Aptos" pitchFamily="34" charset="-122"/>
-                <a:cs typeface="Aptos" pitchFamily="34" charset="-120"/>
-              </a:rPr>
-              <a:t>NIST Artificial Intelligence Risk Management Framework:.</a:t>
+                  <a:srgbClr val="003A63"/>
+                </a:solidFill>
+                <a:latin typeface="Aptos" pitchFamily="34" charset="0"/>
+                <a:ea typeface="Aptos" pitchFamily="34" charset="-122"/>
+                <a:cs typeface="Aptos" pitchFamily="34" charset="-120"/>
+              </a:rPr>
+              <a:t>• NIST Artificial Intelligence Risk Management Framework:.</a:t>
             </a:r>
             <a:endParaRPr lang="en-US" sz="2100" dirty="0"/>
           </a:p>
           <a:p>
+            <a:pPr indent="0" marL="0">
+              <a:buNone/>
+            </a:pPr>
             <a:r>
               <a:rPr lang="en-US" sz="2100" dirty="0">
                 <a:solidFill>
-                  <a:srgbClr val="17364A"/>
-                </a:solidFill>
-                <a:latin typeface="Aptos" pitchFamily="34" charset="0"/>
-                <a:ea typeface="Aptos" pitchFamily="34" charset="-122"/>
-                <a:cs typeface="Aptos" pitchFamily="34" charset="-120"/>
-              </a:rPr>
-              <a:t>NIST Generative AI Profile:.</a:t>
+                  <a:srgbClr val="003A63"/>
+                </a:solidFill>
+                <a:latin typeface="Aptos" pitchFamily="34" charset="0"/>
+                <a:ea typeface="Aptos" pitchFamily="34" charset="-122"/>
+                <a:cs typeface="Aptos" pitchFamily="34" charset="-120"/>
+              </a:rPr>
+              <a:t>• NIST Generative AI Profile:.</a:t>
             </a:r>
             <a:endParaRPr lang="en-US" sz="2100" dirty="0"/>
           </a:p>
           <a:p>
+            <a:pPr indent="0" marL="0">
+              <a:buNone/>
+            </a:pPr>
             <a:r>
               <a:rPr lang="en-US" sz="2100" dirty="0">
                 <a:solidFill>
-                  <a:srgbClr val="17364A"/>
-                </a:solidFill>
-                <a:latin typeface="Aptos" pitchFamily="34" charset="0"/>
-                <a:ea typeface="Aptos" pitchFamily="34" charset="-122"/>
-                <a:cs typeface="Aptos" pitchFamily="34" charset="-120"/>
-              </a:rPr>
-              <a:t>CDC Public Health Data Strategy and Data Modernization resources:.</a:t>
+                  <a:srgbClr val="003A63"/>
+                </a:solidFill>
+                <a:latin typeface="Aptos" pitchFamily="34" charset="0"/>
+                <a:ea typeface="Aptos" pitchFamily="34" charset="-122"/>
+                <a:cs typeface="Aptos" pitchFamily="34" charset="-120"/>
+              </a:rPr>
+              <a:t>• CDC Public Health Data Strategy and Data Modernization resources:.</a:t>
             </a:r>
             <a:endParaRPr lang="en-US" sz="2100" dirty="0"/>
           </a:p>
@@ -12381,17 +12569,17 @@
         </p:nvSpPr>
         <p:spPr>
           <a:xfrm>
-            <a:off x="7799832" y="1828800"/>
-            <a:ext cx="3145536" cy="685800"/>
-          </a:xfrm>
-          <a:prstGeom prst="rect">
-            <a:avLst/>
-          </a:prstGeom>
-          <a:noFill/>
-          <a:ln/>
-        </p:spPr>
-        <p:txBody>
-          <a:bodyPr wrap="square" lIns="0" tIns="0" rIns="0" bIns="0" rtlCol="0" anchor="t">
+            <a:off x="7799832" y="1801368"/>
+            <a:ext cx="3145536" cy="758952"/>
+          </a:xfrm>
+          <a:prstGeom prst="rect">
+            <a:avLst/>
+          </a:prstGeom>
+          <a:noFill/>
+          <a:ln/>
+        </p:spPr>
+        <p:txBody>
+          <a:bodyPr wrap="square" lIns="254" tIns="254" rIns="254" bIns="254" rtlCol="0" anchor="t">
             <a:normAutofit/>
           </a:bodyPr>
           <a:lstStyle/>
@@ -12400,7 +12588,7 @@
               <a:buNone/>
             </a:pPr>
             <a:r>
-              <a:rPr lang="en-US" sz="1550" dirty="0">
+              <a:rPr lang="en-US" sz="1320" dirty="0">
                 <a:solidFill>
                   <a:srgbClr val="17364A"/>
                 </a:solidFill>
@@ -12410,7 +12598,7 @@
               </a:rPr>
               <a:t>NIST Artificial Intelligence Risk Management Framework:.</a:t>
             </a:r>
-            <a:endParaRPr lang="en-US" sz="1550" dirty="0"/>
+            <a:endParaRPr lang="en-US" sz="1320" dirty="0"/>
           </a:p>
         </p:txBody>
       </p:sp>
@@ -12498,13 +12686,16 @@
           <a:ln/>
         </p:spPr>
         <p:txBody>
-          <a:bodyPr wrap="square" lIns="254" tIns="254" rIns="254" bIns="254" rtlCol="0" anchor="t">
+          <a:bodyPr wrap="square" lIns="508" tIns="508" rIns="508" bIns="508" rtlCol="0" anchor="t">
             <a:normAutofit/>
           </a:bodyPr>
           <a:lstStyle/>
           <a:p>
-            <a:r>
-              <a:rPr lang="en-US" sz="1380" dirty="0">
+            <a:pPr indent="0" marL="0">
+              <a:buNone/>
+            </a:pPr>
+            <a:r>
+              <a:rPr lang="en-US" sz="1220" dirty="0">
                 <a:solidFill>
                   <a:srgbClr val="17364A"/>
                 </a:solidFill>
@@ -12514,11 +12705,14 @@
               </a:rPr>
               <a:t>NIST Artificial Intelligence Risk Management Framework:.</a:t>
             </a:r>
-            <a:endParaRPr lang="en-US" sz="1380" dirty="0"/>
-          </a:p>
-          <a:p>
-            <a:r>
-              <a:rPr lang="en-US" sz="1380" dirty="0">
+            <a:endParaRPr lang="en-US" sz="1220" dirty="0"/>
+          </a:p>
+          <a:p>
+            <a:pPr indent="0" marL="0">
+              <a:buNone/>
+            </a:pPr>
+            <a:r>
+              <a:rPr lang="en-US" sz="1220" dirty="0">
                 <a:solidFill>
                   <a:srgbClr val="17364A"/>
                 </a:solidFill>
@@ -12528,11 +12722,14 @@
               </a:rPr>
               <a:t>OWASP guidance for LLM application security</a:t>
             </a:r>
-            <a:endParaRPr lang="en-US" sz="1380" dirty="0"/>
-          </a:p>
-          <a:p>
-            <a:r>
-              <a:rPr lang="en-US" sz="1380" dirty="0">
+            <a:endParaRPr lang="en-US" sz="1220" dirty="0"/>
+          </a:p>
+          <a:p>
+            <a:pPr indent="0" marL="0">
+              <a:buNone/>
+            </a:pPr>
+            <a:r>
+              <a:rPr lang="en-US" sz="1220" dirty="0">
                 <a:solidFill>
                   <a:srgbClr val="17364A"/>
                 </a:solidFill>
@@ -12540,9 +12737,9 @@
                 <a:ea typeface="Aptos" pitchFamily="34" charset="-122"/>
                 <a:cs typeface="Aptos" pitchFamily="34" charset="-120"/>
               </a:rPr>
-              <a:t>Agency policies for privacy, cybersecurity, records, procurement, accessibility, and.</a:t>
-            </a:r>
-            <a:endParaRPr lang="en-US" sz="1380" dirty="0"/>
+              <a:t>Agency policies for privacy, cybersecurity, records, procurement,.</a:t>
+            </a:r>
+            <a:endParaRPr lang="en-US" sz="1220" dirty="0"/>
           </a:p>
         </p:txBody>
       </p:sp>
@@ -12620,17 +12817,17 @@
         </p:nvSpPr>
         <p:spPr>
           <a:xfrm>
-            <a:off x="7799832" y="5001768"/>
-            <a:ext cx="3145536" cy="502920"/>
-          </a:xfrm>
-          <a:prstGeom prst="rect">
-            <a:avLst/>
-          </a:prstGeom>
-          <a:noFill/>
-          <a:ln/>
-        </p:spPr>
-        <p:txBody>
-          <a:bodyPr wrap="square" lIns="0" tIns="0" rIns="0" bIns="0" rtlCol="0" anchor="t">
+            <a:off x="7799832" y="4974336"/>
+            <a:ext cx="3145536" cy="576072"/>
+          </a:xfrm>
+          <a:prstGeom prst="rect">
+            <a:avLst/>
+          </a:prstGeom>
+          <a:noFill/>
+          <a:ln/>
+        </p:spPr>
+        <p:txBody>
+          <a:bodyPr wrap="square" lIns="254" tIns="254" rIns="254" bIns="254" rtlCol="0" anchor="t">
             <a:normAutofit/>
           </a:bodyPr>
           <a:lstStyle/>
@@ -12639,7 +12836,7 @@
               <a:buNone/>
             </a:pPr>
             <a:r>
-              <a:rPr lang="en-US" sz="1550" dirty="0">
+              <a:rPr lang="en-US" sz="1320" dirty="0">
                 <a:solidFill>
                   <a:srgbClr val="17364A"/>
                 </a:solidFill>
@@ -12647,9 +12844,9 @@
                 <a:ea typeface="Aptos" pitchFamily="34" charset="-122"/>
                 <a:cs typeface="Aptos" pitchFamily="34" charset="-120"/>
               </a:rPr>
-              <a:t>Connect the concept to public health purpose, responsible use, required safeguards, documentation, and the next action a department should take.</a:t>
-            </a:r>
-            <a:endParaRPr lang="en-US" sz="1550" dirty="0"/>
+              <a:t>Connect the concept to public health purpose, responsible use, required safeguards, documentation, and the next action a.</a:t>
+            </a:r>
+            <a:endParaRPr lang="en-US" sz="1320" dirty="0"/>
           </a:p>
         </p:txBody>
       </p:sp>
@@ -12950,21 +13147,24 @@
           <a:ln/>
         </p:spPr>
         <p:txBody>
-          <a:bodyPr wrap="square" lIns="635" tIns="635" rIns="635" bIns="635" rtlCol="0" anchor="t">
+          <a:bodyPr wrap="square" lIns="1016" tIns="1016" rIns="1016" bIns="1016" rtlCol="0" anchor="t">
             <a:normAutofit/>
           </a:bodyPr>
           <a:lstStyle/>
           <a:p>
+            <a:pPr indent="0" marL="0">
+              <a:buNone/>
+            </a:pPr>
             <a:r>
               <a:rPr lang="en-US" sz="2100" dirty="0">
                 <a:solidFill>
-                  <a:srgbClr val="17364A"/>
-                </a:solidFill>
-                <a:latin typeface="Aptos" pitchFamily="34" charset="0"/>
-                <a:ea typeface="Aptos" pitchFamily="34" charset="-122"/>
-                <a:cs typeface="Aptos" pitchFamily="34" charset="-120"/>
-              </a:rPr>
-              <a:t>Relevant public health program SOPs, data governance documentation, and implementation plans</a:t>
+                  <a:srgbClr val="003A63"/>
+                </a:solidFill>
+                <a:latin typeface="Aptos" pitchFamily="34" charset="0"/>
+                <a:ea typeface="Aptos" pitchFamily="34" charset="-122"/>
+                <a:cs typeface="Aptos" pitchFamily="34" charset="-120"/>
+              </a:rPr>
+              <a:t>• Relevant public health program SOPs, data governance documentation, and implementation plans</a:t>
             </a:r>
             <a:endParaRPr lang="en-US" sz="2100" dirty="0"/>
           </a:p>
@@ -13044,17 +13244,17 @@
         </p:nvSpPr>
         <p:spPr>
           <a:xfrm>
-            <a:off x="7799832" y="1828800"/>
-            <a:ext cx="3145536" cy="685800"/>
-          </a:xfrm>
-          <a:prstGeom prst="rect">
-            <a:avLst/>
-          </a:prstGeom>
-          <a:noFill/>
-          <a:ln/>
-        </p:spPr>
-        <p:txBody>
-          <a:bodyPr wrap="square" lIns="0" tIns="0" rIns="0" bIns="0" rtlCol="0" anchor="t">
+            <a:off x="7799832" y="1801368"/>
+            <a:ext cx="3145536" cy="758952"/>
+          </a:xfrm>
+          <a:prstGeom prst="rect">
+            <a:avLst/>
+          </a:prstGeom>
+          <a:noFill/>
+          <a:ln/>
+        </p:spPr>
+        <p:txBody>
+          <a:bodyPr wrap="square" lIns="254" tIns="254" rIns="254" bIns="254" rtlCol="0" anchor="t">
             <a:normAutofit/>
           </a:bodyPr>
           <a:lstStyle/>
@@ -13063,7 +13263,7 @@
               <a:buNone/>
             </a:pPr>
             <a:r>
-              <a:rPr lang="en-US" sz="1550" dirty="0">
+              <a:rPr lang="en-US" sz="1320" dirty="0">
                 <a:solidFill>
                   <a:srgbClr val="17364A"/>
                 </a:solidFill>
@@ -13073,7 +13273,7 @@
               </a:rPr>
               <a:t>Relevant public health program SOPs, data governance documentation, and implementation plans</a:t>
             </a:r>
-            <a:endParaRPr lang="en-US" sz="1550" dirty="0"/>
+            <a:endParaRPr lang="en-US" sz="1320" dirty="0"/>
           </a:p>
         </p:txBody>
       </p:sp>
@@ -13161,13 +13361,16 @@
           <a:ln/>
         </p:spPr>
         <p:txBody>
-          <a:bodyPr wrap="square" lIns="254" tIns="254" rIns="254" bIns="254" rtlCol="0" anchor="t">
+          <a:bodyPr wrap="square" lIns="508" tIns="508" rIns="508" bIns="508" rtlCol="0" anchor="t">
             <a:normAutofit/>
           </a:bodyPr>
           <a:lstStyle/>
           <a:p>
-            <a:r>
-              <a:rPr lang="en-US" sz="1380" dirty="0">
+            <a:pPr indent="0" marL="0">
+              <a:buNone/>
+            </a:pPr>
+            <a:r>
+              <a:rPr lang="en-US" sz="1220" dirty="0">
                 <a:solidFill>
                   <a:srgbClr val="17364A"/>
                 </a:solidFill>
@@ -13175,9 +13378,9 @@
                 <a:ea typeface="Aptos" pitchFamily="34" charset="-122"/>
                 <a:cs typeface="Aptos" pitchFamily="34" charset="-120"/>
               </a:rPr>
-              <a:t>Relevant public health program SOPs, data governance documentation, and implementation plans</a:t>
-            </a:r>
-            <a:endParaRPr lang="en-US" sz="1380" dirty="0"/>
+              <a:t>Relevant public health program SOPs, data governance.</a:t>
+            </a:r>
+            <a:endParaRPr lang="en-US" sz="1220" dirty="0"/>
           </a:p>
         </p:txBody>
       </p:sp>
@@ -13255,17 +13458,17 @@
         </p:nvSpPr>
         <p:spPr>
           <a:xfrm>
-            <a:off x="7799832" y="5001768"/>
-            <a:ext cx="3145536" cy="502920"/>
-          </a:xfrm>
-          <a:prstGeom prst="rect">
-            <a:avLst/>
-          </a:prstGeom>
-          <a:noFill/>
-          <a:ln/>
-        </p:spPr>
-        <p:txBody>
-          <a:bodyPr wrap="square" lIns="0" tIns="0" rIns="0" bIns="0" rtlCol="0" anchor="t">
+            <a:off x="7799832" y="4974336"/>
+            <a:ext cx="3145536" cy="576072"/>
+          </a:xfrm>
+          <a:prstGeom prst="rect">
+            <a:avLst/>
+          </a:prstGeom>
+          <a:noFill/>
+          <a:ln/>
+        </p:spPr>
+        <p:txBody>
+          <a:bodyPr wrap="square" lIns="254" tIns="254" rIns="254" bIns="254" rtlCol="0" anchor="t">
             <a:normAutofit/>
           </a:bodyPr>
           <a:lstStyle/>
@@ -13274,7 +13477,7 @@
               <a:buNone/>
             </a:pPr>
             <a:r>
-              <a:rPr lang="en-US" sz="1550" dirty="0">
+              <a:rPr lang="en-US" sz="1320" dirty="0">
                 <a:solidFill>
                   <a:srgbClr val="17364A"/>
                 </a:solidFill>
@@ -13282,9 +13485,9 @@
                 <a:ea typeface="Aptos" pitchFamily="34" charset="-122"/>
                 <a:cs typeface="Aptos" pitchFamily="34" charset="-120"/>
               </a:rPr>
-              <a:t>Connect the concept to public health purpose, responsible use, required safeguards, documentation, and the next action a department should take.</a:t>
-            </a:r>
-            <a:endParaRPr lang="en-US" sz="1550" dirty="0"/>
+              <a:t>Connect the concept to public health purpose, responsible use, required safeguards, documentation, and the next action a.</a:t>
+            </a:r>
+            <a:endParaRPr lang="en-US" sz="1320" dirty="0"/>
           </a:p>
         </p:txBody>
       </p:sp>
@@ -13585,63 +13788,75 @@
           <a:ln/>
         </p:spPr>
         <p:txBody>
-          <a:bodyPr wrap="square" lIns="635" tIns="635" rIns="635" bIns="635" rtlCol="0" anchor="t">
+          <a:bodyPr wrap="square" lIns="1016" tIns="1016" rIns="1016" bIns="1016" rtlCol="0" anchor="t">
             <a:normAutofit/>
           </a:bodyPr>
           <a:lstStyle/>
           <a:p>
+            <a:pPr indent="0" marL="0">
+              <a:buNone/>
+            </a:pPr>
             <a:r>
               <a:rPr lang="en-US" sz="1900" dirty="0">
                 <a:solidFill>
-                  <a:srgbClr val="17364A"/>
-                </a:solidFill>
-                <a:latin typeface="Aptos" pitchFamily="34" charset="0"/>
-                <a:ea typeface="Aptos" pitchFamily="34" charset="-122"/>
-                <a:cs typeface="Aptos" pitchFamily="34" charset="-120"/>
-              </a:rPr>
-              <a:t>Play 12: Execute Governance and Oversight - This lesson informs Play 12 by helping learners connect the.</a:t>
+                  <a:srgbClr val="003A63"/>
+                </a:solidFill>
+                <a:latin typeface="Aptos" pitchFamily="34" charset="0"/>
+                <a:ea typeface="Aptos" pitchFamily="34" charset="-122"/>
+                <a:cs typeface="Aptos" pitchFamily="34" charset="-120"/>
+              </a:rPr>
+              <a:t>• Play 12: Execute Governance and Oversight - This lesson informs Play 12 by helping learners.</a:t>
             </a:r>
             <a:endParaRPr lang="en-US" sz="1900" dirty="0"/>
           </a:p>
           <a:p>
+            <a:pPr indent="0" marL="0">
+              <a:buNone/>
+            </a:pPr>
             <a:r>
               <a:rPr lang="en-US" sz="1900" dirty="0">
                 <a:solidFill>
-                  <a:srgbClr val="17364A"/>
-                </a:solidFill>
-                <a:latin typeface="Aptos" pitchFamily="34" charset="0"/>
-                <a:ea typeface="Aptos" pitchFamily="34" charset="-122"/>
-                <a:cs typeface="Aptos" pitchFamily="34" charset="-120"/>
-              </a:rPr>
-              <a:t>Play 3: Establish AI Governance - This lesson informs Play 3 by helping learners connect the lesson topic to.</a:t>
+                  <a:srgbClr val="003A63"/>
+                </a:solidFill>
+                <a:latin typeface="Aptos" pitchFamily="34" charset="0"/>
+                <a:ea typeface="Aptos" pitchFamily="34" charset="-122"/>
+                <a:cs typeface="Aptos" pitchFamily="34" charset="-120"/>
+              </a:rPr>
+              <a:t>• Play 3: Establish AI Governance - This lesson informs Play 3 by helping learners connect the.</a:t>
             </a:r>
             <a:endParaRPr lang="en-US" sz="1900" dirty="0"/>
           </a:p>
           <a:p>
+            <a:pPr indent="0" marL="0">
+              <a:buNone/>
+            </a:pPr>
             <a:r>
               <a:rPr lang="en-US" sz="1900" dirty="0">
                 <a:solidFill>
-                  <a:srgbClr val="17364A"/>
-                </a:solidFill>
-                <a:latin typeface="Aptos" pitchFamily="34" charset="0"/>
-                <a:ea typeface="Aptos" pitchFamily="34" charset="-122"/>
-                <a:cs typeface="Aptos" pitchFamily="34" charset="-120"/>
-              </a:rPr>
-              <a:t>Play 11: Build and Deploy AI Solutions - This lesson informs Play 11 by helping learners connect the lesson.</a:t>
+                  <a:srgbClr val="003A63"/>
+                </a:solidFill>
+                <a:latin typeface="Aptos" pitchFamily="34" charset="0"/>
+                <a:ea typeface="Aptos" pitchFamily="34" charset="-122"/>
+                <a:cs typeface="Aptos" pitchFamily="34" charset="-120"/>
+              </a:rPr>
+              <a:t>• Play 11: Build and Deploy AI Solutions - This lesson informs Play 11 by helping learners.</a:t>
             </a:r>
             <a:endParaRPr lang="en-US" sz="1900" dirty="0"/>
           </a:p>
           <a:p>
+            <a:pPr indent="0" marL="0">
+              <a:buNone/>
+            </a:pPr>
             <a:r>
               <a:rPr lang="en-US" sz="1900" dirty="0">
                 <a:solidFill>
-                  <a:srgbClr val="17364A"/>
-                </a:solidFill>
-                <a:latin typeface="Aptos" pitchFamily="34" charset="0"/>
-                <a:ea typeface="Aptos" pitchFamily="34" charset="-122"/>
-                <a:cs typeface="Aptos" pitchFamily="34" charset="-120"/>
-              </a:rPr>
-              <a:t>Play 13: Monitor and Evaluate AI Systems - This lesson informs Play 13 by helping learners connect the.</a:t>
+                  <a:srgbClr val="003A63"/>
+                </a:solidFill>
+                <a:latin typeface="Aptos" pitchFamily="34" charset="0"/>
+                <a:ea typeface="Aptos" pitchFamily="34" charset="-122"/>
+                <a:cs typeface="Aptos" pitchFamily="34" charset="-120"/>
+              </a:rPr>
+              <a:t>• Play 13: Monitor and Evaluate AI Systems - This lesson informs Play 13 by helping learners.</a:t>
             </a:r>
             <a:endParaRPr lang="en-US" sz="1900" dirty="0"/>
           </a:p>
@@ -13721,17 +13936,17 @@
         </p:nvSpPr>
         <p:spPr>
           <a:xfrm>
-            <a:off x="8211312" y="1920240"/>
-            <a:ext cx="2734056" cy="1463040"/>
-          </a:xfrm>
-          <a:prstGeom prst="rect">
-            <a:avLst/>
-          </a:prstGeom>
-          <a:noFill/>
-          <a:ln/>
-        </p:spPr>
-        <p:txBody>
-          <a:bodyPr wrap="square" lIns="0" tIns="0" rIns="0" bIns="0" rtlCol="0" anchor="t">
+            <a:off x="8211312" y="1892808"/>
+            <a:ext cx="2734056" cy="1536192"/>
+          </a:xfrm>
+          <a:prstGeom prst="rect">
+            <a:avLst/>
+          </a:prstGeom>
+          <a:noFill/>
+          <a:ln/>
+        </p:spPr>
+        <p:txBody>
+          <a:bodyPr wrap="square" lIns="254" tIns="254" rIns="254" bIns="254" rtlCol="0" anchor="t">
             <a:normAutofit/>
           </a:bodyPr>
           <a:lstStyle/>
@@ -13740,7 +13955,7 @@
               <a:buNone/>
             </a:pPr>
             <a:r>
-              <a:rPr lang="en-US" sz="1550" dirty="0">
+              <a:rPr lang="en-US" sz="1320" dirty="0">
                 <a:solidFill>
                   <a:srgbClr val="17364A"/>
                 </a:solidFill>
@@ -13748,9 +13963,9 @@
                 <a:ea typeface="Aptos" pitchFamily="34" charset="-122"/>
                 <a:cs typeface="Aptos" pitchFamily="34" charset="-120"/>
               </a:rPr>
-              <a:t>Use the related plays to identify decisions, participants, timing, approvals, and documentation needed for responsible implementation.</a:t>
-            </a:r>
-            <a:endParaRPr lang="en-US" sz="1550" dirty="0"/>
+              <a:t>Use the related plays to identify decisions, participants, timing, approvals, and documentation needed for responsible.</a:t>
+            </a:r>
+            <a:endParaRPr lang="en-US" sz="1320" dirty="0"/>
           </a:p>
         </p:txBody>
       </p:sp>
@@ -13838,13 +14053,16 @@
           <a:ln/>
         </p:spPr>
         <p:txBody>
-          <a:bodyPr wrap="square" lIns="254" tIns="254" rIns="254" bIns="254" rtlCol="0" anchor="t">
+          <a:bodyPr wrap="square" lIns="508" tIns="508" rIns="508" bIns="508" rtlCol="0" anchor="t">
             <a:normAutofit/>
           </a:bodyPr>
           <a:lstStyle/>
           <a:p>
-            <a:r>
-              <a:rPr lang="en-US" sz="1380" dirty="0">
+            <a:pPr indent="0" marL="0">
+              <a:buNone/>
+            </a:pPr>
+            <a:r>
+              <a:rPr lang="en-US" sz="1220" dirty="0">
                 <a:solidFill>
                   <a:srgbClr val="17364A"/>
                 </a:solidFill>
@@ -13854,11 +14072,14 @@
               </a:rPr>
               <a:t>Locate the decision point in the playbook sequence.</a:t>
             </a:r>
-            <a:endParaRPr lang="en-US" sz="1380" dirty="0"/>
-          </a:p>
-          <a:p>
-            <a:r>
-              <a:rPr lang="en-US" sz="1380" dirty="0">
+            <a:endParaRPr lang="en-US" sz="1220" dirty="0"/>
+          </a:p>
+          <a:p>
+            <a:pPr indent="0" marL="0">
+              <a:buNone/>
+            </a:pPr>
+            <a:r>
+              <a:rPr lang="en-US" sz="1220" dirty="0">
                 <a:solidFill>
                   <a:srgbClr val="17364A"/>
                 </a:solidFill>
@@ -13868,11 +14089,14 @@
               </a:rPr>
               <a:t>Identify who should participate in the work.</a:t>
             </a:r>
-            <a:endParaRPr lang="en-US" sz="1380" dirty="0"/>
-          </a:p>
-          <a:p>
-            <a:r>
-              <a:rPr lang="en-US" sz="1380" dirty="0">
+            <a:endParaRPr lang="en-US" sz="1220" dirty="0"/>
+          </a:p>
+          <a:p>
+            <a:pPr indent="0" marL="0">
+              <a:buNone/>
+            </a:pPr>
+            <a:r>
+              <a:rPr lang="en-US" sz="1220" dirty="0">
                 <a:solidFill>
                   <a:srgbClr val="17364A"/>
                 </a:solidFill>
@@ -13882,7 +14106,7 @@
               </a:rPr>
               <a:t>Document the review, approval, or implementation step.</a:t>
             </a:r>
-            <a:endParaRPr lang="en-US" sz="1380" dirty="0"/>
+            <a:endParaRPr lang="en-US" sz="1220" dirty="0"/>
           </a:p>
         </p:txBody>
       </p:sp>
@@ -14183,63 +14407,75 @@
           <a:ln/>
         </p:spPr>
         <p:txBody>
-          <a:bodyPr wrap="square" lIns="635" tIns="635" rIns="635" bIns="635" rtlCol="0" anchor="t">
+          <a:bodyPr wrap="square" lIns="1016" tIns="1016" rIns="1016" bIns="1016" rtlCol="0" anchor="t">
             <a:normAutofit/>
           </a:bodyPr>
           <a:lstStyle/>
           <a:p>
+            <a:pPr indent="0" marL="0">
+              <a:buNone/>
+            </a:pPr>
             <a:r>
               <a:rPr lang="en-US" sz="1850" dirty="0">
                 <a:solidFill>
-                  <a:srgbClr val="17364A"/>
-                </a:solidFill>
-                <a:latin typeface="Aptos" pitchFamily="34" charset="0"/>
-                <a:ea typeface="Aptos" pitchFamily="34" charset="-122"/>
-                <a:cs typeface="Aptos" pitchFamily="34" charset="-120"/>
-              </a:rPr>
-              <a:t>Tool 16: Incident Response Checklist (Checklist) - Use this tool to complete or strengthen the practical.</a:t>
+                  <a:srgbClr val="003A63"/>
+                </a:solidFill>
+                <a:latin typeface="Aptos" pitchFamily="34" charset="0"/>
+                <a:ea typeface="Aptos" pitchFamily="34" charset="-122"/>
+                <a:cs typeface="Aptos" pitchFamily="34" charset="-120"/>
+              </a:rPr>
+              <a:t>• Tool 16: Incident Response Checklist (Checklist) - Use this tool to complete or strengthen the.</a:t>
             </a:r>
             <a:endParaRPr lang="en-US" sz="1850" dirty="0"/>
           </a:p>
           <a:p>
+            <a:pPr indent="0" marL="0">
+              <a:buNone/>
+            </a:pPr>
             <a:r>
               <a:rPr lang="en-US" sz="1850" dirty="0">
                 <a:solidFill>
-                  <a:srgbClr val="17364A"/>
-                </a:solidFill>
-                <a:latin typeface="Aptos" pitchFamily="34" charset="0"/>
-                <a:ea typeface="Aptos" pitchFamily="34" charset="-122"/>
-                <a:cs typeface="Aptos" pitchFamily="34" charset="-120"/>
-              </a:rPr>
-              <a:t>Tool 17: Compliance Audit Checklist (Checklist) - Use this tool to complete or strengthen the practical.</a:t>
+                  <a:srgbClr val="003A63"/>
+                </a:solidFill>
+                <a:latin typeface="Aptos" pitchFamily="34" charset="0"/>
+                <a:ea typeface="Aptos" pitchFamily="34" charset="-122"/>
+                <a:cs typeface="Aptos" pitchFamily="34" charset="-120"/>
+              </a:rPr>
+              <a:t>• Tool 17: Compliance Audit Checklist (Checklist) - Use this tool to complete or strengthen the.</a:t>
             </a:r>
             <a:endParaRPr lang="en-US" sz="1850" dirty="0"/>
           </a:p>
           <a:p>
+            <a:pPr indent="0" marL="0">
+              <a:buNone/>
+            </a:pPr>
             <a:r>
               <a:rPr lang="en-US" sz="1850" dirty="0">
                 <a:solidFill>
-                  <a:srgbClr val="17364A"/>
-                </a:solidFill>
-                <a:latin typeface="Aptos" pitchFamily="34" charset="0"/>
-                <a:ea typeface="Aptos" pitchFamily="34" charset="-122"/>
-                <a:cs typeface="Aptos" pitchFamily="34" charset="-120"/>
-              </a:rPr>
-              <a:t>Tool 18: Policy Update &amp; Version Control Log (Log) - Use this tool to complete or strengthen the practical.</a:t>
+                  <a:srgbClr val="003A63"/>
+                </a:solidFill>
+                <a:latin typeface="Aptos" pitchFamily="34" charset="0"/>
+                <a:ea typeface="Aptos" pitchFamily="34" charset="-122"/>
+                <a:cs typeface="Aptos" pitchFamily="34" charset="-120"/>
+              </a:rPr>
+              <a:t>• Tool 18: Policy Update &amp; Version Control Log (Log) - Use this tool to complete or strengthen.</a:t>
             </a:r>
             <a:endParaRPr lang="en-US" sz="1850" dirty="0"/>
           </a:p>
           <a:p>
+            <a:pPr indent="0" marL="0">
+              <a:buNone/>
+            </a:pPr>
             <a:r>
               <a:rPr lang="en-US" sz="1850" dirty="0">
                 <a:solidFill>
-                  <a:srgbClr val="17364A"/>
-                </a:solidFill>
-                <a:latin typeface="Aptos" pitchFamily="34" charset="0"/>
-                <a:ea typeface="Aptos" pitchFamily="34" charset="-122"/>
-                <a:cs typeface="Aptos" pitchFamily="34" charset="-120"/>
-              </a:rPr>
-              <a:t>Tool 19: Plain-Language AI Public Notice Template (Template) - Use Plain-Language AI Public Notice Template.</a:t>
+                  <a:srgbClr val="003A63"/>
+                </a:solidFill>
+                <a:latin typeface="Aptos" pitchFamily="34" charset="0"/>
+                <a:ea typeface="Aptos" pitchFamily="34" charset="-122"/>
+                <a:cs typeface="Aptos" pitchFamily="34" charset="-120"/>
+              </a:rPr>
+              <a:t>• Tool 19: Plain-Language AI Public Notice Template (Template) - Use Plain-Language AI Public.</a:t>
             </a:r>
             <a:endParaRPr lang="en-US" sz="1850" dirty="0"/>
           </a:p>
@@ -14319,17 +14555,17 @@
         </p:nvSpPr>
         <p:spPr>
           <a:xfrm>
-            <a:off x="8211312" y="1920240"/>
-            <a:ext cx="2734056" cy="1463040"/>
-          </a:xfrm>
-          <a:prstGeom prst="rect">
-            <a:avLst/>
-          </a:prstGeom>
-          <a:noFill/>
-          <a:ln/>
-        </p:spPr>
-        <p:txBody>
-          <a:bodyPr wrap="square" lIns="0" tIns="0" rIns="0" bIns="0" rtlCol="0" anchor="t">
+            <a:off x="8211312" y="1892808"/>
+            <a:ext cx="2734056" cy="1536192"/>
+          </a:xfrm>
+          <a:prstGeom prst="rect">
+            <a:avLst/>
+          </a:prstGeom>
+          <a:noFill/>
+          <a:ln/>
+        </p:spPr>
+        <p:txBody>
+          <a:bodyPr wrap="square" lIns="254" tIns="254" rIns="254" bIns="254" rtlCol="0" anchor="t">
             <a:normAutofit/>
           </a:bodyPr>
           <a:lstStyle/>
@@ -14338,7 +14574,7 @@
               <a:buNone/>
             </a:pPr>
             <a:r>
-              <a:rPr lang="en-US" sz="1550" dirty="0">
+              <a:rPr lang="en-US" sz="1320" dirty="0">
                 <a:solidFill>
                   <a:srgbClr val="17364A"/>
                 </a:solidFill>
@@ -14346,9 +14582,9 @@
                 <a:ea typeface="Aptos" pitchFamily="34" charset="-122"/>
                 <a:cs typeface="Aptos" pitchFamily="34" charset="-120"/>
               </a:rPr>
-              <a:t>Use linked tools when your department needs a structured worksheet, template, checklist, review process, or documentation artifact.</a:t>
-            </a:r>
-            <a:endParaRPr lang="en-US" sz="1550" dirty="0"/>
+              <a:t>Use linked tools when your department needs a structured worksheet, template, checklist, review process, or.</a:t>
+            </a:r>
+            <a:endParaRPr lang="en-US" sz="1320" dirty="0"/>
           </a:p>
         </p:txBody>
       </p:sp>
@@ -14436,13 +14672,16 @@
           <a:ln/>
         </p:spPr>
         <p:txBody>
-          <a:bodyPr wrap="square" lIns="254" tIns="254" rIns="254" bIns="254" rtlCol="0" anchor="t">
+          <a:bodyPr wrap="square" lIns="508" tIns="508" rIns="508" bIns="508" rtlCol="0" anchor="t">
             <a:normAutofit/>
           </a:bodyPr>
           <a:lstStyle/>
           <a:p>
-            <a:r>
-              <a:rPr lang="en-US" sz="1380" dirty="0">
+            <a:pPr indent="0" marL="0">
+              <a:buNone/>
+            </a:pPr>
+            <a:r>
+              <a:rPr lang="en-US" sz="1220" dirty="0">
                 <a:solidFill>
                   <a:srgbClr val="17364A"/>
                 </a:solidFill>
@@ -14452,11 +14691,14 @@
               </a:rPr>
               <a:t>Use a tool when no comparable local process exists.</a:t>
             </a:r>
-            <a:endParaRPr lang="en-US" sz="1380" dirty="0"/>
-          </a:p>
-          <a:p>
-            <a:r>
-              <a:rPr lang="en-US" sz="1380" dirty="0">
+            <a:endParaRPr lang="en-US" sz="1220" dirty="0"/>
+          </a:p>
+          <a:p>
+            <a:pPr indent="0" marL="0">
+              <a:buNone/>
+            </a:pPr>
+            <a:r>
+              <a:rPr lang="en-US" sz="1220" dirty="0">
                 <a:solidFill>
                   <a:srgbClr val="17364A"/>
                 </a:solidFill>
@@ -14464,13 +14706,16 @@
                 <a:ea typeface="Aptos" pitchFamily="34" charset="-122"/>
                 <a:cs typeface="Aptos" pitchFamily="34" charset="-120"/>
               </a:rPr>
-              <a:t>Adapt existing department templates when they already fit the purpose.</a:t>
-            </a:r>
-            <a:endParaRPr lang="en-US" sz="1380" dirty="0"/>
-          </a:p>
-          <a:p>
-            <a:r>
-              <a:rPr lang="en-US" sz="1380" dirty="0">
+              <a:t>Adapt existing department templates when they already fit the.</a:t>
+            </a:r>
+            <a:endParaRPr lang="en-US" sz="1220" dirty="0"/>
+          </a:p>
+          <a:p>
+            <a:pPr indent="0" marL="0">
+              <a:buNone/>
+            </a:pPr>
+            <a:r>
+              <a:rPr lang="en-US" sz="1220" dirty="0">
                 <a:solidFill>
                   <a:srgbClr val="17364A"/>
                 </a:solidFill>
@@ -14480,7 +14725,7 @@
               </a:rPr>
               <a:t>Save the completed artifact as evidence of the decision.</a:t>
             </a:r>
-            <a:endParaRPr lang="en-US" sz="1380" dirty="0"/>
+            <a:endParaRPr lang="en-US" sz="1220" dirty="0"/>
           </a:p>
         </p:txBody>
       </p:sp>
@@ -14781,49 +15026,58 @@
           <a:ln/>
         </p:spPr>
         <p:txBody>
-          <a:bodyPr wrap="square" lIns="635" tIns="635" rIns="635" bIns="635" rtlCol="0" anchor="t">
+          <a:bodyPr wrap="square" lIns="1016" tIns="1016" rIns="1016" bIns="1016" rtlCol="0" anchor="t">
             <a:normAutofit/>
           </a:bodyPr>
           <a:lstStyle/>
           <a:p>
+            <a:pPr indent="0" marL="0">
+              <a:buNone/>
+            </a:pPr>
             <a:r>
               <a:rPr lang="en-US" sz="2100" dirty="0">
                 <a:solidFill>
-                  <a:srgbClr val="17364A"/>
-                </a:solidFill>
-                <a:latin typeface="Aptos" pitchFamily="34" charset="0"/>
-                <a:ea typeface="Aptos" pitchFamily="34" charset="-122"/>
-                <a:cs typeface="Aptos" pitchFamily="34" charset="-120"/>
-              </a:rPr>
-              <a:t>Explain why AI systems require lifecycle evidence management.</a:t>
+                  <a:srgbClr val="003A63"/>
+                </a:solidFill>
+                <a:latin typeface="Aptos" pitchFamily="34" charset="0"/>
+                <a:ea typeface="Aptos" pitchFamily="34" charset="-122"/>
+                <a:cs typeface="Aptos" pitchFamily="34" charset="-120"/>
+              </a:rPr>
+              <a:t>• Explain why AI systems require lifecycle evidence management.</a:t>
             </a:r>
             <a:endParaRPr lang="en-US" sz="2100" dirty="0"/>
           </a:p>
           <a:p>
+            <a:pPr indent="0" marL="0">
+              <a:buNone/>
+            </a:pPr>
             <a:r>
               <a:rPr lang="en-US" sz="2100" dirty="0">
                 <a:solidFill>
-                  <a:srgbClr val="17364A"/>
-                </a:solidFill>
-                <a:latin typeface="Aptos" pitchFamily="34" charset="0"/>
-                <a:ea typeface="Aptos" pitchFamily="34" charset="-122"/>
-                <a:cs typeface="Aptos" pitchFamily="34" charset="-120"/>
-              </a:rPr>
-              <a:t>Identify the core records that support AI audit readiness.</a:t>
+                  <a:srgbClr val="003A63"/>
+                </a:solidFill>
+                <a:latin typeface="Aptos" pitchFamily="34" charset="0"/>
+                <a:ea typeface="Aptos" pitchFamily="34" charset="-122"/>
+                <a:cs typeface="Aptos" pitchFamily="34" charset="-120"/>
+              </a:rPr>
+              <a:t>• Identify the core records that support AI audit readiness.</a:t>
             </a:r>
             <a:endParaRPr lang="en-US" sz="2100" dirty="0"/>
           </a:p>
           <a:p>
+            <a:pPr indent="0" marL="0">
+              <a:buNone/>
+            </a:pPr>
             <a:r>
               <a:rPr lang="en-US" sz="2100" dirty="0">
                 <a:solidFill>
-                  <a:srgbClr val="17364A"/>
-                </a:solidFill>
-                <a:latin typeface="Aptos" pitchFamily="34" charset="0"/>
-                <a:ea typeface="Aptos" pitchFamily="34" charset="-122"/>
-                <a:cs typeface="Aptos" pitchFamily="34" charset="-120"/>
-              </a:rPr>
-              <a:t>Distinguish between approval evidence, validation evidence, operational evidence, and incident evidence.</a:t>
+                  <a:srgbClr val="003A63"/>
+                </a:solidFill>
+                <a:latin typeface="Aptos" pitchFamily="34" charset="0"/>
+                <a:ea typeface="Aptos" pitchFamily="34" charset="-122"/>
+                <a:cs typeface="Aptos" pitchFamily="34" charset="-120"/>
+              </a:rPr>
+              <a:t>• Distinguish between approval evidence, validation evidence, operational evidence, and incident.</a:t>
             </a:r>
             <a:endParaRPr lang="en-US" sz="2100" dirty="0"/>
           </a:p>
@@ -14903,17 +15157,17 @@
         </p:nvSpPr>
         <p:spPr>
           <a:xfrm>
-            <a:off x="7799832" y="1828800"/>
-            <a:ext cx="3145536" cy="685800"/>
-          </a:xfrm>
-          <a:prstGeom prst="rect">
-            <a:avLst/>
-          </a:prstGeom>
-          <a:noFill/>
-          <a:ln/>
-        </p:spPr>
-        <p:txBody>
-          <a:bodyPr wrap="square" lIns="0" tIns="0" rIns="0" bIns="0" rtlCol="0" anchor="t">
+            <a:off x="7799832" y="1801368"/>
+            <a:ext cx="3145536" cy="758952"/>
+          </a:xfrm>
+          <a:prstGeom prst="rect">
+            <a:avLst/>
+          </a:prstGeom>
+          <a:noFill/>
+          <a:ln/>
+        </p:spPr>
+        <p:txBody>
+          <a:bodyPr wrap="square" lIns="254" tIns="254" rIns="254" bIns="254" rtlCol="0" anchor="t">
             <a:normAutofit/>
           </a:bodyPr>
           <a:lstStyle/>
@@ -14922,7 +15176,7 @@
               <a:buNone/>
             </a:pPr>
             <a:r>
-              <a:rPr lang="en-US" sz="1550" dirty="0">
+              <a:rPr lang="en-US" sz="1320" dirty="0">
                 <a:solidFill>
                   <a:srgbClr val="17364A"/>
                 </a:solidFill>
@@ -14932,7 +15186,7 @@
               </a:rPr>
               <a:t>Explain why AI systems require lifecycle evidence management.</a:t>
             </a:r>
-            <a:endParaRPr lang="en-US" sz="1550" dirty="0"/>
+            <a:endParaRPr lang="en-US" sz="1320" dirty="0"/>
           </a:p>
         </p:txBody>
       </p:sp>
@@ -15020,13 +15274,16 @@
           <a:ln/>
         </p:spPr>
         <p:txBody>
-          <a:bodyPr wrap="square" lIns="254" tIns="254" rIns="254" bIns="254" rtlCol="0" anchor="t">
+          <a:bodyPr wrap="square" lIns="508" tIns="508" rIns="508" bIns="508" rtlCol="0" anchor="t">
             <a:normAutofit/>
           </a:bodyPr>
           <a:lstStyle/>
           <a:p>
-            <a:r>
-              <a:rPr lang="en-US" sz="1380" dirty="0">
+            <a:pPr indent="0" marL="0">
+              <a:buNone/>
+            </a:pPr>
+            <a:r>
+              <a:rPr lang="en-US" sz="1220" dirty="0">
                 <a:solidFill>
                   <a:srgbClr val="17364A"/>
                 </a:solidFill>
@@ -15034,13 +15291,16 @@
                 <a:ea typeface="Aptos" pitchFamily="34" charset="-122"/>
                 <a:cs typeface="Aptos" pitchFamily="34" charset="-120"/>
               </a:rPr>
-              <a:t>Create an AI evidence inventory for an approved or proposed use case.</a:t>
-            </a:r>
-            <a:endParaRPr lang="en-US" sz="1380" dirty="0"/>
-          </a:p>
-          <a:p>
-            <a:r>
-              <a:rPr lang="en-US" sz="1380" dirty="0">
+              <a:t>Create an AI evidence inventory for an approved or proposed use.</a:t>
+            </a:r>
+            <a:endParaRPr lang="en-US" sz="1220" dirty="0"/>
+          </a:p>
+          <a:p>
+            <a:pPr indent="0" marL="0">
+              <a:buNone/>
+            </a:pPr>
+            <a:r>
+              <a:rPr lang="en-US" sz="1220" dirty="0">
                 <a:solidFill>
                   <a:srgbClr val="17364A"/>
                 </a:solidFill>
@@ -15048,9 +15308,9 @@
                 <a:ea typeface="Aptos" pitchFamily="34" charset="-122"/>
                 <a:cs typeface="Aptos" pitchFamily="34" charset="-120"/>
               </a:rPr>
-              <a:t>Develop retention, ownership, and review expectations for AI governance artifacts.</a:t>
-            </a:r>
-            <a:endParaRPr lang="en-US" sz="1380" dirty="0"/>
+              <a:t>Develop retention, ownership, and review expectations for AI.</a:t>
+            </a:r>
+            <a:endParaRPr lang="en-US" sz="1220" dirty="0"/>
           </a:p>
         </p:txBody>
       </p:sp>
@@ -15128,17 +15388,17 @@
         </p:nvSpPr>
         <p:spPr>
           <a:xfrm>
-            <a:off x="7799832" y="5001768"/>
-            <a:ext cx="3145536" cy="502920"/>
-          </a:xfrm>
-          <a:prstGeom prst="rect">
-            <a:avLst/>
-          </a:prstGeom>
-          <a:noFill/>
-          <a:ln/>
-        </p:spPr>
-        <p:txBody>
-          <a:bodyPr wrap="square" lIns="0" tIns="0" rIns="0" bIns="0" rtlCol="0" anchor="t">
+            <a:off x="7799832" y="4974336"/>
+            <a:ext cx="3145536" cy="576072"/>
+          </a:xfrm>
+          <a:prstGeom prst="rect">
+            <a:avLst/>
+          </a:prstGeom>
+          <a:noFill/>
+          <a:ln/>
+        </p:spPr>
+        <p:txBody>
+          <a:bodyPr wrap="square" lIns="254" tIns="254" rIns="254" bIns="254" rtlCol="0" anchor="t">
             <a:normAutofit/>
           </a:bodyPr>
           <a:lstStyle/>
@@ -15147,7 +15407,7 @@
               <a:buNone/>
             </a:pPr>
             <a:r>
-              <a:rPr lang="en-US" sz="1550" dirty="0">
+              <a:rPr lang="en-US" sz="1320" dirty="0">
                 <a:solidFill>
                   <a:srgbClr val="17364A"/>
                 </a:solidFill>
@@ -15155,9 +15415,9 @@
                 <a:ea typeface="Aptos" pitchFamily="34" charset="-122"/>
                 <a:cs typeface="Aptos" pitchFamily="34" charset="-120"/>
               </a:rPr>
-              <a:t>Use the assignment to test whether you can explain the concept, apply it to a realistic public health situation, and identify what would need review before the work moves forward.</a:t>
-            </a:r>
-            <a:endParaRPr lang="en-US" sz="1550" dirty="0"/>
+              <a:t>Use the assignment to test whether you can explain the concept, apply it to a realistic public health situation, and.</a:t>
+            </a:r>
+            <a:endParaRPr lang="en-US" sz="1320" dirty="0"/>
           </a:p>
         </p:txBody>
       </p:sp>
@@ -15458,49 +15718,58 @@
           <a:ln/>
         </p:spPr>
         <p:txBody>
-          <a:bodyPr wrap="square" lIns="635" tIns="635" rIns="635" bIns="635" rtlCol="0" anchor="t">
+          <a:bodyPr wrap="square" lIns="1016" tIns="1016" rIns="1016" bIns="1016" rtlCol="0" anchor="t">
             <a:normAutofit/>
           </a:bodyPr>
           <a:lstStyle/>
           <a:p>
+            <a:pPr indent="0" marL="0">
+              <a:buNone/>
+            </a:pPr>
             <a:r>
               <a:rPr lang="en-US" sz="2100" dirty="0">
                 <a:solidFill>
-                  <a:srgbClr val="17364A"/>
-                </a:solidFill>
-                <a:latin typeface="Aptos" pitchFamily="34" charset="0"/>
-                <a:ea typeface="Aptos" pitchFamily="34" charset="-122"/>
-                <a:cs typeface="Aptos" pitchFamily="34" charset="-120"/>
-              </a:rPr>
-              <a:t>AI audit readiness is the agency’s ability to show what AI systems are used, why they were approved,.</a:t>
+                  <a:srgbClr val="003A63"/>
+                </a:solidFill>
+                <a:latin typeface="Aptos" pitchFamily="34" charset="0"/>
+                <a:ea typeface="Aptos" pitchFamily="34" charset="-122"/>
+                <a:cs typeface="Aptos" pitchFamily="34" charset="-120"/>
+              </a:rPr>
+              <a:t>• AI audit readiness is the agency’s ability to show what AI systems are used, why they were.</a:t>
             </a:r>
             <a:endParaRPr lang="en-US" sz="2100" dirty="0"/>
           </a:p>
           <a:p>
+            <a:pPr indent="0" marL="0">
+              <a:buNone/>
+            </a:pPr>
             <a:r>
               <a:rPr lang="en-US" sz="2100" dirty="0">
                 <a:solidFill>
-                  <a:srgbClr val="17364A"/>
-                </a:solidFill>
-                <a:latin typeface="Aptos" pitchFamily="34" charset="0"/>
-                <a:ea typeface="Aptos" pitchFamily="34" charset="-122"/>
-                <a:cs typeface="Aptos" pitchFamily="34" charset="-120"/>
-              </a:rPr>
-              <a:t>Public health agencies may need this evidence for internal oversight, public records requests, legal.</a:t>
+                  <a:srgbClr val="003A63"/>
+                </a:solidFill>
+                <a:latin typeface="Aptos" pitchFamily="34" charset="0"/>
+                <a:ea typeface="Aptos" pitchFamily="34" charset="-122"/>
+                <a:cs typeface="Aptos" pitchFamily="34" charset="-120"/>
+              </a:rPr>
+              <a:t>• Public health agencies may need this evidence for internal oversight, public records requests,.</a:t>
             </a:r>
             <a:endParaRPr lang="en-US" sz="2100" dirty="0"/>
           </a:p>
           <a:p>
+            <a:pPr indent="0" marL="0">
+              <a:buNone/>
+            </a:pPr>
             <a:r>
               <a:rPr lang="en-US" sz="2100" dirty="0">
                 <a:solidFill>
-                  <a:srgbClr val="17364A"/>
-                </a:solidFill>
-                <a:latin typeface="Aptos" pitchFamily="34" charset="0"/>
-                <a:ea typeface="Aptos" pitchFamily="34" charset="-122"/>
-                <a:cs typeface="Aptos" pitchFamily="34" charset="-120"/>
-              </a:rPr>
-              <a:t>This module teaches governance, compliance, program, and leadership staff how to manage evidence across.</a:t>
+                  <a:srgbClr val="003A63"/>
+                </a:solidFill>
+                <a:latin typeface="Aptos" pitchFamily="34" charset="0"/>
+                <a:ea typeface="Aptos" pitchFamily="34" charset="-122"/>
+                <a:cs typeface="Aptos" pitchFamily="34" charset="-120"/>
+              </a:rPr>
+              <a:t>• This module teaches governance, compliance, program, and leadership staff how to manage.</a:t>
             </a:r>
             <a:endParaRPr lang="en-US" sz="2100" dirty="0"/>
           </a:p>
@@ -15580,17 +15849,17 @@
         </p:nvSpPr>
         <p:spPr>
           <a:xfrm>
-            <a:off x="7799832" y="1828800"/>
-            <a:ext cx="3145536" cy="685800"/>
-          </a:xfrm>
-          <a:prstGeom prst="rect">
-            <a:avLst/>
-          </a:prstGeom>
-          <a:noFill/>
-          <a:ln/>
-        </p:spPr>
-        <p:txBody>
-          <a:bodyPr wrap="square" lIns="0" tIns="0" rIns="0" bIns="0" rtlCol="0" anchor="t">
+            <a:off x="7799832" y="1801368"/>
+            <a:ext cx="3145536" cy="758952"/>
+          </a:xfrm>
+          <a:prstGeom prst="rect">
+            <a:avLst/>
+          </a:prstGeom>
+          <a:noFill/>
+          <a:ln/>
+        </p:spPr>
+        <p:txBody>
+          <a:bodyPr wrap="square" lIns="254" tIns="254" rIns="254" bIns="254" rtlCol="0" anchor="t">
             <a:normAutofit/>
           </a:bodyPr>
           <a:lstStyle/>
@@ -15599,7 +15868,7 @@
               <a:buNone/>
             </a:pPr>
             <a:r>
-              <a:rPr lang="en-US" sz="1550" dirty="0">
+              <a:rPr lang="en-US" sz="1320" dirty="0">
                 <a:solidFill>
                   <a:srgbClr val="17364A"/>
                 </a:solidFill>
@@ -15609,7 +15878,7 @@
               </a:rPr>
               <a:t>AI audit readiness is the agency’s ability to show what AI systems are used, why they were approved,.</a:t>
             </a:r>
-            <a:endParaRPr lang="en-US" sz="1550" dirty="0"/>
+            <a:endParaRPr lang="en-US" sz="1320" dirty="0"/>
           </a:p>
         </p:txBody>
       </p:sp>
@@ -15697,13 +15966,16 @@
           <a:ln/>
         </p:spPr>
         <p:txBody>
-          <a:bodyPr wrap="square" lIns="254" tIns="254" rIns="254" bIns="254" rtlCol="0" anchor="t">
+          <a:bodyPr wrap="square" lIns="508" tIns="508" rIns="508" bIns="508" rtlCol="0" anchor="t">
             <a:normAutofit/>
           </a:bodyPr>
           <a:lstStyle/>
           <a:p>
-            <a:r>
-              <a:rPr lang="en-US" sz="1380" dirty="0">
+            <a:pPr indent="0" marL="0">
+              <a:buNone/>
+            </a:pPr>
+            <a:r>
+              <a:rPr lang="en-US" sz="1220" dirty="0">
                 <a:solidFill>
                   <a:srgbClr val="17364A"/>
                 </a:solidFill>
@@ -15711,13 +15983,16 @@
                 <a:ea typeface="Aptos" pitchFamily="34" charset="-122"/>
                 <a:cs typeface="Aptos" pitchFamily="34" charset="-120"/>
               </a:rPr>
-              <a:t>AI audit readiness is the agency’s ability to show what AI systems are used, why they were.</a:t>
-            </a:r>
-            <a:endParaRPr lang="en-US" sz="1380" dirty="0"/>
-          </a:p>
-          <a:p>
-            <a:r>
-              <a:rPr lang="en-US" sz="1380" dirty="0">
+              <a:t>AI audit readiness is the agency’s ability to show what AI systems.</a:t>
+            </a:r>
+            <a:endParaRPr lang="en-US" sz="1220" dirty="0"/>
+          </a:p>
+          <a:p>
+            <a:pPr indent="0" marL="0">
+              <a:buNone/>
+            </a:pPr>
+            <a:r>
+              <a:rPr lang="en-US" sz="1220" dirty="0">
                 <a:solidFill>
                   <a:srgbClr val="17364A"/>
                 </a:solidFill>
@@ -15725,13 +16000,16 @@
                 <a:ea typeface="Aptos" pitchFamily="34" charset="-122"/>
                 <a:cs typeface="Aptos" pitchFamily="34" charset="-120"/>
               </a:rPr>
-              <a:t>Public health agencies may need this evidence for internal oversight, public records.</a:t>
-            </a:r>
-            <a:endParaRPr lang="en-US" sz="1380" dirty="0"/>
-          </a:p>
-          <a:p>
-            <a:r>
-              <a:rPr lang="en-US" sz="1380" dirty="0">
+              <a:t>Public health agencies may need this evidence for internal.</a:t>
+            </a:r>
+            <a:endParaRPr lang="en-US" sz="1220" dirty="0"/>
+          </a:p>
+          <a:p>
+            <a:pPr indent="0" marL="0">
+              <a:buNone/>
+            </a:pPr>
+            <a:r>
+              <a:rPr lang="en-US" sz="1220" dirty="0">
                 <a:solidFill>
                   <a:srgbClr val="17364A"/>
                 </a:solidFill>
@@ -15739,9 +16017,9 @@
                 <a:ea typeface="Aptos" pitchFamily="34" charset="-122"/>
                 <a:cs typeface="Aptos" pitchFamily="34" charset="-120"/>
               </a:rPr>
-              <a:t>This module teaches governance, compliance, program, and leadership staff how to manage.</a:t>
-            </a:r>
-            <a:endParaRPr lang="en-US" sz="1380" dirty="0"/>
+              <a:t>This module teaches governance, compliance, program, and.</a:t>
+            </a:r>
+            <a:endParaRPr lang="en-US" sz="1220" dirty="0"/>
           </a:p>
         </p:txBody>
       </p:sp>
@@ -15819,17 +16097,17 @@
         </p:nvSpPr>
         <p:spPr>
           <a:xfrm>
-            <a:off x="7799832" y="5001768"/>
-            <a:ext cx="3145536" cy="502920"/>
-          </a:xfrm>
-          <a:prstGeom prst="rect">
-            <a:avLst/>
-          </a:prstGeom>
-          <a:noFill/>
-          <a:ln/>
-        </p:spPr>
-        <p:txBody>
-          <a:bodyPr wrap="square" lIns="0" tIns="0" rIns="0" bIns="0" rtlCol="0" anchor="t">
+            <a:off x="7799832" y="4974336"/>
+            <a:ext cx="3145536" cy="576072"/>
+          </a:xfrm>
+          <a:prstGeom prst="rect">
+            <a:avLst/>
+          </a:prstGeom>
+          <a:noFill/>
+          <a:ln/>
+        </p:spPr>
+        <p:txBody>
+          <a:bodyPr wrap="square" lIns="254" tIns="254" rIns="254" bIns="254" rtlCol="0" anchor="t">
             <a:normAutofit/>
           </a:bodyPr>
           <a:lstStyle/>
@@ -15838,7 +16116,7 @@
               <a:buNone/>
             </a:pPr>
             <a:r>
-              <a:rPr lang="en-US" sz="1550" dirty="0">
+              <a:rPr lang="en-US" sz="1320" dirty="0">
                 <a:solidFill>
                   <a:srgbClr val="17364A"/>
                 </a:solidFill>
@@ -15846,9 +16124,9 @@
                 <a:ea typeface="Aptos" pitchFamily="34" charset="-122"/>
                 <a:cs typeface="Aptos" pitchFamily="34" charset="-120"/>
               </a:rPr>
-              <a:t>Connect the concept to public health purpose, responsible use, required safeguards, documentation, and the next action a department should take.</a:t>
-            </a:r>
-            <a:endParaRPr lang="en-US" sz="1550" dirty="0"/>
+              <a:t>Connect the concept to public health purpose, responsible use, required safeguards, documentation, and the next action a.</a:t>
+            </a:r>
+            <a:endParaRPr lang="en-US" sz="1320" dirty="0"/>
           </a:p>
         </p:txBody>
       </p:sp>
@@ -16149,49 +16427,58 @@
           <a:ln/>
         </p:spPr>
         <p:txBody>
-          <a:bodyPr wrap="square" lIns="635" tIns="635" rIns="635" bIns="635" rtlCol="0" anchor="t">
+          <a:bodyPr wrap="square" lIns="1016" tIns="1016" rIns="1016" bIns="1016" rtlCol="0" anchor="t">
             <a:normAutofit/>
           </a:bodyPr>
           <a:lstStyle/>
           <a:p>
+            <a:pPr indent="0" marL="0">
+              <a:buNone/>
+            </a:pPr>
             <a:r>
               <a:rPr lang="en-US" sz="2100" dirty="0">
                 <a:solidFill>
-                  <a:srgbClr val="17364A"/>
-                </a:solidFill>
-                <a:latin typeface="Aptos" pitchFamily="34" charset="0"/>
-                <a:ea typeface="Aptos" pitchFamily="34" charset="-122"/>
-                <a:cs typeface="Aptos" pitchFamily="34" charset="-120"/>
-              </a:rPr>
-              <a:t>This module provides national-level training guidance for public health agencies and partners.</a:t>
+                  <a:srgbClr val="003A63"/>
+                </a:solidFill>
+                <a:latin typeface="Aptos" pitchFamily="34" charset="0"/>
+                <a:ea typeface="Aptos" pitchFamily="34" charset="-122"/>
+                <a:cs typeface="Aptos" pitchFamily="34" charset="-120"/>
+              </a:rPr>
+              <a:t>• This module provides national-level training guidance for public health agencies and partners.</a:t>
             </a:r>
             <a:endParaRPr lang="en-US" sz="2100" dirty="0"/>
           </a:p>
           <a:p>
+            <a:pPr indent="0" marL="0">
+              <a:buNone/>
+            </a:pPr>
             <a:r>
               <a:rPr lang="en-US" sz="2100" dirty="0">
                 <a:solidFill>
-                  <a:srgbClr val="17364A"/>
-                </a:solidFill>
-                <a:latin typeface="Aptos" pitchFamily="34" charset="0"/>
-                <a:ea typeface="Aptos" pitchFamily="34" charset="-122"/>
-                <a:cs typeface="Aptos" pitchFamily="34" charset="-120"/>
-              </a:rPr>
-              <a:t>It is not legal advice and does not replace review by agency legal counsel, privacy officers,.</a:t>
+                  <a:srgbClr val="003A63"/>
+                </a:solidFill>
+                <a:latin typeface="Aptos" pitchFamily="34" charset="0"/>
+                <a:ea typeface="Aptos" pitchFamily="34" charset="-122"/>
+                <a:cs typeface="Aptos" pitchFamily="34" charset="-120"/>
+              </a:rPr>
+              <a:t>• It is not legal advice and does not replace review by agency legal counsel, privacy officers,.</a:t>
             </a:r>
             <a:endParaRPr lang="en-US" sz="2100" dirty="0"/>
           </a:p>
           <a:p>
+            <a:pPr indent="0" marL="0">
+              <a:buNone/>
+            </a:pPr>
             <a:r>
               <a:rPr lang="en-US" sz="2100" dirty="0">
                 <a:solidFill>
-                  <a:srgbClr val="17364A"/>
-                </a:solidFill>
-                <a:latin typeface="Aptos" pitchFamily="34" charset="0"/>
-                <a:ea typeface="Aptos" pitchFamily="34" charset="-122"/>
-                <a:cs typeface="Aptos" pitchFamily="34" charset="-120"/>
-              </a:rPr>
-              <a:t>Requirements may vary by state, locality, territory, Tribe, agency, funding source, data-sharing.</a:t>
+                  <a:srgbClr val="003A63"/>
+                </a:solidFill>
+                <a:latin typeface="Aptos" pitchFamily="34" charset="0"/>
+                <a:ea typeface="Aptos" pitchFamily="34" charset="-122"/>
+                <a:cs typeface="Aptos" pitchFamily="34" charset="-120"/>
+              </a:rPr>
+              <a:t>• Requirements may vary by state, locality, territory, Tribe, agency, funding source,.</a:t>
             </a:r>
             <a:endParaRPr lang="en-US" sz="2100" dirty="0"/>
           </a:p>
@@ -16271,17 +16558,17 @@
         </p:nvSpPr>
         <p:spPr>
           <a:xfrm>
-            <a:off x="7799832" y="1828800"/>
-            <a:ext cx="3145536" cy="685800"/>
-          </a:xfrm>
-          <a:prstGeom prst="rect">
-            <a:avLst/>
-          </a:prstGeom>
-          <a:noFill/>
-          <a:ln/>
-        </p:spPr>
-        <p:txBody>
-          <a:bodyPr wrap="square" lIns="0" tIns="0" rIns="0" bIns="0" rtlCol="0" anchor="t">
+            <a:off x="7799832" y="1801368"/>
+            <a:ext cx="3145536" cy="758952"/>
+          </a:xfrm>
+          <a:prstGeom prst="rect">
+            <a:avLst/>
+          </a:prstGeom>
+          <a:noFill/>
+          <a:ln/>
+        </p:spPr>
+        <p:txBody>
+          <a:bodyPr wrap="square" lIns="254" tIns="254" rIns="254" bIns="254" rtlCol="0" anchor="t">
             <a:normAutofit/>
           </a:bodyPr>
           <a:lstStyle/>
@@ -16290,7 +16577,7 @@
               <a:buNone/>
             </a:pPr>
             <a:r>
-              <a:rPr lang="en-US" sz="1550" dirty="0">
+              <a:rPr lang="en-US" sz="1320" dirty="0">
                 <a:solidFill>
                   <a:srgbClr val="17364A"/>
                 </a:solidFill>
@@ -16300,7 +16587,7 @@
               </a:rPr>
               <a:t>This module provides national-level training guidance for public health agencies and partners.</a:t>
             </a:r>
-            <a:endParaRPr lang="en-US" sz="1550" dirty="0"/>
+            <a:endParaRPr lang="en-US" sz="1320" dirty="0"/>
           </a:p>
         </p:txBody>
       </p:sp>
@@ -16388,13 +16675,16 @@
           <a:ln/>
         </p:spPr>
         <p:txBody>
-          <a:bodyPr wrap="square" lIns="254" tIns="254" rIns="254" bIns="254" rtlCol="0" anchor="t">
+          <a:bodyPr wrap="square" lIns="508" tIns="508" rIns="508" bIns="508" rtlCol="0" anchor="t">
             <a:normAutofit/>
           </a:bodyPr>
           <a:lstStyle/>
           <a:p>
-            <a:r>
-              <a:rPr lang="en-US" sz="1380" dirty="0">
+            <a:pPr indent="0" marL="0">
+              <a:buNone/>
+            </a:pPr>
+            <a:r>
+              <a:rPr lang="en-US" sz="1220" dirty="0">
                 <a:solidFill>
                   <a:srgbClr val="17364A"/>
                 </a:solidFill>
@@ -16402,13 +16692,16 @@
                 <a:ea typeface="Aptos" pitchFamily="34" charset="-122"/>
                 <a:cs typeface="Aptos" pitchFamily="34" charset="-120"/>
               </a:rPr>
-              <a:t>It is not legal advice and does not replace review by agency legal counsel, privacy.</a:t>
-            </a:r>
-            <a:endParaRPr lang="en-US" sz="1380" dirty="0"/>
-          </a:p>
-          <a:p>
-            <a:r>
-              <a:rPr lang="en-US" sz="1380" dirty="0">
+              <a:t>It is not legal advice and does not replace review by agency legal.</a:t>
+            </a:r>
+            <a:endParaRPr lang="en-US" sz="1220" dirty="0"/>
+          </a:p>
+          <a:p>
+            <a:pPr indent="0" marL="0">
+              <a:buNone/>
+            </a:pPr>
+            <a:r>
+              <a:rPr lang="en-US" sz="1220" dirty="0">
                 <a:solidFill>
                   <a:srgbClr val="17364A"/>
                 </a:solidFill>
@@ -16416,13 +16709,16 @@
                 <a:ea typeface="Aptos" pitchFamily="34" charset="-122"/>
                 <a:cs typeface="Aptos" pitchFamily="34" charset="-120"/>
               </a:rPr>
-              <a:t>Requirements may vary by state, locality, territory, Tribe, agency, funding source,.</a:t>
-            </a:r>
-            <a:endParaRPr lang="en-US" sz="1380" dirty="0"/>
-          </a:p>
-          <a:p>
-            <a:r>
-              <a:rPr lang="en-US" sz="1380" dirty="0">
+              <a:t>Requirements may vary by state, locality, territory, Tribe,.</a:t>
+            </a:r>
+            <a:endParaRPr lang="en-US" sz="1220" dirty="0"/>
+          </a:p>
+          <a:p>
+            <a:pPr indent="0" marL="0">
+              <a:buNone/>
+            </a:pPr>
+            <a:r>
+              <a:rPr lang="en-US" sz="1220" dirty="0">
                 <a:solidFill>
                   <a:srgbClr val="17364A"/>
                 </a:solidFill>
@@ -16430,9 +16726,9 @@
                 <a:ea typeface="Aptos" pitchFamily="34" charset="-122"/>
                 <a:cs typeface="Aptos" pitchFamily="34" charset="-120"/>
               </a:rPr>
-              <a:t>Learners should use this module to identify the issues that require review and should.</a:t>
-            </a:r>
-            <a:endParaRPr lang="en-US" sz="1380" dirty="0"/>
+              <a:t>Learners should use this module to identify the issues that.</a:t>
+            </a:r>
+            <a:endParaRPr lang="en-US" sz="1220" dirty="0"/>
           </a:p>
         </p:txBody>
       </p:sp>
@@ -16510,17 +16806,17 @@
         </p:nvSpPr>
         <p:spPr>
           <a:xfrm>
-            <a:off x="7799832" y="5001768"/>
-            <a:ext cx="3145536" cy="502920"/>
-          </a:xfrm>
-          <a:prstGeom prst="rect">
-            <a:avLst/>
-          </a:prstGeom>
-          <a:noFill/>
-          <a:ln/>
-        </p:spPr>
-        <p:txBody>
-          <a:bodyPr wrap="square" lIns="0" tIns="0" rIns="0" bIns="0" rtlCol="0" anchor="t">
+            <a:off x="7799832" y="4974336"/>
+            <a:ext cx="3145536" cy="576072"/>
+          </a:xfrm>
+          <a:prstGeom prst="rect">
+            <a:avLst/>
+          </a:prstGeom>
+          <a:noFill/>
+          <a:ln/>
+        </p:spPr>
+        <p:txBody>
+          <a:bodyPr wrap="square" lIns="254" tIns="254" rIns="254" bIns="254" rtlCol="0" anchor="t">
             <a:normAutofit/>
           </a:bodyPr>
           <a:lstStyle/>
@@ -16529,7 +16825,7 @@
               <a:buNone/>
             </a:pPr>
             <a:r>
-              <a:rPr lang="en-US" sz="1550" dirty="0">
+              <a:rPr lang="en-US" sz="1320" dirty="0">
                 <a:solidFill>
                   <a:srgbClr val="17364A"/>
                 </a:solidFill>
@@ -16537,9 +16833,9 @@
                 <a:ea typeface="Aptos" pitchFamily="34" charset="-122"/>
                 <a:cs typeface="Aptos" pitchFamily="34" charset="-120"/>
               </a:rPr>
-              <a:t>Translate this concept into clear decision rights, review steps, documentation expectations, and escalation paths before an AI-supported workflow is approved.</a:t>
-            </a:r>
-            <a:endParaRPr lang="en-US" sz="1550" dirty="0"/>
+              <a:t>Translate this concept into clear decision rights, review steps, documentation expectations, and escalation paths before.</a:t>
+            </a:r>
+            <a:endParaRPr lang="en-US" sz="1320" dirty="0"/>
           </a:p>
         </p:txBody>
       </p:sp>
@@ -16840,49 +17136,58 @@
           <a:ln/>
         </p:spPr>
         <p:txBody>
-          <a:bodyPr wrap="square" lIns="635" tIns="635" rIns="635" bIns="635" rtlCol="0" anchor="t">
+          <a:bodyPr wrap="square" lIns="1016" tIns="1016" rIns="1016" bIns="1016" rtlCol="0" anchor="t">
             <a:normAutofit/>
           </a:bodyPr>
           <a:lstStyle/>
           <a:p>
+            <a:pPr indent="0" marL="0">
+              <a:buNone/>
+            </a:pPr>
             <a:r>
               <a:rPr lang="en-US" sz="2100" dirty="0">
                 <a:solidFill>
-                  <a:srgbClr val="17364A"/>
-                </a:solidFill>
-                <a:latin typeface="Aptos" pitchFamily="34" charset="0"/>
-                <a:ea typeface="Aptos" pitchFamily="34" charset="-122"/>
-                <a:cs typeface="Aptos" pitchFamily="34" charset="-120"/>
-              </a:rPr>
-              <a:t>A health department uses an AI tool to help classify public inquiries.</a:t>
+                  <a:srgbClr val="003A63"/>
+                </a:solidFill>
+                <a:latin typeface="Aptos" pitchFamily="34" charset="0"/>
+                <a:ea typeface="Aptos" pitchFamily="34" charset="-122"/>
+                <a:cs typeface="Aptos" pitchFamily="34" charset="-120"/>
+              </a:rPr>
+              <a:t>• A health department uses an AI tool to help classify public inquiries.</a:t>
             </a:r>
             <a:endParaRPr lang="en-US" sz="2100" dirty="0"/>
           </a:p>
           <a:p>
+            <a:pPr indent="0" marL="0">
+              <a:buNone/>
+            </a:pPr>
             <a:r>
               <a:rPr lang="en-US" sz="2100" dirty="0">
                 <a:solidFill>
-                  <a:srgbClr val="17364A"/>
-                </a:solidFill>
-                <a:latin typeface="Aptos" pitchFamily="34" charset="0"/>
-                <a:ea typeface="Aptos" pitchFamily="34" charset="-122"/>
-                <a:cs typeface="Aptos" pitchFamily="34" charset="-120"/>
-              </a:rPr>
-              <a:t>Six months later, a concern is raised that the tool may be misclassifying language access requests.</a:t>
+                  <a:srgbClr val="003A63"/>
+                </a:solidFill>
+                <a:latin typeface="Aptos" pitchFamily="34" charset="0"/>
+                <a:ea typeface="Aptos" pitchFamily="34" charset="-122"/>
+                <a:cs typeface="Aptos" pitchFamily="34" charset="-120"/>
+              </a:rPr>
+              <a:t>• Six months later, a concern is raised that the tool may be misclassifying language access.</a:t>
             </a:r>
             <a:endParaRPr lang="en-US" sz="2100" dirty="0"/>
           </a:p>
           <a:p>
+            <a:pPr indent="0" marL="0">
+              <a:buNone/>
+            </a:pPr>
             <a:r>
               <a:rPr lang="en-US" sz="2100" dirty="0">
                 <a:solidFill>
-                  <a:srgbClr val="17364A"/>
-                </a:solidFill>
-                <a:latin typeface="Aptos" pitchFamily="34" charset="0"/>
-                <a:ea typeface="Aptos" pitchFamily="34" charset="-122"/>
-                <a:cs typeface="Aptos" pitchFamily="34" charset="-120"/>
-              </a:rPr>
-              <a:t>Audit-ready evidence would include the approved use case, validation plan, subgroup review, SOP,.</a:t>
+                  <a:srgbClr val="003A63"/>
+                </a:solidFill>
+                <a:latin typeface="Aptos" pitchFamily="34" charset="0"/>
+                <a:ea typeface="Aptos" pitchFamily="34" charset="-122"/>
+                <a:cs typeface="Aptos" pitchFamily="34" charset="-120"/>
+              </a:rPr>
+              <a:t>• Audit-ready evidence would include the approved use case, validation plan, subgroup review,.</a:t>
             </a:r>
             <a:endParaRPr lang="en-US" sz="2100" dirty="0"/>
           </a:p>
@@ -16962,17 +17267,17 @@
         </p:nvSpPr>
         <p:spPr>
           <a:xfrm>
-            <a:off x="7799832" y="1828800"/>
-            <a:ext cx="3145536" cy="685800"/>
-          </a:xfrm>
-          <a:prstGeom prst="rect">
-            <a:avLst/>
-          </a:prstGeom>
-          <a:noFill/>
-          <a:ln/>
-        </p:spPr>
-        <p:txBody>
-          <a:bodyPr wrap="square" lIns="0" tIns="0" rIns="0" bIns="0" rtlCol="0" anchor="t">
+            <a:off x="7799832" y="1801368"/>
+            <a:ext cx="3145536" cy="758952"/>
+          </a:xfrm>
+          <a:prstGeom prst="rect">
+            <a:avLst/>
+          </a:prstGeom>
+          <a:noFill/>
+          <a:ln/>
+        </p:spPr>
+        <p:txBody>
+          <a:bodyPr wrap="square" lIns="254" tIns="254" rIns="254" bIns="254" rtlCol="0" anchor="t">
             <a:normAutofit/>
           </a:bodyPr>
           <a:lstStyle/>
@@ -16981,7 +17286,7 @@
               <a:buNone/>
             </a:pPr>
             <a:r>
-              <a:rPr lang="en-US" sz="1550" dirty="0">
+              <a:rPr lang="en-US" sz="1320" dirty="0">
                 <a:solidFill>
                   <a:srgbClr val="17364A"/>
                 </a:solidFill>
@@ -16991,7 +17296,7 @@
               </a:rPr>
               <a:t>A health department uses an AI tool to help classify public inquiries.</a:t>
             </a:r>
-            <a:endParaRPr lang="en-US" sz="1550" dirty="0"/>
+            <a:endParaRPr lang="en-US" sz="1320" dirty="0"/>
           </a:p>
         </p:txBody>
       </p:sp>
@@ -17079,13 +17384,16 @@
           <a:ln/>
         </p:spPr>
         <p:txBody>
-          <a:bodyPr wrap="square" lIns="254" tIns="254" rIns="254" bIns="254" rtlCol="0" anchor="t">
+          <a:bodyPr wrap="square" lIns="508" tIns="508" rIns="508" bIns="508" rtlCol="0" anchor="t">
             <a:normAutofit/>
           </a:bodyPr>
           <a:lstStyle/>
           <a:p>
-            <a:r>
-              <a:rPr lang="en-US" sz="1380" dirty="0">
+            <a:pPr indent="0" marL="0">
+              <a:buNone/>
+            </a:pPr>
+            <a:r>
+              <a:rPr lang="en-US" sz="1220" dirty="0">
                 <a:solidFill>
                   <a:srgbClr val="17364A"/>
                 </a:solidFill>
@@ -17093,13 +17401,16 @@
                 <a:ea typeface="Aptos" pitchFamily="34" charset="-122"/>
                 <a:cs typeface="Aptos" pitchFamily="34" charset="-120"/>
               </a:rPr>
-              <a:t>Audit-ready evidence would include the approved use case, validation plan, subgroup.</a:t>
-            </a:r>
-            <a:endParaRPr lang="en-US" sz="1380" dirty="0"/>
-          </a:p>
-          <a:p>
-            <a:r>
-              <a:rPr lang="en-US" sz="1380" dirty="0">
+              <a:t>Audit-ready evidence would include the approved use case,.</a:t>
+            </a:r>
+            <a:endParaRPr lang="en-US" sz="1220" dirty="0"/>
+          </a:p>
+          <a:p>
+            <a:pPr indent="0" marL="0">
+              <a:buNone/>
+            </a:pPr>
+            <a:r>
+              <a:rPr lang="en-US" sz="1220" dirty="0">
                 <a:solidFill>
                   <a:srgbClr val="17364A"/>
                 </a:solidFill>
@@ -17107,9 +17418,9 @@
                 <a:ea typeface="Aptos" pitchFamily="34" charset="-122"/>
                 <a:cs typeface="Aptos" pitchFamily="34" charset="-120"/>
               </a:rPr>
-              <a:t>This evidence allows the agency to investigate the concern and decide whether to modify,.</a:t>
-            </a:r>
-            <a:endParaRPr lang="en-US" sz="1380" dirty="0"/>
+              <a:t>This evidence allows the agency to investigate the concern and.</a:t>
+            </a:r>
+            <a:endParaRPr lang="en-US" sz="1220" dirty="0"/>
           </a:p>
         </p:txBody>
       </p:sp>
@@ -17187,17 +17498,17 @@
         </p:nvSpPr>
         <p:spPr>
           <a:xfrm>
-            <a:off x="7799832" y="5001768"/>
-            <a:ext cx="3145536" cy="502920"/>
-          </a:xfrm>
-          <a:prstGeom prst="rect">
-            <a:avLst/>
-          </a:prstGeom>
-          <a:noFill/>
-          <a:ln/>
-        </p:spPr>
-        <p:txBody>
-          <a:bodyPr wrap="square" lIns="0" tIns="0" rIns="0" bIns="0" rtlCol="0" anchor="t">
+            <a:off x="7799832" y="4974336"/>
+            <a:ext cx="3145536" cy="576072"/>
+          </a:xfrm>
+          <a:prstGeom prst="rect">
+            <a:avLst/>
+          </a:prstGeom>
+          <a:noFill/>
+          <a:ln/>
+        </p:spPr>
+        <p:txBody>
+          <a:bodyPr wrap="square" lIns="254" tIns="254" rIns="254" bIns="254" rtlCol="0" anchor="t">
             <a:normAutofit/>
           </a:bodyPr>
           <a:lstStyle/>
@@ -17206,7 +17517,7 @@
               <a:buNone/>
             </a:pPr>
             <a:r>
-              <a:rPr lang="en-US" sz="1550" dirty="0">
+              <a:rPr lang="en-US" sz="1320" dirty="0">
                 <a:solidFill>
                   <a:srgbClr val="17364A"/>
                 </a:solidFill>
@@ -17214,9 +17525,9 @@
                 <a:ea typeface="Aptos" pitchFamily="34" charset="-122"/>
                 <a:cs typeface="Aptos" pitchFamily="34" charset="-120"/>
               </a:rPr>
-              <a:t>Connect the concept to public health purpose, responsible use, required safeguards, documentation, and the next action a department should take.</a:t>
-            </a:r>
-            <a:endParaRPr lang="en-US" sz="1550" dirty="0"/>
+              <a:t>Connect the concept to public health purpose, responsible use, required safeguards, documentation, and the next action a.</a:t>
+            </a:r>
+            <a:endParaRPr lang="en-US" sz="1320" dirty="0"/>
           </a:p>
         </p:txBody>
       </p:sp>
@@ -17517,49 +17828,58 @@
           <a:ln/>
         </p:spPr>
         <p:txBody>
-          <a:bodyPr wrap="square" lIns="635" tIns="635" rIns="635" bIns="635" rtlCol="0" anchor="t">
+          <a:bodyPr wrap="square" lIns="1016" tIns="1016" rIns="1016" bIns="1016" rtlCol="0" anchor="t">
             <a:normAutofit/>
           </a:bodyPr>
           <a:lstStyle/>
           <a:p>
+            <a:pPr indent="0" marL="0">
+              <a:buNone/>
+            </a:pPr>
             <a:r>
               <a:rPr lang="en-US" sz="2100" dirty="0">
                 <a:solidFill>
-                  <a:srgbClr val="17364A"/>
-                </a:solidFill>
-                <a:latin typeface="Aptos" pitchFamily="34" charset="0"/>
-                <a:ea typeface="Aptos" pitchFamily="34" charset="-122"/>
-                <a:cs typeface="Aptos" pitchFamily="34" charset="-120"/>
-              </a:rPr>
-              <a:t>AI evidence begins at intake.</a:t>
+                  <a:srgbClr val="003A63"/>
+                </a:solidFill>
+                <a:latin typeface="Aptos" pitchFamily="34" charset="0"/>
+                <a:ea typeface="Aptos" pitchFamily="34" charset="-122"/>
+                <a:cs typeface="Aptos" pitchFamily="34" charset="-120"/>
+              </a:rPr>
+              <a:t>• AI evidence begins at intake.</a:t>
             </a:r>
             <a:endParaRPr lang="en-US" sz="2100" dirty="0"/>
           </a:p>
           <a:p>
+            <a:pPr indent="0" marL="0">
+              <a:buNone/>
+            </a:pPr>
             <a:r>
               <a:rPr lang="en-US" sz="2100" dirty="0">
                 <a:solidFill>
-                  <a:srgbClr val="17364A"/>
-                </a:solidFill>
-                <a:latin typeface="Aptos" pitchFamily="34" charset="0"/>
-                <a:ea typeface="Aptos" pitchFamily="34" charset="-122"/>
-                <a:cs typeface="Aptos" pitchFamily="34" charset="-120"/>
-              </a:rPr>
-              <a:t>The agency should preserve the use case description, risk triage, required reviewers, approval.</a:t>
+                  <a:srgbClr val="003A63"/>
+                </a:solidFill>
+                <a:latin typeface="Aptos" pitchFamily="34" charset="0"/>
+                <a:ea typeface="Aptos" pitchFamily="34" charset="-122"/>
+                <a:cs typeface="Aptos" pitchFamily="34" charset="-120"/>
+              </a:rPr>
+              <a:t>• The agency should preserve the use case description, risk triage, required reviewers, approval.</a:t>
             </a:r>
             <a:endParaRPr lang="en-US" sz="2100" dirty="0"/>
           </a:p>
           <a:p>
+            <a:pPr indent="0" marL="0">
+              <a:buNone/>
+            </a:pPr>
             <a:r>
               <a:rPr lang="en-US" sz="2100" dirty="0">
                 <a:solidFill>
-                  <a:srgbClr val="17364A"/>
-                </a:solidFill>
-                <a:latin typeface="Aptos" pitchFamily="34" charset="0"/>
-                <a:ea typeface="Aptos" pitchFamily="34" charset="-122"/>
-                <a:cs typeface="Aptos" pitchFamily="34" charset="-120"/>
-              </a:rPr>
-              <a:t>If a use case is rejected or deferred, that decision should also be documented.</a:t>
+                  <a:srgbClr val="003A63"/>
+                </a:solidFill>
+                <a:latin typeface="Aptos" pitchFamily="34" charset="0"/>
+                <a:ea typeface="Aptos" pitchFamily="34" charset="-122"/>
+                <a:cs typeface="Aptos" pitchFamily="34" charset="-120"/>
+              </a:rPr>
+              <a:t>• If a use case is rejected or deferred, that decision should also be documented.</a:t>
             </a:r>
             <a:endParaRPr lang="en-US" sz="2100" dirty="0"/>
           </a:p>
@@ -17639,17 +17959,17 @@
         </p:nvSpPr>
         <p:spPr>
           <a:xfrm>
-            <a:off x="7799832" y="1828800"/>
-            <a:ext cx="3145536" cy="685800"/>
-          </a:xfrm>
-          <a:prstGeom prst="rect">
-            <a:avLst/>
-          </a:prstGeom>
-          <a:noFill/>
-          <a:ln/>
-        </p:spPr>
-        <p:txBody>
-          <a:bodyPr wrap="square" lIns="0" tIns="0" rIns="0" bIns="0" rtlCol="0" anchor="t">
+            <a:off x="7799832" y="1801368"/>
+            <a:ext cx="3145536" cy="758952"/>
+          </a:xfrm>
+          <a:prstGeom prst="rect">
+            <a:avLst/>
+          </a:prstGeom>
+          <a:noFill/>
+          <a:ln/>
+        </p:spPr>
+        <p:txBody>
+          <a:bodyPr wrap="square" lIns="254" tIns="254" rIns="254" bIns="254" rtlCol="0" anchor="t">
             <a:normAutofit/>
           </a:bodyPr>
           <a:lstStyle/>
@@ -17658,7 +17978,7 @@
               <a:buNone/>
             </a:pPr>
             <a:r>
-              <a:rPr lang="en-US" sz="1550" dirty="0">
+              <a:rPr lang="en-US" sz="1320" dirty="0">
                 <a:solidFill>
                   <a:srgbClr val="17364A"/>
                 </a:solidFill>
@@ -17668,7 +17988,7 @@
               </a:rPr>
               <a:t>AI evidence begins at intake.</a:t>
             </a:r>
-            <a:endParaRPr lang="en-US" sz="1550" dirty="0"/>
+            <a:endParaRPr lang="en-US" sz="1320" dirty="0"/>
           </a:p>
         </p:txBody>
       </p:sp>
@@ -17756,13 +18076,16 @@
           <a:ln/>
         </p:spPr>
         <p:txBody>
-          <a:bodyPr wrap="square" lIns="254" tIns="254" rIns="254" bIns="254" rtlCol="0" anchor="t">
+          <a:bodyPr wrap="square" lIns="508" tIns="508" rIns="508" bIns="508" rtlCol="0" anchor="t">
             <a:normAutofit/>
           </a:bodyPr>
           <a:lstStyle/>
           <a:p>
-            <a:r>
-              <a:rPr lang="en-US" sz="1380" dirty="0">
+            <a:pPr indent="0" marL="0">
+              <a:buNone/>
+            </a:pPr>
+            <a:r>
+              <a:rPr lang="en-US" sz="1220" dirty="0">
                 <a:solidFill>
                   <a:srgbClr val="17364A"/>
                 </a:solidFill>
@@ -17770,13 +18093,16 @@
                 <a:ea typeface="Aptos" pitchFamily="34" charset="-122"/>
                 <a:cs typeface="Aptos" pitchFamily="34" charset="-120"/>
               </a:rPr>
-              <a:t>The agency should preserve the use case description, risk triage, required reviewers,.</a:t>
-            </a:r>
-            <a:endParaRPr lang="en-US" sz="1380" dirty="0"/>
-          </a:p>
-          <a:p>
-            <a:r>
-              <a:rPr lang="en-US" sz="1380" dirty="0">
+              <a:t>The agency should preserve the use case description, risk triage,.</a:t>
+            </a:r>
+            <a:endParaRPr lang="en-US" sz="1220" dirty="0"/>
+          </a:p>
+          <a:p>
+            <a:pPr indent="0" marL="0">
+              <a:buNone/>
+            </a:pPr>
+            <a:r>
+              <a:rPr lang="en-US" sz="1220" dirty="0">
                 <a:solidFill>
                   <a:srgbClr val="17364A"/>
                 </a:solidFill>
@@ -17784,13 +18110,16 @@
                 <a:ea typeface="Aptos" pitchFamily="34" charset="-122"/>
                 <a:cs typeface="Aptos" pitchFamily="34" charset="-120"/>
               </a:rPr>
-              <a:t>These early records help explain why a tool exists and what limits were placed on its use.</a:t>
-            </a:r>
-            <a:endParaRPr lang="en-US" sz="1380" dirty="0"/>
-          </a:p>
-          <a:p>
-            <a:r>
-              <a:rPr lang="en-US" sz="1380" dirty="0">
+              <a:t>These early records help explain why a tool exists and what limits.</a:t>
+            </a:r>
+            <a:endParaRPr lang="en-US" sz="1220" dirty="0"/>
+          </a:p>
+          <a:p>
+            <a:pPr indent="0" marL="0">
+              <a:buNone/>
+            </a:pPr>
+            <a:r>
+              <a:rPr lang="en-US" sz="1220" dirty="0">
                 <a:solidFill>
                   <a:srgbClr val="17364A"/>
                 </a:solidFill>
@@ -17798,9 +18127,9 @@
                 <a:ea typeface="Aptos" pitchFamily="34" charset="-122"/>
                 <a:cs typeface="Aptos" pitchFamily="34" charset="-120"/>
               </a:rPr>
-              <a:t>Validation evidence should show how the agency determined whether the AI-supported.</a:t>
-            </a:r>
-            <a:endParaRPr lang="en-US" sz="1380" dirty="0"/>
+              <a:t>Validation evidence should show how the agency determined whether.</a:t>
+            </a:r>
+            <a:endParaRPr lang="en-US" sz="1220" dirty="0"/>
           </a:p>
         </p:txBody>
       </p:sp>
@@ -17878,17 +18207,17 @@
         </p:nvSpPr>
         <p:spPr>
           <a:xfrm>
-            <a:off x="7799832" y="5001768"/>
-            <a:ext cx="3145536" cy="502920"/>
-          </a:xfrm>
-          <a:prstGeom prst="rect">
-            <a:avLst/>
-          </a:prstGeom>
-          <a:noFill/>
-          <a:ln/>
-        </p:spPr>
-        <p:txBody>
-          <a:bodyPr wrap="square" lIns="0" tIns="0" rIns="0" bIns="0" rtlCol="0" anchor="t">
+            <a:off x="7799832" y="4974336"/>
+            <a:ext cx="3145536" cy="576072"/>
+          </a:xfrm>
+          <a:prstGeom prst="rect">
+            <a:avLst/>
+          </a:prstGeom>
+          <a:noFill/>
+          <a:ln/>
+        </p:spPr>
+        <p:txBody>
+          <a:bodyPr wrap="square" lIns="254" tIns="254" rIns="254" bIns="254" rtlCol="0" anchor="t">
             <a:normAutofit/>
           </a:bodyPr>
           <a:lstStyle/>
@@ -17897,7 +18226,7 @@
               <a:buNone/>
             </a:pPr>
             <a:r>
-              <a:rPr lang="en-US" sz="1550" dirty="0">
+              <a:rPr lang="en-US" sz="1320" dirty="0">
                 <a:solidFill>
                   <a:srgbClr val="17364A"/>
                 </a:solidFill>
@@ -17905,9 +18234,9 @@
                 <a:ea typeface="Aptos" pitchFamily="34" charset="-122"/>
                 <a:cs typeface="Aptos" pitchFamily="34" charset="-120"/>
               </a:rPr>
-              <a:t>Connect the concept to public health purpose, responsible use, required safeguards, documentation, and the next action a department should take.</a:t>
-            </a:r>
-            <a:endParaRPr lang="en-US" sz="1550" dirty="0"/>
+              <a:t>Connect the concept to public health purpose, responsible use, required safeguards, documentation, and the next action a.</a:t>
+            </a:r>
+            <a:endParaRPr lang="en-US" sz="1320" dirty="0"/>
           </a:p>
         </p:txBody>
       </p:sp>

--- a/downloads/presentations/modules/gov-340.pptx
+++ b/downloads/presentations/modules/gov-340.pptx
@@ -3513,11 +3513,11 @@
         <p:spPr>
           <a:xfrm>
             <a:off x="7635240" y="1325880"/>
-            <a:ext cx="3474720" cy="1325880"/>
+            <a:ext cx="3474720" cy="1207008"/>
           </a:xfrm>
           <a:prstGeom prst="roundRect">
             <a:avLst>
-              <a:gd name="adj" fmla="val 8276"/>
+              <a:gd name="adj" fmla="val 9091"/>
             </a:avLst>
           </a:prstGeom>
           <a:solidFill>
@@ -3579,7 +3579,7 @@
         <p:spPr>
           <a:xfrm>
             <a:off x="7799832" y="1801368"/>
-            <a:ext cx="3145536" cy="758952"/>
+            <a:ext cx="3145536" cy="640080"/>
           </a:xfrm>
           <a:prstGeom prst="rect">
             <a:avLst/>
@@ -3619,12 +3619,12 @@
         </p:nvSpPr>
         <p:spPr>
           <a:xfrm>
-            <a:off x="7635240" y="2788920"/>
-            <a:ext cx="3474720" cy="1536192"/>
+            <a:off x="7635240" y="2670048"/>
+            <a:ext cx="3474720" cy="1377086"/>
           </a:xfrm>
           <a:prstGeom prst="roundRect">
             <a:avLst>
-              <a:gd name="adj" fmla="val 7143"/>
+              <a:gd name="adj" fmla="val 7968"/>
             </a:avLst>
           </a:prstGeom>
           <a:solidFill>
@@ -3646,7 +3646,7 @@
         </p:nvSpPr>
         <p:spPr>
           <a:xfrm>
-            <a:off x="7799832" y="2935224"/>
+            <a:off x="7799832" y="2816352"/>
             <a:ext cx="3145536" cy="256032"/>
           </a:xfrm>
           <a:prstGeom prst="rect">
@@ -3685,8 +3685,8 @@
         </p:nvSpPr>
         <p:spPr>
           <a:xfrm>
-            <a:off x="7818120" y="3300984"/>
-            <a:ext cx="3090672" cy="877824"/>
+            <a:off x="7818120" y="3182112"/>
+            <a:ext cx="3090672" cy="718718"/>
           </a:xfrm>
           <a:prstGeom prst="rect">
             <a:avLst/>
@@ -3760,12 +3760,12 @@
         </p:nvSpPr>
         <p:spPr>
           <a:xfrm>
-            <a:off x="7635240" y="4498848"/>
-            <a:ext cx="3474720" cy="1143000"/>
+            <a:off x="7635240" y="4184294"/>
+            <a:ext cx="3474720" cy="1466698"/>
           </a:xfrm>
           <a:prstGeom prst="roundRect">
             <a:avLst>
-              <a:gd name="adj" fmla="val 9600"/>
+              <a:gd name="adj" fmla="val 7481"/>
             </a:avLst>
           </a:prstGeom>
           <a:solidFill>
@@ -3787,7 +3787,7 @@
         </p:nvSpPr>
         <p:spPr>
           <a:xfrm>
-            <a:off x="7799832" y="4645152"/>
+            <a:off x="7799832" y="4330598"/>
             <a:ext cx="3145536" cy="256032"/>
           </a:xfrm>
           <a:prstGeom prst="rect">
@@ -3826,8 +3826,8 @@
         </p:nvSpPr>
         <p:spPr>
           <a:xfrm>
-            <a:off x="7799832" y="4974336"/>
-            <a:ext cx="3145536" cy="576072"/>
+            <a:off x="7799832" y="4659782"/>
+            <a:ext cx="3145536" cy="899770"/>
           </a:xfrm>
           <a:prstGeom prst="rect">
             <a:avLst/>
@@ -3853,7 +3853,7 @@
                 <a:ea typeface="Aptos" pitchFamily="34" charset="-122"/>
                 <a:cs typeface="Aptos" pitchFamily="34" charset="-120"/>
               </a:rPr>
-              <a:t>Connect the concept to public health purpose, responsible use, required safeguards, documentation, and the next action a.</a:t>
+              <a:t>Connect the concept to public health purpose, responsible use, required safeguards, documentation, and the next action a department should take.</a:t>
             </a:r>
             <a:endParaRPr lang="en-US" sz="1320" dirty="0"/>
           </a:p>
@@ -4222,11 +4222,11 @@
         <p:spPr>
           <a:xfrm>
             <a:off x="7635240" y="1325880"/>
-            <a:ext cx="3474720" cy="1325880"/>
+            <a:ext cx="3474720" cy="1207008"/>
           </a:xfrm>
           <a:prstGeom prst="roundRect">
             <a:avLst>
-              <a:gd name="adj" fmla="val 8276"/>
+              <a:gd name="adj" fmla="val 9091"/>
             </a:avLst>
           </a:prstGeom>
           <a:solidFill>
@@ -4288,7 +4288,7 @@
         <p:spPr>
           <a:xfrm>
             <a:off x="7799832" y="1801368"/>
-            <a:ext cx="3145536" cy="758952"/>
+            <a:ext cx="3145536" cy="640080"/>
           </a:xfrm>
           <a:prstGeom prst="rect">
             <a:avLst/>
@@ -4328,7 +4328,7 @@
         </p:nvSpPr>
         <p:spPr>
           <a:xfrm>
-            <a:off x="7635240" y="2788920"/>
+            <a:off x="7635240" y="2670048"/>
             <a:ext cx="3474720" cy="1536192"/>
           </a:xfrm>
           <a:prstGeom prst="roundRect">
@@ -4355,8 +4355,8 @@
         </p:nvSpPr>
         <p:spPr>
           <a:xfrm>
-            <a:off x="7799832" y="2935224"/>
-            <a:ext cx="3145536" cy="256032"/>
+            <a:off x="7799832" y="2798064"/>
+            <a:ext cx="3145536" cy="237744"/>
           </a:xfrm>
           <a:prstGeom prst="rect">
             <a:avLst/>
@@ -4372,7 +4372,7 @@
               <a:buNone/>
             </a:pPr>
             <a:r>
-              <a:rPr lang="en-US" sz="1300" b="1" dirty="0">
+              <a:rPr lang="en-US" sz="1250" b="1" dirty="0">
                 <a:solidFill>
                   <a:srgbClr val="0068B7"/>
                 </a:solidFill>
@@ -4380,101 +4380,317 @@
                 <a:ea typeface="Aptos" pitchFamily="34" charset="-122"/>
                 <a:cs typeface="Aptos" pitchFamily="34" charset="-120"/>
               </a:rPr>
-              <a:t>Concept checkpoints</a:t>
-            </a:r>
-            <a:endParaRPr lang="en-US" sz="1300" dirty="0"/>
-          </a:p>
-        </p:txBody>
-      </p:sp>
-      <p:sp>
-        <p:nvSpPr>
-          <p:cNvPr id="15" name="Text 13"/>
-          <p:cNvSpPr/>
-          <p:nvPr/>
-        </p:nvSpPr>
-        <p:spPr>
-          <a:xfrm>
-            <a:off x="7818120" y="3300984"/>
-            <a:ext cx="3090672" cy="877824"/>
-          </a:xfrm>
-          <a:prstGeom prst="rect">
-            <a:avLst/>
-          </a:prstGeom>
-          <a:noFill/>
-          <a:ln/>
-        </p:spPr>
-        <p:txBody>
-          <a:bodyPr wrap="square" lIns="508" tIns="508" rIns="508" bIns="508" rtlCol="0" anchor="t">
+              <a:t>Risk control loop</a:t>
+            </a:r>
+            <a:endParaRPr lang="en-US" sz="1250" dirty="0"/>
+          </a:p>
+        </p:txBody>
+      </p:sp>
+      <p:sp>
+        <p:nvSpPr>
+          <p:cNvPr id="15" name="Shape 13"/>
+          <p:cNvSpPr/>
+          <p:nvPr/>
+        </p:nvSpPr>
+        <p:spPr>
+          <a:xfrm>
+            <a:off x="8763000" y="3351276"/>
+            <a:ext cx="164592" cy="0"/>
+          </a:xfrm>
+          <a:prstGeom prst="line">
+            <a:avLst/>
+          </a:prstGeom>
+          <a:noFill/>
+          <a:ln w="15240">
+            <a:solidFill>
+              <a:srgbClr val="8ABBD8"/>
+            </a:solidFill>
+            <a:prstDash val="solid"/>
+          </a:ln>
+        </p:spPr>
+      </p:sp>
+      <p:sp>
+        <p:nvSpPr>
+          <p:cNvPr id="16" name="Shape 14"/>
+          <p:cNvSpPr/>
+          <p:nvPr/>
+        </p:nvSpPr>
+        <p:spPr>
+          <a:xfrm>
+            <a:off x="7872984" y="3200400"/>
+            <a:ext cx="890016" cy="301752"/>
+          </a:xfrm>
+          <a:prstGeom prst="roundRect">
+            <a:avLst>
+              <a:gd name="adj" fmla="val 24242"/>
+            </a:avLst>
+          </a:prstGeom>
+          <a:solidFill>
+            <a:srgbClr val="0068B7"/>
+          </a:solidFill>
+          <a:ln w="12700">
+            <a:solidFill>
+              <a:srgbClr val="0068B7"/>
+            </a:solidFill>
+            <a:prstDash val="solid"/>
+          </a:ln>
+        </p:spPr>
+      </p:sp>
+      <p:sp>
+        <p:nvSpPr>
+          <p:cNvPr id="17" name="Text 15"/>
+          <p:cNvSpPr/>
+          <p:nvPr/>
+        </p:nvSpPr>
+        <p:spPr>
+          <a:xfrm>
+            <a:off x="7909560" y="3273552"/>
+            <a:ext cx="816864" cy="146304"/>
+          </a:xfrm>
+          <a:prstGeom prst="rect">
+            <a:avLst/>
+          </a:prstGeom>
+          <a:noFill/>
+          <a:ln/>
+        </p:spPr>
+        <p:txBody>
+          <a:bodyPr wrap="square" lIns="0" tIns="0" rIns="0" bIns="0" rtlCol="0" anchor="ctr">
             <a:normAutofit/>
           </a:bodyPr>
           <a:lstStyle/>
           <a:p>
-            <a:pPr indent="0" marL="0">
-              <a:buNone/>
-            </a:pPr>
-            <a:r>
-              <a:rPr lang="en-US" sz="1220" dirty="0">
-                <a:solidFill>
-                  <a:srgbClr val="17364A"/>
-                </a:solidFill>
-                <a:latin typeface="Aptos" pitchFamily="34" charset="0"/>
-                <a:ea typeface="Aptos" pitchFamily="34" charset="-122"/>
-                <a:cs typeface="Aptos" pitchFamily="34" charset="-120"/>
-              </a:rPr>
-              <a:t>Risks and failure modes include the following:</a:t>
-            </a:r>
-            <a:endParaRPr lang="en-US" sz="1220" dirty="0"/>
-          </a:p>
-          <a:p>
-            <a:pPr indent="0" marL="0">
-              <a:buNone/>
-            </a:pPr>
-            <a:r>
-              <a:rPr lang="en-US" sz="1220" dirty="0">
-                <a:solidFill>
-                  <a:srgbClr val="17364A"/>
-                </a:solidFill>
-                <a:latin typeface="Aptos" pitchFamily="34" charset="0"/>
-                <a:ea typeface="Aptos" pitchFamily="34" charset="-122"/>
-                <a:cs typeface="Aptos" pitchFamily="34" charset="-120"/>
-              </a:rPr>
-              <a:t>Approvals without records of conditions or rationale.</a:t>
-            </a:r>
-            <a:endParaRPr lang="en-US" sz="1220" dirty="0"/>
-          </a:p>
-          <a:p>
-            <a:pPr indent="0" marL="0">
-              <a:buNone/>
-            </a:pPr>
-            <a:r>
-              <a:rPr lang="en-US" sz="1220" dirty="0">
-                <a:solidFill>
-                  <a:srgbClr val="17364A"/>
-                </a:solidFill>
-                <a:latin typeface="Aptos" pitchFamily="34" charset="0"/>
-                <a:ea typeface="Aptos" pitchFamily="34" charset="-122"/>
-                <a:cs typeface="Aptos" pitchFamily="34" charset="-120"/>
-              </a:rPr>
-              <a:t>Validation results stored informally or not retained.</a:t>
-            </a:r>
-            <a:endParaRPr lang="en-US" sz="1220" dirty="0"/>
-          </a:p>
-        </p:txBody>
-      </p:sp>
-      <p:sp>
-        <p:nvSpPr>
-          <p:cNvPr id="16" name="Shape 14"/>
-          <p:cNvSpPr/>
-          <p:nvPr/>
-        </p:nvSpPr>
-        <p:spPr>
-          <a:xfrm>
-            <a:off x="7635240" y="4498848"/>
-            <a:ext cx="3474720" cy="1143000"/>
+            <a:pPr algn="ctr" indent="0" marL="0">
+              <a:buNone/>
+            </a:pPr>
+            <a:r>
+              <a:rPr lang="en-US" sz="880" b="1" dirty="0">
+                <a:solidFill>
+                  <a:srgbClr val="FFFFFF"/>
+                </a:solidFill>
+                <a:latin typeface="Aptos" pitchFamily="34" charset="0"/>
+                <a:ea typeface="Aptos" pitchFamily="34" charset="-122"/>
+                <a:cs typeface="Aptos" pitchFamily="34" charset="-120"/>
+              </a:rPr>
+              <a:t>Identify</a:t>
+            </a:r>
+            <a:endParaRPr lang="en-US" sz="880" dirty="0"/>
+          </a:p>
+        </p:txBody>
+      </p:sp>
+      <p:sp>
+        <p:nvSpPr>
+          <p:cNvPr id="18" name="Shape 16"/>
+          <p:cNvSpPr/>
+          <p:nvPr/>
+        </p:nvSpPr>
+        <p:spPr>
+          <a:xfrm>
+            <a:off x="9817608" y="3351276"/>
+            <a:ext cx="164592" cy="0"/>
+          </a:xfrm>
+          <a:prstGeom prst="line">
+            <a:avLst/>
+          </a:prstGeom>
+          <a:noFill/>
+          <a:ln w="15240">
+            <a:solidFill>
+              <a:srgbClr val="8ABBD8"/>
+            </a:solidFill>
+            <a:prstDash val="solid"/>
+          </a:ln>
+        </p:spPr>
+      </p:sp>
+      <p:sp>
+        <p:nvSpPr>
+          <p:cNvPr id="19" name="Shape 17"/>
+          <p:cNvSpPr/>
+          <p:nvPr/>
+        </p:nvSpPr>
+        <p:spPr>
+          <a:xfrm>
+            <a:off x="8927592" y="3200400"/>
+            <a:ext cx="890016" cy="301752"/>
           </a:xfrm>
           <a:prstGeom prst="roundRect">
             <a:avLst>
-              <a:gd name="adj" fmla="val 9600"/>
+              <a:gd name="adj" fmla="val 24242"/>
+            </a:avLst>
+          </a:prstGeom>
+          <a:solidFill>
+            <a:srgbClr val="2F8A28"/>
+          </a:solidFill>
+          <a:ln w="12700">
+            <a:solidFill>
+              <a:srgbClr val="2F8A28"/>
+            </a:solidFill>
+            <a:prstDash val="solid"/>
+          </a:ln>
+        </p:spPr>
+      </p:sp>
+      <p:sp>
+        <p:nvSpPr>
+          <p:cNvPr id="20" name="Text 18"/>
+          <p:cNvSpPr/>
+          <p:nvPr/>
+        </p:nvSpPr>
+        <p:spPr>
+          <a:xfrm>
+            <a:off x="8964168" y="3273552"/>
+            <a:ext cx="816864" cy="146304"/>
+          </a:xfrm>
+          <a:prstGeom prst="rect">
+            <a:avLst/>
+          </a:prstGeom>
+          <a:noFill/>
+          <a:ln/>
+        </p:spPr>
+        <p:txBody>
+          <a:bodyPr wrap="square" lIns="0" tIns="0" rIns="0" bIns="0" rtlCol="0" anchor="ctr">
+            <a:normAutofit/>
+          </a:bodyPr>
+          <a:lstStyle/>
+          <a:p>
+            <a:pPr algn="ctr" indent="0" marL="0">
+              <a:buNone/>
+            </a:pPr>
+            <a:r>
+              <a:rPr lang="en-US" sz="880" b="1" dirty="0">
+                <a:solidFill>
+                  <a:srgbClr val="FFFFFF"/>
+                </a:solidFill>
+                <a:latin typeface="Aptos" pitchFamily="34" charset="0"/>
+                <a:ea typeface="Aptos" pitchFamily="34" charset="-122"/>
+                <a:cs typeface="Aptos" pitchFamily="34" charset="-120"/>
+              </a:rPr>
+              <a:t>Control</a:t>
+            </a:r>
+            <a:endParaRPr lang="en-US" sz="880" dirty="0"/>
+          </a:p>
+        </p:txBody>
+      </p:sp>
+      <p:sp>
+        <p:nvSpPr>
+          <p:cNvPr id="21" name="Shape 19"/>
+          <p:cNvSpPr/>
+          <p:nvPr/>
+        </p:nvSpPr>
+        <p:spPr>
+          <a:xfrm>
+            <a:off x="9982200" y="3200400"/>
+            <a:ext cx="890016" cy="301752"/>
+          </a:xfrm>
+          <a:prstGeom prst="roundRect">
+            <a:avLst>
+              <a:gd name="adj" fmla="val 24242"/>
+            </a:avLst>
+          </a:prstGeom>
+          <a:solidFill>
+            <a:srgbClr val="6A4CA3"/>
+          </a:solidFill>
+          <a:ln w="12700">
+            <a:solidFill>
+              <a:srgbClr val="6A4CA3"/>
+            </a:solidFill>
+            <a:prstDash val="solid"/>
+          </a:ln>
+        </p:spPr>
+      </p:sp>
+      <p:sp>
+        <p:nvSpPr>
+          <p:cNvPr id="22" name="Text 20"/>
+          <p:cNvSpPr/>
+          <p:nvPr/>
+        </p:nvSpPr>
+        <p:spPr>
+          <a:xfrm>
+            <a:off x="10018776" y="3273552"/>
+            <a:ext cx="816864" cy="146304"/>
+          </a:xfrm>
+          <a:prstGeom prst="rect">
+            <a:avLst/>
+          </a:prstGeom>
+          <a:noFill/>
+          <a:ln/>
+        </p:spPr>
+        <p:txBody>
+          <a:bodyPr wrap="square" lIns="0" tIns="0" rIns="0" bIns="0" rtlCol="0" anchor="ctr">
+            <a:normAutofit/>
+          </a:bodyPr>
+          <a:lstStyle/>
+          <a:p>
+            <a:pPr algn="ctr" indent="0" marL="0">
+              <a:buNone/>
+            </a:pPr>
+            <a:r>
+              <a:rPr lang="en-US" sz="880" b="1" dirty="0">
+                <a:solidFill>
+                  <a:srgbClr val="FFFFFF"/>
+                </a:solidFill>
+                <a:latin typeface="Aptos" pitchFamily="34" charset="0"/>
+                <a:ea typeface="Aptos" pitchFamily="34" charset="-122"/>
+                <a:cs typeface="Aptos" pitchFamily="34" charset="-120"/>
+              </a:rPr>
+              <a:t>Monitor</a:t>
+            </a:r>
+            <a:endParaRPr lang="en-US" sz="880" dirty="0"/>
+          </a:p>
+        </p:txBody>
+      </p:sp>
+      <p:sp>
+        <p:nvSpPr>
+          <p:cNvPr id="23" name="Text 21"/>
+          <p:cNvSpPr/>
+          <p:nvPr/>
+        </p:nvSpPr>
+        <p:spPr>
+          <a:xfrm>
+            <a:off x="7854696" y="3694176"/>
+            <a:ext cx="3035808" cy="365760"/>
+          </a:xfrm>
+          <a:prstGeom prst="rect">
+            <a:avLst/>
+          </a:prstGeom>
+          <a:noFill/>
+          <a:ln/>
+        </p:spPr>
+        <p:txBody>
+          <a:bodyPr wrap="square" lIns="254" tIns="254" rIns="254" bIns="254" rtlCol="0" anchor="t">
+            <a:normAutofit/>
+          </a:bodyPr>
+          <a:lstStyle/>
+          <a:p>
+            <a:pPr indent="0" marL="0">
+              <a:buNone/>
+            </a:pPr>
+            <a:r>
+              <a:rPr lang="en-US" sz="1120" dirty="0">
+                <a:solidFill>
+                  <a:srgbClr val="17364A"/>
+                </a:solidFill>
+                <a:latin typeface="Aptos" pitchFamily="34" charset="0"/>
+                <a:ea typeface="Aptos" pitchFamily="34" charset="-122"/>
+                <a:cs typeface="Aptos" pitchFamily="34" charset="-120"/>
+              </a:rPr>
+              <a:t>Responsible use depends on finding risks early, applying safeguards, and watching for drift or harm over time.</a:t>
+            </a:r>
+            <a:endParaRPr lang="en-US" sz="1120" dirty="0"/>
+          </a:p>
+        </p:txBody>
+      </p:sp>
+      <p:sp>
+        <p:nvSpPr>
+          <p:cNvPr id="24" name="Shape 22"/>
+          <p:cNvSpPr/>
+          <p:nvPr/>
+        </p:nvSpPr>
+        <p:spPr>
+          <a:xfrm>
+            <a:off x="7635240" y="4343400"/>
+            <a:ext cx="3474720" cy="1255471"/>
+          </a:xfrm>
+          <a:prstGeom prst="roundRect">
+            <a:avLst>
+              <a:gd name="adj" fmla="val 8740"/>
             </a:avLst>
           </a:prstGeom>
           <a:solidFill>
@@ -4490,13 +4706,13 @@
       </p:sp>
       <p:sp>
         <p:nvSpPr>
-          <p:cNvPr id="17" name="Text 15"/>
-          <p:cNvSpPr/>
-          <p:nvPr/>
-        </p:nvSpPr>
-        <p:spPr>
-          <a:xfrm>
-            <a:off x="7799832" y="4645152"/>
+          <p:cNvPr id="25" name="Text 23"/>
+          <p:cNvSpPr/>
+          <p:nvPr/>
+        </p:nvSpPr>
+        <p:spPr>
+          <a:xfrm>
+            <a:off x="7799832" y="4489704"/>
             <a:ext cx="3145536" cy="256032"/>
           </a:xfrm>
           <a:prstGeom prst="rect">
@@ -4529,14 +4745,14 @@
       </p:sp>
       <p:sp>
         <p:nvSpPr>
-          <p:cNvPr id="18" name="Text 16"/>
-          <p:cNvSpPr/>
-          <p:nvPr/>
-        </p:nvSpPr>
-        <p:spPr>
-          <a:xfrm>
-            <a:off x="7799832" y="4974336"/>
-            <a:ext cx="3145536" cy="576072"/>
+          <p:cNvPr id="26" name="Text 24"/>
+          <p:cNvSpPr/>
+          <p:nvPr/>
+        </p:nvSpPr>
+        <p:spPr>
+          <a:xfrm>
+            <a:off x="7799832" y="4818888"/>
+            <a:ext cx="3145536" cy="688543"/>
           </a:xfrm>
           <a:prstGeom prst="rect">
             <a:avLst/>
@@ -4562,7 +4778,7 @@
                 <a:ea typeface="Aptos" pitchFamily="34" charset="-122"/>
                 <a:cs typeface="Aptos" pitchFamily="34" charset="-120"/>
               </a:rPr>
-              <a:t>Identify what could go wrong, who could be affected, what safeguards are needed, and what evidence should be reviewed.</a:t>
+              <a:t>Identify what could go wrong, who could be affected, what safeguards are needed, and what evidence should be reviewed before use.</a:t>
             </a:r>
             <a:endParaRPr lang="en-US" sz="1320" dirty="0"/>
           </a:p>
@@ -4931,11 +5147,11 @@
         <p:spPr>
           <a:xfrm>
             <a:off x="7635240" y="1325880"/>
-            <a:ext cx="3474720" cy="1325880"/>
+            <a:ext cx="3474720" cy="1207008"/>
           </a:xfrm>
           <a:prstGeom prst="roundRect">
             <a:avLst>
-              <a:gd name="adj" fmla="val 8276"/>
+              <a:gd name="adj" fmla="val 9091"/>
             </a:avLst>
           </a:prstGeom>
           <a:solidFill>
@@ -4997,7 +5213,7 @@
         <p:spPr>
           <a:xfrm>
             <a:off x="7799832" y="1801368"/>
-            <a:ext cx="3145536" cy="758952"/>
+            <a:ext cx="3145536" cy="640080"/>
           </a:xfrm>
           <a:prstGeom prst="rect">
             <a:avLst/>
@@ -5037,7 +5253,7 @@
         </p:nvSpPr>
         <p:spPr>
           <a:xfrm>
-            <a:off x="7635240" y="2788920"/>
+            <a:off x="7635240" y="2670048"/>
             <a:ext cx="3474720" cy="1536192"/>
           </a:xfrm>
           <a:prstGeom prst="roundRect">
@@ -5064,8 +5280,8 @@
         </p:nvSpPr>
         <p:spPr>
           <a:xfrm>
-            <a:off x="7799832" y="2935224"/>
-            <a:ext cx="3145536" cy="256032"/>
+            <a:off x="7799832" y="2798064"/>
+            <a:ext cx="3145536" cy="237744"/>
           </a:xfrm>
           <a:prstGeom prst="rect">
             <a:avLst/>
@@ -5081,7 +5297,7 @@
               <a:buNone/>
             </a:pPr>
             <a:r>
-              <a:rPr lang="en-US" sz="1300" b="1" dirty="0">
+              <a:rPr lang="en-US" sz="1250" b="1" dirty="0">
                 <a:solidFill>
                   <a:srgbClr val="0068B7"/>
                 </a:solidFill>
@@ -5089,101 +5305,317 @@
                 <a:ea typeface="Aptos" pitchFamily="34" charset="-122"/>
                 <a:cs typeface="Aptos" pitchFamily="34" charset="-120"/>
               </a:rPr>
-              <a:t>Concept checkpoints</a:t>
-            </a:r>
-            <a:endParaRPr lang="en-US" sz="1300" dirty="0"/>
-          </a:p>
-        </p:txBody>
-      </p:sp>
-      <p:sp>
-        <p:nvSpPr>
-          <p:cNvPr id="15" name="Text 13"/>
-          <p:cNvSpPr/>
-          <p:nvPr/>
-        </p:nvSpPr>
-        <p:spPr>
-          <a:xfrm>
-            <a:off x="7818120" y="3300984"/>
-            <a:ext cx="3090672" cy="877824"/>
-          </a:xfrm>
-          <a:prstGeom prst="rect">
-            <a:avLst/>
-          </a:prstGeom>
-          <a:noFill/>
-          <a:ln/>
-        </p:spPr>
-        <p:txBody>
-          <a:bodyPr wrap="square" lIns="508" tIns="508" rIns="508" bIns="508" rtlCol="0" anchor="t">
+              <a:t>Risk control loop</a:t>
+            </a:r>
+            <a:endParaRPr lang="en-US" sz="1250" dirty="0"/>
+          </a:p>
+        </p:txBody>
+      </p:sp>
+      <p:sp>
+        <p:nvSpPr>
+          <p:cNvPr id="15" name="Shape 13"/>
+          <p:cNvSpPr/>
+          <p:nvPr/>
+        </p:nvSpPr>
+        <p:spPr>
+          <a:xfrm>
+            <a:off x="8763000" y="3351276"/>
+            <a:ext cx="164592" cy="0"/>
+          </a:xfrm>
+          <a:prstGeom prst="line">
+            <a:avLst/>
+          </a:prstGeom>
+          <a:noFill/>
+          <a:ln w="15240">
+            <a:solidFill>
+              <a:srgbClr val="8ABBD8"/>
+            </a:solidFill>
+            <a:prstDash val="solid"/>
+          </a:ln>
+        </p:spPr>
+      </p:sp>
+      <p:sp>
+        <p:nvSpPr>
+          <p:cNvPr id="16" name="Shape 14"/>
+          <p:cNvSpPr/>
+          <p:nvPr/>
+        </p:nvSpPr>
+        <p:spPr>
+          <a:xfrm>
+            <a:off x="7872984" y="3200400"/>
+            <a:ext cx="890016" cy="301752"/>
+          </a:xfrm>
+          <a:prstGeom prst="roundRect">
+            <a:avLst>
+              <a:gd name="adj" fmla="val 24242"/>
+            </a:avLst>
+          </a:prstGeom>
+          <a:solidFill>
+            <a:srgbClr val="0068B7"/>
+          </a:solidFill>
+          <a:ln w="12700">
+            <a:solidFill>
+              <a:srgbClr val="0068B7"/>
+            </a:solidFill>
+            <a:prstDash val="solid"/>
+          </a:ln>
+        </p:spPr>
+      </p:sp>
+      <p:sp>
+        <p:nvSpPr>
+          <p:cNvPr id="17" name="Text 15"/>
+          <p:cNvSpPr/>
+          <p:nvPr/>
+        </p:nvSpPr>
+        <p:spPr>
+          <a:xfrm>
+            <a:off x="7909560" y="3273552"/>
+            <a:ext cx="816864" cy="146304"/>
+          </a:xfrm>
+          <a:prstGeom prst="rect">
+            <a:avLst/>
+          </a:prstGeom>
+          <a:noFill/>
+          <a:ln/>
+        </p:spPr>
+        <p:txBody>
+          <a:bodyPr wrap="square" lIns="0" tIns="0" rIns="0" bIns="0" rtlCol="0" anchor="ctr">
             <a:normAutofit/>
           </a:bodyPr>
           <a:lstStyle/>
           <a:p>
-            <a:pPr indent="0" marL="0">
-              <a:buNone/>
-            </a:pPr>
-            <a:r>
-              <a:rPr lang="en-US" sz="1220" dirty="0">
-                <a:solidFill>
-                  <a:srgbClr val="17364A"/>
-                </a:solidFill>
-                <a:latin typeface="Aptos" pitchFamily="34" charset="0"/>
-                <a:ea typeface="Aptos" pitchFamily="34" charset="-122"/>
-                <a:cs typeface="Aptos" pitchFamily="34" charset="-120"/>
-              </a:rPr>
-              <a:t>Vendor documentation accepted without agency review or local.</a:t>
-            </a:r>
-            <a:endParaRPr lang="en-US" sz="1220" dirty="0"/>
-          </a:p>
-          <a:p>
-            <a:pPr indent="0" marL="0">
-              <a:buNone/>
-            </a:pPr>
-            <a:r>
-              <a:rPr lang="en-US" sz="1220" dirty="0">
-                <a:solidFill>
-                  <a:srgbClr val="17364A"/>
-                </a:solidFill>
-                <a:latin typeface="Aptos" pitchFamily="34" charset="0"/>
-                <a:ea typeface="Aptos" pitchFamily="34" charset="-122"/>
-                <a:cs typeface="Aptos" pitchFamily="34" charset="-120"/>
-              </a:rPr>
-              <a:t>Incidents that cannot be reconstructed because logs or decisions.</a:t>
-            </a:r>
-            <a:endParaRPr lang="en-US" sz="1220" dirty="0"/>
-          </a:p>
-          <a:p>
-            <a:pPr indent="0" marL="0">
-              <a:buNone/>
-            </a:pPr>
-            <a:r>
-              <a:rPr lang="en-US" sz="1220" dirty="0">
-                <a:solidFill>
-                  <a:srgbClr val="17364A"/>
-                </a:solidFill>
-                <a:latin typeface="Aptos" pitchFamily="34" charset="0"/>
-                <a:ea typeface="Aptos" pitchFamily="34" charset="-122"/>
-                <a:cs typeface="Aptos" pitchFamily="34" charset="-120"/>
-              </a:rPr>
-              <a:t>Public records or audit responses delayed because artifacts are.</a:t>
-            </a:r>
-            <a:endParaRPr lang="en-US" sz="1220" dirty="0"/>
-          </a:p>
-        </p:txBody>
-      </p:sp>
-      <p:sp>
-        <p:nvSpPr>
-          <p:cNvPr id="16" name="Shape 14"/>
-          <p:cNvSpPr/>
-          <p:nvPr/>
-        </p:nvSpPr>
-        <p:spPr>
-          <a:xfrm>
-            <a:off x="7635240" y="4498848"/>
-            <a:ext cx="3474720" cy="1143000"/>
+            <a:pPr algn="ctr" indent="0" marL="0">
+              <a:buNone/>
+            </a:pPr>
+            <a:r>
+              <a:rPr lang="en-US" sz="880" b="1" dirty="0">
+                <a:solidFill>
+                  <a:srgbClr val="FFFFFF"/>
+                </a:solidFill>
+                <a:latin typeface="Aptos" pitchFamily="34" charset="0"/>
+                <a:ea typeface="Aptos" pitchFamily="34" charset="-122"/>
+                <a:cs typeface="Aptos" pitchFamily="34" charset="-120"/>
+              </a:rPr>
+              <a:t>Identify</a:t>
+            </a:r>
+            <a:endParaRPr lang="en-US" sz="880" dirty="0"/>
+          </a:p>
+        </p:txBody>
+      </p:sp>
+      <p:sp>
+        <p:nvSpPr>
+          <p:cNvPr id="18" name="Shape 16"/>
+          <p:cNvSpPr/>
+          <p:nvPr/>
+        </p:nvSpPr>
+        <p:spPr>
+          <a:xfrm>
+            <a:off x="9817608" y="3351276"/>
+            <a:ext cx="164592" cy="0"/>
+          </a:xfrm>
+          <a:prstGeom prst="line">
+            <a:avLst/>
+          </a:prstGeom>
+          <a:noFill/>
+          <a:ln w="15240">
+            <a:solidFill>
+              <a:srgbClr val="8ABBD8"/>
+            </a:solidFill>
+            <a:prstDash val="solid"/>
+          </a:ln>
+        </p:spPr>
+      </p:sp>
+      <p:sp>
+        <p:nvSpPr>
+          <p:cNvPr id="19" name="Shape 17"/>
+          <p:cNvSpPr/>
+          <p:nvPr/>
+        </p:nvSpPr>
+        <p:spPr>
+          <a:xfrm>
+            <a:off x="8927592" y="3200400"/>
+            <a:ext cx="890016" cy="301752"/>
           </a:xfrm>
           <a:prstGeom prst="roundRect">
             <a:avLst>
-              <a:gd name="adj" fmla="val 9600"/>
+              <a:gd name="adj" fmla="val 24242"/>
+            </a:avLst>
+          </a:prstGeom>
+          <a:solidFill>
+            <a:srgbClr val="2F8A28"/>
+          </a:solidFill>
+          <a:ln w="12700">
+            <a:solidFill>
+              <a:srgbClr val="2F8A28"/>
+            </a:solidFill>
+            <a:prstDash val="solid"/>
+          </a:ln>
+        </p:spPr>
+      </p:sp>
+      <p:sp>
+        <p:nvSpPr>
+          <p:cNvPr id="20" name="Text 18"/>
+          <p:cNvSpPr/>
+          <p:nvPr/>
+        </p:nvSpPr>
+        <p:spPr>
+          <a:xfrm>
+            <a:off x="8964168" y="3273552"/>
+            <a:ext cx="816864" cy="146304"/>
+          </a:xfrm>
+          <a:prstGeom prst="rect">
+            <a:avLst/>
+          </a:prstGeom>
+          <a:noFill/>
+          <a:ln/>
+        </p:spPr>
+        <p:txBody>
+          <a:bodyPr wrap="square" lIns="0" tIns="0" rIns="0" bIns="0" rtlCol="0" anchor="ctr">
+            <a:normAutofit/>
+          </a:bodyPr>
+          <a:lstStyle/>
+          <a:p>
+            <a:pPr algn="ctr" indent="0" marL="0">
+              <a:buNone/>
+            </a:pPr>
+            <a:r>
+              <a:rPr lang="en-US" sz="880" b="1" dirty="0">
+                <a:solidFill>
+                  <a:srgbClr val="FFFFFF"/>
+                </a:solidFill>
+                <a:latin typeface="Aptos" pitchFamily="34" charset="0"/>
+                <a:ea typeface="Aptos" pitchFamily="34" charset="-122"/>
+                <a:cs typeface="Aptos" pitchFamily="34" charset="-120"/>
+              </a:rPr>
+              <a:t>Control</a:t>
+            </a:r>
+            <a:endParaRPr lang="en-US" sz="880" dirty="0"/>
+          </a:p>
+        </p:txBody>
+      </p:sp>
+      <p:sp>
+        <p:nvSpPr>
+          <p:cNvPr id="21" name="Shape 19"/>
+          <p:cNvSpPr/>
+          <p:nvPr/>
+        </p:nvSpPr>
+        <p:spPr>
+          <a:xfrm>
+            <a:off x="9982200" y="3200400"/>
+            <a:ext cx="890016" cy="301752"/>
+          </a:xfrm>
+          <a:prstGeom prst="roundRect">
+            <a:avLst>
+              <a:gd name="adj" fmla="val 24242"/>
+            </a:avLst>
+          </a:prstGeom>
+          <a:solidFill>
+            <a:srgbClr val="6A4CA3"/>
+          </a:solidFill>
+          <a:ln w="12700">
+            <a:solidFill>
+              <a:srgbClr val="6A4CA3"/>
+            </a:solidFill>
+            <a:prstDash val="solid"/>
+          </a:ln>
+        </p:spPr>
+      </p:sp>
+      <p:sp>
+        <p:nvSpPr>
+          <p:cNvPr id="22" name="Text 20"/>
+          <p:cNvSpPr/>
+          <p:nvPr/>
+        </p:nvSpPr>
+        <p:spPr>
+          <a:xfrm>
+            <a:off x="10018776" y="3273552"/>
+            <a:ext cx="816864" cy="146304"/>
+          </a:xfrm>
+          <a:prstGeom prst="rect">
+            <a:avLst/>
+          </a:prstGeom>
+          <a:noFill/>
+          <a:ln/>
+        </p:spPr>
+        <p:txBody>
+          <a:bodyPr wrap="square" lIns="0" tIns="0" rIns="0" bIns="0" rtlCol="0" anchor="ctr">
+            <a:normAutofit/>
+          </a:bodyPr>
+          <a:lstStyle/>
+          <a:p>
+            <a:pPr algn="ctr" indent="0" marL="0">
+              <a:buNone/>
+            </a:pPr>
+            <a:r>
+              <a:rPr lang="en-US" sz="880" b="1" dirty="0">
+                <a:solidFill>
+                  <a:srgbClr val="FFFFFF"/>
+                </a:solidFill>
+                <a:latin typeface="Aptos" pitchFamily="34" charset="0"/>
+                <a:ea typeface="Aptos" pitchFamily="34" charset="-122"/>
+                <a:cs typeface="Aptos" pitchFamily="34" charset="-120"/>
+              </a:rPr>
+              <a:t>Monitor</a:t>
+            </a:r>
+            <a:endParaRPr lang="en-US" sz="880" dirty="0"/>
+          </a:p>
+        </p:txBody>
+      </p:sp>
+      <p:sp>
+        <p:nvSpPr>
+          <p:cNvPr id="23" name="Text 21"/>
+          <p:cNvSpPr/>
+          <p:nvPr/>
+        </p:nvSpPr>
+        <p:spPr>
+          <a:xfrm>
+            <a:off x="7854696" y="3694176"/>
+            <a:ext cx="3035808" cy="365760"/>
+          </a:xfrm>
+          <a:prstGeom prst="rect">
+            <a:avLst/>
+          </a:prstGeom>
+          <a:noFill/>
+          <a:ln/>
+        </p:spPr>
+        <p:txBody>
+          <a:bodyPr wrap="square" lIns="254" tIns="254" rIns="254" bIns="254" rtlCol="0" anchor="t">
+            <a:normAutofit/>
+          </a:bodyPr>
+          <a:lstStyle/>
+          <a:p>
+            <a:pPr indent="0" marL="0">
+              <a:buNone/>
+            </a:pPr>
+            <a:r>
+              <a:rPr lang="en-US" sz="1120" dirty="0">
+                <a:solidFill>
+                  <a:srgbClr val="17364A"/>
+                </a:solidFill>
+                <a:latin typeface="Aptos" pitchFamily="34" charset="0"/>
+                <a:ea typeface="Aptos" pitchFamily="34" charset="-122"/>
+                <a:cs typeface="Aptos" pitchFamily="34" charset="-120"/>
+              </a:rPr>
+              <a:t>Responsible use depends on finding risks early, applying safeguards, and watching for drift or harm over time.</a:t>
+            </a:r>
+            <a:endParaRPr lang="en-US" sz="1120" dirty="0"/>
+          </a:p>
+        </p:txBody>
+      </p:sp>
+      <p:sp>
+        <p:nvSpPr>
+          <p:cNvPr id="24" name="Shape 22"/>
+          <p:cNvSpPr/>
+          <p:nvPr/>
+        </p:nvSpPr>
+        <p:spPr>
+          <a:xfrm>
+            <a:off x="7635240" y="4343400"/>
+            <a:ext cx="3474720" cy="1255471"/>
+          </a:xfrm>
+          <a:prstGeom prst="roundRect">
+            <a:avLst>
+              <a:gd name="adj" fmla="val 8740"/>
             </a:avLst>
           </a:prstGeom>
           <a:solidFill>
@@ -5199,13 +5631,13 @@
       </p:sp>
       <p:sp>
         <p:nvSpPr>
-          <p:cNvPr id="17" name="Text 15"/>
-          <p:cNvSpPr/>
-          <p:nvPr/>
-        </p:nvSpPr>
-        <p:spPr>
-          <a:xfrm>
-            <a:off x="7799832" y="4645152"/>
+          <p:cNvPr id="25" name="Text 23"/>
+          <p:cNvSpPr/>
+          <p:nvPr/>
+        </p:nvSpPr>
+        <p:spPr>
+          <a:xfrm>
+            <a:off x="7799832" y="4489704"/>
             <a:ext cx="3145536" cy="256032"/>
           </a:xfrm>
           <a:prstGeom prst="rect">
@@ -5238,14 +5670,14 @@
       </p:sp>
       <p:sp>
         <p:nvSpPr>
-          <p:cNvPr id="18" name="Text 16"/>
-          <p:cNvSpPr/>
-          <p:nvPr/>
-        </p:nvSpPr>
-        <p:spPr>
-          <a:xfrm>
-            <a:off x="7799832" y="4974336"/>
-            <a:ext cx="3145536" cy="576072"/>
+          <p:cNvPr id="26" name="Text 24"/>
+          <p:cNvSpPr/>
+          <p:nvPr/>
+        </p:nvSpPr>
+        <p:spPr>
+          <a:xfrm>
+            <a:off x="7799832" y="4818888"/>
+            <a:ext cx="3145536" cy="688543"/>
           </a:xfrm>
           <a:prstGeom prst="rect">
             <a:avLst/>
@@ -5271,7 +5703,7 @@
                 <a:ea typeface="Aptos" pitchFamily="34" charset="-122"/>
                 <a:cs typeface="Aptos" pitchFamily="34" charset="-120"/>
               </a:rPr>
-              <a:t>Identify what could go wrong, who could be affected, what safeguards are needed, and what evidence should be reviewed.</a:t>
+              <a:t>Identify what could go wrong, who could be affected, what safeguards are needed, and what evidence should be reviewed before use.</a:t>
             </a:r>
             <a:endParaRPr lang="en-US" sz="1320" dirty="0"/>
           </a:p>
@@ -5640,11 +6072,11 @@
         <p:spPr>
           <a:xfrm>
             <a:off x="7635240" y="1325880"/>
-            <a:ext cx="3474720" cy="1325880"/>
+            <a:ext cx="3474720" cy="1207008"/>
           </a:xfrm>
           <a:prstGeom prst="roundRect">
             <a:avLst>
-              <a:gd name="adj" fmla="val 8276"/>
+              <a:gd name="adj" fmla="val 9091"/>
             </a:avLst>
           </a:prstGeom>
           <a:solidFill>
@@ -5706,7 +6138,7 @@
         <p:spPr>
           <a:xfrm>
             <a:off x="7799832" y="1801368"/>
-            <a:ext cx="3145536" cy="758952"/>
+            <a:ext cx="3145536" cy="640080"/>
           </a:xfrm>
           <a:prstGeom prst="rect">
             <a:avLst/>
@@ -5746,7 +6178,7 @@
         </p:nvSpPr>
         <p:spPr>
           <a:xfrm>
-            <a:off x="7635240" y="2788920"/>
+            <a:off x="7635240" y="2670048"/>
             <a:ext cx="3474720" cy="1536192"/>
           </a:xfrm>
           <a:prstGeom prst="roundRect">
@@ -5773,7 +6205,7 @@
         </p:nvSpPr>
         <p:spPr>
           <a:xfrm>
-            <a:off x="7799832" y="2935224"/>
+            <a:off x="7799832" y="2816352"/>
             <a:ext cx="3145536" cy="256032"/>
           </a:xfrm>
           <a:prstGeom prst="rect">
@@ -5812,7 +6244,7 @@
         </p:nvSpPr>
         <p:spPr>
           <a:xfrm>
-            <a:off x="7818120" y="3300984"/>
+            <a:off x="7818120" y="3182112"/>
             <a:ext cx="3090672" cy="877824"/>
           </a:xfrm>
           <a:prstGeom prst="rect">
@@ -5887,12 +6319,12 @@
         </p:nvSpPr>
         <p:spPr>
           <a:xfrm>
-            <a:off x="7635240" y="4498848"/>
-            <a:ext cx="3474720" cy="1143000"/>
+            <a:off x="7635240" y="4343400"/>
+            <a:ext cx="3474720" cy="1255471"/>
           </a:xfrm>
           <a:prstGeom prst="roundRect">
             <a:avLst>
-              <a:gd name="adj" fmla="val 9600"/>
+              <a:gd name="adj" fmla="val 8740"/>
             </a:avLst>
           </a:prstGeom>
           <a:solidFill>
@@ -5914,7 +6346,7 @@
         </p:nvSpPr>
         <p:spPr>
           <a:xfrm>
-            <a:off x="7799832" y="4645152"/>
+            <a:off x="7799832" y="4489704"/>
             <a:ext cx="3145536" cy="256032"/>
           </a:xfrm>
           <a:prstGeom prst="rect">
@@ -5953,8 +6385,8 @@
         </p:nvSpPr>
         <p:spPr>
           <a:xfrm>
-            <a:off x="7799832" y="4974336"/>
-            <a:ext cx="3145536" cy="576072"/>
+            <a:off x="7799832" y="4818888"/>
+            <a:ext cx="3145536" cy="688543"/>
           </a:xfrm>
           <a:prstGeom prst="rect">
             <a:avLst/>
@@ -5980,7 +6412,7 @@
                 <a:ea typeface="Aptos" pitchFamily="34" charset="-122"/>
                 <a:cs typeface="Aptos" pitchFamily="34" charset="-120"/>
               </a:rPr>
-              <a:t>Identify what could go wrong, who could be affected, what safeguards are needed, and what evidence should be reviewed.</a:t>
+              <a:t>Identify what could go wrong, who could be affected, what safeguards are needed, and what evidence should be reviewed before use.</a:t>
             </a:r>
             <a:endParaRPr lang="en-US" sz="1320" dirty="0"/>
           </a:p>
@@ -6349,11 +6781,11 @@
         <p:spPr>
           <a:xfrm>
             <a:off x="7635240" y="1325880"/>
-            <a:ext cx="3474720" cy="1325880"/>
+            <a:ext cx="3474720" cy="1207008"/>
           </a:xfrm>
           <a:prstGeom prst="roundRect">
             <a:avLst>
-              <a:gd name="adj" fmla="val 8276"/>
+              <a:gd name="adj" fmla="val 9091"/>
             </a:avLst>
           </a:prstGeom>
           <a:solidFill>
@@ -6415,7 +6847,7 @@
         <p:spPr>
           <a:xfrm>
             <a:off x="7799832" y="1801368"/>
-            <a:ext cx="3145536" cy="758952"/>
+            <a:ext cx="3145536" cy="640080"/>
           </a:xfrm>
           <a:prstGeom prst="rect">
             <a:avLst/>
@@ -6455,7 +6887,7 @@
         </p:nvSpPr>
         <p:spPr>
           <a:xfrm>
-            <a:off x="7635240" y="2788920"/>
+            <a:off x="7635240" y="2670048"/>
             <a:ext cx="3474720" cy="1536192"/>
           </a:xfrm>
           <a:prstGeom prst="roundRect">
@@ -6482,7 +6914,7 @@
         </p:nvSpPr>
         <p:spPr>
           <a:xfrm>
-            <a:off x="7799832" y="2935224"/>
+            <a:off x="7799832" y="2816352"/>
             <a:ext cx="3145536" cy="256032"/>
           </a:xfrm>
           <a:prstGeom prst="rect">
@@ -6521,7 +6953,7 @@
         </p:nvSpPr>
         <p:spPr>
           <a:xfrm>
-            <a:off x="7818120" y="3300984"/>
+            <a:off x="7818120" y="3182112"/>
             <a:ext cx="3090672" cy="877824"/>
           </a:xfrm>
           <a:prstGeom prst="rect">
@@ -6596,12 +7028,12 @@
         </p:nvSpPr>
         <p:spPr>
           <a:xfrm>
-            <a:off x="7635240" y="4498848"/>
-            <a:ext cx="3474720" cy="1143000"/>
+            <a:off x="7635240" y="4343400"/>
+            <a:ext cx="3474720" cy="1255471"/>
           </a:xfrm>
           <a:prstGeom prst="roundRect">
             <a:avLst>
-              <a:gd name="adj" fmla="val 9600"/>
+              <a:gd name="adj" fmla="val 8740"/>
             </a:avLst>
           </a:prstGeom>
           <a:solidFill>
@@ -6623,7 +7055,7 @@
         </p:nvSpPr>
         <p:spPr>
           <a:xfrm>
-            <a:off x="7799832" y="4645152"/>
+            <a:off x="7799832" y="4489704"/>
             <a:ext cx="3145536" cy="256032"/>
           </a:xfrm>
           <a:prstGeom prst="rect">
@@ -6662,8 +7094,8 @@
         </p:nvSpPr>
         <p:spPr>
           <a:xfrm>
-            <a:off x="7799832" y="4974336"/>
-            <a:ext cx="3145536" cy="576072"/>
+            <a:off x="7799832" y="4818888"/>
+            <a:ext cx="3145536" cy="688543"/>
           </a:xfrm>
           <a:prstGeom prst="rect">
             <a:avLst/>
@@ -6689,7 +7121,7 @@
                 <a:ea typeface="Aptos" pitchFamily="34" charset="-122"/>
                 <a:cs typeface="Aptos" pitchFamily="34" charset="-120"/>
               </a:rPr>
-              <a:t>Identify what could go wrong, who could be affected, what safeguards are needed, and what evidence should be reviewed.</a:t>
+              <a:t>Identify what could go wrong, who could be affected, what safeguards are needed, and what evidence should be reviewed before use.</a:t>
             </a:r>
             <a:endParaRPr lang="en-US" sz="1320" dirty="0"/>
           </a:p>
@@ -7058,11 +7490,11 @@
         <p:spPr>
           <a:xfrm>
             <a:off x="7635240" y="1325880"/>
-            <a:ext cx="3474720" cy="1325880"/>
+            <a:ext cx="3474720" cy="1207008"/>
           </a:xfrm>
           <a:prstGeom prst="roundRect">
             <a:avLst>
-              <a:gd name="adj" fmla="val 8276"/>
+              <a:gd name="adj" fmla="val 9091"/>
             </a:avLst>
           </a:prstGeom>
           <a:solidFill>
@@ -7124,7 +7556,7 @@
         <p:spPr>
           <a:xfrm>
             <a:off x="7799832" y="1801368"/>
-            <a:ext cx="3145536" cy="758952"/>
+            <a:ext cx="3145536" cy="640080"/>
           </a:xfrm>
           <a:prstGeom prst="rect">
             <a:avLst/>
@@ -7164,12 +7596,12 @@
         </p:nvSpPr>
         <p:spPr>
           <a:xfrm>
-            <a:off x="7635240" y="2788920"/>
-            <a:ext cx="3474720" cy="1536192"/>
+            <a:off x="7635240" y="2670048"/>
+            <a:ext cx="3474720" cy="1377086"/>
           </a:xfrm>
           <a:prstGeom prst="roundRect">
             <a:avLst>
-              <a:gd name="adj" fmla="val 7143"/>
+              <a:gd name="adj" fmla="val 7968"/>
             </a:avLst>
           </a:prstGeom>
           <a:solidFill>
@@ -7191,7 +7623,7 @@
         </p:nvSpPr>
         <p:spPr>
           <a:xfrm>
-            <a:off x="7799832" y="2935224"/>
+            <a:off x="7799832" y="2816352"/>
             <a:ext cx="3145536" cy="256032"/>
           </a:xfrm>
           <a:prstGeom prst="rect">
@@ -7230,8 +7662,8 @@
         </p:nvSpPr>
         <p:spPr>
           <a:xfrm>
-            <a:off x="7818120" y="3300984"/>
-            <a:ext cx="3090672" cy="877824"/>
+            <a:off x="7818120" y="3182112"/>
+            <a:ext cx="3090672" cy="718718"/>
           </a:xfrm>
           <a:prstGeom prst="rect">
             <a:avLst/>
@@ -7305,12 +7737,12 @@
         </p:nvSpPr>
         <p:spPr>
           <a:xfrm>
-            <a:off x="7635240" y="4498848"/>
-            <a:ext cx="3474720" cy="1143000"/>
+            <a:off x="7635240" y="4184294"/>
+            <a:ext cx="3474720" cy="1466698"/>
           </a:xfrm>
           <a:prstGeom prst="roundRect">
             <a:avLst>
-              <a:gd name="adj" fmla="val 9600"/>
+              <a:gd name="adj" fmla="val 7481"/>
             </a:avLst>
           </a:prstGeom>
           <a:solidFill>
@@ -7332,7 +7764,7 @@
         </p:nvSpPr>
         <p:spPr>
           <a:xfrm>
-            <a:off x="7799832" y="4645152"/>
+            <a:off x="7799832" y="4330598"/>
             <a:ext cx="3145536" cy="256032"/>
           </a:xfrm>
           <a:prstGeom prst="rect">
@@ -7371,8 +7803,8 @@
         </p:nvSpPr>
         <p:spPr>
           <a:xfrm>
-            <a:off x="7799832" y="4974336"/>
-            <a:ext cx="3145536" cy="576072"/>
+            <a:off x="7799832" y="4659782"/>
+            <a:ext cx="3145536" cy="899770"/>
           </a:xfrm>
           <a:prstGeom prst="rect">
             <a:avLst/>
@@ -7398,7 +7830,7 @@
                 <a:ea typeface="Aptos" pitchFamily="34" charset="-122"/>
                 <a:cs typeface="Aptos" pitchFamily="34" charset="-120"/>
               </a:rPr>
-              <a:t>Connect the concept to public health purpose, responsible use, required safeguards, documentation, and the next action a.</a:t>
+              <a:t>Connect the concept to public health purpose, responsible use, required safeguards, documentation, and the next action a department should take.</a:t>
             </a:r>
             <a:endParaRPr lang="en-US" sz="1320" dirty="0"/>
           </a:p>
@@ -7750,11 +8182,11 @@
         <p:spPr>
           <a:xfrm>
             <a:off x="7635240" y="1325880"/>
-            <a:ext cx="3474720" cy="1325880"/>
+            <a:ext cx="3474720" cy="1207008"/>
           </a:xfrm>
           <a:prstGeom prst="roundRect">
             <a:avLst>
-              <a:gd name="adj" fmla="val 8276"/>
+              <a:gd name="adj" fmla="val 9091"/>
             </a:avLst>
           </a:prstGeom>
           <a:solidFill>
@@ -7816,7 +8248,7 @@
         <p:spPr>
           <a:xfrm>
             <a:off x="7799832" y="1801368"/>
-            <a:ext cx="3145536" cy="758952"/>
+            <a:ext cx="3145536" cy="640080"/>
           </a:xfrm>
           <a:prstGeom prst="rect">
             <a:avLst/>
@@ -7842,7 +8274,7 @@
                 <a:ea typeface="Aptos" pitchFamily="34" charset="-122"/>
                 <a:cs typeface="Aptos" pitchFamily="34" charset="-120"/>
               </a:rPr>
-              <a:t>What evidence would governance, leadership, or operations staff need before moving forward?</a:t>
+              <a:t>What evidence would governance, leadership, or operations staff need before moving.</a:t>
             </a:r>
             <a:endParaRPr lang="en-US" sz="1320" dirty="0"/>
           </a:p>
@@ -7856,12 +8288,12 @@
         </p:nvSpPr>
         <p:spPr>
           <a:xfrm>
-            <a:off x="7635240" y="2788920"/>
-            <a:ext cx="3474720" cy="1536192"/>
+            <a:off x="7635240" y="2670048"/>
+            <a:ext cx="3474720" cy="1377086"/>
           </a:xfrm>
           <a:prstGeom prst="roundRect">
             <a:avLst>
-              <a:gd name="adj" fmla="val 7143"/>
+              <a:gd name="adj" fmla="val 7968"/>
             </a:avLst>
           </a:prstGeom>
           <a:solidFill>
@@ -7883,7 +8315,7 @@
         </p:nvSpPr>
         <p:spPr>
           <a:xfrm>
-            <a:off x="7799832" y="2935224"/>
+            <a:off x="7799832" y="2816352"/>
             <a:ext cx="3145536" cy="256032"/>
           </a:xfrm>
           <a:prstGeom prst="rect">
@@ -7922,8 +8354,8 @@
         </p:nvSpPr>
         <p:spPr>
           <a:xfrm>
-            <a:off x="7818120" y="3300984"/>
-            <a:ext cx="3090672" cy="877824"/>
+            <a:off x="7818120" y="3182112"/>
+            <a:ext cx="3090672" cy="718718"/>
           </a:xfrm>
           <a:prstGeom prst="rect">
             <a:avLst/>
@@ -7980,12 +8412,12 @@
         </p:nvSpPr>
         <p:spPr>
           <a:xfrm>
-            <a:off x="7635240" y="4498848"/>
-            <a:ext cx="3474720" cy="1143000"/>
+            <a:off x="7635240" y="4184294"/>
+            <a:ext cx="3474720" cy="1466698"/>
           </a:xfrm>
           <a:prstGeom prst="roundRect">
             <a:avLst>
-              <a:gd name="adj" fmla="val 9600"/>
+              <a:gd name="adj" fmla="val 7481"/>
             </a:avLst>
           </a:prstGeom>
           <a:solidFill>
@@ -8007,7 +8439,7 @@
         </p:nvSpPr>
         <p:spPr>
           <a:xfrm>
-            <a:off x="7799832" y="4645152"/>
+            <a:off x="7799832" y="4330598"/>
             <a:ext cx="3145536" cy="256032"/>
           </a:xfrm>
           <a:prstGeom prst="rect">
@@ -8046,8 +8478,8 @@
         </p:nvSpPr>
         <p:spPr>
           <a:xfrm>
-            <a:off x="7799832" y="4974336"/>
-            <a:ext cx="3145536" cy="576072"/>
+            <a:off x="7799832" y="4659782"/>
+            <a:ext cx="3145536" cy="899770"/>
           </a:xfrm>
           <a:prstGeom prst="rect">
             <a:avLst/>
@@ -8073,7 +8505,7 @@
                 <a:ea typeface="Aptos" pitchFamily="34" charset="-122"/>
                 <a:cs typeface="Aptos" pitchFamily="34" charset="-120"/>
               </a:rPr>
-              <a:t>Connect the concept to public health purpose, responsible use, required safeguards, documentation, and the next action a.</a:t>
+              <a:t>Connect the concept to public health purpose, responsible use, required safeguards, documentation, and the next action a department should take.</a:t>
             </a:r>
             <a:endParaRPr lang="en-US" sz="1320" dirty="0"/>
           </a:p>
@@ -8425,11 +8857,11 @@
         <p:spPr>
           <a:xfrm>
             <a:off x="7635240" y="1325880"/>
-            <a:ext cx="3474720" cy="1325880"/>
+            <a:ext cx="3474720" cy="1207008"/>
           </a:xfrm>
           <a:prstGeom prst="roundRect">
             <a:avLst>
-              <a:gd name="adj" fmla="val 8276"/>
+              <a:gd name="adj" fmla="val 9091"/>
             </a:avLst>
           </a:prstGeom>
           <a:solidFill>
@@ -8491,7 +8923,7 @@
         <p:spPr>
           <a:xfrm>
             <a:off x="7799832" y="1801368"/>
-            <a:ext cx="3145536" cy="758952"/>
+            <a:ext cx="3145536" cy="640080"/>
           </a:xfrm>
           <a:prstGeom prst="rect">
             <a:avLst/>
@@ -8531,12 +8963,12 @@
         </p:nvSpPr>
         <p:spPr>
           <a:xfrm>
-            <a:off x="7635240" y="2788920"/>
-            <a:ext cx="3474720" cy="1536192"/>
+            <a:off x="7635240" y="2670048"/>
+            <a:ext cx="3474720" cy="1377086"/>
           </a:xfrm>
           <a:prstGeom prst="roundRect">
             <a:avLst>
-              <a:gd name="adj" fmla="val 7143"/>
+              <a:gd name="adj" fmla="val 7968"/>
             </a:avLst>
           </a:prstGeom>
           <a:solidFill>
@@ -8558,7 +8990,7 @@
         </p:nvSpPr>
         <p:spPr>
           <a:xfrm>
-            <a:off x="7799832" y="2935224"/>
+            <a:off x="7799832" y="2816352"/>
             <a:ext cx="3145536" cy="256032"/>
           </a:xfrm>
           <a:prstGeom prst="rect">
@@ -8597,8 +9029,8 @@
         </p:nvSpPr>
         <p:spPr>
           <a:xfrm>
-            <a:off x="7818120" y="3300984"/>
-            <a:ext cx="3090672" cy="877824"/>
+            <a:off x="7818120" y="3182112"/>
+            <a:ext cx="3090672" cy="718718"/>
           </a:xfrm>
           <a:prstGeom prst="rect">
             <a:avLst/>
@@ -8655,12 +9087,12 @@
         </p:nvSpPr>
         <p:spPr>
           <a:xfrm>
-            <a:off x="7635240" y="4498848"/>
-            <a:ext cx="3474720" cy="1143000"/>
+            <a:off x="7635240" y="4184294"/>
+            <a:ext cx="3474720" cy="1466698"/>
           </a:xfrm>
           <a:prstGeom prst="roundRect">
             <a:avLst>
-              <a:gd name="adj" fmla="val 9600"/>
+              <a:gd name="adj" fmla="val 7481"/>
             </a:avLst>
           </a:prstGeom>
           <a:solidFill>
@@ -8682,7 +9114,7 @@
         </p:nvSpPr>
         <p:spPr>
           <a:xfrm>
-            <a:off x="7799832" y="4645152"/>
+            <a:off x="7799832" y="4330598"/>
             <a:ext cx="3145536" cy="256032"/>
           </a:xfrm>
           <a:prstGeom prst="rect">
@@ -8721,8 +9153,8 @@
         </p:nvSpPr>
         <p:spPr>
           <a:xfrm>
-            <a:off x="7799832" y="4974336"/>
-            <a:ext cx="3145536" cy="576072"/>
+            <a:off x="7799832" y="4659782"/>
+            <a:ext cx="3145536" cy="899770"/>
           </a:xfrm>
           <a:prstGeom prst="rect">
             <a:avLst/>
@@ -8748,7 +9180,7 @@
                 <a:ea typeface="Aptos" pitchFamily="34" charset="-122"/>
                 <a:cs typeface="Aptos" pitchFamily="34" charset="-120"/>
               </a:rPr>
-              <a:t>Use the assignment to test whether you can explain the concept, apply it to a realistic public health situation, and.</a:t>
+              <a:t>Use the assignment to test whether you can explain the concept, apply it to a realistic public health situation, and identify what would need review before the work moves forward.</a:t>
             </a:r>
             <a:endParaRPr lang="en-US" sz="1320" dirty="0"/>
           </a:p>
@@ -9117,11 +9549,11 @@
         <p:spPr>
           <a:xfrm>
             <a:off x="7635240" y="1325880"/>
-            <a:ext cx="3474720" cy="1325880"/>
+            <a:ext cx="3474720" cy="1207008"/>
           </a:xfrm>
           <a:prstGeom prst="roundRect">
             <a:avLst>
-              <a:gd name="adj" fmla="val 8276"/>
+              <a:gd name="adj" fmla="val 9091"/>
             </a:avLst>
           </a:prstGeom>
           <a:solidFill>
@@ -9183,7 +9615,7 @@
         <p:spPr>
           <a:xfrm>
             <a:off x="7799832" y="1801368"/>
-            <a:ext cx="3145536" cy="758952"/>
+            <a:ext cx="3145536" cy="640080"/>
           </a:xfrm>
           <a:prstGeom prst="rect">
             <a:avLst/>
@@ -9223,12 +9655,12 @@
         </p:nvSpPr>
         <p:spPr>
           <a:xfrm>
-            <a:off x="7635240" y="2788920"/>
-            <a:ext cx="3474720" cy="1536192"/>
+            <a:off x="7635240" y="2670048"/>
+            <a:ext cx="3474720" cy="1377086"/>
           </a:xfrm>
           <a:prstGeom prst="roundRect">
             <a:avLst>
-              <a:gd name="adj" fmla="val 7143"/>
+              <a:gd name="adj" fmla="val 7968"/>
             </a:avLst>
           </a:prstGeom>
           <a:solidFill>
@@ -9250,7 +9682,7 @@
         </p:nvSpPr>
         <p:spPr>
           <a:xfrm>
-            <a:off x="7799832" y="2935224"/>
+            <a:off x="7799832" y="2816352"/>
             <a:ext cx="3145536" cy="256032"/>
           </a:xfrm>
           <a:prstGeom prst="rect">
@@ -9289,8 +9721,8 @@
         </p:nvSpPr>
         <p:spPr>
           <a:xfrm>
-            <a:off x="7818120" y="3300984"/>
-            <a:ext cx="3090672" cy="877824"/>
+            <a:off x="7818120" y="3182112"/>
+            <a:ext cx="3090672" cy="718718"/>
           </a:xfrm>
           <a:prstGeom prst="rect">
             <a:avLst/>
@@ -9364,12 +9796,12 @@
         </p:nvSpPr>
         <p:spPr>
           <a:xfrm>
-            <a:off x="7635240" y="4498848"/>
-            <a:ext cx="3474720" cy="1143000"/>
+            <a:off x="7635240" y="4184294"/>
+            <a:ext cx="3474720" cy="1466698"/>
           </a:xfrm>
           <a:prstGeom prst="roundRect">
             <a:avLst>
-              <a:gd name="adj" fmla="val 9600"/>
+              <a:gd name="adj" fmla="val 7481"/>
             </a:avLst>
           </a:prstGeom>
           <a:solidFill>
@@ -9391,7 +9823,7 @@
         </p:nvSpPr>
         <p:spPr>
           <a:xfrm>
-            <a:off x="7799832" y="4645152"/>
+            <a:off x="7799832" y="4330598"/>
             <a:ext cx="3145536" cy="256032"/>
           </a:xfrm>
           <a:prstGeom prst="rect">
@@ -9430,8 +9862,8 @@
         </p:nvSpPr>
         <p:spPr>
           <a:xfrm>
-            <a:off x="7799832" y="4974336"/>
-            <a:ext cx="3145536" cy="576072"/>
+            <a:off x="7799832" y="4659782"/>
+            <a:ext cx="3145536" cy="899770"/>
           </a:xfrm>
           <a:prstGeom prst="rect">
             <a:avLst/>
@@ -9457,7 +9889,7 @@
                 <a:ea typeface="Aptos" pitchFamily="34" charset="-122"/>
                 <a:cs typeface="Aptos" pitchFamily="34" charset="-120"/>
               </a:rPr>
-              <a:t>Connect the concept to public health purpose, responsible use, required safeguards, documentation, and the next action a.</a:t>
+              <a:t>Connect the concept to public health purpose, responsible use, required safeguards, documentation, and the next action a department should take.</a:t>
             </a:r>
             <a:endParaRPr lang="en-US" sz="1320" dirty="0"/>
           </a:p>
@@ -9809,11 +10241,11 @@
         <p:spPr>
           <a:xfrm>
             <a:off x="7635240" y="1325880"/>
-            <a:ext cx="3474720" cy="1325880"/>
+            <a:ext cx="3474720" cy="1207008"/>
           </a:xfrm>
           <a:prstGeom prst="roundRect">
             <a:avLst>
-              <a:gd name="adj" fmla="val 8276"/>
+              <a:gd name="adj" fmla="val 9091"/>
             </a:avLst>
           </a:prstGeom>
           <a:solidFill>
@@ -9875,7 +10307,7 @@
         <p:spPr>
           <a:xfrm>
             <a:off x="7799832" y="1801368"/>
-            <a:ext cx="3145536" cy="758952"/>
+            <a:ext cx="3145536" cy="640080"/>
           </a:xfrm>
           <a:prstGeom prst="rect">
             <a:avLst/>
@@ -9915,12 +10347,12 @@
         </p:nvSpPr>
         <p:spPr>
           <a:xfrm>
-            <a:off x="7635240" y="2788920"/>
-            <a:ext cx="3474720" cy="1536192"/>
+            <a:off x="7635240" y="2670048"/>
+            <a:ext cx="3474720" cy="1377086"/>
           </a:xfrm>
           <a:prstGeom prst="roundRect">
             <a:avLst>
-              <a:gd name="adj" fmla="val 7143"/>
+              <a:gd name="adj" fmla="val 7968"/>
             </a:avLst>
           </a:prstGeom>
           <a:solidFill>
@@ -9942,7 +10374,7 @@
         </p:nvSpPr>
         <p:spPr>
           <a:xfrm>
-            <a:off x="7799832" y="2935224"/>
+            <a:off x="7799832" y="2816352"/>
             <a:ext cx="3145536" cy="256032"/>
           </a:xfrm>
           <a:prstGeom prst="rect">
@@ -9981,8 +10413,8 @@
         </p:nvSpPr>
         <p:spPr>
           <a:xfrm>
-            <a:off x="7818120" y="3300984"/>
-            <a:ext cx="3090672" cy="877824"/>
+            <a:off x="7818120" y="3182112"/>
+            <a:ext cx="3090672" cy="718718"/>
           </a:xfrm>
           <a:prstGeom prst="rect">
             <a:avLst/>
@@ -10039,12 +10471,12 @@
         </p:nvSpPr>
         <p:spPr>
           <a:xfrm>
-            <a:off x="7635240" y="4498848"/>
-            <a:ext cx="3474720" cy="1143000"/>
+            <a:off x="7635240" y="4184294"/>
+            <a:ext cx="3474720" cy="1466698"/>
           </a:xfrm>
           <a:prstGeom prst="roundRect">
             <a:avLst>
-              <a:gd name="adj" fmla="val 9600"/>
+              <a:gd name="adj" fmla="val 7481"/>
             </a:avLst>
           </a:prstGeom>
           <a:solidFill>
@@ -10066,7 +10498,7 @@
         </p:nvSpPr>
         <p:spPr>
           <a:xfrm>
-            <a:off x="7799832" y="4645152"/>
+            <a:off x="7799832" y="4330598"/>
             <a:ext cx="3145536" cy="256032"/>
           </a:xfrm>
           <a:prstGeom prst="rect">
@@ -10105,8 +10537,8 @@
         </p:nvSpPr>
         <p:spPr>
           <a:xfrm>
-            <a:off x="7799832" y="4974336"/>
-            <a:ext cx="3145536" cy="576072"/>
+            <a:off x="7799832" y="4659782"/>
+            <a:ext cx="3145536" cy="899770"/>
           </a:xfrm>
           <a:prstGeom prst="rect">
             <a:avLst/>
@@ -10132,7 +10564,7 @@
                 <a:ea typeface="Aptos" pitchFamily="34" charset="-122"/>
                 <a:cs typeface="Aptos" pitchFamily="34" charset="-120"/>
               </a:rPr>
-              <a:t>Connect the concept to public health purpose, responsible use, required safeguards, documentation, and the next action a.</a:t>
+              <a:t>Connect the concept to public health purpose, responsible use, required safeguards, documentation, and the next action a department should take.</a:t>
             </a:r>
             <a:endParaRPr lang="en-US" sz="1320" dirty="0"/>
           </a:p>
@@ -10593,7 +11025,7 @@
                 <a:ea typeface="Aptos" pitchFamily="34" charset="-122"/>
                 <a:cs typeface="Aptos" pitchFamily="34" charset="-120"/>
               </a:rPr>
-              <a:t>Level: intermediate/practitioner Primary track: Governance and Security Track Appears in tracks:.</a:t>
+              <a:t>Level: intermediate/practitioner Primary track: Governance and Security Track Appears in tracks: governance-and-security, policy, program-management, public-health-executive-leadership</a:t>
             </a:r>
             <a:endParaRPr lang="en-US" sz="1320" dirty="0"/>
           </a:p>
@@ -11103,11 +11535,11 @@
         <p:spPr>
           <a:xfrm>
             <a:off x="7635240" y="1325880"/>
-            <a:ext cx="3474720" cy="1325880"/>
+            <a:ext cx="3474720" cy="1207008"/>
           </a:xfrm>
           <a:prstGeom prst="roundRect">
             <a:avLst>
-              <a:gd name="adj" fmla="val 8276"/>
+              <a:gd name="adj" fmla="val 9091"/>
             </a:avLst>
           </a:prstGeom>
           <a:solidFill>
@@ -11169,7 +11601,7 @@
         <p:spPr>
           <a:xfrm>
             <a:off x="7799832" y="1801368"/>
-            <a:ext cx="3145536" cy="758952"/>
+            <a:ext cx="3145536" cy="640080"/>
           </a:xfrm>
           <a:prstGeom prst="rect">
             <a:avLst/>
@@ -11209,12 +11641,12 @@
         </p:nvSpPr>
         <p:spPr>
           <a:xfrm>
-            <a:off x="7635240" y="2788920"/>
-            <a:ext cx="3474720" cy="1536192"/>
+            <a:off x="7635240" y="2670048"/>
+            <a:ext cx="3474720" cy="1377086"/>
           </a:xfrm>
           <a:prstGeom prst="roundRect">
             <a:avLst>
-              <a:gd name="adj" fmla="val 7143"/>
+              <a:gd name="adj" fmla="val 7968"/>
             </a:avLst>
           </a:prstGeom>
           <a:solidFill>
@@ -11236,7 +11668,7 @@
         </p:nvSpPr>
         <p:spPr>
           <a:xfrm>
-            <a:off x="7799832" y="2935224"/>
+            <a:off x="7799832" y="2816352"/>
             <a:ext cx="3145536" cy="256032"/>
           </a:xfrm>
           <a:prstGeom prst="rect">
@@ -11275,8 +11707,8 @@
         </p:nvSpPr>
         <p:spPr>
           <a:xfrm>
-            <a:off x="7818120" y="3300984"/>
-            <a:ext cx="3090672" cy="877824"/>
+            <a:off x="7818120" y="3182112"/>
+            <a:ext cx="3090672" cy="718718"/>
           </a:xfrm>
           <a:prstGeom prst="rect">
             <a:avLst/>
@@ -11333,12 +11765,12 @@
         </p:nvSpPr>
         <p:spPr>
           <a:xfrm>
-            <a:off x="7635240" y="4498848"/>
-            <a:ext cx="3474720" cy="1143000"/>
+            <a:off x="7635240" y="4184294"/>
+            <a:ext cx="3474720" cy="1466698"/>
           </a:xfrm>
           <a:prstGeom prst="roundRect">
             <a:avLst>
-              <a:gd name="adj" fmla="val 9600"/>
+              <a:gd name="adj" fmla="val 7481"/>
             </a:avLst>
           </a:prstGeom>
           <a:solidFill>
@@ -11360,7 +11792,7 @@
         </p:nvSpPr>
         <p:spPr>
           <a:xfrm>
-            <a:off x="7799832" y="4645152"/>
+            <a:off x="7799832" y="4330598"/>
             <a:ext cx="3145536" cy="256032"/>
           </a:xfrm>
           <a:prstGeom prst="rect">
@@ -11399,8 +11831,8 @@
         </p:nvSpPr>
         <p:spPr>
           <a:xfrm>
-            <a:off x="7799832" y="4974336"/>
-            <a:ext cx="3145536" cy="576072"/>
+            <a:off x="7799832" y="4659782"/>
+            <a:ext cx="3145536" cy="899770"/>
           </a:xfrm>
           <a:prstGeom prst="rect">
             <a:avLst/>
@@ -11426,7 +11858,7 @@
                 <a:ea typeface="Aptos" pitchFamily="34" charset="-122"/>
                 <a:cs typeface="Aptos" pitchFamily="34" charset="-120"/>
               </a:rPr>
-              <a:t>Use the assignment to test whether you can explain the concept, apply it to a realistic public health situation, and.</a:t>
+              <a:t>Use the assignment to test whether you can explain the concept, apply it to a realistic public health situation, and identify what would need review before the work moves forward.</a:t>
             </a:r>
             <a:endParaRPr lang="en-US" sz="1320" dirty="0"/>
           </a:p>
@@ -11795,11 +12227,11 @@
         <p:spPr>
           <a:xfrm>
             <a:off x="7635240" y="1325880"/>
-            <a:ext cx="3474720" cy="1325880"/>
+            <a:ext cx="3474720" cy="1207008"/>
           </a:xfrm>
           <a:prstGeom prst="roundRect">
             <a:avLst>
-              <a:gd name="adj" fmla="val 8276"/>
+              <a:gd name="adj" fmla="val 9091"/>
             </a:avLst>
           </a:prstGeom>
           <a:solidFill>
@@ -11861,7 +12293,7 @@
         <p:spPr>
           <a:xfrm>
             <a:off x="7799832" y="1801368"/>
-            <a:ext cx="3145536" cy="758952"/>
+            <a:ext cx="3145536" cy="640080"/>
           </a:xfrm>
           <a:prstGeom prst="rect">
             <a:avLst/>
@@ -11901,12 +12333,12 @@
         </p:nvSpPr>
         <p:spPr>
           <a:xfrm>
-            <a:off x="7635240" y="2788920"/>
-            <a:ext cx="3474720" cy="1536192"/>
+            <a:off x="7635240" y="2670048"/>
+            <a:ext cx="3474720" cy="1377086"/>
           </a:xfrm>
           <a:prstGeom prst="roundRect">
             <a:avLst>
-              <a:gd name="adj" fmla="val 7143"/>
+              <a:gd name="adj" fmla="val 7968"/>
             </a:avLst>
           </a:prstGeom>
           <a:solidFill>
@@ -11928,7 +12360,7 @@
         </p:nvSpPr>
         <p:spPr>
           <a:xfrm>
-            <a:off x="7799832" y="2935224"/>
+            <a:off x="7799832" y="2816352"/>
             <a:ext cx="3145536" cy="256032"/>
           </a:xfrm>
           <a:prstGeom prst="rect">
@@ -11967,8 +12399,8 @@
         </p:nvSpPr>
         <p:spPr>
           <a:xfrm>
-            <a:off x="7818120" y="3300984"/>
-            <a:ext cx="3090672" cy="877824"/>
+            <a:off x="7818120" y="3182112"/>
+            <a:ext cx="3090672" cy="718718"/>
           </a:xfrm>
           <a:prstGeom prst="rect">
             <a:avLst/>
@@ -12042,12 +12474,12 @@
         </p:nvSpPr>
         <p:spPr>
           <a:xfrm>
-            <a:off x="7635240" y="4498848"/>
-            <a:ext cx="3474720" cy="1143000"/>
+            <a:off x="7635240" y="4184294"/>
+            <a:ext cx="3474720" cy="1466698"/>
           </a:xfrm>
           <a:prstGeom prst="roundRect">
             <a:avLst>
-              <a:gd name="adj" fmla="val 9600"/>
+              <a:gd name="adj" fmla="val 7481"/>
             </a:avLst>
           </a:prstGeom>
           <a:solidFill>
@@ -12069,7 +12501,7 @@
         </p:nvSpPr>
         <p:spPr>
           <a:xfrm>
-            <a:off x="7799832" y="4645152"/>
+            <a:off x="7799832" y="4330598"/>
             <a:ext cx="3145536" cy="256032"/>
           </a:xfrm>
           <a:prstGeom prst="rect">
@@ -12108,8 +12540,8 @@
         </p:nvSpPr>
         <p:spPr>
           <a:xfrm>
-            <a:off x="7799832" y="4974336"/>
-            <a:ext cx="3145536" cy="576072"/>
+            <a:off x="7799832" y="4659782"/>
+            <a:ext cx="3145536" cy="899770"/>
           </a:xfrm>
           <a:prstGeom prst="rect">
             <a:avLst/>
@@ -12135,7 +12567,7 @@
                 <a:ea typeface="Aptos" pitchFamily="34" charset="-122"/>
                 <a:cs typeface="Aptos" pitchFamily="34" charset="-120"/>
               </a:rPr>
-              <a:t>Use the assignment to test whether you can explain the concept, apply it to a realistic public health situation, and.</a:t>
+              <a:t>Use the assignment to test whether you can explain the concept, apply it to a realistic public health situation, and identify what would need review before the work moves forward.</a:t>
             </a:r>
             <a:endParaRPr lang="en-US" sz="1320" dirty="0"/>
           </a:p>
@@ -12504,11 +12936,11 @@
         <p:spPr>
           <a:xfrm>
             <a:off x="7635240" y="1325880"/>
-            <a:ext cx="3474720" cy="1325880"/>
+            <a:ext cx="3474720" cy="1207008"/>
           </a:xfrm>
           <a:prstGeom prst="roundRect">
             <a:avLst>
-              <a:gd name="adj" fmla="val 8276"/>
+              <a:gd name="adj" fmla="val 9091"/>
             </a:avLst>
           </a:prstGeom>
           <a:solidFill>
@@ -12570,7 +13002,7 @@
         <p:spPr>
           <a:xfrm>
             <a:off x="7799832" y="1801368"/>
-            <a:ext cx="3145536" cy="758952"/>
+            <a:ext cx="3145536" cy="640080"/>
           </a:xfrm>
           <a:prstGeom prst="rect">
             <a:avLst/>
@@ -12610,12 +13042,12 @@
         </p:nvSpPr>
         <p:spPr>
           <a:xfrm>
-            <a:off x="7635240" y="2788920"/>
-            <a:ext cx="3474720" cy="1536192"/>
+            <a:off x="7635240" y="2670048"/>
+            <a:ext cx="3474720" cy="1377086"/>
           </a:xfrm>
           <a:prstGeom prst="roundRect">
             <a:avLst>
-              <a:gd name="adj" fmla="val 7143"/>
+              <a:gd name="adj" fmla="val 7968"/>
             </a:avLst>
           </a:prstGeom>
           <a:solidFill>
@@ -12637,7 +13069,7 @@
         </p:nvSpPr>
         <p:spPr>
           <a:xfrm>
-            <a:off x="7799832" y="2935224"/>
+            <a:off x="7799832" y="2816352"/>
             <a:ext cx="3145536" cy="256032"/>
           </a:xfrm>
           <a:prstGeom prst="rect">
@@ -12676,8 +13108,8 @@
         </p:nvSpPr>
         <p:spPr>
           <a:xfrm>
-            <a:off x="7818120" y="3300984"/>
-            <a:ext cx="3090672" cy="877824"/>
+            <a:off x="7818120" y="3182112"/>
+            <a:ext cx="3090672" cy="718718"/>
           </a:xfrm>
           <a:prstGeom prst="rect">
             <a:avLst/>
@@ -12751,12 +13183,12 @@
         </p:nvSpPr>
         <p:spPr>
           <a:xfrm>
-            <a:off x="7635240" y="4498848"/>
-            <a:ext cx="3474720" cy="1143000"/>
+            <a:off x="7635240" y="4184294"/>
+            <a:ext cx="3474720" cy="1466698"/>
           </a:xfrm>
           <a:prstGeom prst="roundRect">
             <a:avLst>
-              <a:gd name="adj" fmla="val 9600"/>
+              <a:gd name="adj" fmla="val 7481"/>
             </a:avLst>
           </a:prstGeom>
           <a:solidFill>
@@ -12778,7 +13210,7 @@
         </p:nvSpPr>
         <p:spPr>
           <a:xfrm>
-            <a:off x="7799832" y="4645152"/>
+            <a:off x="7799832" y="4330598"/>
             <a:ext cx="3145536" cy="256032"/>
           </a:xfrm>
           <a:prstGeom prst="rect">
@@ -12817,8 +13249,8 @@
         </p:nvSpPr>
         <p:spPr>
           <a:xfrm>
-            <a:off x="7799832" y="4974336"/>
-            <a:ext cx="3145536" cy="576072"/>
+            <a:off x="7799832" y="4659782"/>
+            <a:ext cx="3145536" cy="899770"/>
           </a:xfrm>
           <a:prstGeom prst="rect">
             <a:avLst/>
@@ -12844,7 +13276,7 @@
                 <a:ea typeface="Aptos" pitchFamily="34" charset="-122"/>
                 <a:cs typeface="Aptos" pitchFamily="34" charset="-120"/>
               </a:rPr>
-              <a:t>Connect the concept to public health purpose, responsible use, required safeguards, documentation, and the next action a.</a:t>
+              <a:t>Connect the concept to public health purpose, responsible use, required safeguards, documentation, and the next action a department should take.</a:t>
             </a:r>
             <a:endParaRPr lang="en-US" sz="1320" dirty="0"/>
           </a:p>
@@ -13179,11 +13611,11 @@
         <p:spPr>
           <a:xfrm>
             <a:off x="7635240" y="1325880"/>
-            <a:ext cx="3474720" cy="1325880"/>
+            <a:ext cx="3474720" cy="1207008"/>
           </a:xfrm>
           <a:prstGeom prst="roundRect">
             <a:avLst>
-              <a:gd name="adj" fmla="val 8276"/>
+              <a:gd name="adj" fmla="val 9091"/>
             </a:avLst>
           </a:prstGeom>
           <a:solidFill>
@@ -13245,7 +13677,7 @@
         <p:spPr>
           <a:xfrm>
             <a:off x="7799832" y="1801368"/>
-            <a:ext cx="3145536" cy="758952"/>
+            <a:ext cx="3145536" cy="640080"/>
           </a:xfrm>
           <a:prstGeom prst="rect">
             <a:avLst/>
@@ -13271,7 +13703,7 @@
                 <a:ea typeface="Aptos" pitchFamily="34" charset="-122"/>
                 <a:cs typeface="Aptos" pitchFamily="34" charset="-120"/>
               </a:rPr>
-              <a:t>Relevant public health program SOPs, data governance documentation, and implementation plans</a:t>
+              <a:t>Relevant public health program SOPs, data governance documentation, and implementation.</a:t>
             </a:r>
             <a:endParaRPr lang="en-US" sz="1320" dirty="0"/>
           </a:p>
@@ -13285,12 +13717,12 @@
         </p:nvSpPr>
         <p:spPr>
           <a:xfrm>
-            <a:off x="7635240" y="2788920"/>
-            <a:ext cx="3474720" cy="1536192"/>
+            <a:off x="7635240" y="2670048"/>
+            <a:ext cx="3474720" cy="1377086"/>
           </a:xfrm>
           <a:prstGeom prst="roundRect">
             <a:avLst>
-              <a:gd name="adj" fmla="val 7143"/>
+              <a:gd name="adj" fmla="val 7968"/>
             </a:avLst>
           </a:prstGeom>
           <a:solidFill>
@@ -13312,7 +13744,7 @@
         </p:nvSpPr>
         <p:spPr>
           <a:xfrm>
-            <a:off x="7799832" y="2935224"/>
+            <a:off x="7799832" y="2816352"/>
             <a:ext cx="3145536" cy="256032"/>
           </a:xfrm>
           <a:prstGeom prst="rect">
@@ -13351,8 +13783,8 @@
         </p:nvSpPr>
         <p:spPr>
           <a:xfrm>
-            <a:off x="7818120" y="3300984"/>
-            <a:ext cx="3090672" cy="877824"/>
+            <a:off x="7818120" y="3182112"/>
+            <a:ext cx="3090672" cy="718718"/>
           </a:xfrm>
           <a:prstGeom prst="rect">
             <a:avLst/>
@@ -13392,12 +13824,12 @@
         </p:nvSpPr>
         <p:spPr>
           <a:xfrm>
-            <a:off x="7635240" y="4498848"/>
-            <a:ext cx="3474720" cy="1143000"/>
+            <a:off x="7635240" y="4184294"/>
+            <a:ext cx="3474720" cy="1466698"/>
           </a:xfrm>
           <a:prstGeom prst="roundRect">
             <a:avLst>
-              <a:gd name="adj" fmla="val 9600"/>
+              <a:gd name="adj" fmla="val 7481"/>
             </a:avLst>
           </a:prstGeom>
           <a:solidFill>
@@ -13419,7 +13851,7 @@
         </p:nvSpPr>
         <p:spPr>
           <a:xfrm>
-            <a:off x="7799832" y="4645152"/>
+            <a:off x="7799832" y="4330598"/>
             <a:ext cx="3145536" cy="256032"/>
           </a:xfrm>
           <a:prstGeom prst="rect">
@@ -13458,8 +13890,8 @@
         </p:nvSpPr>
         <p:spPr>
           <a:xfrm>
-            <a:off x="7799832" y="4974336"/>
-            <a:ext cx="3145536" cy="576072"/>
+            <a:off x="7799832" y="4659782"/>
+            <a:ext cx="3145536" cy="899770"/>
           </a:xfrm>
           <a:prstGeom prst="rect">
             <a:avLst/>
@@ -13485,7 +13917,7 @@
                 <a:ea typeface="Aptos" pitchFamily="34" charset="-122"/>
                 <a:cs typeface="Aptos" pitchFamily="34" charset="-120"/>
               </a:rPr>
-              <a:t>Connect the concept to public health purpose, responsible use, required safeguards, documentation, and the next action a.</a:t>
+              <a:t>Connect the concept to public health purpose, responsible use, required safeguards, documentation, and the next action a department should take.</a:t>
             </a:r>
             <a:endParaRPr lang="en-US" sz="1320" dirty="0"/>
           </a:p>
@@ -13963,7 +14395,7 @@
                 <a:ea typeface="Aptos" pitchFamily="34" charset="-122"/>
                 <a:cs typeface="Aptos" pitchFamily="34" charset="-120"/>
               </a:rPr>
-              <a:t>Use the related plays to identify decisions, participants, timing, approvals, and documentation needed for responsible.</a:t>
+              <a:t>Use the related plays to identify decisions, participants, timing, approvals, and documentation needed for responsible implementation.</a:t>
             </a:r>
             <a:endParaRPr lang="en-US" sz="1320" dirty="0"/>
           </a:p>
@@ -14582,7 +15014,7 @@
                 <a:ea typeface="Aptos" pitchFamily="34" charset="-122"/>
                 <a:cs typeface="Aptos" pitchFamily="34" charset="-120"/>
               </a:rPr>
-              <a:t>Use linked tools when your department needs a structured worksheet, template, checklist, review process, or.</a:t>
+              <a:t>Use linked tools when your department needs a structured worksheet, template, checklist, review process, or documentation artifact.</a:t>
             </a:r>
             <a:endParaRPr lang="en-US" sz="1320" dirty="0"/>
           </a:p>
@@ -15092,11 +15524,11 @@
         <p:spPr>
           <a:xfrm>
             <a:off x="7635240" y="1325880"/>
-            <a:ext cx="3474720" cy="1325880"/>
+            <a:ext cx="3474720" cy="1207008"/>
           </a:xfrm>
           <a:prstGeom prst="roundRect">
             <a:avLst>
-              <a:gd name="adj" fmla="val 8276"/>
+              <a:gd name="adj" fmla="val 9091"/>
             </a:avLst>
           </a:prstGeom>
           <a:solidFill>
@@ -15158,7 +15590,7 @@
         <p:spPr>
           <a:xfrm>
             <a:off x="7799832" y="1801368"/>
-            <a:ext cx="3145536" cy="758952"/>
+            <a:ext cx="3145536" cy="640080"/>
           </a:xfrm>
           <a:prstGeom prst="rect">
             <a:avLst/>
@@ -15198,12 +15630,12 @@
         </p:nvSpPr>
         <p:spPr>
           <a:xfrm>
-            <a:off x="7635240" y="2788920"/>
-            <a:ext cx="3474720" cy="1536192"/>
+            <a:off x="7635240" y="2670048"/>
+            <a:ext cx="3474720" cy="1377086"/>
           </a:xfrm>
           <a:prstGeom prst="roundRect">
             <a:avLst>
-              <a:gd name="adj" fmla="val 7143"/>
+              <a:gd name="adj" fmla="val 7968"/>
             </a:avLst>
           </a:prstGeom>
           <a:solidFill>
@@ -15225,7 +15657,7 @@
         </p:nvSpPr>
         <p:spPr>
           <a:xfrm>
-            <a:off x="7799832" y="2935224"/>
+            <a:off x="7799832" y="2816352"/>
             <a:ext cx="3145536" cy="256032"/>
           </a:xfrm>
           <a:prstGeom prst="rect">
@@ -15264,8 +15696,8 @@
         </p:nvSpPr>
         <p:spPr>
           <a:xfrm>
-            <a:off x="7818120" y="3300984"/>
-            <a:ext cx="3090672" cy="877824"/>
+            <a:off x="7818120" y="3182112"/>
+            <a:ext cx="3090672" cy="718718"/>
           </a:xfrm>
           <a:prstGeom prst="rect">
             <a:avLst/>
@@ -15322,12 +15754,12 @@
         </p:nvSpPr>
         <p:spPr>
           <a:xfrm>
-            <a:off x="7635240" y="4498848"/>
-            <a:ext cx="3474720" cy="1143000"/>
+            <a:off x="7635240" y="4184294"/>
+            <a:ext cx="3474720" cy="1466698"/>
           </a:xfrm>
           <a:prstGeom prst="roundRect">
             <a:avLst>
-              <a:gd name="adj" fmla="val 9600"/>
+              <a:gd name="adj" fmla="val 7481"/>
             </a:avLst>
           </a:prstGeom>
           <a:solidFill>
@@ -15349,7 +15781,7 @@
         </p:nvSpPr>
         <p:spPr>
           <a:xfrm>
-            <a:off x="7799832" y="4645152"/>
+            <a:off x="7799832" y="4330598"/>
             <a:ext cx="3145536" cy="256032"/>
           </a:xfrm>
           <a:prstGeom prst="rect">
@@ -15388,8 +15820,8 @@
         </p:nvSpPr>
         <p:spPr>
           <a:xfrm>
-            <a:off x="7799832" y="4974336"/>
-            <a:ext cx="3145536" cy="576072"/>
+            <a:off x="7799832" y="4659782"/>
+            <a:ext cx="3145536" cy="899770"/>
           </a:xfrm>
           <a:prstGeom prst="rect">
             <a:avLst/>
@@ -15415,7 +15847,7 @@
                 <a:ea typeface="Aptos" pitchFamily="34" charset="-122"/>
                 <a:cs typeface="Aptos" pitchFamily="34" charset="-120"/>
               </a:rPr>
-              <a:t>Use the assignment to test whether you can explain the concept, apply it to a realistic public health situation, and.</a:t>
+              <a:t>Use the assignment to test whether you can explain the concept, apply it to a realistic public health situation, and identify what would need review before the work moves forward.</a:t>
             </a:r>
             <a:endParaRPr lang="en-US" sz="1320" dirty="0"/>
           </a:p>
@@ -15784,11 +16216,11 @@
         <p:spPr>
           <a:xfrm>
             <a:off x="7635240" y="1325880"/>
-            <a:ext cx="3474720" cy="1325880"/>
+            <a:ext cx="3474720" cy="1255471"/>
           </a:xfrm>
           <a:prstGeom prst="roundRect">
             <a:avLst>
-              <a:gd name="adj" fmla="val 8276"/>
+              <a:gd name="adj" fmla="val 8740"/>
             </a:avLst>
           </a:prstGeom>
           <a:solidFill>
@@ -15850,7 +16282,7 @@
         <p:spPr>
           <a:xfrm>
             <a:off x="7799832" y="1801368"/>
-            <a:ext cx="3145536" cy="758952"/>
+            <a:ext cx="3145536" cy="688543"/>
           </a:xfrm>
           <a:prstGeom prst="rect">
             <a:avLst/>
@@ -15890,12 +16322,12 @@
         </p:nvSpPr>
         <p:spPr>
           <a:xfrm>
-            <a:off x="7635240" y="2788920"/>
-            <a:ext cx="3474720" cy="1536192"/>
+            <a:off x="7635240" y="2718511"/>
+            <a:ext cx="3474720" cy="1328623"/>
           </a:xfrm>
           <a:prstGeom prst="roundRect">
             <a:avLst>
-              <a:gd name="adj" fmla="val 7143"/>
+              <a:gd name="adj" fmla="val 8259"/>
             </a:avLst>
           </a:prstGeom>
           <a:solidFill>
@@ -15917,7 +16349,7 @@
         </p:nvSpPr>
         <p:spPr>
           <a:xfrm>
-            <a:off x="7799832" y="2935224"/>
+            <a:off x="7799832" y="2864815"/>
             <a:ext cx="3145536" cy="256032"/>
           </a:xfrm>
           <a:prstGeom prst="rect">
@@ -15956,8 +16388,8 @@
         </p:nvSpPr>
         <p:spPr>
           <a:xfrm>
-            <a:off x="7818120" y="3300984"/>
-            <a:ext cx="3090672" cy="877824"/>
+            <a:off x="7818120" y="3230575"/>
+            <a:ext cx="3090672" cy="670255"/>
           </a:xfrm>
           <a:prstGeom prst="rect">
             <a:avLst/>
@@ -16031,12 +16463,12 @@
         </p:nvSpPr>
         <p:spPr>
           <a:xfrm>
-            <a:off x="7635240" y="4498848"/>
-            <a:ext cx="3474720" cy="1143000"/>
+            <a:off x="7635240" y="4184294"/>
+            <a:ext cx="3474720" cy="1466698"/>
           </a:xfrm>
           <a:prstGeom prst="roundRect">
             <a:avLst>
-              <a:gd name="adj" fmla="val 9600"/>
+              <a:gd name="adj" fmla="val 7481"/>
             </a:avLst>
           </a:prstGeom>
           <a:solidFill>
@@ -16058,7 +16490,7 @@
         </p:nvSpPr>
         <p:spPr>
           <a:xfrm>
-            <a:off x="7799832" y="4645152"/>
+            <a:off x="7799832" y="4330598"/>
             <a:ext cx="3145536" cy="256032"/>
           </a:xfrm>
           <a:prstGeom prst="rect">
@@ -16097,8 +16529,8 @@
         </p:nvSpPr>
         <p:spPr>
           <a:xfrm>
-            <a:off x="7799832" y="4974336"/>
-            <a:ext cx="3145536" cy="576072"/>
+            <a:off x="7799832" y="4659782"/>
+            <a:ext cx="3145536" cy="899770"/>
           </a:xfrm>
           <a:prstGeom prst="rect">
             <a:avLst/>
@@ -16124,7 +16556,7 @@
                 <a:ea typeface="Aptos" pitchFamily="34" charset="-122"/>
                 <a:cs typeface="Aptos" pitchFamily="34" charset="-120"/>
               </a:rPr>
-              <a:t>Connect the concept to public health purpose, responsible use, required safeguards, documentation, and the next action a.</a:t>
+              <a:t>Connect the concept to public health purpose, responsible use, required safeguards, documentation, and the next action a department should take.</a:t>
             </a:r>
             <a:endParaRPr lang="en-US" sz="1320" dirty="0"/>
           </a:p>
@@ -16493,11 +16925,11 @@
         <p:spPr>
           <a:xfrm>
             <a:off x="7635240" y="1325880"/>
-            <a:ext cx="3474720" cy="1325880"/>
+            <a:ext cx="3474720" cy="1207008"/>
           </a:xfrm>
           <a:prstGeom prst="roundRect">
             <a:avLst>
-              <a:gd name="adj" fmla="val 8276"/>
+              <a:gd name="adj" fmla="val 9091"/>
             </a:avLst>
           </a:prstGeom>
           <a:solidFill>
@@ -16559,7 +16991,7 @@
         <p:spPr>
           <a:xfrm>
             <a:off x="7799832" y="1801368"/>
-            <a:ext cx="3145536" cy="758952"/>
+            <a:ext cx="3145536" cy="640080"/>
           </a:xfrm>
           <a:prstGeom prst="rect">
             <a:avLst/>
@@ -16585,7 +17017,7 @@
                 <a:ea typeface="Aptos" pitchFamily="34" charset="-122"/>
                 <a:cs typeface="Aptos" pitchFamily="34" charset="-120"/>
               </a:rPr>
-              <a:t>This module provides national-level training guidance for public health agencies and partners.</a:t>
+              <a:t>This module provides national-level training guidance for public health agencies and.</a:t>
             </a:r>
             <a:endParaRPr lang="en-US" sz="1320" dirty="0"/>
           </a:p>
@@ -16599,12 +17031,12 @@
         </p:nvSpPr>
         <p:spPr>
           <a:xfrm>
-            <a:off x="7635240" y="2788920"/>
-            <a:ext cx="3474720" cy="1536192"/>
+            <a:off x="7635240" y="2670048"/>
+            <a:ext cx="3474720" cy="1377086"/>
           </a:xfrm>
           <a:prstGeom prst="roundRect">
             <a:avLst>
-              <a:gd name="adj" fmla="val 7143"/>
+              <a:gd name="adj" fmla="val 7968"/>
             </a:avLst>
           </a:prstGeom>
           <a:solidFill>
@@ -16626,8 +17058,8 @@
         </p:nvSpPr>
         <p:spPr>
           <a:xfrm>
-            <a:off x="7799832" y="2935224"/>
-            <a:ext cx="3145536" cy="256032"/>
+            <a:off x="7799832" y="2798064"/>
+            <a:ext cx="3145536" cy="237744"/>
           </a:xfrm>
           <a:prstGeom prst="rect">
             <a:avLst/>
@@ -16643,7 +17075,7 @@
               <a:buNone/>
             </a:pPr>
             <a:r>
-              <a:rPr lang="en-US" sz="1300" b="1" dirty="0">
+              <a:rPr lang="en-US" sz="1250" b="1" dirty="0">
                 <a:solidFill>
                   <a:srgbClr val="0068B7"/>
                 </a:solidFill>
@@ -16651,101 +17083,317 @@
                 <a:ea typeface="Aptos" pitchFamily="34" charset="-122"/>
                 <a:cs typeface="Aptos" pitchFamily="34" charset="-120"/>
               </a:rPr>
-              <a:t>Concept checkpoints</a:t>
-            </a:r>
-            <a:endParaRPr lang="en-US" sz="1300" dirty="0"/>
-          </a:p>
-        </p:txBody>
-      </p:sp>
-      <p:sp>
-        <p:nvSpPr>
-          <p:cNvPr id="15" name="Text 13"/>
-          <p:cNvSpPr/>
-          <p:nvPr/>
-        </p:nvSpPr>
-        <p:spPr>
-          <a:xfrm>
-            <a:off x="7818120" y="3300984"/>
-            <a:ext cx="3090672" cy="877824"/>
-          </a:xfrm>
-          <a:prstGeom prst="rect">
-            <a:avLst/>
-          </a:prstGeom>
-          <a:noFill/>
-          <a:ln/>
-        </p:spPr>
-        <p:txBody>
-          <a:bodyPr wrap="square" lIns="508" tIns="508" rIns="508" bIns="508" rtlCol="0" anchor="t">
+              <a:t>Governance pathway</a:t>
+            </a:r>
+            <a:endParaRPr lang="en-US" sz="1250" dirty="0"/>
+          </a:p>
+        </p:txBody>
+      </p:sp>
+      <p:sp>
+        <p:nvSpPr>
+          <p:cNvPr id="15" name="Shape 13"/>
+          <p:cNvSpPr/>
+          <p:nvPr/>
+        </p:nvSpPr>
+        <p:spPr>
+          <a:xfrm>
+            <a:off x="8763000" y="3351276"/>
+            <a:ext cx="164592" cy="0"/>
+          </a:xfrm>
+          <a:prstGeom prst="line">
+            <a:avLst/>
+          </a:prstGeom>
+          <a:noFill/>
+          <a:ln w="15240">
+            <a:solidFill>
+              <a:srgbClr val="8ABBD8"/>
+            </a:solidFill>
+            <a:prstDash val="solid"/>
+          </a:ln>
+        </p:spPr>
+      </p:sp>
+      <p:sp>
+        <p:nvSpPr>
+          <p:cNvPr id="16" name="Shape 14"/>
+          <p:cNvSpPr/>
+          <p:nvPr/>
+        </p:nvSpPr>
+        <p:spPr>
+          <a:xfrm>
+            <a:off x="7872984" y="3200400"/>
+            <a:ext cx="890016" cy="301752"/>
+          </a:xfrm>
+          <a:prstGeom prst="roundRect">
+            <a:avLst>
+              <a:gd name="adj" fmla="val 24242"/>
+            </a:avLst>
+          </a:prstGeom>
+          <a:solidFill>
+            <a:srgbClr val="0068B7"/>
+          </a:solidFill>
+          <a:ln w="12700">
+            <a:solidFill>
+              <a:srgbClr val="0068B7"/>
+            </a:solidFill>
+            <a:prstDash val="solid"/>
+          </a:ln>
+        </p:spPr>
+      </p:sp>
+      <p:sp>
+        <p:nvSpPr>
+          <p:cNvPr id="17" name="Text 15"/>
+          <p:cNvSpPr/>
+          <p:nvPr/>
+        </p:nvSpPr>
+        <p:spPr>
+          <a:xfrm>
+            <a:off x="7909560" y="3273552"/>
+            <a:ext cx="816864" cy="146304"/>
+          </a:xfrm>
+          <a:prstGeom prst="rect">
+            <a:avLst/>
+          </a:prstGeom>
+          <a:noFill/>
+          <a:ln/>
+        </p:spPr>
+        <p:txBody>
+          <a:bodyPr wrap="square" lIns="0" tIns="0" rIns="0" bIns="0" rtlCol="0" anchor="ctr">
             <a:normAutofit/>
           </a:bodyPr>
           <a:lstStyle/>
           <a:p>
-            <a:pPr indent="0" marL="0">
-              <a:buNone/>
-            </a:pPr>
-            <a:r>
-              <a:rPr lang="en-US" sz="1220" dirty="0">
-                <a:solidFill>
-                  <a:srgbClr val="17364A"/>
-                </a:solidFill>
-                <a:latin typeface="Aptos" pitchFamily="34" charset="0"/>
-                <a:ea typeface="Aptos" pitchFamily="34" charset="-122"/>
-                <a:cs typeface="Aptos" pitchFamily="34" charset="-120"/>
-              </a:rPr>
-              <a:t>It is not legal advice and does not replace review by agency legal.</a:t>
-            </a:r>
-            <a:endParaRPr lang="en-US" sz="1220" dirty="0"/>
-          </a:p>
-          <a:p>
-            <a:pPr indent="0" marL="0">
-              <a:buNone/>
-            </a:pPr>
-            <a:r>
-              <a:rPr lang="en-US" sz="1220" dirty="0">
-                <a:solidFill>
-                  <a:srgbClr val="17364A"/>
-                </a:solidFill>
-                <a:latin typeface="Aptos" pitchFamily="34" charset="0"/>
-                <a:ea typeface="Aptos" pitchFamily="34" charset="-122"/>
-                <a:cs typeface="Aptos" pitchFamily="34" charset="-120"/>
-              </a:rPr>
-              <a:t>Requirements may vary by state, locality, territory, Tribe,.</a:t>
-            </a:r>
-            <a:endParaRPr lang="en-US" sz="1220" dirty="0"/>
-          </a:p>
-          <a:p>
-            <a:pPr indent="0" marL="0">
-              <a:buNone/>
-            </a:pPr>
-            <a:r>
-              <a:rPr lang="en-US" sz="1220" dirty="0">
-                <a:solidFill>
-                  <a:srgbClr val="17364A"/>
-                </a:solidFill>
-                <a:latin typeface="Aptos" pitchFamily="34" charset="0"/>
-                <a:ea typeface="Aptos" pitchFamily="34" charset="-122"/>
-                <a:cs typeface="Aptos" pitchFamily="34" charset="-120"/>
-              </a:rPr>
-              <a:t>Learners should use this module to identify the issues that.</a:t>
-            </a:r>
-            <a:endParaRPr lang="en-US" sz="1220" dirty="0"/>
-          </a:p>
-        </p:txBody>
-      </p:sp>
-      <p:sp>
-        <p:nvSpPr>
-          <p:cNvPr id="16" name="Shape 14"/>
-          <p:cNvSpPr/>
-          <p:nvPr/>
-        </p:nvSpPr>
-        <p:spPr>
-          <a:xfrm>
-            <a:off x="7635240" y="4498848"/>
-            <a:ext cx="3474720" cy="1143000"/>
+            <a:pPr algn="ctr" indent="0" marL="0">
+              <a:buNone/>
+            </a:pPr>
+            <a:r>
+              <a:rPr lang="en-US" sz="880" b="1" dirty="0">
+                <a:solidFill>
+                  <a:srgbClr val="FFFFFF"/>
+                </a:solidFill>
+                <a:latin typeface="Aptos" pitchFamily="34" charset="0"/>
+                <a:ea typeface="Aptos" pitchFamily="34" charset="-122"/>
+                <a:cs typeface="Aptos" pitchFamily="34" charset="-120"/>
+              </a:rPr>
+              <a:t>Submit</a:t>
+            </a:r>
+            <a:endParaRPr lang="en-US" sz="880" dirty="0"/>
+          </a:p>
+        </p:txBody>
+      </p:sp>
+      <p:sp>
+        <p:nvSpPr>
+          <p:cNvPr id="18" name="Shape 16"/>
+          <p:cNvSpPr/>
+          <p:nvPr/>
+        </p:nvSpPr>
+        <p:spPr>
+          <a:xfrm>
+            <a:off x="9817608" y="3351276"/>
+            <a:ext cx="164592" cy="0"/>
+          </a:xfrm>
+          <a:prstGeom prst="line">
+            <a:avLst/>
+          </a:prstGeom>
+          <a:noFill/>
+          <a:ln w="15240">
+            <a:solidFill>
+              <a:srgbClr val="8ABBD8"/>
+            </a:solidFill>
+            <a:prstDash val="solid"/>
+          </a:ln>
+        </p:spPr>
+      </p:sp>
+      <p:sp>
+        <p:nvSpPr>
+          <p:cNvPr id="19" name="Shape 17"/>
+          <p:cNvSpPr/>
+          <p:nvPr/>
+        </p:nvSpPr>
+        <p:spPr>
+          <a:xfrm>
+            <a:off x="8927592" y="3200400"/>
+            <a:ext cx="890016" cy="301752"/>
           </a:xfrm>
           <a:prstGeom prst="roundRect">
             <a:avLst>
-              <a:gd name="adj" fmla="val 9600"/>
+              <a:gd name="adj" fmla="val 24242"/>
+            </a:avLst>
+          </a:prstGeom>
+          <a:solidFill>
+            <a:srgbClr val="2F8A28"/>
+          </a:solidFill>
+          <a:ln w="12700">
+            <a:solidFill>
+              <a:srgbClr val="2F8A28"/>
+            </a:solidFill>
+            <a:prstDash val="solid"/>
+          </a:ln>
+        </p:spPr>
+      </p:sp>
+      <p:sp>
+        <p:nvSpPr>
+          <p:cNvPr id="20" name="Text 18"/>
+          <p:cNvSpPr/>
+          <p:nvPr/>
+        </p:nvSpPr>
+        <p:spPr>
+          <a:xfrm>
+            <a:off x="8964168" y="3273552"/>
+            <a:ext cx="816864" cy="146304"/>
+          </a:xfrm>
+          <a:prstGeom prst="rect">
+            <a:avLst/>
+          </a:prstGeom>
+          <a:noFill/>
+          <a:ln/>
+        </p:spPr>
+        <p:txBody>
+          <a:bodyPr wrap="square" lIns="0" tIns="0" rIns="0" bIns="0" rtlCol="0" anchor="ctr">
+            <a:normAutofit/>
+          </a:bodyPr>
+          <a:lstStyle/>
+          <a:p>
+            <a:pPr algn="ctr" indent="0" marL="0">
+              <a:buNone/>
+            </a:pPr>
+            <a:r>
+              <a:rPr lang="en-US" sz="880" b="1" dirty="0">
+                <a:solidFill>
+                  <a:srgbClr val="FFFFFF"/>
+                </a:solidFill>
+                <a:latin typeface="Aptos" pitchFamily="34" charset="0"/>
+                <a:ea typeface="Aptos" pitchFamily="34" charset="-122"/>
+                <a:cs typeface="Aptos" pitchFamily="34" charset="-120"/>
+              </a:rPr>
+              <a:t>Review</a:t>
+            </a:r>
+            <a:endParaRPr lang="en-US" sz="880" dirty="0"/>
+          </a:p>
+        </p:txBody>
+      </p:sp>
+      <p:sp>
+        <p:nvSpPr>
+          <p:cNvPr id="21" name="Shape 19"/>
+          <p:cNvSpPr/>
+          <p:nvPr/>
+        </p:nvSpPr>
+        <p:spPr>
+          <a:xfrm>
+            <a:off x="9982200" y="3200400"/>
+            <a:ext cx="890016" cy="301752"/>
+          </a:xfrm>
+          <a:prstGeom prst="roundRect">
+            <a:avLst>
+              <a:gd name="adj" fmla="val 24242"/>
+            </a:avLst>
+          </a:prstGeom>
+          <a:solidFill>
+            <a:srgbClr val="6A4CA3"/>
+          </a:solidFill>
+          <a:ln w="12700">
+            <a:solidFill>
+              <a:srgbClr val="6A4CA3"/>
+            </a:solidFill>
+            <a:prstDash val="solid"/>
+          </a:ln>
+        </p:spPr>
+      </p:sp>
+      <p:sp>
+        <p:nvSpPr>
+          <p:cNvPr id="22" name="Text 20"/>
+          <p:cNvSpPr/>
+          <p:nvPr/>
+        </p:nvSpPr>
+        <p:spPr>
+          <a:xfrm>
+            <a:off x="10018776" y="3273552"/>
+            <a:ext cx="816864" cy="146304"/>
+          </a:xfrm>
+          <a:prstGeom prst="rect">
+            <a:avLst/>
+          </a:prstGeom>
+          <a:noFill/>
+          <a:ln/>
+        </p:spPr>
+        <p:txBody>
+          <a:bodyPr wrap="square" lIns="0" tIns="0" rIns="0" bIns="0" rtlCol="0" anchor="ctr">
+            <a:normAutofit/>
+          </a:bodyPr>
+          <a:lstStyle/>
+          <a:p>
+            <a:pPr algn="ctr" indent="0" marL="0">
+              <a:buNone/>
+            </a:pPr>
+            <a:r>
+              <a:rPr lang="en-US" sz="880" b="1" dirty="0">
+                <a:solidFill>
+                  <a:srgbClr val="FFFFFF"/>
+                </a:solidFill>
+                <a:latin typeface="Aptos" pitchFamily="34" charset="0"/>
+                <a:ea typeface="Aptos" pitchFamily="34" charset="-122"/>
+                <a:cs typeface="Aptos" pitchFamily="34" charset="-120"/>
+              </a:rPr>
+              <a:t>Oversee</a:t>
+            </a:r>
+            <a:endParaRPr lang="en-US" sz="880" dirty="0"/>
+          </a:p>
+        </p:txBody>
+      </p:sp>
+      <p:sp>
+        <p:nvSpPr>
+          <p:cNvPr id="23" name="Text 21"/>
+          <p:cNvSpPr/>
+          <p:nvPr/>
+        </p:nvSpPr>
+        <p:spPr>
+          <a:xfrm>
+            <a:off x="7854696" y="3694176"/>
+            <a:ext cx="3035808" cy="206654"/>
+          </a:xfrm>
+          <a:prstGeom prst="rect">
+            <a:avLst/>
+          </a:prstGeom>
+          <a:noFill/>
+          <a:ln/>
+        </p:spPr>
+        <p:txBody>
+          <a:bodyPr wrap="square" lIns="254" tIns="254" rIns="254" bIns="254" rtlCol="0" anchor="t">
+            <a:normAutofit/>
+          </a:bodyPr>
+          <a:lstStyle/>
+          <a:p>
+            <a:pPr indent="0" marL="0">
+              <a:buNone/>
+            </a:pPr>
+            <a:r>
+              <a:rPr lang="en-US" sz="1120" dirty="0">
+                <a:solidFill>
+                  <a:srgbClr val="17364A"/>
+                </a:solidFill>
+                <a:latin typeface="Aptos" pitchFamily="34" charset="0"/>
+                <a:ea typeface="Aptos" pitchFamily="34" charset="-122"/>
+                <a:cs typeface="Aptos" pitchFamily="34" charset="-120"/>
+              </a:rPr>
+              <a:t>A proposed AI use should move through documented review before it becomes an operational workflow.</a:t>
+            </a:r>
+            <a:endParaRPr lang="en-US" sz="1120" dirty="0"/>
+          </a:p>
+        </p:txBody>
+      </p:sp>
+      <p:sp>
+        <p:nvSpPr>
+          <p:cNvPr id="24" name="Shape 22"/>
+          <p:cNvSpPr/>
+          <p:nvPr/>
+        </p:nvSpPr>
+        <p:spPr>
+          <a:xfrm>
+            <a:off x="7635240" y="4184294"/>
+            <a:ext cx="3474720" cy="1466698"/>
+          </a:xfrm>
+          <a:prstGeom prst="roundRect">
+            <a:avLst>
+              <a:gd name="adj" fmla="val 7481"/>
             </a:avLst>
           </a:prstGeom>
           <a:solidFill>
@@ -16761,13 +17409,13 @@
       </p:sp>
       <p:sp>
         <p:nvSpPr>
-          <p:cNvPr id="17" name="Text 15"/>
-          <p:cNvSpPr/>
-          <p:nvPr/>
-        </p:nvSpPr>
-        <p:spPr>
-          <a:xfrm>
-            <a:off x="7799832" y="4645152"/>
+          <p:cNvPr id="25" name="Text 23"/>
+          <p:cNvSpPr/>
+          <p:nvPr/>
+        </p:nvSpPr>
+        <p:spPr>
+          <a:xfrm>
+            <a:off x="7799832" y="4330598"/>
             <a:ext cx="3145536" cy="256032"/>
           </a:xfrm>
           <a:prstGeom prst="rect">
@@ -16800,14 +17448,14 @@
       </p:sp>
       <p:sp>
         <p:nvSpPr>
-          <p:cNvPr id="18" name="Text 16"/>
-          <p:cNvSpPr/>
-          <p:nvPr/>
-        </p:nvSpPr>
-        <p:spPr>
-          <a:xfrm>
-            <a:off x="7799832" y="4974336"/>
-            <a:ext cx="3145536" cy="576072"/>
+          <p:cNvPr id="26" name="Text 24"/>
+          <p:cNvSpPr/>
+          <p:nvPr/>
+        </p:nvSpPr>
+        <p:spPr>
+          <a:xfrm>
+            <a:off x="7799832" y="4659782"/>
+            <a:ext cx="3145536" cy="899770"/>
           </a:xfrm>
           <a:prstGeom prst="rect">
             <a:avLst/>
@@ -16833,7 +17481,7 @@
                 <a:ea typeface="Aptos" pitchFamily="34" charset="-122"/>
                 <a:cs typeface="Aptos" pitchFamily="34" charset="-120"/>
               </a:rPr>
-              <a:t>Translate this concept into clear decision rights, review steps, documentation expectations, and escalation paths before.</a:t>
+              <a:t>Translate this concept into clear decision rights, review steps, documentation expectations, and escalation paths before an AI-supported workflow is approved.</a:t>
             </a:r>
             <a:endParaRPr lang="en-US" sz="1320" dirty="0"/>
           </a:p>
@@ -17202,11 +17850,11 @@
         <p:spPr>
           <a:xfrm>
             <a:off x="7635240" y="1325880"/>
-            <a:ext cx="3474720" cy="1325880"/>
+            <a:ext cx="3474720" cy="1207008"/>
           </a:xfrm>
           <a:prstGeom prst="roundRect">
             <a:avLst>
-              <a:gd name="adj" fmla="val 8276"/>
+              <a:gd name="adj" fmla="val 9091"/>
             </a:avLst>
           </a:prstGeom>
           <a:solidFill>
@@ -17268,7 +17916,7 @@
         <p:spPr>
           <a:xfrm>
             <a:off x="7799832" y="1801368"/>
-            <a:ext cx="3145536" cy="758952"/>
+            <a:ext cx="3145536" cy="640080"/>
           </a:xfrm>
           <a:prstGeom prst="rect">
             <a:avLst/>
@@ -17308,12 +17956,12 @@
         </p:nvSpPr>
         <p:spPr>
           <a:xfrm>
-            <a:off x="7635240" y="2788920"/>
-            <a:ext cx="3474720" cy="1536192"/>
+            <a:off x="7635240" y="2670048"/>
+            <a:ext cx="3474720" cy="1377086"/>
           </a:xfrm>
           <a:prstGeom prst="roundRect">
             <a:avLst>
-              <a:gd name="adj" fmla="val 7143"/>
+              <a:gd name="adj" fmla="val 7968"/>
             </a:avLst>
           </a:prstGeom>
           <a:solidFill>
@@ -17335,7 +17983,7 @@
         </p:nvSpPr>
         <p:spPr>
           <a:xfrm>
-            <a:off x="7799832" y="2935224"/>
+            <a:off x="7799832" y="2816352"/>
             <a:ext cx="3145536" cy="256032"/>
           </a:xfrm>
           <a:prstGeom prst="rect">
@@ -17374,8 +18022,8 @@
         </p:nvSpPr>
         <p:spPr>
           <a:xfrm>
-            <a:off x="7818120" y="3300984"/>
-            <a:ext cx="3090672" cy="877824"/>
+            <a:off x="7818120" y="3182112"/>
+            <a:ext cx="3090672" cy="718718"/>
           </a:xfrm>
           <a:prstGeom prst="rect">
             <a:avLst/>
@@ -17432,12 +18080,12 @@
         </p:nvSpPr>
         <p:spPr>
           <a:xfrm>
-            <a:off x="7635240" y="4498848"/>
-            <a:ext cx="3474720" cy="1143000"/>
+            <a:off x="7635240" y="4184294"/>
+            <a:ext cx="3474720" cy="1466698"/>
           </a:xfrm>
           <a:prstGeom prst="roundRect">
             <a:avLst>
-              <a:gd name="adj" fmla="val 9600"/>
+              <a:gd name="adj" fmla="val 7481"/>
             </a:avLst>
           </a:prstGeom>
           <a:solidFill>
@@ -17459,7 +18107,7 @@
         </p:nvSpPr>
         <p:spPr>
           <a:xfrm>
-            <a:off x="7799832" y="4645152"/>
+            <a:off x="7799832" y="4330598"/>
             <a:ext cx="3145536" cy="256032"/>
           </a:xfrm>
           <a:prstGeom prst="rect">
@@ -17498,8 +18146,8 @@
         </p:nvSpPr>
         <p:spPr>
           <a:xfrm>
-            <a:off x="7799832" y="4974336"/>
-            <a:ext cx="3145536" cy="576072"/>
+            <a:off x="7799832" y="4659782"/>
+            <a:ext cx="3145536" cy="899770"/>
           </a:xfrm>
           <a:prstGeom prst="rect">
             <a:avLst/>
@@ -17525,7 +18173,7 @@
                 <a:ea typeface="Aptos" pitchFamily="34" charset="-122"/>
                 <a:cs typeface="Aptos" pitchFamily="34" charset="-120"/>
               </a:rPr>
-              <a:t>Connect the concept to public health purpose, responsible use, required safeguards, documentation, and the next action a.</a:t>
+              <a:t>Connect the concept to public health purpose, responsible use, required safeguards, documentation, and the next action a department should take.</a:t>
             </a:r>
             <a:endParaRPr lang="en-US" sz="1320" dirty="0"/>
           </a:p>
@@ -17894,11 +18542,11 @@
         <p:spPr>
           <a:xfrm>
             <a:off x="7635240" y="1325880"/>
-            <a:ext cx="3474720" cy="1325880"/>
+            <a:ext cx="3474720" cy="1207008"/>
           </a:xfrm>
           <a:prstGeom prst="roundRect">
             <a:avLst>
-              <a:gd name="adj" fmla="val 8276"/>
+              <a:gd name="adj" fmla="val 9091"/>
             </a:avLst>
           </a:prstGeom>
           <a:solidFill>
@@ -17960,7 +18608,7 @@
         <p:spPr>
           <a:xfrm>
             <a:off x="7799832" y="1801368"/>
-            <a:ext cx="3145536" cy="758952"/>
+            <a:ext cx="3145536" cy="640080"/>
           </a:xfrm>
           <a:prstGeom prst="rect">
             <a:avLst/>
@@ -18000,12 +18648,12 @@
         </p:nvSpPr>
         <p:spPr>
           <a:xfrm>
-            <a:off x="7635240" y="2788920"/>
-            <a:ext cx="3474720" cy="1536192"/>
+            <a:off x="7635240" y="2670048"/>
+            <a:ext cx="3474720" cy="1377086"/>
           </a:xfrm>
           <a:prstGeom prst="roundRect">
             <a:avLst>
-              <a:gd name="adj" fmla="val 7143"/>
+              <a:gd name="adj" fmla="val 7968"/>
             </a:avLst>
           </a:prstGeom>
           <a:solidFill>
@@ -18027,7 +18675,7 @@
         </p:nvSpPr>
         <p:spPr>
           <a:xfrm>
-            <a:off x="7799832" y="2935224"/>
+            <a:off x="7799832" y="2816352"/>
             <a:ext cx="3145536" cy="256032"/>
           </a:xfrm>
           <a:prstGeom prst="rect">
@@ -18066,8 +18714,8 @@
         </p:nvSpPr>
         <p:spPr>
           <a:xfrm>
-            <a:off x="7818120" y="3300984"/>
-            <a:ext cx="3090672" cy="877824"/>
+            <a:off x="7818120" y="3182112"/>
+            <a:ext cx="3090672" cy="718718"/>
           </a:xfrm>
           <a:prstGeom prst="rect">
             <a:avLst/>
@@ -18141,12 +18789,12 @@
         </p:nvSpPr>
         <p:spPr>
           <a:xfrm>
-            <a:off x="7635240" y="4498848"/>
-            <a:ext cx="3474720" cy="1143000"/>
+            <a:off x="7635240" y="4184294"/>
+            <a:ext cx="3474720" cy="1466698"/>
           </a:xfrm>
           <a:prstGeom prst="roundRect">
             <a:avLst>
-              <a:gd name="adj" fmla="val 9600"/>
+              <a:gd name="adj" fmla="val 7481"/>
             </a:avLst>
           </a:prstGeom>
           <a:solidFill>
@@ -18168,7 +18816,7 @@
         </p:nvSpPr>
         <p:spPr>
           <a:xfrm>
-            <a:off x="7799832" y="4645152"/>
+            <a:off x="7799832" y="4330598"/>
             <a:ext cx="3145536" cy="256032"/>
           </a:xfrm>
           <a:prstGeom prst="rect">
@@ -18207,8 +18855,8 @@
         </p:nvSpPr>
         <p:spPr>
           <a:xfrm>
-            <a:off x="7799832" y="4974336"/>
-            <a:ext cx="3145536" cy="576072"/>
+            <a:off x="7799832" y="4659782"/>
+            <a:ext cx="3145536" cy="899770"/>
           </a:xfrm>
           <a:prstGeom prst="rect">
             <a:avLst/>
@@ -18234,7 +18882,7 @@
                 <a:ea typeface="Aptos" pitchFamily="34" charset="-122"/>
                 <a:cs typeface="Aptos" pitchFamily="34" charset="-120"/>
               </a:rPr>
-              <a:t>Connect the concept to public health purpose, responsible use, required safeguards, documentation, and the next action a.</a:t>
+              <a:t>Connect the concept to public health purpose, responsible use, required safeguards, documentation, and the next action a department should take.</a:t>
             </a:r>
             <a:endParaRPr lang="en-US" sz="1320" dirty="0"/>
           </a:p>

--- a/downloads/presentations/modules/gov-340.pptx
+++ b/downloads/presentations/modules/gov-340.pptx
@@ -3437,8 +3437,8 @@
         </p:nvSpPr>
         <p:spPr>
           <a:xfrm>
-            <a:off x="868680" y="1508760"/>
-            <a:ext cx="6309360" cy="4160520"/>
+            <a:off x="822960" y="1463040"/>
+            <a:ext cx="6565392" cy="4343400"/>
           </a:xfrm>
           <a:prstGeom prst="rect">
             <a:avLst/>
@@ -3456,7 +3456,7 @@
               <a:buNone/>
             </a:pPr>
             <a:r>
-              <a:rPr lang="en-US" sz="2100" dirty="0">
+              <a:rPr lang="en-US" sz="1920" dirty="0">
                 <a:solidFill>
                   <a:srgbClr val="003A63"/>
                 </a:solidFill>
@@ -3466,14 +3466,14 @@
               </a:rPr>
               <a:t>• Evidence management requires ownership and retention rules.</a:t>
             </a:r>
-            <a:endParaRPr lang="en-US" sz="2100" dirty="0"/>
-          </a:p>
-          <a:p>
-            <a:pPr indent="0" marL="0">
-              <a:buNone/>
-            </a:pPr>
-            <a:r>
-              <a:rPr lang="en-US" sz="2100" dirty="0">
+            <a:endParaRPr lang="en-US" sz="1920" dirty="0"/>
+          </a:p>
+          <a:p>
+            <a:pPr indent="0" marL="0">
+              <a:buNone/>
+            </a:pPr>
+            <a:r>
+              <a:rPr lang="en-US" sz="1920" dirty="0">
                 <a:solidFill>
                   <a:srgbClr val="003A63"/>
                 </a:solidFill>
@@ -3481,16 +3481,16 @@
                 <a:ea typeface="Aptos" pitchFamily="34" charset="-122"/>
                 <a:cs typeface="Aptos" pitchFamily="34" charset="-120"/>
               </a:rPr>
-              <a:t>• Governance bodies should define who stores each artifact, where it is stored, how long it is.</a:t>
-            </a:r>
-            <a:endParaRPr lang="en-US" sz="2100" dirty="0"/>
-          </a:p>
-          <a:p>
-            <a:pPr indent="0" marL="0">
-              <a:buNone/>
-            </a:pPr>
-            <a:r>
-              <a:rPr lang="en-US" sz="2100" dirty="0">
+              <a:t>• Governance bodies should define who stores each artifact, where it is.</a:t>
+            </a:r>
+            <a:endParaRPr lang="en-US" sz="1920" dirty="0"/>
+          </a:p>
+          <a:p>
+            <a:pPr indent="0" marL="0">
+              <a:buNone/>
+            </a:pPr>
+            <a:r>
+              <a:rPr lang="en-US" sz="1920" dirty="0">
                 <a:solidFill>
                   <a:srgbClr val="003A63"/>
                 </a:solidFill>
@@ -3498,9 +3498,9 @@
                 <a:ea typeface="Aptos" pitchFamily="34" charset="-122"/>
                 <a:cs typeface="Aptos" pitchFamily="34" charset="-120"/>
               </a:rPr>
-              <a:t>• Audit readiness depends on consistent records, not scattered files and informal emails.</a:t>
-            </a:r>
-            <a:endParaRPr lang="en-US" sz="2100" dirty="0"/>
+              <a:t>• Audit readiness depends on consistent records, not scattered files and.</a:t>
+            </a:r>
+            <a:endParaRPr lang="en-US" sz="1920" dirty="0"/>
           </a:p>
         </p:txBody>
       </p:sp>
@@ -3512,12 +3512,12 @@
         </p:nvSpPr>
         <p:spPr>
           <a:xfrm>
-            <a:off x="7635240" y="1325880"/>
-            <a:ext cx="3474720" cy="1207008"/>
+            <a:off x="7543800" y="1325880"/>
+            <a:ext cx="3611880" cy="1261872"/>
           </a:xfrm>
           <a:prstGeom prst="roundRect">
             <a:avLst>
-              <a:gd name="adj" fmla="val 9091"/>
+              <a:gd name="adj" fmla="val 8696"/>
             </a:avLst>
           </a:prstGeom>
           <a:solidFill>
@@ -3539,8 +3539,8 @@
         </p:nvSpPr>
         <p:spPr>
           <a:xfrm>
-            <a:off x="7799832" y="1472184"/>
-            <a:ext cx="3145536" cy="256032"/>
+            <a:off x="7708392" y="1453896"/>
+            <a:ext cx="3282696" cy="228600"/>
           </a:xfrm>
           <a:prstGeom prst="rect">
             <a:avLst/>
@@ -3556,7 +3556,7 @@
               <a:buNone/>
             </a:pPr>
             <a:r>
-              <a:rPr lang="en-US" sz="1300" b="1" dirty="0">
+              <a:rPr lang="en-US" sz="1220" b="1" dirty="0">
                 <a:solidFill>
                   <a:srgbClr val="0068B7"/>
                 </a:solidFill>
@@ -3566,7 +3566,7 @@
               </a:rPr>
               <a:t>Core concept</a:t>
             </a:r>
-            <a:endParaRPr lang="en-US" sz="1300" dirty="0"/>
+            <a:endParaRPr lang="en-US" sz="1220" dirty="0"/>
           </a:p>
         </p:txBody>
       </p:sp>
@@ -3578,8 +3578,8 @@
         </p:nvSpPr>
         <p:spPr>
           <a:xfrm>
-            <a:off x="7799832" y="1801368"/>
-            <a:ext cx="3145536" cy="640080"/>
+            <a:off x="7708392" y="1764792"/>
+            <a:ext cx="3282696" cy="749808"/>
           </a:xfrm>
           <a:prstGeom prst="rect">
             <a:avLst/>
@@ -3597,7 +3597,7 @@
               <a:buNone/>
             </a:pPr>
             <a:r>
-              <a:rPr lang="en-US" sz="1320" dirty="0">
+              <a:rPr lang="en-US" sz="1220" dirty="0">
                 <a:solidFill>
                   <a:srgbClr val="17364A"/>
                 </a:solidFill>
@@ -3607,7 +3607,7 @@
               </a:rPr>
               <a:t>Evidence management requires ownership and retention rules.</a:t>
             </a:r>
-            <a:endParaRPr lang="en-US" sz="1320" dirty="0"/>
+            <a:endParaRPr lang="en-US" sz="1220" dirty="0"/>
           </a:p>
         </p:txBody>
       </p:sp>
@@ -3619,12 +3619,12 @@
         </p:nvSpPr>
         <p:spPr>
           <a:xfrm>
-            <a:off x="7635240" y="2670048"/>
-            <a:ext cx="3474720" cy="1377086"/>
+            <a:off x="7543800" y="2724912"/>
+            <a:ext cx="3611880" cy="1527048"/>
           </a:xfrm>
           <a:prstGeom prst="roundRect">
             <a:avLst>
-              <a:gd name="adj" fmla="val 7968"/>
+              <a:gd name="adj" fmla="val 7186"/>
             </a:avLst>
           </a:prstGeom>
           <a:solidFill>
@@ -3646,8 +3646,8 @@
         </p:nvSpPr>
         <p:spPr>
           <a:xfrm>
-            <a:off x="7799832" y="2816352"/>
-            <a:ext cx="3145536" cy="256032"/>
+            <a:off x="7708392" y="2852928"/>
+            <a:ext cx="3282696" cy="228600"/>
           </a:xfrm>
           <a:prstGeom prst="rect">
             <a:avLst/>
@@ -3663,7 +3663,7 @@
               <a:buNone/>
             </a:pPr>
             <a:r>
-              <a:rPr lang="en-US" sz="1300" b="1" dirty="0">
+              <a:rPr lang="en-US" sz="1220" b="1" dirty="0">
                 <a:solidFill>
                   <a:srgbClr val="0068B7"/>
                 </a:solidFill>
@@ -3673,7 +3673,7 @@
               </a:rPr>
               <a:t>Concept checkpoints</a:t>
             </a:r>
-            <a:endParaRPr lang="en-US" sz="1300" dirty="0"/>
+            <a:endParaRPr lang="en-US" sz="1220" dirty="0"/>
           </a:p>
         </p:txBody>
       </p:sp>
@@ -3685,8 +3685,8 @@
         </p:nvSpPr>
         <p:spPr>
           <a:xfrm>
-            <a:off x="7818120" y="3182112"/>
-            <a:ext cx="3090672" cy="718718"/>
+            <a:off x="7726680" y="3182112"/>
+            <a:ext cx="3227832" cy="960120"/>
           </a:xfrm>
           <a:prstGeom prst="rect">
             <a:avLst/>
@@ -3704,7 +3704,7 @@
               <a:buNone/>
             </a:pPr>
             <a:r>
-              <a:rPr lang="en-US" sz="1220" dirty="0">
+              <a:rPr lang="en-US" sz="1140" dirty="0">
                 <a:solidFill>
                   <a:srgbClr val="17364A"/>
                 </a:solidFill>
@@ -3712,16 +3712,16 @@
                 <a:ea typeface="Aptos" pitchFamily="34" charset="-122"/>
                 <a:cs typeface="Aptos" pitchFamily="34" charset="-120"/>
               </a:rPr>
-              <a:t>Evidence management requires ownership and retention rules.</a:t>
-            </a:r>
-            <a:endParaRPr lang="en-US" sz="1220" dirty="0"/>
-          </a:p>
-          <a:p>
-            <a:pPr indent="0" marL="0">
-              <a:buNone/>
-            </a:pPr>
-            <a:r>
-              <a:rPr lang="en-US" sz="1220" dirty="0">
+              <a:t>Evidence management requires ownership and.</a:t>
+            </a:r>
+            <a:endParaRPr lang="en-US" sz="1140" dirty="0"/>
+          </a:p>
+          <a:p>
+            <a:pPr indent="0" marL="0">
+              <a:buNone/>
+            </a:pPr>
+            <a:r>
+              <a:rPr lang="en-US" sz="1140" dirty="0">
                 <a:solidFill>
                   <a:srgbClr val="17364A"/>
                 </a:solidFill>
@@ -3729,16 +3729,16 @@
                 <a:ea typeface="Aptos" pitchFamily="34" charset="-122"/>
                 <a:cs typeface="Aptos" pitchFamily="34" charset="-120"/>
               </a:rPr>
-              <a:t>Governance bodies should define who stores each artifact, where it.</a:t>
-            </a:r>
-            <a:endParaRPr lang="en-US" sz="1220" dirty="0"/>
-          </a:p>
-          <a:p>
-            <a:pPr indent="0" marL="0">
-              <a:buNone/>
-            </a:pPr>
-            <a:r>
-              <a:rPr lang="en-US" sz="1220" dirty="0">
+              <a:t>Governance bodies should define who stores each.</a:t>
+            </a:r>
+            <a:endParaRPr lang="en-US" sz="1140" dirty="0"/>
+          </a:p>
+          <a:p>
+            <a:pPr indent="0" marL="0">
+              <a:buNone/>
+            </a:pPr>
+            <a:r>
+              <a:rPr lang="en-US" sz="1140" dirty="0">
                 <a:solidFill>
                   <a:srgbClr val="17364A"/>
                 </a:solidFill>
@@ -3746,9 +3746,9 @@
                 <a:ea typeface="Aptos" pitchFamily="34" charset="-122"/>
                 <a:cs typeface="Aptos" pitchFamily="34" charset="-120"/>
               </a:rPr>
-              <a:t>Audit readiness depends on consistent records, not scattered files.</a:t>
-            </a:r>
-            <a:endParaRPr lang="en-US" sz="1220" dirty="0"/>
+              <a:t>Audit readiness depends on consistent records, not.</a:t>
+            </a:r>
+            <a:endParaRPr lang="en-US" sz="1140" dirty="0"/>
           </a:p>
         </p:txBody>
       </p:sp>
@@ -3760,12 +3760,12 @@
         </p:nvSpPr>
         <p:spPr>
           <a:xfrm>
-            <a:off x="7635240" y="4184294"/>
-            <a:ext cx="3474720" cy="1466698"/>
+            <a:off x="7543800" y="4389120"/>
+            <a:ext cx="3611880" cy="1261872"/>
           </a:xfrm>
           <a:prstGeom prst="roundRect">
             <a:avLst>
-              <a:gd name="adj" fmla="val 7481"/>
+              <a:gd name="adj" fmla="val 8696"/>
             </a:avLst>
           </a:prstGeom>
           <a:solidFill>
@@ -3787,8 +3787,8 @@
         </p:nvSpPr>
         <p:spPr>
           <a:xfrm>
-            <a:off x="7799832" y="4330598"/>
-            <a:ext cx="3145536" cy="256032"/>
+            <a:off x="7708392" y="4517136"/>
+            <a:ext cx="3282696" cy="228600"/>
           </a:xfrm>
           <a:prstGeom prst="rect">
             <a:avLst/>
@@ -3804,7 +3804,7 @@
               <a:buNone/>
             </a:pPr>
             <a:r>
-              <a:rPr lang="en-US" sz="1300" b="1" dirty="0">
+              <a:rPr lang="en-US" sz="1220" b="1" dirty="0">
                 <a:solidFill>
                   <a:srgbClr val="0068B7"/>
                 </a:solidFill>
@@ -3814,7 +3814,7 @@
               </a:rPr>
               <a:t>Apply it</a:t>
             </a:r>
-            <a:endParaRPr lang="en-US" sz="1300" dirty="0"/>
+            <a:endParaRPr lang="en-US" sz="1220" dirty="0"/>
           </a:p>
         </p:txBody>
       </p:sp>
@@ -3826,8 +3826,8 @@
         </p:nvSpPr>
         <p:spPr>
           <a:xfrm>
-            <a:off x="7799832" y="4659782"/>
-            <a:ext cx="3145536" cy="899770"/>
+            <a:off x="7708392" y="4828032"/>
+            <a:ext cx="3282696" cy="749808"/>
           </a:xfrm>
           <a:prstGeom prst="rect">
             <a:avLst/>
@@ -3845,7 +3845,7 @@
               <a:buNone/>
             </a:pPr>
             <a:r>
-              <a:rPr lang="en-US" sz="1320" dirty="0">
+              <a:rPr lang="en-US" sz="1220" dirty="0">
                 <a:solidFill>
                   <a:srgbClr val="17364A"/>
                 </a:solidFill>
@@ -3853,9 +3853,9 @@
                 <a:ea typeface="Aptos" pitchFamily="34" charset="-122"/>
                 <a:cs typeface="Aptos" pitchFamily="34" charset="-120"/>
               </a:rPr>
-              <a:t>Connect the concept to public health purpose, responsible use, required safeguards, documentation, and the next action a department should take.</a:t>
-            </a:r>
-            <a:endParaRPr lang="en-US" sz="1320" dirty="0"/>
+              <a:t>Connect the concept to public health purpose, responsible use, required.</a:t>
+            </a:r>
+            <a:endParaRPr lang="en-US" sz="1220" dirty="0"/>
           </a:p>
         </p:txBody>
       </p:sp>
@@ -4146,8 +4146,8 @@
         </p:nvSpPr>
         <p:spPr>
           <a:xfrm>
-            <a:off x="868680" y="1508760"/>
-            <a:ext cx="6309360" cy="4160520"/>
+            <a:off x="822960" y="1463040"/>
+            <a:ext cx="6565392" cy="4343400"/>
           </a:xfrm>
           <a:prstGeom prst="rect">
             <a:avLst/>
@@ -4165,7 +4165,7 @@
               <a:buNone/>
             </a:pPr>
             <a:r>
-              <a:rPr lang="en-US" sz="2100" dirty="0">
+              <a:rPr lang="en-US" sz="1920" dirty="0">
                 <a:solidFill>
                   <a:srgbClr val="003A63"/>
                 </a:solidFill>
@@ -4175,14 +4175,14 @@
               </a:rPr>
               <a:t>• Risks and failure modes include the following:</a:t>
             </a:r>
-            <a:endParaRPr lang="en-US" sz="2100" dirty="0"/>
-          </a:p>
-          <a:p>
-            <a:pPr indent="0" marL="0">
-              <a:buNone/>
-            </a:pPr>
-            <a:r>
-              <a:rPr lang="en-US" sz="2100" dirty="0">
+            <a:endParaRPr lang="en-US" sz="1920" dirty="0"/>
+          </a:p>
+          <a:p>
+            <a:pPr indent="0" marL="0">
+              <a:buNone/>
+            </a:pPr>
+            <a:r>
+              <a:rPr lang="en-US" sz="1920" dirty="0">
                 <a:solidFill>
                   <a:srgbClr val="003A63"/>
                 </a:solidFill>
@@ -4192,14 +4192,14 @@
               </a:rPr>
               <a:t>• Approvals without records of conditions or rationale.</a:t>
             </a:r>
-            <a:endParaRPr lang="en-US" sz="2100" dirty="0"/>
-          </a:p>
-          <a:p>
-            <a:pPr indent="0" marL="0">
-              <a:buNone/>
-            </a:pPr>
-            <a:r>
-              <a:rPr lang="en-US" sz="2100" dirty="0">
+            <a:endParaRPr lang="en-US" sz="1920" dirty="0"/>
+          </a:p>
+          <a:p>
+            <a:pPr indent="0" marL="0">
+              <a:buNone/>
+            </a:pPr>
+            <a:r>
+              <a:rPr lang="en-US" sz="1920" dirty="0">
                 <a:solidFill>
                   <a:srgbClr val="003A63"/>
                 </a:solidFill>
@@ -4209,7 +4209,7 @@
               </a:rPr>
               <a:t>• Validation results stored informally or not retained.</a:t>
             </a:r>
-            <a:endParaRPr lang="en-US" sz="2100" dirty="0"/>
+            <a:endParaRPr lang="en-US" sz="1920" dirty="0"/>
           </a:p>
         </p:txBody>
       </p:sp>
@@ -4221,12 +4221,12 @@
         </p:nvSpPr>
         <p:spPr>
           <a:xfrm>
-            <a:off x="7635240" y="1325880"/>
-            <a:ext cx="3474720" cy="1207008"/>
+            <a:off x="7543800" y="1325880"/>
+            <a:ext cx="3611880" cy="1261872"/>
           </a:xfrm>
           <a:prstGeom prst="roundRect">
             <a:avLst>
-              <a:gd name="adj" fmla="val 9091"/>
+              <a:gd name="adj" fmla="val 8696"/>
             </a:avLst>
           </a:prstGeom>
           <a:solidFill>
@@ -4248,8 +4248,8 @@
         </p:nvSpPr>
         <p:spPr>
           <a:xfrm>
-            <a:off x="7799832" y="1472184"/>
-            <a:ext cx="3145536" cy="256032"/>
+            <a:off x="7708392" y="1453896"/>
+            <a:ext cx="3282696" cy="228600"/>
           </a:xfrm>
           <a:prstGeom prst="rect">
             <a:avLst/>
@@ -4265,7 +4265,7 @@
               <a:buNone/>
             </a:pPr>
             <a:r>
-              <a:rPr lang="en-US" sz="1300" b="1" dirty="0">
+              <a:rPr lang="en-US" sz="1220" b="1" dirty="0">
                 <a:solidFill>
                   <a:srgbClr val="0068B7"/>
                 </a:solidFill>
@@ -4275,7 +4275,7 @@
               </a:rPr>
               <a:t>Risk check</a:t>
             </a:r>
-            <a:endParaRPr lang="en-US" sz="1300" dirty="0"/>
+            <a:endParaRPr lang="en-US" sz="1220" dirty="0"/>
           </a:p>
         </p:txBody>
       </p:sp>
@@ -4287,8 +4287,8 @@
         </p:nvSpPr>
         <p:spPr>
           <a:xfrm>
-            <a:off x="7799832" y="1801368"/>
-            <a:ext cx="3145536" cy="640080"/>
+            <a:off x="7708392" y="1764792"/>
+            <a:ext cx="3282696" cy="749808"/>
           </a:xfrm>
           <a:prstGeom prst="rect">
             <a:avLst/>
@@ -4306,7 +4306,7 @@
               <a:buNone/>
             </a:pPr>
             <a:r>
-              <a:rPr lang="en-US" sz="1320" dirty="0">
+              <a:rPr lang="en-US" sz="1220" dirty="0">
                 <a:solidFill>
                   <a:srgbClr val="17364A"/>
                 </a:solidFill>
@@ -4316,7 +4316,7 @@
               </a:rPr>
               <a:t>Risks and failure modes include the following:</a:t>
             </a:r>
-            <a:endParaRPr lang="en-US" sz="1320" dirty="0"/>
+            <a:endParaRPr lang="en-US" sz="1220" dirty="0"/>
           </a:p>
         </p:txBody>
       </p:sp>
@@ -4328,12 +4328,12 @@
         </p:nvSpPr>
         <p:spPr>
           <a:xfrm>
-            <a:off x="7635240" y="2670048"/>
-            <a:ext cx="3474720" cy="1536192"/>
+            <a:off x="7543800" y="2724912"/>
+            <a:ext cx="3611880" cy="1527048"/>
           </a:xfrm>
           <a:prstGeom prst="roundRect">
             <a:avLst>
-              <a:gd name="adj" fmla="val 7143"/>
+              <a:gd name="adj" fmla="val 7186"/>
             </a:avLst>
           </a:prstGeom>
           <a:solidFill>
@@ -4355,24 +4355,26 @@
         </p:nvSpPr>
         <p:spPr>
           <a:xfrm>
-            <a:off x="7799832" y="2798064"/>
-            <a:ext cx="3145536" cy="237744"/>
-          </a:xfrm>
-          <a:prstGeom prst="rect">
-            <a:avLst/>
-          </a:prstGeom>
-          <a:noFill/>
-          <a:ln/>
-        </p:spPr>
-        <p:txBody>
-          <a:bodyPr wrap="square" lIns="0" tIns="0" rIns="0" bIns="0" rtlCol="0" anchor="ctr"/>
-          <a:lstStyle/>
-          <a:p>
-            <a:pPr indent="0" marL="0">
-              <a:buNone/>
-            </a:pPr>
-            <a:r>
-              <a:rPr lang="en-US" sz="1250" b="1" dirty="0">
+            <a:off x="7708392" y="2852928"/>
+            <a:ext cx="3282696" cy="219456"/>
+          </a:xfrm>
+          <a:prstGeom prst="rect">
+            <a:avLst/>
+          </a:prstGeom>
+          <a:noFill/>
+          <a:ln/>
+        </p:spPr>
+        <p:txBody>
+          <a:bodyPr wrap="square" lIns="0" tIns="0" rIns="0" bIns="0" rtlCol="0" anchor="ctr">
+            <a:normAutofit/>
+          </a:bodyPr>
+          <a:lstStyle/>
+          <a:p>
+            <a:pPr indent="0" marL="0">
+              <a:buNone/>
+            </a:pPr>
+            <a:r>
+              <a:rPr lang="en-US" sz="1160" b="1" dirty="0">
                 <a:solidFill>
                   <a:srgbClr val="0068B7"/>
                 </a:solidFill>
@@ -4382,7 +4384,7 @@
               </a:rPr>
               <a:t>Risk control loop</a:t>
             </a:r>
-            <a:endParaRPr lang="en-US" sz="1250" dirty="0"/>
+            <a:endParaRPr lang="en-US" sz="1160" dirty="0"/>
           </a:p>
         </p:txBody>
       </p:sp>
@@ -4394,7 +4396,7 @@
         </p:nvSpPr>
         <p:spPr>
           <a:xfrm>
-            <a:off x="8763000" y="3351276"/>
+            <a:off x="8717280" y="3406140"/>
             <a:ext cx="164592" cy="0"/>
           </a:xfrm>
           <a:prstGeom prst="line">
@@ -4417,8 +4419,8 @@
         </p:nvSpPr>
         <p:spPr>
           <a:xfrm>
-            <a:off x="7872984" y="3200400"/>
-            <a:ext cx="890016" cy="301752"/>
+            <a:off x="7781544" y="3255264"/>
+            <a:ext cx="935736" cy="301752"/>
           </a:xfrm>
           <a:prstGeom prst="roundRect">
             <a:avLst>
@@ -4444,8 +4446,8 @@
         </p:nvSpPr>
         <p:spPr>
           <a:xfrm>
-            <a:off x="7909560" y="3273552"/>
-            <a:ext cx="816864" cy="146304"/>
+            <a:off x="7818120" y="3328416"/>
+            <a:ext cx="862584" cy="146304"/>
           </a:xfrm>
           <a:prstGeom prst="rect">
             <a:avLst/>
@@ -4485,7 +4487,7 @@
         </p:nvSpPr>
         <p:spPr>
           <a:xfrm>
-            <a:off x="9817608" y="3351276"/>
+            <a:off x="9817608" y="3406140"/>
             <a:ext cx="164592" cy="0"/>
           </a:xfrm>
           <a:prstGeom prst="line">
@@ -4508,8 +4510,8 @@
         </p:nvSpPr>
         <p:spPr>
           <a:xfrm>
-            <a:off x="8927592" y="3200400"/>
-            <a:ext cx="890016" cy="301752"/>
+            <a:off x="8881872" y="3255264"/>
+            <a:ext cx="935736" cy="301752"/>
           </a:xfrm>
           <a:prstGeom prst="roundRect">
             <a:avLst>
@@ -4535,8 +4537,8 @@
         </p:nvSpPr>
         <p:spPr>
           <a:xfrm>
-            <a:off x="8964168" y="3273552"/>
-            <a:ext cx="816864" cy="146304"/>
+            <a:off x="8918448" y="3328416"/>
+            <a:ext cx="862584" cy="146304"/>
           </a:xfrm>
           <a:prstGeom prst="rect">
             <a:avLst/>
@@ -4576,8 +4578,8 @@
         </p:nvSpPr>
         <p:spPr>
           <a:xfrm>
-            <a:off x="9982200" y="3200400"/>
-            <a:ext cx="890016" cy="301752"/>
+            <a:off x="9982200" y="3255264"/>
+            <a:ext cx="935736" cy="301752"/>
           </a:xfrm>
           <a:prstGeom prst="roundRect">
             <a:avLst>
@@ -4603,8 +4605,8 @@
         </p:nvSpPr>
         <p:spPr>
           <a:xfrm>
-            <a:off x="10018776" y="3273552"/>
-            <a:ext cx="816864" cy="146304"/>
+            <a:off x="10018776" y="3328416"/>
+            <a:ext cx="862584" cy="146304"/>
           </a:xfrm>
           <a:prstGeom prst="rect">
             <a:avLst/>
@@ -4644,8 +4646,8 @@
         </p:nvSpPr>
         <p:spPr>
           <a:xfrm>
-            <a:off x="7854696" y="3694176"/>
-            <a:ext cx="3035808" cy="365760"/>
+            <a:off x="7763256" y="3749040"/>
+            <a:ext cx="3172968" cy="356616"/>
           </a:xfrm>
           <a:prstGeom prst="rect">
             <a:avLst/>
@@ -4663,7 +4665,7 @@
               <a:buNone/>
             </a:pPr>
             <a:r>
-              <a:rPr lang="en-US" sz="1120" dirty="0">
+              <a:rPr lang="en-US" sz="1040" dirty="0">
                 <a:solidFill>
                   <a:srgbClr val="17364A"/>
                 </a:solidFill>
@@ -4671,9 +4673,9 @@
                 <a:ea typeface="Aptos" pitchFamily="34" charset="-122"/>
                 <a:cs typeface="Aptos" pitchFamily="34" charset="-120"/>
               </a:rPr>
-              <a:t>Responsible use depends on finding risks early, applying safeguards, and watching for drift or harm over time.</a:t>
-            </a:r>
-            <a:endParaRPr lang="en-US" sz="1120" dirty="0"/>
+              <a:t>Responsible use depends on finding risks early, applying safeguards,.</a:t>
+            </a:r>
+            <a:endParaRPr lang="en-US" sz="1040" dirty="0"/>
           </a:p>
         </p:txBody>
       </p:sp>
@@ -4685,12 +4687,12 @@
         </p:nvSpPr>
         <p:spPr>
           <a:xfrm>
-            <a:off x="7635240" y="4343400"/>
-            <a:ext cx="3474720" cy="1255471"/>
+            <a:off x="7543800" y="4389120"/>
+            <a:ext cx="3611880" cy="1261872"/>
           </a:xfrm>
           <a:prstGeom prst="roundRect">
             <a:avLst>
-              <a:gd name="adj" fmla="val 8740"/>
+              <a:gd name="adj" fmla="val 8696"/>
             </a:avLst>
           </a:prstGeom>
           <a:solidFill>
@@ -4712,8 +4714,8 @@
         </p:nvSpPr>
         <p:spPr>
           <a:xfrm>
-            <a:off x="7799832" y="4489704"/>
-            <a:ext cx="3145536" cy="256032"/>
+            <a:off x="7708392" y="4517136"/>
+            <a:ext cx="3282696" cy="228600"/>
           </a:xfrm>
           <a:prstGeom prst="rect">
             <a:avLst/>
@@ -4729,7 +4731,7 @@
               <a:buNone/>
             </a:pPr>
             <a:r>
-              <a:rPr lang="en-US" sz="1300" b="1" dirty="0">
+              <a:rPr lang="en-US" sz="1220" b="1" dirty="0">
                 <a:solidFill>
                   <a:srgbClr val="0068B7"/>
                 </a:solidFill>
@@ -4739,7 +4741,7 @@
               </a:rPr>
               <a:t>Safeguard to plan</a:t>
             </a:r>
-            <a:endParaRPr lang="en-US" sz="1300" dirty="0"/>
+            <a:endParaRPr lang="en-US" sz="1220" dirty="0"/>
           </a:p>
         </p:txBody>
       </p:sp>
@@ -4751,8 +4753,8 @@
         </p:nvSpPr>
         <p:spPr>
           <a:xfrm>
-            <a:off x="7799832" y="4818888"/>
-            <a:ext cx="3145536" cy="688543"/>
+            <a:off x="7708392" y="4828032"/>
+            <a:ext cx="3282696" cy="749808"/>
           </a:xfrm>
           <a:prstGeom prst="rect">
             <a:avLst/>
@@ -4770,7 +4772,7 @@
               <a:buNone/>
             </a:pPr>
             <a:r>
-              <a:rPr lang="en-US" sz="1320" dirty="0">
+              <a:rPr lang="en-US" sz="1220" dirty="0">
                 <a:solidFill>
                   <a:srgbClr val="17364A"/>
                 </a:solidFill>
@@ -4778,9 +4780,9 @@
                 <a:ea typeface="Aptos" pitchFamily="34" charset="-122"/>
                 <a:cs typeface="Aptos" pitchFamily="34" charset="-120"/>
               </a:rPr>
-              <a:t>Identify what could go wrong, who could be affected, what safeguards are needed, and what evidence should be reviewed before use.</a:t>
-            </a:r>
-            <a:endParaRPr lang="en-US" sz="1320" dirty="0"/>
+              <a:t>Identify what could go wrong, who could be affected, what safeguards are needed,.</a:t>
+            </a:r>
+            <a:endParaRPr lang="en-US" sz="1220" dirty="0"/>
           </a:p>
         </p:txBody>
       </p:sp>
@@ -5071,8 +5073,8 @@
         </p:nvSpPr>
         <p:spPr>
           <a:xfrm>
-            <a:off x="868680" y="1508760"/>
-            <a:ext cx="6309360" cy="4160520"/>
+            <a:off x="822960" y="1463040"/>
+            <a:ext cx="6565392" cy="4343400"/>
           </a:xfrm>
           <a:prstGeom prst="rect">
             <a:avLst/>
@@ -5090,7 +5092,7 @@
               <a:buNone/>
             </a:pPr>
             <a:r>
-              <a:rPr lang="en-US" sz="2100" dirty="0">
+              <a:rPr lang="en-US" sz="1920" dirty="0">
                 <a:solidFill>
                   <a:srgbClr val="003A63"/>
                 </a:solidFill>
@@ -5100,14 +5102,14 @@
               </a:rPr>
               <a:t>• Vendor documentation accepted without agency review or local evidence.</a:t>
             </a:r>
-            <a:endParaRPr lang="en-US" sz="2100" dirty="0"/>
-          </a:p>
-          <a:p>
-            <a:pPr indent="0" marL="0">
-              <a:buNone/>
-            </a:pPr>
-            <a:r>
-              <a:rPr lang="en-US" sz="2100" dirty="0">
+            <a:endParaRPr lang="en-US" sz="1920" dirty="0"/>
+          </a:p>
+          <a:p>
+            <a:pPr indent="0" marL="0">
+              <a:buNone/>
+            </a:pPr>
+            <a:r>
+              <a:rPr lang="en-US" sz="1920" dirty="0">
                 <a:solidFill>
                   <a:srgbClr val="003A63"/>
                 </a:solidFill>
@@ -5115,16 +5117,16 @@
                 <a:ea typeface="Aptos" pitchFamily="34" charset="-122"/>
                 <a:cs typeface="Aptos" pitchFamily="34" charset="-120"/>
               </a:rPr>
-              <a:t>• Incidents that cannot be reconstructed because logs or decisions were not preserved.</a:t>
-            </a:r>
-            <a:endParaRPr lang="en-US" sz="2100" dirty="0"/>
-          </a:p>
-          <a:p>
-            <a:pPr indent="0" marL="0">
-              <a:buNone/>
-            </a:pPr>
-            <a:r>
-              <a:rPr lang="en-US" sz="2100" dirty="0">
+              <a:t>• Incidents that cannot be reconstructed because logs or decisions were not.</a:t>
+            </a:r>
+            <a:endParaRPr lang="en-US" sz="1920" dirty="0"/>
+          </a:p>
+          <a:p>
+            <a:pPr indent="0" marL="0">
+              <a:buNone/>
+            </a:pPr>
+            <a:r>
+              <a:rPr lang="en-US" sz="1920" dirty="0">
                 <a:solidFill>
                   <a:srgbClr val="003A63"/>
                 </a:solidFill>
@@ -5134,7 +5136,7 @@
               </a:rPr>
               <a:t>• Public records or audit responses delayed because artifacts are scattered.</a:t>
             </a:r>
-            <a:endParaRPr lang="en-US" sz="2100" dirty="0"/>
+            <a:endParaRPr lang="en-US" sz="1920" dirty="0"/>
           </a:p>
         </p:txBody>
       </p:sp>
@@ -5146,12 +5148,12 @@
         </p:nvSpPr>
         <p:spPr>
           <a:xfrm>
-            <a:off x="7635240" y="1325880"/>
-            <a:ext cx="3474720" cy="1207008"/>
+            <a:off x="7543800" y="1325880"/>
+            <a:ext cx="3611880" cy="1261872"/>
           </a:xfrm>
           <a:prstGeom prst="roundRect">
             <a:avLst>
-              <a:gd name="adj" fmla="val 9091"/>
+              <a:gd name="adj" fmla="val 8696"/>
             </a:avLst>
           </a:prstGeom>
           <a:solidFill>
@@ -5173,8 +5175,8 @@
         </p:nvSpPr>
         <p:spPr>
           <a:xfrm>
-            <a:off x="7799832" y="1472184"/>
-            <a:ext cx="3145536" cy="256032"/>
+            <a:off x="7708392" y="1453896"/>
+            <a:ext cx="3282696" cy="228600"/>
           </a:xfrm>
           <a:prstGeom prst="rect">
             <a:avLst/>
@@ -5190,7 +5192,7 @@
               <a:buNone/>
             </a:pPr>
             <a:r>
-              <a:rPr lang="en-US" sz="1300" b="1" dirty="0">
+              <a:rPr lang="en-US" sz="1220" b="1" dirty="0">
                 <a:solidFill>
                   <a:srgbClr val="0068B7"/>
                 </a:solidFill>
@@ -5200,7 +5202,7 @@
               </a:rPr>
               <a:t>Risk check</a:t>
             </a:r>
-            <a:endParaRPr lang="en-US" sz="1300" dirty="0"/>
+            <a:endParaRPr lang="en-US" sz="1220" dirty="0"/>
           </a:p>
         </p:txBody>
       </p:sp>
@@ -5212,8 +5214,8 @@
         </p:nvSpPr>
         <p:spPr>
           <a:xfrm>
-            <a:off x="7799832" y="1801368"/>
-            <a:ext cx="3145536" cy="640080"/>
+            <a:off x="7708392" y="1764792"/>
+            <a:ext cx="3282696" cy="749808"/>
           </a:xfrm>
           <a:prstGeom prst="rect">
             <a:avLst/>
@@ -5231,7 +5233,7 @@
               <a:buNone/>
             </a:pPr>
             <a:r>
-              <a:rPr lang="en-US" sz="1320" dirty="0">
+              <a:rPr lang="en-US" sz="1220" dirty="0">
                 <a:solidFill>
                   <a:srgbClr val="17364A"/>
                 </a:solidFill>
@@ -5241,7 +5243,7 @@
               </a:rPr>
               <a:t>Vendor documentation accepted without agency review or local evidence.</a:t>
             </a:r>
-            <a:endParaRPr lang="en-US" sz="1320" dirty="0"/>
+            <a:endParaRPr lang="en-US" sz="1220" dirty="0"/>
           </a:p>
         </p:txBody>
       </p:sp>
@@ -5253,12 +5255,12 @@
         </p:nvSpPr>
         <p:spPr>
           <a:xfrm>
-            <a:off x="7635240" y="2670048"/>
-            <a:ext cx="3474720" cy="1536192"/>
+            <a:off x="7543800" y="2724912"/>
+            <a:ext cx="3611880" cy="1527048"/>
           </a:xfrm>
           <a:prstGeom prst="roundRect">
             <a:avLst>
-              <a:gd name="adj" fmla="val 7143"/>
+              <a:gd name="adj" fmla="val 7186"/>
             </a:avLst>
           </a:prstGeom>
           <a:solidFill>
@@ -5280,24 +5282,26 @@
         </p:nvSpPr>
         <p:spPr>
           <a:xfrm>
-            <a:off x="7799832" y="2798064"/>
-            <a:ext cx="3145536" cy="237744"/>
-          </a:xfrm>
-          <a:prstGeom prst="rect">
-            <a:avLst/>
-          </a:prstGeom>
-          <a:noFill/>
-          <a:ln/>
-        </p:spPr>
-        <p:txBody>
-          <a:bodyPr wrap="square" lIns="0" tIns="0" rIns="0" bIns="0" rtlCol="0" anchor="ctr"/>
-          <a:lstStyle/>
-          <a:p>
-            <a:pPr indent="0" marL="0">
-              <a:buNone/>
-            </a:pPr>
-            <a:r>
-              <a:rPr lang="en-US" sz="1250" b="1" dirty="0">
+            <a:off x="7708392" y="2852928"/>
+            <a:ext cx="3282696" cy="219456"/>
+          </a:xfrm>
+          <a:prstGeom prst="rect">
+            <a:avLst/>
+          </a:prstGeom>
+          <a:noFill/>
+          <a:ln/>
+        </p:spPr>
+        <p:txBody>
+          <a:bodyPr wrap="square" lIns="0" tIns="0" rIns="0" bIns="0" rtlCol="0" anchor="ctr">
+            <a:normAutofit/>
+          </a:bodyPr>
+          <a:lstStyle/>
+          <a:p>
+            <a:pPr indent="0" marL="0">
+              <a:buNone/>
+            </a:pPr>
+            <a:r>
+              <a:rPr lang="en-US" sz="1160" b="1" dirty="0">
                 <a:solidFill>
                   <a:srgbClr val="0068B7"/>
                 </a:solidFill>
@@ -5307,7 +5311,7 @@
               </a:rPr>
               <a:t>Risk control loop</a:t>
             </a:r>
-            <a:endParaRPr lang="en-US" sz="1250" dirty="0"/>
+            <a:endParaRPr lang="en-US" sz="1160" dirty="0"/>
           </a:p>
         </p:txBody>
       </p:sp>
@@ -5319,7 +5323,7 @@
         </p:nvSpPr>
         <p:spPr>
           <a:xfrm>
-            <a:off x="8763000" y="3351276"/>
+            <a:off x="8717280" y="3406140"/>
             <a:ext cx="164592" cy="0"/>
           </a:xfrm>
           <a:prstGeom prst="line">
@@ -5342,8 +5346,8 @@
         </p:nvSpPr>
         <p:spPr>
           <a:xfrm>
-            <a:off x="7872984" y="3200400"/>
-            <a:ext cx="890016" cy="301752"/>
+            <a:off x="7781544" y="3255264"/>
+            <a:ext cx="935736" cy="301752"/>
           </a:xfrm>
           <a:prstGeom prst="roundRect">
             <a:avLst>
@@ -5369,8 +5373,8 @@
         </p:nvSpPr>
         <p:spPr>
           <a:xfrm>
-            <a:off x="7909560" y="3273552"/>
-            <a:ext cx="816864" cy="146304"/>
+            <a:off x="7818120" y="3328416"/>
+            <a:ext cx="862584" cy="146304"/>
           </a:xfrm>
           <a:prstGeom prst="rect">
             <a:avLst/>
@@ -5410,7 +5414,7 @@
         </p:nvSpPr>
         <p:spPr>
           <a:xfrm>
-            <a:off x="9817608" y="3351276"/>
+            <a:off x="9817608" y="3406140"/>
             <a:ext cx="164592" cy="0"/>
           </a:xfrm>
           <a:prstGeom prst="line">
@@ -5433,8 +5437,8 @@
         </p:nvSpPr>
         <p:spPr>
           <a:xfrm>
-            <a:off x="8927592" y="3200400"/>
-            <a:ext cx="890016" cy="301752"/>
+            <a:off x="8881872" y="3255264"/>
+            <a:ext cx="935736" cy="301752"/>
           </a:xfrm>
           <a:prstGeom prst="roundRect">
             <a:avLst>
@@ -5460,8 +5464,8 @@
         </p:nvSpPr>
         <p:spPr>
           <a:xfrm>
-            <a:off x="8964168" y="3273552"/>
-            <a:ext cx="816864" cy="146304"/>
+            <a:off x="8918448" y="3328416"/>
+            <a:ext cx="862584" cy="146304"/>
           </a:xfrm>
           <a:prstGeom prst="rect">
             <a:avLst/>
@@ -5501,8 +5505,8 @@
         </p:nvSpPr>
         <p:spPr>
           <a:xfrm>
-            <a:off x="9982200" y="3200400"/>
-            <a:ext cx="890016" cy="301752"/>
+            <a:off x="9982200" y="3255264"/>
+            <a:ext cx="935736" cy="301752"/>
           </a:xfrm>
           <a:prstGeom prst="roundRect">
             <a:avLst>
@@ -5528,8 +5532,8 @@
         </p:nvSpPr>
         <p:spPr>
           <a:xfrm>
-            <a:off x="10018776" y="3273552"/>
-            <a:ext cx="816864" cy="146304"/>
+            <a:off x="10018776" y="3328416"/>
+            <a:ext cx="862584" cy="146304"/>
           </a:xfrm>
           <a:prstGeom prst="rect">
             <a:avLst/>
@@ -5569,8 +5573,8 @@
         </p:nvSpPr>
         <p:spPr>
           <a:xfrm>
-            <a:off x="7854696" y="3694176"/>
-            <a:ext cx="3035808" cy="365760"/>
+            <a:off x="7763256" y="3749040"/>
+            <a:ext cx="3172968" cy="356616"/>
           </a:xfrm>
           <a:prstGeom prst="rect">
             <a:avLst/>
@@ -5588,7 +5592,7 @@
               <a:buNone/>
             </a:pPr>
             <a:r>
-              <a:rPr lang="en-US" sz="1120" dirty="0">
+              <a:rPr lang="en-US" sz="1040" dirty="0">
                 <a:solidFill>
                   <a:srgbClr val="17364A"/>
                 </a:solidFill>
@@ -5596,9 +5600,9 @@
                 <a:ea typeface="Aptos" pitchFamily="34" charset="-122"/>
                 <a:cs typeface="Aptos" pitchFamily="34" charset="-120"/>
               </a:rPr>
-              <a:t>Responsible use depends on finding risks early, applying safeguards, and watching for drift or harm over time.</a:t>
-            </a:r>
-            <a:endParaRPr lang="en-US" sz="1120" dirty="0"/>
+              <a:t>Responsible use depends on finding risks early, applying safeguards,.</a:t>
+            </a:r>
+            <a:endParaRPr lang="en-US" sz="1040" dirty="0"/>
           </a:p>
         </p:txBody>
       </p:sp>
@@ -5610,12 +5614,12 @@
         </p:nvSpPr>
         <p:spPr>
           <a:xfrm>
-            <a:off x="7635240" y="4343400"/>
-            <a:ext cx="3474720" cy="1255471"/>
+            <a:off x="7543800" y="4389120"/>
+            <a:ext cx="3611880" cy="1261872"/>
           </a:xfrm>
           <a:prstGeom prst="roundRect">
             <a:avLst>
-              <a:gd name="adj" fmla="val 8740"/>
+              <a:gd name="adj" fmla="val 8696"/>
             </a:avLst>
           </a:prstGeom>
           <a:solidFill>
@@ -5637,8 +5641,8 @@
         </p:nvSpPr>
         <p:spPr>
           <a:xfrm>
-            <a:off x="7799832" y="4489704"/>
-            <a:ext cx="3145536" cy="256032"/>
+            <a:off x="7708392" y="4517136"/>
+            <a:ext cx="3282696" cy="228600"/>
           </a:xfrm>
           <a:prstGeom prst="rect">
             <a:avLst/>
@@ -5654,7 +5658,7 @@
               <a:buNone/>
             </a:pPr>
             <a:r>
-              <a:rPr lang="en-US" sz="1300" b="1" dirty="0">
+              <a:rPr lang="en-US" sz="1220" b="1" dirty="0">
                 <a:solidFill>
                   <a:srgbClr val="0068B7"/>
                 </a:solidFill>
@@ -5664,7 +5668,7 @@
               </a:rPr>
               <a:t>Safeguard to plan</a:t>
             </a:r>
-            <a:endParaRPr lang="en-US" sz="1300" dirty="0"/>
+            <a:endParaRPr lang="en-US" sz="1220" dirty="0"/>
           </a:p>
         </p:txBody>
       </p:sp>
@@ -5676,8 +5680,8 @@
         </p:nvSpPr>
         <p:spPr>
           <a:xfrm>
-            <a:off x="7799832" y="4818888"/>
-            <a:ext cx="3145536" cy="688543"/>
+            <a:off x="7708392" y="4828032"/>
+            <a:ext cx="3282696" cy="749808"/>
           </a:xfrm>
           <a:prstGeom prst="rect">
             <a:avLst/>
@@ -5695,7 +5699,7 @@
               <a:buNone/>
             </a:pPr>
             <a:r>
-              <a:rPr lang="en-US" sz="1320" dirty="0">
+              <a:rPr lang="en-US" sz="1220" dirty="0">
                 <a:solidFill>
                   <a:srgbClr val="17364A"/>
                 </a:solidFill>
@@ -5703,9 +5707,9 @@
                 <a:ea typeface="Aptos" pitchFamily="34" charset="-122"/>
                 <a:cs typeface="Aptos" pitchFamily="34" charset="-120"/>
               </a:rPr>
-              <a:t>Identify what could go wrong, who could be affected, what safeguards are needed, and what evidence should be reviewed before use.</a:t>
-            </a:r>
-            <a:endParaRPr lang="en-US" sz="1320" dirty="0"/>
+              <a:t>Identify what could go wrong, who could be affected, what safeguards are needed,.</a:t>
+            </a:r>
+            <a:endParaRPr lang="en-US" sz="1220" dirty="0"/>
           </a:p>
         </p:txBody>
       </p:sp>
@@ -5996,8 +6000,8 @@
         </p:nvSpPr>
         <p:spPr>
           <a:xfrm>
-            <a:off x="868680" y="1508760"/>
-            <a:ext cx="6309360" cy="4160520"/>
+            <a:off x="822960" y="1463040"/>
+            <a:ext cx="6565392" cy="4343400"/>
           </a:xfrm>
           <a:prstGeom prst="rect">
             <a:avLst/>
@@ -6015,7 +6019,7 @@
               <a:buNone/>
             </a:pPr>
             <a:r>
-              <a:rPr lang="en-US" sz="2100" dirty="0">
+              <a:rPr lang="en-US" sz="1920" dirty="0">
                 <a:solidFill>
                   <a:srgbClr val="003A63"/>
                 </a:solidFill>
@@ -6025,14 +6029,14 @@
               </a:rPr>
               <a:t>• Recommended guardrails include the following:</a:t>
             </a:r>
-            <a:endParaRPr lang="en-US" sz="2100" dirty="0"/>
-          </a:p>
-          <a:p>
-            <a:pPr indent="0" marL="0">
-              <a:buNone/>
-            </a:pPr>
-            <a:r>
-              <a:rPr lang="en-US" sz="2100" dirty="0">
+            <a:endParaRPr lang="en-US" sz="1920" dirty="0"/>
+          </a:p>
+          <a:p>
+            <a:pPr indent="0" marL="0">
+              <a:buNone/>
+            </a:pPr>
+            <a:r>
+              <a:rPr lang="en-US" sz="1920" dirty="0">
                 <a:solidFill>
                   <a:srgbClr val="003A63"/>
                 </a:solidFill>
@@ -6042,14 +6046,14 @@
               </a:rPr>
               <a:t>• Maintain an AI evidence inventory for each approved AI use.</a:t>
             </a:r>
-            <a:endParaRPr lang="en-US" sz="2100" dirty="0"/>
-          </a:p>
-          <a:p>
-            <a:pPr indent="0" marL="0">
-              <a:buNone/>
-            </a:pPr>
-            <a:r>
-              <a:rPr lang="en-US" sz="2100" dirty="0">
+            <a:endParaRPr lang="en-US" sz="1920" dirty="0"/>
+          </a:p>
+          <a:p>
+            <a:pPr indent="0" marL="0">
+              <a:buNone/>
+            </a:pPr>
+            <a:r>
+              <a:rPr lang="en-US" sz="1920" dirty="0">
                 <a:solidFill>
                   <a:srgbClr val="003A63"/>
                 </a:solidFill>
@@ -6057,9 +6061,9 @@
                 <a:ea typeface="Aptos" pitchFamily="34" charset="-122"/>
                 <a:cs typeface="Aptos" pitchFamily="34" charset="-120"/>
               </a:rPr>
-              <a:t>• Use decision logs for approvals, deferrals, conditions, changes, and retirement.</a:t>
-            </a:r>
-            <a:endParaRPr lang="en-US" sz="2100" dirty="0"/>
+              <a:t>• Use decision logs for approvals, deferrals, conditions, changes, and.</a:t>
+            </a:r>
+            <a:endParaRPr lang="en-US" sz="1920" dirty="0"/>
           </a:p>
         </p:txBody>
       </p:sp>
@@ -6071,12 +6075,12 @@
         </p:nvSpPr>
         <p:spPr>
           <a:xfrm>
-            <a:off x="7635240" y="1325880"/>
-            <a:ext cx="3474720" cy="1207008"/>
+            <a:off x="7543800" y="1325880"/>
+            <a:ext cx="3611880" cy="1261872"/>
           </a:xfrm>
           <a:prstGeom prst="roundRect">
             <a:avLst>
-              <a:gd name="adj" fmla="val 9091"/>
+              <a:gd name="adj" fmla="val 8696"/>
             </a:avLst>
           </a:prstGeom>
           <a:solidFill>
@@ -6098,8 +6102,8 @@
         </p:nvSpPr>
         <p:spPr>
           <a:xfrm>
-            <a:off x="7799832" y="1472184"/>
-            <a:ext cx="3145536" cy="256032"/>
+            <a:off x="7708392" y="1453896"/>
+            <a:ext cx="3282696" cy="228600"/>
           </a:xfrm>
           <a:prstGeom prst="rect">
             <a:avLst/>
@@ -6115,7 +6119,7 @@
               <a:buNone/>
             </a:pPr>
             <a:r>
-              <a:rPr lang="en-US" sz="1300" b="1" dirty="0">
+              <a:rPr lang="en-US" sz="1220" b="1" dirty="0">
                 <a:solidFill>
                   <a:srgbClr val="0068B7"/>
                 </a:solidFill>
@@ -6125,7 +6129,7 @@
               </a:rPr>
               <a:t>Risk check</a:t>
             </a:r>
-            <a:endParaRPr lang="en-US" sz="1300" dirty="0"/>
+            <a:endParaRPr lang="en-US" sz="1220" dirty="0"/>
           </a:p>
         </p:txBody>
       </p:sp>
@@ -6137,8 +6141,8 @@
         </p:nvSpPr>
         <p:spPr>
           <a:xfrm>
-            <a:off x="7799832" y="1801368"/>
-            <a:ext cx="3145536" cy="640080"/>
+            <a:off x="7708392" y="1764792"/>
+            <a:ext cx="3282696" cy="749808"/>
           </a:xfrm>
           <a:prstGeom prst="rect">
             <a:avLst/>
@@ -6156,7 +6160,7 @@
               <a:buNone/>
             </a:pPr>
             <a:r>
-              <a:rPr lang="en-US" sz="1320" dirty="0">
+              <a:rPr lang="en-US" sz="1220" dirty="0">
                 <a:solidFill>
                   <a:srgbClr val="17364A"/>
                 </a:solidFill>
@@ -6166,7 +6170,7 @@
               </a:rPr>
               <a:t>Recommended guardrails include the following:</a:t>
             </a:r>
-            <a:endParaRPr lang="en-US" sz="1320" dirty="0"/>
+            <a:endParaRPr lang="en-US" sz="1220" dirty="0"/>
           </a:p>
         </p:txBody>
       </p:sp>
@@ -6178,12 +6182,12 @@
         </p:nvSpPr>
         <p:spPr>
           <a:xfrm>
-            <a:off x="7635240" y="2670048"/>
-            <a:ext cx="3474720" cy="1536192"/>
+            <a:off x="7543800" y="2724912"/>
+            <a:ext cx="3611880" cy="1527048"/>
           </a:xfrm>
           <a:prstGeom prst="roundRect">
             <a:avLst>
-              <a:gd name="adj" fmla="val 7143"/>
+              <a:gd name="adj" fmla="val 7186"/>
             </a:avLst>
           </a:prstGeom>
           <a:solidFill>
@@ -6205,8 +6209,8 @@
         </p:nvSpPr>
         <p:spPr>
           <a:xfrm>
-            <a:off x="7799832" y="2816352"/>
-            <a:ext cx="3145536" cy="256032"/>
+            <a:off x="7708392" y="2852928"/>
+            <a:ext cx="3282696" cy="228600"/>
           </a:xfrm>
           <a:prstGeom prst="rect">
             <a:avLst/>
@@ -6222,7 +6226,7 @@
               <a:buNone/>
             </a:pPr>
             <a:r>
-              <a:rPr lang="en-US" sz="1300" b="1" dirty="0">
+              <a:rPr lang="en-US" sz="1220" b="1" dirty="0">
                 <a:solidFill>
                   <a:srgbClr val="0068B7"/>
                 </a:solidFill>
@@ -6232,7 +6236,7 @@
               </a:rPr>
               <a:t>Concept checkpoints</a:t>
             </a:r>
-            <a:endParaRPr lang="en-US" sz="1300" dirty="0"/>
+            <a:endParaRPr lang="en-US" sz="1220" dirty="0"/>
           </a:p>
         </p:txBody>
       </p:sp>
@@ -6244,8 +6248,8 @@
         </p:nvSpPr>
         <p:spPr>
           <a:xfrm>
-            <a:off x="7818120" y="3182112"/>
-            <a:ext cx="3090672" cy="877824"/>
+            <a:off x="7726680" y="3182112"/>
+            <a:ext cx="3227832" cy="960120"/>
           </a:xfrm>
           <a:prstGeom prst="rect">
             <a:avLst/>
@@ -6263,7 +6267,7 @@
               <a:buNone/>
             </a:pPr>
             <a:r>
-              <a:rPr lang="en-US" sz="1220" dirty="0">
+              <a:rPr lang="en-US" sz="1140" dirty="0">
                 <a:solidFill>
                   <a:srgbClr val="17364A"/>
                 </a:solidFill>
@@ -6273,14 +6277,14 @@
               </a:rPr>
               <a:t>Recommended guardrails include the following:</a:t>
             </a:r>
-            <a:endParaRPr lang="en-US" sz="1220" dirty="0"/>
-          </a:p>
-          <a:p>
-            <a:pPr indent="0" marL="0">
-              <a:buNone/>
-            </a:pPr>
-            <a:r>
-              <a:rPr lang="en-US" sz="1220" dirty="0">
+            <a:endParaRPr lang="en-US" sz="1140" dirty="0"/>
+          </a:p>
+          <a:p>
+            <a:pPr indent="0" marL="0">
+              <a:buNone/>
+            </a:pPr>
+            <a:r>
+              <a:rPr lang="en-US" sz="1140" dirty="0">
                 <a:solidFill>
                   <a:srgbClr val="17364A"/>
                 </a:solidFill>
@@ -6288,16 +6292,16 @@
                 <a:ea typeface="Aptos" pitchFamily="34" charset="-122"/>
                 <a:cs typeface="Aptos" pitchFamily="34" charset="-120"/>
               </a:rPr>
-              <a:t>Maintain an AI evidence inventory for each approved AI use.</a:t>
-            </a:r>
-            <a:endParaRPr lang="en-US" sz="1220" dirty="0"/>
-          </a:p>
-          <a:p>
-            <a:pPr indent="0" marL="0">
-              <a:buNone/>
-            </a:pPr>
-            <a:r>
-              <a:rPr lang="en-US" sz="1220" dirty="0">
+              <a:t>Maintain an AI evidence inventory for each.</a:t>
+            </a:r>
+            <a:endParaRPr lang="en-US" sz="1140" dirty="0"/>
+          </a:p>
+          <a:p>
+            <a:pPr indent="0" marL="0">
+              <a:buNone/>
+            </a:pPr>
+            <a:r>
+              <a:rPr lang="en-US" sz="1140" dirty="0">
                 <a:solidFill>
                   <a:srgbClr val="17364A"/>
                 </a:solidFill>
@@ -6305,9 +6309,9 @@
                 <a:ea typeface="Aptos" pitchFamily="34" charset="-122"/>
                 <a:cs typeface="Aptos" pitchFamily="34" charset="-120"/>
               </a:rPr>
-              <a:t>Use decision logs for approvals, deferrals, conditions, changes,.</a:t>
-            </a:r>
-            <a:endParaRPr lang="en-US" sz="1220" dirty="0"/>
+              <a:t>Use decision logs for approvals, deferrals,.</a:t>
+            </a:r>
+            <a:endParaRPr lang="en-US" sz="1140" dirty="0"/>
           </a:p>
         </p:txBody>
       </p:sp>
@@ -6319,12 +6323,12 @@
         </p:nvSpPr>
         <p:spPr>
           <a:xfrm>
-            <a:off x="7635240" y="4343400"/>
-            <a:ext cx="3474720" cy="1255471"/>
+            <a:off x="7543800" y="4389120"/>
+            <a:ext cx="3611880" cy="1261872"/>
           </a:xfrm>
           <a:prstGeom prst="roundRect">
             <a:avLst>
-              <a:gd name="adj" fmla="val 8740"/>
+              <a:gd name="adj" fmla="val 8696"/>
             </a:avLst>
           </a:prstGeom>
           <a:solidFill>
@@ -6346,8 +6350,8 @@
         </p:nvSpPr>
         <p:spPr>
           <a:xfrm>
-            <a:off x="7799832" y="4489704"/>
-            <a:ext cx="3145536" cy="256032"/>
+            <a:off x="7708392" y="4517136"/>
+            <a:ext cx="3282696" cy="228600"/>
           </a:xfrm>
           <a:prstGeom prst="rect">
             <a:avLst/>
@@ -6363,7 +6367,7 @@
               <a:buNone/>
             </a:pPr>
             <a:r>
-              <a:rPr lang="en-US" sz="1300" b="1" dirty="0">
+              <a:rPr lang="en-US" sz="1220" b="1" dirty="0">
                 <a:solidFill>
                   <a:srgbClr val="0068B7"/>
                 </a:solidFill>
@@ -6373,7 +6377,7 @@
               </a:rPr>
               <a:t>Safeguard to plan</a:t>
             </a:r>
-            <a:endParaRPr lang="en-US" sz="1300" dirty="0"/>
+            <a:endParaRPr lang="en-US" sz="1220" dirty="0"/>
           </a:p>
         </p:txBody>
       </p:sp>
@@ -6385,8 +6389,8 @@
         </p:nvSpPr>
         <p:spPr>
           <a:xfrm>
-            <a:off x="7799832" y="4818888"/>
-            <a:ext cx="3145536" cy="688543"/>
+            <a:off x="7708392" y="4828032"/>
+            <a:ext cx="3282696" cy="749808"/>
           </a:xfrm>
           <a:prstGeom prst="rect">
             <a:avLst/>
@@ -6404,7 +6408,7 @@
               <a:buNone/>
             </a:pPr>
             <a:r>
-              <a:rPr lang="en-US" sz="1320" dirty="0">
+              <a:rPr lang="en-US" sz="1220" dirty="0">
                 <a:solidFill>
                   <a:srgbClr val="17364A"/>
                 </a:solidFill>
@@ -6412,9 +6416,9 @@
                 <a:ea typeface="Aptos" pitchFamily="34" charset="-122"/>
                 <a:cs typeface="Aptos" pitchFamily="34" charset="-120"/>
               </a:rPr>
-              <a:t>Identify what could go wrong, who could be affected, what safeguards are needed, and what evidence should be reviewed before use.</a:t>
-            </a:r>
-            <a:endParaRPr lang="en-US" sz="1320" dirty="0"/>
+              <a:t>Identify what could go wrong, who could be affected, what safeguards are needed,.</a:t>
+            </a:r>
+            <a:endParaRPr lang="en-US" sz="1220" dirty="0"/>
           </a:p>
         </p:txBody>
       </p:sp>
@@ -6705,8 +6709,8 @@
         </p:nvSpPr>
         <p:spPr>
           <a:xfrm>
-            <a:off x="868680" y="1508760"/>
-            <a:ext cx="6309360" cy="4160520"/>
+            <a:off x="822960" y="1463040"/>
+            <a:ext cx="6565392" cy="4343400"/>
           </a:xfrm>
           <a:prstGeom prst="rect">
             <a:avLst/>
@@ -6724,7 +6728,7 @@
               <a:buNone/>
             </a:pPr>
             <a:r>
-              <a:rPr lang="en-US" sz="2100" dirty="0">
+              <a:rPr lang="en-US" sz="1920" dirty="0">
                 <a:solidFill>
                   <a:srgbClr val="003A63"/>
                 </a:solidFill>
@@ -6734,14 +6738,14 @@
               </a:rPr>
               <a:t>• Preserve validation, testing, monitoring, training, SOP, and incident records.</a:t>
             </a:r>
-            <a:endParaRPr lang="en-US" sz="2100" dirty="0"/>
-          </a:p>
-          <a:p>
-            <a:pPr indent="0" marL="0">
-              <a:buNone/>
-            </a:pPr>
-            <a:r>
-              <a:rPr lang="en-US" sz="2100" dirty="0">
+            <a:endParaRPr lang="en-US" sz="1920" dirty="0"/>
+          </a:p>
+          <a:p>
+            <a:pPr indent="0" marL="0">
+              <a:buNone/>
+            </a:pPr>
+            <a:r>
+              <a:rPr lang="en-US" sz="1920" dirty="0">
                 <a:solidFill>
                   <a:srgbClr val="003A63"/>
                 </a:solidFill>
@@ -6751,14 +6755,14 @@
               </a:rPr>
               <a:t>• Assign artifact ownership and retention expectations.</a:t>
             </a:r>
-            <a:endParaRPr lang="en-US" sz="2100" dirty="0"/>
-          </a:p>
-          <a:p>
-            <a:pPr indent="0" marL="0">
-              <a:buNone/>
-            </a:pPr>
-            <a:r>
-              <a:rPr lang="en-US" sz="2100" dirty="0">
+            <a:endParaRPr lang="en-US" sz="1920" dirty="0"/>
+          </a:p>
+          <a:p>
+            <a:pPr indent="0" marL="0">
+              <a:buNone/>
+            </a:pPr>
+            <a:r>
+              <a:rPr lang="en-US" sz="1920" dirty="0">
                 <a:solidFill>
                   <a:srgbClr val="003A63"/>
                 </a:solidFill>
@@ -6768,7 +6772,7 @@
               </a:rPr>
               <a:t>• Review evidence completeness during periodic governance review.</a:t>
             </a:r>
-            <a:endParaRPr lang="en-US" sz="2100" dirty="0"/>
+            <a:endParaRPr lang="en-US" sz="1920" dirty="0"/>
           </a:p>
         </p:txBody>
       </p:sp>
@@ -6780,12 +6784,12 @@
         </p:nvSpPr>
         <p:spPr>
           <a:xfrm>
-            <a:off x="7635240" y="1325880"/>
-            <a:ext cx="3474720" cy="1207008"/>
+            <a:off x="7543800" y="1325880"/>
+            <a:ext cx="3611880" cy="1261872"/>
           </a:xfrm>
           <a:prstGeom prst="roundRect">
             <a:avLst>
-              <a:gd name="adj" fmla="val 9091"/>
+              <a:gd name="adj" fmla="val 8696"/>
             </a:avLst>
           </a:prstGeom>
           <a:solidFill>
@@ -6807,8 +6811,8 @@
         </p:nvSpPr>
         <p:spPr>
           <a:xfrm>
-            <a:off x="7799832" y="1472184"/>
-            <a:ext cx="3145536" cy="256032"/>
+            <a:off x="7708392" y="1453896"/>
+            <a:ext cx="3282696" cy="228600"/>
           </a:xfrm>
           <a:prstGeom prst="rect">
             <a:avLst/>
@@ -6824,7 +6828,7 @@
               <a:buNone/>
             </a:pPr>
             <a:r>
-              <a:rPr lang="en-US" sz="1300" b="1" dirty="0">
+              <a:rPr lang="en-US" sz="1220" b="1" dirty="0">
                 <a:solidFill>
                   <a:srgbClr val="0068B7"/>
                 </a:solidFill>
@@ -6834,7 +6838,7 @@
               </a:rPr>
               <a:t>Risk check</a:t>
             </a:r>
-            <a:endParaRPr lang="en-US" sz="1300" dirty="0"/>
+            <a:endParaRPr lang="en-US" sz="1220" dirty="0"/>
           </a:p>
         </p:txBody>
       </p:sp>
@@ -6846,8 +6850,8 @@
         </p:nvSpPr>
         <p:spPr>
           <a:xfrm>
-            <a:off x="7799832" y="1801368"/>
-            <a:ext cx="3145536" cy="640080"/>
+            <a:off x="7708392" y="1764792"/>
+            <a:ext cx="3282696" cy="749808"/>
           </a:xfrm>
           <a:prstGeom prst="rect">
             <a:avLst/>
@@ -6865,7 +6869,7 @@
               <a:buNone/>
             </a:pPr>
             <a:r>
-              <a:rPr lang="en-US" sz="1320" dirty="0">
+              <a:rPr lang="en-US" sz="1220" dirty="0">
                 <a:solidFill>
                   <a:srgbClr val="17364A"/>
                 </a:solidFill>
@@ -6875,7 +6879,7 @@
               </a:rPr>
               <a:t>Preserve validation, testing, monitoring, training, SOP, and incident records.</a:t>
             </a:r>
-            <a:endParaRPr lang="en-US" sz="1320" dirty="0"/>
+            <a:endParaRPr lang="en-US" sz="1220" dirty="0"/>
           </a:p>
         </p:txBody>
       </p:sp>
@@ -6887,12 +6891,12 @@
         </p:nvSpPr>
         <p:spPr>
           <a:xfrm>
-            <a:off x="7635240" y="2670048"/>
-            <a:ext cx="3474720" cy="1536192"/>
+            <a:off x="7543800" y="2724912"/>
+            <a:ext cx="3611880" cy="1527048"/>
           </a:xfrm>
           <a:prstGeom prst="roundRect">
             <a:avLst>
-              <a:gd name="adj" fmla="val 7143"/>
+              <a:gd name="adj" fmla="val 7186"/>
             </a:avLst>
           </a:prstGeom>
           <a:solidFill>
@@ -6914,8 +6918,8 @@
         </p:nvSpPr>
         <p:spPr>
           <a:xfrm>
-            <a:off x="7799832" y="2816352"/>
-            <a:ext cx="3145536" cy="256032"/>
+            <a:off x="7708392" y="2852928"/>
+            <a:ext cx="3282696" cy="228600"/>
           </a:xfrm>
           <a:prstGeom prst="rect">
             <a:avLst/>
@@ -6931,7 +6935,7 @@
               <a:buNone/>
             </a:pPr>
             <a:r>
-              <a:rPr lang="en-US" sz="1300" b="1" dirty="0">
+              <a:rPr lang="en-US" sz="1220" b="1" dirty="0">
                 <a:solidFill>
                   <a:srgbClr val="0068B7"/>
                 </a:solidFill>
@@ -6941,7 +6945,7 @@
               </a:rPr>
               <a:t>Concept checkpoints</a:t>
             </a:r>
-            <a:endParaRPr lang="en-US" sz="1300" dirty="0"/>
+            <a:endParaRPr lang="en-US" sz="1220" dirty="0"/>
           </a:p>
         </p:txBody>
       </p:sp>
@@ -6953,8 +6957,8 @@
         </p:nvSpPr>
         <p:spPr>
           <a:xfrm>
-            <a:off x="7818120" y="3182112"/>
-            <a:ext cx="3090672" cy="877824"/>
+            <a:off x="7726680" y="3182112"/>
+            <a:ext cx="3227832" cy="960120"/>
           </a:xfrm>
           <a:prstGeom prst="rect">
             <a:avLst/>
@@ -6972,7 +6976,7 @@
               <a:buNone/>
             </a:pPr>
             <a:r>
-              <a:rPr lang="en-US" sz="1220" dirty="0">
+              <a:rPr lang="en-US" sz="1140" dirty="0">
                 <a:solidFill>
                   <a:srgbClr val="17364A"/>
                 </a:solidFill>
@@ -6980,16 +6984,16 @@
                 <a:ea typeface="Aptos" pitchFamily="34" charset="-122"/>
                 <a:cs typeface="Aptos" pitchFamily="34" charset="-120"/>
               </a:rPr>
-              <a:t>Preserve validation, testing, monitoring, training, SOP, and.</a:t>
-            </a:r>
-            <a:endParaRPr lang="en-US" sz="1220" dirty="0"/>
-          </a:p>
-          <a:p>
-            <a:pPr indent="0" marL="0">
-              <a:buNone/>
-            </a:pPr>
-            <a:r>
-              <a:rPr lang="en-US" sz="1220" dirty="0">
+              <a:t>Preserve validation, testing, monitoring,.</a:t>
+            </a:r>
+            <a:endParaRPr lang="en-US" sz="1140" dirty="0"/>
+          </a:p>
+          <a:p>
+            <a:pPr indent="0" marL="0">
+              <a:buNone/>
+            </a:pPr>
+            <a:r>
+              <a:rPr lang="en-US" sz="1140" dirty="0">
                 <a:solidFill>
                   <a:srgbClr val="17364A"/>
                 </a:solidFill>
@@ -6997,16 +7001,16 @@
                 <a:ea typeface="Aptos" pitchFamily="34" charset="-122"/>
                 <a:cs typeface="Aptos" pitchFamily="34" charset="-120"/>
               </a:rPr>
-              <a:t>Assign artifact ownership and retention expectations.</a:t>
-            </a:r>
-            <a:endParaRPr lang="en-US" sz="1220" dirty="0"/>
-          </a:p>
-          <a:p>
-            <a:pPr indent="0" marL="0">
-              <a:buNone/>
-            </a:pPr>
-            <a:r>
-              <a:rPr lang="en-US" sz="1220" dirty="0">
+              <a:t>Assign artifact ownership and retention.</a:t>
+            </a:r>
+            <a:endParaRPr lang="en-US" sz="1140" dirty="0"/>
+          </a:p>
+          <a:p>
+            <a:pPr indent="0" marL="0">
+              <a:buNone/>
+            </a:pPr>
+            <a:r>
+              <a:rPr lang="en-US" sz="1140" dirty="0">
                 <a:solidFill>
                   <a:srgbClr val="17364A"/>
                 </a:solidFill>
@@ -7014,9 +7018,9 @@
                 <a:ea typeface="Aptos" pitchFamily="34" charset="-122"/>
                 <a:cs typeface="Aptos" pitchFamily="34" charset="-120"/>
               </a:rPr>
-              <a:t>Review evidence completeness during periodic governance review.</a:t>
-            </a:r>
-            <a:endParaRPr lang="en-US" sz="1220" dirty="0"/>
+              <a:t>Review evidence completeness during periodic.</a:t>
+            </a:r>
+            <a:endParaRPr lang="en-US" sz="1140" dirty="0"/>
           </a:p>
         </p:txBody>
       </p:sp>
@@ -7028,12 +7032,12 @@
         </p:nvSpPr>
         <p:spPr>
           <a:xfrm>
-            <a:off x="7635240" y="4343400"/>
-            <a:ext cx="3474720" cy="1255471"/>
+            <a:off x="7543800" y="4389120"/>
+            <a:ext cx="3611880" cy="1261872"/>
           </a:xfrm>
           <a:prstGeom prst="roundRect">
             <a:avLst>
-              <a:gd name="adj" fmla="val 8740"/>
+              <a:gd name="adj" fmla="val 8696"/>
             </a:avLst>
           </a:prstGeom>
           <a:solidFill>
@@ -7055,8 +7059,8 @@
         </p:nvSpPr>
         <p:spPr>
           <a:xfrm>
-            <a:off x="7799832" y="4489704"/>
-            <a:ext cx="3145536" cy="256032"/>
+            <a:off x="7708392" y="4517136"/>
+            <a:ext cx="3282696" cy="228600"/>
           </a:xfrm>
           <a:prstGeom prst="rect">
             <a:avLst/>
@@ -7072,7 +7076,7 @@
               <a:buNone/>
             </a:pPr>
             <a:r>
-              <a:rPr lang="en-US" sz="1300" b="1" dirty="0">
+              <a:rPr lang="en-US" sz="1220" b="1" dirty="0">
                 <a:solidFill>
                   <a:srgbClr val="0068B7"/>
                 </a:solidFill>
@@ -7082,7 +7086,7 @@
               </a:rPr>
               <a:t>Safeguard to plan</a:t>
             </a:r>
-            <a:endParaRPr lang="en-US" sz="1300" dirty="0"/>
+            <a:endParaRPr lang="en-US" sz="1220" dirty="0"/>
           </a:p>
         </p:txBody>
       </p:sp>
@@ -7094,8 +7098,8 @@
         </p:nvSpPr>
         <p:spPr>
           <a:xfrm>
-            <a:off x="7799832" y="4818888"/>
-            <a:ext cx="3145536" cy="688543"/>
+            <a:off x="7708392" y="4828032"/>
+            <a:ext cx="3282696" cy="749808"/>
           </a:xfrm>
           <a:prstGeom prst="rect">
             <a:avLst/>
@@ -7113,7 +7117,7 @@
               <a:buNone/>
             </a:pPr>
             <a:r>
-              <a:rPr lang="en-US" sz="1320" dirty="0">
+              <a:rPr lang="en-US" sz="1220" dirty="0">
                 <a:solidFill>
                   <a:srgbClr val="17364A"/>
                 </a:solidFill>
@@ -7121,9 +7125,9 @@
                 <a:ea typeface="Aptos" pitchFamily="34" charset="-122"/>
                 <a:cs typeface="Aptos" pitchFamily="34" charset="-120"/>
               </a:rPr>
-              <a:t>Identify what could go wrong, who could be affected, what safeguards are needed, and what evidence should be reviewed before use.</a:t>
-            </a:r>
-            <a:endParaRPr lang="en-US" sz="1320" dirty="0"/>
+              <a:t>Identify what could go wrong, who could be affected, what safeguards are needed,.</a:t>
+            </a:r>
+            <a:endParaRPr lang="en-US" sz="1220" dirty="0"/>
           </a:p>
         </p:txBody>
       </p:sp>
@@ -7414,8 +7418,8 @@
         </p:nvSpPr>
         <p:spPr>
           <a:xfrm>
-            <a:off x="868680" y="1508760"/>
-            <a:ext cx="6309360" cy="4160520"/>
+            <a:off x="822960" y="1463040"/>
+            <a:ext cx="6565392" cy="4343400"/>
           </a:xfrm>
           <a:prstGeom prst="rect">
             <a:avLst/>
@@ -7433,7 +7437,7 @@
               <a:buNone/>
             </a:pPr>
             <a:r>
-              <a:rPr lang="en-US" sz="2100" dirty="0">
+              <a:rPr lang="en-US" sz="1920" dirty="0">
                 <a:solidFill>
                   <a:srgbClr val="003A63"/>
                 </a:solidFill>
@@ -7443,14 +7447,14 @@
               </a:rPr>
               <a:t>• Where does this topic appear in your agency, program, or workflow?</a:t>
             </a:r>
-            <a:endParaRPr lang="en-US" sz="2100" dirty="0"/>
-          </a:p>
-          <a:p>
-            <a:pPr indent="0" marL="0">
-              <a:buNone/>
-            </a:pPr>
-            <a:r>
-              <a:rPr lang="en-US" sz="2100" dirty="0">
+            <a:endParaRPr lang="en-US" sz="1920" dirty="0"/>
+          </a:p>
+          <a:p>
+            <a:pPr indent="0" marL="0">
+              <a:buNone/>
+            </a:pPr>
+            <a:r>
+              <a:rPr lang="en-US" sz="1920" dirty="0">
                 <a:solidFill>
                   <a:srgbClr val="003A63"/>
                 </a:solidFill>
@@ -7458,16 +7462,16 @@
                 <a:ea typeface="Aptos" pitchFamily="34" charset="-122"/>
                 <a:cs typeface="Aptos" pitchFamily="34" charset="-120"/>
               </a:rPr>
-              <a:t>• Which staff roles would need to understand or apply this concept before AI use is approved?</a:t>
-            </a:r>
-            <a:endParaRPr lang="en-US" sz="2100" dirty="0"/>
-          </a:p>
-          <a:p>
-            <a:pPr indent="0" marL="0">
-              <a:buNone/>
-            </a:pPr>
-            <a:r>
-              <a:rPr lang="en-US" sz="2100" dirty="0">
+              <a:t>• Which staff roles would need to understand or apply this concept before AI.</a:t>
+            </a:r>
+            <a:endParaRPr lang="en-US" sz="1920" dirty="0"/>
+          </a:p>
+          <a:p>
+            <a:pPr indent="0" marL="0">
+              <a:buNone/>
+            </a:pPr>
+            <a:r>
+              <a:rPr lang="en-US" sz="1920" dirty="0">
                 <a:solidFill>
                   <a:srgbClr val="003A63"/>
                 </a:solidFill>
@@ -7477,7 +7481,7 @@
               </a:rPr>
               <a:t>• What could go wrong if this topic is not addressed before implementation?</a:t>
             </a:r>
-            <a:endParaRPr lang="en-US" sz="2100" dirty="0"/>
+            <a:endParaRPr lang="en-US" sz="1920" dirty="0"/>
           </a:p>
         </p:txBody>
       </p:sp>
@@ -7489,12 +7493,12 @@
         </p:nvSpPr>
         <p:spPr>
           <a:xfrm>
-            <a:off x="7635240" y="1325880"/>
-            <a:ext cx="3474720" cy="1207008"/>
+            <a:off x="7543800" y="1325880"/>
+            <a:ext cx="3611880" cy="1261872"/>
           </a:xfrm>
           <a:prstGeom prst="roundRect">
             <a:avLst>
-              <a:gd name="adj" fmla="val 9091"/>
+              <a:gd name="adj" fmla="val 8696"/>
             </a:avLst>
           </a:prstGeom>
           <a:solidFill>
@@ -7516,8 +7520,8 @@
         </p:nvSpPr>
         <p:spPr>
           <a:xfrm>
-            <a:off x="7799832" y="1472184"/>
-            <a:ext cx="3145536" cy="256032"/>
+            <a:off x="7708392" y="1453896"/>
+            <a:ext cx="3282696" cy="228600"/>
           </a:xfrm>
           <a:prstGeom prst="rect">
             <a:avLst/>
@@ -7533,7 +7537,7 @@
               <a:buNone/>
             </a:pPr>
             <a:r>
-              <a:rPr lang="en-US" sz="1300" b="1" dirty="0">
+              <a:rPr lang="en-US" sz="1220" b="1" dirty="0">
                 <a:solidFill>
                   <a:srgbClr val="0068B7"/>
                 </a:solidFill>
@@ -7543,7 +7547,7 @@
               </a:rPr>
               <a:t>Core concept</a:t>
             </a:r>
-            <a:endParaRPr lang="en-US" sz="1300" dirty="0"/>
+            <a:endParaRPr lang="en-US" sz="1220" dirty="0"/>
           </a:p>
         </p:txBody>
       </p:sp>
@@ -7555,8 +7559,8 @@
         </p:nvSpPr>
         <p:spPr>
           <a:xfrm>
-            <a:off x="7799832" y="1801368"/>
-            <a:ext cx="3145536" cy="640080"/>
+            <a:off x="7708392" y="1764792"/>
+            <a:ext cx="3282696" cy="749808"/>
           </a:xfrm>
           <a:prstGeom prst="rect">
             <a:avLst/>
@@ -7574,7 +7578,7 @@
               <a:buNone/>
             </a:pPr>
             <a:r>
-              <a:rPr lang="en-US" sz="1320" dirty="0">
+              <a:rPr lang="en-US" sz="1220" dirty="0">
                 <a:solidFill>
                   <a:srgbClr val="17364A"/>
                 </a:solidFill>
@@ -7584,7 +7588,7 @@
               </a:rPr>
               <a:t>Where does this topic appear in your agency, program, or workflow?</a:t>
             </a:r>
-            <a:endParaRPr lang="en-US" sz="1320" dirty="0"/>
+            <a:endParaRPr lang="en-US" sz="1220" dirty="0"/>
           </a:p>
         </p:txBody>
       </p:sp>
@@ -7596,12 +7600,12 @@
         </p:nvSpPr>
         <p:spPr>
           <a:xfrm>
-            <a:off x="7635240" y="2670048"/>
-            <a:ext cx="3474720" cy="1377086"/>
+            <a:off x="7543800" y="2724912"/>
+            <a:ext cx="3611880" cy="1527048"/>
           </a:xfrm>
           <a:prstGeom prst="roundRect">
             <a:avLst>
-              <a:gd name="adj" fmla="val 7968"/>
+              <a:gd name="adj" fmla="val 7186"/>
             </a:avLst>
           </a:prstGeom>
           <a:solidFill>
@@ -7623,8 +7627,8 @@
         </p:nvSpPr>
         <p:spPr>
           <a:xfrm>
-            <a:off x="7799832" y="2816352"/>
-            <a:ext cx="3145536" cy="256032"/>
+            <a:off x="7708392" y="2852928"/>
+            <a:ext cx="3282696" cy="228600"/>
           </a:xfrm>
           <a:prstGeom prst="rect">
             <a:avLst/>
@@ -7640,7 +7644,7 @@
               <a:buNone/>
             </a:pPr>
             <a:r>
-              <a:rPr lang="en-US" sz="1300" b="1" dirty="0">
+              <a:rPr lang="en-US" sz="1220" b="1" dirty="0">
                 <a:solidFill>
                   <a:srgbClr val="0068B7"/>
                 </a:solidFill>
@@ -7650,7 +7654,7 @@
               </a:rPr>
               <a:t>Concept checkpoints</a:t>
             </a:r>
-            <a:endParaRPr lang="en-US" sz="1300" dirty="0"/>
+            <a:endParaRPr lang="en-US" sz="1220" dirty="0"/>
           </a:p>
         </p:txBody>
       </p:sp>
@@ -7662,8 +7666,8 @@
         </p:nvSpPr>
         <p:spPr>
           <a:xfrm>
-            <a:off x="7818120" y="3182112"/>
-            <a:ext cx="3090672" cy="718718"/>
+            <a:off x="7726680" y="3182112"/>
+            <a:ext cx="3227832" cy="960120"/>
           </a:xfrm>
           <a:prstGeom prst="rect">
             <a:avLst/>
@@ -7681,7 +7685,7 @@
               <a:buNone/>
             </a:pPr>
             <a:r>
-              <a:rPr lang="en-US" sz="1220" dirty="0">
+              <a:rPr lang="en-US" sz="1140" dirty="0">
                 <a:solidFill>
                   <a:srgbClr val="17364A"/>
                 </a:solidFill>
@@ -7689,16 +7693,16 @@
                 <a:ea typeface="Aptos" pitchFamily="34" charset="-122"/>
                 <a:cs typeface="Aptos" pitchFamily="34" charset="-120"/>
               </a:rPr>
-              <a:t>Where does this topic appear in your agency, program, or workflow?</a:t>
-            </a:r>
-            <a:endParaRPr lang="en-US" sz="1220" dirty="0"/>
-          </a:p>
-          <a:p>
-            <a:pPr indent="0" marL="0">
-              <a:buNone/>
-            </a:pPr>
-            <a:r>
-              <a:rPr lang="en-US" sz="1220" dirty="0">
+              <a:t>Where does this topic appear in your agency,.</a:t>
+            </a:r>
+            <a:endParaRPr lang="en-US" sz="1140" dirty="0"/>
+          </a:p>
+          <a:p>
+            <a:pPr indent="0" marL="0">
+              <a:buNone/>
+            </a:pPr>
+            <a:r>
+              <a:rPr lang="en-US" sz="1140" dirty="0">
                 <a:solidFill>
                   <a:srgbClr val="17364A"/>
                 </a:solidFill>
@@ -7706,16 +7710,16 @@
                 <a:ea typeface="Aptos" pitchFamily="34" charset="-122"/>
                 <a:cs typeface="Aptos" pitchFamily="34" charset="-120"/>
               </a:rPr>
-              <a:t>Which staff roles would need to understand or apply this concept.</a:t>
-            </a:r>
-            <a:endParaRPr lang="en-US" sz="1220" dirty="0"/>
-          </a:p>
-          <a:p>
-            <a:pPr indent="0" marL="0">
-              <a:buNone/>
-            </a:pPr>
-            <a:r>
-              <a:rPr lang="en-US" sz="1220" dirty="0">
+              <a:t>Which staff roles would need to understand or.</a:t>
+            </a:r>
+            <a:endParaRPr lang="en-US" sz="1140" dirty="0"/>
+          </a:p>
+          <a:p>
+            <a:pPr indent="0" marL="0">
+              <a:buNone/>
+            </a:pPr>
+            <a:r>
+              <a:rPr lang="en-US" sz="1140" dirty="0">
                 <a:solidFill>
                   <a:srgbClr val="17364A"/>
                 </a:solidFill>
@@ -7723,9 +7727,9 @@
                 <a:ea typeface="Aptos" pitchFamily="34" charset="-122"/>
                 <a:cs typeface="Aptos" pitchFamily="34" charset="-120"/>
               </a:rPr>
-              <a:t>What could go wrong if this topic is not addressed before.</a:t>
-            </a:r>
-            <a:endParaRPr lang="en-US" sz="1220" dirty="0"/>
+              <a:t>What could go wrong if this topic is not addressed.</a:t>
+            </a:r>
+            <a:endParaRPr lang="en-US" sz="1140" dirty="0"/>
           </a:p>
         </p:txBody>
       </p:sp>
@@ -7737,12 +7741,12 @@
         </p:nvSpPr>
         <p:spPr>
           <a:xfrm>
-            <a:off x="7635240" y="4184294"/>
-            <a:ext cx="3474720" cy="1466698"/>
+            <a:off x="7543800" y="4389120"/>
+            <a:ext cx="3611880" cy="1261872"/>
           </a:xfrm>
           <a:prstGeom prst="roundRect">
             <a:avLst>
-              <a:gd name="adj" fmla="val 7481"/>
+              <a:gd name="adj" fmla="val 8696"/>
             </a:avLst>
           </a:prstGeom>
           <a:solidFill>
@@ -7764,8 +7768,8 @@
         </p:nvSpPr>
         <p:spPr>
           <a:xfrm>
-            <a:off x="7799832" y="4330598"/>
-            <a:ext cx="3145536" cy="256032"/>
+            <a:off x="7708392" y="4517136"/>
+            <a:ext cx="3282696" cy="228600"/>
           </a:xfrm>
           <a:prstGeom prst="rect">
             <a:avLst/>
@@ -7781,7 +7785,7 @@
               <a:buNone/>
             </a:pPr>
             <a:r>
-              <a:rPr lang="en-US" sz="1300" b="1" dirty="0">
+              <a:rPr lang="en-US" sz="1220" b="1" dirty="0">
                 <a:solidFill>
                   <a:srgbClr val="0068B7"/>
                 </a:solidFill>
@@ -7791,7 +7795,7 @@
               </a:rPr>
               <a:t>Apply it</a:t>
             </a:r>
-            <a:endParaRPr lang="en-US" sz="1300" dirty="0"/>
+            <a:endParaRPr lang="en-US" sz="1220" dirty="0"/>
           </a:p>
         </p:txBody>
       </p:sp>
@@ -7803,8 +7807,8 @@
         </p:nvSpPr>
         <p:spPr>
           <a:xfrm>
-            <a:off x="7799832" y="4659782"/>
-            <a:ext cx="3145536" cy="899770"/>
+            <a:off x="7708392" y="4828032"/>
+            <a:ext cx="3282696" cy="749808"/>
           </a:xfrm>
           <a:prstGeom prst="rect">
             <a:avLst/>
@@ -7822,7 +7826,7 @@
               <a:buNone/>
             </a:pPr>
             <a:r>
-              <a:rPr lang="en-US" sz="1320" dirty="0">
+              <a:rPr lang="en-US" sz="1220" dirty="0">
                 <a:solidFill>
                   <a:srgbClr val="17364A"/>
                 </a:solidFill>
@@ -7830,9 +7834,9 @@
                 <a:ea typeface="Aptos" pitchFamily="34" charset="-122"/>
                 <a:cs typeface="Aptos" pitchFamily="34" charset="-120"/>
               </a:rPr>
-              <a:t>Connect the concept to public health purpose, responsible use, required safeguards, documentation, and the next action a department should take.</a:t>
-            </a:r>
-            <a:endParaRPr lang="en-US" sz="1320" dirty="0"/>
+              <a:t>Connect the concept to public health purpose, responsible use, required.</a:t>
+            </a:r>
+            <a:endParaRPr lang="en-US" sz="1220" dirty="0"/>
           </a:p>
         </p:txBody>
       </p:sp>
@@ -8123,8 +8127,8 @@
         </p:nvSpPr>
         <p:spPr>
           <a:xfrm>
-            <a:off x="868680" y="1508760"/>
-            <a:ext cx="6309360" cy="4160520"/>
+            <a:off x="822960" y="1463040"/>
+            <a:ext cx="6565392" cy="4343400"/>
           </a:xfrm>
           <a:prstGeom prst="rect">
             <a:avLst/>
@@ -8142,7 +8146,7 @@
               <a:buNone/>
             </a:pPr>
             <a:r>
-              <a:rPr lang="en-US" sz="2100" dirty="0">
+              <a:rPr lang="en-US" sz="1920" dirty="0">
                 <a:solidFill>
                   <a:srgbClr val="003A63"/>
                 </a:solidFill>
@@ -8150,16 +8154,16 @@
                 <a:ea typeface="Aptos" pitchFamily="34" charset="-122"/>
                 <a:cs typeface="Aptos" pitchFamily="34" charset="-120"/>
               </a:rPr>
-              <a:t>• What evidence would governance, leadership, or operations staff need before moving forward?</a:t>
-            </a:r>
-            <a:endParaRPr lang="en-US" sz="2100" dirty="0"/>
-          </a:p>
-          <a:p>
-            <a:pPr indent="0" marL="0">
-              <a:buNone/>
-            </a:pPr>
-            <a:r>
-              <a:rPr lang="en-US" sz="2100" dirty="0">
+              <a:t>• What evidence would governance, leadership, or operations staff need before.</a:t>
+            </a:r>
+            <a:endParaRPr lang="en-US" sz="1920" dirty="0"/>
+          </a:p>
+          <a:p>
+            <a:pPr indent="0" marL="0">
+              <a:buNone/>
+            </a:pPr>
+            <a:r>
+              <a:rPr lang="en-US" sz="1920" dirty="0">
                 <a:solidFill>
                   <a:srgbClr val="003A63"/>
                 </a:solidFill>
@@ -8167,9 +8171,9 @@
                 <a:ea typeface="Aptos" pitchFamily="34" charset="-122"/>
                 <a:cs typeface="Aptos" pitchFamily="34" charset="-120"/>
               </a:rPr>
-              <a:t>• Which policy, data, equity, privacy, security, or workflow questions remain unresolved?</a:t>
-            </a:r>
-            <a:endParaRPr lang="en-US" sz="2100" dirty="0"/>
+              <a:t>• Which policy, data, equity, privacy, security, or workflow questions remain.</a:t>
+            </a:r>
+            <a:endParaRPr lang="en-US" sz="1920" dirty="0"/>
           </a:p>
         </p:txBody>
       </p:sp>
@@ -8181,12 +8185,12 @@
         </p:nvSpPr>
         <p:spPr>
           <a:xfrm>
-            <a:off x="7635240" y="1325880"/>
-            <a:ext cx="3474720" cy="1207008"/>
+            <a:off x="7543800" y="1325880"/>
+            <a:ext cx="3611880" cy="1261872"/>
           </a:xfrm>
           <a:prstGeom prst="roundRect">
             <a:avLst>
-              <a:gd name="adj" fmla="val 9091"/>
+              <a:gd name="adj" fmla="val 8696"/>
             </a:avLst>
           </a:prstGeom>
           <a:solidFill>
@@ -8208,8 +8212,8 @@
         </p:nvSpPr>
         <p:spPr>
           <a:xfrm>
-            <a:off x="7799832" y="1472184"/>
-            <a:ext cx="3145536" cy="256032"/>
+            <a:off x="7708392" y="1453896"/>
+            <a:ext cx="3282696" cy="228600"/>
           </a:xfrm>
           <a:prstGeom prst="rect">
             <a:avLst/>
@@ -8225,7 +8229,7 @@
               <a:buNone/>
             </a:pPr>
             <a:r>
-              <a:rPr lang="en-US" sz="1300" b="1" dirty="0">
+              <a:rPr lang="en-US" sz="1220" b="1" dirty="0">
                 <a:solidFill>
                   <a:srgbClr val="0068B7"/>
                 </a:solidFill>
@@ -8235,7 +8239,7 @@
               </a:rPr>
               <a:t>Core concept</a:t>
             </a:r>
-            <a:endParaRPr lang="en-US" sz="1300" dirty="0"/>
+            <a:endParaRPr lang="en-US" sz="1220" dirty="0"/>
           </a:p>
         </p:txBody>
       </p:sp>
@@ -8247,8 +8251,8 @@
         </p:nvSpPr>
         <p:spPr>
           <a:xfrm>
-            <a:off x="7799832" y="1801368"/>
-            <a:ext cx="3145536" cy="640080"/>
+            <a:off x="7708392" y="1764792"/>
+            <a:ext cx="3282696" cy="749808"/>
           </a:xfrm>
           <a:prstGeom prst="rect">
             <a:avLst/>
@@ -8266,7 +8270,7 @@
               <a:buNone/>
             </a:pPr>
             <a:r>
-              <a:rPr lang="en-US" sz="1320" dirty="0">
+              <a:rPr lang="en-US" sz="1220" dirty="0">
                 <a:solidFill>
                   <a:srgbClr val="17364A"/>
                 </a:solidFill>
@@ -8274,9 +8278,9 @@
                 <a:ea typeface="Aptos" pitchFamily="34" charset="-122"/>
                 <a:cs typeface="Aptos" pitchFamily="34" charset="-120"/>
               </a:rPr>
-              <a:t>What evidence would governance, leadership, or operations staff need before moving.</a:t>
-            </a:r>
-            <a:endParaRPr lang="en-US" sz="1320" dirty="0"/>
+              <a:t>What evidence would governance, leadership, or operations staff need before.</a:t>
+            </a:r>
+            <a:endParaRPr lang="en-US" sz="1220" dirty="0"/>
           </a:p>
         </p:txBody>
       </p:sp>
@@ -8288,12 +8292,12 @@
         </p:nvSpPr>
         <p:spPr>
           <a:xfrm>
-            <a:off x="7635240" y="2670048"/>
-            <a:ext cx="3474720" cy="1377086"/>
+            <a:off x="7543800" y="2724912"/>
+            <a:ext cx="3611880" cy="1527048"/>
           </a:xfrm>
           <a:prstGeom prst="roundRect">
             <a:avLst>
-              <a:gd name="adj" fmla="val 7968"/>
+              <a:gd name="adj" fmla="val 7186"/>
             </a:avLst>
           </a:prstGeom>
           <a:solidFill>
@@ -8315,8 +8319,8 @@
         </p:nvSpPr>
         <p:spPr>
           <a:xfrm>
-            <a:off x="7799832" y="2816352"/>
-            <a:ext cx="3145536" cy="256032"/>
+            <a:off x="7708392" y="2852928"/>
+            <a:ext cx="3282696" cy="228600"/>
           </a:xfrm>
           <a:prstGeom prst="rect">
             <a:avLst/>
@@ -8332,7 +8336,7 @@
               <a:buNone/>
             </a:pPr>
             <a:r>
-              <a:rPr lang="en-US" sz="1300" b="1" dirty="0">
+              <a:rPr lang="en-US" sz="1220" b="1" dirty="0">
                 <a:solidFill>
                   <a:srgbClr val="0068B7"/>
                 </a:solidFill>
@@ -8342,7 +8346,7 @@
               </a:rPr>
               <a:t>Concept checkpoints</a:t>
             </a:r>
-            <a:endParaRPr lang="en-US" sz="1300" dirty="0"/>
+            <a:endParaRPr lang="en-US" sz="1220" dirty="0"/>
           </a:p>
         </p:txBody>
       </p:sp>
@@ -8354,8 +8358,8 @@
         </p:nvSpPr>
         <p:spPr>
           <a:xfrm>
-            <a:off x="7818120" y="3182112"/>
-            <a:ext cx="3090672" cy="718718"/>
+            <a:off x="7726680" y="3182112"/>
+            <a:ext cx="3227832" cy="960120"/>
           </a:xfrm>
           <a:prstGeom prst="rect">
             <a:avLst/>
@@ -8373,7 +8377,7 @@
               <a:buNone/>
             </a:pPr>
             <a:r>
-              <a:rPr lang="en-US" sz="1220" dirty="0">
+              <a:rPr lang="en-US" sz="1140" dirty="0">
                 <a:solidFill>
                   <a:srgbClr val="17364A"/>
                 </a:solidFill>
@@ -8381,16 +8385,16 @@
                 <a:ea typeface="Aptos" pitchFamily="34" charset="-122"/>
                 <a:cs typeface="Aptos" pitchFamily="34" charset="-120"/>
               </a:rPr>
-              <a:t>What evidence would governance, leadership, or operations staff.</a:t>
-            </a:r>
-            <a:endParaRPr lang="en-US" sz="1220" dirty="0"/>
-          </a:p>
-          <a:p>
-            <a:pPr indent="0" marL="0">
-              <a:buNone/>
-            </a:pPr>
-            <a:r>
-              <a:rPr lang="en-US" sz="1220" dirty="0">
+              <a:t>What evidence would governance, leadership, or.</a:t>
+            </a:r>
+            <a:endParaRPr lang="en-US" sz="1140" dirty="0"/>
+          </a:p>
+          <a:p>
+            <a:pPr indent="0" marL="0">
+              <a:buNone/>
+            </a:pPr>
+            <a:r>
+              <a:rPr lang="en-US" sz="1140" dirty="0">
                 <a:solidFill>
                   <a:srgbClr val="17364A"/>
                 </a:solidFill>
@@ -8398,9 +8402,9 @@
                 <a:ea typeface="Aptos" pitchFamily="34" charset="-122"/>
                 <a:cs typeface="Aptos" pitchFamily="34" charset="-120"/>
               </a:rPr>
-              <a:t>Which policy, data, equity, privacy, security, or workflow.</a:t>
-            </a:r>
-            <a:endParaRPr lang="en-US" sz="1220" dirty="0"/>
+              <a:t>Which policy, data, equity, privacy, security, or.</a:t>
+            </a:r>
+            <a:endParaRPr lang="en-US" sz="1140" dirty="0"/>
           </a:p>
         </p:txBody>
       </p:sp>
@@ -8412,12 +8416,12 @@
         </p:nvSpPr>
         <p:spPr>
           <a:xfrm>
-            <a:off x="7635240" y="4184294"/>
-            <a:ext cx="3474720" cy="1466698"/>
+            <a:off x="7543800" y="4389120"/>
+            <a:ext cx="3611880" cy="1261872"/>
           </a:xfrm>
           <a:prstGeom prst="roundRect">
             <a:avLst>
-              <a:gd name="adj" fmla="val 7481"/>
+              <a:gd name="adj" fmla="val 8696"/>
             </a:avLst>
           </a:prstGeom>
           <a:solidFill>
@@ -8439,8 +8443,8 @@
         </p:nvSpPr>
         <p:spPr>
           <a:xfrm>
-            <a:off x="7799832" y="4330598"/>
-            <a:ext cx="3145536" cy="256032"/>
+            <a:off x="7708392" y="4517136"/>
+            <a:ext cx="3282696" cy="228600"/>
           </a:xfrm>
           <a:prstGeom prst="rect">
             <a:avLst/>
@@ -8456,7 +8460,7 @@
               <a:buNone/>
             </a:pPr>
             <a:r>
-              <a:rPr lang="en-US" sz="1300" b="1" dirty="0">
+              <a:rPr lang="en-US" sz="1220" b="1" dirty="0">
                 <a:solidFill>
                   <a:srgbClr val="0068B7"/>
                 </a:solidFill>
@@ -8466,7 +8470,7 @@
               </a:rPr>
               <a:t>Apply it</a:t>
             </a:r>
-            <a:endParaRPr lang="en-US" sz="1300" dirty="0"/>
+            <a:endParaRPr lang="en-US" sz="1220" dirty="0"/>
           </a:p>
         </p:txBody>
       </p:sp>
@@ -8478,8 +8482,8 @@
         </p:nvSpPr>
         <p:spPr>
           <a:xfrm>
-            <a:off x="7799832" y="4659782"/>
-            <a:ext cx="3145536" cy="899770"/>
+            <a:off x="7708392" y="4828032"/>
+            <a:ext cx="3282696" cy="749808"/>
           </a:xfrm>
           <a:prstGeom prst="rect">
             <a:avLst/>
@@ -8497,7 +8501,7 @@
               <a:buNone/>
             </a:pPr>
             <a:r>
-              <a:rPr lang="en-US" sz="1320" dirty="0">
+              <a:rPr lang="en-US" sz="1220" dirty="0">
                 <a:solidFill>
                   <a:srgbClr val="17364A"/>
                 </a:solidFill>
@@ -8505,9 +8509,9 @@
                 <a:ea typeface="Aptos" pitchFamily="34" charset="-122"/>
                 <a:cs typeface="Aptos" pitchFamily="34" charset="-120"/>
               </a:rPr>
-              <a:t>Connect the concept to public health purpose, responsible use, required safeguards, documentation, and the next action a department should take.</a:t>
-            </a:r>
-            <a:endParaRPr lang="en-US" sz="1320" dirty="0"/>
+              <a:t>Connect the concept to public health purpose, responsible use, required.</a:t>
+            </a:r>
+            <a:endParaRPr lang="en-US" sz="1220" dirty="0"/>
           </a:p>
         </p:txBody>
       </p:sp>
@@ -8798,8 +8802,8 @@
         </p:nvSpPr>
         <p:spPr>
           <a:xfrm>
-            <a:off x="868680" y="1508760"/>
-            <a:ext cx="6309360" cy="4160520"/>
+            <a:off x="822960" y="1463040"/>
+            <a:ext cx="6565392" cy="4343400"/>
           </a:xfrm>
           <a:prstGeom prst="rect">
             <a:avLst/>
@@ -8817,7 +8821,7 @@
               <a:buNone/>
             </a:pPr>
             <a:r>
-              <a:rPr lang="en-US" sz="2100" dirty="0">
+              <a:rPr lang="en-US" sz="1920" dirty="0">
                 <a:solidFill>
                   <a:srgbClr val="003A63"/>
                 </a:solidFill>
@@ -8827,14 +8831,14 @@
               </a:rPr>
               <a:t>• Create an AI audit readiness evidence inventory for one AI use case.</a:t>
             </a:r>
-            <a:endParaRPr lang="en-US" sz="2100" dirty="0"/>
-          </a:p>
-          <a:p>
-            <a:pPr indent="0" marL="0">
-              <a:buNone/>
-            </a:pPr>
-            <a:r>
-              <a:rPr lang="en-US" sz="2100" dirty="0">
+            <a:endParaRPr lang="en-US" sz="1920" dirty="0"/>
+          </a:p>
+          <a:p>
+            <a:pPr indent="0" marL="0">
+              <a:buNone/>
+            </a:pPr>
+            <a:r>
+              <a:rPr lang="en-US" sz="1920" dirty="0">
                 <a:solidFill>
                   <a:srgbClr val="003A63"/>
                 </a:solidFill>
@@ -8842,9 +8846,9 @@
                 <a:ea typeface="Aptos" pitchFamily="34" charset="-122"/>
                 <a:cs typeface="Aptos" pitchFamily="34" charset="-120"/>
               </a:rPr>
-              <a:t>• Identify required artifacts from intake through retirement, the owner of each artifact, storage.</a:t>
-            </a:r>
-            <a:endParaRPr lang="en-US" sz="2100" dirty="0"/>
+              <a:t>• Identify required artifacts from intake through retirement, the owner of.</a:t>
+            </a:r>
+            <a:endParaRPr lang="en-US" sz="1920" dirty="0"/>
           </a:p>
         </p:txBody>
       </p:sp>
@@ -8856,12 +8860,12 @@
         </p:nvSpPr>
         <p:spPr>
           <a:xfrm>
-            <a:off x="7635240" y="1325880"/>
-            <a:ext cx="3474720" cy="1207008"/>
+            <a:off x="7543800" y="1325880"/>
+            <a:ext cx="3611880" cy="1261872"/>
           </a:xfrm>
           <a:prstGeom prst="roundRect">
             <a:avLst>
-              <a:gd name="adj" fmla="val 9091"/>
+              <a:gd name="adj" fmla="val 8696"/>
             </a:avLst>
           </a:prstGeom>
           <a:solidFill>
@@ -8883,8 +8887,8 @@
         </p:nvSpPr>
         <p:spPr>
           <a:xfrm>
-            <a:off x="7799832" y="1472184"/>
-            <a:ext cx="3145536" cy="256032"/>
+            <a:off x="7708392" y="1453896"/>
+            <a:ext cx="3282696" cy="228600"/>
           </a:xfrm>
           <a:prstGeom prst="rect">
             <a:avLst/>
@@ -8900,7 +8904,7 @@
               <a:buNone/>
             </a:pPr>
             <a:r>
-              <a:rPr lang="en-US" sz="1300" b="1" dirty="0">
+              <a:rPr lang="en-US" sz="1220" b="1" dirty="0">
                 <a:solidFill>
                   <a:srgbClr val="0068B7"/>
                 </a:solidFill>
@@ -8910,7 +8914,7 @@
               </a:rPr>
               <a:t>Practice focus</a:t>
             </a:r>
-            <a:endParaRPr lang="en-US" sz="1300" dirty="0"/>
+            <a:endParaRPr lang="en-US" sz="1220" dirty="0"/>
           </a:p>
         </p:txBody>
       </p:sp>
@@ -8922,8 +8926,8 @@
         </p:nvSpPr>
         <p:spPr>
           <a:xfrm>
-            <a:off x="7799832" y="1801368"/>
-            <a:ext cx="3145536" cy="640080"/>
+            <a:off x="7708392" y="1764792"/>
+            <a:ext cx="3282696" cy="749808"/>
           </a:xfrm>
           <a:prstGeom prst="rect">
             <a:avLst/>
@@ -8941,7 +8945,7 @@
               <a:buNone/>
             </a:pPr>
             <a:r>
-              <a:rPr lang="en-US" sz="1320" dirty="0">
+              <a:rPr lang="en-US" sz="1220" dirty="0">
                 <a:solidFill>
                   <a:srgbClr val="17364A"/>
                 </a:solidFill>
@@ -8951,7 +8955,7 @@
               </a:rPr>
               <a:t>Create an AI audit readiness evidence inventory for one AI use case.</a:t>
             </a:r>
-            <a:endParaRPr lang="en-US" sz="1320" dirty="0"/>
+            <a:endParaRPr lang="en-US" sz="1220" dirty="0"/>
           </a:p>
         </p:txBody>
       </p:sp>
@@ -8963,12 +8967,12 @@
         </p:nvSpPr>
         <p:spPr>
           <a:xfrm>
-            <a:off x="7635240" y="2670048"/>
-            <a:ext cx="3474720" cy="1377086"/>
+            <a:off x="7543800" y="2724912"/>
+            <a:ext cx="3611880" cy="1527048"/>
           </a:xfrm>
           <a:prstGeom prst="roundRect">
             <a:avLst>
-              <a:gd name="adj" fmla="val 7968"/>
+              <a:gd name="adj" fmla="val 7186"/>
             </a:avLst>
           </a:prstGeom>
           <a:solidFill>
@@ -8990,8 +8994,8 @@
         </p:nvSpPr>
         <p:spPr>
           <a:xfrm>
-            <a:off x="7799832" y="2816352"/>
-            <a:ext cx="3145536" cy="256032"/>
+            <a:off x="7708392" y="2852928"/>
+            <a:ext cx="3282696" cy="228600"/>
           </a:xfrm>
           <a:prstGeom prst="rect">
             <a:avLst/>
@@ -9007,7 +9011,7 @@
               <a:buNone/>
             </a:pPr>
             <a:r>
-              <a:rPr lang="en-US" sz="1300" b="1" dirty="0">
+              <a:rPr lang="en-US" sz="1220" b="1" dirty="0">
                 <a:solidFill>
                   <a:srgbClr val="0068B7"/>
                 </a:solidFill>
@@ -9017,7 +9021,7 @@
               </a:rPr>
               <a:t>Concept checkpoints</a:t>
             </a:r>
-            <a:endParaRPr lang="en-US" sz="1300" dirty="0"/>
+            <a:endParaRPr lang="en-US" sz="1220" dirty="0"/>
           </a:p>
         </p:txBody>
       </p:sp>
@@ -9029,8 +9033,8 @@
         </p:nvSpPr>
         <p:spPr>
           <a:xfrm>
-            <a:off x="7818120" y="3182112"/>
-            <a:ext cx="3090672" cy="718718"/>
+            <a:off x="7726680" y="3182112"/>
+            <a:ext cx="3227832" cy="960120"/>
           </a:xfrm>
           <a:prstGeom prst="rect">
             <a:avLst/>
@@ -9048,7 +9052,7 @@
               <a:buNone/>
             </a:pPr>
             <a:r>
-              <a:rPr lang="en-US" sz="1220" dirty="0">
+              <a:rPr lang="en-US" sz="1140" dirty="0">
                 <a:solidFill>
                   <a:srgbClr val="17364A"/>
                 </a:solidFill>
@@ -9056,16 +9060,16 @@
                 <a:ea typeface="Aptos" pitchFamily="34" charset="-122"/>
                 <a:cs typeface="Aptos" pitchFamily="34" charset="-120"/>
               </a:rPr>
-              <a:t>Create an AI audit readiness evidence inventory for one AI use case.</a:t>
-            </a:r>
-            <a:endParaRPr lang="en-US" sz="1220" dirty="0"/>
-          </a:p>
-          <a:p>
-            <a:pPr indent="0" marL="0">
-              <a:buNone/>
-            </a:pPr>
-            <a:r>
-              <a:rPr lang="en-US" sz="1220" dirty="0">
+              <a:t>Create an AI audit readiness evidence inventory.</a:t>
+            </a:r>
+            <a:endParaRPr lang="en-US" sz="1140" dirty="0"/>
+          </a:p>
+          <a:p>
+            <a:pPr indent="0" marL="0">
+              <a:buNone/>
+            </a:pPr>
+            <a:r>
+              <a:rPr lang="en-US" sz="1140" dirty="0">
                 <a:solidFill>
                   <a:srgbClr val="17364A"/>
                 </a:solidFill>
@@ -9073,9 +9077,9 @@
                 <a:ea typeface="Aptos" pitchFamily="34" charset="-122"/>
                 <a:cs typeface="Aptos" pitchFamily="34" charset="-120"/>
               </a:rPr>
-              <a:t>Identify required artifacts from intake through retirement, the.</a:t>
-            </a:r>
-            <a:endParaRPr lang="en-US" sz="1220" dirty="0"/>
+              <a:t>Identify required artifacts from intake through.</a:t>
+            </a:r>
+            <a:endParaRPr lang="en-US" sz="1140" dirty="0"/>
           </a:p>
         </p:txBody>
       </p:sp>
@@ -9087,12 +9091,12 @@
         </p:nvSpPr>
         <p:spPr>
           <a:xfrm>
-            <a:off x="7635240" y="4184294"/>
-            <a:ext cx="3474720" cy="1466698"/>
+            <a:off x="7543800" y="4389120"/>
+            <a:ext cx="3611880" cy="1261872"/>
           </a:xfrm>
           <a:prstGeom prst="roundRect">
             <a:avLst>
-              <a:gd name="adj" fmla="val 7481"/>
+              <a:gd name="adj" fmla="val 8696"/>
             </a:avLst>
           </a:prstGeom>
           <a:solidFill>
@@ -9114,8 +9118,8 @@
         </p:nvSpPr>
         <p:spPr>
           <a:xfrm>
-            <a:off x="7799832" y="4330598"/>
-            <a:ext cx="3145536" cy="256032"/>
+            <a:off x="7708392" y="4517136"/>
+            <a:ext cx="3282696" cy="228600"/>
           </a:xfrm>
           <a:prstGeom prst="rect">
             <a:avLst/>
@@ -9131,7 +9135,7 @@
               <a:buNone/>
             </a:pPr>
             <a:r>
-              <a:rPr lang="en-US" sz="1300" b="1" dirty="0">
+              <a:rPr lang="en-US" sz="1220" b="1" dirty="0">
                 <a:solidFill>
                   <a:srgbClr val="0068B7"/>
                 </a:solidFill>
@@ -9141,7 +9145,7 @@
               </a:rPr>
               <a:t>What to produce</a:t>
             </a:r>
-            <a:endParaRPr lang="en-US" sz="1300" dirty="0"/>
+            <a:endParaRPr lang="en-US" sz="1220" dirty="0"/>
           </a:p>
         </p:txBody>
       </p:sp>
@@ -9153,8 +9157,8 @@
         </p:nvSpPr>
         <p:spPr>
           <a:xfrm>
-            <a:off x="7799832" y="4659782"/>
-            <a:ext cx="3145536" cy="899770"/>
+            <a:off x="7708392" y="4828032"/>
+            <a:ext cx="3282696" cy="749808"/>
           </a:xfrm>
           <a:prstGeom prst="rect">
             <a:avLst/>
@@ -9172,7 +9176,7 @@
               <a:buNone/>
             </a:pPr>
             <a:r>
-              <a:rPr lang="en-US" sz="1320" dirty="0">
+              <a:rPr lang="en-US" sz="1220" dirty="0">
                 <a:solidFill>
                   <a:srgbClr val="17364A"/>
                 </a:solidFill>
@@ -9180,9 +9184,9 @@
                 <a:ea typeface="Aptos" pitchFamily="34" charset="-122"/>
                 <a:cs typeface="Aptos" pitchFamily="34" charset="-120"/>
               </a:rPr>
-              <a:t>Use the assignment to test whether you can explain the concept, apply it to a realistic public health situation, and identify what would need review before the work moves forward.</a:t>
-            </a:r>
-            <a:endParaRPr lang="en-US" sz="1320" dirty="0"/>
+              <a:t>Use the assignment to test whether you can explain the concept, apply it to a.</a:t>
+            </a:r>
+            <a:endParaRPr lang="en-US" sz="1220" dirty="0"/>
           </a:p>
         </p:txBody>
       </p:sp>
@@ -9473,8 +9477,8 @@
         </p:nvSpPr>
         <p:spPr>
           <a:xfrm>
-            <a:off x="868680" y="1508760"/>
-            <a:ext cx="6309360" cy="4160520"/>
+            <a:off x="822960" y="1463040"/>
+            <a:ext cx="6565392" cy="4343400"/>
           </a:xfrm>
           <a:prstGeom prst="rect">
             <a:avLst/>
@@ -9492,7 +9496,7 @@
               <a:buNone/>
             </a:pPr>
             <a:r>
-              <a:rPr lang="en-US" sz="2100" dirty="0">
+              <a:rPr lang="en-US" sz="1920" dirty="0">
                 <a:solidFill>
                   <a:srgbClr val="003A63"/>
                 </a:solidFill>
@@ -9502,14 +9506,14 @@
               </a:rPr>
               <a:t>• AI evidence inventory</a:t>
             </a:r>
-            <a:endParaRPr lang="en-US" sz="2100" dirty="0"/>
-          </a:p>
-          <a:p>
-            <a:pPr indent="0" marL="0">
-              <a:buNone/>
-            </a:pPr>
-            <a:r>
-              <a:rPr lang="en-US" sz="2100" dirty="0">
+            <a:endParaRPr lang="en-US" sz="1920" dirty="0"/>
+          </a:p>
+          <a:p>
+            <a:pPr indent="0" marL="0">
+              <a:buNone/>
+            </a:pPr>
+            <a:r>
+              <a:rPr lang="en-US" sz="1920" dirty="0">
                 <a:solidFill>
                   <a:srgbClr val="003A63"/>
                 </a:solidFill>
@@ -9519,14 +9523,14 @@
               </a:rPr>
               <a:t>• Decision log template</a:t>
             </a:r>
-            <a:endParaRPr lang="en-US" sz="2100" dirty="0"/>
-          </a:p>
-          <a:p>
-            <a:pPr indent="0" marL="0">
-              <a:buNone/>
-            </a:pPr>
-            <a:r>
-              <a:rPr lang="en-US" sz="2100" dirty="0">
+            <a:endParaRPr lang="en-US" sz="1920" dirty="0"/>
+          </a:p>
+          <a:p>
+            <a:pPr indent="0" marL="0">
+              <a:buNone/>
+            </a:pPr>
+            <a:r>
+              <a:rPr lang="en-US" sz="1920" dirty="0">
                 <a:solidFill>
                   <a:srgbClr val="003A63"/>
                 </a:solidFill>
@@ -9536,7 +9540,7 @@
               </a:rPr>
               <a:t>• Artifact ownership and retention table</a:t>
             </a:r>
-            <a:endParaRPr lang="en-US" sz="2100" dirty="0"/>
+            <a:endParaRPr lang="en-US" sz="1920" dirty="0"/>
           </a:p>
         </p:txBody>
       </p:sp>
@@ -9548,12 +9552,12 @@
         </p:nvSpPr>
         <p:spPr>
           <a:xfrm>
-            <a:off x="7635240" y="1325880"/>
-            <a:ext cx="3474720" cy="1207008"/>
+            <a:off x="7543800" y="1325880"/>
+            <a:ext cx="3611880" cy="1261872"/>
           </a:xfrm>
           <a:prstGeom prst="roundRect">
             <a:avLst>
-              <a:gd name="adj" fmla="val 9091"/>
+              <a:gd name="adj" fmla="val 8696"/>
             </a:avLst>
           </a:prstGeom>
           <a:solidFill>
@@ -9575,8 +9579,8 @@
         </p:nvSpPr>
         <p:spPr>
           <a:xfrm>
-            <a:off x="7799832" y="1472184"/>
-            <a:ext cx="3145536" cy="256032"/>
+            <a:off x="7708392" y="1453896"/>
+            <a:ext cx="3282696" cy="228600"/>
           </a:xfrm>
           <a:prstGeom prst="rect">
             <a:avLst/>
@@ -9592,7 +9596,7 @@
               <a:buNone/>
             </a:pPr>
             <a:r>
-              <a:rPr lang="en-US" sz="1300" b="1" dirty="0">
+              <a:rPr lang="en-US" sz="1220" b="1" dirty="0">
                 <a:solidFill>
                   <a:srgbClr val="0068B7"/>
                 </a:solidFill>
@@ -9602,7 +9606,7 @@
               </a:rPr>
               <a:t>Core concept</a:t>
             </a:r>
-            <a:endParaRPr lang="en-US" sz="1300" dirty="0"/>
+            <a:endParaRPr lang="en-US" sz="1220" dirty="0"/>
           </a:p>
         </p:txBody>
       </p:sp>
@@ -9614,8 +9618,8 @@
         </p:nvSpPr>
         <p:spPr>
           <a:xfrm>
-            <a:off x="7799832" y="1801368"/>
-            <a:ext cx="3145536" cy="640080"/>
+            <a:off x="7708392" y="1764792"/>
+            <a:ext cx="3282696" cy="749808"/>
           </a:xfrm>
           <a:prstGeom prst="rect">
             <a:avLst/>
@@ -9633,7 +9637,7 @@
               <a:buNone/>
             </a:pPr>
             <a:r>
-              <a:rPr lang="en-US" sz="1320" dirty="0">
+              <a:rPr lang="en-US" sz="1220" dirty="0">
                 <a:solidFill>
                   <a:srgbClr val="17364A"/>
                 </a:solidFill>
@@ -9643,7 +9647,7 @@
               </a:rPr>
               <a:t>AI evidence inventory</a:t>
             </a:r>
-            <a:endParaRPr lang="en-US" sz="1320" dirty="0"/>
+            <a:endParaRPr lang="en-US" sz="1220" dirty="0"/>
           </a:p>
         </p:txBody>
       </p:sp>
@@ -9655,12 +9659,12 @@
         </p:nvSpPr>
         <p:spPr>
           <a:xfrm>
-            <a:off x="7635240" y="2670048"/>
-            <a:ext cx="3474720" cy="1377086"/>
+            <a:off x="7543800" y="2724912"/>
+            <a:ext cx="3611880" cy="1527048"/>
           </a:xfrm>
           <a:prstGeom prst="roundRect">
             <a:avLst>
-              <a:gd name="adj" fmla="val 7968"/>
+              <a:gd name="adj" fmla="val 7186"/>
             </a:avLst>
           </a:prstGeom>
           <a:solidFill>
@@ -9682,8 +9686,8 @@
         </p:nvSpPr>
         <p:spPr>
           <a:xfrm>
-            <a:off x="7799832" y="2816352"/>
-            <a:ext cx="3145536" cy="256032"/>
+            <a:off x="7708392" y="2852928"/>
+            <a:ext cx="3282696" cy="228600"/>
           </a:xfrm>
           <a:prstGeom prst="rect">
             <a:avLst/>
@@ -9699,7 +9703,7 @@
               <a:buNone/>
             </a:pPr>
             <a:r>
-              <a:rPr lang="en-US" sz="1300" b="1" dirty="0">
+              <a:rPr lang="en-US" sz="1220" b="1" dirty="0">
                 <a:solidFill>
                   <a:srgbClr val="0068B7"/>
                 </a:solidFill>
@@ -9709,7 +9713,7 @@
               </a:rPr>
               <a:t>Concept checkpoints</a:t>
             </a:r>
-            <a:endParaRPr lang="en-US" sz="1300" dirty="0"/>
+            <a:endParaRPr lang="en-US" sz="1220" dirty="0"/>
           </a:p>
         </p:txBody>
       </p:sp>
@@ -9721,8 +9725,8 @@
         </p:nvSpPr>
         <p:spPr>
           <a:xfrm>
-            <a:off x="7818120" y="3182112"/>
-            <a:ext cx="3090672" cy="718718"/>
+            <a:off x="7726680" y="3182112"/>
+            <a:ext cx="3227832" cy="960120"/>
           </a:xfrm>
           <a:prstGeom prst="rect">
             <a:avLst/>
@@ -9740,7 +9744,7 @@
               <a:buNone/>
             </a:pPr>
             <a:r>
-              <a:rPr lang="en-US" sz="1220" dirty="0">
+              <a:rPr lang="en-US" sz="1140" dirty="0">
                 <a:solidFill>
                   <a:srgbClr val="17364A"/>
                 </a:solidFill>
@@ -9750,14 +9754,14 @@
               </a:rPr>
               <a:t>AI evidence inventory</a:t>
             </a:r>
-            <a:endParaRPr lang="en-US" sz="1220" dirty="0"/>
-          </a:p>
-          <a:p>
-            <a:pPr indent="0" marL="0">
-              <a:buNone/>
-            </a:pPr>
-            <a:r>
-              <a:rPr lang="en-US" sz="1220" dirty="0">
+            <a:endParaRPr lang="en-US" sz="1140" dirty="0"/>
+          </a:p>
+          <a:p>
+            <a:pPr indent="0" marL="0">
+              <a:buNone/>
+            </a:pPr>
+            <a:r>
+              <a:rPr lang="en-US" sz="1140" dirty="0">
                 <a:solidFill>
                   <a:srgbClr val="17364A"/>
                 </a:solidFill>
@@ -9767,14 +9771,14 @@
               </a:rPr>
               <a:t>Decision log template</a:t>
             </a:r>
-            <a:endParaRPr lang="en-US" sz="1220" dirty="0"/>
-          </a:p>
-          <a:p>
-            <a:pPr indent="0" marL="0">
-              <a:buNone/>
-            </a:pPr>
-            <a:r>
-              <a:rPr lang="en-US" sz="1220" dirty="0">
+            <a:endParaRPr lang="en-US" sz="1140" dirty="0"/>
+          </a:p>
+          <a:p>
+            <a:pPr indent="0" marL="0">
+              <a:buNone/>
+            </a:pPr>
+            <a:r>
+              <a:rPr lang="en-US" sz="1140" dirty="0">
                 <a:solidFill>
                   <a:srgbClr val="17364A"/>
                 </a:solidFill>
@@ -9784,7 +9788,7 @@
               </a:rPr>
               <a:t>Artifact ownership and retention table</a:t>
             </a:r>
-            <a:endParaRPr lang="en-US" sz="1220" dirty="0"/>
+            <a:endParaRPr lang="en-US" sz="1140" dirty="0"/>
           </a:p>
         </p:txBody>
       </p:sp>
@@ -9796,12 +9800,12 @@
         </p:nvSpPr>
         <p:spPr>
           <a:xfrm>
-            <a:off x="7635240" y="4184294"/>
-            <a:ext cx="3474720" cy="1466698"/>
+            <a:off x="7543800" y="4389120"/>
+            <a:ext cx="3611880" cy="1261872"/>
           </a:xfrm>
           <a:prstGeom prst="roundRect">
             <a:avLst>
-              <a:gd name="adj" fmla="val 7481"/>
+              <a:gd name="adj" fmla="val 8696"/>
             </a:avLst>
           </a:prstGeom>
           <a:solidFill>
@@ -9823,8 +9827,8 @@
         </p:nvSpPr>
         <p:spPr>
           <a:xfrm>
-            <a:off x="7799832" y="4330598"/>
-            <a:ext cx="3145536" cy="256032"/>
+            <a:off x="7708392" y="4517136"/>
+            <a:ext cx="3282696" cy="228600"/>
           </a:xfrm>
           <a:prstGeom prst="rect">
             <a:avLst/>
@@ -9840,7 +9844,7 @@
               <a:buNone/>
             </a:pPr>
             <a:r>
-              <a:rPr lang="en-US" sz="1300" b="1" dirty="0">
+              <a:rPr lang="en-US" sz="1220" b="1" dirty="0">
                 <a:solidFill>
                   <a:srgbClr val="0068B7"/>
                 </a:solidFill>
@@ -9850,7 +9854,7 @@
               </a:rPr>
               <a:t>Apply it</a:t>
             </a:r>
-            <a:endParaRPr lang="en-US" sz="1300" dirty="0"/>
+            <a:endParaRPr lang="en-US" sz="1220" dirty="0"/>
           </a:p>
         </p:txBody>
       </p:sp>
@@ -9862,8 +9866,8 @@
         </p:nvSpPr>
         <p:spPr>
           <a:xfrm>
-            <a:off x="7799832" y="4659782"/>
-            <a:ext cx="3145536" cy="899770"/>
+            <a:off x="7708392" y="4828032"/>
+            <a:ext cx="3282696" cy="749808"/>
           </a:xfrm>
           <a:prstGeom prst="rect">
             <a:avLst/>
@@ -9881,7 +9885,7 @@
               <a:buNone/>
             </a:pPr>
             <a:r>
-              <a:rPr lang="en-US" sz="1320" dirty="0">
+              <a:rPr lang="en-US" sz="1220" dirty="0">
                 <a:solidFill>
                   <a:srgbClr val="17364A"/>
                 </a:solidFill>
@@ -9889,9 +9893,9 @@
                 <a:ea typeface="Aptos" pitchFamily="34" charset="-122"/>
                 <a:cs typeface="Aptos" pitchFamily="34" charset="-120"/>
               </a:rPr>
-              <a:t>Connect the concept to public health purpose, responsible use, required safeguards, documentation, and the next action a department should take.</a:t>
-            </a:r>
-            <a:endParaRPr lang="en-US" sz="1320" dirty="0"/>
+              <a:t>Connect the concept to public health purpose, responsible use, required.</a:t>
+            </a:r>
+            <a:endParaRPr lang="en-US" sz="1220" dirty="0"/>
           </a:p>
         </p:txBody>
       </p:sp>
@@ -10182,8 +10186,8 @@
         </p:nvSpPr>
         <p:spPr>
           <a:xfrm>
-            <a:off x="868680" y="1508760"/>
-            <a:ext cx="6309360" cy="4160520"/>
+            <a:off x="822960" y="1463040"/>
+            <a:ext cx="6565392" cy="4343400"/>
           </a:xfrm>
           <a:prstGeom prst="rect">
             <a:avLst/>
@@ -10201,7 +10205,7 @@
               <a:buNone/>
             </a:pPr>
             <a:r>
-              <a:rPr lang="en-US" sz="2100" dirty="0">
+              <a:rPr lang="en-US" sz="1920" dirty="0">
                 <a:solidFill>
                   <a:srgbClr val="003A63"/>
                 </a:solidFill>
@@ -10211,14 +10215,14 @@
               </a:rPr>
               <a:t>• Gap list for missing evidence</a:t>
             </a:r>
-            <a:endParaRPr lang="en-US" sz="2100" dirty="0"/>
-          </a:p>
-          <a:p>
-            <a:pPr indent="0" marL="0">
-              <a:buNone/>
-            </a:pPr>
-            <a:r>
-              <a:rPr lang="en-US" sz="2100" dirty="0">
+            <a:endParaRPr lang="en-US" sz="1920" dirty="0"/>
+          </a:p>
+          <a:p>
+            <a:pPr indent="0" marL="0">
+              <a:buNone/>
+            </a:pPr>
+            <a:r>
+              <a:rPr lang="en-US" sz="1920" dirty="0">
                 <a:solidFill>
                   <a:srgbClr val="003A63"/>
                 </a:solidFill>
@@ -10228,7 +10232,7 @@
               </a:rPr>
               <a:t>• Review schedule</a:t>
             </a:r>
-            <a:endParaRPr lang="en-US" sz="2100" dirty="0"/>
+            <a:endParaRPr lang="en-US" sz="1920" dirty="0"/>
           </a:p>
         </p:txBody>
       </p:sp>
@@ -10240,12 +10244,12 @@
         </p:nvSpPr>
         <p:spPr>
           <a:xfrm>
-            <a:off x="7635240" y="1325880"/>
-            <a:ext cx="3474720" cy="1207008"/>
+            <a:off x="7543800" y="1325880"/>
+            <a:ext cx="3611880" cy="1261872"/>
           </a:xfrm>
           <a:prstGeom prst="roundRect">
             <a:avLst>
-              <a:gd name="adj" fmla="val 9091"/>
+              <a:gd name="adj" fmla="val 8696"/>
             </a:avLst>
           </a:prstGeom>
           <a:solidFill>
@@ -10267,8 +10271,8 @@
         </p:nvSpPr>
         <p:spPr>
           <a:xfrm>
-            <a:off x="7799832" y="1472184"/>
-            <a:ext cx="3145536" cy="256032"/>
+            <a:off x="7708392" y="1453896"/>
+            <a:ext cx="3282696" cy="228600"/>
           </a:xfrm>
           <a:prstGeom prst="rect">
             <a:avLst/>
@@ -10284,7 +10288,7 @@
               <a:buNone/>
             </a:pPr>
             <a:r>
-              <a:rPr lang="en-US" sz="1300" b="1" dirty="0">
+              <a:rPr lang="en-US" sz="1220" b="1" dirty="0">
                 <a:solidFill>
                   <a:srgbClr val="0068B7"/>
                 </a:solidFill>
@@ -10294,7 +10298,7 @@
               </a:rPr>
               <a:t>Core concept</a:t>
             </a:r>
-            <a:endParaRPr lang="en-US" sz="1300" dirty="0"/>
+            <a:endParaRPr lang="en-US" sz="1220" dirty="0"/>
           </a:p>
         </p:txBody>
       </p:sp>
@@ -10306,8 +10310,8 @@
         </p:nvSpPr>
         <p:spPr>
           <a:xfrm>
-            <a:off x="7799832" y="1801368"/>
-            <a:ext cx="3145536" cy="640080"/>
+            <a:off x="7708392" y="1764792"/>
+            <a:ext cx="3282696" cy="749808"/>
           </a:xfrm>
           <a:prstGeom prst="rect">
             <a:avLst/>
@@ -10325,7 +10329,7 @@
               <a:buNone/>
             </a:pPr>
             <a:r>
-              <a:rPr lang="en-US" sz="1320" dirty="0">
+              <a:rPr lang="en-US" sz="1220" dirty="0">
                 <a:solidFill>
                   <a:srgbClr val="17364A"/>
                 </a:solidFill>
@@ -10335,7 +10339,7 @@
               </a:rPr>
               <a:t>Gap list for missing evidence</a:t>
             </a:r>
-            <a:endParaRPr lang="en-US" sz="1320" dirty="0"/>
+            <a:endParaRPr lang="en-US" sz="1220" dirty="0"/>
           </a:p>
         </p:txBody>
       </p:sp>
@@ -10347,12 +10351,12 @@
         </p:nvSpPr>
         <p:spPr>
           <a:xfrm>
-            <a:off x="7635240" y="2670048"/>
-            <a:ext cx="3474720" cy="1377086"/>
+            <a:off x="7543800" y="2724912"/>
+            <a:ext cx="3611880" cy="1527048"/>
           </a:xfrm>
           <a:prstGeom prst="roundRect">
             <a:avLst>
-              <a:gd name="adj" fmla="val 7968"/>
+              <a:gd name="adj" fmla="val 7186"/>
             </a:avLst>
           </a:prstGeom>
           <a:solidFill>
@@ -10374,8 +10378,8 @@
         </p:nvSpPr>
         <p:spPr>
           <a:xfrm>
-            <a:off x="7799832" y="2816352"/>
-            <a:ext cx="3145536" cy="256032"/>
+            <a:off x="7708392" y="2852928"/>
+            <a:ext cx="3282696" cy="228600"/>
           </a:xfrm>
           <a:prstGeom prst="rect">
             <a:avLst/>
@@ -10391,7 +10395,7 @@
               <a:buNone/>
             </a:pPr>
             <a:r>
-              <a:rPr lang="en-US" sz="1300" b="1" dirty="0">
+              <a:rPr lang="en-US" sz="1220" b="1" dirty="0">
                 <a:solidFill>
                   <a:srgbClr val="0068B7"/>
                 </a:solidFill>
@@ -10401,7 +10405,7 @@
               </a:rPr>
               <a:t>Concept checkpoints</a:t>
             </a:r>
-            <a:endParaRPr lang="en-US" sz="1300" dirty="0"/>
+            <a:endParaRPr lang="en-US" sz="1220" dirty="0"/>
           </a:p>
         </p:txBody>
       </p:sp>
@@ -10413,8 +10417,8 @@
         </p:nvSpPr>
         <p:spPr>
           <a:xfrm>
-            <a:off x="7818120" y="3182112"/>
-            <a:ext cx="3090672" cy="718718"/>
+            <a:off x="7726680" y="3182112"/>
+            <a:ext cx="3227832" cy="960120"/>
           </a:xfrm>
           <a:prstGeom prst="rect">
             <a:avLst/>
@@ -10432,7 +10436,7 @@
               <a:buNone/>
             </a:pPr>
             <a:r>
-              <a:rPr lang="en-US" sz="1220" dirty="0">
+              <a:rPr lang="en-US" sz="1140" dirty="0">
                 <a:solidFill>
                   <a:srgbClr val="17364A"/>
                 </a:solidFill>
@@ -10442,14 +10446,14 @@
               </a:rPr>
               <a:t>Gap list for missing evidence</a:t>
             </a:r>
-            <a:endParaRPr lang="en-US" sz="1220" dirty="0"/>
-          </a:p>
-          <a:p>
-            <a:pPr indent="0" marL="0">
-              <a:buNone/>
-            </a:pPr>
-            <a:r>
-              <a:rPr lang="en-US" sz="1220" dirty="0">
+            <a:endParaRPr lang="en-US" sz="1140" dirty="0"/>
+          </a:p>
+          <a:p>
+            <a:pPr indent="0" marL="0">
+              <a:buNone/>
+            </a:pPr>
+            <a:r>
+              <a:rPr lang="en-US" sz="1140" dirty="0">
                 <a:solidFill>
                   <a:srgbClr val="17364A"/>
                 </a:solidFill>
@@ -10459,7 +10463,7 @@
               </a:rPr>
               <a:t>Review schedule</a:t>
             </a:r>
-            <a:endParaRPr lang="en-US" sz="1220" dirty="0"/>
+            <a:endParaRPr lang="en-US" sz="1140" dirty="0"/>
           </a:p>
         </p:txBody>
       </p:sp>
@@ -10471,12 +10475,12 @@
         </p:nvSpPr>
         <p:spPr>
           <a:xfrm>
-            <a:off x="7635240" y="4184294"/>
-            <a:ext cx="3474720" cy="1466698"/>
+            <a:off x="7543800" y="4389120"/>
+            <a:ext cx="3611880" cy="1261872"/>
           </a:xfrm>
           <a:prstGeom prst="roundRect">
             <a:avLst>
-              <a:gd name="adj" fmla="val 7481"/>
+              <a:gd name="adj" fmla="val 8696"/>
             </a:avLst>
           </a:prstGeom>
           <a:solidFill>
@@ -10498,8 +10502,8 @@
         </p:nvSpPr>
         <p:spPr>
           <a:xfrm>
-            <a:off x="7799832" y="4330598"/>
-            <a:ext cx="3145536" cy="256032"/>
+            <a:off x="7708392" y="4517136"/>
+            <a:ext cx="3282696" cy="228600"/>
           </a:xfrm>
           <a:prstGeom prst="rect">
             <a:avLst/>
@@ -10515,7 +10519,7 @@
               <a:buNone/>
             </a:pPr>
             <a:r>
-              <a:rPr lang="en-US" sz="1300" b="1" dirty="0">
+              <a:rPr lang="en-US" sz="1220" b="1" dirty="0">
                 <a:solidFill>
                   <a:srgbClr val="0068B7"/>
                 </a:solidFill>
@@ -10525,7 +10529,7 @@
               </a:rPr>
               <a:t>Apply it</a:t>
             </a:r>
-            <a:endParaRPr lang="en-US" sz="1300" dirty="0"/>
+            <a:endParaRPr lang="en-US" sz="1220" dirty="0"/>
           </a:p>
         </p:txBody>
       </p:sp>
@@ -10537,8 +10541,8 @@
         </p:nvSpPr>
         <p:spPr>
           <a:xfrm>
-            <a:off x="7799832" y="4659782"/>
-            <a:ext cx="3145536" cy="899770"/>
+            <a:off x="7708392" y="4828032"/>
+            <a:ext cx="3282696" cy="749808"/>
           </a:xfrm>
           <a:prstGeom prst="rect">
             <a:avLst/>
@@ -10556,7 +10560,7 @@
               <a:buNone/>
             </a:pPr>
             <a:r>
-              <a:rPr lang="en-US" sz="1320" dirty="0">
+              <a:rPr lang="en-US" sz="1220" dirty="0">
                 <a:solidFill>
                   <a:srgbClr val="17364A"/>
                 </a:solidFill>
@@ -10564,9 +10568,9 @@
                 <a:ea typeface="Aptos" pitchFamily="34" charset="-122"/>
                 <a:cs typeface="Aptos" pitchFamily="34" charset="-120"/>
               </a:rPr>
-              <a:t>Connect the concept to public health purpose, responsible use, required safeguards, documentation, and the next action a department should take.</a:t>
-            </a:r>
-            <a:endParaRPr lang="en-US" sz="1320" dirty="0"/>
+              <a:t>Connect the concept to public health purpose, responsible use, required.</a:t>
+            </a:r>
+            <a:endParaRPr lang="en-US" sz="1220" dirty="0"/>
           </a:p>
         </p:txBody>
       </p:sp>
@@ -10884,7 +10888,7 @@
                 <a:ea typeface="Aptos" pitchFamily="34" charset="-122"/>
                 <a:cs typeface="Aptos" pitchFamily="34" charset="-120"/>
               </a:rPr>
-              <a:t>• AI audit readiness is the agency’s ability to show what AI systems are used, why they were.</a:t>
+              <a:t>• AI audit readiness is the agency’s ability to show what AI systems are used,.</a:t>
             </a:r>
             <a:endParaRPr lang="en-US" sz="2100" dirty="0"/>
           </a:p>
@@ -10901,7 +10905,7 @@
                 <a:ea typeface="Aptos" pitchFamily="34" charset="-122"/>
                 <a:cs typeface="Aptos" pitchFamily="34" charset="-120"/>
               </a:rPr>
-              <a:t>• Public health agencies may need this evidence for internal oversight, public records requests,.</a:t>
+              <a:t>• Public health agencies may need this evidence for internal oversight, public.</a:t>
             </a:r>
             <a:endParaRPr lang="en-US" sz="2100" dirty="0"/>
           </a:p>
@@ -10918,7 +10922,7 @@
                 <a:ea typeface="Aptos" pitchFamily="34" charset="-122"/>
                 <a:cs typeface="Aptos" pitchFamily="34" charset="-120"/>
               </a:rPr>
-              <a:t>• This module teaches governance, compliance, program, and leadership staff how to manage.</a:t>
+              <a:t>• This module teaches governance, compliance, program, and leadership staff.</a:t>
             </a:r>
             <a:endParaRPr lang="en-US" sz="2100" dirty="0"/>
           </a:p>
@@ -10959,8 +10963,8 @@
         </p:nvSpPr>
         <p:spPr>
           <a:xfrm>
-            <a:off x="8074152" y="1563624"/>
-            <a:ext cx="2825496" cy="256032"/>
+            <a:off x="8074152" y="1545336"/>
+            <a:ext cx="2825496" cy="228600"/>
           </a:xfrm>
           <a:prstGeom prst="rect">
             <a:avLst/>
@@ -10976,7 +10980,7 @@
               <a:buNone/>
             </a:pPr>
             <a:r>
-              <a:rPr lang="en-US" sz="1300" b="1" dirty="0">
+              <a:rPr lang="en-US" sz="1220" b="1" dirty="0">
                 <a:solidFill>
                   <a:srgbClr val="0068B7"/>
                 </a:solidFill>
@@ -10986,7 +10990,7 @@
               </a:rPr>
               <a:t>Module details</a:t>
             </a:r>
-            <a:endParaRPr lang="en-US" sz="1300" dirty="0"/>
+            <a:endParaRPr lang="en-US" sz="1220" dirty="0"/>
           </a:p>
         </p:txBody>
       </p:sp>
@@ -10998,8 +11002,8 @@
         </p:nvSpPr>
         <p:spPr>
           <a:xfrm>
-            <a:off x="8074152" y="1892808"/>
-            <a:ext cx="2825496" cy="1353312"/>
+            <a:off x="8074152" y="1856232"/>
+            <a:ext cx="2825496" cy="1408176"/>
           </a:xfrm>
           <a:prstGeom prst="rect">
             <a:avLst/>
@@ -11017,7 +11021,7 @@
               <a:buNone/>
             </a:pPr>
             <a:r>
-              <a:rPr lang="en-US" sz="1320" dirty="0">
+              <a:rPr lang="en-US" sz="1220" dirty="0">
                 <a:solidFill>
                   <a:srgbClr val="17364A"/>
                 </a:solidFill>
@@ -11025,9 +11029,9 @@
                 <a:ea typeface="Aptos" pitchFamily="34" charset="-122"/>
                 <a:cs typeface="Aptos" pitchFamily="34" charset="-120"/>
               </a:rPr>
-              <a:t>Level: intermediate/practitioner Primary track: Governance and Security Track Appears in tracks: governance-and-security, policy, program-management, public-health-executive-leadership</a:t>
-            </a:r>
-            <a:endParaRPr lang="en-US" sz="1320" dirty="0"/>
+              <a:t>Level: intermediate/practitioner Primary track: Governance and Security Track.</a:t>
+            </a:r>
+            <a:endParaRPr lang="en-US" sz="1220" dirty="0"/>
           </a:p>
         </p:txBody>
       </p:sp>
@@ -11066,8 +11070,8 @@
         </p:nvSpPr>
         <p:spPr>
           <a:xfrm>
-            <a:off x="8074152" y="3822192"/>
-            <a:ext cx="2825496" cy="256032"/>
+            <a:off x="8074152" y="3803904"/>
+            <a:ext cx="2825496" cy="228600"/>
           </a:xfrm>
           <a:prstGeom prst="rect">
             <a:avLst/>
@@ -11083,7 +11087,7 @@
               <a:buNone/>
             </a:pPr>
             <a:r>
-              <a:rPr lang="en-US" sz="1300" b="1" dirty="0">
+              <a:rPr lang="en-US" sz="1220" b="1" dirty="0">
                 <a:solidFill>
                   <a:srgbClr val="0068B7"/>
                 </a:solidFill>
@@ -11093,7 +11097,7 @@
               </a:rPr>
               <a:t>Learning sequence</a:t>
             </a:r>
-            <a:endParaRPr lang="en-US" sz="1300" dirty="0"/>
+            <a:endParaRPr lang="en-US" sz="1220" dirty="0"/>
           </a:p>
         </p:txBody>
       </p:sp>
@@ -11105,8 +11109,8 @@
         </p:nvSpPr>
         <p:spPr>
           <a:xfrm>
-            <a:off x="8092440" y="4187952"/>
-            <a:ext cx="2770632" cy="1033272"/>
+            <a:off x="8092440" y="4133088"/>
+            <a:ext cx="2770632" cy="1124712"/>
           </a:xfrm>
           <a:prstGeom prst="rect">
             <a:avLst/>
@@ -11124,7 +11128,7 @@
               <a:buNone/>
             </a:pPr>
             <a:r>
-              <a:rPr lang="en-US" sz="1220" dirty="0">
+              <a:rPr lang="en-US" sz="1140" dirty="0">
                 <a:solidFill>
                   <a:srgbClr val="17364A"/>
                 </a:solidFill>
@@ -11134,14 +11138,14 @@
               </a:rPr>
               <a:t>Read the module for shared vocabulary and context.</a:t>
             </a:r>
-            <a:endParaRPr lang="en-US" sz="1220" dirty="0"/>
-          </a:p>
-          <a:p>
-            <a:pPr indent="0" marL="0">
-              <a:buNone/>
-            </a:pPr>
-            <a:r>
-              <a:rPr lang="en-US" sz="1220" dirty="0">
+            <a:endParaRPr lang="en-US" sz="1140" dirty="0"/>
+          </a:p>
+          <a:p>
+            <a:pPr indent="0" marL="0">
+              <a:buNone/>
+            </a:pPr>
+            <a:r>
+              <a:rPr lang="en-US" sz="1140" dirty="0">
                 <a:solidFill>
                   <a:srgbClr val="17364A"/>
                 </a:solidFill>
@@ -11149,16 +11153,16 @@
                 <a:ea typeface="Aptos" pitchFamily="34" charset="-122"/>
                 <a:cs typeface="Aptos" pitchFamily="34" charset="-120"/>
               </a:rPr>
-              <a:t>Complete the practical exercise to apply the concept.</a:t>
-            </a:r>
-            <a:endParaRPr lang="en-US" sz="1220" dirty="0"/>
-          </a:p>
-          <a:p>
-            <a:pPr indent="0" marL="0">
-              <a:buNone/>
-            </a:pPr>
-            <a:r>
-              <a:rPr lang="en-US" sz="1220" dirty="0">
+              <a:t>Complete the practical exercise to apply the.</a:t>
+            </a:r>
+            <a:endParaRPr lang="en-US" sz="1140" dirty="0"/>
+          </a:p>
+          <a:p>
+            <a:pPr indent="0" marL="0">
+              <a:buNone/>
+            </a:pPr>
+            <a:r>
+              <a:rPr lang="en-US" sz="1140" dirty="0">
                 <a:solidFill>
                   <a:srgbClr val="17364A"/>
                 </a:solidFill>
@@ -11168,7 +11172,7 @@
               </a:rPr>
               <a:t>Use the notes and references for deeper review.</a:t>
             </a:r>
-            <a:endParaRPr lang="en-US" sz="1220" dirty="0"/>
+            <a:endParaRPr lang="en-US" sz="1140" dirty="0"/>
           </a:p>
         </p:txBody>
       </p:sp>
@@ -11459,8 +11463,8 @@
         </p:nvSpPr>
         <p:spPr>
           <a:xfrm>
-            <a:off x="868680" y="1508760"/>
-            <a:ext cx="6309360" cy="4160520"/>
+            <a:off x="822960" y="1463040"/>
+            <a:ext cx="6565392" cy="4343400"/>
           </a:xfrm>
           <a:prstGeom prst="rect">
             <a:avLst/>
@@ -11478,7 +11482,7 @@
               <a:buNone/>
             </a:pPr>
             <a:r>
-              <a:rPr lang="en-US" sz="2100" dirty="0">
+              <a:rPr lang="en-US" sz="1920" dirty="0">
                 <a:solidFill>
                   <a:srgbClr val="003A63"/>
                 </a:solidFill>
@@ -11488,14 +11492,14 @@
               </a:rPr>
               <a:t>• AI evidence inventory</a:t>
             </a:r>
-            <a:endParaRPr lang="en-US" sz="2100" dirty="0"/>
-          </a:p>
-          <a:p>
-            <a:pPr indent="0" marL="0">
-              <a:buNone/>
-            </a:pPr>
-            <a:r>
-              <a:rPr lang="en-US" sz="2100" dirty="0">
+            <a:endParaRPr lang="en-US" sz="1920" dirty="0"/>
+          </a:p>
+          <a:p>
+            <a:pPr indent="0" marL="0">
+              <a:buNone/>
+            </a:pPr>
+            <a:r>
+              <a:rPr lang="en-US" sz="1920" dirty="0">
                 <a:solidFill>
                   <a:srgbClr val="003A63"/>
                 </a:solidFill>
@@ -11505,14 +11509,14 @@
               </a:rPr>
               <a:t>• Decision log template</a:t>
             </a:r>
-            <a:endParaRPr lang="en-US" sz="2100" dirty="0"/>
-          </a:p>
-          <a:p>
-            <a:pPr indent="0" marL="0">
-              <a:buNone/>
-            </a:pPr>
-            <a:r>
-              <a:rPr lang="en-US" sz="2100" dirty="0">
+            <a:endParaRPr lang="en-US" sz="1920" dirty="0"/>
+          </a:p>
+          <a:p>
+            <a:pPr indent="0" marL="0">
+              <a:buNone/>
+            </a:pPr>
+            <a:r>
+              <a:rPr lang="en-US" sz="1920" dirty="0">
                 <a:solidFill>
                   <a:srgbClr val="003A63"/>
                 </a:solidFill>
@@ -11522,7 +11526,7 @@
               </a:rPr>
               <a:t>• Artifact ownership and retention table</a:t>
             </a:r>
-            <a:endParaRPr lang="en-US" sz="2100" dirty="0"/>
+            <a:endParaRPr lang="en-US" sz="1920" dirty="0"/>
           </a:p>
         </p:txBody>
       </p:sp>
@@ -11534,12 +11538,12 @@
         </p:nvSpPr>
         <p:spPr>
           <a:xfrm>
-            <a:off x="7635240" y="1325880"/>
-            <a:ext cx="3474720" cy="1207008"/>
+            <a:off x="7543800" y="1325880"/>
+            <a:ext cx="3611880" cy="1261872"/>
           </a:xfrm>
           <a:prstGeom prst="roundRect">
             <a:avLst>
-              <a:gd name="adj" fmla="val 9091"/>
+              <a:gd name="adj" fmla="val 8696"/>
             </a:avLst>
           </a:prstGeom>
           <a:solidFill>
@@ -11561,8 +11565,8 @@
         </p:nvSpPr>
         <p:spPr>
           <a:xfrm>
-            <a:off x="7799832" y="1472184"/>
-            <a:ext cx="3145536" cy="256032"/>
+            <a:off x="7708392" y="1453896"/>
+            <a:ext cx="3282696" cy="228600"/>
           </a:xfrm>
           <a:prstGeom prst="rect">
             <a:avLst/>
@@ -11578,7 +11582,7 @@
               <a:buNone/>
             </a:pPr>
             <a:r>
-              <a:rPr lang="en-US" sz="1300" b="1" dirty="0">
+              <a:rPr lang="en-US" sz="1220" b="1" dirty="0">
                 <a:solidFill>
                   <a:srgbClr val="0068B7"/>
                 </a:solidFill>
@@ -11588,7 +11592,7 @@
               </a:rPr>
               <a:t>Practice focus</a:t>
             </a:r>
-            <a:endParaRPr lang="en-US" sz="1300" dirty="0"/>
+            <a:endParaRPr lang="en-US" sz="1220" dirty="0"/>
           </a:p>
         </p:txBody>
       </p:sp>
@@ -11600,8 +11604,8 @@
         </p:nvSpPr>
         <p:spPr>
           <a:xfrm>
-            <a:off x="7799832" y="1801368"/>
-            <a:ext cx="3145536" cy="640080"/>
+            <a:off x="7708392" y="1764792"/>
+            <a:ext cx="3282696" cy="749808"/>
           </a:xfrm>
           <a:prstGeom prst="rect">
             <a:avLst/>
@@ -11619,7 +11623,7 @@
               <a:buNone/>
             </a:pPr>
             <a:r>
-              <a:rPr lang="en-US" sz="1320" dirty="0">
+              <a:rPr lang="en-US" sz="1220" dirty="0">
                 <a:solidFill>
                   <a:srgbClr val="17364A"/>
                 </a:solidFill>
@@ -11629,7 +11633,7 @@
               </a:rPr>
               <a:t>AI evidence inventory</a:t>
             </a:r>
-            <a:endParaRPr lang="en-US" sz="1320" dirty="0"/>
+            <a:endParaRPr lang="en-US" sz="1220" dirty="0"/>
           </a:p>
         </p:txBody>
       </p:sp>
@@ -11641,12 +11645,12 @@
         </p:nvSpPr>
         <p:spPr>
           <a:xfrm>
-            <a:off x="7635240" y="2670048"/>
-            <a:ext cx="3474720" cy="1377086"/>
+            <a:off x="7543800" y="2724912"/>
+            <a:ext cx="3611880" cy="1527048"/>
           </a:xfrm>
           <a:prstGeom prst="roundRect">
             <a:avLst>
-              <a:gd name="adj" fmla="val 7968"/>
+              <a:gd name="adj" fmla="val 7186"/>
             </a:avLst>
           </a:prstGeom>
           <a:solidFill>
@@ -11668,8 +11672,8 @@
         </p:nvSpPr>
         <p:spPr>
           <a:xfrm>
-            <a:off x="7799832" y="2816352"/>
-            <a:ext cx="3145536" cy="256032"/>
+            <a:off x="7708392" y="2852928"/>
+            <a:ext cx="3282696" cy="228600"/>
           </a:xfrm>
           <a:prstGeom prst="rect">
             <a:avLst/>
@@ -11685,7 +11689,7 @@
               <a:buNone/>
             </a:pPr>
             <a:r>
-              <a:rPr lang="en-US" sz="1300" b="1" dirty="0">
+              <a:rPr lang="en-US" sz="1220" b="1" dirty="0">
                 <a:solidFill>
                   <a:srgbClr val="0068B7"/>
                 </a:solidFill>
@@ -11695,7 +11699,7 @@
               </a:rPr>
               <a:t>Concept checkpoints</a:t>
             </a:r>
-            <a:endParaRPr lang="en-US" sz="1300" dirty="0"/>
+            <a:endParaRPr lang="en-US" sz="1220" dirty="0"/>
           </a:p>
         </p:txBody>
       </p:sp>
@@ -11707,8 +11711,8 @@
         </p:nvSpPr>
         <p:spPr>
           <a:xfrm>
-            <a:off x="7818120" y="3182112"/>
-            <a:ext cx="3090672" cy="718718"/>
+            <a:off x="7726680" y="3182112"/>
+            <a:ext cx="3227832" cy="960120"/>
           </a:xfrm>
           <a:prstGeom prst="rect">
             <a:avLst/>
@@ -11726,7 +11730,7 @@
               <a:buNone/>
             </a:pPr>
             <a:r>
-              <a:rPr lang="en-US" sz="1220" dirty="0">
+              <a:rPr lang="en-US" sz="1140" dirty="0">
                 <a:solidFill>
                   <a:srgbClr val="17364A"/>
                 </a:solidFill>
@@ -11736,14 +11740,14 @@
               </a:rPr>
               <a:t>Gap list for missing evidence</a:t>
             </a:r>
-            <a:endParaRPr lang="en-US" sz="1220" dirty="0"/>
-          </a:p>
-          <a:p>
-            <a:pPr indent="0" marL="0">
-              <a:buNone/>
-            </a:pPr>
-            <a:r>
-              <a:rPr lang="en-US" sz="1220" dirty="0">
+            <a:endParaRPr lang="en-US" sz="1140" dirty="0"/>
+          </a:p>
+          <a:p>
+            <a:pPr indent="0" marL="0">
+              <a:buNone/>
+            </a:pPr>
+            <a:r>
+              <a:rPr lang="en-US" sz="1140" dirty="0">
                 <a:solidFill>
                   <a:srgbClr val="17364A"/>
                 </a:solidFill>
@@ -11753,7 +11757,7 @@
               </a:rPr>
               <a:t>Review schedule</a:t>
             </a:r>
-            <a:endParaRPr lang="en-US" sz="1220" dirty="0"/>
+            <a:endParaRPr lang="en-US" sz="1140" dirty="0"/>
           </a:p>
         </p:txBody>
       </p:sp>
@@ -11765,12 +11769,12 @@
         </p:nvSpPr>
         <p:spPr>
           <a:xfrm>
-            <a:off x="7635240" y="4184294"/>
-            <a:ext cx="3474720" cy="1466698"/>
+            <a:off x="7543800" y="4389120"/>
+            <a:ext cx="3611880" cy="1261872"/>
           </a:xfrm>
           <a:prstGeom prst="roundRect">
             <a:avLst>
-              <a:gd name="adj" fmla="val 7481"/>
+              <a:gd name="adj" fmla="val 8696"/>
             </a:avLst>
           </a:prstGeom>
           <a:solidFill>
@@ -11792,8 +11796,8 @@
         </p:nvSpPr>
         <p:spPr>
           <a:xfrm>
-            <a:off x="7799832" y="4330598"/>
-            <a:ext cx="3145536" cy="256032"/>
+            <a:off x="7708392" y="4517136"/>
+            <a:ext cx="3282696" cy="228600"/>
           </a:xfrm>
           <a:prstGeom prst="rect">
             <a:avLst/>
@@ -11809,7 +11813,7 @@
               <a:buNone/>
             </a:pPr>
             <a:r>
-              <a:rPr lang="en-US" sz="1300" b="1" dirty="0">
+              <a:rPr lang="en-US" sz="1220" b="1" dirty="0">
                 <a:solidFill>
                   <a:srgbClr val="0068B7"/>
                 </a:solidFill>
@@ -11819,7 +11823,7 @@
               </a:rPr>
               <a:t>What to produce</a:t>
             </a:r>
-            <a:endParaRPr lang="en-US" sz="1300" dirty="0"/>
+            <a:endParaRPr lang="en-US" sz="1220" dirty="0"/>
           </a:p>
         </p:txBody>
       </p:sp>
@@ -11831,8 +11835,8 @@
         </p:nvSpPr>
         <p:spPr>
           <a:xfrm>
-            <a:off x="7799832" y="4659782"/>
-            <a:ext cx="3145536" cy="899770"/>
+            <a:off x="7708392" y="4828032"/>
+            <a:ext cx="3282696" cy="749808"/>
           </a:xfrm>
           <a:prstGeom prst="rect">
             <a:avLst/>
@@ -11850,7 +11854,7 @@
               <a:buNone/>
             </a:pPr>
             <a:r>
-              <a:rPr lang="en-US" sz="1320" dirty="0">
+              <a:rPr lang="en-US" sz="1220" dirty="0">
                 <a:solidFill>
                   <a:srgbClr val="17364A"/>
                 </a:solidFill>
@@ -11858,9 +11862,9 @@
                 <a:ea typeface="Aptos" pitchFamily="34" charset="-122"/>
                 <a:cs typeface="Aptos" pitchFamily="34" charset="-120"/>
               </a:rPr>
-              <a:t>Use the assignment to test whether you can explain the concept, apply it to a realistic public health situation, and identify what would need review before the work moves forward.</a:t>
-            </a:r>
-            <a:endParaRPr lang="en-US" sz="1320" dirty="0"/>
+              <a:t>Use the assignment to test whether you can explain the concept, apply it to a.</a:t>
+            </a:r>
+            <a:endParaRPr lang="en-US" sz="1220" dirty="0"/>
           </a:p>
         </p:txBody>
       </p:sp>
@@ -12151,8 +12155,8 @@
         </p:nvSpPr>
         <p:spPr>
           <a:xfrm>
-            <a:off x="868680" y="1508760"/>
-            <a:ext cx="6309360" cy="4160520"/>
+            <a:off x="822960" y="1463040"/>
+            <a:ext cx="6565392" cy="4343400"/>
           </a:xfrm>
           <a:prstGeom prst="rect">
             <a:avLst/>
@@ -12170,7 +12174,7 @@
               <a:buNone/>
             </a:pPr>
             <a:r>
-              <a:rPr lang="en-US" sz="2100" dirty="0">
+              <a:rPr lang="en-US" sz="1920" dirty="0">
                 <a:solidFill>
                   <a:srgbClr val="003A63"/>
                 </a:solidFill>
@@ -12180,14 +12184,14 @@
               </a:rPr>
               <a:t>• 1. What is AI audit readiness?</a:t>
             </a:r>
-            <a:endParaRPr lang="en-US" sz="2100" dirty="0"/>
-          </a:p>
-          <a:p>
-            <a:pPr indent="0" marL="0">
-              <a:buNone/>
-            </a:pPr>
-            <a:r>
-              <a:rPr lang="en-US" sz="2100" dirty="0">
+            <a:endParaRPr lang="en-US" sz="1920" dirty="0"/>
+          </a:p>
+          <a:p>
+            <a:pPr indent="0" marL="0">
+              <a:buNone/>
+            </a:pPr>
+            <a:r>
+              <a:rPr lang="en-US" sz="1920" dirty="0">
                 <a:solidFill>
                   <a:srgbClr val="003A63"/>
                 </a:solidFill>
@@ -12197,14 +12201,14 @@
               </a:rPr>
               <a:t>• 2. Which record should be preserved from AI governance review?</a:t>
             </a:r>
-            <a:endParaRPr lang="en-US" sz="2100" dirty="0"/>
-          </a:p>
-          <a:p>
-            <a:pPr indent="0" marL="0">
-              <a:buNone/>
-            </a:pPr>
-            <a:r>
-              <a:rPr lang="en-US" sz="2100" dirty="0">
+            <a:endParaRPr lang="en-US" sz="1920" dirty="0"/>
+          </a:p>
+          <a:p>
+            <a:pPr indent="0" marL="0">
+              <a:buNone/>
+            </a:pPr>
+            <a:r>
+              <a:rPr lang="en-US" sz="1920" dirty="0">
                 <a:solidFill>
                   <a:srgbClr val="003A63"/>
                 </a:solidFill>
@@ -12214,7 +12218,7 @@
               </a:rPr>
               <a:t>• 3. What is validation evidence?</a:t>
             </a:r>
-            <a:endParaRPr lang="en-US" sz="2100" dirty="0"/>
+            <a:endParaRPr lang="en-US" sz="1920" dirty="0"/>
           </a:p>
         </p:txBody>
       </p:sp>
@@ -12226,12 +12230,12 @@
         </p:nvSpPr>
         <p:spPr>
           <a:xfrm>
-            <a:off x="7635240" y="1325880"/>
-            <a:ext cx="3474720" cy="1207008"/>
+            <a:off x="7543800" y="1325880"/>
+            <a:ext cx="3611880" cy="1261872"/>
           </a:xfrm>
           <a:prstGeom prst="roundRect">
             <a:avLst>
-              <a:gd name="adj" fmla="val 9091"/>
+              <a:gd name="adj" fmla="val 8696"/>
             </a:avLst>
           </a:prstGeom>
           <a:solidFill>
@@ -12253,8 +12257,8 @@
         </p:nvSpPr>
         <p:spPr>
           <a:xfrm>
-            <a:off x="7799832" y="1472184"/>
-            <a:ext cx="3145536" cy="256032"/>
+            <a:off x="7708392" y="1453896"/>
+            <a:ext cx="3282696" cy="228600"/>
           </a:xfrm>
           <a:prstGeom prst="rect">
             <a:avLst/>
@@ -12270,7 +12274,7 @@
               <a:buNone/>
             </a:pPr>
             <a:r>
-              <a:rPr lang="en-US" sz="1300" b="1" dirty="0">
+              <a:rPr lang="en-US" sz="1220" b="1" dirty="0">
                 <a:solidFill>
                   <a:srgbClr val="0068B7"/>
                 </a:solidFill>
@@ -12280,7 +12284,7 @@
               </a:rPr>
               <a:t>Practice focus</a:t>
             </a:r>
-            <a:endParaRPr lang="en-US" sz="1300" dirty="0"/>
+            <a:endParaRPr lang="en-US" sz="1220" dirty="0"/>
           </a:p>
         </p:txBody>
       </p:sp>
@@ -12292,8 +12296,8 @@
         </p:nvSpPr>
         <p:spPr>
           <a:xfrm>
-            <a:off x="7799832" y="1801368"/>
-            <a:ext cx="3145536" cy="640080"/>
+            <a:off x="7708392" y="1764792"/>
+            <a:ext cx="3282696" cy="749808"/>
           </a:xfrm>
           <a:prstGeom prst="rect">
             <a:avLst/>
@@ -12311,7 +12315,7 @@
               <a:buNone/>
             </a:pPr>
             <a:r>
-              <a:rPr lang="en-US" sz="1320" dirty="0">
+              <a:rPr lang="en-US" sz="1220" dirty="0">
                 <a:solidFill>
                   <a:srgbClr val="17364A"/>
                 </a:solidFill>
@@ -12321,7 +12325,7 @@
               </a:rPr>
               <a:t>1. What is AI audit readiness?</a:t>
             </a:r>
-            <a:endParaRPr lang="en-US" sz="1320" dirty="0"/>
+            <a:endParaRPr lang="en-US" sz="1220" dirty="0"/>
           </a:p>
         </p:txBody>
       </p:sp>
@@ -12333,12 +12337,12 @@
         </p:nvSpPr>
         <p:spPr>
           <a:xfrm>
-            <a:off x="7635240" y="2670048"/>
-            <a:ext cx="3474720" cy="1377086"/>
+            <a:off x="7543800" y="2724912"/>
+            <a:ext cx="3611880" cy="1527048"/>
           </a:xfrm>
           <a:prstGeom prst="roundRect">
             <a:avLst>
-              <a:gd name="adj" fmla="val 7968"/>
+              <a:gd name="adj" fmla="val 7186"/>
             </a:avLst>
           </a:prstGeom>
           <a:solidFill>
@@ -12360,8 +12364,8 @@
         </p:nvSpPr>
         <p:spPr>
           <a:xfrm>
-            <a:off x="7799832" y="2816352"/>
-            <a:ext cx="3145536" cy="256032"/>
+            <a:off x="7708392" y="2852928"/>
+            <a:ext cx="3282696" cy="228600"/>
           </a:xfrm>
           <a:prstGeom prst="rect">
             <a:avLst/>
@@ -12377,7 +12381,7 @@
               <a:buNone/>
             </a:pPr>
             <a:r>
-              <a:rPr lang="en-US" sz="1300" b="1" dirty="0">
+              <a:rPr lang="en-US" sz="1220" b="1" dirty="0">
                 <a:solidFill>
                   <a:srgbClr val="0068B7"/>
                 </a:solidFill>
@@ -12387,7 +12391,7 @@
               </a:rPr>
               <a:t>Concept checkpoints</a:t>
             </a:r>
-            <a:endParaRPr lang="en-US" sz="1300" dirty="0"/>
+            <a:endParaRPr lang="en-US" sz="1220" dirty="0"/>
           </a:p>
         </p:txBody>
       </p:sp>
@@ -12399,8 +12403,8 @@
         </p:nvSpPr>
         <p:spPr>
           <a:xfrm>
-            <a:off x="7818120" y="3182112"/>
-            <a:ext cx="3090672" cy="718718"/>
+            <a:off x="7726680" y="3182112"/>
+            <a:ext cx="3227832" cy="960120"/>
           </a:xfrm>
           <a:prstGeom prst="rect">
             <a:avLst/>
@@ -12418,7 +12422,7 @@
               <a:buNone/>
             </a:pPr>
             <a:r>
-              <a:rPr lang="en-US" sz="1220" dirty="0">
+              <a:rPr lang="en-US" sz="1140" dirty="0">
                 <a:solidFill>
                   <a:srgbClr val="17364A"/>
                 </a:solidFill>
@@ -12428,14 +12432,14 @@
               </a:rPr>
               <a:t>1.</a:t>
             </a:r>
-            <a:endParaRPr lang="en-US" sz="1220" dirty="0"/>
-          </a:p>
-          <a:p>
-            <a:pPr indent="0" marL="0">
-              <a:buNone/>
-            </a:pPr>
-            <a:r>
-              <a:rPr lang="en-US" sz="1220" dirty="0">
+            <a:endParaRPr lang="en-US" sz="1140" dirty="0"/>
+          </a:p>
+          <a:p>
+            <a:pPr indent="0" marL="0">
+              <a:buNone/>
+            </a:pPr>
+            <a:r>
+              <a:rPr lang="en-US" sz="1140" dirty="0">
                 <a:solidFill>
                   <a:srgbClr val="17364A"/>
                 </a:solidFill>
@@ -12445,14 +12449,14 @@
               </a:rPr>
               <a:t>What is AI audit readiness?</a:t>
             </a:r>
-            <a:endParaRPr lang="en-US" sz="1220" dirty="0"/>
-          </a:p>
-          <a:p>
-            <a:pPr indent="0" marL="0">
-              <a:buNone/>
-            </a:pPr>
-            <a:r>
-              <a:rPr lang="en-US" sz="1220" dirty="0">
+            <a:endParaRPr lang="en-US" sz="1140" dirty="0"/>
+          </a:p>
+          <a:p>
+            <a:pPr indent="0" marL="0">
+              <a:buNone/>
+            </a:pPr>
+            <a:r>
+              <a:rPr lang="en-US" sz="1140" dirty="0">
                 <a:solidFill>
                   <a:srgbClr val="17364A"/>
                 </a:solidFill>
@@ -12462,7 +12466,7 @@
               </a:rPr>
               <a:t>2.</a:t>
             </a:r>
-            <a:endParaRPr lang="en-US" sz="1220" dirty="0"/>
+            <a:endParaRPr lang="en-US" sz="1140" dirty="0"/>
           </a:p>
         </p:txBody>
       </p:sp>
@@ -12474,12 +12478,12 @@
         </p:nvSpPr>
         <p:spPr>
           <a:xfrm>
-            <a:off x="7635240" y="4184294"/>
-            <a:ext cx="3474720" cy="1466698"/>
+            <a:off x="7543800" y="4389120"/>
+            <a:ext cx="3611880" cy="1261872"/>
           </a:xfrm>
           <a:prstGeom prst="roundRect">
             <a:avLst>
-              <a:gd name="adj" fmla="val 7481"/>
+              <a:gd name="adj" fmla="val 8696"/>
             </a:avLst>
           </a:prstGeom>
           <a:solidFill>
@@ -12501,8 +12505,8 @@
         </p:nvSpPr>
         <p:spPr>
           <a:xfrm>
-            <a:off x="7799832" y="4330598"/>
-            <a:ext cx="3145536" cy="256032"/>
+            <a:off x="7708392" y="4517136"/>
+            <a:ext cx="3282696" cy="228600"/>
           </a:xfrm>
           <a:prstGeom prst="rect">
             <a:avLst/>
@@ -12518,7 +12522,7 @@
               <a:buNone/>
             </a:pPr>
             <a:r>
-              <a:rPr lang="en-US" sz="1300" b="1" dirty="0">
+              <a:rPr lang="en-US" sz="1220" b="1" dirty="0">
                 <a:solidFill>
                   <a:srgbClr val="0068B7"/>
                 </a:solidFill>
@@ -12528,7 +12532,7 @@
               </a:rPr>
               <a:t>What to produce</a:t>
             </a:r>
-            <a:endParaRPr lang="en-US" sz="1300" dirty="0"/>
+            <a:endParaRPr lang="en-US" sz="1220" dirty="0"/>
           </a:p>
         </p:txBody>
       </p:sp>
@@ -12540,8 +12544,8 @@
         </p:nvSpPr>
         <p:spPr>
           <a:xfrm>
-            <a:off x="7799832" y="4659782"/>
-            <a:ext cx="3145536" cy="899770"/>
+            <a:off x="7708392" y="4828032"/>
+            <a:ext cx="3282696" cy="749808"/>
           </a:xfrm>
           <a:prstGeom prst="rect">
             <a:avLst/>
@@ -12559,7 +12563,7 @@
               <a:buNone/>
             </a:pPr>
             <a:r>
-              <a:rPr lang="en-US" sz="1320" dirty="0">
+              <a:rPr lang="en-US" sz="1220" dirty="0">
                 <a:solidFill>
                   <a:srgbClr val="17364A"/>
                 </a:solidFill>
@@ -12567,9 +12571,9 @@
                 <a:ea typeface="Aptos" pitchFamily="34" charset="-122"/>
                 <a:cs typeface="Aptos" pitchFamily="34" charset="-120"/>
               </a:rPr>
-              <a:t>Use the assignment to test whether you can explain the concept, apply it to a realistic public health situation, and identify what would need review before the work moves forward.</a:t>
-            </a:r>
-            <a:endParaRPr lang="en-US" sz="1320" dirty="0"/>
+              <a:t>Use the assignment to test whether you can explain the concept, apply it to a.</a:t>
+            </a:r>
+            <a:endParaRPr lang="en-US" sz="1220" dirty="0"/>
           </a:p>
         </p:txBody>
       </p:sp>
@@ -12860,8 +12864,8 @@
         </p:nvSpPr>
         <p:spPr>
           <a:xfrm>
-            <a:off x="868680" y="1508760"/>
-            <a:ext cx="6309360" cy="4160520"/>
+            <a:off x="822960" y="1463040"/>
+            <a:ext cx="6565392" cy="4343400"/>
           </a:xfrm>
           <a:prstGeom prst="rect">
             <a:avLst/>
@@ -12879,7 +12883,7 @@
               <a:buNone/>
             </a:pPr>
             <a:r>
-              <a:rPr lang="en-US" sz="2100" dirty="0">
+              <a:rPr lang="en-US" sz="1920" dirty="0">
                 <a:solidFill>
                   <a:srgbClr val="003A63"/>
                 </a:solidFill>
@@ -12889,14 +12893,14 @@
               </a:rPr>
               <a:t>• NIST Artificial Intelligence Risk Management Framework:.</a:t>
             </a:r>
-            <a:endParaRPr lang="en-US" sz="2100" dirty="0"/>
-          </a:p>
-          <a:p>
-            <a:pPr indent="0" marL="0">
-              <a:buNone/>
-            </a:pPr>
-            <a:r>
-              <a:rPr lang="en-US" sz="2100" dirty="0">
+            <a:endParaRPr lang="en-US" sz="1920" dirty="0"/>
+          </a:p>
+          <a:p>
+            <a:pPr indent="0" marL="0">
+              <a:buNone/>
+            </a:pPr>
+            <a:r>
+              <a:rPr lang="en-US" sz="1920" dirty="0">
                 <a:solidFill>
                   <a:srgbClr val="003A63"/>
                 </a:solidFill>
@@ -12906,14 +12910,14 @@
               </a:rPr>
               <a:t>• NIST Generative AI Profile:.</a:t>
             </a:r>
-            <a:endParaRPr lang="en-US" sz="2100" dirty="0"/>
-          </a:p>
-          <a:p>
-            <a:pPr indent="0" marL="0">
-              <a:buNone/>
-            </a:pPr>
-            <a:r>
-              <a:rPr lang="en-US" sz="2100" dirty="0">
+            <a:endParaRPr lang="en-US" sz="1920" dirty="0"/>
+          </a:p>
+          <a:p>
+            <a:pPr indent="0" marL="0">
+              <a:buNone/>
+            </a:pPr>
+            <a:r>
+              <a:rPr lang="en-US" sz="1920" dirty="0">
                 <a:solidFill>
                   <a:srgbClr val="003A63"/>
                 </a:solidFill>
@@ -12923,7 +12927,7 @@
               </a:rPr>
               <a:t>• CDC Public Health Data Strategy and Data Modernization resources:.</a:t>
             </a:r>
-            <a:endParaRPr lang="en-US" sz="2100" dirty="0"/>
+            <a:endParaRPr lang="en-US" sz="1920" dirty="0"/>
           </a:p>
         </p:txBody>
       </p:sp>
@@ -12935,12 +12939,12 @@
         </p:nvSpPr>
         <p:spPr>
           <a:xfrm>
-            <a:off x="7635240" y="1325880"/>
-            <a:ext cx="3474720" cy="1207008"/>
+            <a:off x="7543800" y="1325880"/>
+            <a:ext cx="3611880" cy="1261872"/>
           </a:xfrm>
           <a:prstGeom prst="roundRect">
             <a:avLst>
-              <a:gd name="adj" fmla="val 9091"/>
+              <a:gd name="adj" fmla="val 8696"/>
             </a:avLst>
           </a:prstGeom>
           <a:solidFill>
@@ -12962,8 +12966,8 @@
         </p:nvSpPr>
         <p:spPr>
           <a:xfrm>
-            <a:off x="7799832" y="1472184"/>
-            <a:ext cx="3145536" cy="256032"/>
+            <a:off x="7708392" y="1453896"/>
+            <a:ext cx="3282696" cy="228600"/>
           </a:xfrm>
           <a:prstGeom prst="rect">
             <a:avLst/>
@@ -12979,7 +12983,7 @@
               <a:buNone/>
             </a:pPr>
             <a:r>
-              <a:rPr lang="en-US" sz="1300" b="1" dirty="0">
+              <a:rPr lang="en-US" sz="1220" b="1" dirty="0">
                 <a:solidFill>
                   <a:srgbClr val="0068B7"/>
                 </a:solidFill>
@@ -12989,7 +12993,7 @@
               </a:rPr>
               <a:t>Core concept</a:t>
             </a:r>
-            <a:endParaRPr lang="en-US" sz="1300" dirty="0"/>
+            <a:endParaRPr lang="en-US" sz="1220" dirty="0"/>
           </a:p>
         </p:txBody>
       </p:sp>
@@ -13001,8 +13005,8 @@
         </p:nvSpPr>
         <p:spPr>
           <a:xfrm>
-            <a:off x="7799832" y="1801368"/>
-            <a:ext cx="3145536" cy="640080"/>
+            <a:off x="7708392" y="1764792"/>
+            <a:ext cx="3282696" cy="749808"/>
           </a:xfrm>
           <a:prstGeom prst="rect">
             <a:avLst/>
@@ -13020,7 +13024,7 @@
               <a:buNone/>
             </a:pPr>
             <a:r>
-              <a:rPr lang="en-US" sz="1320" dirty="0">
+              <a:rPr lang="en-US" sz="1220" dirty="0">
                 <a:solidFill>
                   <a:srgbClr val="17364A"/>
                 </a:solidFill>
@@ -13030,7 +13034,7 @@
               </a:rPr>
               <a:t>NIST Artificial Intelligence Risk Management Framework:.</a:t>
             </a:r>
-            <a:endParaRPr lang="en-US" sz="1320" dirty="0"/>
+            <a:endParaRPr lang="en-US" sz="1220" dirty="0"/>
           </a:p>
         </p:txBody>
       </p:sp>
@@ -13042,12 +13046,12 @@
         </p:nvSpPr>
         <p:spPr>
           <a:xfrm>
-            <a:off x="7635240" y="2670048"/>
-            <a:ext cx="3474720" cy="1377086"/>
+            <a:off x="7543800" y="2724912"/>
+            <a:ext cx="3611880" cy="1527048"/>
           </a:xfrm>
           <a:prstGeom prst="roundRect">
             <a:avLst>
-              <a:gd name="adj" fmla="val 7968"/>
+              <a:gd name="adj" fmla="val 7186"/>
             </a:avLst>
           </a:prstGeom>
           <a:solidFill>
@@ -13069,8 +13073,8 @@
         </p:nvSpPr>
         <p:spPr>
           <a:xfrm>
-            <a:off x="7799832" y="2816352"/>
-            <a:ext cx="3145536" cy="256032"/>
+            <a:off x="7708392" y="2852928"/>
+            <a:ext cx="3282696" cy="228600"/>
           </a:xfrm>
           <a:prstGeom prst="rect">
             <a:avLst/>
@@ -13086,7 +13090,7 @@
               <a:buNone/>
             </a:pPr>
             <a:r>
-              <a:rPr lang="en-US" sz="1300" b="1" dirty="0">
+              <a:rPr lang="en-US" sz="1220" b="1" dirty="0">
                 <a:solidFill>
                   <a:srgbClr val="0068B7"/>
                 </a:solidFill>
@@ -13096,7 +13100,7 @@
               </a:rPr>
               <a:t>Concept checkpoints</a:t>
             </a:r>
-            <a:endParaRPr lang="en-US" sz="1300" dirty="0"/>
+            <a:endParaRPr lang="en-US" sz="1220" dirty="0"/>
           </a:p>
         </p:txBody>
       </p:sp>
@@ -13108,8 +13112,8 @@
         </p:nvSpPr>
         <p:spPr>
           <a:xfrm>
-            <a:off x="7818120" y="3182112"/>
-            <a:ext cx="3090672" cy="718718"/>
+            <a:off x="7726680" y="3182112"/>
+            <a:ext cx="3227832" cy="960120"/>
           </a:xfrm>
           <a:prstGeom prst="rect">
             <a:avLst/>
@@ -13127,7 +13131,7 @@
               <a:buNone/>
             </a:pPr>
             <a:r>
-              <a:rPr lang="en-US" sz="1220" dirty="0">
+              <a:rPr lang="en-US" sz="1140" dirty="0">
                 <a:solidFill>
                   <a:srgbClr val="17364A"/>
                 </a:solidFill>
@@ -13135,16 +13139,16 @@
                 <a:ea typeface="Aptos" pitchFamily="34" charset="-122"/>
                 <a:cs typeface="Aptos" pitchFamily="34" charset="-120"/>
               </a:rPr>
-              <a:t>NIST Artificial Intelligence Risk Management Framework:.</a:t>
-            </a:r>
-            <a:endParaRPr lang="en-US" sz="1220" dirty="0"/>
-          </a:p>
-          <a:p>
-            <a:pPr indent="0" marL="0">
-              <a:buNone/>
-            </a:pPr>
-            <a:r>
-              <a:rPr lang="en-US" sz="1220" dirty="0">
+              <a:t>NIST Artificial Intelligence Risk Management.</a:t>
+            </a:r>
+            <a:endParaRPr lang="en-US" sz="1140" dirty="0"/>
+          </a:p>
+          <a:p>
+            <a:pPr indent="0" marL="0">
+              <a:buNone/>
+            </a:pPr>
+            <a:r>
+              <a:rPr lang="en-US" sz="1140" dirty="0">
                 <a:solidFill>
                   <a:srgbClr val="17364A"/>
                 </a:solidFill>
@@ -13154,14 +13158,14 @@
               </a:rPr>
               <a:t>OWASP guidance for LLM application security</a:t>
             </a:r>
-            <a:endParaRPr lang="en-US" sz="1220" dirty="0"/>
-          </a:p>
-          <a:p>
-            <a:pPr indent="0" marL="0">
-              <a:buNone/>
-            </a:pPr>
-            <a:r>
-              <a:rPr lang="en-US" sz="1220" dirty="0">
+            <a:endParaRPr lang="en-US" sz="1140" dirty="0"/>
+          </a:p>
+          <a:p>
+            <a:pPr indent="0" marL="0">
+              <a:buNone/>
+            </a:pPr>
+            <a:r>
+              <a:rPr lang="en-US" sz="1140" dirty="0">
                 <a:solidFill>
                   <a:srgbClr val="17364A"/>
                 </a:solidFill>
@@ -13169,9 +13173,9 @@
                 <a:ea typeface="Aptos" pitchFamily="34" charset="-122"/>
                 <a:cs typeface="Aptos" pitchFamily="34" charset="-120"/>
               </a:rPr>
-              <a:t>Agency policies for privacy, cybersecurity, records, procurement,.</a:t>
-            </a:r>
-            <a:endParaRPr lang="en-US" sz="1220" dirty="0"/>
+              <a:t>Agency policies for privacy, cybersecurity,.</a:t>
+            </a:r>
+            <a:endParaRPr lang="en-US" sz="1140" dirty="0"/>
           </a:p>
         </p:txBody>
       </p:sp>
@@ -13183,12 +13187,12 @@
         </p:nvSpPr>
         <p:spPr>
           <a:xfrm>
-            <a:off x="7635240" y="4184294"/>
-            <a:ext cx="3474720" cy="1466698"/>
+            <a:off x="7543800" y="4389120"/>
+            <a:ext cx="3611880" cy="1261872"/>
           </a:xfrm>
           <a:prstGeom prst="roundRect">
             <a:avLst>
-              <a:gd name="adj" fmla="val 7481"/>
+              <a:gd name="adj" fmla="val 8696"/>
             </a:avLst>
           </a:prstGeom>
           <a:solidFill>
@@ -13210,8 +13214,8 @@
         </p:nvSpPr>
         <p:spPr>
           <a:xfrm>
-            <a:off x="7799832" y="4330598"/>
-            <a:ext cx="3145536" cy="256032"/>
+            <a:off x="7708392" y="4517136"/>
+            <a:ext cx="3282696" cy="228600"/>
           </a:xfrm>
           <a:prstGeom prst="rect">
             <a:avLst/>
@@ -13227,7 +13231,7 @@
               <a:buNone/>
             </a:pPr>
             <a:r>
-              <a:rPr lang="en-US" sz="1300" b="1" dirty="0">
+              <a:rPr lang="en-US" sz="1220" b="1" dirty="0">
                 <a:solidFill>
                   <a:srgbClr val="0068B7"/>
                 </a:solidFill>
@@ -13237,7 +13241,7 @@
               </a:rPr>
               <a:t>Apply it</a:t>
             </a:r>
-            <a:endParaRPr lang="en-US" sz="1300" dirty="0"/>
+            <a:endParaRPr lang="en-US" sz="1220" dirty="0"/>
           </a:p>
         </p:txBody>
       </p:sp>
@@ -13249,8 +13253,8 @@
         </p:nvSpPr>
         <p:spPr>
           <a:xfrm>
-            <a:off x="7799832" y="4659782"/>
-            <a:ext cx="3145536" cy="899770"/>
+            <a:off x="7708392" y="4828032"/>
+            <a:ext cx="3282696" cy="749808"/>
           </a:xfrm>
           <a:prstGeom prst="rect">
             <a:avLst/>
@@ -13268,7 +13272,7 @@
               <a:buNone/>
             </a:pPr>
             <a:r>
-              <a:rPr lang="en-US" sz="1320" dirty="0">
+              <a:rPr lang="en-US" sz="1220" dirty="0">
                 <a:solidFill>
                   <a:srgbClr val="17364A"/>
                 </a:solidFill>
@@ -13276,9 +13280,9 @@
                 <a:ea typeface="Aptos" pitchFamily="34" charset="-122"/>
                 <a:cs typeface="Aptos" pitchFamily="34" charset="-120"/>
               </a:rPr>
-              <a:t>Connect the concept to public health purpose, responsible use, required safeguards, documentation, and the next action a department should take.</a:t>
-            </a:r>
-            <a:endParaRPr lang="en-US" sz="1320" dirty="0"/>
+              <a:t>Connect the concept to public health purpose, responsible use, required.</a:t>
+            </a:r>
+            <a:endParaRPr lang="en-US" sz="1220" dirty="0"/>
           </a:p>
         </p:txBody>
       </p:sp>
@@ -13569,8 +13573,8 @@
         </p:nvSpPr>
         <p:spPr>
           <a:xfrm>
-            <a:off x="868680" y="1508760"/>
-            <a:ext cx="6309360" cy="4160520"/>
+            <a:off x="822960" y="1463040"/>
+            <a:ext cx="6565392" cy="4343400"/>
           </a:xfrm>
           <a:prstGeom prst="rect">
             <a:avLst/>
@@ -13588,7 +13592,7 @@
               <a:buNone/>
             </a:pPr>
             <a:r>
-              <a:rPr lang="en-US" sz="2100" dirty="0">
+              <a:rPr lang="en-US" sz="1920" dirty="0">
                 <a:solidFill>
                   <a:srgbClr val="003A63"/>
                 </a:solidFill>
@@ -13596,9 +13600,9 @@
                 <a:ea typeface="Aptos" pitchFamily="34" charset="-122"/>
                 <a:cs typeface="Aptos" pitchFamily="34" charset="-120"/>
               </a:rPr>
-              <a:t>• Relevant public health program SOPs, data governance documentation, and implementation plans</a:t>
-            </a:r>
-            <a:endParaRPr lang="en-US" sz="2100" dirty="0"/>
+              <a:t>• Relevant public health program SOPs, data governance documentation, and.</a:t>
+            </a:r>
+            <a:endParaRPr lang="en-US" sz="1920" dirty="0"/>
           </a:p>
         </p:txBody>
       </p:sp>
@@ -13610,12 +13614,12 @@
         </p:nvSpPr>
         <p:spPr>
           <a:xfrm>
-            <a:off x="7635240" y="1325880"/>
-            <a:ext cx="3474720" cy="1207008"/>
+            <a:off x="7543800" y="1325880"/>
+            <a:ext cx="3611880" cy="1261872"/>
           </a:xfrm>
           <a:prstGeom prst="roundRect">
             <a:avLst>
-              <a:gd name="adj" fmla="val 9091"/>
+              <a:gd name="adj" fmla="val 8696"/>
             </a:avLst>
           </a:prstGeom>
           <a:solidFill>
@@ -13637,8 +13641,8 @@
         </p:nvSpPr>
         <p:spPr>
           <a:xfrm>
-            <a:off x="7799832" y="1472184"/>
-            <a:ext cx="3145536" cy="256032"/>
+            <a:off x="7708392" y="1453896"/>
+            <a:ext cx="3282696" cy="228600"/>
           </a:xfrm>
           <a:prstGeom prst="rect">
             <a:avLst/>
@@ -13654,7 +13658,7 @@
               <a:buNone/>
             </a:pPr>
             <a:r>
-              <a:rPr lang="en-US" sz="1300" b="1" dirty="0">
+              <a:rPr lang="en-US" sz="1220" b="1" dirty="0">
                 <a:solidFill>
                   <a:srgbClr val="0068B7"/>
                 </a:solidFill>
@@ -13664,7 +13668,7 @@
               </a:rPr>
               <a:t>Core concept</a:t>
             </a:r>
-            <a:endParaRPr lang="en-US" sz="1300" dirty="0"/>
+            <a:endParaRPr lang="en-US" sz="1220" dirty="0"/>
           </a:p>
         </p:txBody>
       </p:sp>
@@ -13676,8 +13680,8 @@
         </p:nvSpPr>
         <p:spPr>
           <a:xfrm>
-            <a:off x="7799832" y="1801368"/>
-            <a:ext cx="3145536" cy="640080"/>
+            <a:off x="7708392" y="1764792"/>
+            <a:ext cx="3282696" cy="749808"/>
           </a:xfrm>
           <a:prstGeom prst="rect">
             <a:avLst/>
@@ -13695,7 +13699,7 @@
               <a:buNone/>
             </a:pPr>
             <a:r>
-              <a:rPr lang="en-US" sz="1320" dirty="0">
+              <a:rPr lang="en-US" sz="1220" dirty="0">
                 <a:solidFill>
                   <a:srgbClr val="17364A"/>
                 </a:solidFill>
@@ -13703,9 +13707,9 @@
                 <a:ea typeface="Aptos" pitchFamily="34" charset="-122"/>
                 <a:cs typeface="Aptos" pitchFamily="34" charset="-120"/>
               </a:rPr>
-              <a:t>Relevant public health program SOPs, data governance documentation, and implementation.</a:t>
-            </a:r>
-            <a:endParaRPr lang="en-US" sz="1320" dirty="0"/>
+              <a:t>Relevant public health program SOPs, data governance documentation, and.</a:t>
+            </a:r>
+            <a:endParaRPr lang="en-US" sz="1220" dirty="0"/>
           </a:p>
         </p:txBody>
       </p:sp>
@@ -13717,12 +13721,12 @@
         </p:nvSpPr>
         <p:spPr>
           <a:xfrm>
-            <a:off x="7635240" y="2670048"/>
-            <a:ext cx="3474720" cy="1377086"/>
+            <a:off x="7543800" y="2724912"/>
+            <a:ext cx="3611880" cy="1527048"/>
           </a:xfrm>
           <a:prstGeom prst="roundRect">
             <a:avLst>
-              <a:gd name="adj" fmla="val 7968"/>
+              <a:gd name="adj" fmla="val 7186"/>
             </a:avLst>
           </a:prstGeom>
           <a:solidFill>
@@ -13744,8 +13748,8 @@
         </p:nvSpPr>
         <p:spPr>
           <a:xfrm>
-            <a:off x="7799832" y="2816352"/>
-            <a:ext cx="3145536" cy="256032"/>
+            <a:off x="7708392" y="2852928"/>
+            <a:ext cx="3282696" cy="228600"/>
           </a:xfrm>
           <a:prstGeom prst="rect">
             <a:avLst/>
@@ -13761,7 +13765,7 @@
               <a:buNone/>
             </a:pPr>
             <a:r>
-              <a:rPr lang="en-US" sz="1300" b="1" dirty="0">
+              <a:rPr lang="en-US" sz="1220" b="1" dirty="0">
                 <a:solidFill>
                   <a:srgbClr val="0068B7"/>
                 </a:solidFill>
@@ -13771,7 +13775,7 @@
               </a:rPr>
               <a:t>Concept checkpoints</a:t>
             </a:r>
-            <a:endParaRPr lang="en-US" sz="1300" dirty="0"/>
+            <a:endParaRPr lang="en-US" sz="1220" dirty="0"/>
           </a:p>
         </p:txBody>
       </p:sp>
@@ -13783,8 +13787,8 @@
         </p:nvSpPr>
         <p:spPr>
           <a:xfrm>
-            <a:off x="7818120" y="3182112"/>
-            <a:ext cx="3090672" cy="718718"/>
+            <a:off x="7726680" y="3182112"/>
+            <a:ext cx="3227832" cy="960120"/>
           </a:xfrm>
           <a:prstGeom prst="rect">
             <a:avLst/>
@@ -13802,7 +13806,7 @@
               <a:buNone/>
             </a:pPr>
             <a:r>
-              <a:rPr lang="en-US" sz="1220" dirty="0">
+              <a:rPr lang="en-US" sz="1140" dirty="0">
                 <a:solidFill>
                   <a:srgbClr val="17364A"/>
                 </a:solidFill>
@@ -13810,9 +13814,9 @@
                 <a:ea typeface="Aptos" pitchFamily="34" charset="-122"/>
                 <a:cs typeface="Aptos" pitchFamily="34" charset="-120"/>
               </a:rPr>
-              <a:t>Relevant public health program SOPs, data governance.</a:t>
-            </a:r>
-            <a:endParaRPr lang="en-US" sz="1220" dirty="0"/>
+              <a:t>Relevant public health program SOPs, data.</a:t>
+            </a:r>
+            <a:endParaRPr lang="en-US" sz="1140" dirty="0"/>
           </a:p>
         </p:txBody>
       </p:sp>
@@ -13824,12 +13828,12 @@
         </p:nvSpPr>
         <p:spPr>
           <a:xfrm>
-            <a:off x="7635240" y="4184294"/>
-            <a:ext cx="3474720" cy="1466698"/>
+            <a:off x="7543800" y="4389120"/>
+            <a:ext cx="3611880" cy="1261872"/>
           </a:xfrm>
           <a:prstGeom prst="roundRect">
             <a:avLst>
-              <a:gd name="adj" fmla="val 7481"/>
+              <a:gd name="adj" fmla="val 8696"/>
             </a:avLst>
           </a:prstGeom>
           <a:solidFill>
@@ -13851,8 +13855,8 @@
         </p:nvSpPr>
         <p:spPr>
           <a:xfrm>
-            <a:off x="7799832" y="4330598"/>
-            <a:ext cx="3145536" cy="256032"/>
+            <a:off x="7708392" y="4517136"/>
+            <a:ext cx="3282696" cy="228600"/>
           </a:xfrm>
           <a:prstGeom prst="rect">
             <a:avLst/>
@@ -13868,7 +13872,7 @@
               <a:buNone/>
             </a:pPr>
             <a:r>
-              <a:rPr lang="en-US" sz="1300" b="1" dirty="0">
+              <a:rPr lang="en-US" sz="1220" b="1" dirty="0">
                 <a:solidFill>
                   <a:srgbClr val="0068B7"/>
                 </a:solidFill>
@@ -13878,7 +13882,7 @@
               </a:rPr>
               <a:t>Apply it</a:t>
             </a:r>
-            <a:endParaRPr lang="en-US" sz="1300" dirty="0"/>
+            <a:endParaRPr lang="en-US" sz="1220" dirty="0"/>
           </a:p>
         </p:txBody>
       </p:sp>
@@ -13890,8 +13894,8 @@
         </p:nvSpPr>
         <p:spPr>
           <a:xfrm>
-            <a:off x="7799832" y="4659782"/>
-            <a:ext cx="3145536" cy="899770"/>
+            <a:off x="7708392" y="4828032"/>
+            <a:ext cx="3282696" cy="749808"/>
           </a:xfrm>
           <a:prstGeom prst="rect">
             <a:avLst/>
@@ -13909,7 +13913,7 @@
               <a:buNone/>
             </a:pPr>
             <a:r>
-              <a:rPr lang="en-US" sz="1320" dirty="0">
+              <a:rPr lang="en-US" sz="1220" dirty="0">
                 <a:solidFill>
                   <a:srgbClr val="17364A"/>
                 </a:solidFill>
@@ -13917,9 +13921,9 @@
                 <a:ea typeface="Aptos" pitchFamily="34" charset="-122"/>
                 <a:cs typeface="Aptos" pitchFamily="34" charset="-120"/>
               </a:rPr>
-              <a:t>Connect the concept to public health purpose, responsible use, required safeguards, documentation, and the next action a department should take.</a:t>
-            </a:r>
-            <a:endParaRPr lang="en-US" sz="1320" dirty="0"/>
+              <a:t>Connect the concept to public health purpose, responsible use, required.</a:t>
+            </a:r>
+            <a:endParaRPr lang="en-US" sz="1220" dirty="0"/>
           </a:p>
         </p:txBody>
       </p:sp>
@@ -14237,7 +14241,7 @@
                 <a:ea typeface="Aptos" pitchFamily="34" charset="-122"/>
                 <a:cs typeface="Aptos" pitchFamily="34" charset="-120"/>
               </a:rPr>
-              <a:t>• Play 12: Execute Governance and Oversight - This lesson informs Play 12 by helping learners.</a:t>
+              <a:t>• Play 12: Execute Governance and Oversight - This lesson informs Play 12 by.</a:t>
             </a:r>
             <a:endParaRPr lang="en-US" sz="1900" dirty="0"/>
           </a:p>
@@ -14254,7 +14258,7 @@
                 <a:ea typeface="Aptos" pitchFamily="34" charset="-122"/>
                 <a:cs typeface="Aptos" pitchFamily="34" charset="-120"/>
               </a:rPr>
-              <a:t>• Play 3: Establish AI Governance - This lesson informs Play 3 by helping learners connect the.</a:t>
+              <a:t>• Play 3: Establish AI Governance - This lesson informs Play 3 by helping.</a:t>
             </a:r>
             <a:endParaRPr lang="en-US" sz="1900" dirty="0"/>
           </a:p>
@@ -14271,7 +14275,7 @@
                 <a:ea typeface="Aptos" pitchFamily="34" charset="-122"/>
                 <a:cs typeface="Aptos" pitchFamily="34" charset="-120"/>
               </a:rPr>
-              <a:t>• Play 11: Build and Deploy AI Solutions - This lesson informs Play 11 by helping learners.</a:t>
+              <a:t>• Play 11: Build and Deploy AI Solutions - This lesson informs Play 11 by.</a:t>
             </a:r>
             <a:endParaRPr lang="en-US" sz="1900" dirty="0"/>
           </a:p>
@@ -14288,7 +14292,7 @@
                 <a:ea typeface="Aptos" pitchFamily="34" charset="-122"/>
                 <a:cs typeface="Aptos" pitchFamily="34" charset="-120"/>
               </a:rPr>
-              <a:t>• Play 13: Monitor and Evaluate AI Systems - This lesson informs Play 13 by helping learners.</a:t>
+              <a:t>• Play 13: Monitor and Evaluate AI Systems - This lesson informs Play 13 by.</a:t>
             </a:r>
             <a:endParaRPr lang="en-US" sz="1900" dirty="0"/>
           </a:p>
@@ -14329,8 +14333,8 @@
         </p:nvSpPr>
         <p:spPr>
           <a:xfrm>
-            <a:off x="8211312" y="1563624"/>
-            <a:ext cx="2734056" cy="256032"/>
+            <a:off x="8211312" y="1545336"/>
+            <a:ext cx="2734056" cy="228600"/>
           </a:xfrm>
           <a:prstGeom prst="rect">
             <a:avLst/>
@@ -14346,7 +14350,7 @@
               <a:buNone/>
             </a:pPr>
             <a:r>
-              <a:rPr lang="en-US" sz="1300" b="1" dirty="0">
+              <a:rPr lang="en-US" sz="1220" b="1" dirty="0">
                 <a:solidFill>
                   <a:srgbClr val="0068B7"/>
                 </a:solidFill>
@@ -14356,7 +14360,7 @@
               </a:rPr>
               <a:t>Apply the lesson</a:t>
             </a:r>
-            <a:endParaRPr lang="en-US" sz="1300" dirty="0"/>
+            <a:endParaRPr lang="en-US" sz="1220" dirty="0"/>
           </a:p>
         </p:txBody>
       </p:sp>
@@ -14368,8 +14372,8 @@
         </p:nvSpPr>
         <p:spPr>
           <a:xfrm>
-            <a:off x="8211312" y="1892808"/>
-            <a:ext cx="2734056" cy="1536192"/>
+            <a:off x="8211312" y="1856232"/>
+            <a:ext cx="2734056" cy="1591056"/>
           </a:xfrm>
           <a:prstGeom prst="rect">
             <a:avLst/>
@@ -14387,7 +14391,7 @@
               <a:buNone/>
             </a:pPr>
             <a:r>
-              <a:rPr lang="en-US" sz="1320" dirty="0">
+              <a:rPr lang="en-US" sz="1220" dirty="0">
                 <a:solidFill>
                   <a:srgbClr val="17364A"/>
                 </a:solidFill>
@@ -14395,9 +14399,9 @@
                 <a:ea typeface="Aptos" pitchFamily="34" charset="-122"/>
                 <a:cs typeface="Aptos" pitchFamily="34" charset="-120"/>
               </a:rPr>
-              <a:t>Use the related plays to identify decisions, participants, timing, approvals, and documentation needed for responsible implementation.</a:t>
-            </a:r>
-            <a:endParaRPr lang="en-US" sz="1320" dirty="0"/>
+              <a:t>Use the related plays to identify decisions, participants, timing, approvals,.</a:t>
+            </a:r>
+            <a:endParaRPr lang="en-US" sz="1220" dirty="0"/>
           </a:p>
         </p:txBody>
       </p:sp>
@@ -14436,8 +14440,8 @@
         </p:nvSpPr>
         <p:spPr>
           <a:xfrm>
-            <a:off x="8211312" y="3941064"/>
-            <a:ext cx="2734056" cy="256032"/>
+            <a:off x="8211312" y="3922776"/>
+            <a:ext cx="2734056" cy="228600"/>
           </a:xfrm>
           <a:prstGeom prst="rect">
             <a:avLst/>
@@ -14453,7 +14457,7 @@
               <a:buNone/>
             </a:pPr>
             <a:r>
-              <a:rPr lang="en-US" sz="1300" b="1" dirty="0">
+              <a:rPr lang="en-US" sz="1220" b="1" dirty="0">
                 <a:solidFill>
                   <a:srgbClr val="0068B7"/>
                 </a:solidFill>
@@ -14463,7 +14467,7 @@
               </a:rPr>
               <a:t>Use the play links to</a:t>
             </a:r>
-            <a:endParaRPr lang="en-US" sz="1300" dirty="0"/>
+            <a:endParaRPr lang="en-US" sz="1220" dirty="0"/>
           </a:p>
         </p:txBody>
       </p:sp>
@@ -14475,8 +14479,8 @@
         </p:nvSpPr>
         <p:spPr>
           <a:xfrm>
-            <a:off x="8229600" y="4306824"/>
-            <a:ext cx="2679192" cy="941832"/>
+            <a:off x="8229600" y="4251960"/>
+            <a:ext cx="2679192" cy="1033272"/>
           </a:xfrm>
           <a:prstGeom prst="rect">
             <a:avLst/>
@@ -14494,7 +14498,7 @@
               <a:buNone/>
             </a:pPr>
             <a:r>
-              <a:rPr lang="en-US" sz="1220" dirty="0">
+              <a:rPr lang="en-US" sz="1140" dirty="0">
                 <a:solidFill>
                   <a:srgbClr val="17364A"/>
                 </a:solidFill>
@@ -14504,14 +14508,14 @@
               </a:rPr>
               <a:t>Locate the decision point in the playbook sequence.</a:t>
             </a:r>
-            <a:endParaRPr lang="en-US" sz="1220" dirty="0"/>
-          </a:p>
-          <a:p>
-            <a:pPr indent="0" marL="0">
-              <a:buNone/>
-            </a:pPr>
-            <a:r>
-              <a:rPr lang="en-US" sz="1220" dirty="0">
+            <a:endParaRPr lang="en-US" sz="1140" dirty="0"/>
+          </a:p>
+          <a:p>
+            <a:pPr indent="0" marL="0">
+              <a:buNone/>
+            </a:pPr>
+            <a:r>
+              <a:rPr lang="en-US" sz="1140" dirty="0">
                 <a:solidFill>
                   <a:srgbClr val="17364A"/>
                 </a:solidFill>
@@ -14521,14 +14525,14 @@
               </a:rPr>
               <a:t>Identify who should participate in the work.</a:t>
             </a:r>
-            <a:endParaRPr lang="en-US" sz="1220" dirty="0"/>
-          </a:p>
-          <a:p>
-            <a:pPr indent="0" marL="0">
-              <a:buNone/>
-            </a:pPr>
-            <a:r>
-              <a:rPr lang="en-US" sz="1220" dirty="0">
+            <a:endParaRPr lang="en-US" sz="1140" dirty="0"/>
+          </a:p>
+          <a:p>
+            <a:pPr indent="0" marL="0">
+              <a:buNone/>
+            </a:pPr>
+            <a:r>
+              <a:rPr lang="en-US" sz="1140" dirty="0">
                 <a:solidFill>
                   <a:srgbClr val="17364A"/>
                 </a:solidFill>
@@ -14536,9 +14540,9 @@
                 <a:ea typeface="Aptos" pitchFamily="34" charset="-122"/>
                 <a:cs typeface="Aptos" pitchFamily="34" charset="-120"/>
               </a:rPr>
-              <a:t>Document the review, approval, or implementation step.</a:t>
-            </a:r>
-            <a:endParaRPr lang="en-US" sz="1220" dirty="0"/>
+              <a:t>Document the review, approval, or implementation.</a:t>
+            </a:r>
+            <a:endParaRPr lang="en-US" sz="1140" dirty="0"/>
           </a:p>
         </p:txBody>
       </p:sp>
@@ -14856,7 +14860,7 @@
                 <a:ea typeface="Aptos" pitchFamily="34" charset="-122"/>
                 <a:cs typeface="Aptos" pitchFamily="34" charset="-120"/>
               </a:rPr>
-              <a:t>• Tool 16: Incident Response Checklist (Checklist) - Use this tool to complete or strengthen the.</a:t>
+              <a:t>• Tool 16: Incident Response Checklist (Checklist) - Use this tool to complete.</a:t>
             </a:r>
             <a:endParaRPr lang="en-US" sz="1850" dirty="0"/>
           </a:p>
@@ -14873,7 +14877,7 @@
                 <a:ea typeface="Aptos" pitchFamily="34" charset="-122"/>
                 <a:cs typeface="Aptos" pitchFamily="34" charset="-120"/>
               </a:rPr>
-              <a:t>• Tool 17: Compliance Audit Checklist (Checklist) - Use this tool to complete or strengthen the.</a:t>
+              <a:t>• Tool 17: Compliance Audit Checklist (Checklist) - Use this tool to complete.</a:t>
             </a:r>
             <a:endParaRPr lang="en-US" sz="1850" dirty="0"/>
           </a:p>
@@ -14890,7 +14894,7 @@
                 <a:ea typeface="Aptos" pitchFamily="34" charset="-122"/>
                 <a:cs typeface="Aptos" pitchFamily="34" charset="-120"/>
               </a:rPr>
-              <a:t>• Tool 18: Policy Update &amp; Version Control Log (Log) - Use this tool to complete or strengthen.</a:t>
+              <a:t>• Tool 18: Policy Update &amp; Version Control Log (Log) - Use this tool to.</a:t>
             </a:r>
             <a:endParaRPr lang="en-US" sz="1850" dirty="0"/>
           </a:p>
@@ -14907,7 +14911,7 @@
                 <a:ea typeface="Aptos" pitchFamily="34" charset="-122"/>
                 <a:cs typeface="Aptos" pitchFamily="34" charset="-120"/>
               </a:rPr>
-              <a:t>• Tool 19: Plain-Language AI Public Notice Template (Template) - Use Plain-Language AI Public.</a:t>
+              <a:t>• Tool 19: Plain-Language AI Public Notice Template (Template) - Use.</a:t>
             </a:r>
             <a:endParaRPr lang="en-US" sz="1850" dirty="0"/>
           </a:p>
@@ -14948,8 +14952,8 @@
         </p:nvSpPr>
         <p:spPr>
           <a:xfrm>
-            <a:off x="8211312" y="1563624"/>
-            <a:ext cx="2734056" cy="256032"/>
+            <a:off x="8211312" y="1545336"/>
+            <a:ext cx="2734056" cy="228600"/>
           </a:xfrm>
           <a:prstGeom prst="rect">
             <a:avLst/>
@@ -14965,7 +14969,7 @@
               <a:buNone/>
             </a:pPr>
             <a:r>
-              <a:rPr lang="en-US" sz="1300" b="1" dirty="0">
+              <a:rPr lang="en-US" sz="1220" b="1" dirty="0">
                 <a:solidFill>
                   <a:srgbClr val="0068B7"/>
                 </a:solidFill>
@@ -14975,7 +14979,7 @@
               </a:rPr>
               <a:t>Use the tools</a:t>
             </a:r>
-            <a:endParaRPr lang="en-US" sz="1300" dirty="0"/>
+            <a:endParaRPr lang="en-US" sz="1220" dirty="0"/>
           </a:p>
         </p:txBody>
       </p:sp>
@@ -14987,8 +14991,8 @@
         </p:nvSpPr>
         <p:spPr>
           <a:xfrm>
-            <a:off x="8211312" y="1892808"/>
-            <a:ext cx="2734056" cy="1536192"/>
+            <a:off x="8211312" y="1856232"/>
+            <a:ext cx="2734056" cy="1591056"/>
           </a:xfrm>
           <a:prstGeom prst="rect">
             <a:avLst/>
@@ -15006,7 +15010,7 @@
               <a:buNone/>
             </a:pPr>
             <a:r>
-              <a:rPr lang="en-US" sz="1320" dirty="0">
+              <a:rPr lang="en-US" sz="1220" dirty="0">
                 <a:solidFill>
                   <a:srgbClr val="17364A"/>
                 </a:solidFill>
@@ -15014,9 +15018,9 @@
                 <a:ea typeface="Aptos" pitchFamily="34" charset="-122"/>
                 <a:cs typeface="Aptos" pitchFamily="34" charset="-120"/>
               </a:rPr>
-              <a:t>Use linked tools when your department needs a structured worksheet, template, checklist, review process, or documentation artifact.</a:t>
-            </a:r>
-            <a:endParaRPr lang="en-US" sz="1320" dirty="0"/>
+              <a:t>Use linked tools when your department needs a structured worksheet, template,.</a:t>
+            </a:r>
+            <a:endParaRPr lang="en-US" sz="1220" dirty="0"/>
           </a:p>
         </p:txBody>
       </p:sp>
@@ -15055,8 +15059,8 @@
         </p:nvSpPr>
         <p:spPr>
           <a:xfrm>
-            <a:off x="8211312" y="3941064"/>
-            <a:ext cx="2734056" cy="256032"/>
+            <a:off x="8211312" y="3922776"/>
+            <a:ext cx="2734056" cy="228600"/>
           </a:xfrm>
           <a:prstGeom prst="rect">
             <a:avLst/>
@@ -15072,7 +15076,7 @@
               <a:buNone/>
             </a:pPr>
             <a:r>
-              <a:rPr lang="en-US" sz="1300" b="1" dirty="0">
+              <a:rPr lang="en-US" sz="1220" b="1" dirty="0">
                 <a:solidFill>
                   <a:srgbClr val="0068B7"/>
                 </a:solidFill>
@@ -15082,7 +15086,7 @@
               </a:rPr>
               <a:t>Tool selection cues</a:t>
             </a:r>
-            <a:endParaRPr lang="en-US" sz="1300" dirty="0"/>
+            <a:endParaRPr lang="en-US" sz="1220" dirty="0"/>
           </a:p>
         </p:txBody>
       </p:sp>
@@ -15094,8 +15098,8 @@
         </p:nvSpPr>
         <p:spPr>
           <a:xfrm>
-            <a:off x="8229600" y="4306824"/>
-            <a:ext cx="2679192" cy="941832"/>
+            <a:off x="8229600" y="4251960"/>
+            <a:ext cx="2679192" cy="1033272"/>
           </a:xfrm>
           <a:prstGeom prst="rect">
             <a:avLst/>
@@ -15113,7 +15117,7 @@
               <a:buNone/>
             </a:pPr>
             <a:r>
-              <a:rPr lang="en-US" sz="1220" dirty="0">
+              <a:rPr lang="en-US" sz="1140" dirty="0">
                 <a:solidFill>
                   <a:srgbClr val="17364A"/>
                 </a:solidFill>
@@ -15123,14 +15127,14 @@
               </a:rPr>
               <a:t>Use a tool when no comparable local process exists.</a:t>
             </a:r>
-            <a:endParaRPr lang="en-US" sz="1220" dirty="0"/>
-          </a:p>
-          <a:p>
-            <a:pPr indent="0" marL="0">
-              <a:buNone/>
-            </a:pPr>
-            <a:r>
-              <a:rPr lang="en-US" sz="1220" dirty="0">
+            <a:endParaRPr lang="en-US" sz="1140" dirty="0"/>
+          </a:p>
+          <a:p>
+            <a:pPr indent="0" marL="0">
+              <a:buNone/>
+            </a:pPr>
+            <a:r>
+              <a:rPr lang="en-US" sz="1140" dirty="0">
                 <a:solidFill>
                   <a:srgbClr val="17364A"/>
                 </a:solidFill>
@@ -15138,16 +15142,16 @@
                 <a:ea typeface="Aptos" pitchFamily="34" charset="-122"/>
                 <a:cs typeface="Aptos" pitchFamily="34" charset="-120"/>
               </a:rPr>
-              <a:t>Adapt existing department templates when they already fit the.</a:t>
-            </a:r>
-            <a:endParaRPr lang="en-US" sz="1220" dirty="0"/>
-          </a:p>
-          <a:p>
-            <a:pPr indent="0" marL="0">
-              <a:buNone/>
-            </a:pPr>
-            <a:r>
-              <a:rPr lang="en-US" sz="1220" dirty="0">
+              <a:t>Adapt existing department templates when they.</a:t>
+            </a:r>
+            <a:endParaRPr lang="en-US" sz="1140" dirty="0"/>
+          </a:p>
+          <a:p>
+            <a:pPr indent="0" marL="0">
+              <a:buNone/>
+            </a:pPr>
+            <a:r>
+              <a:rPr lang="en-US" sz="1140" dirty="0">
                 <a:solidFill>
                   <a:srgbClr val="17364A"/>
                 </a:solidFill>
@@ -15155,9 +15159,9 @@
                 <a:ea typeface="Aptos" pitchFamily="34" charset="-122"/>
                 <a:cs typeface="Aptos" pitchFamily="34" charset="-120"/>
               </a:rPr>
-              <a:t>Save the completed artifact as evidence of the decision.</a:t>
-            </a:r>
-            <a:endParaRPr lang="en-US" sz="1220" dirty="0"/>
+              <a:t>Save the completed artifact as evidence of the.</a:t>
+            </a:r>
+            <a:endParaRPr lang="en-US" sz="1140" dirty="0"/>
           </a:p>
         </p:txBody>
       </p:sp>
@@ -15448,8 +15452,8 @@
         </p:nvSpPr>
         <p:spPr>
           <a:xfrm>
-            <a:off x="868680" y="1508760"/>
-            <a:ext cx="6309360" cy="4160520"/>
+            <a:off x="822960" y="1463040"/>
+            <a:ext cx="6565392" cy="4343400"/>
           </a:xfrm>
           <a:prstGeom prst="rect">
             <a:avLst/>
@@ -15467,7 +15471,7 @@
               <a:buNone/>
             </a:pPr>
             <a:r>
-              <a:rPr lang="en-US" sz="2100" dirty="0">
+              <a:rPr lang="en-US" sz="1920" dirty="0">
                 <a:solidFill>
                   <a:srgbClr val="003A63"/>
                 </a:solidFill>
@@ -15477,14 +15481,14 @@
               </a:rPr>
               <a:t>• Explain why AI systems require lifecycle evidence management.</a:t>
             </a:r>
-            <a:endParaRPr lang="en-US" sz="2100" dirty="0"/>
-          </a:p>
-          <a:p>
-            <a:pPr indent="0" marL="0">
-              <a:buNone/>
-            </a:pPr>
-            <a:r>
-              <a:rPr lang="en-US" sz="2100" dirty="0">
+            <a:endParaRPr lang="en-US" sz="1920" dirty="0"/>
+          </a:p>
+          <a:p>
+            <a:pPr indent="0" marL="0">
+              <a:buNone/>
+            </a:pPr>
+            <a:r>
+              <a:rPr lang="en-US" sz="1920" dirty="0">
                 <a:solidFill>
                   <a:srgbClr val="003A63"/>
                 </a:solidFill>
@@ -15494,14 +15498,14 @@
               </a:rPr>
               <a:t>• Identify the core records that support AI audit readiness.</a:t>
             </a:r>
-            <a:endParaRPr lang="en-US" sz="2100" dirty="0"/>
-          </a:p>
-          <a:p>
-            <a:pPr indent="0" marL="0">
-              <a:buNone/>
-            </a:pPr>
-            <a:r>
-              <a:rPr lang="en-US" sz="2100" dirty="0">
+            <a:endParaRPr lang="en-US" sz="1920" dirty="0"/>
+          </a:p>
+          <a:p>
+            <a:pPr indent="0" marL="0">
+              <a:buNone/>
+            </a:pPr>
+            <a:r>
+              <a:rPr lang="en-US" sz="1920" dirty="0">
                 <a:solidFill>
                   <a:srgbClr val="003A63"/>
                 </a:solidFill>
@@ -15509,9 +15513,9 @@
                 <a:ea typeface="Aptos" pitchFamily="34" charset="-122"/>
                 <a:cs typeface="Aptos" pitchFamily="34" charset="-120"/>
               </a:rPr>
-              <a:t>• Distinguish between approval evidence, validation evidence, operational evidence, and incident.</a:t>
-            </a:r>
-            <a:endParaRPr lang="en-US" sz="2100" dirty="0"/>
+              <a:t>• Distinguish between approval evidence, validation evidence, operational.</a:t>
+            </a:r>
+            <a:endParaRPr lang="en-US" sz="1920" dirty="0"/>
           </a:p>
         </p:txBody>
       </p:sp>
@@ -15523,12 +15527,12 @@
         </p:nvSpPr>
         <p:spPr>
           <a:xfrm>
-            <a:off x="7635240" y="1325880"/>
-            <a:ext cx="3474720" cy="1207008"/>
+            <a:off x="7543800" y="1325880"/>
+            <a:ext cx="3611880" cy="1261872"/>
           </a:xfrm>
           <a:prstGeom prst="roundRect">
             <a:avLst>
-              <a:gd name="adj" fmla="val 9091"/>
+              <a:gd name="adj" fmla="val 8696"/>
             </a:avLst>
           </a:prstGeom>
           <a:solidFill>
@@ -15550,8 +15554,8 @@
         </p:nvSpPr>
         <p:spPr>
           <a:xfrm>
-            <a:off x="7799832" y="1472184"/>
-            <a:ext cx="3145536" cy="256032"/>
+            <a:off x="7708392" y="1453896"/>
+            <a:ext cx="3282696" cy="228600"/>
           </a:xfrm>
           <a:prstGeom prst="rect">
             <a:avLst/>
@@ -15567,7 +15571,7 @@
               <a:buNone/>
             </a:pPr>
             <a:r>
-              <a:rPr lang="en-US" sz="1300" b="1" dirty="0">
+              <a:rPr lang="en-US" sz="1220" b="1" dirty="0">
                 <a:solidFill>
                   <a:srgbClr val="0068B7"/>
                 </a:solidFill>
@@ -15577,7 +15581,7 @@
               </a:rPr>
               <a:t>Practice focus</a:t>
             </a:r>
-            <a:endParaRPr lang="en-US" sz="1300" dirty="0"/>
+            <a:endParaRPr lang="en-US" sz="1220" dirty="0"/>
           </a:p>
         </p:txBody>
       </p:sp>
@@ -15589,8 +15593,8 @@
         </p:nvSpPr>
         <p:spPr>
           <a:xfrm>
-            <a:off x="7799832" y="1801368"/>
-            <a:ext cx="3145536" cy="640080"/>
+            <a:off x="7708392" y="1764792"/>
+            <a:ext cx="3282696" cy="749808"/>
           </a:xfrm>
           <a:prstGeom prst="rect">
             <a:avLst/>
@@ -15608,7 +15612,7 @@
               <a:buNone/>
             </a:pPr>
             <a:r>
-              <a:rPr lang="en-US" sz="1320" dirty="0">
+              <a:rPr lang="en-US" sz="1220" dirty="0">
                 <a:solidFill>
                   <a:srgbClr val="17364A"/>
                 </a:solidFill>
@@ -15618,7 +15622,7 @@
               </a:rPr>
               <a:t>Explain why AI systems require lifecycle evidence management.</a:t>
             </a:r>
-            <a:endParaRPr lang="en-US" sz="1320" dirty="0"/>
+            <a:endParaRPr lang="en-US" sz="1220" dirty="0"/>
           </a:p>
         </p:txBody>
       </p:sp>
@@ -15630,12 +15634,12 @@
         </p:nvSpPr>
         <p:spPr>
           <a:xfrm>
-            <a:off x="7635240" y="2670048"/>
-            <a:ext cx="3474720" cy="1377086"/>
+            <a:off x="7543800" y="2724912"/>
+            <a:ext cx="3611880" cy="1527048"/>
           </a:xfrm>
           <a:prstGeom prst="roundRect">
             <a:avLst>
-              <a:gd name="adj" fmla="val 7968"/>
+              <a:gd name="adj" fmla="val 7186"/>
             </a:avLst>
           </a:prstGeom>
           <a:solidFill>
@@ -15657,8 +15661,8 @@
         </p:nvSpPr>
         <p:spPr>
           <a:xfrm>
-            <a:off x="7799832" y="2816352"/>
-            <a:ext cx="3145536" cy="256032"/>
+            <a:off x="7708392" y="2852928"/>
+            <a:ext cx="3282696" cy="228600"/>
           </a:xfrm>
           <a:prstGeom prst="rect">
             <a:avLst/>
@@ -15674,7 +15678,7 @@
               <a:buNone/>
             </a:pPr>
             <a:r>
-              <a:rPr lang="en-US" sz="1300" b="1" dirty="0">
+              <a:rPr lang="en-US" sz="1220" b="1" dirty="0">
                 <a:solidFill>
                   <a:srgbClr val="0068B7"/>
                 </a:solidFill>
@@ -15684,7 +15688,7 @@
               </a:rPr>
               <a:t>Concept checkpoints</a:t>
             </a:r>
-            <a:endParaRPr lang="en-US" sz="1300" dirty="0"/>
+            <a:endParaRPr lang="en-US" sz="1220" dirty="0"/>
           </a:p>
         </p:txBody>
       </p:sp>
@@ -15696,8 +15700,8 @@
         </p:nvSpPr>
         <p:spPr>
           <a:xfrm>
-            <a:off x="7818120" y="3182112"/>
-            <a:ext cx="3090672" cy="718718"/>
+            <a:off x="7726680" y="3182112"/>
+            <a:ext cx="3227832" cy="960120"/>
           </a:xfrm>
           <a:prstGeom prst="rect">
             <a:avLst/>
@@ -15715,7 +15719,7 @@
               <a:buNone/>
             </a:pPr>
             <a:r>
-              <a:rPr lang="en-US" sz="1220" dirty="0">
+              <a:rPr lang="en-US" sz="1140" dirty="0">
                 <a:solidFill>
                   <a:srgbClr val="17364A"/>
                 </a:solidFill>
@@ -15723,16 +15727,16 @@
                 <a:ea typeface="Aptos" pitchFamily="34" charset="-122"/>
                 <a:cs typeface="Aptos" pitchFamily="34" charset="-120"/>
               </a:rPr>
-              <a:t>Create an AI evidence inventory for an approved or proposed use.</a:t>
-            </a:r>
-            <a:endParaRPr lang="en-US" sz="1220" dirty="0"/>
-          </a:p>
-          <a:p>
-            <a:pPr indent="0" marL="0">
-              <a:buNone/>
-            </a:pPr>
-            <a:r>
-              <a:rPr lang="en-US" sz="1220" dirty="0">
+              <a:t>Create an AI evidence inventory for an approved or.</a:t>
+            </a:r>
+            <a:endParaRPr lang="en-US" sz="1140" dirty="0"/>
+          </a:p>
+          <a:p>
+            <a:pPr indent="0" marL="0">
+              <a:buNone/>
+            </a:pPr>
+            <a:r>
+              <a:rPr lang="en-US" sz="1140" dirty="0">
                 <a:solidFill>
                   <a:srgbClr val="17364A"/>
                 </a:solidFill>
@@ -15740,9 +15744,9 @@
                 <a:ea typeface="Aptos" pitchFamily="34" charset="-122"/>
                 <a:cs typeface="Aptos" pitchFamily="34" charset="-120"/>
               </a:rPr>
-              <a:t>Develop retention, ownership, and review expectations for AI.</a:t>
-            </a:r>
-            <a:endParaRPr lang="en-US" sz="1220" dirty="0"/>
+              <a:t>Develop retention, ownership, and review.</a:t>
+            </a:r>
+            <a:endParaRPr lang="en-US" sz="1140" dirty="0"/>
           </a:p>
         </p:txBody>
       </p:sp>
@@ -15754,12 +15758,12 @@
         </p:nvSpPr>
         <p:spPr>
           <a:xfrm>
-            <a:off x="7635240" y="4184294"/>
-            <a:ext cx="3474720" cy="1466698"/>
+            <a:off x="7543800" y="4389120"/>
+            <a:ext cx="3611880" cy="1261872"/>
           </a:xfrm>
           <a:prstGeom prst="roundRect">
             <a:avLst>
-              <a:gd name="adj" fmla="val 7481"/>
+              <a:gd name="adj" fmla="val 8696"/>
             </a:avLst>
           </a:prstGeom>
           <a:solidFill>
@@ -15781,8 +15785,8 @@
         </p:nvSpPr>
         <p:spPr>
           <a:xfrm>
-            <a:off x="7799832" y="4330598"/>
-            <a:ext cx="3145536" cy="256032"/>
+            <a:off x="7708392" y="4517136"/>
+            <a:ext cx="3282696" cy="228600"/>
           </a:xfrm>
           <a:prstGeom prst="rect">
             <a:avLst/>
@@ -15798,7 +15802,7 @@
               <a:buNone/>
             </a:pPr>
             <a:r>
-              <a:rPr lang="en-US" sz="1300" b="1" dirty="0">
+              <a:rPr lang="en-US" sz="1220" b="1" dirty="0">
                 <a:solidFill>
                   <a:srgbClr val="0068B7"/>
                 </a:solidFill>
@@ -15808,7 +15812,7 @@
               </a:rPr>
               <a:t>What to produce</a:t>
             </a:r>
-            <a:endParaRPr lang="en-US" sz="1300" dirty="0"/>
+            <a:endParaRPr lang="en-US" sz="1220" dirty="0"/>
           </a:p>
         </p:txBody>
       </p:sp>
@@ -15820,8 +15824,8 @@
         </p:nvSpPr>
         <p:spPr>
           <a:xfrm>
-            <a:off x="7799832" y="4659782"/>
-            <a:ext cx="3145536" cy="899770"/>
+            <a:off x="7708392" y="4828032"/>
+            <a:ext cx="3282696" cy="749808"/>
           </a:xfrm>
           <a:prstGeom prst="rect">
             <a:avLst/>
@@ -15839,7 +15843,7 @@
               <a:buNone/>
             </a:pPr>
             <a:r>
-              <a:rPr lang="en-US" sz="1320" dirty="0">
+              <a:rPr lang="en-US" sz="1220" dirty="0">
                 <a:solidFill>
                   <a:srgbClr val="17364A"/>
                 </a:solidFill>
@@ -15847,9 +15851,9 @@
                 <a:ea typeface="Aptos" pitchFamily="34" charset="-122"/>
                 <a:cs typeface="Aptos" pitchFamily="34" charset="-120"/>
               </a:rPr>
-              <a:t>Use the assignment to test whether you can explain the concept, apply it to a realistic public health situation, and identify what would need review before the work moves forward.</a:t>
-            </a:r>
-            <a:endParaRPr lang="en-US" sz="1320" dirty="0"/>
+              <a:t>Use the assignment to test whether you can explain the concept, apply it to a.</a:t>
+            </a:r>
+            <a:endParaRPr lang="en-US" sz="1220" dirty="0"/>
           </a:p>
         </p:txBody>
       </p:sp>
@@ -16140,8 +16144,8 @@
         </p:nvSpPr>
         <p:spPr>
           <a:xfrm>
-            <a:off x="868680" y="1508760"/>
-            <a:ext cx="6309360" cy="4160520"/>
+            <a:off x="822960" y="1463040"/>
+            <a:ext cx="6565392" cy="4343400"/>
           </a:xfrm>
           <a:prstGeom prst="rect">
             <a:avLst/>
@@ -16159,7 +16163,7 @@
               <a:buNone/>
             </a:pPr>
             <a:r>
-              <a:rPr lang="en-US" sz="2100" dirty="0">
+              <a:rPr lang="en-US" sz="1920" dirty="0">
                 <a:solidFill>
                   <a:srgbClr val="003A63"/>
                 </a:solidFill>
@@ -16167,16 +16171,16 @@
                 <a:ea typeface="Aptos" pitchFamily="34" charset="-122"/>
                 <a:cs typeface="Aptos" pitchFamily="34" charset="-120"/>
               </a:rPr>
-              <a:t>• AI audit readiness is the agency’s ability to show what AI systems are used, why they were.</a:t>
-            </a:r>
-            <a:endParaRPr lang="en-US" sz="2100" dirty="0"/>
-          </a:p>
-          <a:p>
-            <a:pPr indent="0" marL="0">
-              <a:buNone/>
-            </a:pPr>
-            <a:r>
-              <a:rPr lang="en-US" sz="2100" dirty="0">
+              <a:t>• AI audit readiness is the agency’s ability to show what AI systems are used,.</a:t>
+            </a:r>
+            <a:endParaRPr lang="en-US" sz="1920" dirty="0"/>
+          </a:p>
+          <a:p>
+            <a:pPr indent="0" marL="0">
+              <a:buNone/>
+            </a:pPr>
+            <a:r>
+              <a:rPr lang="en-US" sz="1920" dirty="0">
                 <a:solidFill>
                   <a:srgbClr val="003A63"/>
                 </a:solidFill>
@@ -16184,16 +16188,16 @@
                 <a:ea typeface="Aptos" pitchFamily="34" charset="-122"/>
                 <a:cs typeface="Aptos" pitchFamily="34" charset="-120"/>
               </a:rPr>
-              <a:t>• Public health agencies may need this evidence for internal oversight, public records requests,.</a:t>
-            </a:r>
-            <a:endParaRPr lang="en-US" sz="2100" dirty="0"/>
-          </a:p>
-          <a:p>
-            <a:pPr indent="0" marL="0">
-              <a:buNone/>
-            </a:pPr>
-            <a:r>
-              <a:rPr lang="en-US" sz="2100" dirty="0">
+              <a:t>• Public health agencies may need this evidence for internal oversight, public.</a:t>
+            </a:r>
+            <a:endParaRPr lang="en-US" sz="1920" dirty="0"/>
+          </a:p>
+          <a:p>
+            <a:pPr indent="0" marL="0">
+              <a:buNone/>
+            </a:pPr>
+            <a:r>
+              <a:rPr lang="en-US" sz="1920" dirty="0">
                 <a:solidFill>
                   <a:srgbClr val="003A63"/>
                 </a:solidFill>
@@ -16201,9 +16205,9 @@
                 <a:ea typeface="Aptos" pitchFamily="34" charset="-122"/>
                 <a:cs typeface="Aptos" pitchFamily="34" charset="-120"/>
               </a:rPr>
-              <a:t>• This module teaches governance, compliance, program, and leadership staff how to manage.</a:t>
-            </a:r>
-            <a:endParaRPr lang="en-US" sz="2100" dirty="0"/>
+              <a:t>• This module teaches governance, compliance, program, and leadership staff.</a:t>
+            </a:r>
+            <a:endParaRPr lang="en-US" sz="1920" dirty="0"/>
           </a:p>
         </p:txBody>
       </p:sp>
@@ -16215,12 +16219,12 @@
         </p:nvSpPr>
         <p:spPr>
           <a:xfrm>
-            <a:off x="7635240" y="1325880"/>
-            <a:ext cx="3474720" cy="1255471"/>
+            <a:off x="7543800" y="1325880"/>
+            <a:ext cx="3611880" cy="1261872"/>
           </a:xfrm>
           <a:prstGeom prst="roundRect">
             <a:avLst>
-              <a:gd name="adj" fmla="val 8740"/>
+              <a:gd name="adj" fmla="val 8696"/>
             </a:avLst>
           </a:prstGeom>
           <a:solidFill>
@@ -16242,8 +16246,8 @@
         </p:nvSpPr>
         <p:spPr>
           <a:xfrm>
-            <a:off x="7799832" y="1472184"/>
-            <a:ext cx="3145536" cy="256032"/>
+            <a:off x="7708392" y="1453896"/>
+            <a:ext cx="3282696" cy="228600"/>
           </a:xfrm>
           <a:prstGeom prst="rect">
             <a:avLst/>
@@ -16259,7 +16263,7 @@
               <a:buNone/>
             </a:pPr>
             <a:r>
-              <a:rPr lang="en-US" sz="1300" b="1" dirty="0">
+              <a:rPr lang="en-US" sz="1220" b="1" dirty="0">
                 <a:solidFill>
                   <a:srgbClr val="0068B7"/>
                 </a:solidFill>
@@ -16269,7 +16273,7 @@
               </a:rPr>
               <a:t>Core concept</a:t>
             </a:r>
-            <a:endParaRPr lang="en-US" sz="1300" dirty="0"/>
+            <a:endParaRPr lang="en-US" sz="1220" dirty="0"/>
           </a:p>
         </p:txBody>
       </p:sp>
@@ -16281,8 +16285,8 @@
         </p:nvSpPr>
         <p:spPr>
           <a:xfrm>
-            <a:off x="7799832" y="1801368"/>
-            <a:ext cx="3145536" cy="688543"/>
+            <a:off x="7708392" y="1764792"/>
+            <a:ext cx="3282696" cy="749808"/>
           </a:xfrm>
           <a:prstGeom prst="rect">
             <a:avLst/>
@@ -16300,7 +16304,7 @@
               <a:buNone/>
             </a:pPr>
             <a:r>
-              <a:rPr lang="en-US" sz="1320" dirty="0">
+              <a:rPr lang="en-US" sz="1220" dirty="0">
                 <a:solidFill>
                   <a:srgbClr val="17364A"/>
                 </a:solidFill>
@@ -16308,9 +16312,9 @@
                 <a:ea typeface="Aptos" pitchFamily="34" charset="-122"/>
                 <a:cs typeface="Aptos" pitchFamily="34" charset="-120"/>
               </a:rPr>
-              <a:t>AI audit readiness is the agency’s ability to show what AI systems are used, why they were approved,.</a:t>
-            </a:r>
-            <a:endParaRPr lang="en-US" sz="1320" dirty="0"/>
+              <a:t>AI audit readiness is the agency’s ability to show what AI systems are used, why.</a:t>
+            </a:r>
+            <a:endParaRPr lang="en-US" sz="1220" dirty="0"/>
           </a:p>
         </p:txBody>
       </p:sp>
@@ -16322,12 +16326,12 @@
         </p:nvSpPr>
         <p:spPr>
           <a:xfrm>
-            <a:off x="7635240" y="2718511"/>
-            <a:ext cx="3474720" cy="1328623"/>
+            <a:off x="7543800" y="2724912"/>
+            <a:ext cx="3611880" cy="1527048"/>
           </a:xfrm>
           <a:prstGeom prst="roundRect">
             <a:avLst>
-              <a:gd name="adj" fmla="val 8259"/>
+              <a:gd name="adj" fmla="val 7186"/>
             </a:avLst>
           </a:prstGeom>
           <a:solidFill>
@@ -16349,8 +16353,8 @@
         </p:nvSpPr>
         <p:spPr>
           <a:xfrm>
-            <a:off x="7799832" y="2864815"/>
-            <a:ext cx="3145536" cy="256032"/>
+            <a:off x="7708392" y="2852928"/>
+            <a:ext cx="3282696" cy="228600"/>
           </a:xfrm>
           <a:prstGeom prst="rect">
             <a:avLst/>
@@ -16366,7 +16370,7 @@
               <a:buNone/>
             </a:pPr>
             <a:r>
-              <a:rPr lang="en-US" sz="1300" b="1" dirty="0">
+              <a:rPr lang="en-US" sz="1220" b="1" dirty="0">
                 <a:solidFill>
                   <a:srgbClr val="0068B7"/>
                 </a:solidFill>
@@ -16376,7 +16380,7 @@
               </a:rPr>
               <a:t>Concept checkpoints</a:t>
             </a:r>
-            <a:endParaRPr lang="en-US" sz="1300" dirty="0"/>
+            <a:endParaRPr lang="en-US" sz="1220" dirty="0"/>
           </a:p>
         </p:txBody>
       </p:sp>
@@ -16388,8 +16392,8 @@
         </p:nvSpPr>
         <p:spPr>
           <a:xfrm>
-            <a:off x="7818120" y="3230575"/>
-            <a:ext cx="3090672" cy="670255"/>
+            <a:off x="7726680" y="3182112"/>
+            <a:ext cx="3227832" cy="960120"/>
           </a:xfrm>
           <a:prstGeom prst="rect">
             <a:avLst/>
@@ -16407,7 +16411,7 @@
               <a:buNone/>
             </a:pPr>
             <a:r>
-              <a:rPr lang="en-US" sz="1220" dirty="0">
+              <a:rPr lang="en-US" sz="1140" dirty="0">
                 <a:solidFill>
                   <a:srgbClr val="17364A"/>
                 </a:solidFill>
@@ -16415,16 +16419,16 @@
                 <a:ea typeface="Aptos" pitchFamily="34" charset="-122"/>
                 <a:cs typeface="Aptos" pitchFamily="34" charset="-120"/>
               </a:rPr>
-              <a:t>AI audit readiness is the agency’s ability to show what AI systems.</a:t>
-            </a:r>
-            <a:endParaRPr lang="en-US" sz="1220" dirty="0"/>
-          </a:p>
-          <a:p>
-            <a:pPr indent="0" marL="0">
-              <a:buNone/>
-            </a:pPr>
-            <a:r>
-              <a:rPr lang="en-US" sz="1220" dirty="0">
+              <a:t>AI audit readiness is the agency’s ability to show.</a:t>
+            </a:r>
+            <a:endParaRPr lang="en-US" sz="1140" dirty="0"/>
+          </a:p>
+          <a:p>
+            <a:pPr indent="0" marL="0">
+              <a:buNone/>
+            </a:pPr>
+            <a:r>
+              <a:rPr lang="en-US" sz="1140" dirty="0">
                 <a:solidFill>
                   <a:srgbClr val="17364A"/>
                 </a:solidFill>
@@ -16432,16 +16436,16 @@
                 <a:ea typeface="Aptos" pitchFamily="34" charset="-122"/>
                 <a:cs typeface="Aptos" pitchFamily="34" charset="-120"/>
               </a:rPr>
-              <a:t>Public health agencies may need this evidence for internal.</a:t>
-            </a:r>
-            <a:endParaRPr lang="en-US" sz="1220" dirty="0"/>
-          </a:p>
-          <a:p>
-            <a:pPr indent="0" marL="0">
-              <a:buNone/>
-            </a:pPr>
-            <a:r>
-              <a:rPr lang="en-US" sz="1220" dirty="0">
+              <a:t>Public health agencies may need this evidence for.</a:t>
+            </a:r>
+            <a:endParaRPr lang="en-US" sz="1140" dirty="0"/>
+          </a:p>
+          <a:p>
+            <a:pPr indent="0" marL="0">
+              <a:buNone/>
+            </a:pPr>
+            <a:r>
+              <a:rPr lang="en-US" sz="1140" dirty="0">
                 <a:solidFill>
                   <a:srgbClr val="17364A"/>
                 </a:solidFill>
@@ -16449,9 +16453,9 @@
                 <a:ea typeface="Aptos" pitchFamily="34" charset="-122"/>
                 <a:cs typeface="Aptos" pitchFamily="34" charset="-120"/>
               </a:rPr>
-              <a:t>This module teaches governance, compliance, program, and.</a:t>
-            </a:r>
-            <a:endParaRPr lang="en-US" sz="1220" dirty="0"/>
+              <a:t>This module teaches governance, compliance,.</a:t>
+            </a:r>
+            <a:endParaRPr lang="en-US" sz="1140" dirty="0"/>
           </a:p>
         </p:txBody>
       </p:sp>
@@ -16463,12 +16467,12 @@
         </p:nvSpPr>
         <p:spPr>
           <a:xfrm>
-            <a:off x="7635240" y="4184294"/>
-            <a:ext cx="3474720" cy="1466698"/>
+            <a:off x="7543800" y="4389120"/>
+            <a:ext cx="3611880" cy="1261872"/>
           </a:xfrm>
           <a:prstGeom prst="roundRect">
             <a:avLst>
-              <a:gd name="adj" fmla="val 7481"/>
+              <a:gd name="adj" fmla="val 8696"/>
             </a:avLst>
           </a:prstGeom>
           <a:solidFill>
@@ -16490,8 +16494,8 @@
         </p:nvSpPr>
         <p:spPr>
           <a:xfrm>
-            <a:off x="7799832" y="4330598"/>
-            <a:ext cx="3145536" cy="256032"/>
+            <a:off x="7708392" y="4517136"/>
+            <a:ext cx="3282696" cy="228600"/>
           </a:xfrm>
           <a:prstGeom prst="rect">
             <a:avLst/>
@@ -16507,7 +16511,7 @@
               <a:buNone/>
             </a:pPr>
             <a:r>
-              <a:rPr lang="en-US" sz="1300" b="1" dirty="0">
+              <a:rPr lang="en-US" sz="1220" b="1" dirty="0">
                 <a:solidFill>
                   <a:srgbClr val="0068B7"/>
                 </a:solidFill>
@@ -16517,7 +16521,7 @@
               </a:rPr>
               <a:t>Apply it</a:t>
             </a:r>
-            <a:endParaRPr lang="en-US" sz="1300" dirty="0"/>
+            <a:endParaRPr lang="en-US" sz="1220" dirty="0"/>
           </a:p>
         </p:txBody>
       </p:sp>
@@ -16529,8 +16533,8 @@
         </p:nvSpPr>
         <p:spPr>
           <a:xfrm>
-            <a:off x="7799832" y="4659782"/>
-            <a:ext cx="3145536" cy="899770"/>
+            <a:off x="7708392" y="4828032"/>
+            <a:ext cx="3282696" cy="749808"/>
           </a:xfrm>
           <a:prstGeom prst="rect">
             <a:avLst/>
@@ -16548,7 +16552,7 @@
               <a:buNone/>
             </a:pPr>
             <a:r>
-              <a:rPr lang="en-US" sz="1320" dirty="0">
+              <a:rPr lang="en-US" sz="1220" dirty="0">
                 <a:solidFill>
                   <a:srgbClr val="17364A"/>
                 </a:solidFill>
@@ -16556,9 +16560,9 @@
                 <a:ea typeface="Aptos" pitchFamily="34" charset="-122"/>
                 <a:cs typeface="Aptos" pitchFamily="34" charset="-120"/>
               </a:rPr>
-              <a:t>Connect the concept to public health purpose, responsible use, required safeguards, documentation, and the next action a department should take.</a:t>
-            </a:r>
-            <a:endParaRPr lang="en-US" sz="1320" dirty="0"/>
+              <a:t>Connect the concept to public health purpose, responsible use, required.</a:t>
+            </a:r>
+            <a:endParaRPr lang="en-US" sz="1220" dirty="0"/>
           </a:p>
         </p:txBody>
       </p:sp>
@@ -16849,8 +16853,8 @@
         </p:nvSpPr>
         <p:spPr>
           <a:xfrm>
-            <a:off x="868680" y="1508760"/>
-            <a:ext cx="6309360" cy="4160520"/>
+            <a:off x="822960" y="1463040"/>
+            <a:ext cx="6565392" cy="4343400"/>
           </a:xfrm>
           <a:prstGeom prst="rect">
             <a:avLst/>
@@ -16868,7 +16872,7 @@
               <a:buNone/>
             </a:pPr>
             <a:r>
-              <a:rPr lang="en-US" sz="2100" dirty="0">
+              <a:rPr lang="en-US" sz="1920" dirty="0">
                 <a:solidFill>
                   <a:srgbClr val="003A63"/>
                 </a:solidFill>
@@ -16876,16 +16880,16 @@
                 <a:ea typeface="Aptos" pitchFamily="34" charset="-122"/>
                 <a:cs typeface="Aptos" pitchFamily="34" charset="-120"/>
               </a:rPr>
-              <a:t>• This module provides national-level training guidance for public health agencies and partners.</a:t>
-            </a:r>
-            <a:endParaRPr lang="en-US" sz="2100" dirty="0"/>
-          </a:p>
-          <a:p>
-            <a:pPr indent="0" marL="0">
-              <a:buNone/>
-            </a:pPr>
-            <a:r>
-              <a:rPr lang="en-US" sz="2100" dirty="0">
+              <a:t>• This module provides national-level training guidance for public health.</a:t>
+            </a:r>
+            <a:endParaRPr lang="en-US" sz="1920" dirty="0"/>
+          </a:p>
+          <a:p>
+            <a:pPr indent="0" marL="0">
+              <a:buNone/>
+            </a:pPr>
+            <a:r>
+              <a:rPr lang="en-US" sz="1920" dirty="0">
                 <a:solidFill>
                   <a:srgbClr val="003A63"/>
                 </a:solidFill>
@@ -16893,16 +16897,16 @@
                 <a:ea typeface="Aptos" pitchFamily="34" charset="-122"/>
                 <a:cs typeface="Aptos" pitchFamily="34" charset="-120"/>
               </a:rPr>
-              <a:t>• It is not legal advice and does not replace review by agency legal counsel, privacy officers,.</a:t>
-            </a:r>
-            <a:endParaRPr lang="en-US" sz="2100" dirty="0"/>
-          </a:p>
-          <a:p>
-            <a:pPr indent="0" marL="0">
-              <a:buNone/>
-            </a:pPr>
-            <a:r>
-              <a:rPr lang="en-US" sz="2100" dirty="0">
+              <a:t>• It is not legal advice and does not replace review by agency legal counsel,.</a:t>
+            </a:r>
+            <a:endParaRPr lang="en-US" sz="1920" dirty="0"/>
+          </a:p>
+          <a:p>
+            <a:pPr indent="0" marL="0">
+              <a:buNone/>
+            </a:pPr>
+            <a:r>
+              <a:rPr lang="en-US" sz="1920" dirty="0">
                 <a:solidFill>
                   <a:srgbClr val="003A63"/>
                 </a:solidFill>
@@ -16910,9 +16914,9 @@
                 <a:ea typeface="Aptos" pitchFamily="34" charset="-122"/>
                 <a:cs typeface="Aptos" pitchFamily="34" charset="-120"/>
               </a:rPr>
-              <a:t>• Requirements may vary by state, locality, territory, Tribe, agency, funding source,.</a:t>
-            </a:r>
-            <a:endParaRPr lang="en-US" sz="2100" dirty="0"/>
+              <a:t>• Requirements may vary by state, locality, territory, Tribe, agency, funding.</a:t>
+            </a:r>
+            <a:endParaRPr lang="en-US" sz="1920" dirty="0"/>
           </a:p>
         </p:txBody>
       </p:sp>
@@ -16924,12 +16928,12 @@
         </p:nvSpPr>
         <p:spPr>
           <a:xfrm>
-            <a:off x="7635240" y="1325880"/>
-            <a:ext cx="3474720" cy="1207008"/>
+            <a:off x="7543800" y="1325880"/>
+            <a:ext cx="3611880" cy="1261872"/>
           </a:xfrm>
           <a:prstGeom prst="roundRect">
             <a:avLst>
-              <a:gd name="adj" fmla="val 9091"/>
+              <a:gd name="adj" fmla="val 8696"/>
             </a:avLst>
           </a:prstGeom>
           <a:solidFill>
@@ -16951,8 +16955,8 @@
         </p:nvSpPr>
         <p:spPr>
           <a:xfrm>
-            <a:off x="7799832" y="1472184"/>
-            <a:ext cx="3145536" cy="256032"/>
+            <a:off x="7708392" y="1453896"/>
+            <a:ext cx="3282696" cy="228600"/>
           </a:xfrm>
           <a:prstGeom prst="rect">
             <a:avLst/>
@@ -16968,7 +16972,7 @@
               <a:buNone/>
             </a:pPr>
             <a:r>
-              <a:rPr lang="en-US" sz="1300" b="1" dirty="0">
+              <a:rPr lang="en-US" sz="1220" b="1" dirty="0">
                 <a:solidFill>
                   <a:srgbClr val="0068B7"/>
                 </a:solidFill>
@@ -16978,7 +16982,7 @@
               </a:rPr>
               <a:t>Governance lens</a:t>
             </a:r>
-            <a:endParaRPr lang="en-US" sz="1300" dirty="0"/>
+            <a:endParaRPr lang="en-US" sz="1220" dirty="0"/>
           </a:p>
         </p:txBody>
       </p:sp>
@@ -16990,8 +16994,8 @@
         </p:nvSpPr>
         <p:spPr>
           <a:xfrm>
-            <a:off x="7799832" y="1801368"/>
-            <a:ext cx="3145536" cy="640080"/>
+            <a:off x="7708392" y="1764792"/>
+            <a:ext cx="3282696" cy="749808"/>
           </a:xfrm>
           <a:prstGeom prst="rect">
             <a:avLst/>
@@ -17009,7 +17013,7 @@
               <a:buNone/>
             </a:pPr>
             <a:r>
-              <a:rPr lang="en-US" sz="1320" dirty="0">
+              <a:rPr lang="en-US" sz="1220" dirty="0">
                 <a:solidFill>
                   <a:srgbClr val="17364A"/>
                 </a:solidFill>
@@ -17017,9 +17021,9 @@
                 <a:ea typeface="Aptos" pitchFamily="34" charset="-122"/>
                 <a:cs typeface="Aptos" pitchFamily="34" charset="-120"/>
               </a:rPr>
-              <a:t>This module provides national-level training guidance for public health agencies and.</a:t>
-            </a:r>
-            <a:endParaRPr lang="en-US" sz="1320" dirty="0"/>
+              <a:t>This module provides national-level training guidance for public health agencies.</a:t>
+            </a:r>
+            <a:endParaRPr lang="en-US" sz="1220" dirty="0"/>
           </a:p>
         </p:txBody>
       </p:sp>
@@ -17031,12 +17035,12 @@
         </p:nvSpPr>
         <p:spPr>
           <a:xfrm>
-            <a:off x="7635240" y="2670048"/>
-            <a:ext cx="3474720" cy="1377086"/>
+            <a:off x="7543800" y="2724912"/>
+            <a:ext cx="3611880" cy="1527048"/>
           </a:xfrm>
           <a:prstGeom prst="roundRect">
             <a:avLst>
-              <a:gd name="adj" fmla="val 7968"/>
+              <a:gd name="adj" fmla="val 7186"/>
             </a:avLst>
           </a:prstGeom>
           <a:solidFill>
@@ -17058,24 +17062,26 @@
         </p:nvSpPr>
         <p:spPr>
           <a:xfrm>
-            <a:off x="7799832" y="2798064"/>
-            <a:ext cx="3145536" cy="237744"/>
-          </a:xfrm>
-          <a:prstGeom prst="rect">
-            <a:avLst/>
-          </a:prstGeom>
-          <a:noFill/>
-          <a:ln/>
-        </p:spPr>
-        <p:txBody>
-          <a:bodyPr wrap="square" lIns="0" tIns="0" rIns="0" bIns="0" rtlCol="0" anchor="ctr"/>
-          <a:lstStyle/>
-          <a:p>
-            <a:pPr indent="0" marL="0">
-              <a:buNone/>
-            </a:pPr>
-            <a:r>
-              <a:rPr lang="en-US" sz="1250" b="1" dirty="0">
+            <a:off x="7708392" y="2852928"/>
+            <a:ext cx="3282696" cy="219456"/>
+          </a:xfrm>
+          <a:prstGeom prst="rect">
+            <a:avLst/>
+          </a:prstGeom>
+          <a:noFill/>
+          <a:ln/>
+        </p:spPr>
+        <p:txBody>
+          <a:bodyPr wrap="square" lIns="0" tIns="0" rIns="0" bIns="0" rtlCol="0" anchor="ctr">
+            <a:normAutofit/>
+          </a:bodyPr>
+          <a:lstStyle/>
+          <a:p>
+            <a:pPr indent="0" marL="0">
+              <a:buNone/>
+            </a:pPr>
+            <a:r>
+              <a:rPr lang="en-US" sz="1160" b="1" dirty="0">
                 <a:solidFill>
                   <a:srgbClr val="0068B7"/>
                 </a:solidFill>
@@ -17085,7 +17091,7 @@
               </a:rPr>
               <a:t>Governance pathway</a:t>
             </a:r>
-            <a:endParaRPr lang="en-US" sz="1250" dirty="0"/>
+            <a:endParaRPr lang="en-US" sz="1160" dirty="0"/>
           </a:p>
         </p:txBody>
       </p:sp>
@@ -17097,7 +17103,7 @@
         </p:nvSpPr>
         <p:spPr>
           <a:xfrm>
-            <a:off x="8763000" y="3351276"/>
+            <a:off x="8717280" y="3406140"/>
             <a:ext cx="164592" cy="0"/>
           </a:xfrm>
           <a:prstGeom prst="line">
@@ -17120,8 +17126,8 @@
         </p:nvSpPr>
         <p:spPr>
           <a:xfrm>
-            <a:off x="7872984" y="3200400"/>
-            <a:ext cx="890016" cy="301752"/>
+            <a:off x="7781544" y="3255264"/>
+            <a:ext cx="935736" cy="301752"/>
           </a:xfrm>
           <a:prstGeom prst="roundRect">
             <a:avLst>
@@ -17147,8 +17153,8 @@
         </p:nvSpPr>
         <p:spPr>
           <a:xfrm>
-            <a:off x="7909560" y="3273552"/>
-            <a:ext cx="816864" cy="146304"/>
+            <a:off x="7818120" y="3328416"/>
+            <a:ext cx="862584" cy="146304"/>
           </a:xfrm>
           <a:prstGeom prst="rect">
             <a:avLst/>
@@ -17188,7 +17194,7 @@
         </p:nvSpPr>
         <p:spPr>
           <a:xfrm>
-            <a:off x="9817608" y="3351276"/>
+            <a:off x="9817608" y="3406140"/>
             <a:ext cx="164592" cy="0"/>
           </a:xfrm>
           <a:prstGeom prst="line">
@@ -17211,8 +17217,8 @@
         </p:nvSpPr>
         <p:spPr>
           <a:xfrm>
-            <a:off x="8927592" y="3200400"/>
-            <a:ext cx="890016" cy="301752"/>
+            <a:off x="8881872" y="3255264"/>
+            <a:ext cx="935736" cy="301752"/>
           </a:xfrm>
           <a:prstGeom prst="roundRect">
             <a:avLst>
@@ -17238,8 +17244,8 @@
         </p:nvSpPr>
         <p:spPr>
           <a:xfrm>
-            <a:off x="8964168" y="3273552"/>
-            <a:ext cx="816864" cy="146304"/>
+            <a:off x="8918448" y="3328416"/>
+            <a:ext cx="862584" cy="146304"/>
           </a:xfrm>
           <a:prstGeom prst="rect">
             <a:avLst/>
@@ -17279,8 +17285,8 @@
         </p:nvSpPr>
         <p:spPr>
           <a:xfrm>
-            <a:off x="9982200" y="3200400"/>
-            <a:ext cx="890016" cy="301752"/>
+            <a:off x="9982200" y="3255264"/>
+            <a:ext cx="935736" cy="301752"/>
           </a:xfrm>
           <a:prstGeom prst="roundRect">
             <a:avLst>
@@ -17306,8 +17312,8 @@
         </p:nvSpPr>
         <p:spPr>
           <a:xfrm>
-            <a:off x="10018776" y="3273552"/>
-            <a:ext cx="816864" cy="146304"/>
+            <a:off x="10018776" y="3328416"/>
+            <a:ext cx="862584" cy="146304"/>
           </a:xfrm>
           <a:prstGeom prst="rect">
             <a:avLst/>
@@ -17347,8 +17353,8 @@
         </p:nvSpPr>
         <p:spPr>
           <a:xfrm>
-            <a:off x="7854696" y="3694176"/>
-            <a:ext cx="3035808" cy="206654"/>
+            <a:off x="7763256" y="3749040"/>
+            <a:ext cx="3172968" cy="356616"/>
           </a:xfrm>
           <a:prstGeom prst="rect">
             <a:avLst/>
@@ -17366,7 +17372,7 @@
               <a:buNone/>
             </a:pPr>
             <a:r>
-              <a:rPr lang="en-US" sz="1120" dirty="0">
+              <a:rPr lang="en-US" sz="1040" dirty="0">
                 <a:solidFill>
                   <a:srgbClr val="17364A"/>
                 </a:solidFill>
@@ -17374,9 +17380,9 @@
                 <a:ea typeface="Aptos" pitchFamily="34" charset="-122"/>
                 <a:cs typeface="Aptos" pitchFamily="34" charset="-120"/>
               </a:rPr>
-              <a:t>A proposed AI use should move through documented review before it becomes an operational workflow.</a:t>
-            </a:r>
-            <a:endParaRPr lang="en-US" sz="1120" dirty="0"/>
+              <a:t>A proposed AI use should move through documented review before it.</a:t>
+            </a:r>
+            <a:endParaRPr lang="en-US" sz="1040" dirty="0"/>
           </a:p>
         </p:txBody>
       </p:sp>
@@ -17388,12 +17394,12 @@
         </p:nvSpPr>
         <p:spPr>
           <a:xfrm>
-            <a:off x="7635240" y="4184294"/>
-            <a:ext cx="3474720" cy="1466698"/>
+            <a:off x="7543800" y="4389120"/>
+            <a:ext cx="3611880" cy="1261872"/>
           </a:xfrm>
           <a:prstGeom prst="roundRect">
             <a:avLst>
-              <a:gd name="adj" fmla="val 7481"/>
+              <a:gd name="adj" fmla="val 8696"/>
             </a:avLst>
           </a:prstGeom>
           <a:solidFill>
@@ -17415,8 +17421,8 @@
         </p:nvSpPr>
         <p:spPr>
           <a:xfrm>
-            <a:off x="7799832" y="4330598"/>
-            <a:ext cx="3145536" cy="256032"/>
+            <a:off x="7708392" y="4517136"/>
+            <a:ext cx="3282696" cy="228600"/>
           </a:xfrm>
           <a:prstGeom prst="rect">
             <a:avLst/>
@@ -17432,7 +17438,7 @@
               <a:buNone/>
             </a:pPr>
             <a:r>
-              <a:rPr lang="en-US" sz="1300" b="1" dirty="0">
+              <a:rPr lang="en-US" sz="1220" b="1" dirty="0">
                 <a:solidFill>
                   <a:srgbClr val="0068B7"/>
                 </a:solidFill>
@@ -17442,7 +17448,7 @@
               </a:rPr>
               <a:t>What to document</a:t>
             </a:r>
-            <a:endParaRPr lang="en-US" sz="1300" dirty="0"/>
+            <a:endParaRPr lang="en-US" sz="1220" dirty="0"/>
           </a:p>
         </p:txBody>
       </p:sp>
@@ -17454,8 +17460,8 @@
         </p:nvSpPr>
         <p:spPr>
           <a:xfrm>
-            <a:off x="7799832" y="4659782"/>
-            <a:ext cx="3145536" cy="899770"/>
+            <a:off x="7708392" y="4828032"/>
+            <a:ext cx="3282696" cy="749808"/>
           </a:xfrm>
           <a:prstGeom prst="rect">
             <a:avLst/>
@@ -17473,7 +17479,7 @@
               <a:buNone/>
             </a:pPr>
             <a:r>
-              <a:rPr lang="en-US" sz="1320" dirty="0">
+              <a:rPr lang="en-US" sz="1220" dirty="0">
                 <a:solidFill>
                   <a:srgbClr val="17364A"/>
                 </a:solidFill>
@@ -17481,9 +17487,9 @@
                 <a:ea typeface="Aptos" pitchFamily="34" charset="-122"/>
                 <a:cs typeface="Aptos" pitchFamily="34" charset="-120"/>
               </a:rPr>
-              <a:t>Translate this concept into clear decision rights, review steps, documentation expectations, and escalation paths before an AI-supported workflow is approved.</a:t>
-            </a:r>
-            <a:endParaRPr lang="en-US" sz="1320" dirty="0"/>
+              <a:t>Translate this concept into clear decision rights, review steps, documentation.</a:t>
+            </a:r>
+            <a:endParaRPr lang="en-US" sz="1220" dirty="0"/>
           </a:p>
         </p:txBody>
       </p:sp>
@@ -17774,8 +17780,8 @@
         </p:nvSpPr>
         <p:spPr>
           <a:xfrm>
-            <a:off x="868680" y="1508760"/>
-            <a:ext cx="6309360" cy="4160520"/>
+            <a:off x="822960" y="1463040"/>
+            <a:ext cx="6565392" cy="4343400"/>
           </a:xfrm>
           <a:prstGeom prst="rect">
             <a:avLst/>
@@ -17793,7 +17799,7 @@
               <a:buNone/>
             </a:pPr>
             <a:r>
-              <a:rPr lang="en-US" sz="2100" dirty="0">
+              <a:rPr lang="en-US" sz="1920" dirty="0">
                 <a:solidFill>
                   <a:srgbClr val="003A63"/>
                 </a:solidFill>
@@ -17803,14 +17809,14 @@
               </a:rPr>
               <a:t>• A health department uses an AI tool to help classify public inquiries.</a:t>
             </a:r>
-            <a:endParaRPr lang="en-US" sz="2100" dirty="0"/>
-          </a:p>
-          <a:p>
-            <a:pPr indent="0" marL="0">
-              <a:buNone/>
-            </a:pPr>
-            <a:r>
-              <a:rPr lang="en-US" sz="2100" dirty="0">
+            <a:endParaRPr lang="en-US" sz="1920" dirty="0"/>
+          </a:p>
+          <a:p>
+            <a:pPr indent="0" marL="0">
+              <a:buNone/>
+            </a:pPr>
+            <a:r>
+              <a:rPr lang="en-US" sz="1920" dirty="0">
                 <a:solidFill>
                   <a:srgbClr val="003A63"/>
                 </a:solidFill>
@@ -17818,16 +17824,16 @@
                 <a:ea typeface="Aptos" pitchFamily="34" charset="-122"/>
                 <a:cs typeface="Aptos" pitchFamily="34" charset="-120"/>
               </a:rPr>
-              <a:t>• Six months later, a concern is raised that the tool may be misclassifying language access.</a:t>
-            </a:r>
-            <a:endParaRPr lang="en-US" sz="2100" dirty="0"/>
-          </a:p>
-          <a:p>
-            <a:pPr indent="0" marL="0">
-              <a:buNone/>
-            </a:pPr>
-            <a:r>
-              <a:rPr lang="en-US" sz="2100" dirty="0">
+              <a:t>• Six months later, a concern is raised that the tool may be misclassifying.</a:t>
+            </a:r>
+            <a:endParaRPr lang="en-US" sz="1920" dirty="0"/>
+          </a:p>
+          <a:p>
+            <a:pPr indent="0" marL="0">
+              <a:buNone/>
+            </a:pPr>
+            <a:r>
+              <a:rPr lang="en-US" sz="1920" dirty="0">
                 <a:solidFill>
                   <a:srgbClr val="003A63"/>
                 </a:solidFill>
@@ -17835,9 +17841,9 @@
                 <a:ea typeface="Aptos" pitchFamily="34" charset="-122"/>
                 <a:cs typeface="Aptos" pitchFamily="34" charset="-120"/>
               </a:rPr>
-              <a:t>• Audit-ready evidence would include the approved use case, validation plan, subgroup review,.</a:t>
-            </a:r>
-            <a:endParaRPr lang="en-US" sz="2100" dirty="0"/>
+              <a:t>• Audit-ready evidence would include the approved use case, validation plan,.</a:t>
+            </a:r>
+            <a:endParaRPr lang="en-US" sz="1920" dirty="0"/>
           </a:p>
         </p:txBody>
       </p:sp>
@@ -17849,12 +17855,12 @@
         </p:nvSpPr>
         <p:spPr>
           <a:xfrm>
-            <a:off x="7635240" y="1325880"/>
-            <a:ext cx="3474720" cy="1207008"/>
+            <a:off x="7543800" y="1325880"/>
+            <a:ext cx="3611880" cy="1261872"/>
           </a:xfrm>
           <a:prstGeom prst="roundRect">
             <a:avLst>
-              <a:gd name="adj" fmla="val 9091"/>
+              <a:gd name="adj" fmla="val 8696"/>
             </a:avLst>
           </a:prstGeom>
           <a:solidFill>
@@ -17876,8 +17882,8 @@
         </p:nvSpPr>
         <p:spPr>
           <a:xfrm>
-            <a:off x="7799832" y="1472184"/>
-            <a:ext cx="3145536" cy="256032"/>
+            <a:off x="7708392" y="1453896"/>
+            <a:ext cx="3282696" cy="228600"/>
           </a:xfrm>
           <a:prstGeom prst="rect">
             <a:avLst/>
@@ -17893,7 +17899,7 @@
               <a:buNone/>
             </a:pPr>
             <a:r>
-              <a:rPr lang="en-US" sz="1300" b="1" dirty="0">
+              <a:rPr lang="en-US" sz="1220" b="1" dirty="0">
                 <a:solidFill>
                   <a:srgbClr val="0068B7"/>
                 </a:solidFill>
@@ -17903,7 +17909,7 @@
               </a:rPr>
               <a:t>Core concept</a:t>
             </a:r>
-            <a:endParaRPr lang="en-US" sz="1300" dirty="0"/>
+            <a:endParaRPr lang="en-US" sz="1220" dirty="0"/>
           </a:p>
         </p:txBody>
       </p:sp>
@@ -17915,8 +17921,8 @@
         </p:nvSpPr>
         <p:spPr>
           <a:xfrm>
-            <a:off x="7799832" y="1801368"/>
-            <a:ext cx="3145536" cy="640080"/>
+            <a:off x="7708392" y="1764792"/>
+            <a:ext cx="3282696" cy="749808"/>
           </a:xfrm>
           <a:prstGeom prst="rect">
             <a:avLst/>
@@ -17934,7 +17940,7 @@
               <a:buNone/>
             </a:pPr>
             <a:r>
-              <a:rPr lang="en-US" sz="1320" dirty="0">
+              <a:rPr lang="en-US" sz="1220" dirty="0">
                 <a:solidFill>
                   <a:srgbClr val="17364A"/>
                 </a:solidFill>
@@ -17944,7 +17950,7 @@
               </a:rPr>
               <a:t>A health department uses an AI tool to help classify public inquiries.</a:t>
             </a:r>
-            <a:endParaRPr lang="en-US" sz="1320" dirty="0"/>
+            <a:endParaRPr lang="en-US" sz="1220" dirty="0"/>
           </a:p>
         </p:txBody>
       </p:sp>
@@ -17956,12 +17962,12 @@
         </p:nvSpPr>
         <p:spPr>
           <a:xfrm>
-            <a:off x="7635240" y="2670048"/>
-            <a:ext cx="3474720" cy="1377086"/>
+            <a:off x="7543800" y="2724912"/>
+            <a:ext cx="3611880" cy="1527048"/>
           </a:xfrm>
           <a:prstGeom prst="roundRect">
             <a:avLst>
-              <a:gd name="adj" fmla="val 7968"/>
+              <a:gd name="adj" fmla="val 7186"/>
             </a:avLst>
           </a:prstGeom>
           <a:solidFill>
@@ -17983,8 +17989,8 @@
         </p:nvSpPr>
         <p:spPr>
           <a:xfrm>
-            <a:off x="7799832" y="2816352"/>
-            <a:ext cx="3145536" cy="256032"/>
+            <a:off x="7708392" y="2852928"/>
+            <a:ext cx="3282696" cy="228600"/>
           </a:xfrm>
           <a:prstGeom prst="rect">
             <a:avLst/>
@@ -18000,7 +18006,7 @@
               <a:buNone/>
             </a:pPr>
             <a:r>
-              <a:rPr lang="en-US" sz="1300" b="1" dirty="0">
+              <a:rPr lang="en-US" sz="1220" b="1" dirty="0">
                 <a:solidFill>
                   <a:srgbClr val="0068B7"/>
                 </a:solidFill>
@@ -18010,7 +18016,7 @@
               </a:rPr>
               <a:t>Concept checkpoints</a:t>
             </a:r>
-            <a:endParaRPr lang="en-US" sz="1300" dirty="0"/>
+            <a:endParaRPr lang="en-US" sz="1220" dirty="0"/>
           </a:p>
         </p:txBody>
       </p:sp>
@@ -18022,8 +18028,8 @@
         </p:nvSpPr>
         <p:spPr>
           <a:xfrm>
-            <a:off x="7818120" y="3182112"/>
-            <a:ext cx="3090672" cy="718718"/>
+            <a:off x="7726680" y="3182112"/>
+            <a:ext cx="3227832" cy="960120"/>
           </a:xfrm>
           <a:prstGeom prst="rect">
             <a:avLst/>
@@ -18041,7 +18047,7 @@
               <a:buNone/>
             </a:pPr>
             <a:r>
-              <a:rPr lang="en-US" sz="1220" dirty="0">
+              <a:rPr lang="en-US" sz="1140" dirty="0">
                 <a:solidFill>
                   <a:srgbClr val="17364A"/>
                 </a:solidFill>
@@ -18049,16 +18055,16 @@
                 <a:ea typeface="Aptos" pitchFamily="34" charset="-122"/>
                 <a:cs typeface="Aptos" pitchFamily="34" charset="-120"/>
               </a:rPr>
-              <a:t>Audit-ready evidence would include the approved use case,.</a:t>
-            </a:r>
-            <a:endParaRPr lang="en-US" sz="1220" dirty="0"/>
-          </a:p>
-          <a:p>
-            <a:pPr indent="0" marL="0">
-              <a:buNone/>
-            </a:pPr>
-            <a:r>
-              <a:rPr lang="en-US" sz="1220" dirty="0">
+              <a:t>Audit-ready evidence would include the approved.</a:t>
+            </a:r>
+            <a:endParaRPr lang="en-US" sz="1140" dirty="0"/>
+          </a:p>
+          <a:p>
+            <a:pPr indent="0" marL="0">
+              <a:buNone/>
+            </a:pPr>
+            <a:r>
+              <a:rPr lang="en-US" sz="1140" dirty="0">
                 <a:solidFill>
                   <a:srgbClr val="17364A"/>
                 </a:solidFill>
@@ -18066,9 +18072,9 @@
                 <a:ea typeface="Aptos" pitchFamily="34" charset="-122"/>
                 <a:cs typeface="Aptos" pitchFamily="34" charset="-120"/>
               </a:rPr>
-              <a:t>This evidence allows the agency to investigate the concern and.</a:t>
-            </a:r>
-            <a:endParaRPr lang="en-US" sz="1220" dirty="0"/>
+              <a:t>This evidence allows the agency to investigate the.</a:t>
+            </a:r>
+            <a:endParaRPr lang="en-US" sz="1140" dirty="0"/>
           </a:p>
         </p:txBody>
       </p:sp>
@@ -18080,12 +18086,12 @@
         </p:nvSpPr>
         <p:spPr>
           <a:xfrm>
-            <a:off x="7635240" y="4184294"/>
-            <a:ext cx="3474720" cy="1466698"/>
+            <a:off x="7543800" y="4389120"/>
+            <a:ext cx="3611880" cy="1261872"/>
           </a:xfrm>
           <a:prstGeom prst="roundRect">
             <a:avLst>
-              <a:gd name="adj" fmla="val 7481"/>
+              <a:gd name="adj" fmla="val 8696"/>
             </a:avLst>
           </a:prstGeom>
           <a:solidFill>
@@ -18107,8 +18113,8 @@
         </p:nvSpPr>
         <p:spPr>
           <a:xfrm>
-            <a:off x="7799832" y="4330598"/>
-            <a:ext cx="3145536" cy="256032"/>
+            <a:off x="7708392" y="4517136"/>
+            <a:ext cx="3282696" cy="228600"/>
           </a:xfrm>
           <a:prstGeom prst="rect">
             <a:avLst/>
@@ -18124,7 +18130,7 @@
               <a:buNone/>
             </a:pPr>
             <a:r>
-              <a:rPr lang="en-US" sz="1300" b="1" dirty="0">
+              <a:rPr lang="en-US" sz="1220" b="1" dirty="0">
                 <a:solidFill>
                   <a:srgbClr val="0068B7"/>
                 </a:solidFill>
@@ -18134,7 +18140,7 @@
               </a:rPr>
               <a:t>Apply it</a:t>
             </a:r>
-            <a:endParaRPr lang="en-US" sz="1300" dirty="0"/>
+            <a:endParaRPr lang="en-US" sz="1220" dirty="0"/>
           </a:p>
         </p:txBody>
       </p:sp>
@@ -18146,8 +18152,8 @@
         </p:nvSpPr>
         <p:spPr>
           <a:xfrm>
-            <a:off x="7799832" y="4659782"/>
-            <a:ext cx="3145536" cy="899770"/>
+            <a:off x="7708392" y="4828032"/>
+            <a:ext cx="3282696" cy="749808"/>
           </a:xfrm>
           <a:prstGeom prst="rect">
             <a:avLst/>
@@ -18165,7 +18171,7 @@
               <a:buNone/>
             </a:pPr>
             <a:r>
-              <a:rPr lang="en-US" sz="1320" dirty="0">
+              <a:rPr lang="en-US" sz="1220" dirty="0">
                 <a:solidFill>
                   <a:srgbClr val="17364A"/>
                 </a:solidFill>
@@ -18173,9 +18179,9 @@
                 <a:ea typeface="Aptos" pitchFamily="34" charset="-122"/>
                 <a:cs typeface="Aptos" pitchFamily="34" charset="-120"/>
               </a:rPr>
-              <a:t>Connect the concept to public health purpose, responsible use, required safeguards, documentation, and the next action a department should take.</a:t>
-            </a:r>
-            <a:endParaRPr lang="en-US" sz="1320" dirty="0"/>
+              <a:t>Connect the concept to public health purpose, responsible use, required.</a:t>
+            </a:r>
+            <a:endParaRPr lang="en-US" sz="1220" dirty="0"/>
           </a:p>
         </p:txBody>
       </p:sp>
@@ -18466,8 +18472,8 @@
         </p:nvSpPr>
         <p:spPr>
           <a:xfrm>
-            <a:off x="868680" y="1508760"/>
-            <a:ext cx="6309360" cy="4160520"/>
+            <a:off x="822960" y="1463040"/>
+            <a:ext cx="6565392" cy="4343400"/>
           </a:xfrm>
           <a:prstGeom prst="rect">
             <a:avLst/>
@@ -18485,7 +18491,7 @@
               <a:buNone/>
             </a:pPr>
             <a:r>
-              <a:rPr lang="en-US" sz="2100" dirty="0">
+              <a:rPr lang="en-US" sz="1920" dirty="0">
                 <a:solidFill>
                   <a:srgbClr val="003A63"/>
                 </a:solidFill>
@@ -18495,14 +18501,14 @@
               </a:rPr>
               <a:t>• AI evidence begins at intake.</a:t>
             </a:r>
-            <a:endParaRPr lang="en-US" sz="2100" dirty="0"/>
-          </a:p>
-          <a:p>
-            <a:pPr indent="0" marL="0">
-              <a:buNone/>
-            </a:pPr>
-            <a:r>
-              <a:rPr lang="en-US" sz="2100" dirty="0">
+            <a:endParaRPr lang="en-US" sz="1920" dirty="0"/>
+          </a:p>
+          <a:p>
+            <a:pPr indent="0" marL="0">
+              <a:buNone/>
+            </a:pPr>
+            <a:r>
+              <a:rPr lang="en-US" sz="1920" dirty="0">
                 <a:solidFill>
                   <a:srgbClr val="003A63"/>
                 </a:solidFill>
@@ -18510,16 +18516,16 @@
                 <a:ea typeface="Aptos" pitchFamily="34" charset="-122"/>
                 <a:cs typeface="Aptos" pitchFamily="34" charset="-120"/>
               </a:rPr>
-              <a:t>• The agency should preserve the use case description, risk triage, required reviewers, approval.</a:t>
-            </a:r>
-            <a:endParaRPr lang="en-US" sz="2100" dirty="0"/>
-          </a:p>
-          <a:p>
-            <a:pPr indent="0" marL="0">
-              <a:buNone/>
-            </a:pPr>
-            <a:r>
-              <a:rPr lang="en-US" sz="2100" dirty="0">
+              <a:t>• The agency should preserve the use case description, risk triage, required.</a:t>
+            </a:r>
+            <a:endParaRPr lang="en-US" sz="1920" dirty="0"/>
+          </a:p>
+          <a:p>
+            <a:pPr indent="0" marL="0">
+              <a:buNone/>
+            </a:pPr>
+            <a:r>
+              <a:rPr lang="en-US" sz="1920" dirty="0">
                 <a:solidFill>
                   <a:srgbClr val="003A63"/>
                 </a:solidFill>
@@ -18527,9 +18533,9 @@
                 <a:ea typeface="Aptos" pitchFamily="34" charset="-122"/>
                 <a:cs typeface="Aptos" pitchFamily="34" charset="-120"/>
               </a:rPr>
-              <a:t>• If a use case is rejected or deferred, that decision should also be documented.</a:t>
-            </a:r>
-            <a:endParaRPr lang="en-US" sz="2100" dirty="0"/>
+              <a:t>• If a use case is rejected or deferred, that decision should also be.</a:t>
+            </a:r>
+            <a:endParaRPr lang="en-US" sz="1920" dirty="0"/>
           </a:p>
         </p:txBody>
       </p:sp>
@@ -18541,12 +18547,12 @@
         </p:nvSpPr>
         <p:spPr>
           <a:xfrm>
-            <a:off x="7635240" y="1325880"/>
-            <a:ext cx="3474720" cy="1207008"/>
+            <a:off x="7543800" y="1325880"/>
+            <a:ext cx="3611880" cy="1261872"/>
           </a:xfrm>
           <a:prstGeom prst="roundRect">
             <a:avLst>
-              <a:gd name="adj" fmla="val 9091"/>
+              <a:gd name="adj" fmla="val 8696"/>
             </a:avLst>
           </a:prstGeom>
           <a:solidFill>
@@ -18568,8 +18574,8 @@
         </p:nvSpPr>
         <p:spPr>
           <a:xfrm>
-            <a:off x="7799832" y="1472184"/>
-            <a:ext cx="3145536" cy="256032"/>
+            <a:off x="7708392" y="1453896"/>
+            <a:ext cx="3282696" cy="228600"/>
           </a:xfrm>
           <a:prstGeom prst="rect">
             <a:avLst/>
@@ -18585,7 +18591,7 @@
               <a:buNone/>
             </a:pPr>
             <a:r>
-              <a:rPr lang="en-US" sz="1300" b="1" dirty="0">
+              <a:rPr lang="en-US" sz="1220" b="1" dirty="0">
                 <a:solidFill>
                   <a:srgbClr val="0068B7"/>
                 </a:solidFill>
@@ -18595,7 +18601,7 @@
               </a:rPr>
               <a:t>Core concept</a:t>
             </a:r>
-            <a:endParaRPr lang="en-US" sz="1300" dirty="0"/>
+            <a:endParaRPr lang="en-US" sz="1220" dirty="0"/>
           </a:p>
         </p:txBody>
       </p:sp>
@@ -18607,8 +18613,8 @@
         </p:nvSpPr>
         <p:spPr>
           <a:xfrm>
-            <a:off x="7799832" y="1801368"/>
-            <a:ext cx="3145536" cy="640080"/>
+            <a:off x="7708392" y="1764792"/>
+            <a:ext cx="3282696" cy="749808"/>
           </a:xfrm>
           <a:prstGeom prst="rect">
             <a:avLst/>
@@ -18626,7 +18632,7 @@
               <a:buNone/>
             </a:pPr>
             <a:r>
-              <a:rPr lang="en-US" sz="1320" dirty="0">
+              <a:rPr lang="en-US" sz="1220" dirty="0">
                 <a:solidFill>
                   <a:srgbClr val="17364A"/>
                 </a:solidFill>
@@ -18636,7 +18642,7 @@
               </a:rPr>
               <a:t>AI evidence begins at intake.</a:t>
             </a:r>
-            <a:endParaRPr lang="en-US" sz="1320" dirty="0"/>
+            <a:endParaRPr lang="en-US" sz="1220" dirty="0"/>
           </a:p>
         </p:txBody>
       </p:sp>
@@ -18648,12 +18654,12 @@
         </p:nvSpPr>
         <p:spPr>
           <a:xfrm>
-            <a:off x="7635240" y="2670048"/>
-            <a:ext cx="3474720" cy="1377086"/>
+            <a:off x="7543800" y="2724912"/>
+            <a:ext cx="3611880" cy="1527048"/>
           </a:xfrm>
           <a:prstGeom prst="roundRect">
             <a:avLst>
-              <a:gd name="adj" fmla="val 7968"/>
+              <a:gd name="adj" fmla="val 7186"/>
             </a:avLst>
           </a:prstGeom>
           <a:solidFill>
@@ -18675,8 +18681,8 @@
         </p:nvSpPr>
         <p:spPr>
           <a:xfrm>
-            <a:off x="7799832" y="2816352"/>
-            <a:ext cx="3145536" cy="256032"/>
+            <a:off x="7708392" y="2852928"/>
+            <a:ext cx="3282696" cy="228600"/>
           </a:xfrm>
           <a:prstGeom prst="rect">
             <a:avLst/>
@@ -18692,7 +18698,7 @@
               <a:buNone/>
             </a:pPr>
             <a:r>
-              <a:rPr lang="en-US" sz="1300" b="1" dirty="0">
+              <a:rPr lang="en-US" sz="1220" b="1" dirty="0">
                 <a:solidFill>
                   <a:srgbClr val="0068B7"/>
                 </a:solidFill>
@@ -18702,7 +18708,7 @@
               </a:rPr>
               <a:t>Concept checkpoints</a:t>
             </a:r>
-            <a:endParaRPr lang="en-US" sz="1300" dirty="0"/>
+            <a:endParaRPr lang="en-US" sz="1220" dirty="0"/>
           </a:p>
         </p:txBody>
       </p:sp>
@@ -18714,8 +18720,8 @@
         </p:nvSpPr>
         <p:spPr>
           <a:xfrm>
-            <a:off x="7818120" y="3182112"/>
-            <a:ext cx="3090672" cy="718718"/>
+            <a:off x="7726680" y="3182112"/>
+            <a:ext cx="3227832" cy="960120"/>
           </a:xfrm>
           <a:prstGeom prst="rect">
             <a:avLst/>
@@ -18733,7 +18739,7 @@
               <a:buNone/>
             </a:pPr>
             <a:r>
-              <a:rPr lang="en-US" sz="1220" dirty="0">
+              <a:rPr lang="en-US" sz="1140" dirty="0">
                 <a:solidFill>
                   <a:srgbClr val="17364A"/>
                 </a:solidFill>
@@ -18741,16 +18747,16 @@
                 <a:ea typeface="Aptos" pitchFamily="34" charset="-122"/>
                 <a:cs typeface="Aptos" pitchFamily="34" charset="-120"/>
               </a:rPr>
-              <a:t>The agency should preserve the use case description, risk triage,.</a:t>
-            </a:r>
-            <a:endParaRPr lang="en-US" sz="1220" dirty="0"/>
-          </a:p>
-          <a:p>
-            <a:pPr indent="0" marL="0">
-              <a:buNone/>
-            </a:pPr>
-            <a:r>
-              <a:rPr lang="en-US" sz="1220" dirty="0">
+              <a:t>The agency should preserve the use case.</a:t>
+            </a:r>
+            <a:endParaRPr lang="en-US" sz="1140" dirty="0"/>
+          </a:p>
+          <a:p>
+            <a:pPr indent="0" marL="0">
+              <a:buNone/>
+            </a:pPr>
+            <a:r>
+              <a:rPr lang="en-US" sz="1140" dirty="0">
                 <a:solidFill>
                   <a:srgbClr val="17364A"/>
                 </a:solidFill>
@@ -18758,16 +18764,16 @@
                 <a:ea typeface="Aptos" pitchFamily="34" charset="-122"/>
                 <a:cs typeface="Aptos" pitchFamily="34" charset="-120"/>
               </a:rPr>
-              <a:t>These early records help explain why a tool exists and what limits.</a:t>
-            </a:r>
-            <a:endParaRPr lang="en-US" sz="1220" dirty="0"/>
-          </a:p>
-          <a:p>
-            <a:pPr indent="0" marL="0">
-              <a:buNone/>
-            </a:pPr>
-            <a:r>
-              <a:rPr lang="en-US" sz="1220" dirty="0">
+              <a:t>These early records help explain why a tool exists.</a:t>
+            </a:r>
+            <a:endParaRPr lang="en-US" sz="1140" dirty="0"/>
+          </a:p>
+          <a:p>
+            <a:pPr indent="0" marL="0">
+              <a:buNone/>
+            </a:pPr>
+            <a:r>
+              <a:rPr lang="en-US" sz="1140" dirty="0">
                 <a:solidFill>
                   <a:srgbClr val="17364A"/>
                 </a:solidFill>
@@ -18775,9 +18781,9 @@
                 <a:ea typeface="Aptos" pitchFamily="34" charset="-122"/>
                 <a:cs typeface="Aptos" pitchFamily="34" charset="-120"/>
               </a:rPr>
-              <a:t>Validation evidence should show how the agency determined whether.</a:t>
-            </a:r>
-            <a:endParaRPr lang="en-US" sz="1220" dirty="0"/>
+              <a:t>Validation evidence should show how the agency.</a:t>
+            </a:r>
+            <a:endParaRPr lang="en-US" sz="1140" dirty="0"/>
           </a:p>
         </p:txBody>
       </p:sp>
@@ -18789,12 +18795,12 @@
         </p:nvSpPr>
         <p:spPr>
           <a:xfrm>
-            <a:off x="7635240" y="4184294"/>
-            <a:ext cx="3474720" cy="1466698"/>
+            <a:off x="7543800" y="4389120"/>
+            <a:ext cx="3611880" cy="1261872"/>
           </a:xfrm>
           <a:prstGeom prst="roundRect">
             <a:avLst>
-              <a:gd name="adj" fmla="val 7481"/>
+              <a:gd name="adj" fmla="val 8696"/>
             </a:avLst>
           </a:prstGeom>
           <a:solidFill>
@@ -18816,8 +18822,8 @@
         </p:nvSpPr>
         <p:spPr>
           <a:xfrm>
-            <a:off x="7799832" y="4330598"/>
-            <a:ext cx="3145536" cy="256032"/>
+            <a:off x="7708392" y="4517136"/>
+            <a:ext cx="3282696" cy="228600"/>
           </a:xfrm>
           <a:prstGeom prst="rect">
             <a:avLst/>
@@ -18833,7 +18839,7 @@
               <a:buNone/>
             </a:pPr>
             <a:r>
-              <a:rPr lang="en-US" sz="1300" b="1" dirty="0">
+              <a:rPr lang="en-US" sz="1220" b="1" dirty="0">
                 <a:solidFill>
                   <a:srgbClr val="0068B7"/>
                 </a:solidFill>
@@ -18843,7 +18849,7 @@
               </a:rPr>
               <a:t>Apply it</a:t>
             </a:r>
-            <a:endParaRPr lang="en-US" sz="1300" dirty="0"/>
+            <a:endParaRPr lang="en-US" sz="1220" dirty="0"/>
           </a:p>
         </p:txBody>
       </p:sp>
@@ -18855,8 +18861,8 @@
         </p:nvSpPr>
         <p:spPr>
           <a:xfrm>
-            <a:off x="7799832" y="4659782"/>
-            <a:ext cx="3145536" cy="899770"/>
+            <a:off x="7708392" y="4828032"/>
+            <a:ext cx="3282696" cy="749808"/>
           </a:xfrm>
           <a:prstGeom prst="rect">
             <a:avLst/>
@@ -18874,7 +18880,7 @@
               <a:buNone/>
             </a:pPr>
             <a:r>
-              <a:rPr lang="en-US" sz="1320" dirty="0">
+              <a:rPr lang="en-US" sz="1220" dirty="0">
                 <a:solidFill>
                   <a:srgbClr val="17364A"/>
                 </a:solidFill>
@@ -18882,9 +18888,9 @@
                 <a:ea typeface="Aptos" pitchFamily="34" charset="-122"/>
                 <a:cs typeface="Aptos" pitchFamily="34" charset="-120"/>
               </a:rPr>
-              <a:t>Connect the concept to public health purpose, responsible use, required safeguards, documentation, and the next action a department should take.</a:t>
-            </a:r>
-            <a:endParaRPr lang="en-US" sz="1320" dirty="0"/>
+              <a:t>Connect the concept to public health purpose, responsible use, required.</a:t>
+            </a:r>
+            <a:endParaRPr lang="en-US" sz="1220" dirty="0"/>
           </a:p>
         </p:txBody>
       </p:sp>

--- a/downloads/presentations/modules/gov-340.pptx
+++ b/downloads/presentations/modules/gov-340.pptx
@@ -12182,7 +12182,7 @@
                 <a:ea typeface="Aptos" pitchFamily="34" charset="-122"/>
                 <a:cs typeface="Aptos" pitchFamily="34" charset="-120"/>
               </a:rPr>
-              <a:t>• 1. What is AI audit readiness?</a:t>
+              <a:t>1. What is AI audit readiness?</a:t>
             </a:r>
             <a:endParaRPr lang="en-US" sz="1920" dirty="0"/>
           </a:p>
@@ -12199,7 +12199,7 @@
                 <a:ea typeface="Aptos" pitchFamily="34" charset="-122"/>
                 <a:cs typeface="Aptos" pitchFamily="34" charset="-120"/>
               </a:rPr>
-              <a:t>• 2. Which record should be preserved from AI governance review?</a:t>
+              <a:t>2. Which record should be preserved from AI governance review?</a:t>
             </a:r>
             <a:endParaRPr lang="en-US" sz="1920" dirty="0"/>
           </a:p>
@@ -12216,7 +12216,7 @@
                 <a:ea typeface="Aptos" pitchFamily="34" charset="-122"/>
                 <a:cs typeface="Aptos" pitchFamily="34" charset="-120"/>
               </a:rPr>
-              <a:t>• 3. What is validation evidence?</a:t>
+              <a:t>3. What is validation evidence?</a:t>
             </a:r>
             <a:endParaRPr lang="en-US" sz="1920" dirty="0"/>
           </a:p>
@@ -12323,7 +12323,7 @@
                 <a:ea typeface="Aptos" pitchFamily="34" charset="-122"/>
                 <a:cs typeface="Aptos" pitchFamily="34" charset="-120"/>
               </a:rPr>
-              <a:t>1. What is AI audit readiness?</a:t>
+              <a:t>What is AI audit readiness?</a:t>
             </a:r>
             <a:endParaRPr lang="en-US" sz="1220" dirty="0"/>
           </a:p>
@@ -12430,41 +12430,7 @@
                 <a:ea typeface="Aptos" pitchFamily="34" charset="-122"/>
                 <a:cs typeface="Aptos" pitchFamily="34" charset="-120"/>
               </a:rPr>
-              <a:t>1.</a:t>
-            </a:r>
-            <a:endParaRPr lang="en-US" sz="1140" dirty="0"/>
-          </a:p>
-          <a:p>
-            <a:pPr indent="0" marL="0">
-              <a:buNone/>
-            </a:pPr>
-            <a:r>
-              <a:rPr lang="en-US" sz="1140" dirty="0">
-                <a:solidFill>
-                  <a:srgbClr val="17364A"/>
-                </a:solidFill>
-                <a:latin typeface="Aptos" pitchFamily="34" charset="0"/>
-                <a:ea typeface="Aptos" pitchFamily="34" charset="-122"/>
-                <a:cs typeface="Aptos" pitchFamily="34" charset="-120"/>
-              </a:rPr>
               <a:t>What is AI audit readiness?</a:t>
-            </a:r>
-            <a:endParaRPr lang="en-US" sz="1140" dirty="0"/>
-          </a:p>
-          <a:p>
-            <a:pPr indent="0" marL="0">
-              <a:buNone/>
-            </a:pPr>
-            <a:r>
-              <a:rPr lang="en-US" sz="1140" dirty="0">
-                <a:solidFill>
-                  <a:srgbClr val="17364A"/>
-                </a:solidFill>
-                <a:latin typeface="Aptos" pitchFamily="34" charset="0"/>
-                <a:ea typeface="Aptos" pitchFamily="34" charset="-122"/>
-                <a:cs typeface="Aptos" pitchFamily="34" charset="-120"/>
-              </a:rPr>
-              <a:t>2.</a:t>
             </a:r>
             <a:endParaRPr lang="en-US" sz="1140" dirty="0"/>
           </a:p>
